--- a/docs/milestone-1/Milestone1_Presentation.pptx
+++ b/docs/milestone-1/Milestone1_Presentation.pptx
@@ -4,19 +4,22 @@
   <p:sldMasterIdLst>
     <p:sldMasterId id="2147483648" r:id="rId1"/>
   </p:sldMasterIdLst>
+  <p:notesMasterIdLst>
+    <p:notesMasterId r:id="rId12"/>
+  </p:notesMasterIdLst>
   <p:sldIdLst>
-    <p:sldId id="256" r:id="rId7"/>
-    <p:sldId id="257" r:id="rId8"/>
-    <p:sldId id="258" r:id="rId9"/>
-    <p:sldId id="259" r:id="rId11"/>
-    <p:sldId id="260" r:id="rId12"/>
-    <p:sldId id="261" r:id="rId13"/>
-    <p:sldId id="262" r:id="rId14"/>
-    <p:sldId id="263" r:id="rId15"/>
-    <p:sldId id="264" r:id="rId16"/>
-    <p:sldId id="265" r:id="rId17"/>
+    <p:sldId id="256" r:id="rId2"/>
+    <p:sldId id="257" r:id="rId3"/>
+    <p:sldId id="258" r:id="rId4"/>
+    <p:sldId id="259" r:id="rId5"/>
+    <p:sldId id="260" r:id="rId6"/>
+    <p:sldId id="261" r:id="rId7"/>
+    <p:sldId id="262" r:id="rId8"/>
+    <p:sldId id="263" r:id="rId9"/>
+    <p:sldId id="264" r:id="rId10"/>
+    <p:sldId id="265" r:id="rId11"/>
   </p:sldIdLst>
-  <p:sldSz cx="12191695" cy="6858000" type="screen4x3"/>
+  <p:sldSz cx="12192000" cy="6858000"/>
   <p:notesSz cx="6858000" cy="9144000"/>
   <p:defaultTextStyle>
     <a:defPPr>
@@ -113,11 +116,27 @@
       </a:defRPr>
     </a:lvl9pPr>
   </p:defaultTextStyle>
+  <p:extLst>
+    <p:ext uri="{EFAFB233-063F-42B5-8137-9DF3F51BA10A}">
+      <p15:sldGuideLst xmlns:p15="http://schemas.microsoft.com/office/powerpoint/2012/main">
+        <p15:guide id="1" orient="horz" pos="2160">
+          <p15:clr>
+            <a:srgbClr val="A4A3A4"/>
+          </p15:clr>
+        </p15:guide>
+        <p15:guide id="2" pos="2880">
+          <p15:clr>
+            <a:srgbClr val="A4A3A4"/>
+          </p15:clr>
+        </p15:guide>
+      </p15:sldGuideLst>
+    </p:ext>
+  </p:extLst>
 </p:presentation>
 </file>
 
 <file path=ppt/notesMasters/notesMaster1.xml><?xml version="1.0" encoding="utf-8"?>
-<p:notesMaster xmlns:a="http://schemas.openxmlformats.org/drawingml/2006/main" xmlns:p="http://schemas.openxmlformats.org/presentationml/2006/main" xmlns:r="http://schemas.openxmlformats.org/officeDocument/2006/relationships">
+<p:notesMaster xmlns:a="http://schemas.openxmlformats.org/drawingml/2006/main" xmlns:r="http://schemas.openxmlformats.org/officeDocument/2006/relationships" xmlns:p="http://schemas.openxmlformats.org/presentationml/2006/main">
   <p:cSld>
     <p:bg>
       <p:bgRef idx="1001">
@@ -151,7 +170,7 @@
         <p:spPr>
           <a:xfrm>
             <a:off x="0" y="0"/>
-            <a:ext cx="2971800" cy="457200"/>
+            <a:ext cx="2971800" cy="458788"/>
           </a:xfrm>
           <a:prstGeom prst="rect">
             <a:avLst/>
@@ -182,7 +201,7 @@
         <p:spPr>
           <a:xfrm>
             <a:off x="3884613" y="0"/>
-            <a:ext cx="2971800" cy="457200"/>
+            <a:ext cx="2971800" cy="458788"/>
           </a:xfrm>
           <a:prstGeom prst="rect">
             <a:avLst/>
@@ -196,9 +215,9 @@
             </a:lvl1pPr>
           </a:lstStyle>
           <a:p>
-            <a:fld id="{0F89C1C7-3DCD-1040-A9CF-14679D8B5DDD}" type="datetimeFigureOut">
+            <a:fld id="{F0D764D0-6DFC-449A-9576-65BEDBFD47E7}" type="datetimeFigureOut">
               <a:rPr lang="en-US" smtClean="0"/>
-              <a:t>10/17/16</a:t>
+              <a:t>10/21/2026</a:t>
             </a:fld>
             <a:endParaRPr lang="en-US"/>
           </a:p>
@@ -216,8 +235,8 @@
         </p:nvSpPr>
         <p:spPr>
           <a:xfrm>
-            <a:off x="1143000" y="685800"/>
-            <a:ext cx="4572000" cy="3429000"/>
+            <a:off x="685800" y="1143000"/>
+            <a:ext cx="5486400" cy="3086100"/>
           </a:xfrm>
           <a:prstGeom prst="rect">
             <a:avLst/>
@@ -249,8 +268,8 @@
         </p:nvSpPr>
         <p:spPr>
           <a:xfrm>
-            <a:off x="685800" y="4343400"/>
-            <a:ext cx="5486400" cy="4114800"/>
+            <a:off x="685800" y="4400550"/>
+            <a:ext cx="5486400" cy="3600450"/>
           </a:xfrm>
           <a:prstGeom prst="rect">
             <a:avLst/>
@@ -262,38 +281,37 @@
           <a:p>
             <a:pPr lvl="0"/>
             <a:r>
-              <a:rPr lang="en-US" smtClean="0"/>
+              <a:rPr lang="en-US"/>
               <a:t>Click to edit Master text styles</a:t>
             </a:r>
           </a:p>
           <a:p>
             <a:pPr lvl="1"/>
             <a:r>
-              <a:rPr lang="en-US" smtClean="0"/>
+              <a:rPr lang="en-US"/>
               <a:t>Second level</a:t>
             </a:r>
           </a:p>
           <a:p>
             <a:pPr lvl="2"/>
             <a:r>
-              <a:rPr lang="en-US" smtClean="0"/>
+              <a:rPr lang="en-US"/>
               <a:t>Third level</a:t>
             </a:r>
           </a:p>
           <a:p>
             <a:pPr lvl="3"/>
             <a:r>
-              <a:rPr lang="en-US" smtClean="0"/>
+              <a:rPr lang="en-US"/>
               <a:t>Fourth level</a:t>
             </a:r>
           </a:p>
           <a:p>
             <a:pPr lvl="4"/>
             <a:r>
-              <a:rPr lang="en-US" smtClean="0"/>
+              <a:rPr lang="en-US"/>
               <a:t>Fifth level</a:t>
             </a:r>
-            <a:endParaRPr lang="en-US"/>
           </a:p>
         </p:txBody>
       </p:sp>
@@ -310,7 +328,7 @@
         <p:spPr>
           <a:xfrm>
             <a:off x="0" y="8685213"/>
-            <a:ext cx="2971800" cy="457200"/>
+            <a:ext cx="2971800" cy="458787"/>
           </a:xfrm>
           <a:prstGeom prst="rect">
             <a:avLst/>
@@ -341,7 +359,7 @@
         <p:spPr>
           <a:xfrm>
             <a:off x="3884613" y="8685213"/>
-            <a:ext cx="2971800" cy="457200"/>
+            <a:ext cx="2971800" cy="458787"/>
           </a:xfrm>
           <a:prstGeom prst="rect">
             <a:avLst/>
@@ -355,7 +373,7 @@
             </a:lvl1pPr>
           </a:lstStyle>
           <a:p>
-            <a:fld id="{BB5E49A5-4136-284D-997B-48E1D791AD67}" type="slidenum">
+            <a:fld id="{B77CF2F3-96C9-4F4E-8F28-21061CAD028D}" type="slidenum">
               <a:rPr lang="en-US" smtClean="0"/>
               <a:t>‹#›</a:t>
             </a:fld>
@@ -366,13 +384,13 @@
     </p:spTree>
     <p:extLst>
       <p:ext uri="{BB962C8B-B14F-4D97-AF65-F5344CB8AC3E}">
-        <p14:creationId xmlns:p14="http://schemas.microsoft.com/office/powerpoint/2010/main" val="2623252185"/>
+        <p14:creationId xmlns:p14="http://schemas.microsoft.com/office/powerpoint/2010/main" val="3686842098"/>
       </p:ext>
     </p:extLst>
   </p:cSld>
   <p:clrMap bg1="lt1" tx1="dk1" bg2="lt2" tx2="dk2" accent1="accent1" accent2="accent2" accent3="accent3" accent4="accent4" accent5="accent5" accent6="accent6" hlink="hlink" folHlink="folHlink"/>
   <p:notesStyle>
-    <a:lvl1pPr marL="0" algn="l" defTabSz="457200" rtl="0" eaLnBrk="1" latinLnBrk="0" hangingPunct="1">
+    <a:lvl1pPr marL="0" algn="l" defTabSz="914400" rtl="0" eaLnBrk="1" latinLnBrk="0" hangingPunct="1">
       <a:defRPr sz="1200" kern="1200">
         <a:solidFill>
           <a:schemeClr val="tx1"/>
@@ -382,7 +400,7 @@
         <a:cs typeface="+mn-cs"/>
       </a:defRPr>
     </a:lvl1pPr>
-    <a:lvl2pPr marL="457200" algn="l" defTabSz="457200" rtl="0" eaLnBrk="1" latinLnBrk="0" hangingPunct="1">
+    <a:lvl2pPr marL="457200" algn="l" defTabSz="914400" rtl="0" eaLnBrk="1" latinLnBrk="0" hangingPunct="1">
       <a:defRPr sz="1200" kern="1200">
         <a:solidFill>
           <a:schemeClr val="tx1"/>
@@ -392,7 +410,7 @@
         <a:cs typeface="+mn-cs"/>
       </a:defRPr>
     </a:lvl2pPr>
-    <a:lvl3pPr marL="914400" algn="l" defTabSz="457200" rtl="0" eaLnBrk="1" latinLnBrk="0" hangingPunct="1">
+    <a:lvl3pPr marL="914400" algn="l" defTabSz="914400" rtl="0" eaLnBrk="1" latinLnBrk="0" hangingPunct="1">
       <a:defRPr sz="1200" kern="1200">
         <a:solidFill>
           <a:schemeClr val="tx1"/>
@@ -402,7 +420,7 @@
         <a:cs typeface="+mn-cs"/>
       </a:defRPr>
     </a:lvl3pPr>
-    <a:lvl4pPr marL="1371600" algn="l" defTabSz="457200" rtl="0" eaLnBrk="1" latinLnBrk="0" hangingPunct="1">
+    <a:lvl4pPr marL="1371600" algn="l" defTabSz="914400" rtl="0" eaLnBrk="1" latinLnBrk="0" hangingPunct="1">
       <a:defRPr sz="1200" kern="1200">
         <a:solidFill>
           <a:schemeClr val="tx1"/>
@@ -412,7 +430,7 @@
         <a:cs typeface="+mn-cs"/>
       </a:defRPr>
     </a:lvl4pPr>
-    <a:lvl5pPr marL="1828800" algn="l" defTabSz="457200" rtl="0" eaLnBrk="1" latinLnBrk="0" hangingPunct="1">
+    <a:lvl5pPr marL="1828800" algn="l" defTabSz="914400" rtl="0" eaLnBrk="1" latinLnBrk="0" hangingPunct="1">
       <a:defRPr sz="1200" kern="1200">
         <a:solidFill>
           <a:schemeClr val="tx1"/>
@@ -422,7 +440,7 @@
         <a:cs typeface="+mn-cs"/>
       </a:defRPr>
     </a:lvl5pPr>
-    <a:lvl6pPr marL="2286000" algn="l" defTabSz="457200" rtl="0" eaLnBrk="1" latinLnBrk="0" hangingPunct="1">
+    <a:lvl6pPr marL="2286000" algn="l" defTabSz="914400" rtl="0" eaLnBrk="1" latinLnBrk="0" hangingPunct="1">
       <a:defRPr sz="1200" kern="1200">
         <a:solidFill>
           <a:schemeClr val="tx1"/>
@@ -432,7 +450,7 @@
         <a:cs typeface="+mn-cs"/>
       </a:defRPr>
     </a:lvl6pPr>
-    <a:lvl7pPr marL="2743200" algn="l" defTabSz="457200" rtl="0" eaLnBrk="1" latinLnBrk="0" hangingPunct="1">
+    <a:lvl7pPr marL="2743200" algn="l" defTabSz="914400" rtl="0" eaLnBrk="1" latinLnBrk="0" hangingPunct="1">
       <a:defRPr sz="1200" kern="1200">
         <a:solidFill>
           <a:schemeClr val="tx1"/>
@@ -442,7 +460,7 @@
         <a:cs typeface="+mn-cs"/>
       </a:defRPr>
     </a:lvl7pPr>
-    <a:lvl8pPr marL="3200400" algn="l" defTabSz="457200" rtl="0" eaLnBrk="1" latinLnBrk="0" hangingPunct="1">
+    <a:lvl8pPr marL="3200400" algn="l" defTabSz="914400" rtl="0" eaLnBrk="1" latinLnBrk="0" hangingPunct="1">
       <a:defRPr sz="1200" kern="1200">
         <a:solidFill>
           <a:schemeClr val="tx1"/>
@@ -452,7 +470,7 @@
         <a:cs typeface="+mn-cs"/>
       </a:defRPr>
     </a:lvl8pPr>
-    <a:lvl9pPr marL="3657600" algn="l" defTabSz="457200" rtl="0" eaLnBrk="1" latinLnBrk="0" hangingPunct="1">
+    <a:lvl9pPr marL="3657600" algn="l" defTabSz="914400" rtl="0" eaLnBrk="1" latinLnBrk="0" hangingPunct="1">
       <a:defRPr sz="1200" kern="1200">
         <a:solidFill>
           <a:schemeClr val="tx1"/>
@@ -467,7 +485,7 @@
 </file>
 
 <file path=ppt/notesSlides/notesSlide1.xml><?xml version="1.0" encoding="utf-8"?>
-<p:notes xmlns:a="http://schemas.openxmlformats.org/drawingml/2006/main" xmlns:p="http://schemas.openxmlformats.org/presentationml/2006/main" xmlns:r="http://schemas.openxmlformats.org/officeDocument/2006/relationships">
+<p:notes xmlns:a="http://schemas.openxmlformats.org/drawingml/2006/main" xmlns:r="http://schemas.openxmlformats.org/officeDocument/2006/relationships" xmlns:p="http://schemas.openxmlformats.org/presentationml/2006/main">
   <p:cSld>
     <p:spTree>
       <p:nvGrpSpPr>
@@ -487,7 +505,7 @@
         <p:nvSpPr>
           <p:cNvPr id="2" name="Slide Image Placeholder 1"/>
           <p:cNvSpPr>
-            <a:spLocks noGrp="1"/>
+            <a:spLocks noGrp="1" noRot="1" noChangeAspect="1"/>
           </p:cNvSpPr>
           <p:nvPr>
             <p:ph type="sldImg" idx="2"/>
@@ -502,7 +520,7 @@
             <a:spLocks noGrp="1"/>
           </p:cNvSpPr>
           <p:nvPr>
-            <p:ph type="body" idx="3" sz="quarter"/>
+            <p:ph type="body" sz="quarter" idx="3"/>
           </p:nvPr>
         </p:nvSpPr>
         <p:spPr/>
@@ -511,7 +529,7 @@
           <a:lstStyle/>
           <a:p>
             <a:r>
-              <a:t>This follows the TA's guidance: cross-reference and propagate learning across levels.</a:t>
+              <a:t>Learning is cross-referenced and propagated across courses. Mapping to be confirmed from IITM course content.</a:t>
             </a:r>
           </a:p>
         </p:txBody>
@@ -523,7 +541,7 @@
             <a:spLocks noGrp="1"/>
           </p:cNvSpPr>
           <p:nvPr>
-            <p:ph type="sldNum" idx="5" sz="quarter"/>
+            <p:ph type="sldNum" sz="quarter" idx="5"/>
           </p:nvPr>
         </p:nvSpPr>
         <p:spPr/>
@@ -537,7 +555,7 @@
 </file>
 
 <file path=ppt/notesSlides/notesSlide2.xml><?xml version="1.0" encoding="utf-8"?>
-<p:notes xmlns:a="http://schemas.openxmlformats.org/drawingml/2006/main" xmlns:p="http://schemas.openxmlformats.org/presentationml/2006/main" xmlns:r="http://schemas.openxmlformats.org/officeDocument/2006/relationships">
+<p:notes xmlns:a="http://schemas.openxmlformats.org/drawingml/2006/main" xmlns:r="http://schemas.openxmlformats.org/officeDocument/2006/relationships" xmlns:p="http://schemas.openxmlformats.org/presentationml/2006/main">
   <p:cSld>
     <p:spTree>
       <p:nvGrpSpPr>
@@ -557,7 +575,7 @@
         <p:nvSpPr>
           <p:cNvPr id="2" name="Slide Image Placeholder 1"/>
           <p:cNvSpPr>
-            <a:spLocks noGrp="1"/>
+            <a:spLocks noGrp="1" noRot="1" noChangeAspect="1"/>
           </p:cNvSpPr>
           <p:nvPr>
             <p:ph type="sldImg" idx="2"/>
@@ -572,7 +590,7 @@
             <a:spLocks noGrp="1"/>
           </p:cNvSpPr>
           <p:nvPr>
-            <p:ph type="body" idx="3" sz="quarter"/>
+            <p:ph type="body" sz="quarter" idx="3"/>
           </p:nvPr>
         </p:nvSpPr>
         <p:spPr/>
@@ -581,7 +599,7 @@
           <a:lstStyle/>
           <a:p>
             <a:r>
-              <a:t>TA: LLM APIs only as a minor part; the main brain must be our own DL/GenAI model.</a:t>
+              <a:t>LLM APIs play only a minor part; the main brain is our own DL/GenAI models.</a:t>
             </a:r>
           </a:p>
         </p:txBody>
@@ -593,7 +611,7 @@
             <a:spLocks noGrp="1"/>
           </p:cNvSpPr>
           <p:nvPr>
-            <p:ph type="sldNum" idx="5" sz="quarter"/>
+            <p:ph type="sldNum" sz="quarter" idx="5"/>
           </p:nvPr>
         </p:nvSpPr>
         <p:spPr/>
@@ -644,10 +662,9 @@
           <a:lstStyle/>
           <a:p>
             <a:r>
-              <a:rPr lang="en-US" smtClean="0"/>
+              <a:rPr lang="en-US"/>
               <a:t>Click to edit Master title style</a:t>
             </a:r>
-            <a:endParaRPr lang="en-US"/>
           </a:p>
         </p:txBody>
       </p:sp>
@@ -763,10 +780,9 @@
           </a:lstStyle>
           <a:p>
             <a:r>
-              <a:rPr lang="en-US" smtClean="0"/>
+              <a:rPr lang="en-US"/>
               <a:t>Click to edit Master subtitle style</a:t>
             </a:r>
-            <a:endParaRPr lang="en-US"/>
           </a:p>
         </p:txBody>
       </p:sp>
@@ -787,7 +803,7 @@
           <a:p>
             <a:fld id="{5BCAD085-E8A6-8845-BD4E-CB4CCA059FC4}" type="datetimeFigureOut">
               <a:rPr lang="en-US" smtClean="0"/>
-              <a:t>1/27/13</a:t>
+              <a:t>10/21/2026</a:t>
             </a:fld>
             <a:endParaRPr lang="en-US"/>
           </a:p>
@@ -881,10 +897,9 @@
           <a:lstStyle/>
           <a:p>
             <a:r>
-              <a:rPr lang="en-US" smtClean="0"/>
+              <a:rPr lang="en-US"/>
               <a:t>Click to edit Master title style</a:t>
             </a:r>
-            <a:endParaRPr lang="en-US"/>
           </a:p>
         </p:txBody>
       </p:sp>
@@ -905,38 +920,37 @@
           <a:p>
             <a:pPr lvl="0"/>
             <a:r>
-              <a:rPr lang="en-US" smtClean="0"/>
+              <a:rPr lang="en-US"/>
               <a:t>Click to edit Master text styles</a:t>
             </a:r>
           </a:p>
           <a:p>
             <a:pPr lvl="1"/>
             <a:r>
-              <a:rPr lang="en-US" smtClean="0"/>
+              <a:rPr lang="en-US"/>
               <a:t>Second level</a:t>
             </a:r>
           </a:p>
           <a:p>
             <a:pPr lvl="2"/>
             <a:r>
-              <a:rPr lang="en-US" smtClean="0"/>
+              <a:rPr lang="en-US"/>
               <a:t>Third level</a:t>
             </a:r>
           </a:p>
           <a:p>
             <a:pPr lvl="3"/>
             <a:r>
-              <a:rPr lang="en-US" smtClean="0"/>
+              <a:rPr lang="en-US"/>
               <a:t>Fourth level</a:t>
             </a:r>
           </a:p>
           <a:p>
             <a:pPr lvl="4"/>
             <a:r>
-              <a:rPr lang="en-US" smtClean="0"/>
+              <a:rPr lang="en-US"/>
               <a:t>Fifth level</a:t>
             </a:r>
-            <a:endParaRPr lang="en-US"/>
           </a:p>
         </p:txBody>
       </p:sp>
@@ -957,7 +971,7 @@
           <a:p>
             <a:fld id="{5BCAD085-E8A6-8845-BD4E-CB4CCA059FC4}" type="datetimeFigureOut">
               <a:rPr lang="en-US" smtClean="0"/>
-              <a:t>1/27/13</a:t>
+              <a:t>10/21/2026</a:t>
             </a:fld>
             <a:endParaRPr lang="en-US"/>
           </a:p>
@@ -1056,10 +1070,9 @@
           <a:lstStyle/>
           <a:p>
             <a:r>
-              <a:rPr lang="en-US" smtClean="0"/>
+              <a:rPr lang="en-US"/>
               <a:t>Click to edit Master title style</a:t>
             </a:r>
-            <a:endParaRPr lang="en-US"/>
           </a:p>
         </p:txBody>
       </p:sp>
@@ -1085,38 +1098,37 @@
           <a:p>
             <a:pPr lvl="0"/>
             <a:r>
-              <a:rPr lang="en-US" smtClean="0"/>
+              <a:rPr lang="en-US"/>
               <a:t>Click to edit Master text styles</a:t>
             </a:r>
           </a:p>
           <a:p>
             <a:pPr lvl="1"/>
             <a:r>
-              <a:rPr lang="en-US" smtClean="0"/>
+              <a:rPr lang="en-US"/>
               <a:t>Second level</a:t>
             </a:r>
           </a:p>
           <a:p>
             <a:pPr lvl="2"/>
             <a:r>
-              <a:rPr lang="en-US" smtClean="0"/>
+              <a:rPr lang="en-US"/>
               <a:t>Third level</a:t>
             </a:r>
           </a:p>
           <a:p>
             <a:pPr lvl="3"/>
             <a:r>
-              <a:rPr lang="en-US" smtClean="0"/>
+              <a:rPr lang="en-US"/>
               <a:t>Fourth level</a:t>
             </a:r>
           </a:p>
           <a:p>
             <a:pPr lvl="4"/>
             <a:r>
-              <a:rPr lang="en-US" smtClean="0"/>
+              <a:rPr lang="en-US"/>
               <a:t>Fifth level</a:t>
             </a:r>
-            <a:endParaRPr lang="en-US"/>
           </a:p>
         </p:txBody>
       </p:sp>
@@ -1137,7 +1149,7 @@
           <a:p>
             <a:fld id="{5BCAD085-E8A6-8845-BD4E-CB4CCA059FC4}" type="datetimeFigureOut">
               <a:rPr lang="en-US" smtClean="0"/>
-              <a:t>1/27/13</a:t>
+              <a:t>10/21/2026</a:t>
             </a:fld>
             <a:endParaRPr lang="en-US"/>
           </a:p>
@@ -1231,10 +1243,9 @@
           <a:lstStyle/>
           <a:p>
             <a:r>
-              <a:rPr lang="en-US" smtClean="0"/>
+              <a:rPr lang="en-US"/>
               <a:t>Click to edit Master title style</a:t>
             </a:r>
-            <a:endParaRPr lang="en-US"/>
           </a:p>
         </p:txBody>
       </p:sp>
@@ -1255,38 +1266,37 @@
           <a:p>
             <a:pPr lvl="0"/>
             <a:r>
-              <a:rPr lang="en-US" smtClean="0"/>
+              <a:rPr lang="en-US"/>
               <a:t>Click to edit Master text styles</a:t>
             </a:r>
           </a:p>
           <a:p>
             <a:pPr lvl="1"/>
             <a:r>
-              <a:rPr lang="en-US" smtClean="0"/>
+              <a:rPr lang="en-US"/>
               <a:t>Second level</a:t>
             </a:r>
           </a:p>
           <a:p>
             <a:pPr lvl="2"/>
             <a:r>
-              <a:rPr lang="en-US" smtClean="0"/>
+              <a:rPr lang="en-US"/>
               <a:t>Third level</a:t>
             </a:r>
           </a:p>
           <a:p>
             <a:pPr lvl="3"/>
             <a:r>
-              <a:rPr lang="en-US" smtClean="0"/>
+              <a:rPr lang="en-US"/>
               <a:t>Fourth level</a:t>
             </a:r>
           </a:p>
           <a:p>
             <a:pPr lvl="4"/>
             <a:r>
-              <a:rPr lang="en-US" smtClean="0"/>
+              <a:rPr lang="en-US"/>
               <a:t>Fifth level</a:t>
             </a:r>
-            <a:endParaRPr lang="en-US"/>
           </a:p>
         </p:txBody>
       </p:sp>
@@ -1307,7 +1317,7 @@
           <a:p>
             <a:fld id="{5BCAD085-E8A6-8845-BD4E-CB4CCA059FC4}" type="datetimeFigureOut">
               <a:rPr lang="en-US" smtClean="0"/>
-              <a:t>1/27/13</a:t>
+              <a:t>10/21/2026</a:t>
             </a:fld>
             <a:endParaRPr lang="en-US"/>
           </a:p>
@@ -1410,10 +1420,9 @@
           </a:lstStyle>
           <a:p>
             <a:r>
-              <a:rPr lang="en-US" smtClean="0"/>
+              <a:rPr lang="en-US"/>
               <a:t>Click to edit Master title style</a:t>
             </a:r>
-            <a:endParaRPr lang="en-US"/>
           </a:p>
         </p:txBody>
       </p:sp>
@@ -1530,7 +1539,7 @@
           <a:p>
             <a:pPr lvl="0"/>
             <a:r>
-              <a:rPr lang="en-US" smtClean="0"/>
+              <a:rPr lang="en-US"/>
               <a:t>Click to edit Master text styles</a:t>
             </a:r>
           </a:p>
@@ -1553,7 +1562,7 @@
           <a:p>
             <a:fld id="{5BCAD085-E8A6-8845-BD4E-CB4CCA059FC4}" type="datetimeFigureOut">
               <a:rPr lang="en-US" smtClean="0"/>
-              <a:t>1/27/13</a:t>
+              <a:t>10/21/2026</a:t>
             </a:fld>
             <a:endParaRPr lang="en-US"/>
           </a:p>
@@ -1647,10 +1656,9 @@
           <a:lstStyle/>
           <a:p>
             <a:r>
-              <a:rPr lang="en-US" smtClean="0"/>
+              <a:rPr lang="en-US"/>
               <a:t>Click to edit Master title style</a:t>
             </a:r>
-            <a:endParaRPr lang="en-US"/>
           </a:p>
         </p:txBody>
       </p:sp>
@@ -1704,38 +1712,37 @@
           <a:p>
             <a:pPr lvl="0"/>
             <a:r>
-              <a:rPr lang="en-US" smtClean="0"/>
+              <a:rPr lang="en-US"/>
               <a:t>Click to edit Master text styles</a:t>
             </a:r>
           </a:p>
           <a:p>
             <a:pPr lvl="1"/>
             <a:r>
-              <a:rPr lang="en-US" smtClean="0"/>
+              <a:rPr lang="en-US"/>
               <a:t>Second level</a:t>
             </a:r>
           </a:p>
           <a:p>
             <a:pPr lvl="2"/>
             <a:r>
-              <a:rPr lang="en-US" smtClean="0"/>
+              <a:rPr lang="en-US"/>
               <a:t>Third level</a:t>
             </a:r>
           </a:p>
           <a:p>
             <a:pPr lvl="3"/>
             <a:r>
-              <a:rPr lang="en-US" smtClean="0"/>
+              <a:rPr lang="en-US"/>
               <a:t>Fourth level</a:t>
             </a:r>
           </a:p>
           <a:p>
             <a:pPr lvl="4"/>
             <a:r>
-              <a:rPr lang="en-US" smtClean="0"/>
+              <a:rPr lang="en-US"/>
               <a:t>Fifth level</a:t>
             </a:r>
-            <a:endParaRPr lang="en-US"/>
           </a:p>
         </p:txBody>
       </p:sp>
@@ -1789,38 +1796,37 @@
           <a:p>
             <a:pPr lvl="0"/>
             <a:r>
-              <a:rPr lang="en-US" smtClean="0"/>
+              <a:rPr lang="en-US"/>
               <a:t>Click to edit Master text styles</a:t>
             </a:r>
           </a:p>
           <a:p>
             <a:pPr lvl="1"/>
             <a:r>
-              <a:rPr lang="en-US" smtClean="0"/>
+              <a:rPr lang="en-US"/>
               <a:t>Second level</a:t>
             </a:r>
           </a:p>
           <a:p>
             <a:pPr lvl="2"/>
             <a:r>
-              <a:rPr lang="en-US" smtClean="0"/>
+              <a:rPr lang="en-US"/>
               <a:t>Third level</a:t>
             </a:r>
           </a:p>
           <a:p>
             <a:pPr lvl="3"/>
             <a:r>
-              <a:rPr lang="en-US" smtClean="0"/>
+              <a:rPr lang="en-US"/>
               <a:t>Fourth level</a:t>
             </a:r>
           </a:p>
           <a:p>
             <a:pPr lvl="4"/>
             <a:r>
-              <a:rPr lang="en-US" smtClean="0"/>
+              <a:rPr lang="en-US"/>
               <a:t>Fifth level</a:t>
             </a:r>
-            <a:endParaRPr lang="en-US"/>
           </a:p>
         </p:txBody>
       </p:sp>
@@ -1841,7 +1847,7 @@
           <a:p>
             <a:fld id="{5BCAD085-E8A6-8845-BD4E-CB4CCA059FC4}" type="datetimeFigureOut">
               <a:rPr lang="en-US" smtClean="0"/>
-              <a:t>1/27/13</a:t>
+              <a:t>10/21/2026</a:t>
             </a:fld>
             <a:endParaRPr lang="en-US"/>
           </a:p>
@@ -1939,10 +1945,9 @@
           </a:lstStyle>
           <a:p>
             <a:r>
-              <a:rPr lang="en-US" smtClean="0"/>
+              <a:rPr lang="en-US"/>
               <a:t>Click to edit Master title style</a:t>
             </a:r>
-            <a:endParaRPr lang="en-US"/>
           </a:p>
         </p:txBody>
       </p:sp>
@@ -2005,7 +2010,7 @@
           <a:p>
             <a:pPr lvl="0"/>
             <a:r>
-              <a:rPr lang="en-US" smtClean="0"/>
+              <a:rPr lang="en-US"/>
               <a:t>Click to edit Master text styles</a:t>
             </a:r>
           </a:p>
@@ -2061,38 +2066,37 @@
           <a:p>
             <a:pPr lvl="0"/>
             <a:r>
-              <a:rPr lang="en-US" smtClean="0"/>
+              <a:rPr lang="en-US"/>
               <a:t>Click to edit Master text styles</a:t>
             </a:r>
           </a:p>
           <a:p>
             <a:pPr lvl="1"/>
             <a:r>
-              <a:rPr lang="en-US" smtClean="0"/>
+              <a:rPr lang="en-US"/>
               <a:t>Second level</a:t>
             </a:r>
           </a:p>
           <a:p>
             <a:pPr lvl="2"/>
             <a:r>
-              <a:rPr lang="en-US" smtClean="0"/>
+              <a:rPr lang="en-US"/>
               <a:t>Third level</a:t>
             </a:r>
           </a:p>
           <a:p>
             <a:pPr lvl="3"/>
             <a:r>
-              <a:rPr lang="en-US" smtClean="0"/>
+              <a:rPr lang="en-US"/>
               <a:t>Fourth level</a:t>
             </a:r>
           </a:p>
           <a:p>
             <a:pPr lvl="4"/>
             <a:r>
-              <a:rPr lang="en-US" smtClean="0"/>
+              <a:rPr lang="en-US"/>
               <a:t>Fifth level</a:t>
             </a:r>
-            <a:endParaRPr lang="en-US"/>
           </a:p>
         </p:txBody>
       </p:sp>
@@ -2155,7 +2159,7 @@
           <a:p>
             <a:pPr lvl="0"/>
             <a:r>
-              <a:rPr lang="en-US" smtClean="0"/>
+              <a:rPr lang="en-US"/>
               <a:t>Click to edit Master text styles</a:t>
             </a:r>
           </a:p>
@@ -2211,38 +2215,37 @@
           <a:p>
             <a:pPr lvl="0"/>
             <a:r>
-              <a:rPr lang="en-US" smtClean="0"/>
+              <a:rPr lang="en-US"/>
               <a:t>Click to edit Master text styles</a:t>
             </a:r>
           </a:p>
           <a:p>
             <a:pPr lvl="1"/>
             <a:r>
-              <a:rPr lang="en-US" smtClean="0"/>
+              <a:rPr lang="en-US"/>
               <a:t>Second level</a:t>
             </a:r>
           </a:p>
           <a:p>
             <a:pPr lvl="2"/>
             <a:r>
-              <a:rPr lang="en-US" smtClean="0"/>
+              <a:rPr lang="en-US"/>
               <a:t>Third level</a:t>
             </a:r>
           </a:p>
           <a:p>
             <a:pPr lvl="3"/>
             <a:r>
-              <a:rPr lang="en-US" smtClean="0"/>
+              <a:rPr lang="en-US"/>
               <a:t>Fourth level</a:t>
             </a:r>
           </a:p>
           <a:p>
             <a:pPr lvl="4"/>
             <a:r>
-              <a:rPr lang="en-US" smtClean="0"/>
+              <a:rPr lang="en-US"/>
               <a:t>Fifth level</a:t>
             </a:r>
-            <a:endParaRPr lang="en-US"/>
           </a:p>
         </p:txBody>
       </p:sp>
@@ -2263,7 +2266,7 @@
           <a:p>
             <a:fld id="{5BCAD085-E8A6-8845-BD4E-CB4CCA059FC4}" type="datetimeFigureOut">
               <a:rPr lang="en-US" smtClean="0"/>
-              <a:t>1/27/13</a:t>
+              <a:t>10/21/2026</a:t>
             </a:fld>
             <a:endParaRPr lang="en-US"/>
           </a:p>
@@ -2357,10 +2360,9 @@
           <a:lstStyle/>
           <a:p>
             <a:r>
-              <a:rPr lang="en-US" smtClean="0"/>
+              <a:rPr lang="en-US"/>
               <a:t>Click to edit Master title style</a:t>
             </a:r>
-            <a:endParaRPr lang="en-US"/>
           </a:p>
         </p:txBody>
       </p:sp>
@@ -2381,7 +2383,7 @@
           <a:p>
             <a:fld id="{5BCAD085-E8A6-8845-BD4E-CB4CCA059FC4}" type="datetimeFigureOut">
               <a:rPr lang="en-US" smtClean="0"/>
-              <a:t>1/27/13</a:t>
+              <a:t>10/21/2026</a:t>
             </a:fld>
             <a:endParaRPr lang="en-US"/>
           </a:p>
@@ -2476,7 +2478,7 @@
           <a:p>
             <a:fld id="{5BCAD085-E8A6-8845-BD4E-CB4CCA059FC4}" type="datetimeFigureOut">
               <a:rPr lang="en-US" smtClean="0"/>
-              <a:t>1/27/13</a:t>
+              <a:t>10/21/2026</a:t>
             </a:fld>
             <a:endParaRPr lang="en-US"/>
           </a:p>
@@ -2579,10 +2581,9 @@
           </a:lstStyle>
           <a:p>
             <a:r>
-              <a:rPr lang="en-US" smtClean="0"/>
+              <a:rPr lang="en-US"/>
               <a:t>Click to edit Master title style</a:t>
             </a:r>
-            <a:endParaRPr lang="en-US"/>
           </a:p>
         </p:txBody>
       </p:sp>
@@ -2636,38 +2637,37 @@
           <a:p>
             <a:pPr lvl="0"/>
             <a:r>
-              <a:rPr lang="en-US" smtClean="0"/>
+              <a:rPr lang="en-US"/>
               <a:t>Click to edit Master text styles</a:t>
             </a:r>
           </a:p>
           <a:p>
             <a:pPr lvl="1"/>
             <a:r>
-              <a:rPr lang="en-US" smtClean="0"/>
+              <a:rPr lang="en-US"/>
               <a:t>Second level</a:t>
             </a:r>
           </a:p>
           <a:p>
             <a:pPr lvl="2"/>
             <a:r>
-              <a:rPr lang="en-US" smtClean="0"/>
+              <a:rPr lang="en-US"/>
               <a:t>Third level</a:t>
             </a:r>
           </a:p>
           <a:p>
             <a:pPr lvl="3"/>
             <a:r>
-              <a:rPr lang="en-US" smtClean="0"/>
+              <a:rPr lang="en-US"/>
               <a:t>Fourth level</a:t>
             </a:r>
           </a:p>
           <a:p>
             <a:pPr lvl="4"/>
             <a:r>
-              <a:rPr lang="en-US" smtClean="0"/>
+              <a:rPr lang="en-US"/>
               <a:t>Fifth level</a:t>
             </a:r>
-            <a:endParaRPr lang="en-US"/>
           </a:p>
         </p:txBody>
       </p:sp>
@@ -2730,7 +2730,7 @@
           <a:p>
             <a:pPr lvl="0"/>
             <a:r>
-              <a:rPr lang="en-US" smtClean="0"/>
+              <a:rPr lang="en-US"/>
               <a:t>Click to edit Master text styles</a:t>
             </a:r>
           </a:p>
@@ -2753,7 +2753,7 @@
           <a:p>
             <a:fld id="{5BCAD085-E8A6-8845-BD4E-CB4CCA059FC4}" type="datetimeFigureOut">
               <a:rPr lang="en-US" smtClean="0"/>
-              <a:t>1/27/13</a:t>
+              <a:t>10/21/2026</a:t>
             </a:fld>
             <a:endParaRPr lang="en-US"/>
           </a:p>
@@ -2856,10 +2856,9 @@
           </a:lstStyle>
           <a:p>
             <a:r>
-              <a:rPr lang="en-US" smtClean="0"/>
+              <a:rPr lang="en-US"/>
               <a:t>Click to edit Master title style</a:t>
             </a:r>
-            <a:endParaRPr lang="en-US"/>
           </a:p>
         </p:txBody>
       </p:sp>
@@ -2983,7 +2982,7 @@
           <a:p>
             <a:pPr lvl="0"/>
             <a:r>
-              <a:rPr lang="en-US" smtClean="0"/>
+              <a:rPr lang="en-US"/>
               <a:t>Click to edit Master text styles</a:t>
             </a:r>
           </a:p>
@@ -3006,7 +3005,7 @@
           <a:p>
             <a:fld id="{5BCAD085-E8A6-8845-BD4E-CB4CCA059FC4}" type="datetimeFigureOut">
               <a:rPr lang="en-US" smtClean="0"/>
-              <a:t>1/27/13</a:t>
+              <a:t>10/21/2026</a:t>
             </a:fld>
             <a:endParaRPr lang="en-US"/>
           </a:p>
@@ -3115,10 +3114,9 @@
           <a:lstStyle/>
           <a:p>
             <a:r>
-              <a:rPr lang="en-US" smtClean="0"/>
+              <a:rPr lang="en-US"/>
               <a:t>Click to edit Master title style</a:t>
             </a:r>
-            <a:endParaRPr lang="en-US"/>
           </a:p>
         </p:txBody>
       </p:sp>
@@ -3149,38 +3147,37 @@
           <a:p>
             <a:pPr lvl="0"/>
             <a:r>
-              <a:rPr lang="en-US" smtClean="0"/>
+              <a:rPr lang="en-US"/>
               <a:t>Click to edit Master text styles</a:t>
             </a:r>
           </a:p>
           <a:p>
             <a:pPr lvl="1"/>
             <a:r>
-              <a:rPr lang="en-US" smtClean="0"/>
+              <a:rPr lang="en-US"/>
               <a:t>Second level</a:t>
             </a:r>
           </a:p>
           <a:p>
             <a:pPr lvl="2"/>
             <a:r>
-              <a:rPr lang="en-US" smtClean="0"/>
+              <a:rPr lang="en-US"/>
               <a:t>Third level</a:t>
             </a:r>
           </a:p>
           <a:p>
             <a:pPr lvl="3"/>
             <a:r>
-              <a:rPr lang="en-US" smtClean="0"/>
+              <a:rPr lang="en-US"/>
               <a:t>Fourth level</a:t>
             </a:r>
           </a:p>
           <a:p>
             <a:pPr lvl="4"/>
             <a:r>
-              <a:rPr lang="en-US" smtClean="0"/>
+              <a:rPr lang="en-US"/>
               <a:t>Fifth level</a:t>
             </a:r>
-            <a:endParaRPr lang="en-US"/>
           </a:p>
         </p:txBody>
       </p:sp>
@@ -3219,7 +3216,7 @@
           <a:p>
             <a:fld id="{5BCAD085-E8A6-8845-BD4E-CB4CCA059FC4}" type="datetimeFigureOut">
               <a:rPr lang="en-US" smtClean="0"/>
-              <a:t>1/27/13</a:t>
+              <a:t>10/21/2026</a:t>
             </a:fld>
             <a:endParaRPr lang="en-US"/>
           </a:p>
@@ -3578,7 +3575,7 @@
 </file>
 
 <file path=ppt/slides/slide1.xml><?xml version="1.0" encoding="utf-8"?>
-<p:sld xmlns:a="http://schemas.openxmlformats.org/drawingml/2006/main" xmlns:p="http://schemas.openxmlformats.org/presentationml/2006/main" xmlns:r="http://schemas.openxmlformats.org/officeDocument/2006/relationships">
+<p:sld xmlns:a="http://schemas.openxmlformats.org/drawingml/2006/main" xmlns:r="http://schemas.openxmlformats.org/officeDocument/2006/relationships" xmlns:p="http://schemas.openxmlformats.org/presentationml/2006/main">
   <p:cSld>
     <p:spTree>
       <p:nvGrpSpPr>
@@ -3586,7 +3583,14 @@
         <p:cNvGrpSpPr/>
         <p:nvPr/>
       </p:nvGrpSpPr>
-      <p:grpSpPr/>
+      <p:grpSpPr>
+        <a:xfrm>
+          <a:off x="0" y="0"/>
+          <a:ext cx="0" cy="0"/>
+          <a:chOff x="0" y="0"/>
+          <a:chExt cx="0" cy="0"/>
+        </a:xfrm>
+      </p:grpSpPr>
       <p:sp>
         <p:nvSpPr>
           <p:cNvPr id="2" name="Rectangle 1"/>
@@ -3628,6 +3632,7 @@
           <a:lstStyle/>
           <a:p>
             <a:pPr algn="ctr"/>
+            <a:endParaRPr/>
           </a:p>
         </p:txBody>
       </p:sp>
@@ -3672,6 +3677,7 @@
           <a:lstStyle/>
           <a:p>
             <a:pPr algn="ctr"/>
+            <a:endParaRPr/>
           </a:p>
         </p:txBody>
       </p:sp>
@@ -3692,7 +3698,7 @@
           <a:noFill/>
         </p:spPr>
         <p:txBody>
-          <a:bodyPr wrap="square" anchor="t" lIns="45720" rIns="45720">
+          <a:bodyPr wrap="square" lIns="45720" rIns="45720" anchor="t">
             <a:spAutoFit/>
           </a:bodyPr>
           <a:lstStyle/>
@@ -3747,7 +3753,7 @@
           <a:noFill/>
         </p:spPr>
         <p:txBody>
-          <a:bodyPr wrap="square" anchor="t" lIns="45720" rIns="45720">
+          <a:bodyPr wrap="square" lIns="45720" rIns="45720" anchor="t">
             <a:spAutoFit/>
           </a:bodyPr>
           <a:lstStyle/>
@@ -3764,7 +3770,7 @@
                 </a:solidFill>
                 <a:latin typeface="Calibri"/>
               </a:rPr>
-              <a:t>An intelligent small-scale tutor that guides a learner to the answer through probing questions, backtracking across levels when needed. One pipeline, any course.</a:t>
+              <a:t>A study companion for IITM BS learners that guides them to the answer through probing questions, backtracking to earlier courses when needed. One pipeline, any course.</a:t>
             </a:r>
           </a:p>
         </p:txBody>
@@ -3786,7 +3792,7 @@
           <a:noFill/>
         </p:spPr>
         <p:txBody>
-          <a:bodyPr wrap="square" anchor="t" lIns="45720" rIns="45720">
+          <a:bodyPr wrap="square" lIns="45720" rIns="45720" anchor="t">
             <a:spAutoFit/>
           </a:bodyPr>
           <a:lstStyle/>
@@ -3841,7 +3847,7 @@
           <a:noFill/>
         </p:spPr>
         <p:txBody>
-          <a:bodyPr wrap="square" anchor="t" lIns="45720" rIns="45720">
+          <a:bodyPr wrap="square" lIns="45720" rIns="45720" anchor="t">
             <a:spAutoFit/>
           </a:bodyPr>
           <a:lstStyle/>
@@ -3872,7 +3878,7 @@
 </file>
 
 <file path=ppt/slides/slide10.xml><?xml version="1.0" encoding="utf-8"?>
-<p:sld xmlns:a="http://schemas.openxmlformats.org/drawingml/2006/main" xmlns:p="http://schemas.openxmlformats.org/presentationml/2006/main" xmlns:r="http://schemas.openxmlformats.org/officeDocument/2006/relationships">
+<p:sld xmlns:a="http://schemas.openxmlformats.org/drawingml/2006/main" xmlns:r="http://schemas.openxmlformats.org/officeDocument/2006/relationships" xmlns:p="http://schemas.openxmlformats.org/presentationml/2006/main">
   <p:cSld>
     <p:spTree>
       <p:nvGrpSpPr>
@@ -3880,7 +3886,14 @@
         <p:cNvGrpSpPr/>
         <p:nvPr/>
       </p:nvGrpSpPr>
-      <p:grpSpPr/>
+      <p:grpSpPr>
+        <a:xfrm>
+          <a:off x="0" y="0"/>
+          <a:ext cx="0" cy="0"/>
+          <a:chOff x="0" y="0"/>
+          <a:chExt cx="0" cy="0"/>
+        </a:xfrm>
+      </p:grpSpPr>
       <p:sp>
         <p:nvSpPr>
           <p:cNvPr id="2" name="Rectangle 1"/>
@@ -3922,6 +3935,7 @@
           <a:lstStyle/>
           <a:p>
             <a:pPr algn="ctr"/>
+            <a:endParaRPr/>
           </a:p>
         </p:txBody>
       </p:sp>
@@ -3942,7 +3956,7 @@
           <a:noFill/>
         </p:spPr>
         <p:txBody>
-          <a:bodyPr wrap="square" anchor="t" lIns="45720" rIns="45720">
+          <a:bodyPr wrap="square" lIns="45720" rIns="45720" anchor="t">
             <a:spAutoFit/>
           </a:bodyPr>
           <a:lstStyle/>
@@ -3959,7 +3973,7 @@
                 </a:solidFill>
                 <a:latin typeface="Calibri"/>
               </a:rPr>
-              <a:t>Next steps, TA decisions and sign-off</a:t>
+              <a:t>Summary and sign-off</a:t>
             </a:r>
           </a:p>
         </p:txBody>
@@ -3981,7 +3995,7 @@
           <a:noFill/>
         </p:spPr>
         <p:txBody>
-          <a:bodyPr wrap="square" anchor="t" lIns="45720" rIns="45720">
+          <a:bodyPr wrap="square" lIns="45720" rIns="45720" anchor="t">
             <a:spAutoFit/>
           </a:bodyPr>
           <a:lstStyle/>
@@ -4020,7 +4034,7 @@
           <a:noFill/>
         </p:spPr>
         <p:txBody>
-          <a:bodyPr wrap="square" anchor="t" lIns="45720" rIns="45720">
+          <a:bodyPr wrap="square" lIns="45720" rIns="45720" anchor="t">
             <a:spAutoFit/>
           </a:bodyPr>
           <a:lstStyle/>
@@ -4059,7 +4073,7 @@
           <a:noFill/>
         </p:spPr>
         <p:txBody>
-          <a:bodyPr wrap="square" anchor="t" lIns="45720" rIns="45720">
+          <a:bodyPr wrap="square" lIns="45720" rIns="45720" anchor="t">
             <a:spAutoFit/>
           </a:bodyPr>
           <a:lstStyle/>
@@ -4076,7 +4090,7 @@
                 </a:solidFill>
                 <a:latin typeface="Calibri"/>
               </a:rPr>
-              <a:t>Milestone 2 plan</a:t>
+              <a:t>Summary</a:t>
             </a:r>
           </a:p>
         </p:txBody>
@@ -4090,7 +4104,7 @@
         <p:spPr>
           <a:xfrm>
             <a:off x="548640" y="1554480"/>
-            <a:ext cx="5486400" cy="2377440"/>
+            <a:ext cx="5486400" cy="4114800"/>
           </a:xfrm>
           <a:prstGeom prst="rect">
             <a:avLst/>
@@ -4098,7 +4112,7 @@
           <a:noFill/>
         </p:spPr>
         <p:txBody>
-          <a:bodyPr wrap="square" anchor="t" lIns="45720" rIns="45720">
+          <a:bodyPr wrap="square" lIns="45720" rIns="45720" anchor="t">
             <a:spAutoFit/>
           </a:bodyPr>
           <a:lstStyle/>
@@ -4115,7 +4129,7 @@
                 </a:solidFill>
                 <a:latin typeface="Calibri"/>
               </a:rPr>
-              <a:t>•  Clean ASSISTments; train the baseline and DKT</a:t>
+              <a:t>•  A study companion for IITM BS learners that guides them to the answer with probing questions</a:t>
             </a:r>
           </a:p>
           <a:p>
@@ -4131,7 +4145,7 @@
                 </a:solidFill>
                 <a:latin typeface="Calibri"/>
               </a:rPr>
-              <a:t>•  First LoRA fine-tune of the Socratic model on MathDial</a:t>
+              <a:t>•  Our own trained models are the main brain: DKT, controller, fine-tuned Socratic model</a:t>
             </a:r>
           </a:p>
           <a:p>
@@ -4147,7 +4161,7 @@
                 </a:solidFill>
                 <a:latin typeface="Calibri"/>
               </a:rPr>
-              <a:t>•  Multi-level NCERT course pack; gather IITM transcripts</a:t>
+              <a:t>•  Backtracks across courses (Maths → MLF → MLT) to fix gaps, then climbs back up</a:t>
             </a:r>
           </a:p>
           <a:p>
@@ -4163,71 +4177,9 @@
                 </a:solidFill>
                 <a:latin typeface="Calibri"/>
               </a:rPr>
-              <a:t>•  First controller, search and web app; 30 test scenarios</a:t>
-            </a:r>
-          </a:p>
-        </p:txBody>
-      </p:sp>
-      <p:sp>
-        <p:nvSpPr>
-          <p:cNvPr id="8" name="TextBox 7"/>
-          <p:cNvSpPr txBox="1"/>
-          <p:nvPr/>
-        </p:nvSpPr>
-        <p:spPr>
-          <a:xfrm>
-            <a:off x="548640" y="3657600"/>
-            <a:ext cx="5486400" cy="411480"/>
-          </a:xfrm>
-          <a:prstGeom prst="rect">
-            <a:avLst/>
-          </a:prstGeom>
-          <a:noFill/>
-        </p:spPr>
-        <p:txBody>
-          <a:bodyPr wrap="square" anchor="t" lIns="45720" rIns="45720">
-            <a:spAutoFit/>
-          </a:bodyPr>
-          <a:lstStyle/>
-          <a:p>
-            <a:pPr algn="l">
-              <a:spcAft>
-                <a:spcPts val="400"/>
-              </a:spcAft>
-            </a:pPr>
-            <a:r>
-              <a:rPr sz="1800" b="1">
-                <a:solidFill>
-                  <a:srgbClr val="0F7C8C"/>
-                </a:solidFill>
-                <a:latin typeface="Calibri"/>
-              </a:rPr>
-              <a:t>Decisions recorded from the TA</a:t>
-            </a:r>
-          </a:p>
-        </p:txBody>
-      </p:sp>
-      <p:sp>
-        <p:nvSpPr>
-          <p:cNvPr id="9" name="TextBox 8"/>
-          <p:cNvSpPr txBox="1"/>
-          <p:nvPr/>
-        </p:nvSpPr>
-        <p:spPr>
-          <a:xfrm>
-            <a:off x="548640" y="4114800"/>
-            <a:ext cx="5486400" cy="2194560"/>
-          </a:xfrm>
-          <a:prstGeom prst="rect">
-            <a:avLst/>
-          </a:prstGeom>
-          <a:noFill/>
-        </p:spPr>
-        <p:txBody>
-          <a:bodyPr wrap="square" anchor="t" lIns="45720" rIns="45720">
-            <a:spAutoFit/>
-          </a:bodyPr>
-          <a:lstStyle/>
+              <a:t>•  Links mistakes to the exact lecture, slide or assignment</a:t>
+            </a:r>
+          </a:p>
           <a:p>
             <a:pPr algn="l">
               <a:spcAft>
@@ -4235,13 +4187,13 @@
               </a:spcAft>
             </a:pPr>
             <a:r>
-              <a:rPr sz="1400" b="0">
+              <a:rPr sz="1500" b="0">
                 <a:solidFill>
                   <a:srgbClr val="1F1F1F"/>
                 </a:solidFill>
                 <a:latin typeface="Calibri"/>
               </a:rPr>
-              <a:t>•  External datasets and NCERT allowed (check licenses)</a:t>
+              <a:t>•  Domain-agnostic: IITM BS (primary) and NCERT Maths via course packs</a:t>
             </a:r>
           </a:p>
           <a:p>
@@ -4251,52 +4203,20 @@
               </a:spcAft>
             </a:pPr>
             <a:r>
-              <a:rPr sz="1400" b="0">
+              <a:rPr sz="1500" b="0">
                 <a:solidFill>
                   <a:srgbClr val="1F1F1F"/>
                 </a:solidFill>
                 <a:latin typeface="Calibri"/>
               </a:rPr>
-              <a:t>•  Main brain must be our own model; LLM API only a minor part</a:t>
-            </a:r>
-          </a:p>
-          <a:p>
-            <a:pPr algn="l">
-              <a:spcAft>
-                <a:spcPts val="800"/>
-              </a:spcAft>
-            </a:pPr>
-            <a:r>
-              <a:rPr sz="1400" b="0">
-                <a:solidFill>
-                  <a:srgbClr val="1F1F1F"/>
-                </a:solidFill>
-                <a:latin typeface="Calibri"/>
-              </a:rPr>
-              <a:t>•  Several connected levels, with backtracking</a:t>
-            </a:r>
-          </a:p>
-          <a:p>
-            <a:pPr algn="l">
-              <a:spcAft>
-                <a:spcPts val="800"/>
-              </a:spcAft>
-            </a:pPr>
-            <a:r>
-              <a:rPr sz="1400" b="0">
-                <a:solidFill>
-                  <a:srgbClr val="1F1F1F"/>
-                </a:solidFill>
-                <a:latin typeface="Calibri"/>
-              </a:rPr>
-              <a:t>•  Compare against an LLM-API + system-prompt tutor</a:t>
+              <a:t>•  Evaluated against an LLM-API + system-prompt tutor</a:t>
             </a:r>
           </a:p>
         </p:txBody>
       </p:sp>
       <p:graphicFrame>
         <p:nvGraphicFramePr>
-          <p:cNvPr id="10" name="Table 9"/>
+          <p:cNvPr id="8" name="Table 7"/>
           <p:cNvGraphicFramePr>
             <a:graphicFrameLocks noGrp="1"/>
           </p:cNvGraphicFramePr>
@@ -4313,13 +4233,25 @@
                 <a:tableStyleId>{5C22544A-7EE6-4342-B048-85BDC9FD1C3A}</a:tableStyleId>
               </a:tblPr>
               <a:tblGrid>
-                <a:gridCol w="3291840"/>
-                <a:gridCol w="2011680"/>
+                <a:gridCol w="3291840">
+                  <a:extLst>
+                    <a:ext uri="{9D8B030D-6E8A-4147-A177-3AD203B41FA5}">
+                      <a16:colId xmlns:a16="http://schemas.microsoft.com/office/drawing/2014/main" val="20000"/>
+                    </a:ext>
+                  </a:extLst>
+                </a:gridCol>
+                <a:gridCol w="2011680">
+                  <a:extLst>
+                    <a:ext uri="{9D8B030D-6E8A-4147-A177-3AD203B41FA5}">
+                      <a16:colId xmlns:a16="http://schemas.microsoft.com/office/drawing/2014/main" val="20001"/>
+                    </a:ext>
+                  </a:extLst>
+                </a:gridCol>
               </a:tblGrid>
               <a:tr h="548640">
                 <a:tc>
                   <a:txBody>
-                    <a:bodyPr wrap="square"/>
+                    <a:bodyPr/>
                     <a:lstStyle/>
                     <a:p>
                       <a:r>
@@ -4341,7 +4273,7 @@
                 </a:tc>
                 <a:tc>
                   <a:txBody>
-                    <a:bodyPr wrap="square"/>
+                    <a:bodyPr/>
                     <a:lstStyle/>
                     <a:p>
                       <a:r>
@@ -4361,11 +4293,16 @@
                     </a:solidFill>
                   </a:tcPr>
                 </a:tc>
+                <a:extLst>
+                  <a:ext uri="{0D108BD9-81ED-4DB2-BD59-A6C34878D82A}">
+                    <a16:rowId xmlns:a16="http://schemas.microsoft.com/office/drawing/2014/main" val="10000"/>
+                  </a:ext>
+                </a:extLst>
               </a:tr>
               <a:tr h="548640">
                 <a:tc>
                   <a:txBody>
-                    <a:bodyPr wrap="square"/>
+                    <a:bodyPr/>
                     <a:lstStyle/>
                     <a:p>
                       <a:r>
@@ -4387,18 +4324,10 @@
                 </a:tc>
                 <a:tc>
                   <a:txBody>
-                    <a:bodyPr wrap="square"/>
-                    <a:lstStyle/>
-                    <a:p>
-                      <a:r>
-                        <a:rPr sz="1300" b="0">
-                          <a:solidFill>
-                            <a:srgbClr val="1F1F1F"/>
-                          </a:solidFill>
-                          <a:latin typeface="Calibri"/>
-                        </a:rPr>
-                        <a:t/>
-                      </a:r>
+                    <a:bodyPr/>
+                    <a:lstStyle/>
+                    <a:p>
+                      <a:endParaRPr/>
                     </a:p>
                   </a:txBody>
                   <a:tcPr marL="54864" marR="54864" marT="27432" marB="27432">
@@ -4407,11 +4336,16 @@
                     </a:solidFill>
                   </a:tcPr>
                 </a:tc>
+                <a:extLst>
+                  <a:ext uri="{0D108BD9-81ED-4DB2-BD59-A6C34878D82A}">
+                    <a16:rowId xmlns:a16="http://schemas.microsoft.com/office/drawing/2014/main" val="10001"/>
+                  </a:ext>
+                </a:extLst>
               </a:tr>
               <a:tr h="548640">
                 <a:tc>
                   <a:txBody>
-                    <a:bodyPr wrap="square"/>
+                    <a:bodyPr/>
                     <a:lstStyle/>
                     <a:p>
                       <a:r>
@@ -4433,18 +4367,10 @@
                 </a:tc>
                 <a:tc>
                   <a:txBody>
-                    <a:bodyPr wrap="square"/>
-                    <a:lstStyle/>
-                    <a:p>
-                      <a:r>
-                        <a:rPr sz="1300" b="0">
-                          <a:solidFill>
-                            <a:srgbClr val="1F1F1F"/>
-                          </a:solidFill>
-                          <a:latin typeface="Calibri"/>
-                        </a:rPr>
-                        <a:t/>
-                      </a:r>
+                    <a:bodyPr/>
+                    <a:lstStyle/>
+                    <a:p>
+                      <a:endParaRPr/>
                     </a:p>
                   </a:txBody>
                   <a:tcPr marL="54864" marR="54864" marT="27432" marB="27432">
@@ -4453,11 +4379,16 @@
                     </a:solidFill>
                   </a:tcPr>
                 </a:tc>
+                <a:extLst>
+                  <a:ext uri="{0D108BD9-81ED-4DB2-BD59-A6C34878D82A}">
+                    <a16:rowId xmlns:a16="http://schemas.microsoft.com/office/drawing/2014/main" val="10002"/>
+                  </a:ext>
+                </a:extLst>
               </a:tr>
               <a:tr h="548640">
                 <a:tc>
                   <a:txBody>
-                    <a:bodyPr wrap="square"/>
+                    <a:bodyPr/>
                     <a:lstStyle/>
                     <a:p>
                       <a:r>
@@ -4479,18 +4410,10 @@
                 </a:tc>
                 <a:tc>
                   <a:txBody>
-                    <a:bodyPr wrap="square"/>
-                    <a:lstStyle/>
-                    <a:p>
-                      <a:r>
-                        <a:rPr sz="1300" b="0">
-                          <a:solidFill>
-                            <a:srgbClr val="1F1F1F"/>
-                          </a:solidFill>
-                          <a:latin typeface="Calibri"/>
-                        </a:rPr>
-                        <a:t/>
-                      </a:r>
+                    <a:bodyPr/>
+                    <a:lstStyle/>
+                    <a:p>
+                      <a:endParaRPr/>
                     </a:p>
                   </a:txBody>
                   <a:tcPr marL="54864" marR="54864" marT="27432" marB="27432">
@@ -4499,11 +4422,16 @@
                     </a:solidFill>
                   </a:tcPr>
                 </a:tc>
+                <a:extLst>
+                  <a:ext uri="{0D108BD9-81ED-4DB2-BD59-A6C34878D82A}">
+                    <a16:rowId xmlns:a16="http://schemas.microsoft.com/office/drawing/2014/main" val="10003"/>
+                  </a:ext>
+                </a:extLst>
               </a:tr>
               <a:tr h="548640">
                 <a:tc>
                   <a:txBody>
-                    <a:bodyPr wrap="square"/>
+                    <a:bodyPr/>
                     <a:lstStyle/>
                     <a:p>
                       <a:r>
@@ -4525,18 +4453,10 @@
                 </a:tc>
                 <a:tc>
                   <a:txBody>
-                    <a:bodyPr wrap="square"/>
-                    <a:lstStyle/>
-                    <a:p>
-                      <a:r>
-                        <a:rPr sz="1300" b="0">
-                          <a:solidFill>
-                            <a:srgbClr val="1F1F1F"/>
-                          </a:solidFill>
-                          <a:latin typeface="Calibri"/>
-                        </a:rPr>
-                        <a:t/>
-                      </a:r>
+                    <a:bodyPr/>
+                    <a:lstStyle/>
+                    <a:p>
+                      <a:endParaRPr/>
                     </a:p>
                   </a:txBody>
                   <a:tcPr marL="54864" marR="54864" marT="27432" marB="27432">
@@ -4545,6 +4465,11 @@
                     </a:solidFill>
                   </a:tcPr>
                 </a:tc>
+                <a:extLst>
+                  <a:ext uri="{0D108BD9-81ED-4DB2-BD59-A6C34878D82A}">
+                    <a16:rowId xmlns:a16="http://schemas.microsoft.com/office/drawing/2014/main" val="10004"/>
+                  </a:ext>
+                </a:extLst>
               </a:tr>
             </a:tbl>
           </a:graphicData>
@@ -4559,7 +4484,7 @@
 </file>
 
 <file path=ppt/slides/slide2.xml><?xml version="1.0" encoding="utf-8"?>
-<p:sld xmlns:a="http://schemas.openxmlformats.org/drawingml/2006/main" xmlns:p="http://schemas.openxmlformats.org/presentationml/2006/main" xmlns:r="http://schemas.openxmlformats.org/officeDocument/2006/relationships">
+<p:sld xmlns:a="http://schemas.openxmlformats.org/drawingml/2006/main" xmlns:r="http://schemas.openxmlformats.org/officeDocument/2006/relationships" xmlns:p="http://schemas.openxmlformats.org/presentationml/2006/main">
   <p:cSld>
     <p:spTree>
       <p:nvGrpSpPr>
@@ -4567,7 +4492,14 @@
         <p:cNvGrpSpPr/>
         <p:nvPr/>
       </p:nvGrpSpPr>
-      <p:grpSpPr/>
+      <p:grpSpPr>
+        <a:xfrm>
+          <a:off x="0" y="0"/>
+          <a:ext cx="0" cy="0"/>
+          <a:chOff x="0" y="0"/>
+          <a:chExt cx="0" cy="0"/>
+        </a:xfrm>
+      </p:grpSpPr>
       <p:sp>
         <p:nvSpPr>
           <p:cNvPr id="2" name="Rectangle 1"/>
@@ -4609,6 +4541,7 @@
           <a:lstStyle/>
           <a:p>
             <a:pPr algn="ctr"/>
+            <a:endParaRPr/>
           </a:p>
         </p:txBody>
       </p:sp>
@@ -4629,7 +4562,7 @@
           <a:noFill/>
         </p:spPr>
         <p:txBody>
-          <a:bodyPr wrap="square" anchor="t" lIns="45720" rIns="45720">
+          <a:bodyPr wrap="square" lIns="45720" rIns="45720" anchor="t">
             <a:spAutoFit/>
           </a:bodyPr>
           <a:lstStyle/>
@@ -4668,7 +4601,7 @@
           <a:noFill/>
         </p:spPr>
         <p:txBody>
-          <a:bodyPr wrap="square" anchor="t" lIns="45720" rIns="45720">
+          <a:bodyPr wrap="square" lIns="45720" rIns="45720" anchor="t">
             <a:spAutoFit/>
           </a:bodyPr>
           <a:lstStyle/>
@@ -4707,7 +4640,7 @@
           <a:noFill/>
         </p:spPr>
         <p:txBody>
-          <a:bodyPr wrap="square" anchor="t" lIns="45720" rIns="45720">
+          <a:bodyPr wrap="square" lIns="45720" rIns="45720" anchor="t">
             <a:spAutoFit/>
           </a:bodyPr>
           <a:lstStyle/>
@@ -4746,7 +4679,7 @@
           <a:noFill/>
         </p:spPr>
         <p:txBody>
-          <a:bodyPr wrap="square" anchor="t" lIns="45720" rIns="45720">
+          <a:bodyPr wrap="square" lIns="45720" rIns="45720" anchor="t">
             <a:spAutoFit/>
           </a:bodyPr>
           <a:lstStyle/>
@@ -4811,6 +4744,7 @@
           <a:lstStyle/>
           <a:p>
             <a:pPr algn="ctr"/>
+            <a:endParaRPr/>
           </a:p>
         </p:txBody>
       </p:sp>
@@ -4831,7 +4765,7 @@
           <a:noFill/>
         </p:spPr>
         <p:txBody>
-          <a:bodyPr wrap="square" anchor="ctr" lIns="45720" rIns="45720">
+          <a:bodyPr wrap="square" lIns="45720" rIns="45720" anchor="ctr">
             <a:spAutoFit/>
           </a:bodyPr>
           <a:lstStyle/>
@@ -4949,6 +4883,7 @@
           <a:lstStyle/>
           <a:p>
             <a:pPr algn="ctr"/>
+            <a:endParaRPr/>
           </a:p>
         </p:txBody>
       </p:sp>
@@ -4969,7 +4904,7 @@
           <a:noFill/>
         </p:spPr>
         <p:txBody>
-          <a:bodyPr wrap="square" anchor="ctr" lIns="45720" rIns="45720">
+          <a:bodyPr wrap="square" lIns="45720" rIns="45720" anchor="ctr">
             <a:spAutoFit/>
           </a:bodyPr>
           <a:lstStyle/>
@@ -5087,6 +5022,7 @@
           <a:lstStyle/>
           <a:p>
             <a:pPr algn="ctr"/>
+            <a:endParaRPr/>
           </a:p>
         </p:txBody>
       </p:sp>
@@ -5107,7 +5043,7 @@
           <a:noFill/>
         </p:spPr>
         <p:txBody>
-          <a:bodyPr wrap="square" anchor="ctr" lIns="45720" rIns="45720">
+          <a:bodyPr wrap="square" lIns="45720" rIns="45720" anchor="ctr">
             <a:spAutoFit/>
           </a:bodyPr>
           <a:lstStyle/>
@@ -5141,7 +5077,7 @@
                 <a:latin typeface="Calibri"/>
               </a:rPr>
               <a:t>spot misconceptions,
-link a resource</a:t>
+link a lecture</a:t>
             </a:r>
           </a:p>
         </p:txBody>
@@ -5225,6 +5161,7 @@
           <a:lstStyle/>
           <a:p>
             <a:pPr algn="ctr"/>
+            <a:endParaRPr/>
           </a:p>
         </p:txBody>
       </p:sp>
@@ -5245,7 +5182,7 @@
           <a:noFill/>
         </p:spPr>
         <p:txBody>
-          <a:bodyPr wrap="square" anchor="ctr" lIns="45720" rIns="45720">
+          <a:bodyPr wrap="square" lIns="45720" rIns="45720" anchor="ctr">
             <a:spAutoFit/>
           </a:bodyPr>
           <a:lstStyle/>
@@ -5278,7 +5215,7 @@
                 </a:solidFill>
                 <a:latin typeface="Calibri"/>
               </a:rPr>
-              <a:t>to an earlier level
+              <a:t>to an earlier course
 if there is a gap</a:t>
             </a:r>
           </a:p>
@@ -5363,6 +5300,7 @@
           <a:lstStyle/>
           <a:p>
             <a:pPr algn="ctr"/>
+            <a:endParaRPr/>
           </a:p>
         </p:txBody>
       </p:sp>
@@ -5383,7 +5321,7 @@
           <a:noFill/>
         </p:spPr>
         <p:txBody>
-          <a:bodyPr wrap="square" anchor="ctr" lIns="45720" rIns="45720">
+          <a:bodyPr wrap="square" lIns="45720" rIns="45720" anchor="ctr">
             <a:spAutoFit/>
           </a:bodyPr>
           <a:lstStyle/>
@@ -5439,7 +5377,7 @@
           <a:noFill/>
         </p:spPr>
         <p:txBody>
-          <a:bodyPr wrap="square" anchor="t" lIns="45720" rIns="45720">
+          <a:bodyPr wrap="square" lIns="45720" rIns="45720" anchor="t">
             <a:spAutoFit/>
           </a:bodyPr>
           <a:lstStyle/>
@@ -5480,15 +5418,39 @@
                 <a:tableStyleId>{5C22544A-7EE6-4342-B048-85BDC9FD1C3A}</a:tableStyleId>
               </a:tblPr>
               <a:tblGrid>
-                <a:gridCol w="2743200"/>
-                <a:gridCol w="2743200"/>
-                <a:gridCol w="2788920"/>
-                <a:gridCol w="2788920"/>
+                <a:gridCol w="2743200">
+                  <a:extLst>
+                    <a:ext uri="{9D8B030D-6E8A-4147-A177-3AD203B41FA5}">
+                      <a16:colId xmlns:a16="http://schemas.microsoft.com/office/drawing/2014/main" val="20000"/>
+                    </a:ext>
+                  </a:extLst>
+                </a:gridCol>
+                <a:gridCol w="2743200">
+                  <a:extLst>
+                    <a:ext uri="{9D8B030D-6E8A-4147-A177-3AD203B41FA5}">
+                      <a16:colId xmlns:a16="http://schemas.microsoft.com/office/drawing/2014/main" val="20001"/>
+                    </a:ext>
+                  </a:extLst>
+                </a:gridCol>
+                <a:gridCol w="2788920">
+                  <a:extLst>
+                    <a:ext uri="{9D8B030D-6E8A-4147-A177-3AD203B41FA5}">
+                      <a16:colId xmlns:a16="http://schemas.microsoft.com/office/drawing/2014/main" val="20002"/>
+                    </a:ext>
+                  </a:extLst>
+                </a:gridCol>
+                <a:gridCol w="2788920">
+                  <a:extLst>
+                    <a:ext uri="{9D8B030D-6E8A-4147-A177-3AD203B41FA5}">
+                      <a16:colId xmlns:a16="http://schemas.microsoft.com/office/drawing/2014/main" val="20003"/>
+                    </a:ext>
+                  </a:extLst>
+                </a:gridCol>
               </a:tblGrid>
               <a:tr h="457200">
                 <a:tc>
                   <a:txBody>
-                    <a:bodyPr wrap="square"/>
+                    <a:bodyPr/>
                     <a:lstStyle/>
                     <a:p>
                       <a:r>
@@ -5510,7 +5472,7 @@
                 </a:tc>
                 <a:tc>
                   <a:txBody>
-                    <a:bodyPr wrap="square"/>
+                    <a:bodyPr/>
                     <a:lstStyle/>
                     <a:p>
                       <a:r>
@@ -5532,7 +5494,7 @@
                 </a:tc>
                 <a:tc>
                   <a:txBody>
-                    <a:bodyPr wrap="square"/>
+                    <a:bodyPr/>
                     <a:lstStyle/>
                     <a:p>
                       <a:r>
@@ -5554,7 +5516,7 @@
                 </a:tc>
                 <a:tc>
                   <a:txBody>
-                    <a:bodyPr wrap="square"/>
+                    <a:bodyPr/>
                     <a:lstStyle/>
                     <a:p>
                       <a:r>
@@ -5574,11 +5536,16 @@
                     </a:solidFill>
                   </a:tcPr>
                 </a:tc>
+                <a:extLst>
+                  <a:ext uri="{0D108BD9-81ED-4DB2-BD59-A6C34878D82A}">
+                    <a16:rowId xmlns:a16="http://schemas.microsoft.com/office/drawing/2014/main" val="10000"/>
+                  </a:ext>
+                </a:extLst>
               </a:tr>
               <a:tr h="457200">
                 <a:tc>
                   <a:txBody>
-                    <a:bodyPr wrap="square"/>
+                    <a:bodyPr/>
                     <a:lstStyle/>
                     <a:p>
                       <a:r>
@@ -5588,7 +5555,7 @@
                           </a:solidFill>
                           <a:latin typeface="Calibri"/>
                         </a:rPr>
-                        <a:t>topics with IDs and levels</a:t>
+                        <a:t>topics with IDs and courses</a:t>
                       </a:r>
                     </a:p>
                   </a:txBody>
@@ -5600,7 +5567,7 @@
                 </a:tc>
                 <a:tc>
                   <a:txBody>
-                    <a:bodyPr wrap="square"/>
+                    <a:bodyPr/>
                     <a:lstStyle/>
                     <a:p>
                       <a:r>
@@ -5610,7 +5577,7 @@
                           </a:solidFill>
                           <a:latin typeface="Calibri"/>
                         </a:rPr>
-                        <a:t>“A is needed before B”, across levels</a:t>
+                        <a:t>“A is needed before B”, across courses</a:t>
                       </a:r>
                     </a:p>
                   </a:txBody>
@@ -5622,7 +5589,7 @@
                 </a:tc>
                 <a:tc>
                   <a:txBody>
-                    <a:bodyPr wrap="square"/>
+                    <a:bodyPr/>
                     <a:lstStyle/>
                     <a:p>
                       <a:r>
@@ -5632,7 +5599,7 @@
                           </a:solidFill>
                           <a:latin typeface="Calibri"/>
                         </a:rPr>
-                        <a:t>PDFs, slides, transcripts</a:t>
+                        <a:t>transcripts, slides, PDFs</a:t>
                       </a:r>
                     </a:p>
                   </a:txBody>
@@ -5644,7 +5611,7 @@
                 </a:tc>
                 <a:tc>
                   <a:txBody>
-                    <a:bodyPr wrap="square"/>
+                    <a:bodyPr/>
                     <a:lstStyle/>
                     <a:p>
                       <a:r>
@@ -5664,6 +5631,11 @@
                     </a:solidFill>
                   </a:tcPr>
                 </a:tc>
+                <a:extLst>
+                  <a:ext uri="{0D108BD9-81ED-4DB2-BD59-A6C34878D82A}">
+                    <a16:rowId xmlns:a16="http://schemas.microsoft.com/office/drawing/2014/main" val="10001"/>
+                  </a:ext>
+                </a:extLst>
               </a:tr>
             </a:tbl>
           </a:graphicData>
@@ -5712,6 +5684,7 @@
           <a:lstStyle/>
           <a:p>
             <a:pPr algn="ctr"/>
+            <a:endParaRPr/>
           </a:p>
         </p:txBody>
       </p:sp>
@@ -5732,7 +5705,7 @@
           <a:noFill/>
         </p:spPr>
         <p:txBody>
-          <a:bodyPr wrap="square" anchor="ctr" lIns="45720" rIns="45720">
+          <a:bodyPr wrap="square" lIns="45720" rIns="45720" anchor="ctr">
             <a:spAutoFit/>
           </a:bodyPr>
           <a:lstStyle/>
@@ -5749,7 +5722,7 @@
                 </a:solidFill>
                 <a:latin typeface="Calibri"/>
               </a:rPr>
-              <a:t>Main pilot: NCERT Mathematics</a:t>
+              <a:t>Primary: IITM BS courses</a:t>
             </a:r>
           </a:p>
           <a:p>
@@ -5765,7 +5738,7 @@
                 </a:solidFill>
                 <a:latin typeface="Calibri"/>
               </a:rPr>
-              <a:t>several classes that build on each other (Level 1 → 2 → 3)</a:t>
+              <a:t>Maths &amp; Stats → MLF → MLT, e.g. “How does training happen in Linear Regression?”</a:t>
             </a:r>
           </a:p>
         </p:txBody>
@@ -5813,6 +5786,7 @@
           <a:lstStyle/>
           <a:p>
             <a:pPr algn="ctr"/>
+            <a:endParaRPr/>
           </a:p>
         </p:txBody>
       </p:sp>
@@ -5833,7 +5807,7 @@
           <a:noFill/>
         </p:spPr>
         <p:txBody>
-          <a:bodyPr wrap="square" anchor="ctr" lIns="45720" rIns="45720">
+          <a:bodyPr wrap="square" lIns="45720" rIns="45720" anchor="ctr">
             <a:spAutoFit/>
           </a:bodyPr>
           <a:lstStyle/>
@@ -5850,7 +5824,7 @@
                 </a:solidFill>
                 <a:latin typeface="Calibri"/>
               </a:rPr>
-              <a:t>Second domain: IITM BS</a:t>
+              <a:t>Second domain: NCERT Mathematics</a:t>
             </a:r>
           </a:p>
           <a:p>
@@ -5866,7 +5840,7 @@
                 </a:solidFill>
                 <a:latin typeface="Calibri"/>
               </a:rPr>
-              <a:t>Maths → MLF → MLT, e.g. “How does training happen in Linear Regression?”</a:t>
+              <a:t>several classes that build on each other, to show the pipeline is reusable</a:t>
             </a:r>
           </a:p>
         </p:txBody>
@@ -5880,7 +5854,7 @@
 </file>
 
 <file path=ppt/slides/slide3.xml><?xml version="1.0" encoding="utf-8"?>
-<p:sld xmlns:a="http://schemas.openxmlformats.org/drawingml/2006/main" xmlns:p="http://schemas.openxmlformats.org/presentationml/2006/main" xmlns:r="http://schemas.openxmlformats.org/officeDocument/2006/relationships">
+<p:sld xmlns:a="http://schemas.openxmlformats.org/drawingml/2006/main" xmlns:r="http://schemas.openxmlformats.org/officeDocument/2006/relationships" xmlns:p="http://schemas.openxmlformats.org/presentationml/2006/main">
   <p:cSld>
     <p:spTree>
       <p:nvGrpSpPr>
@@ -5888,7 +5862,14 @@
         <p:cNvGrpSpPr/>
         <p:nvPr/>
       </p:nvGrpSpPr>
-      <p:grpSpPr/>
+      <p:grpSpPr>
+        <a:xfrm>
+          <a:off x="0" y="0"/>
+          <a:ext cx="0" cy="0"/>
+          <a:chOff x="0" y="0"/>
+          <a:chExt cx="0" cy="0"/>
+        </a:xfrm>
+      </p:grpSpPr>
       <p:sp>
         <p:nvSpPr>
           <p:cNvPr id="2" name="Rectangle 1"/>
@@ -5930,6 +5911,7 @@
           <a:lstStyle/>
           <a:p>
             <a:pPr algn="ctr"/>
+            <a:endParaRPr/>
           </a:p>
         </p:txBody>
       </p:sp>
@@ -5950,7 +5932,7 @@
           <a:noFill/>
         </p:spPr>
         <p:txBody>
-          <a:bodyPr wrap="square" anchor="t" lIns="45720" rIns="45720">
+          <a:bodyPr wrap="square" lIns="45720" rIns="45720" anchor="t">
             <a:spAutoFit/>
           </a:bodyPr>
           <a:lstStyle/>
@@ -5967,7 +5949,7 @@
                 </a:solidFill>
                 <a:latin typeface="Calibri"/>
               </a:rPr>
-              <a:t>Learning builds across levels</a:t>
+              <a:t>Learning builds across courses</a:t>
             </a:r>
           </a:p>
         </p:txBody>
@@ -5989,7 +5971,7 @@
           <a:noFill/>
         </p:spPr>
         <p:txBody>
-          <a:bodyPr wrap="square" anchor="t" lIns="45720" rIns="45720">
+          <a:bodyPr wrap="square" lIns="45720" rIns="45720" anchor="t">
             <a:spAutoFit/>
           </a:bodyPr>
           <a:lstStyle/>
@@ -6006,7 +5988,7 @@
                 </a:solidFill>
                 <a:latin typeface="Calibri"/>
               </a:rPr>
-              <a:t>If a learner is stuck, the tutor finds the gap in an earlier level</a:t>
+              <a:t>If a learner is stuck, the tutor finds the gap in an earlier course</a:t>
             </a:r>
           </a:p>
         </p:txBody>
@@ -6028,7 +6010,7 @@
           <a:noFill/>
         </p:spPr>
         <p:txBody>
-          <a:bodyPr wrap="square" anchor="t" lIns="45720" rIns="45720">
+          <a:bodyPr wrap="square" lIns="45720" rIns="45720" anchor="t">
             <a:spAutoFit/>
           </a:bodyPr>
           <a:lstStyle/>
@@ -6067,7 +6049,7 @@
           <a:noFill/>
         </p:spPr>
         <p:txBody>
-          <a:bodyPr wrap="square" anchor="t" lIns="45720" rIns="45720">
+          <a:bodyPr wrap="square" lIns="45720" rIns="45720" anchor="t">
             <a:spAutoFit/>
           </a:bodyPr>
           <a:lstStyle/>
@@ -6098,7 +6080,7 @@
         <p:spPr>
           <a:xfrm>
             <a:off x="548640" y="1600200"/>
-            <a:ext cx="3291840" cy="1280160"/>
+            <a:ext cx="2468880" cy="1280160"/>
           </a:xfrm>
           <a:prstGeom prst="roundRect">
             <a:avLst>
@@ -6132,6 +6114,7 @@
           <a:lstStyle/>
           <a:p>
             <a:pPr algn="ctr"/>
+            <a:endParaRPr/>
           </a:p>
         </p:txBody>
       </p:sp>
@@ -6144,7 +6127,7 @@
         <p:spPr>
           <a:xfrm>
             <a:off x="621792" y="1600200"/>
-            <a:ext cx="3145536" cy="1280160"/>
+            <a:ext cx="2322576" cy="1280160"/>
           </a:xfrm>
           <a:prstGeom prst="rect">
             <a:avLst/>
@@ -6152,7 +6135,7 @@
           <a:noFill/>
         </p:spPr>
         <p:txBody>
-          <a:bodyPr wrap="square" anchor="ctr" lIns="45720" rIns="45720">
+          <a:bodyPr wrap="square" lIns="45720" rIns="45720" anchor="ctr">
             <a:spAutoFit/>
           </a:bodyPr>
           <a:lstStyle/>
@@ -6163,13 +6146,13 @@
               </a:spcAft>
             </a:pPr>
             <a:r>
-              <a:rPr sz="1600" b="1">
+              <a:rPr sz="1500" b="1">
                 <a:solidFill>
                   <a:srgbClr val="1F1F1F"/>
                 </a:solidFill>
                 <a:latin typeface="Calibri"/>
               </a:rPr>
-              <a:t>Level 1</a:t>
+              <a:t>Maths 1 · Stats 1</a:t>
             </a:r>
           </a:p>
           <a:p>
@@ -6179,14 +6162,14 @@
               </a:spcAft>
             </a:pPr>
             <a:r>
-              <a:rPr sz="1500" b="0">
+              <a:rPr sz="1400" b="0">
                 <a:solidFill>
                   <a:srgbClr val="1F1F1F"/>
                 </a:solidFill>
                 <a:latin typeface="Calibri"/>
               </a:rPr>
-              <a:t>Addition · Subtraction
-Multiplication</a:t>
+              <a:t>Functions, slope
+Mean, variance</a:t>
             </a:r>
           </a:p>
         </p:txBody>
@@ -6199,8 +6182,8 @@
         </p:nvCxnSpPr>
         <p:spPr>
           <a:xfrm>
-            <a:off x="3840480" y="2240280"/>
-            <a:ext cx="548640" cy="0"/>
+            <a:off x="3017520" y="2240280"/>
+            <a:ext cx="365760" cy="0"/>
           </a:xfrm>
           <a:prstGeom prst="line">
             <a:avLst/>
@@ -6235,8 +6218,8 @@
         </p:nvSpPr>
         <p:spPr>
           <a:xfrm>
-            <a:off x="4389120" y="1600200"/>
-            <a:ext cx="3291840" cy="1280160"/>
+            <a:off x="3383280" y="1600200"/>
+            <a:ext cx="2468880" cy="1280160"/>
           </a:xfrm>
           <a:prstGeom prst="roundRect">
             <a:avLst>
@@ -6270,6 +6253,7 @@
           <a:lstStyle/>
           <a:p>
             <a:pPr algn="ctr"/>
+            <a:endParaRPr/>
           </a:p>
         </p:txBody>
       </p:sp>
@@ -6281,8 +6265,8 @@
         </p:nvSpPr>
         <p:spPr>
           <a:xfrm>
-            <a:off x="4462272" y="1600200"/>
-            <a:ext cx="3145536" cy="1280160"/>
+            <a:off x="3456432" y="1600200"/>
+            <a:ext cx="2322576" cy="1280160"/>
           </a:xfrm>
           <a:prstGeom prst="rect">
             <a:avLst/>
@@ -6290,7 +6274,7 @@
           <a:noFill/>
         </p:spPr>
         <p:txBody>
-          <a:bodyPr wrap="square" anchor="ctr" lIns="45720" rIns="45720">
+          <a:bodyPr wrap="square" lIns="45720" rIns="45720" anchor="ctr">
             <a:spAutoFit/>
           </a:bodyPr>
           <a:lstStyle/>
@@ -6301,13 +6285,13 @@
               </a:spcAft>
             </a:pPr>
             <a:r>
-              <a:rPr sz="1600" b="1">
+              <a:rPr sz="1500" b="1">
                 <a:solidFill>
                   <a:srgbClr val="1F1F1F"/>
                 </a:solidFill>
                 <a:latin typeface="Calibri"/>
               </a:rPr>
-              <a:t>Level 2</a:t>
+              <a:t>Maths 2</a:t>
             </a:r>
           </a:p>
           <a:p>
@@ -6317,14 +6301,14 @@
               </a:spcAft>
             </a:pPr>
             <a:r>
-              <a:rPr sz="1500" b="0">
+              <a:rPr sz="1400" b="0">
                 <a:solidFill>
                   <a:srgbClr val="1F1F1F"/>
                 </a:solidFill>
                 <a:latin typeface="Calibri"/>
               </a:rPr>
-              <a:t>Division
-Fractions</a:t>
+              <a:t>Vectors, dot product
+Derivatives, chain rule</a:t>
             </a:r>
           </a:p>
         </p:txBody>
@@ -6337,8 +6321,8 @@
         </p:nvCxnSpPr>
         <p:spPr>
           <a:xfrm>
-            <a:off x="7680960" y="2240280"/>
-            <a:ext cx="548640" cy="0"/>
+            <a:off x="5852160" y="2240280"/>
+            <a:ext cx="365760" cy="0"/>
           </a:xfrm>
           <a:prstGeom prst="line">
             <a:avLst/>
@@ -6373,8 +6357,147 @@
         </p:nvSpPr>
         <p:spPr>
           <a:xfrm>
-            <a:off x="8229600" y="1600200"/>
-            <a:ext cx="3291840" cy="1280160"/>
+            <a:off x="6217920" y="1600200"/>
+            <a:ext cx="2468880" cy="1280160"/>
+          </a:xfrm>
+          <a:prstGeom prst="roundRect">
+            <a:avLst>
+              <a:gd name="adj" fmla="val 8000"/>
+            </a:avLst>
+          </a:prstGeom>
+          <a:solidFill>
+            <a:srgbClr val="E6F2F3"/>
+          </a:solidFill>
+          <a:ln>
+            <a:noFill/>
+          </a:ln>
+          <a:effectLst/>
+        </p:spPr>
+        <p:style>
+          <a:lnRef idx="1">
+            <a:schemeClr val="accent1"/>
+          </a:lnRef>
+          <a:fillRef idx="3">
+            <a:schemeClr val="accent1"/>
+          </a:fillRef>
+          <a:effectRef idx="2">
+            <a:schemeClr val="accent1"/>
+          </a:effectRef>
+          <a:fontRef idx="minor">
+            <a:schemeClr val="lt1"/>
+          </a:fontRef>
+        </p:style>
+        <p:txBody>
+          <a:bodyPr rtlCol="0" anchor="ctr"/>
+          <a:lstStyle/>
+          <a:p>
+            <a:pPr algn="ctr"/>
+            <a:endParaRPr/>
+          </a:p>
+        </p:txBody>
+      </p:sp>
+      <p:sp>
+        <p:nvSpPr>
+          <p:cNvPr id="14" name="TextBox 13"/>
+          <p:cNvSpPr txBox="1"/>
+          <p:nvPr/>
+        </p:nvSpPr>
+        <p:spPr>
+          <a:xfrm>
+            <a:off x="6291072" y="1600200"/>
+            <a:ext cx="2322576" cy="1280160"/>
+          </a:xfrm>
+          <a:prstGeom prst="rect">
+            <a:avLst/>
+          </a:prstGeom>
+          <a:noFill/>
+        </p:spPr>
+        <p:txBody>
+          <a:bodyPr wrap="square" lIns="45720" rIns="45720" anchor="ctr">
+            <a:spAutoFit/>
+          </a:bodyPr>
+          <a:lstStyle/>
+          <a:p>
+            <a:pPr algn="ctr">
+              <a:spcAft>
+                <a:spcPts val="400"/>
+              </a:spcAft>
+            </a:pPr>
+            <a:r>
+              <a:rPr sz="1500" b="1">
+                <a:solidFill>
+                  <a:srgbClr val="1F1F1F"/>
+                </a:solidFill>
+                <a:latin typeface="Calibri"/>
+              </a:rPr>
+              <a:t>MLF</a:t>
+            </a:r>
+          </a:p>
+          <a:p>
+            <a:pPr algn="ctr">
+              <a:spcAft>
+                <a:spcPts val="400"/>
+              </a:spcAft>
+            </a:pPr>
+            <a:r>
+              <a:rPr sz="1400" b="0">
+                <a:solidFill>
+                  <a:srgbClr val="1F1F1F"/>
+                </a:solidFill>
+                <a:latin typeface="Calibri"/>
+              </a:rPr>
+              <a:t>Loss functions
+Gradient descent</a:t>
+            </a:r>
+          </a:p>
+        </p:txBody>
+      </p:sp>
+      <p:cxnSp>
+        <p:nvCxnSpPr>
+          <p:cNvPr id="15" name="Connector 14"/>
+          <p:cNvCxnSpPr/>
+          <p:nvPr/>
+        </p:nvCxnSpPr>
+        <p:spPr>
+          <a:xfrm>
+            <a:off x="8686800" y="2240280"/>
+            <a:ext cx="365760" cy="0"/>
+          </a:xfrm>
+          <a:prstGeom prst="line">
+            <a:avLst/>
+          </a:prstGeom>
+          <a:ln w="19050">
+            <a:solidFill>
+              <a:srgbClr val="555555"/>
+            </a:solidFill>
+            <a:tailEnd type="triangle"/>
+          </a:ln>
+        </p:spPr>
+        <p:style>
+          <a:lnRef idx="2">
+            <a:schemeClr val="accent1"/>
+          </a:lnRef>
+          <a:fillRef idx="0">
+            <a:schemeClr val="accent1"/>
+          </a:fillRef>
+          <a:effectRef idx="1">
+            <a:schemeClr val="accent1"/>
+          </a:effectRef>
+          <a:fontRef idx="minor">
+            <a:schemeClr val="tx1"/>
+          </a:fontRef>
+        </p:style>
+      </p:cxnSp>
+      <p:sp>
+        <p:nvSpPr>
+          <p:cNvPr id="16" name="Rounded Rectangle 15"/>
+          <p:cNvSpPr/>
+          <p:nvPr/>
+        </p:nvSpPr>
+        <p:spPr>
+          <a:xfrm>
+            <a:off x="9052560" y="1600200"/>
+            <a:ext cx="2468880" cy="1280160"/>
           </a:xfrm>
           <a:prstGeom prst="roundRect">
             <a:avLst>
@@ -6408,19 +6531,20 @@
           <a:lstStyle/>
           <a:p>
             <a:pPr algn="ctr"/>
-          </a:p>
-        </p:txBody>
-      </p:sp>
-      <p:sp>
-        <p:nvSpPr>
-          <p:cNvPr id="14" name="TextBox 13"/>
+            <a:endParaRPr/>
+          </a:p>
+        </p:txBody>
+      </p:sp>
+      <p:sp>
+        <p:nvSpPr>
+          <p:cNvPr id="17" name="TextBox 16"/>
           <p:cNvSpPr txBox="1"/>
           <p:nvPr/>
         </p:nvSpPr>
         <p:spPr>
           <a:xfrm>
-            <a:off x="8302752" y="1600200"/>
-            <a:ext cx="3145536" cy="1280160"/>
+            <a:off x="9125712" y="1600200"/>
+            <a:ext cx="2322576" cy="1280160"/>
           </a:xfrm>
           <a:prstGeom prst="rect">
             <a:avLst/>
@@ -6428,7 +6552,7 @@
           <a:noFill/>
         </p:spPr>
         <p:txBody>
-          <a:bodyPr wrap="square" anchor="ctr" lIns="45720" rIns="45720">
+          <a:bodyPr wrap="square" lIns="45720" rIns="45720" anchor="ctr">
             <a:spAutoFit/>
           </a:bodyPr>
           <a:lstStyle/>
@@ -6439,13 +6563,13 @@
               </a:spcAft>
             </a:pPr>
             <a:r>
-              <a:rPr sz="1600" b="1">
+              <a:rPr sz="1500" b="1">
                 <a:solidFill>
                   <a:srgbClr val="FFFFFF"/>
                 </a:solidFill>
                 <a:latin typeface="Calibri"/>
               </a:rPr>
-              <a:t>Level 3</a:t>
+              <a:t>MLT</a:t>
             </a:r>
           </a:p>
           <a:p>
@@ -6455,21 +6579,21 @@
               </a:spcAft>
             </a:pPr>
             <a:r>
-              <a:rPr sz="1500" b="0">
+              <a:rPr sz="1400" b="0">
                 <a:solidFill>
                   <a:srgbClr val="FFFFFF"/>
                 </a:solidFill>
                 <a:latin typeface="Calibri"/>
               </a:rPr>
-              <a:t>Decimals
-Percentages</a:t>
-            </a:r>
-          </a:p>
-        </p:txBody>
-      </p:sp>
-      <p:sp>
-        <p:nvSpPr>
-          <p:cNvPr id="15" name="TextBox 14"/>
+              <a:t>Training linear
+regression</a:t>
+            </a:r>
+          </a:p>
+        </p:txBody>
+      </p:sp>
+      <p:sp>
+        <p:nvSpPr>
+          <p:cNvPr id="18" name="TextBox 17"/>
           <p:cNvSpPr txBox="1"/>
           <p:nvPr/>
         </p:nvSpPr>
@@ -6484,7 +6608,7 @@
           <a:noFill/>
         </p:spPr>
         <p:txBody>
-          <a:bodyPr wrap="square" anchor="t" lIns="45720" rIns="45720">
+          <a:bodyPr wrap="square" lIns="45720" rIns="45720" anchor="t">
             <a:spAutoFit/>
           </a:bodyPr>
           <a:lstStyle/>
@@ -6501,14 +6625,14 @@
                 </a:solidFill>
                 <a:latin typeface="Calibri"/>
               </a:rPr>
-              <a:t>Example: stuck on “What is 20% of 50?”</a:t>
+              <a:t>Example: “How does training happen in Linear Regression?”</a:t>
             </a:r>
           </a:p>
         </p:txBody>
       </p:sp>
       <p:graphicFrame>
         <p:nvGraphicFramePr>
-          <p:cNvPr id="16" name="Table 15"/>
+          <p:cNvPr id="19" name="Table 18"/>
           <p:cNvGraphicFramePr>
             <a:graphicFrameLocks noGrp="1"/>
           </p:cNvGraphicFramePr>
@@ -6525,13 +6649,25 @@
                 <a:tableStyleId>{5C22544A-7EE6-4342-B048-85BDC9FD1C3A}</a:tableStyleId>
               </a:tblPr>
               <a:tblGrid>
-                <a:gridCol w="2011680"/>
-                <a:gridCol w="9052560"/>
+                <a:gridCol w="2011680">
+                  <a:extLst>
+                    <a:ext uri="{9D8B030D-6E8A-4147-A177-3AD203B41FA5}">
+                      <a16:colId xmlns:a16="http://schemas.microsoft.com/office/drawing/2014/main" val="20000"/>
+                    </a:ext>
+                  </a:extLst>
+                </a:gridCol>
+                <a:gridCol w="9052560">
+                  <a:extLst>
+                    <a:ext uri="{9D8B030D-6E8A-4147-A177-3AD203B41FA5}">
+                      <a16:colId xmlns:a16="http://schemas.microsoft.com/office/drawing/2014/main" val="20001"/>
+                    </a:ext>
+                  </a:extLst>
+                </a:gridCol>
               </a:tblGrid>
               <a:tr h="475488">
                 <a:tc>
                   <a:txBody>
-                    <a:bodyPr wrap="square"/>
+                    <a:bodyPr/>
                     <a:lstStyle/>
                     <a:p>
                       <a:r>
@@ -6553,7 +6689,7 @@
                 </a:tc>
                 <a:tc>
                   <a:txBody>
-                    <a:bodyPr wrap="square"/>
+                    <a:bodyPr/>
                     <a:lstStyle/>
                     <a:p>
                       <a:r>
@@ -6573,11 +6709,16 @@
                     </a:solidFill>
                   </a:tcPr>
                 </a:tc>
+                <a:extLst>
+                  <a:ext uri="{0D108BD9-81ED-4DB2-BD59-A6C34878D82A}">
+                    <a16:rowId xmlns:a16="http://schemas.microsoft.com/office/drawing/2014/main" val="10000"/>
+                  </a:ext>
+                </a:extLst>
               </a:tr>
               <a:tr h="475488">
                 <a:tc>
                   <a:txBody>
-                    <a:bodyPr wrap="square"/>
+                    <a:bodyPr/>
                     <a:lstStyle/>
                     <a:p>
                       <a:r>
@@ -6599,7 +6740,7 @@
                 </a:tc>
                 <a:tc>
                   <a:txBody>
-                    <a:bodyPr wrap="square"/>
+                    <a:bodyPr/>
                     <a:lstStyle/>
                     <a:p>
                       <a:r>
@@ -6609,7 +6750,7 @@
                           </a:solidFill>
                           <a:latin typeface="Calibri"/>
                         </a:rPr>
-                        <a:t>“What does 20% mean: 20 out of how many?”</a:t>
+                        <a:t>Supervised learning → prediction y = w·x → squared error → “what is dL/dw?”</a:t>
                       </a:r>
                     </a:p>
                   </a:txBody>
@@ -6619,11 +6760,16 @@
                     </a:solidFill>
                   </a:tcPr>
                 </a:tc>
+                <a:extLst>
+                  <a:ext uri="{0D108BD9-81ED-4DB2-BD59-A6C34878D82A}">
+                    <a16:rowId xmlns:a16="http://schemas.microsoft.com/office/drawing/2014/main" val="10001"/>
+                  </a:ext>
+                </a:extLst>
               </a:tr>
               <a:tr h="475488">
                 <a:tc>
                   <a:txBody>
-                    <a:bodyPr wrap="square"/>
+                    <a:bodyPr/>
                     <a:lstStyle/>
                     <a:p>
                       <a:r>
@@ -6645,7 +6791,7 @@
                 </a:tc>
                 <a:tc>
                   <a:txBody>
-                    <a:bodyPr wrap="square"/>
+                    <a:bodyPr/>
                     <a:lstStyle/>
                     <a:p>
                       <a:r>
@@ -6655,7 +6801,7 @@
                           </a:solidFill>
                           <a:latin typeface="Calibri"/>
                         </a:rPr>
-                        <a:t>Gap found in fractions (Level 2) → checks division → multiplication (Level 1) if needed</a:t>
+                        <a:t>Gap found in derivatives (Maths 2) → checks slope of a line (Maths 1) if needed</a:t>
                       </a:r>
                     </a:p>
                   </a:txBody>
@@ -6665,11 +6811,16 @@
                     </a:solidFill>
                   </a:tcPr>
                 </a:tc>
+                <a:extLst>
+                  <a:ext uri="{0D108BD9-81ED-4DB2-BD59-A6C34878D82A}">
+                    <a16:rowId xmlns:a16="http://schemas.microsoft.com/office/drawing/2014/main" val="10002"/>
+                  </a:ext>
+                </a:extLst>
               </a:tr>
               <a:tr h="475488">
                 <a:tc>
                   <a:txBody>
-                    <a:bodyPr wrap="square"/>
+                    <a:bodyPr/>
                     <a:lstStyle/>
                     <a:p>
                       <a:r>
@@ -6691,7 +6842,7 @@
                 </a:tc>
                 <a:tc>
                   <a:txBody>
-                    <a:bodyPr wrap="square"/>
+                    <a:bodyPr/>
                     <a:lstStyle/>
                     <a:p>
                       <a:r>
@@ -6701,7 +6852,7 @@
                           </a:solidFill>
                           <a:latin typeface="Calibri"/>
                         </a:rPr>
-                        <a:t>A few division and fraction questions with hints and a link to the NCERT page</a:t>
+                        <a:t>A few slope and derivative questions with hints and a link to the Maths 2 lecture</a:t>
                       </a:r>
                     </a:p>
                   </a:txBody>
@@ -6711,11 +6862,16 @@
                     </a:solidFill>
                   </a:tcPr>
                 </a:tc>
+                <a:extLst>
+                  <a:ext uri="{0D108BD9-81ED-4DB2-BD59-A6C34878D82A}">
+                    <a16:rowId xmlns:a16="http://schemas.microsoft.com/office/drawing/2014/main" val="10003"/>
+                  </a:ext>
+                </a:extLst>
               </a:tr>
               <a:tr h="475488">
                 <a:tc>
                   <a:txBody>
-                    <a:bodyPr wrap="square"/>
+                    <a:bodyPr/>
                     <a:lstStyle/>
                     <a:p>
                       <a:r>
@@ -6737,7 +6893,7 @@
                 </a:tc>
                 <a:tc>
                   <a:txBody>
-                    <a:bodyPr wrap="square"/>
+                    <a:bodyPr/>
                     <a:lstStyle/>
                     <a:p>
                       <a:r>
@@ -6747,7 +6903,7 @@
                           </a:solidFill>
                           <a:latin typeface="Calibri"/>
                         </a:rPr>
-                        <a:t>1/5 of 50 → 1/4 of 20 → back to 20% of 50 → harder: 15% of 60</a:t>
+                        <a:t>derivative of w² → chain rule → gradient → gradient descent update (MLF, MLT)</a:t>
                       </a:r>
                     </a:p>
                   </a:txBody>
@@ -6757,6 +6913,11 @@
                     </a:solidFill>
                   </a:tcPr>
                 </a:tc>
+                <a:extLst>
+                  <a:ext uri="{0D108BD9-81ED-4DB2-BD59-A6C34878D82A}">
+                    <a16:rowId xmlns:a16="http://schemas.microsoft.com/office/drawing/2014/main" val="10004"/>
+                  </a:ext>
+                </a:extLst>
               </a:tr>
             </a:tbl>
           </a:graphicData>
@@ -6771,7 +6932,7 @@
 </file>
 
 <file path=ppt/slides/slide4.xml><?xml version="1.0" encoding="utf-8"?>
-<p:sld xmlns:a="http://schemas.openxmlformats.org/drawingml/2006/main" xmlns:p="http://schemas.openxmlformats.org/presentationml/2006/main" xmlns:r="http://schemas.openxmlformats.org/officeDocument/2006/relationships">
+<p:sld xmlns:a="http://schemas.openxmlformats.org/drawingml/2006/main" xmlns:r="http://schemas.openxmlformats.org/officeDocument/2006/relationships" xmlns:p="http://schemas.openxmlformats.org/presentationml/2006/main">
   <p:cSld>
     <p:spTree>
       <p:nvGrpSpPr>
@@ -6779,7 +6940,14 @@
         <p:cNvGrpSpPr/>
         <p:nvPr/>
       </p:nvGrpSpPr>
-      <p:grpSpPr/>
+      <p:grpSpPr>
+        <a:xfrm>
+          <a:off x="0" y="0"/>
+          <a:ext cx="0" cy="0"/>
+          <a:chOff x="0" y="0"/>
+          <a:chExt cx="0" cy="0"/>
+        </a:xfrm>
+      </p:grpSpPr>
       <p:sp>
         <p:nvSpPr>
           <p:cNvPr id="2" name="Rectangle 1"/>
@@ -6821,6 +6989,7 @@
           <a:lstStyle/>
           <a:p>
             <a:pPr algn="ctr"/>
+            <a:endParaRPr/>
           </a:p>
         </p:txBody>
       </p:sp>
@@ -6841,7 +7010,7 @@
           <a:noFill/>
         </p:spPr>
         <p:txBody>
-          <a:bodyPr wrap="square" anchor="t" lIns="45720" rIns="45720">
+          <a:bodyPr wrap="square" lIns="45720" rIns="45720" anchor="t">
             <a:spAutoFit/>
           </a:bodyPr>
           <a:lstStyle/>
@@ -6880,7 +7049,7 @@
           <a:noFill/>
         </p:spPr>
         <p:txBody>
-          <a:bodyPr wrap="square" anchor="t" lIns="45720" rIns="45720">
+          <a:bodyPr wrap="square" lIns="45720" rIns="45720" anchor="t">
             <a:spAutoFit/>
           </a:bodyPr>
           <a:lstStyle/>
@@ -6919,7 +7088,7 @@
           <a:noFill/>
         </p:spPr>
         <p:txBody>
-          <a:bodyPr wrap="square" anchor="t" lIns="45720" rIns="45720">
+          <a:bodyPr wrap="square" lIns="45720" rIns="45720" anchor="t">
             <a:spAutoFit/>
           </a:bodyPr>
           <a:lstStyle/>
@@ -6951,7 +7120,7 @@
         </p:nvGraphicFramePr>
         <p:xfrm>
           <a:off x="548640" y="1188720"/>
-          <a:ext cx="11064240" cy="2514600"/>
+          <a:ext cx="11064240" cy="2871216"/>
         </p:xfrm>
         <a:graphic>
           <a:graphicData uri="http://schemas.openxmlformats.org/drawingml/2006/table">
@@ -6960,18 +7129,36 @@
                 <a:tableStyleId>{5C22544A-7EE6-4342-B048-85BDC9FD1C3A}</a:tableStyleId>
               </a:tblPr>
               <a:tblGrid>
-                <a:gridCol w="3474720"/>
-                <a:gridCol w="2560320"/>
-                <a:gridCol w="5029200"/>
+                <a:gridCol w="2743200">
+                  <a:extLst>
+                    <a:ext uri="{9D8B030D-6E8A-4147-A177-3AD203B41FA5}">
+                      <a16:colId xmlns:a16="http://schemas.microsoft.com/office/drawing/2014/main" val="20000"/>
+                    </a:ext>
+                  </a:extLst>
+                </a:gridCol>
+                <a:gridCol w="3931920">
+                  <a:extLst>
+                    <a:ext uri="{9D8B030D-6E8A-4147-A177-3AD203B41FA5}">
+                      <a16:colId xmlns:a16="http://schemas.microsoft.com/office/drawing/2014/main" val="20001"/>
+                    </a:ext>
+                  </a:extLst>
+                </a:gridCol>
+                <a:gridCol w="4389120">
+                  <a:extLst>
+                    <a:ext uri="{9D8B030D-6E8A-4147-A177-3AD203B41FA5}">
+                      <a16:colId xmlns:a16="http://schemas.microsoft.com/office/drawing/2014/main" val="20002"/>
+                    </a:ext>
+                  </a:extLst>
+                </a:gridCol>
               </a:tblGrid>
-              <a:tr h="502920">
-                <a:tc>
-                  <a:txBody>
-                    <a:bodyPr wrap="square"/>
-                    <a:lstStyle/>
-                    <a:p>
-                      <a:r>
-                        <a:rPr sz="1400" b="1">
+              <a:tr h="384048">
+                <a:tc>
+                  <a:txBody>
+                    <a:bodyPr/>
+                    <a:lstStyle/>
+                    <a:p>
+                      <a:r>
+                        <a:rPr sz="1200" b="1">
                           <a:solidFill>
                             <a:srgbClr val="FFFFFF"/>
                           </a:solidFill>
@@ -6989,11 +7176,11 @@
                 </a:tc>
                 <a:tc>
                   <a:txBody>
-                    <a:bodyPr wrap="square"/>
-                    <a:lstStyle/>
-                    <a:p>
-                      <a:r>
-                        <a:rPr sz="1400" b="1">
+                    <a:bodyPr/>
+                    <a:lstStyle/>
+                    <a:p>
+                      <a:r>
+                        <a:rPr sz="1200" b="1">
                           <a:solidFill>
                             <a:srgbClr val="FFFFFF"/>
                           </a:solidFill>
@@ -7011,11 +7198,11 @@
                 </a:tc>
                 <a:tc>
                   <a:txBody>
-                    <a:bodyPr wrap="square"/>
-                    <a:lstStyle/>
-                    <a:p>
-                      <a:r>
-                        <a:rPr sz="1400" b="1">
+                    <a:bodyPr/>
+                    <a:lstStyle/>
+                    <a:p>
+                      <a:r>
+                        <a:rPr sz="1200" b="1">
                           <a:solidFill>
                             <a:srgbClr val="FFFFFF"/>
                           </a:solidFill>
@@ -7031,21 +7218,26 @@
                     </a:solidFill>
                   </a:tcPr>
                 </a:tc>
+                <a:extLst>
+                  <a:ext uri="{0D108BD9-81ED-4DB2-BD59-A6C34878D82A}">
+                    <a16:rowId xmlns:a16="http://schemas.microsoft.com/office/drawing/2014/main" val="10000"/>
+                  </a:ext>
+                </a:extLst>
               </a:tr>
-              <a:tr h="502920">
-                <a:tc>
-                  <a:txBody>
-                    <a:bodyPr wrap="square"/>
-                    <a:lstStyle/>
-                    <a:p>
-                      <a:r>
-                        <a:rPr sz="1400" b="1">
+              <a:tr h="384048">
+                <a:tc>
+                  <a:txBody>
+                    <a:bodyPr/>
+                    <a:lstStyle/>
+                    <a:p>
+                      <a:r>
+                        <a:rPr sz="1200" b="1">
                           <a:solidFill>
                             <a:srgbClr val="1F1F1F"/>
                           </a:solidFill>
                           <a:latin typeface="Calibri"/>
                         </a:rPr>
-                        <a:t>ChatGPT / Gemini study modes, Khanmigo</a:t>
+                        <a:t>Khanmigo</a:t>
                       </a:r>
                     </a:p>
                   </a:txBody>
@@ -7057,39 +7249,163 @@
                 </a:tc>
                 <a:tc>
                   <a:txBody>
-                    <a:bodyPr wrap="square"/>
-                    <a:lstStyle/>
-                    <a:p>
-                      <a:r>
-                        <a:rPr sz="1400" b="0">
+                    <a:bodyPr/>
+                    <a:lstStyle/>
+                    <a:p>
+                      <a:r>
+                        <a:rPr sz="1200" b="0">
                           <a:solidFill>
                             <a:srgbClr val="1F1F1F"/>
                           </a:solidFill>
                           <a:latin typeface="Calibri"/>
                         </a:rPr>
+                        <a:t>Builds understanding by questioning students, based on their answers</a:t>
+                      </a:r>
+                    </a:p>
+                  </a:txBody>
+                  <a:tcPr marL="54864" marR="54864" marT="27432" marB="27432">
+                    <a:solidFill>
+                      <a:srgbClr val="FFFFFF"/>
+                    </a:solidFill>
+                  </a:tcPr>
+                </a:tc>
+                <a:tc>
+                  <a:txBody>
+                    <a:bodyPr/>
+                    <a:lstStyle/>
+                    <a:p>
+                      <a:r>
+                        <a:rPr sz="1200" b="0">
+                          <a:solidFill>
+                            <a:srgbClr val="1F1F1F"/>
+                          </a:solidFill>
+                          <a:latin typeface="Calibri"/>
+                        </a:rPr>
+                        <a:t>External LLM (GPT-4) driven by prompts; no backtracking across levels; Khan content only</a:t>
+                      </a:r>
+                    </a:p>
+                  </a:txBody>
+                  <a:tcPr marL="54864" marR="54864" marT="27432" marB="27432">
+                    <a:solidFill>
+                      <a:srgbClr val="FFFFFF"/>
+                    </a:solidFill>
+                  </a:tcPr>
+                </a:tc>
+                <a:extLst>
+                  <a:ext uri="{0D108BD9-81ED-4DB2-BD59-A6C34878D82A}">
+                    <a16:rowId xmlns:a16="http://schemas.microsoft.com/office/drawing/2014/main" val="10001"/>
+                  </a:ext>
+                </a:extLst>
+              </a:tr>
+              <a:tr h="384048">
+                <a:tc>
+                  <a:txBody>
+                    <a:bodyPr/>
+                    <a:lstStyle/>
+                    <a:p>
+                      <a:r>
+                        <a:rPr sz="1200" b="1">
+                          <a:solidFill>
+                            <a:srgbClr val="1F1F1F"/>
+                          </a:solidFill>
+                          <a:latin typeface="Calibri"/>
+                        </a:rPr>
+                        <a:t>ChatGPT / Gemini study modes</a:t>
+                      </a:r>
+                    </a:p>
+                  </a:txBody>
+                  <a:tcPr marL="54864" marR="54864" marT="27432" marB="27432">
+                    <a:solidFill>
+                      <a:srgbClr val="F4F6F7"/>
+                    </a:solidFill>
+                  </a:tcPr>
+                </a:tc>
+                <a:tc>
+                  <a:txBody>
+                    <a:bodyPr/>
+                    <a:lstStyle/>
+                    <a:p>
+                      <a:r>
+                        <a:rPr sz="1200" b="0">
+                          <a:solidFill>
+                            <a:srgbClr val="1F1F1F"/>
+                          </a:solidFill>
+                          <a:latin typeface="Calibri"/>
+                        </a:rPr>
                         <a:t>Natural conversation</a:t>
                       </a:r>
                     </a:p>
                   </a:txBody>
                   <a:tcPr marL="54864" marR="54864" marT="27432" marB="27432">
                     <a:solidFill>
+                      <a:srgbClr val="F4F6F7"/>
+                    </a:solidFill>
+                  </a:tcPr>
+                </a:tc>
+                <a:tc>
+                  <a:txBody>
+                    <a:bodyPr/>
+                    <a:lstStyle/>
+                    <a:p>
+                      <a:r>
+                        <a:rPr sz="1200" b="0">
+                          <a:solidFill>
+                            <a:srgbClr val="1F1F1F"/>
+                          </a:solidFill>
+                          <a:latin typeface="Calibri"/>
+                        </a:rPr>
+                        <a:t>Driven by a system prompt; no memory of skills; can give away answers</a:t>
+                      </a:r>
+                    </a:p>
+                  </a:txBody>
+                  <a:tcPr marL="54864" marR="54864" marT="27432" marB="27432">
+                    <a:solidFill>
+                      <a:srgbClr val="F4F6F7"/>
+                    </a:solidFill>
+                  </a:tcPr>
+                </a:tc>
+                <a:extLst>
+                  <a:ext uri="{0D108BD9-81ED-4DB2-BD59-A6C34878D82A}">
+                    <a16:rowId xmlns:a16="http://schemas.microsoft.com/office/drawing/2014/main" val="10002"/>
+                  </a:ext>
+                </a:extLst>
+              </a:tr>
+              <a:tr h="384048">
+                <a:tc>
+                  <a:txBody>
+                    <a:bodyPr/>
+                    <a:lstStyle/>
+                    <a:p>
+                      <a:r>
+                        <a:rPr sz="1200" b="1">
+                          <a:solidFill>
+                            <a:srgbClr val="1F1F1F"/>
+                          </a:solidFill>
+                          <a:latin typeface="Calibri"/>
+                        </a:rPr>
+                        <a:t>MATHia</a:t>
+                      </a:r>
+                    </a:p>
+                  </a:txBody>
+                  <a:tcPr marL="54864" marR="54864" marT="27432" marB="27432">
+                    <a:solidFill>
                       <a:srgbClr val="FFFFFF"/>
                     </a:solidFill>
                   </a:tcPr>
                 </a:tc>
                 <a:tc>
                   <a:txBody>
-                    <a:bodyPr wrap="square"/>
-                    <a:lstStyle/>
-                    <a:p>
-                      <a:r>
-                        <a:rPr sz="1400" b="0">
+                    <a:bodyPr/>
+                    <a:lstStyle/>
+                    <a:p>
+                      <a:r>
+                        <a:rPr sz="1200" b="0">
                           <a:solidFill>
                             <a:srgbClr val="1F1F1F"/>
                           </a:solidFill>
                           <a:latin typeface="Calibri"/>
                         </a:rPr>
-                        <a:t>Driven by a system prompt; no memory of skills; can give away answers</a:t>
+                        <a:t>Adapts per student; step-by-step guidance, real-time feedback, targeted practice</a:t>
                       </a:r>
                     </a:p>
                   </a:txBody>
@@ -7099,21 +7415,48 @@
                     </a:solidFill>
                   </a:tcPr>
                 </a:tc>
+                <a:tc>
+                  <a:txBody>
+                    <a:bodyPr/>
+                    <a:lstStyle/>
+                    <a:p>
+                      <a:r>
+                        <a:rPr sz="1200" b="0">
+                          <a:solidFill>
+                            <a:srgbClr val="1F1F1F"/>
+                          </a:solidFill>
+                          <a:latin typeface="Calibri"/>
+                        </a:rPr>
+                        <a:t>Paid, closed; fixed maths curriculum; fixed step paths, no free conversation</a:t>
+                      </a:r>
+                    </a:p>
+                  </a:txBody>
+                  <a:tcPr marL="54864" marR="54864" marT="27432" marB="27432">
+                    <a:solidFill>
+                      <a:srgbClr val="FFFFFF"/>
+                    </a:solidFill>
+                  </a:tcPr>
+                </a:tc>
+                <a:extLst>
+                  <a:ext uri="{0D108BD9-81ED-4DB2-BD59-A6C34878D82A}">
+                    <a16:rowId xmlns:a16="http://schemas.microsoft.com/office/drawing/2014/main" val="10003"/>
+                  </a:ext>
+                </a:extLst>
               </a:tr>
-              <a:tr h="502920">
-                <a:tc>
-                  <a:txBody>
-                    <a:bodyPr wrap="square"/>
-                    <a:lstStyle/>
-                    <a:p>
-                      <a:r>
-                        <a:rPr sz="1400" b="1">
+              <a:tr h="384048">
+                <a:tc>
+                  <a:txBody>
+                    <a:bodyPr/>
+                    <a:lstStyle/>
+                    <a:p>
+                      <a:r>
+                        <a:rPr sz="1200" b="1">
                           <a:solidFill>
                             <a:srgbClr val="1F1F1F"/>
                           </a:solidFill>
                           <a:latin typeface="Calibri"/>
                         </a:rPr>
-                        <a:t>MATHia, ALEKS</a:t>
+                        <a:t>ALEKS (adaptive system, not a chat assistant)</a:t>
                       </a:r>
                     </a:p>
                   </a:txBody>
@@ -7125,17 +7468,17 @@
                 </a:tc>
                 <a:tc>
                   <a:txBody>
-                    <a:bodyPr wrap="square"/>
-                    <a:lstStyle/>
-                    <a:p>
-                      <a:r>
-                        <a:rPr sz="1400" b="0">
+                    <a:bodyPr/>
+                    <a:lstStyle/>
+                    <a:p>
+                      <a:r>
+                        <a:rPr sz="1200" b="0">
                           <a:solidFill>
                             <a:srgbClr val="1F1F1F"/>
                           </a:solidFill>
                           <a:latin typeface="Calibri"/>
                         </a:rPr>
-                        <a:t>Track student skills</a:t>
+                        <a:t>Finds what a student is ready to learn next, using prerequisites</a:t>
                       </a:r>
                     </a:p>
                   </a:txBody>
@@ -7147,17 +7490,17 @@
                 </a:tc>
                 <a:tc>
                   <a:txBody>
-                    <a:bodyPr wrap="square"/>
-                    <a:lstStyle/>
-                    <a:p>
-                      <a:r>
-                        <a:rPr sz="1400" b="0">
+                    <a:bodyPr/>
+                    <a:lstStyle/>
+                    <a:p>
+                      <a:r>
+                        <a:rPr sz="1200" b="0">
                           <a:solidFill>
                             <a:srgbClr val="1F1F1F"/>
                           </a:solidFill>
                           <a:latin typeface="Calibri"/>
                         </a:rPr>
-                        <a:t>Paid, closed, no conversation, fixed curriculum</a:t>
+                        <a:t>No conversation or probing questions; paid, closed, fixed curriculum</a:t>
                       </a:r>
                     </a:p>
                   </a:txBody>
@@ -7167,15 +7510,20 @@
                     </a:solidFill>
                   </a:tcPr>
                 </a:tc>
+                <a:extLst>
+                  <a:ext uri="{0D108BD9-81ED-4DB2-BD59-A6C34878D82A}">
+                    <a16:rowId xmlns:a16="http://schemas.microsoft.com/office/drawing/2014/main" val="10004"/>
+                  </a:ext>
+                </a:extLst>
               </a:tr>
-              <a:tr h="502920">
-                <a:tc>
-                  <a:txBody>
-                    <a:bodyPr wrap="square"/>
-                    <a:lstStyle/>
-                    <a:p>
-                      <a:r>
-                        <a:rPr sz="1400" b="1">
+              <a:tr h="384048">
+                <a:tc>
+                  <a:txBody>
+                    <a:bodyPr/>
+                    <a:lstStyle/>
+                    <a:p>
+                      <a:r>
+                        <a:rPr sz="1200" b="1">
                           <a:solidFill>
                             <a:srgbClr val="1F1F1F"/>
                           </a:solidFill>
@@ -7193,17 +7541,17 @@
                 </a:tc>
                 <a:tc>
                   <a:txBody>
-                    <a:bodyPr wrap="square"/>
-                    <a:lstStyle/>
-                    <a:p>
-                      <a:r>
-                        <a:rPr sz="1400" b="0">
+                    <a:bodyPr/>
+                    <a:lstStyle/>
+                    <a:p>
+                      <a:r>
+                        <a:rPr sz="1200" b="0">
                           <a:solidFill>
                             <a:srgbClr val="1F1F1F"/>
                           </a:solidFill>
                           <a:latin typeface="Calibri"/>
                         </a:rPr>
-                        <a:t>Free practice with hints</a:t>
+                        <a:t>Free platform for teachers to give students personalized feedback</a:t>
                       </a:r>
                     </a:p>
                   </a:txBody>
@@ -7215,17 +7563,17 @@
                 </a:tc>
                 <a:tc>
                   <a:txBody>
-                    <a:bodyPr wrap="square"/>
-                    <a:lstStyle/>
-                    <a:p>
-                      <a:r>
-                        <a:rPr sz="1400" b="0">
+                    <a:bodyPr/>
+                    <a:lstStyle/>
+                    <a:p>
+                      <a:r>
+                        <a:rPr sz="1200" b="0">
                           <a:solidFill>
                             <a:srgbClr val="1F1F1F"/>
                           </a:solidFill>
                           <a:latin typeface="Calibri"/>
                         </a:rPr>
-                        <a:t>Fixed teacher-written hints</a:t>
+                        <a:t>Hints written by teachers in advance; no conversation or backtracking</a:t>
                       </a:r>
                     </a:p>
                   </a:txBody>
@@ -7235,15 +7583,20 @@
                     </a:solidFill>
                   </a:tcPr>
                 </a:tc>
+                <a:extLst>
+                  <a:ext uri="{0D108BD9-81ED-4DB2-BD59-A6C34878D82A}">
+                    <a16:rowId xmlns:a16="http://schemas.microsoft.com/office/drawing/2014/main" val="10005"/>
+                  </a:ext>
+                </a:extLst>
               </a:tr>
-              <a:tr h="502920">
-                <a:tc>
-                  <a:txBody>
-                    <a:bodyPr wrap="square"/>
-                    <a:lstStyle/>
-                    <a:p>
-                      <a:r>
-                        <a:rPr sz="1400" b="1">
+              <a:tr h="384048">
+                <a:tc>
+                  <a:txBody>
+                    <a:bodyPr/>
+                    <a:lstStyle/>
+                    <a:p>
+                      <a:r>
+                        <a:rPr sz="1200" b="1">
                           <a:solidFill>
                             <a:srgbClr val="1F1F1F"/>
                           </a:solidFill>
@@ -7261,11 +7614,11 @@
                 </a:tc>
                 <a:tc>
                   <a:txBody>
-                    <a:bodyPr wrap="square"/>
-                    <a:lstStyle/>
-                    <a:p>
-                      <a:r>
-                        <a:rPr sz="1400" b="0">
+                    <a:bodyPr/>
+                    <a:lstStyle/>
+                    <a:p>
+                      <a:r>
+                        <a:rPr sz="1200" b="0">
                           <a:solidFill>
                             <a:srgbClr val="1F1F1F"/>
                           </a:solidFill>
@@ -7283,11 +7636,11 @@
                 </a:tc>
                 <a:tc>
                   <a:txBody>
-                    <a:bodyPr wrap="square"/>
-                    <a:lstStyle/>
-                    <a:p>
-                      <a:r>
-                        <a:rPr sz="1400" b="0">
+                    <a:bodyPr/>
+                    <a:lstStyle/>
+                    <a:p>
+                      <a:r>
+                        <a:rPr sz="1200" b="0">
                           <a:solidFill>
                             <a:srgbClr val="1F1F1F"/>
                           </a:solidFill>
@@ -7303,6 +7656,11 @@
                     </a:solidFill>
                   </a:tcPr>
                 </a:tc>
+                <a:extLst>
+                  <a:ext uri="{0D108BD9-81ED-4DB2-BD59-A6C34878D82A}">
+                    <a16:rowId xmlns:a16="http://schemas.microsoft.com/office/drawing/2014/main" val="10006"/>
+                  </a:ext>
+                </a:extLst>
               </a:tr>
             </a:tbl>
           </a:graphicData>
@@ -7316,7 +7674,7 @@
         </p:nvSpPr>
         <p:spPr>
           <a:xfrm>
-            <a:off x="548640" y="4023360"/>
+            <a:off x="548640" y="4526280"/>
             <a:ext cx="11064240" cy="411480"/>
           </a:xfrm>
           <a:prstGeom prst="rect">
@@ -7325,7 +7683,7 @@
           <a:noFill/>
         </p:spPr>
         <p:txBody>
-          <a:bodyPr wrap="square" anchor="t" lIns="45720" rIns="45720">
+          <a:bodyPr wrap="square" lIns="45720" rIns="45720" anchor="t">
             <a:spAutoFit/>
           </a:bodyPr>
           <a:lstStyle/>
@@ -7336,13 +7694,13 @@
               </a:spcAft>
             </a:pPr>
             <a:r>
-              <a:rPr sz="1800" b="1">
+              <a:rPr sz="1600" b="1">
                 <a:solidFill>
                   <a:srgbClr val="0F7C8C"/>
                 </a:solidFill>
                 <a:latin typeface="Calibri"/>
               </a:rPr>
-              <a:t>What we add</a:t>
+              <a:t>What we add (MATHia and Khanmigo are closest; we combine their ideas with our own models)</a:t>
             </a:r>
           </a:p>
         </p:txBody>
@@ -7355,8 +7713,8 @@
         </p:nvSpPr>
         <p:spPr>
           <a:xfrm>
-            <a:off x="548640" y="4480560"/>
-            <a:ext cx="11064240" cy="1828800"/>
+            <a:off x="548640" y="4937760"/>
+            <a:ext cx="11064240" cy="1463040"/>
           </a:xfrm>
           <a:prstGeom prst="rect">
             <a:avLst/>
@@ -7364,7 +7722,7 @@
           <a:noFill/>
         </p:spPr>
         <p:txBody>
-          <a:bodyPr wrap="square" anchor="t" lIns="45720" rIns="45720">
+          <a:bodyPr wrap="square" lIns="45720" rIns="45720" anchor="t">
             <a:spAutoFit/>
           </a:bodyPr>
           <a:lstStyle/>
@@ -7375,7 +7733,7 @@
               </a:spcAft>
             </a:pPr>
             <a:r>
-              <a:rPr sz="1600" b="0">
+              <a:rPr sz="1400" b="0">
                 <a:solidFill>
                   <a:srgbClr val="1F1F1F"/>
                 </a:solidFill>
@@ -7391,7 +7749,7 @@
               </a:spcAft>
             </a:pPr>
             <a:r>
-              <a:rPr sz="1600" b="0">
+              <a:rPr sz="1400" b="0">
                 <a:solidFill>
                   <a:srgbClr val="1F1F1F"/>
                 </a:solidFill>
@@ -7407,13 +7765,13 @@
               </a:spcAft>
             </a:pPr>
             <a:r>
-              <a:rPr sz="1600" b="0">
+              <a:rPr sz="1400" b="0">
                 <a:solidFill>
                   <a:srgbClr val="1F1F1F"/>
                 </a:solidFill>
                 <a:latin typeface="Calibri"/>
               </a:rPr>
-              <a:t>•  Backtracking across levels, then climbing back up to the learner’s question</a:t>
+              <a:t>•  Backtracking across courses, then climbing back up to the learner’s question</a:t>
             </a:r>
           </a:p>
           <a:p>
@@ -7423,13 +7781,13 @@
               </a:spcAft>
             </a:pPr>
             <a:r>
-              <a:rPr sz="1600" b="0">
+              <a:rPr sz="1400" b="0">
                 <a:solidFill>
                   <a:srgbClr val="1F1F1F"/>
                 </a:solidFill>
                 <a:latin typeface="Calibri"/>
               </a:rPr>
-              <a:t>•  Feedback with the exact page, slide or video to revisit; works for any course</a:t>
+              <a:t>•  Feedback with the exact IITM lecture, slide or assignment to revisit; works for any course</a:t>
             </a:r>
           </a:p>
         </p:txBody>
@@ -7443,7 +7801,7 @@
 </file>
 
 <file path=ppt/slides/slide5.xml><?xml version="1.0" encoding="utf-8"?>
-<p:sld xmlns:a="http://schemas.openxmlformats.org/drawingml/2006/main" xmlns:p="http://schemas.openxmlformats.org/presentationml/2006/main" xmlns:r="http://schemas.openxmlformats.org/officeDocument/2006/relationships">
+<p:sld xmlns:a="http://schemas.openxmlformats.org/drawingml/2006/main" xmlns:r="http://schemas.openxmlformats.org/officeDocument/2006/relationships" xmlns:p="http://schemas.openxmlformats.org/presentationml/2006/main">
   <p:cSld>
     <p:spTree>
       <p:nvGrpSpPr>
@@ -7451,7 +7809,14 @@
         <p:cNvGrpSpPr/>
         <p:nvPr/>
       </p:nvGrpSpPr>
-      <p:grpSpPr/>
+      <p:grpSpPr>
+        <a:xfrm>
+          <a:off x="0" y="0"/>
+          <a:ext cx="0" cy="0"/>
+          <a:chOff x="0" y="0"/>
+          <a:chExt cx="0" cy="0"/>
+        </a:xfrm>
+      </p:grpSpPr>
       <p:sp>
         <p:nvSpPr>
           <p:cNvPr id="2" name="Rectangle 1"/>
@@ -7493,6 +7858,7 @@
           <a:lstStyle/>
           <a:p>
             <a:pPr algn="ctr"/>
+            <a:endParaRPr/>
           </a:p>
         </p:txBody>
       </p:sp>
@@ -7513,7 +7879,7 @@
           <a:noFill/>
         </p:spPr>
         <p:txBody>
-          <a:bodyPr wrap="square" anchor="t" lIns="45720" rIns="45720">
+          <a:bodyPr wrap="square" lIns="45720" rIns="45720" anchor="t">
             <a:spAutoFit/>
           </a:bodyPr>
           <a:lstStyle/>
@@ -7552,7 +7918,7 @@
           <a:noFill/>
         </p:spPr>
         <p:txBody>
-          <a:bodyPr wrap="square" anchor="t" lIns="45720" rIns="45720">
+          <a:bodyPr wrap="square" lIns="45720" rIns="45720" anchor="t">
             <a:spAutoFit/>
           </a:bodyPr>
           <a:lstStyle/>
@@ -7591,7 +7957,7 @@
           <a:noFill/>
         </p:spPr>
         <p:txBody>
-          <a:bodyPr wrap="square" anchor="t" lIns="45720" rIns="45720">
+          <a:bodyPr wrap="square" lIns="45720" rIns="45720" anchor="t">
             <a:spAutoFit/>
           </a:bodyPr>
           <a:lstStyle/>
@@ -7646,7 +8012,7 @@
         <p:spPr>
           <a:xfrm>
             <a:off x="548640" y="4343400"/>
-            <a:ext cx="6583680" cy="1645920"/>
+            <a:ext cx="6583680" cy="820738"/>
           </a:xfrm>
           <a:prstGeom prst="rect">
             <a:avLst/>
@@ -7654,7 +8020,7 @@
           <a:noFill/>
         </p:spPr>
         <p:txBody>
-          <a:bodyPr wrap="square" anchor="t" lIns="45720" rIns="45720">
+          <a:bodyPr wrap="square" lIns="45720" rIns="45720" anchor="t">
             <a:spAutoFit/>
           </a:bodyPr>
           <a:lstStyle/>
@@ -7665,7 +8031,7 @@
               </a:spcAft>
             </a:pPr>
             <a:r>
-              <a:rPr sz="1600" b="1">
+              <a:rPr sz="1600" b="1" dirty="0">
                 <a:solidFill>
                   <a:srgbClr val="0F7C8C"/>
                 </a:solidFill>
@@ -7681,14 +8047,47 @@
               </a:spcAft>
             </a:pPr>
             <a:r>
-              <a:rPr sz="1400" b="0">
+              <a:rPr sz="1400" b="0" dirty="0">
                 <a:solidFill>
                   <a:srgbClr val="1F1F1F"/>
                 </a:solidFill>
                 <a:latin typeface="Calibri"/>
               </a:rPr>
-              <a:t>DKT (Deep Knowledge Tracing, an LSTM we will train) scores AUC 0.754 on cleaned ASSISTments data. 0.5 = random guess, 1.0 = perfect.</a:t>
-            </a:r>
+              <a:t>DKT (Deep Knowledge Tracing, an LSTM we will train) scores AUC 0.754 on cleaned </a:t>
+            </a:r>
+            <a:r>
+              <a:rPr sz="1400" b="0" dirty="0" err="1">
+                <a:solidFill>
+                  <a:srgbClr val="1F1F1F"/>
+                </a:solidFill>
+                <a:latin typeface="Calibri"/>
+              </a:rPr>
+              <a:t>ASSISTments</a:t>
+            </a:r>
+            <a:r>
+              <a:rPr sz="1400" b="0" dirty="0">
+                <a:solidFill>
+                  <a:srgbClr val="1F1F1F"/>
+                </a:solidFill>
+                <a:latin typeface="Calibri"/>
+              </a:rPr>
+              <a:t> </a:t>
+            </a:r>
+            <a:r>
+              <a:rPr sz="1400" b="0">
+                <a:solidFill>
+                  <a:srgbClr val="1F1F1F"/>
+                </a:solidFill>
+                <a:latin typeface="Calibri"/>
+              </a:rPr>
+              <a:t>data.</a:t>
+            </a:r>
+            <a:endParaRPr sz="1400" b="0" dirty="0">
+              <a:solidFill>
+                <a:srgbClr val="1F1F1F"/>
+              </a:solidFill>
+              <a:latin typeface="Calibri"/>
+            </a:endParaRPr>
           </a:p>
         </p:txBody>
       </p:sp>
@@ -7709,7 +8108,7 @@
           <a:noFill/>
         </p:spPr>
         <p:txBody>
-          <a:bodyPr wrap="square" anchor="t" lIns="45720" rIns="45720">
+          <a:bodyPr wrap="square" lIns="45720" rIns="45720" anchor="t">
             <a:spAutoFit/>
           </a:bodyPr>
           <a:lstStyle/>
@@ -7748,7 +8147,7 @@
           <a:noFill/>
         </p:spPr>
         <p:txBody>
-          <a:bodyPr wrap="square" anchor="t" lIns="45720" rIns="45720">
+          <a:bodyPr wrap="square" lIns="45720" rIns="45720" anchor="t">
             <a:spAutoFit/>
           </a:bodyPr>
           <a:lstStyle/>
@@ -7759,13 +8158,31 @@
               </a:spcAft>
             </a:pPr>
             <a:r>
-              <a:rPr sz="1500" b="0">
+              <a:rPr sz="1500" b="0" dirty="0">
                 <a:solidFill>
                   <a:srgbClr val="1F1F1F"/>
                 </a:solidFill>
                 <a:latin typeface="Calibri"/>
               </a:rPr>
-              <a:t>•  MathDial (2,861 dialogues): prompted AI teachers often reveal the answer; fine-tuned models guide better</a:t>
+              <a:t>•  </a:t>
+            </a:r>
+            <a:r>
+              <a:rPr sz="1500" b="0" dirty="0" err="1">
+                <a:solidFill>
+                  <a:srgbClr val="1F1F1F"/>
+                </a:solidFill>
+                <a:latin typeface="Calibri"/>
+              </a:rPr>
+              <a:t>MathDial</a:t>
+            </a:r>
+            <a:r>
+              <a:rPr sz="1500" b="0" dirty="0">
+                <a:solidFill>
+                  <a:srgbClr val="1F1F1F"/>
+                </a:solidFill>
+                <a:latin typeface="Calibri"/>
+              </a:rPr>
+              <a:t> (2,861 dialogues): prompted AI teachers often reveal the answer; fine-tuned models guide better</a:t>
             </a:r>
           </a:p>
           <a:p>
@@ -7775,7 +8192,7 @@
               </a:spcAft>
             </a:pPr>
             <a:r>
-              <a:rPr sz="1500" b="0">
+              <a:rPr sz="1500" b="0" dirty="0">
                 <a:solidFill>
                   <a:srgbClr val="1F1F1F"/>
                 </a:solidFill>
@@ -7791,7 +8208,7 @@
               </a:spcAft>
             </a:pPr>
             <a:r>
-              <a:rPr sz="1500" b="0">
+              <a:rPr sz="1500" b="0" dirty="0">
                 <a:solidFill>
                   <a:srgbClr val="1F1F1F"/>
                 </a:solidFill>
@@ -7811,7 +8228,7 @@
 </file>
 
 <file path=ppt/slides/slide6.xml><?xml version="1.0" encoding="utf-8"?>
-<p:sld xmlns:a="http://schemas.openxmlformats.org/drawingml/2006/main" xmlns:p="http://schemas.openxmlformats.org/presentationml/2006/main" xmlns:r="http://schemas.openxmlformats.org/officeDocument/2006/relationships">
+<p:sld xmlns:a="http://schemas.openxmlformats.org/drawingml/2006/main" xmlns:r="http://schemas.openxmlformats.org/officeDocument/2006/relationships" xmlns:p="http://schemas.openxmlformats.org/presentationml/2006/main">
   <p:cSld>
     <p:spTree>
       <p:nvGrpSpPr>
@@ -7819,7 +8236,14 @@
         <p:cNvGrpSpPr/>
         <p:nvPr/>
       </p:nvGrpSpPr>
-      <p:grpSpPr/>
+      <p:grpSpPr>
+        <a:xfrm>
+          <a:off x="0" y="0"/>
+          <a:ext cx="0" cy="0"/>
+          <a:chOff x="0" y="0"/>
+          <a:chExt cx="0" cy="0"/>
+        </a:xfrm>
+      </p:grpSpPr>
       <p:sp>
         <p:nvSpPr>
           <p:cNvPr id="2" name="Rectangle 1"/>
@@ -7861,6 +8285,7 @@
           <a:lstStyle/>
           <a:p>
             <a:pPr algn="ctr"/>
+            <a:endParaRPr/>
           </a:p>
         </p:txBody>
       </p:sp>
@@ -7881,7 +8306,7 @@
           <a:noFill/>
         </p:spPr>
         <p:txBody>
-          <a:bodyPr wrap="square" anchor="t" lIns="45720" rIns="45720">
+          <a:bodyPr wrap="square" lIns="45720" rIns="45720" anchor="t">
             <a:spAutoFit/>
           </a:bodyPr>
           <a:lstStyle/>
@@ -7920,7 +8345,7 @@
           <a:noFill/>
         </p:spPr>
         <p:txBody>
-          <a:bodyPr wrap="square" anchor="t" lIns="45720" rIns="45720">
+          <a:bodyPr wrap="square" lIns="45720" rIns="45720" anchor="t">
             <a:spAutoFit/>
           </a:bodyPr>
           <a:lstStyle/>
@@ -7959,7 +8384,7 @@
           <a:noFill/>
         </p:spPr>
         <p:txBody>
-          <a:bodyPr wrap="square" anchor="t" lIns="45720" rIns="45720">
+          <a:bodyPr wrap="square" lIns="45720" rIns="45720" anchor="t">
             <a:spAutoFit/>
           </a:bodyPr>
           <a:lstStyle/>
@@ -8000,14 +8425,32 @@
                 <a:tableStyleId>{5C22544A-7EE6-4342-B048-85BDC9FD1C3A}</a:tableStyleId>
               </a:tblPr>
               <a:tblGrid>
-                <a:gridCol w="2743200"/>
-                <a:gridCol w="2103120"/>
-                <a:gridCol w="6217920"/>
+                <a:gridCol w="2743200">
+                  <a:extLst>
+                    <a:ext uri="{9D8B030D-6E8A-4147-A177-3AD203B41FA5}">
+                      <a16:colId xmlns:a16="http://schemas.microsoft.com/office/drawing/2014/main" val="20000"/>
+                    </a:ext>
+                  </a:extLst>
+                </a:gridCol>
+                <a:gridCol w="2103120">
+                  <a:extLst>
+                    <a:ext uri="{9D8B030D-6E8A-4147-A177-3AD203B41FA5}">
+                      <a16:colId xmlns:a16="http://schemas.microsoft.com/office/drawing/2014/main" val="20001"/>
+                    </a:ext>
+                  </a:extLst>
+                </a:gridCol>
+                <a:gridCol w="6217920">
+                  <a:extLst>
+                    <a:ext uri="{9D8B030D-6E8A-4147-A177-3AD203B41FA5}">
+                      <a16:colId xmlns:a16="http://schemas.microsoft.com/office/drawing/2014/main" val="20002"/>
+                    </a:ext>
+                  </a:extLst>
+                </a:gridCol>
               </a:tblGrid>
               <a:tr h="475488">
                 <a:tc>
                   <a:txBody>
-                    <a:bodyPr wrap="square"/>
+                    <a:bodyPr/>
                     <a:lstStyle/>
                     <a:p>
                       <a:r>
@@ -8029,7 +8472,7 @@
                 </a:tc>
                 <a:tc>
                   <a:txBody>
-                    <a:bodyPr wrap="square"/>
+                    <a:bodyPr/>
                     <a:lstStyle/>
                     <a:p>
                       <a:r>
@@ -8051,7 +8494,7 @@
                 </a:tc>
                 <a:tc>
                   <a:txBody>
-                    <a:bodyPr wrap="square"/>
+                    <a:bodyPr/>
                     <a:lstStyle/>
                     <a:p>
                       <a:r>
@@ -8071,11 +8514,16 @@
                     </a:solidFill>
                   </a:tcPr>
                 </a:tc>
+                <a:extLst>
+                  <a:ext uri="{0D108BD9-81ED-4DB2-BD59-A6C34878D82A}">
+                    <a16:rowId xmlns:a16="http://schemas.microsoft.com/office/drawing/2014/main" val="10000"/>
+                  </a:ext>
+                </a:extLst>
               </a:tr>
               <a:tr h="475488">
                 <a:tc>
                   <a:txBody>
-                    <a:bodyPr wrap="square"/>
+                    <a:bodyPr/>
                     <a:lstStyle/>
                     <a:p>
                       <a:r>
@@ -8097,7 +8545,7 @@
                 </a:tc>
                 <a:tc>
                   <a:txBody>
-                    <a:bodyPr wrap="square"/>
+                    <a:bodyPr/>
                     <a:lstStyle/>
                     <a:p>
                       <a:r>
@@ -8119,7 +8567,7 @@
                 </a:tc>
                 <a:tc>
                   <a:txBody>
-                    <a:bodyPr wrap="square"/>
+                    <a:bodyPr/>
                     <a:lstStyle/>
                     <a:p>
                       <a:r>
@@ -8139,11 +8587,16 @@
                     </a:solidFill>
                   </a:tcPr>
                 </a:tc>
+                <a:extLst>
+                  <a:ext uri="{0D108BD9-81ED-4DB2-BD59-A6C34878D82A}">
+                    <a16:rowId xmlns:a16="http://schemas.microsoft.com/office/drawing/2014/main" val="10001"/>
+                  </a:ext>
+                </a:extLst>
               </a:tr>
               <a:tr h="475488">
                 <a:tc>
                   <a:txBody>
-                    <a:bodyPr wrap="square"/>
+                    <a:bodyPr/>
                     <a:lstStyle/>
                     <a:p>
                       <a:r>
@@ -8165,7 +8618,7 @@
                 </a:tc>
                 <a:tc>
                   <a:txBody>
-                    <a:bodyPr wrap="square"/>
+                    <a:bodyPr/>
                     <a:lstStyle/>
                     <a:p>
                       <a:r>
@@ -8187,7 +8640,7 @@
                 </a:tc>
                 <a:tc>
                   <a:txBody>
-                    <a:bodyPr wrap="square"/>
+                    <a:bodyPr/>
                     <a:lstStyle/>
                     <a:p>
                       <a:r>
@@ -8197,7 +8650,7 @@
                           </a:solidFill>
                           <a:latin typeface="Calibri"/>
                         </a:rPr>
-                        <a:t>Decides: probe, hint, backtrack a level, retest, move up</a:t>
+                        <a:t>Decides: probe, hint, backtrack a course, retest, move up</a:t>
                       </a:r>
                     </a:p>
                   </a:txBody>
@@ -8207,11 +8660,16 @@
                     </a:solidFill>
                   </a:tcPr>
                 </a:tc>
+                <a:extLst>
+                  <a:ext uri="{0D108BD9-81ED-4DB2-BD59-A6C34878D82A}">
+                    <a16:rowId xmlns:a16="http://schemas.microsoft.com/office/drawing/2014/main" val="10002"/>
+                  </a:ext>
+                </a:extLst>
               </a:tr>
               <a:tr h="475488">
                 <a:tc>
                   <a:txBody>
-                    <a:bodyPr wrap="square"/>
+                    <a:bodyPr/>
                     <a:lstStyle/>
                     <a:p>
                       <a:r>
@@ -8233,7 +8691,7 @@
                 </a:tc>
                 <a:tc>
                   <a:txBody>
-                    <a:bodyPr wrap="square"/>
+                    <a:bodyPr/>
                     <a:lstStyle/>
                     <a:p>
                       <a:r>
@@ -8255,7 +8713,7 @@
                 </a:tc>
                 <a:tc>
                   <a:txBody>
-                    <a:bodyPr wrap="square"/>
+                    <a:bodyPr/>
                     <a:lstStyle/>
                     <a:p>
                       <a:r>
@@ -8275,11 +8733,16 @@
                     </a:solidFill>
                   </a:tcPr>
                 </a:tc>
+                <a:extLst>
+                  <a:ext uri="{0D108BD9-81ED-4DB2-BD59-A6C34878D82A}">
+                    <a16:rowId xmlns:a16="http://schemas.microsoft.com/office/drawing/2014/main" val="10003"/>
+                  </a:ext>
+                </a:extLst>
               </a:tr>
               <a:tr h="475488">
                 <a:tc>
                   <a:txBody>
-                    <a:bodyPr wrap="square"/>
+                    <a:bodyPr/>
                     <a:lstStyle/>
                     <a:p>
                       <a:r>
@@ -8301,7 +8764,7 @@
                 </a:tc>
                 <a:tc>
                   <a:txBody>
-                    <a:bodyPr wrap="square"/>
+                    <a:bodyPr/>
                     <a:lstStyle/>
                     <a:p>
                       <a:r>
@@ -8323,7 +8786,7 @@
                 </a:tc>
                 <a:tc>
                   <a:txBody>
-                    <a:bodyPr wrap="square"/>
+                    <a:bodyPr/>
                     <a:lstStyle/>
                     <a:p>
                       <a:r>
@@ -8333,7 +8796,7 @@
                           </a:solidFill>
                           <a:latin typeface="Calibri"/>
                         </a:rPr>
-                        <a:t>Spots common error patterns (e.g. 50 ÷ 20 instead of 20/100 × 50)</a:t>
+                        <a:t>Spots common error patterns (e.g. a sign error in the gradient)</a:t>
                       </a:r>
                     </a:p>
                   </a:txBody>
@@ -8343,11 +8806,16 @@
                     </a:solidFill>
                   </a:tcPr>
                 </a:tc>
+                <a:extLst>
+                  <a:ext uri="{0D108BD9-81ED-4DB2-BD59-A6C34878D82A}">
+                    <a16:rowId xmlns:a16="http://schemas.microsoft.com/office/drawing/2014/main" val="10004"/>
+                  </a:ext>
+                </a:extLst>
               </a:tr>
               <a:tr h="475488">
                 <a:tc>
                   <a:txBody>
-                    <a:bodyPr wrap="square"/>
+                    <a:bodyPr/>
                     <a:lstStyle/>
                     <a:p>
                       <a:r>
@@ -8369,7 +8837,7 @@
                 </a:tc>
                 <a:tc>
                   <a:txBody>
-                    <a:bodyPr wrap="square"/>
+                    <a:bodyPr/>
                     <a:lstStyle/>
                     <a:p>
                       <a:r>
@@ -8391,7 +8859,7 @@
                 </a:tc>
                 <a:tc>
                   <a:txBody>
-                    <a:bodyPr wrap="square"/>
+                    <a:bodyPr/>
                     <a:lstStyle/>
                     <a:p>
                       <a:r>
@@ -8401,7 +8869,7 @@
                           </a:solidFill>
                           <a:latin typeface="Calibri"/>
                         </a:rPr>
-                        <a:t>Finds the page, slide or video for a concept</a:t>
+                        <a:t>Finds the lecture, slide or assignment for a concept</a:t>
                       </a:r>
                     </a:p>
                   </a:txBody>
@@ -8411,11 +8879,16 @@
                     </a:solidFill>
                   </a:tcPr>
                 </a:tc>
+                <a:extLst>
+                  <a:ext uri="{0D108BD9-81ED-4DB2-BD59-A6C34878D82A}">
+                    <a16:rowId xmlns:a16="http://schemas.microsoft.com/office/drawing/2014/main" val="10005"/>
+                  </a:ext>
+                </a:extLst>
               </a:tr>
               <a:tr h="475488">
                 <a:tc>
                   <a:txBody>
-                    <a:bodyPr wrap="square"/>
+                    <a:bodyPr/>
                     <a:lstStyle/>
                     <a:p>
                       <a:r>
@@ -8437,7 +8910,7 @@
                 </a:tc>
                 <a:tc>
                   <a:txBody>
-                    <a:bodyPr wrap="square"/>
+                    <a:bodyPr/>
                     <a:lstStyle/>
                     <a:p>
                       <a:r>
@@ -8459,7 +8932,7 @@
                 </a:tc>
                 <a:tc>
                   <a:txBody>
-                    <a:bodyPr wrap="square"/>
+                    <a:bodyPr/>
                     <a:lstStyle/>
                     <a:p>
                       <a:r>
@@ -8479,6 +8952,11 @@
                     </a:solidFill>
                   </a:tcPr>
                 </a:tc>
+                <a:extLst>
+                  <a:ext uri="{0D108BD9-81ED-4DB2-BD59-A6C34878D82A}">
+                    <a16:rowId xmlns:a16="http://schemas.microsoft.com/office/drawing/2014/main" val="10006"/>
+                  </a:ext>
+                </a:extLst>
               </a:tr>
             </a:tbl>
           </a:graphicData>
@@ -8501,7 +8979,7 @@
           <a:noFill/>
         </p:spPr>
         <p:txBody>
-          <a:bodyPr wrap="square" anchor="t" lIns="45720" rIns="45720">
+          <a:bodyPr wrap="square" lIns="45720" rIns="45720" anchor="t">
             <a:spAutoFit/>
           </a:bodyPr>
           <a:lstStyle/>
@@ -8548,7 +9026,7 @@
 </file>
 
 <file path=ppt/slides/slide7.xml><?xml version="1.0" encoding="utf-8"?>
-<p:sld xmlns:a="http://schemas.openxmlformats.org/drawingml/2006/main" xmlns:p="http://schemas.openxmlformats.org/presentationml/2006/main" xmlns:r="http://schemas.openxmlformats.org/officeDocument/2006/relationships">
+<p:sld xmlns:a="http://schemas.openxmlformats.org/drawingml/2006/main" xmlns:r="http://schemas.openxmlformats.org/officeDocument/2006/relationships" xmlns:p="http://schemas.openxmlformats.org/presentationml/2006/main">
   <p:cSld>
     <p:spTree>
       <p:nvGrpSpPr>
@@ -8556,7 +9034,14 @@
         <p:cNvGrpSpPr/>
         <p:nvPr/>
       </p:nvGrpSpPr>
-      <p:grpSpPr/>
+      <p:grpSpPr>
+        <a:xfrm>
+          <a:off x="0" y="0"/>
+          <a:ext cx="0" cy="0"/>
+          <a:chOff x="0" y="0"/>
+          <a:chExt cx="0" cy="0"/>
+        </a:xfrm>
+      </p:grpSpPr>
       <p:sp>
         <p:nvSpPr>
           <p:cNvPr id="2" name="Rectangle 1"/>
@@ -8598,6 +9083,7 @@
           <a:lstStyle/>
           <a:p>
             <a:pPr algn="ctr"/>
+            <a:endParaRPr/>
           </a:p>
         </p:txBody>
       </p:sp>
@@ -8618,7 +9104,7 @@
           <a:noFill/>
         </p:spPr>
         <p:txBody>
-          <a:bodyPr wrap="square" anchor="t" lIns="45720" rIns="45720">
+          <a:bodyPr wrap="square" lIns="45720" rIns="45720" anchor="t">
             <a:spAutoFit/>
           </a:bodyPr>
           <a:lstStyle/>
@@ -8657,7 +9143,7 @@
           <a:noFill/>
         </p:spPr>
         <p:txBody>
-          <a:bodyPr wrap="square" anchor="t" lIns="45720" rIns="45720">
+          <a:bodyPr wrap="square" lIns="45720" rIns="45720" anchor="t">
             <a:spAutoFit/>
           </a:bodyPr>
           <a:lstStyle/>
@@ -8696,7 +9182,7 @@
           <a:noFill/>
         </p:spPr>
         <p:txBody>
-          <a:bodyPr wrap="square" anchor="t" lIns="45720" rIns="45720">
+          <a:bodyPr wrap="square" lIns="45720" rIns="45720" anchor="t">
             <a:spAutoFit/>
           </a:bodyPr>
           <a:lstStyle/>
@@ -8737,14 +9223,32 @@
                 <a:tableStyleId>{5C22544A-7EE6-4342-B048-85BDC9FD1C3A}</a:tableStyleId>
               </a:tblPr>
               <a:tblGrid>
-                <a:gridCol w="1920240"/>
-                <a:gridCol w="2011680"/>
-                <a:gridCol w="1920240"/>
+                <a:gridCol w="1920240">
+                  <a:extLst>
+                    <a:ext uri="{9D8B030D-6E8A-4147-A177-3AD203B41FA5}">
+                      <a16:colId xmlns:a16="http://schemas.microsoft.com/office/drawing/2014/main" val="20000"/>
+                    </a:ext>
+                  </a:extLst>
+                </a:gridCol>
+                <a:gridCol w="2011680">
+                  <a:extLst>
+                    <a:ext uri="{9D8B030D-6E8A-4147-A177-3AD203B41FA5}">
+                      <a16:colId xmlns:a16="http://schemas.microsoft.com/office/drawing/2014/main" val="20001"/>
+                    </a:ext>
+                  </a:extLst>
+                </a:gridCol>
+                <a:gridCol w="1920240">
+                  <a:extLst>
+                    <a:ext uri="{9D8B030D-6E8A-4147-A177-3AD203B41FA5}">
+                      <a16:colId xmlns:a16="http://schemas.microsoft.com/office/drawing/2014/main" val="20002"/>
+                    </a:ext>
+                  </a:extLst>
+                </a:gridCol>
               </a:tblGrid>
               <a:tr h="411480">
                 <a:tc>
                   <a:txBody>
-                    <a:bodyPr wrap="square"/>
+                    <a:bodyPr/>
                     <a:lstStyle/>
                     <a:p>
                       <a:r>
@@ -8766,7 +9270,7 @@
                 </a:tc>
                 <a:tc>
                   <a:txBody>
-                    <a:bodyPr wrap="square"/>
+                    <a:bodyPr/>
                     <a:lstStyle/>
                     <a:p>
                       <a:r>
@@ -8788,7 +9292,7 @@
                 </a:tc>
                 <a:tc>
                   <a:txBody>
-                    <a:bodyPr wrap="square"/>
+                    <a:bodyPr/>
                     <a:lstStyle/>
                     <a:p>
                       <a:r>
@@ -8808,11 +9312,16 @@
                     </a:solidFill>
                   </a:tcPr>
                 </a:tc>
+                <a:extLst>
+                  <a:ext uri="{0D108BD9-81ED-4DB2-BD59-A6C34878D82A}">
+                    <a16:rowId xmlns:a16="http://schemas.microsoft.com/office/drawing/2014/main" val="10000"/>
+                  </a:ext>
+                </a:extLst>
               </a:tr>
               <a:tr h="411480">
                 <a:tc>
                   <a:txBody>
-                    <a:bodyPr wrap="square"/>
+                    <a:bodyPr/>
                     <a:lstStyle/>
                     <a:p>
                       <a:r>
@@ -8822,7 +9331,7 @@
                           </a:solidFill>
                           <a:latin typeface="Calibri"/>
                         </a:rPr>
-                        <a:t>ASSISTments 2009–10</a:t>
+                        <a:t>IITM BS transcripts</a:t>
                       </a:r>
                     </a:p>
                   </a:txBody>
@@ -8834,7 +9343,7 @@
                 </a:tc>
                 <a:tc>
                   <a:txBody>
-                    <a:bodyPr wrap="square"/>
+                    <a:bodyPr/>
                     <a:lstStyle/>
                     <a:p>
                       <a:r>
@@ -8844,7 +9353,7 @@
                           </a:solidFill>
                           <a:latin typeface="Calibri"/>
                         </a:rPr>
-                        <a:t>Train DKT</a:t>
+                        <a:t>Course pack (primary)</a:t>
                       </a:r>
                     </a:p>
                   </a:txBody>
@@ -8856,7 +9365,7 @@
                 </a:tc>
                 <a:tc>
                   <a:txBody>
-                    <a:bodyPr wrap="square"/>
+                    <a:bodyPr/>
                     <a:lstStyle/>
                     <a:p>
                       <a:r>
@@ -8866,7 +9375,7 @@
                           </a:solidFill>
                           <a:latin typeface="Calibri"/>
                         </a:rPr>
-                        <a:t>~346k answers, 4,217 students</a:t>
+                        <a:t>gathered by us</a:t>
                       </a:r>
                     </a:p>
                   </a:txBody>
@@ -8876,11 +9385,16 @@
                     </a:solidFill>
                   </a:tcPr>
                 </a:tc>
+                <a:extLst>
+                  <a:ext uri="{0D108BD9-81ED-4DB2-BD59-A6C34878D82A}">
+                    <a16:rowId xmlns:a16="http://schemas.microsoft.com/office/drawing/2014/main" val="10001"/>
+                  </a:ext>
+                </a:extLst>
               </a:tr>
               <a:tr h="411480">
                 <a:tc>
                   <a:txBody>
-                    <a:bodyPr wrap="square"/>
+                    <a:bodyPr/>
                     <a:lstStyle/>
                     <a:p>
                       <a:r>
@@ -8890,7 +9404,7 @@
                           </a:solidFill>
                           <a:latin typeface="Calibri"/>
                         </a:rPr>
-                        <a:t>EdNet KT1 (optional)</a:t>
+                        <a:t>ASSISTments 2009–10</a:t>
                       </a:r>
                     </a:p>
                   </a:txBody>
@@ -8902,7 +9416,7 @@
                 </a:tc>
                 <a:tc>
                   <a:txBody>
-                    <a:bodyPr wrap="square"/>
+                    <a:bodyPr/>
                     <a:lstStyle/>
                     <a:p>
                       <a:r>
@@ -8912,7 +9426,7 @@
                           </a:solidFill>
                           <a:latin typeface="Calibri"/>
                         </a:rPr>
-                        <a:t>Train DKT (larger)</a:t>
+                        <a:t>Train DKT</a:t>
                       </a:r>
                     </a:p>
                   </a:txBody>
@@ -8924,7 +9438,7 @@
                 </a:tc>
                 <a:tc>
                   <a:txBody>
-                    <a:bodyPr wrap="square"/>
+                    <a:bodyPr/>
                     <a:lstStyle/>
                     <a:p>
                       <a:r>
@@ -8934,7 +9448,7 @@
                           </a:solidFill>
                           <a:latin typeface="Calibri"/>
                         </a:rPr>
-                        <a:t>~95M answers</a:t>
+                        <a:t>~346k answers, 4,217 students</a:t>
                       </a:r>
                     </a:p>
                   </a:txBody>
@@ -8944,11 +9458,16 @@
                     </a:solidFill>
                   </a:tcPr>
                 </a:tc>
+                <a:extLst>
+                  <a:ext uri="{0D108BD9-81ED-4DB2-BD59-A6C34878D82A}">
+                    <a16:rowId xmlns:a16="http://schemas.microsoft.com/office/drawing/2014/main" val="10002"/>
+                  </a:ext>
+                </a:extLst>
               </a:tr>
               <a:tr h="411480">
                 <a:tc>
                   <a:txBody>
-                    <a:bodyPr wrap="square"/>
+                    <a:bodyPr/>
                     <a:lstStyle/>
                     <a:p>
                       <a:r>
@@ -8958,7 +9477,7 @@
                           </a:solidFill>
                           <a:latin typeface="Calibri"/>
                         </a:rPr>
-                        <a:t>MathDial</a:t>
+                        <a:t>EdNet KT1 (optional)</a:t>
                       </a:r>
                     </a:p>
                   </a:txBody>
@@ -8970,7 +9489,7 @@
                 </a:tc>
                 <a:tc>
                   <a:txBody>
-                    <a:bodyPr wrap="square"/>
+                    <a:bodyPr/>
                     <a:lstStyle/>
                     <a:p>
                       <a:r>
@@ -8980,7 +9499,7 @@
                           </a:solidFill>
                           <a:latin typeface="Calibri"/>
                         </a:rPr>
-                        <a:t>Fine-tune Socratic model</a:t>
+                        <a:t>Train DKT (larger)</a:t>
                       </a:r>
                     </a:p>
                   </a:txBody>
@@ -8992,7 +9511,7 @@
                 </a:tc>
                 <a:tc>
                   <a:txBody>
-                    <a:bodyPr wrap="square"/>
+                    <a:bodyPr/>
                     <a:lstStyle/>
                     <a:p>
                       <a:r>
@@ -9002,7 +9521,7 @@
                           </a:solidFill>
                           <a:latin typeface="Calibri"/>
                         </a:rPr>
-                        <a:t>2,861 dialogues</a:t>
+                        <a:t>~95M answers</a:t>
                       </a:r>
                     </a:p>
                   </a:txBody>
@@ -9012,11 +9531,16 @@
                     </a:solidFill>
                   </a:tcPr>
                 </a:tc>
+                <a:extLst>
+                  <a:ext uri="{0D108BD9-81ED-4DB2-BD59-A6C34878D82A}">
+                    <a16:rowId xmlns:a16="http://schemas.microsoft.com/office/drawing/2014/main" val="10003"/>
+                  </a:ext>
+                </a:extLst>
               </a:tr>
               <a:tr h="411480">
                 <a:tc>
                   <a:txBody>
-                    <a:bodyPr wrap="square"/>
+                    <a:bodyPr/>
                     <a:lstStyle/>
                     <a:p>
                       <a:r>
@@ -9026,7 +9550,7 @@
                           </a:solidFill>
                           <a:latin typeface="Calibri"/>
                         </a:rPr>
-                        <a:t>NCERT Maths</a:t>
+                        <a:t>MathDial</a:t>
                       </a:r>
                     </a:p>
                   </a:txBody>
@@ -9038,7 +9562,7 @@
                 </a:tc>
                 <a:tc>
                   <a:txBody>
-                    <a:bodyPr wrap="square"/>
+                    <a:bodyPr/>
                     <a:lstStyle/>
                     <a:p>
                       <a:r>
@@ -9048,7 +9572,7 @@
                           </a:solidFill>
                           <a:latin typeface="Calibri"/>
                         </a:rPr>
-                        <a:t>Course pack (main)</a:t>
+                        <a:t>Fine-tune Socratic model</a:t>
                       </a:r>
                     </a:p>
                   </a:txBody>
@@ -9060,7 +9584,7 @@
                 </a:tc>
                 <a:tc>
                   <a:txBody>
-                    <a:bodyPr wrap="square"/>
+                    <a:bodyPr/>
                     <a:lstStyle/>
                     <a:p>
                       <a:r>
@@ -9070,7 +9594,7 @@
                           </a:solidFill>
                           <a:latin typeface="Calibri"/>
                         </a:rPr>
-                        <a:t>several classes</a:t>
+                        <a:t>2,861 dialogues</a:t>
                       </a:r>
                     </a:p>
                   </a:txBody>
@@ -9080,11 +9604,16 @@
                     </a:solidFill>
                   </a:tcPr>
                 </a:tc>
+                <a:extLst>
+                  <a:ext uri="{0D108BD9-81ED-4DB2-BD59-A6C34878D82A}">
+                    <a16:rowId xmlns:a16="http://schemas.microsoft.com/office/drawing/2014/main" val="10004"/>
+                  </a:ext>
+                </a:extLst>
               </a:tr>
               <a:tr h="411480">
                 <a:tc>
                   <a:txBody>
-                    <a:bodyPr wrap="square"/>
+                    <a:bodyPr/>
                     <a:lstStyle/>
                     <a:p>
                       <a:r>
@@ -9094,7 +9623,7 @@
                           </a:solidFill>
                           <a:latin typeface="Calibri"/>
                         </a:rPr>
-                        <a:t>IITM BS transcripts</a:t>
+                        <a:t>NCERT Maths</a:t>
                       </a:r>
                     </a:p>
                   </a:txBody>
@@ -9106,7 +9635,7 @@
                 </a:tc>
                 <a:tc>
                   <a:txBody>
-                    <a:bodyPr wrap="square"/>
+                    <a:bodyPr/>
                     <a:lstStyle/>
                     <a:p>
                       <a:r>
@@ -9128,7 +9657,7 @@
                 </a:tc>
                 <a:tc>
                   <a:txBody>
-                    <a:bodyPr wrap="square"/>
+                    <a:bodyPr/>
                     <a:lstStyle/>
                     <a:p>
                       <a:r>
@@ -9138,7 +9667,7 @@
                           </a:solidFill>
                           <a:latin typeface="Calibri"/>
                         </a:rPr>
-                        <a:t>gathered by us</a:t>
+                        <a:t>several classes</a:t>
                       </a:r>
                     </a:p>
                   </a:txBody>
@@ -9148,6 +9677,11 @@
                     </a:solidFill>
                   </a:tcPr>
                 </a:tc>
+                <a:extLst>
+                  <a:ext uri="{0D108BD9-81ED-4DB2-BD59-A6C34878D82A}">
+                    <a16:rowId xmlns:a16="http://schemas.microsoft.com/office/drawing/2014/main" val="10005"/>
+                  </a:ext>
+                </a:extLst>
               </a:tr>
             </a:tbl>
           </a:graphicData>
@@ -9170,7 +9704,7 @@
           <a:noFill/>
         </p:spPr>
         <p:txBody>
-          <a:bodyPr wrap="square" anchor="t" lIns="45720" rIns="45720">
+          <a:bodyPr wrap="square" lIns="45720" rIns="45720" anchor="t">
             <a:spAutoFit/>
           </a:bodyPr>
           <a:lstStyle/>
@@ -9209,7 +9743,7 @@
           <a:noFill/>
         </p:spPr>
         <p:txBody>
-          <a:bodyPr wrap="square" anchor="t" lIns="45720" rIns="45720">
+          <a:bodyPr wrap="square" lIns="45720" rIns="45720" anchor="t">
             <a:spAutoFit/>
           </a:bodyPr>
           <a:lstStyle/>
@@ -9250,15 +9784,39 @@
                 <a:tableStyleId>{5C22544A-7EE6-4342-B048-85BDC9FD1C3A}</a:tableStyleId>
               </a:tblPr>
               <a:tblGrid>
-                <a:gridCol w="1097280"/>
-                <a:gridCol w="2743200"/>
-                <a:gridCol w="1005840"/>
-                <a:gridCol w="1005840"/>
+                <a:gridCol w="1097280">
+                  <a:extLst>
+                    <a:ext uri="{9D8B030D-6E8A-4147-A177-3AD203B41FA5}">
+                      <a16:colId xmlns:a16="http://schemas.microsoft.com/office/drawing/2014/main" val="20000"/>
+                    </a:ext>
+                  </a:extLst>
+                </a:gridCol>
+                <a:gridCol w="2743200">
+                  <a:extLst>
+                    <a:ext uri="{9D8B030D-6E8A-4147-A177-3AD203B41FA5}">
+                      <a16:colId xmlns:a16="http://schemas.microsoft.com/office/drawing/2014/main" val="20001"/>
+                    </a:ext>
+                  </a:extLst>
+                </a:gridCol>
+                <a:gridCol w="1005840">
+                  <a:extLst>
+                    <a:ext uri="{9D8B030D-6E8A-4147-A177-3AD203B41FA5}">
+                      <a16:colId xmlns:a16="http://schemas.microsoft.com/office/drawing/2014/main" val="20002"/>
+                    </a:ext>
+                  </a:extLst>
+                </a:gridCol>
+                <a:gridCol w="1005840">
+                  <a:extLst>
+                    <a:ext uri="{9D8B030D-6E8A-4147-A177-3AD203B41FA5}">
+                      <a16:colId xmlns:a16="http://schemas.microsoft.com/office/drawing/2014/main" val="20003"/>
+                    </a:ext>
+                  </a:extLst>
+                </a:gridCol>
               </a:tblGrid>
               <a:tr h="365760">
                 <a:tc>
                   <a:txBody>
-                    <a:bodyPr wrap="square"/>
+                    <a:bodyPr/>
                     <a:lstStyle/>
                     <a:p>
                       <a:r>
@@ -9280,7 +9838,7 @@
                 </a:tc>
                 <a:tc>
                   <a:txBody>
-                    <a:bodyPr wrap="square"/>
+                    <a:bodyPr/>
                     <a:lstStyle/>
                     <a:p>
                       <a:r>
@@ -9302,7 +9860,7 @@
                 </a:tc>
                 <a:tc>
                   <a:txBody>
-                    <a:bodyPr wrap="square"/>
+                    <a:bodyPr/>
                     <a:lstStyle/>
                     <a:p>
                       <a:r>
@@ -9324,7 +9882,7 @@
                 </a:tc>
                 <a:tc>
                   <a:txBody>
-                    <a:bodyPr wrap="square"/>
+                    <a:bodyPr/>
                     <a:lstStyle/>
                     <a:p>
                       <a:r>
@@ -9344,11 +9902,16 @@
                     </a:solidFill>
                   </a:tcPr>
                 </a:tc>
+                <a:extLst>
+                  <a:ext uri="{0D108BD9-81ED-4DB2-BD59-A6C34878D82A}">
+                    <a16:rowId xmlns:a16="http://schemas.microsoft.com/office/drawing/2014/main" val="10000"/>
+                  </a:ext>
+                </a:extLst>
               </a:tr>
               <a:tr h="365760">
                 <a:tc>
                   <a:txBody>
-                    <a:bodyPr wrap="square"/>
+                    <a:bodyPr/>
                     <a:lstStyle/>
                     <a:p>
                       <a:r>
@@ -9370,7 +9933,7 @@
                 </a:tc>
                 <a:tc>
                   <a:txBody>
-                    <a:bodyPr wrap="square"/>
+                    <a:bodyPr/>
                     <a:lstStyle/>
                     <a:p>
                       <a:r>
@@ -9392,7 +9955,7 @@
                 </a:tc>
                 <a:tc>
                   <a:txBody>
-                    <a:bodyPr wrap="square"/>
+                    <a:bodyPr/>
                     <a:lstStyle/>
                     <a:p>
                       <a:r>
@@ -9414,7 +9977,7 @@
                 </a:tc>
                 <a:tc>
                   <a:txBody>
-                    <a:bodyPr wrap="square"/>
+                    <a:bodyPr/>
                     <a:lstStyle/>
                     <a:p>
                       <a:r>
@@ -9434,11 +9997,16 @@
                     </a:solidFill>
                   </a:tcPr>
                 </a:tc>
+                <a:extLst>
+                  <a:ext uri="{0D108BD9-81ED-4DB2-BD59-A6C34878D82A}">
+                    <a16:rowId xmlns:a16="http://schemas.microsoft.com/office/drawing/2014/main" val="10001"/>
+                  </a:ext>
+                </a:extLst>
               </a:tr>
               <a:tr h="365760">
                 <a:tc>
                   <a:txBody>
-                    <a:bodyPr wrap="square"/>
+                    <a:bodyPr/>
                     <a:lstStyle/>
                     <a:p>
                       <a:r>
@@ -9460,7 +10028,7 @@
                 </a:tc>
                 <a:tc>
                   <a:txBody>
-                    <a:bodyPr wrap="square"/>
+                    <a:bodyPr/>
                     <a:lstStyle/>
                     <a:p>
                       <a:r>
@@ -9482,7 +10050,7 @@
                 </a:tc>
                 <a:tc>
                   <a:txBody>
-                    <a:bodyPr wrap="square"/>
+                    <a:bodyPr/>
                     <a:lstStyle/>
                     <a:p>
                       <a:r>
@@ -9504,7 +10072,7 @@
                 </a:tc>
                 <a:tc>
                   <a:txBody>
-                    <a:bodyPr wrap="square"/>
+                    <a:bodyPr/>
                     <a:lstStyle/>
                     <a:p>
                       <a:r>
@@ -9524,6 +10092,11 @@
                     </a:solidFill>
                   </a:tcPr>
                 </a:tc>
+                <a:extLst>
+                  <a:ext uri="{0D108BD9-81ED-4DB2-BD59-A6C34878D82A}">
+                    <a16:rowId xmlns:a16="http://schemas.microsoft.com/office/drawing/2014/main" val="10002"/>
+                  </a:ext>
+                </a:extLst>
               </a:tr>
             </a:tbl>
           </a:graphicData>
@@ -9546,7 +10119,7 @@
           <a:noFill/>
         </p:spPr>
         <p:txBody>
-          <a:bodyPr wrap="square" anchor="t" lIns="45720" rIns="45720">
+          <a:bodyPr wrap="square" lIns="45720" rIns="45720" anchor="t">
             <a:spAutoFit/>
           </a:bodyPr>
           <a:lstStyle/>
@@ -9611,6 +10184,7 @@
           <a:lstStyle/>
           <a:p>
             <a:pPr algn="ctr"/>
+            <a:endParaRPr/>
           </a:p>
         </p:txBody>
       </p:sp>
@@ -9631,7 +10205,7 @@
           <a:noFill/>
         </p:spPr>
         <p:txBody>
-          <a:bodyPr wrap="square" anchor="t" lIns="45720" rIns="45720">
+          <a:bodyPr wrap="square" lIns="45720" rIns="45720" anchor="t">
             <a:spAutoFit/>
           </a:bodyPr>
           <a:lstStyle/>
@@ -9758,7 +10332,7 @@
 </file>
 
 <file path=ppt/slides/slide8.xml><?xml version="1.0" encoding="utf-8"?>
-<p:sld xmlns:a="http://schemas.openxmlformats.org/drawingml/2006/main" xmlns:p="http://schemas.openxmlformats.org/presentationml/2006/main" xmlns:r="http://schemas.openxmlformats.org/officeDocument/2006/relationships">
+<p:sld xmlns:a="http://schemas.openxmlformats.org/drawingml/2006/main" xmlns:r="http://schemas.openxmlformats.org/officeDocument/2006/relationships" xmlns:p="http://schemas.openxmlformats.org/presentationml/2006/main">
   <p:cSld>
     <p:spTree>
       <p:nvGrpSpPr>
@@ -9766,7 +10340,14 @@
         <p:cNvGrpSpPr/>
         <p:nvPr/>
       </p:nvGrpSpPr>
-      <p:grpSpPr/>
+      <p:grpSpPr>
+        <a:xfrm>
+          <a:off x="0" y="0"/>
+          <a:ext cx="0" cy="0"/>
+          <a:chOff x="0" y="0"/>
+          <a:chExt cx="0" cy="0"/>
+        </a:xfrm>
+      </p:grpSpPr>
       <p:sp>
         <p:nvSpPr>
           <p:cNvPr id="2" name="Rectangle 1"/>
@@ -9808,6 +10389,7 @@
           <a:lstStyle/>
           <a:p>
             <a:pPr algn="ctr"/>
+            <a:endParaRPr/>
           </a:p>
         </p:txBody>
       </p:sp>
@@ -9828,7 +10410,7 @@
           <a:noFill/>
         </p:spPr>
         <p:txBody>
-          <a:bodyPr wrap="square" anchor="t" lIns="45720" rIns="45720">
+          <a:bodyPr wrap="square" lIns="45720" rIns="45720" anchor="t">
             <a:spAutoFit/>
           </a:bodyPr>
           <a:lstStyle/>
@@ -9867,7 +10449,7 @@
           <a:noFill/>
         </p:spPr>
         <p:txBody>
-          <a:bodyPr wrap="square" anchor="t" lIns="45720" rIns="45720">
+          <a:bodyPr wrap="square" lIns="45720" rIns="45720" anchor="t">
             <a:spAutoFit/>
           </a:bodyPr>
           <a:lstStyle/>
@@ -9906,7 +10488,7 @@
           <a:noFill/>
         </p:spPr>
         <p:txBody>
-          <a:bodyPr wrap="square" anchor="t" lIns="45720" rIns="45720">
+          <a:bodyPr wrap="square" lIns="45720" rIns="45720" anchor="t">
             <a:spAutoFit/>
           </a:bodyPr>
           <a:lstStyle/>
@@ -9947,15 +10529,39 @@
                 <a:tableStyleId>{5C22544A-7EE6-4342-B048-85BDC9FD1C3A}</a:tableStyleId>
               </a:tblPr>
               <a:tblGrid>
-                <a:gridCol w="2011680"/>
-                <a:gridCol w="3108960"/>
-                <a:gridCol w="3474720"/>
-                <a:gridCol w="2468880"/>
+                <a:gridCol w="2011680">
+                  <a:extLst>
+                    <a:ext uri="{9D8B030D-6E8A-4147-A177-3AD203B41FA5}">
+                      <a16:colId xmlns:a16="http://schemas.microsoft.com/office/drawing/2014/main" val="20000"/>
+                    </a:ext>
+                  </a:extLst>
+                </a:gridCol>
+                <a:gridCol w="3108960">
+                  <a:extLst>
+                    <a:ext uri="{9D8B030D-6E8A-4147-A177-3AD203B41FA5}">
+                      <a16:colId xmlns:a16="http://schemas.microsoft.com/office/drawing/2014/main" val="20001"/>
+                    </a:ext>
+                  </a:extLst>
+                </a:gridCol>
+                <a:gridCol w="3474720">
+                  <a:extLst>
+                    <a:ext uri="{9D8B030D-6E8A-4147-A177-3AD203B41FA5}">
+                      <a16:colId xmlns:a16="http://schemas.microsoft.com/office/drawing/2014/main" val="20002"/>
+                    </a:ext>
+                  </a:extLst>
+                </a:gridCol>
+                <a:gridCol w="2468880">
+                  <a:extLst>
+                    <a:ext uri="{9D8B030D-6E8A-4147-A177-3AD203B41FA5}">
+                      <a16:colId xmlns:a16="http://schemas.microsoft.com/office/drawing/2014/main" val="20003"/>
+                    </a:ext>
+                  </a:extLst>
+                </a:gridCol>
               </a:tblGrid>
               <a:tr h="457200">
                 <a:tc>
                   <a:txBody>
-                    <a:bodyPr wrap="square"/>
+                    <a:bodyPr/>
                     <a:lstStyle/>
                     <a:p>
                       <a:r>
@@ -9977,7 +10583,7 @@
                 </a:tc>
                 <a:tc>
                   <a:txBody>
-                    <a:bodyPr wrap="square"/>
+                    <a:bodyPr/>
                     <a:lstStyle/>
                     <a:p>
                       <a:r>
@@ -9999,7 +10605,7 @@
                 </a:tc>
                 <a:tc>
                   <a:txBody>
-                    <a:bodyPr wrap="square"/>
+                    <a:bodyPr/>
                     <a:lstStyle/>
                     <a:p>
                       <a:r>
@@ -10021,7 +10627,7 @@
                 </a:tc>
                 <a:tc>
                   <a:txBody>
-                    <a:bodyPr wrap="square"/>
+                    <a:bodyPr/>
                     <a:lstStyle/>
                     <a:p>
                       <a:r>
@@ -10041,11 +10647,16 @@
                     </a:solidFill>
                   </a:tcPr>
                 </a:tc>
+                <a:extLst>
+                  <a:ext uri="{0D108BD9-81ED-4DB2-BD59-A6C34878D82A}">
+                    <a16:rowId xmlns:a16="http://schemas.microsoft.com/office/drawing/2014/main" val="10000"/>
+                  </a:ext>
+                </a:extLst>
               </a:tr>
               <a:tr h="457200">
                 <a:tc>
                   <a:txBody>
-                    <a:bodyPr wrap="square"/>
+                    <a:bodyPr/>
                     <a:lstStyle/>
                     <a:p>
                       <a:r>
@@ -10067,7 +10678,7 @@
                 </a:tc>
                 <a:tc>
                   <a:txBody>
-                    <a:bodyPr wrap="square"/>
+                    <a:bodyPr/>
                     <a:lstStyle/>
                     <a:p>
                       <a:r>
@@ -10089,7 +10700,7 @@
                 </a:tc>
                 <a:tc>
                   <a:txBody>
-                    <a:bodyPr wrap="square"/>
+                    <a:bodyPr/>
                     <a:lstStyle/>
                     <a:p>
                       <a:r>
@@ -10111,7 +10722,7 @@
                 </a:tc>
                 <a:tc>
                   <a:txBody>
-                    <a:bodyPr wrap="square"/>
+                    <a:bodyPr/>
                     <a:lstStyle/>
                     <a:p>
                       <a:r>
@@ -10131,11 +10742,16 @@
                     </a:solidFill>
                   </a:tcPr>
                 </a:tc>
+                <a:extLst>
+                  <a:ext uri="{0D108BD9-81ED-4DB2-BD59-A6C34878D82A}">
+                    <a16:rowId xmlns:a16="http://schemas.microsoft.com/office/drawing/2014/main" val="10001"/>
+                  </a:ext>
+                </a:extLst>
               </a:tr>
               <a:tr h="457200">
                 <a:tc>
                   <a:txBody>
-                    <a:bodyPr wrap="square"/>
+                    <a:bodyPr/>
                     <a:lstStyle/>
                     <a:p>
                       <a:r>
@@ -10157,7 +10773,7 @@
                 </a:tc>
                 <a:tc>
                   <a:txBody>
-                    <a:bodyPr wrap="square"/>
+                    <a:bodyPr/>
                     <a:lstStyle/>
                     <a:p>
                       <a:r>
@@ -10179,7 +10795,7 @@
                 </a:tc>
                 <a:tc>
                   <a:txBody>
-                    <a:bodyPr wrap="square"/>
+                    <a:bodyPr/>
                     <a:lstStyle/>
                     <a:p>
                       <a:r>
@@ -10201,7 +10817,7 @@
                 </a:tc>
                 <a:tc>
                   <a:txBody>
-                    <a:bodyPr wrap="square"/>
+                    <a:bodyPr/>
                     <a:lstStyle/>
                     <a:p>
                       <a:r>
@@ -10221,11 +10837,16 @@
                     </a:solidFill>
                   </a:tcPr>
                 </a:tc>
+                <a:extLst>
+                  <a:ext uri="{0D108BD9-81ED-4DB2-BD59-A6C34878D82A}">
+                    <a16:rowId xmlns:a16="http://schemas.microsoft.com/office/drawing/2014/main" val="10002"/>
+                  </a:ext>
+                </a:extLst>
               </a:tr>
               <a:tr h="457200">
                 <a:tc>
                   <a:txBody>
-                    <a:bodyPr wrap="square"/>
+                    <a:bodyPr/>
                     <a:lstStyle/>
                     <a:p>
                       <a:r>
@@ -10247,7 +10868,7 @@
                 </a:tc>
                 <a:tc>
                   <a:txBody>
-                    <a:bodyPr wrap="square"/>
+                    <a:bodyPr/>
                     <a:lstStyle/>
                     <a:p>
                       <a:r>
@@ -10257,7 +10878,7 @@
                           </a:solidFill>
                           <a:latin typeface="Calibri"/>
                         </a:rPr>
-                        <a:t>% gaps found at the right level</a:t>
+                        <a:t>% gaps found in the right course</a:t>
                       </a:r>
                     </a:p>
                   </a:txBody>
@@ -10269,7 +10890,7 @@
                 </a:tc>
                 <a:tc>
                   <a:txBody>
-                    <a:bodyPr wrap="square"/>
+                    <a:bodyPr/>
                     <a:lstStyle/>
                     <a:p>
                       <a:r>
@@ -10291,7 +10912,7 @@
                 </a:tc>
                 <a:tc>
                   <a:txBody>
-                    <a:bodyPr wrap="square"/>
+                    <a:bodyPr/>
                     <a:lstStyle/>
                     <a:p>
                       <a:r>
@@ -10311,11 +10932,16 @@
                     </a:solidFill>
                   </a:tcPr>
                 </a:tc>
+                <a:extLst>
+                  <a:ext uri="{0D108BD9-81ED-4DB2-BD59-A6C34878D82A}">
+                    <a16:rowId xmlns:a16="http://schemas.microsoft.com/office/drawing/2014/main" val="10003"/>
+                  </a:ext>
+                </a:extLst>
               </a:tr>
               <a:tr h="457200">
                 <a:tc>
                   <a:txBody>
-                    <a:bodyPr wrap="square"/>
+                    <a:bodyPr/>
                     <a:lstStyle/>
                     <a:p>
                       <a:r>
@@ -10337,7 +10963,7 @@
                 </a:tc>
                 <a:tc>
                   <a:txBody>
-                    <a:bodyPr wrap="square"/>
+                    <a:bodyPr/>
                     <a:lstStyle/>
                     <a:p>
                       <a:r>
@@ -10359,7 +10985,7 @@
                 </a:tc>
                 <a:tc>
                   <a:txBody>
-                    <a:bodyPr wrap="square"/>
+                    <a:bodyPr/>
                     <a:lstStyle/>
                     <a:p>
                       <a:r>
@@ -10381,7 +11007,7 @@
                 </a:tc>
                 <a:tc>
                   <a:txBody>
-                    <a:bodyPr wrap="square"/>
+                    <a:bodyPr/>
                     <a:lstStyle/>
                     <a:p>
                       <a:r>
@@ -10401,11 +11027,16 @@
                     </a:solidFill>
                   </a:tcPr>
                 </a:tc>
+                <a:extLst>
+                  <a:ext uri="{0D108BD9-81ED-4DB2-BD59-A6C34878D82A}">
+                    <a16:rowId xmlns:a16="http://schemas.microsoft.com/office/drawing/2014/main" val="10004"/>
+                  </a:ext>
+                </a:extLst>
               </a:tr>
               <a:tr h="457200">
                 <a:tc>
                   <a:txBody>
-                    <a:bodyPr wrap="square"/>
+                    <a:bodyPr/>
                     <a:lstStyle/>
                     <a:p>
                       <a:r>
@@ -10427,7 +11058,7 @@
                 </a:tc>
                 <a:tc>
                   <a:txBody>
-                    <a:bodyPr wrap="square"/>
+                    <a:bodyPr/>
                     <a:lstStyle/>
                     <a:p>
                       <a:r>
@@ -10449,7 +11080,7 @@
                 </a:tc>
                 <a:tc>
                   <a:txBody>
-                    <a:bodyPr wrap="square"/>
+                    <a:bodyPr/>
                     <a:lstStyle/>
                     <a:p>
                       <a:r>
@@ -10471,7 +11102,7 @@
                 </a:tc>
                 <a:tc>
                   <a:txBody>
-                    <a:bodyPr wrap="square"/>
+                    <a:bodyPr/>
                     <a:lstStyle/>
                     <a:p>
                       <a:r>
@@ -10491,6 +11122,11 @@
                     </a:solidFill>
                   </a:tcPr>
                 </a:tc>
+                <a:extLst>
+                  <a:ext uri="{0D108BD9-81ED-4DB2-BD59-A6C34878D82A}">
+                    <a16:rowId xmlns:a16="http://schemas.microsoft.com/office/drawing/2014/main" val="10005"/>
+                  </a:ext>
+                </a:extLst>
               </a:tr>
             </a:tbl>
           </a:graphicData>
@@ -10513,7 +11149,7 @@
           <a:noFill/>
         </p:spPr>
         <p:txBody>
-          <a:bodyPr wrap="square" anchor="t" lIns="45720" rIns="45720">
+          <a:bodyPr wrap="square" lIns="45720" rIns="45720" anchor="t">
             <a:spAutoFit/>
           </a:bodyPr>
           <a:lstStyle/>
@@ -10552,7 +11188,7 @@
           <a:noFill/>
         </p:spPr>
         <p:txBody>
-          <a:bodyPr wrap="square" anchor="t" lIns="45720" rIns="45720">
+          <a:bodyPr wrap="square" lIns="45720" rIns="45720" anchor="t">
             <a:spAutoFit/>
           </a:bodyPr>
           <a:lstStyle/>
@@ -10569,7 +11205,7 @@
                 </a:solidFill>
                 <a:latin typeface="Calibri"/>
               </a:rPr>
-              <a:t>•  60–100 annotated scenarios we write (careless slip, gap 1 level down, gap 2 levels down…) + the TA’s test samples</a:t>
+              <a:t>•  60–100 annotated IITM scenarios (careless slip, gap 1 course back, gap 2 courses back…) + any provided test samples</a:t>
             </a:r>
           </a:p>
           <a:p>
@@ -10601,7 +11237,7 @@
                 </a:solidFill>
                 <a:latin typeface="Calibri"/>
               </a:rPr>
-              <a:t>•  Same tests on NCERT and IITM BS course packs, with no code changes</a:t>
+              <a:t>•  Same tests on the IITM BS and NCERT course packs, with no code changes</a:t>
             </a:r>
           </a:p>
         </p:txBody>
@@ -10615,7 +11251,7 @@
 </file>
 
 <file path=ppt/slides/slide9.xml><?xml version="1.0" encoding="utf-8"?>
-<p:sld xmlns:a="http://schemas.openxmlformats.org/drawingml/2006/main" xmlns:p="http://schemas.openxmlformats.org/presentationml/2006/main" xmlns:r="http://schemas.openxmlformats.org/officeDocument/2006/relationships">
+<p:sld xmlns:a="http://schemas.openxmlformats.org/drawingml/2006/main" xmlns:r="http://schemas.openxmlformats.org/officeDocument/2006/relationships" xmlns:p="http://schemas.openxmlformats.org/presentationml/2006/main">
   <p:cSld>
     <p:spTree>
       <p:nvGrpSpPr>
@@ -10623,7 +11259,14 @@
         <p:cNvGrpSpPr/>
         <p:nvPr/>
       </p:nvGrpSpPr>
-      <p:grpSpPr/>
+      <p:grpSpPr>
+        <a:xfrm>
+          <a:off x="0" y="0"/>
+          <a:ext cx="0" cy="0"/>
+          <a:chOff x="0" y="0"/>
+          <a:chExt cx="0" cy="0"/>
+        </a:xfrm>
+      </p:grpSpPr>
       <p:sp>
         <p:nvSpPr>
           <p:cNvPr id="2" name="Rectangle 1"/>
@@ -10665,6 +11308,7 @@
           <a:lstStyle/>
           <a:p>
             <a:pPr algn="ctr"/>
+            <a:endParaRPr/>
           </a:p>
         </p:txBody>
       </p:sp>
@@ -10685,7 +11329,7 @@
           <a:noFill/>
         </p:spPr>
         <p:txBody>
-          <a:bodyPr wrap="square" anchor="t" lIns="45720" rIns="45720">
+          <a:bodyPr wrap="square" lIns="45720" rIns="45720" anchor="t">
             <a:spAutoFit/>
           </a:bodyPr>
           <a:lstStyle/>
@@ -10724,7 +11368,7 @@
           <a:noFill/>
         </p:spPr>
         <p:txBody>
-          <a:bodyPr wrap="square" anchor="t" lIns="45720" rIns="45720">
+          <a:bodyPr wrap="square" lIns="45720" rIns="45720" anchor="t">
             <a:spAutoFit/>
           </a:bodyPr>
           <a:lstStyle/>
@@ -10763,7 +11407,7 @@
           <a:noFill/>
         </p:spPr>
         <p:txBody>
-          <a:bodyPr wrap="square" anchor="t" lIns="45720" rIns="45720">
+          <a:bodyPr wrap="square" lIns="45720" rIns="45720" anchor="t">
             <a:spAutoFit/>
           </a:bodyPr>
           <a:lstStyle/>
@@ -10794,7 +11438,7 @@
         <p:spPr>
           <a:xfrm>
             <a:off x="548640" y="1143000"/>
-            <a:ext cx="6766560" cy="3566160"/>
+            <a:ext cx="6766560" cy="3931920"/>
           </a:xfrm>
           <a:prstGeom prst="roundRect">
             <a:avLst>
@@ -10830,6 +11474,7 @@
           <a:lstStyle/>
           <a:p>
             <a:pPr algn="ctr"/>
+            <a:endParaRPr/>
           </a:p>
         </p:txBody>
       </p:sp>
@@ -10842,7 +11487,7 @@
         <p:spPr>
           <a:xfrm>
             <a:off x="685800" y="1188720"/>
-            <a:ext cx="6583680" cy="4572000"/>
+            <a:ext cx="6583680" cy="4937760"/>
           </a:xfrm>
           <a:prstGeom prst="rect">
             <a:avLst/>
@@ -10850,7 +11495,7 @@
           <a:noFill/>
         </p:spPr>
         <p:txBody>
-          <a:bodyPr wrap="square" anchor="t" lIns="45720" rIns="45720">
+          <a:bodyPr wrap="square" lIns="45720" rIns="45720" anchor="t">
             <a:spAutoFit/>
           </a:bodyPr>
           <a:lstStyle/>
@@ -10867,7 +11512,7 @@
                 </a:solidFill>
                 <a:latin typeface="Calibri"/>
               </a:rPr>
-              <a:t>Learner: What is 20% of 50?  My answer: 2.5</a:t>
+              <a:t>Learner: How does training happen in Linear Regression?</a:t>
             </a:r>
           </a:p>
           <a:p>
@@ -10877,13 +11522,13 @@
               </a:spcAft>
             </a:pPr>
             <a:r>
-              <a:rPr sz="1200" b="0">
+              <a:rPr sz="1100" b="0">
                 <a:solidFill>
                   <a:srgbClr val="1F1F1F"/>
                 </a:solidFill>
                 <a:latin typeface="Calibri"/>
               </a:rPr>
-              <a:t>Tutor: What does 20% mean: 20 out of how many?   Learner: 100 ✓</a:t>
+              <a:t>Tutor: In supervised learning, what do we give the model?   Learner: Inputs and outputs ✓</a:t>
             </a:r>
           </a:p>
           <a:p>
@@ -10893,13 +11538,13 @@
               </a:spcAft>
             </a:pPr>
             <a:r>
-              <a:rPr sz="1200" b="0">
+              <a:rPr sz="1100" b="0">
                 <a:solidFill>
                   <a:srgbClr val="1F1F1F"/>
                 </a:solidFill>
                 <a:latin typeface="Calibri"/>
               </a:rPr>
-              <a:t>Tutor: So 20% = 20/100. Simplest form?   Learner: I don’t know</a:t>
+              <a:t>Tutor: y = w·x, w = [2,1], x = [3,4]. Prediction?   Learner: 10 ✓</a:t>
             </a:r>
           </a:p>
           <a:p>
@@ -10909,13 +11554,13 @@
               </a:spcAft>
             </a:pPr>
             <a:r>
-              <a:rPr sz="1200" b="0">
-                <a:solidFill>
-                  <a:srgbClr val="0F7C8C"/>
+              <a:rPr sz="1100" b="0">
+                <a:solidFill>
+                  <a:srgbClr val="1F1F1F"/>
                 </a:solidFill>
                 <a:latin typeface="Calibri"/>
               </a:rPr>
-              <a:t>[gap at Level 2 → checking division]</a:t>
+              <a:t>Tutor: True y is 12. Squared error?   Learner: 4 ✓</a:t>
             </a:r>
           </a:p>
           <a:p>
@@ -10925,13 +11570,13 @@
               </a:spcAft>
             </a:pPr>
             <a:r>
-              <a:rPr sz="1200" b="0">
+              <a:rPr sz="1100" b="0">
                 <a:solidFill>
                   <a:srgbClr val="1F1F1F"/>
                 </a:solidFill>
                 <a:latin typeface="Calibri"/>
               </a:rPr>
-              <a:t>Tutor: What is 100 ÷ 20?   Learner: 5 ✓</a:t>
+              <a:t>Tutor: For L(w) = (6 − 2w)², what is dL/dw?   Learner: I don’t know</a:t>
             </a:r>
           </a:p>
           <a:p>
@@ -10941,13 +11586,13 @@
               </a:spcAft>
             </a:pPr>
             <a:r>
-              <a:rPr sz="1200" b="0">
-                <a:solidFill>
-                  <a:srgbClr val="1F1F1F"/>
+              <a:rPr sz="1100" b="0">
+                <a:solidFill>
+                  <a:srgbClr val="0F7C8C"/>
                 </a:solidFill>
                 <a:latin typeface="Calibri"/>
               </a:rPr>
-              <a:t>Tutor: So 20/100 = 1/5. What is 1/5 of 50?  Hint: 5 equal groups 📖</a:t>
+              <a:t>[gap in Maths 2: derivatives → checking Maths 1: slope]</a:t>
             </a:r>
           </a:p>
           <a:p>
@@ -10957,13 +11602,13 @@
               </a:spcAft>
             </a:pPr>
             <a:r>
-              <a:rPr sz="1200" b="0">
+              <a:rPr sz="1100" b="0">
                 <a:solidFill>
                   <a:srgbClr val="1F1F1F"/>
                 </a:solidFill>
                 <a:latin typeface="Calibri"/>
               </a:rPr>
-              <a:t>Learner: 10 ✓      Tutor: And 1/4 of 20?   Learner: 5 ✓</a:t>
+              <a:t>Tutor: For y = 3x + 1, how much does y change when x goes up by 1?   Learner: 3 ✓</a:t>
             </a:r>
           </a:p>
           <a:p>
@@ -10973,13 +11618,13 @@
               </a:spcAft>
             </a:pPr>
             <a:r>
-              <a:rPr sz="1200" b="0">
-                <a:solidFill>
-                  <a:srgbClr val="0F7C8C"/>
+              <a:rPr sz="1100" b="0">
+                <a:solidFill>
+                  <a:srgbClr val="1F1F1F"/>
                 </a:solidFill>
                 <a:latin typeface="Calibri"/>
               </a:rPr>
-              <a:t>[back to Level 3]</a:t>
+              <a:t>Tutor: Derivative of w²?  📺 Maths 2, Week 5, Lecture 2 (08:15)   Learner: 2w ✓</a:t>
             </a:r>
           </a:p>
           <a:p>
@@ -10989,13 +11634,13 @@
               </a:spcAft>
             </a:pPr>
             <a:r>
-              <a:rPr sz="1200" b="1">
-                <a:solidFill>
-                  <a:srgbClr val="1F1F1F"/>
+              <a:rPr sz="1100" b="0">
+                <a:solidFill>
+                  <a:srgbClr val="0F7C8C"/>
                 </a:solidFill>
                 <a:latin typeface="Calibri"/>
               </a:rPr>
-              <a:t>Tutor: Try again: 20% of 50?   Learner: 10 ✓</a:t>
+              <a:t>[back to Maths 2]</a:t>
             </a:r>
           </a:p>
           <a:p>
@@ -11005,13 +11650,13 @@
               </a:spcAft>
             </a:pPr>
             <a:r>
-              <a:rPr sz="1200" b="0">
+              <a:rPr sz="1100" b="0">
                 <a:solidFill>
                   <a:srgbClr val="1F1F1F"/>
                 </a:solidFill>
                 <a:latin typeface="Calibri"/>
               </a:rPr>
-              <a:t>Tutor: Earlier you divided 50 by 20; a percentage means “out of 100”.</a:t>
+              <a:t>Tutor: Chain rule on (6 − 2w)²?   Learner: −4(6 − 2w) ✓</a:t>
             </a:r>
           </a:p>
           <a:p>
@@ -11021,13 +11666,45 @@
               </a:spcAft>
             </a:pPr>
             <a:r>
-              <a:rPr sz="1200" b="0">
-                <a:solidFill>
-                  <a:srgbClr val="1F1F1F"/>
+              <a:rPr sz="1100" b="0">
+                <a:solidFill>
+                  <a:srgbClr val="0F7C8C"/>
                 </a:solidFill>
                 <a:latin typeface="Calibri"/>
               </a:rPr>
-              <a:t>         Next: 15% of 60?</a:t>
+              <a:t>[back to MLF / MLT]</a:t>
+            </a:r>
+          </a:p>
+          <a:p>
+            <a:pPr algn="l">
+              <a:spcAft>
+                <a:spcPts val="400"/>
+              </a:spcAft>
+            </a:pPr>
+            <a:r>
+              <a:rPr sz="1100" b="0">
+                <a:solidFill>
+                  <a:srgbClr val="1F1F1F"/>
+                </a:solidFill>
+                <a:latin typeface="Calibri"/>
+              </a:rPr>
+              <a:t>Tutor: At w = 1 the gradient is −16. Should w go up or down?   Learner: Up ✓</a:t>
+            </a:r>
+          </a:p>
+          <a:p>
+            <a:pPr algn="l">
+              <a:spcAft>
+                <a:spcPts val="400"/>
+              </a:spcAft>
+            </a:pPr>
+            <a:r>
+              <a:rPr sz="1100" b="1">
+                <a:solidFill>
+                  <a:srgbClr val="1F1F1F"/>
+                </a:solidFill>
+                <a:latin typeface="Calibri"/>
+              </a:rPr>
+              <a:t>Tutor: Exactly: w ← w − η × gradient. That’s how linear regression is trained!</a:t>
             </a:r>
           </a:p>
         </p:txBody>
@@ -11049,7 +11726,7 @@
           <a:noFill/>
         </p:spPr>
         <p:txBody>
-          <a:bodyPr wrap="square" anchor="t" lIns="45720" rIns="45720">
+          <a:bodyPr wrap="square" lIns="45720" rIns="45720" anchor="t">
             <a:spAutoFit/>
           </a:bodyPr>
           <a:lstStyle/>
@@ -11090,14 +11767,32 @@
                 <a:tableStyleId>{5C22544A-7EE6-4342-B048-85BDC9FD1C3A}</a:tableStyleId>
               </a:tblPr>
               <a:tblGrid>
-                <a:gridCol w="1645920"/>
-                <a:gridCol w="822960"/>
-                <a:gridCol w="1554480"/>
+                <a:gridCol w="1737360">
+                  <a:extLst>
+                    <a:ext uri="{9D8B030D-6E8A-4147-A177-3AD203B41FA5}">
+                      <a16:colId xmlns:a16="http://schemas.microsoft.com/office/drawing/2014/main" val="20000"/>
+                    </a:ext>
+                  </a:extLst>
+                </a:gridCol>
+                <a:gridCol w="731520">
+                  <a:extLst>
+                    <a:ext uri="{9D8B030D-6E8A-4147-A177-3AD203B41FA5}">
+                      <a16:colId xmlns:a16="http://schemas.microsoft.com/office/drawing/2014/main" val="20001"/>
+                    </a:ext>
+                  </a:extLst>
+                </a:gridCol>
+                <a:gridCol w="1554480">
+                  <a:extLst>
+                    <a:ext uri="{9D8B030D-6E8A-4147-A177-3AD203B41FA5}">
+                      <a16:colId xmlns:a16="http://schemas.microsoft.com/office/drawing/2014/main" val="20002"/>
+                    </a:ext>
+                  </a:extLst>
+                </a:gridCol>
               </a:tblGrid>
               <a:tr h="384048">
                 <a:tc>
                   <a:txBody>
-                    <a:bodyPr wrap="square"/>
+                    <a:bodyPr/>
                     <a:lstStyle/>
                     <a:p>
                       <a:r>
@@ -11107,7 +11802,7 @@
                           </a:solidFill>
                           <a:latin typeface="Calibri"/>
                         </a:rPr>
-                        <a:t>Concept (level)</a:t>
+                        <a:t>Course: concept</a:t>
                       </a:r>
                     </a:p>
                   </a:txBody>
@@ -11119,7 +11814,7 @@
                 </a:tc>
                 <a:tc>
                   <a:txBody>
-                    <a:bodyPr wrap="square"/>
+                    <a:bodyPr/>
                     <a:lstStyle/>
                     <a:p>
                       <a:r>
@@ -11141,7 +11836,7 @@
                 </a:tc>
                 <a:tc>
                   <a:txBody>
-                    <a:bodyPr wrap="square"/>
+                    <a:bodyPr/>
                     <a:lstStyle/>
                     <a:p>
                       <a:r>
@@ -11161,11 +11856,16 @@
                     </a:solidFill>
                   </a:tcPr>
                 </a:tc>
+                <a:extLst>
+                  <a:ext uri="{0D108BD9-81ED-4DB2-BD59-A6C34878D82A}">
+                    <a16:rowId xmlns:a16="http://schemas.microsoft.com/office/drawing/2014/main" val="10000"/>
+                  </a:ext>
+                </a:extLst>
               </a:tr>
               <a:tr h="384048">
                 <a:tc>
                   <a:txBody>
-                    <a:bodyPr wrap="square"/>
+                    <a:bodyPr/>
                     <a:lstStyle/>
                     <a:p>
                       <a:r>
@@ -11175,7 +11875,7 @@
                           </a:solidFill>
                           <a:latin typeface="Calibri"/>
                         </a:rPr>
-                        <a:t>Multiplication (1)</a:t>
+                        <a:t>Maths 1: slope</a:t>
                       </a:r>
                     </a:p>
                   </a:txBody>
@@ -11187,7 +11887,7 @@
                 </a:tc>
                 <a:tc>
                   <a:txBody>
-                    <a:bodyPr wrap="square"/>
+                    <a:bodyPr/>
                     <a:lstStyle/>
                     <a:p>
                       <a:r>
@@ -11197,7 +11897,7 @@
                           </a:solidFill>
                           <a:latin typeface="Calibri"/>
                         </a:rPr>
-                        <a:t>3/3</a:t>
+                        <a:t>2/2</a:t>
                       </a:r>
                     </a:p>
                   </a:txBody>
@@ -11209,7 +11909,7 @@
                 </a:tc>
                 <a:tc>
                   <a:txBody>
-                    <a:bodyPr wrap="square"/>
+                    <a:bodyPr/>
                     <a:lstStyle/>
                     <a:p>
                       <a:r>
@@ -11229,11 +11929,16 @@
                     </a:solidFill>
                   </a:tcPr>
                 </a:tc>
+                <a:extLst>
+                  <a:ext uri="{0D108BD9-81ED-4DB2-BD59-A6C34878D82A}">
+                    <a16:rowId xmlns:a16="http://schemas.microsoft.com/office/drawing/2014/main" val="10001"/>
+                  </a:ext>
+                </a:extLst>
               </a:tr>
               <a:tr h="384048">
                 <a:tc>
                   <a:txBody>
-                    <a:bodyPr wrap="square"/>
+                    <a:bodyPr/>
                     <a:lstStyle/>
                     <a:p>
                       <a:r>
@@ -11243,7 +11948,7 @@
                           </a:solidFill>
                           <a:latin typeface="Calibri"/>
                         </a:rPr>
-                        <a:t>Division (2)</a:t>
+                        <a:t>Maths 2: derivatives</a:t>
                       </a:r>
                     </a:p>
                   </a:txBody>
@@ -11255,7 +11960,7 @@
                 </a:tc>
                 <a:tc>
                   <a:txBody>
-                    <a:bodyPr wrap="square"/>
+                    <a:bodyPr/>
                     <a:lstStyle/>
                     <a:p>
                       <a:r>
@@ -11265,7 +11970,7 @@
                           </a:solidFill>
                           <a:latin typeface="Calibri"/>
                         </a:rPr>
-                        <a:t>2/2</a:t>
+                        <a:t>1/2</a:t>
                       </a:r>
                     </a:p>
                   </a:txBody>
@@ -11277,7 +11982,7 @@
                 </a:tc>
                 <a:tc>
                   <a:txBody>
-                    <a:bodyPr wrap="square"/>
+                    <a:bodyPr/>
                     <a:lstStyle/>
                     <a:p>
                       <a:r>
@@ -11287,7 +11992,7 @@
                           </a:solidFill>
                           <a:latin typeface="Calibri"/>
                         </a:rPr>
-                        <a:t>0.84</a:t>
+                        <a:t>0.64</a:t>
                       </a:r>
                     </a:p>
                   </a:txBody>
@@ -11297,11 +12002,16 @@
                     </a:solidFill>
                   </a:tcPr>
                 </a:tc>
+                <a:extLst>
+                  <a:ext uri="{0D108BD9-81ED-4DB2-BD59-A6C34878D82A}">
+                    <a16:rowId xmlns:a16="http://schemas.microsoft.com/office/drawing/2014/main" val="10002"/>
+                  </a:ext>
+                </a:extLst>
               </a:tr>
               <a:tr h="384048">
                 <a:tc>
                   <a:txBody>
-                    <a:bodyPr wrap="square"/>
+                    <a:bodyPr/>
                     <a:lstStyle/>
                     <a:p>
                       <a:r>
@@ -11311,7 +12021,7 @@
                           </a:solidFill>
                           <a:latin typeface="Calibri"/>
                         </a:rPr>
-                        <a:t>Fractions (2)</a:t>
+                        <a:t>MLF: gradient descent</a:t>
                       </a:r>
                     </a:p>
                   </a:txBody>
@@ -11323,7 +12033,7 @@
                 </a:tc>
                 <a:tc>
                   <a:txBody>
-                    <a:bodyPr wrap="square"/>
+                    <a:bodyPr/>
                     <a:lstStyle/>
                     <a:p>
                       <a:r>
@@ -11333,7 +12043,7 @@
                           </a:solidFill>
                           <a:latin typeface="Calibri"/>
                         </a:rPr>
-                        <a:t>1/2</a:t>
+                        <a:t>1/1</a:t>
                       </a:r>
                     </a:p>
                   </a:txBody>
@@ -11345,7 +12055,7 @@
                 </a:tc>
                 <a:tc>
                   <a:txBody>
-                    <a:bodyPr wrap="square"/>
+                    <a:bodyPr/>
                     <a:lstStyle/>
                     <a:p>
                       <a:r>
@@ -11355,7 +12065,7 @@
                           </a:solidFill>
                           <a:latin typeface="Calibri"/>
                         </a:rPr>
-                        <a:t>0.66</a:t>
+                        <a:t>0.70</a:t>
                       </a:r>
                     </a:p>
                   </a:txBody>
@@ -11365,11 +12075,16 @@
                     </a:solidFill>
                   </a:tcPr>
                 </a:tc>
+                <a:extLst>
+                  <a:ext uri="{0D108BD9-81ED-4DB2-BD59-A6C34878D82A}">
+                    <a16:rowId xmlns:a16="http://schemas.microsoft.com/office/drawing/2014/main" val="10003"/>
+                  </a:ext>
+                </a:extLst>
               </a:tr>
               <a:tr h="384048">
                 <a:tc>
                   <a:txBody>
-                    <a:bodyPr wrap="square"/>
+                    <a:bodyPr/>
                     <a:lstStyle/>
                     <a:p>
                       <a:r>
@@ -11379,7 +12094,7 @@
                           </a:solidFill>
                           <a:latin typeface="Calibri"/>
                         </a:rPr>
-                        <a:t>Percentages (3)</a:t>
+                        <a:t>MLT: linear regression</a:t>
                       </a:r>
                     </a:p>
                   </a:txBody>
@@ -11391,7 +12106,7 @@
                 </a:tc>
                 <a:tc>
                   <a:txBody>
-                    <a:bodyPr wrap="square"/>
+                    <a:bodyPr/>
                     <a:lstStyle/>
                     <a:p>
                       <a:r>
@@ -11413,7 +12128,7 @@
                 </a:tc>
                 <a:tc>
                   <a:txBody>
-                    <a:bodyPr wrap="square"/>
+                    <a:bodyPr/>
                     <a:lstStyle/>
                     <a:p>
                       <a:r>
@@ -11423,7 +12138,7 @@
                           </a:solidFill>
                           <a:latin typeface="Calibri"/>
                         </a:rPr>
-                        <a:t>0.58 · practise</a:t>
+                        <a:t>0.60 · practise</a:t>
                       </a:r>
                     </a:p>
                   </a:txBody>
@@ -11433,6 +12148,11 @@
                     </a:solidFill>
                   </a:tcPr>
                 </a:tc>
+                <a:extLst>
+                  <a:ext uri="{0D108BD9-81ED-4DB2-BD59-A6C34878D82A}">
+                    <a16:rowId xmlns:a16="http://schemas.microsoft.com/office/drawing/2014/main" val="10004"/>
+                  </a:ext>
+                </a:extLst>
               </a:tr>
             </a:tbl>
           </a:graphicData>
@@ -11455,7 +12175,7 @@
           <a:noFill/>
         </p:spPr>
         <p:txBody>
-          <a:bodyPr wrap="square" anchor="t" lIns="45720" rIns="45720">
+          <a:bodyPr wrap="square" lIns="45720" rIns="45720" anchor="t">
             <a:spAutoFit/>
           </a:bodyPr>
           <a:lstStyle/>
@@ -11486,7 +12206,7 @@
         <p:spPr>
           <a:xfrm>
             <a:off x="7680960" y="4160520"/>
-            <a:ext cx="4023360" cy="1828800"/>
+            <a:ext cx="4023360" cy="2011680"/>
           </a:xfrm>
           <a:prstGeom prst="rect">
             <a:avLst/>
@@ -11494,7 +12214,7 @@
           <a:noFill/>
         </p:spPr>
         <p:txBody>
-          <a:bodyPr wrap="square" anchor="t" lIns="45720" rIns="45720">
+          <a:bodyPr wrap="square" lIns="45720" rIns="45720" anchor="t">
             <a:spAutoFit/>
           </a:bodyPr>
           <a:lstStyle/>
@@ -11511,7 +12231,7 @@
                 </a:solidFill>
                 <a:latin typeface="Calibri"/>
               </a:rPr>
-              <a:t>API + prompt: “20/100 × 50 = 10.” Answer revealed; gap not found.</a:t>
+              <a:t>API + prompt: explains MSE and gradient descent all at once. Learner never checked; the derivative gap stays hidden.</a:t>
             </a:r>
           </a:p>
           <a:p>
@@ -11527,7 +12247,7 @@
                 </a:solidFill>
                 <a:latin typeface="Calibri"/>
               </a:rPr>
-              <a:t>Ours: finds the fraction gap, practises Level 2, returns to Level 3; learner finds 10.</a:t>
+              <a:t>Ours: finds the derivative gap, revisits Maths 1 and 2, returns to MLT; learner works out the update rule.</a:t>
             </a:r>
           </a:p>
         </p:txBody>
@@ -11871,44 +12591,44 @@
         <a:sysClr val="window" lastClr="FFFFFF"/>
       </a:lt1>
       <a:dk2>
-        <a:srgbClr val="1F497D"/>
+        <a:srgbClr val="44546A"/>
       </a:dk2>
       <a:lt2>
-        <a:srgbClr val="EEECE1"/>
+        <a:srgbClr val="E7E6E6"/>
       </a:lt2>
       <a:accent1>
-        <a:srgbClr val="4F81BD"/>
+        <a:srgbClr val="4472C4"/>
       </a:accent1>
       <a:accent2>
-        <a:srgbClr val="C0504D"/>
+        <a:srgbClr val="ED7D31"/>
       </a:accent2>
       <a:accent3>
-        <a:srgbClr val="9BBB59"/>
+        <a:srgbClr val="A5A5A5"/>
       </a:accent3>
       <a:accent4>
-        <a:srgbClr val="8064A2"/>
+        <a:srgbClr val="FFC000"/>
       </a:accent4>
       <a:accent5>
-        <a:srgbClr val="4BACC6"/>
+        <a:srgbClr val="5B9BD5"/>
       </a:accent5>
       <a:accent6>
-        <a:srgbClr val="F79646"/>
+        <a:srgbClr val="70AD47"/>
       </a:accent6>
       <a:hlink>
-        <a:srgbClr val="0000FF"/>
+        <a:srgbClr val="0563C1"/>
       </a:hlink>
       <a:folHlink>
-        <a:srgbClr val="800080"/>
+        <a:srgbClr val="954F72"/>
       </a:folHlink>
     </a:clrScheme>
     <a:fontScheme name="Office">
       <a:majorFont>
-        <a:latin typeface="Calibri"/>
+        <a:latin typeface="Calibri Light" panose="020F0302020204030204"/>
         <a:ea typeface=""/>
         <a:cs typeface=""/>
-        <a:font script="Jpan" typeface="ＭＳ Ｐゴシック"/>
+        <a:font script="Jpan" typeface="游ゴシック Light"/>
         <a:font script="Hang" typeface="맑은 고딕"/>
-        <a:font script="Hans" typeface="宋体"/>
+        <a:font script="Hans" typeface="等线 Light"/>
         <a:font script="Hant" typeface="新細明體"/>
         <a:font script="Arab" typeface="Times New Roman"/>
         <a:font script="Hebr" typeface="Times New Roman"/>
@@ -11936,14 +12656,31 @@
         <a:font script="Viet" typeface="Times New Roman"/>
         <a:font script="Uigh" typeface="Microsoft Uighur"/>
         <a:font script="Geor" typeface="Sylfaen"/>
+        <a:font script="Armn" typeface="Arial"/>
+        <a:font script="Bugi" typeface="Leelawadee UI"/>
+        <a:font script="Bopo" typeface="Microsoft JhengHei"/>
+        <a:font script="Java" typeface="Javanese Text"/>
+        <a:font script="Lisu" typeface="Segoe UI"/>
+        <a:font script="Mymr" typeface="Myanmar Text"/>
+        <a:font script="Nkoo" typeface="Ebrima"/>
+        <a:font script="Olck" typeface="Nirmala UI"/>
+        <a:font script="Osma" typeface="Ebrima"/>
+        <a:font script="Phag" typeface="Phagspa"/>
+        <a:font script="Syrn" typeface="Estrangelo Edessa"/>
+        <a:font script="Syrj" typeface="Estrangelo Edessa"/>
+        <a:font script="Syre" typeface="Estrangelo Edessa"/>
+        <a:font script="Sora" typeface="Nirmala UI"/>
+        <a:font script="Tale" typeface="Microsoft Tai Le"/>
+        <a:font script="Talu" typeface="Microsoft New Tai Lue"/>
+        <a:font script="Tfng" typeface="Ebrima"/>
       </a:majorFont>
       <a:minorFont>
-        <a:latin typeface="Calibri"/>
+        <a:latin typeface="Calibri" panose="020F0502020204030204"/>
         <a:ea typeface=""/>
         <a:cs typeface=""/>
-        <a:font script="Jpan" typeface="ＭＳ Ｐゴシック"/>
+        <a:font script="Jpan" typeface="游ゴシック"/>
         <a:font script="Hang" typeface="맑은 고딕"/>
-        <a:font script="Hans" typeface="宋体"/>
+        <a:font script="Hans" typeface="等线"/>
         <a:font script="Hant" typeface="新細明體"/>
         <a:font script="Arab" typeface="Arial"/>
         <a:font script="Hebr" typeface="Arial"/>
@@ -11971,6 +12708,23 @@
         <a:font script="Viet" typeface="Arial"/>
         <a:font script="Uigh" typeface="Microsoft Uighur"/>
         <a:font script="Geor" typeface="Sylfaen"/>
+        <a:font script="Armn" typeface="Arial"/>
+        <a:font script="Bugi" typeface="Leelawadee UI"/>
+        <a:font script="Bopo" typeface="Microsoft JhengHei"/>
+        <a:font script="Java" typeface="Javanese Text"/>
+        <a:font script="Lisu" typeface="Segoe UI"/>
+        <a:font script="Mymr" typeface="Myanmar Text"/>
+        <a:font script="Nkoo" typeface="Ebrima"/>
+        <a:font script="Olck" typeface="Nirmala UI"/>
+        <a:font script="Osma" typeface="Ebrima"/>
+        <a:font script="Phag" typeface="Phagspa"/>
+        <a:font script="Syrn" typeface="Estrangelo Edessa"/>
+        <a:font script="Syrj" typeface="Estrangelo Edessa"/>
+        <a:font script="Syre" typeface="Estrangelo Edessa"/>
+        <a:font script="Sora" typeface="Nirmala UI"/>
+        <a:font script="Tale" typeface="Microsoft Tai Le"/>
+        <a:font script="Talu" typeface="Microsoft New Tai Lue"/>
+        <a:font script="Tfng" typeface="Ebrima"/>
       </a:minorFont>
     </a:fontScheme>
     <a:fmtScheme name="Office">
@@ -11982,200 +12736,141 @@
           <a:gsLst>
             <a:gs pos="0">
               <a:schemeClr val="phClr">
-                <a:tint val="50000"/>
-                <a:satMod val="300000"/>
+                <a:lumMod val="110000"/>
+                <a:satMod val="105000"/>
+                <a:tint val="67000"/>
               </a:schemeClr>
             </a:gs>
-            <a:gs pos="35000">
+            <a:gs pos="50000">
               <a:schemeClr val="phClr">
-                <a:tint val="37000"/>
-                <a:satMod val="300000"/>
+                <a:lumMod val="105000"/>
+                <a:satMod val="103000"/>
+                <a:tint val="73000"/>
               </a:schemeClr>
             </a:gs>
             <a:gs pos="100000">
               <a:schemeClr val="phClr">
-                <a:tint val="15000"/>
-                <a:satMod val="350000"/>
+                <a:lumMod val="105000"/>
+                <a:satMod val="109000"/>
+                <a:tint val="81000"/>
               </a:schemeClr>
             </a:gs>
           </a:gsLst>
-          <a:lin ang="16200000" scaled="1"/>
+          <a:lin ang="5400000" scaled="0"/>
         </a:gradFill>
         <a:gradFill rotWithShape="1">
           <a:gsLst>
             <a:gs pos="0">
               <a:schemeClr val="phClr">
-                <a:tint val="100000"/>
+                <a:satMod val="103000"/>
+                <a:lumMod val="102000"/>
+                <a:tint val="94000"/>
+              </a:schemeClr>
+            </a:gs>
+            <a:gs pos="50000">
+              <a:schemeClr val="phClr">
+                <a:satMod val="110000"/>
+                <a:lumMod val="100000"/>
                 <a:shade val="100000"/>
-                <a:satMod val="130000"/>
               </a:schemeClr>
             </a:gs>
             <a:gs pos="100000">
               <a:schemeClr val="phClr">
-                <a:tint val="50000"/>
-                <a:shade val="100000"/>
-                <a:satMod val="350000"/>
+                <a:lumMod val="99000"/>
+                <a:satMod val="120000"/>
+                <a:shade val="78000"/>
               </a:schemeClr>
             </a:gs>
           </a:gsLst>
-          <a:lin ang="16200000" scaled="0"/>
+          <a:lin ang="5400000" scaled="0"/>
         </a:gradFill>
       </a:fillStyleLst>
       <a:lnStyleLst>
-        <a:ln w="9525" cap="flat" cmpd="sng" algn="ctr">
-          <a:solidFill>
-            <a:schemeClr val="phClr">
-              <a:shade val="95000"/>
-              <a:satMod val="105000"/>
-            </a:schemeClr>
-          </a:solidFill>
-          <a:prstDash val="solid"/>
-        </a:ln>
-        <a:ln w="25400" cap="flat" cmpd="sng" algn="ctr">
+        <a:ln w="6350" cap="flat" cmpd="sng" algn="ctr">
           <a:solidFill>
             <a:schemeClr val="phClr"/>
           </a:solidFill>
           <a:prstDash val="solid"/>
+          <a:miter lim="800000"/>
         </a:ln>
-        <a:ln w="38100" cap="flat" cmpd="sng" algn="ctr">
+        <a:ln w="12700" cap="flat" cmpd="sng" algn="ctr">
           <a:solidFill>
             <a:schemeClr val="phClr"/>
           </a:solidFill>
           <a:prstDash val="solid"/>
+          <a:miter lim="800000"/>
+        </a:ln>
+        <a:ln w="19050" cap="flat" cmpd="sng" algn="ctr">
+          <a:solidFill>
+            <a:schemeClr val="phClr"/>
+          </a:solidFill>
+          <a:prstDash val="solid"/>
+          <a:miter lim="800000"/>
         </a:ln>
       </a:lnStyleLst>
       <a:effectStyleLst>
         <a:effectStyle>
+          <a:effectLst/>
+        </a:effectStyle>
+        <a:effectStyle>
+          <a:effectLst/>
+        </a:effectStyle>
+        <a:effectStyle>
           <a:effectLst>
-            <a:outerShdw blurRad="40000" dist="20000" dir="5400000" rotWithShape="0">
+            <a:outerShdw blurRad="57150" dist="19050" dir="5400000" algn="ctr" rotWithShape="0">
               <a:srgbClr val="000000">
-                <a:alpha val="38000"/>
+                <a:alpha val="63000"/>
               </a:srgbClr>
             </a:outerShdw>
           </a:effectLst>
-        </a:effectStyle>
-        <a:effectStyle>
-          <a:effectLst>
-            <a:outerShdw blurRad="40000" dist="23000" dir="5400000" rotWithShape="0">
-              <a:srgbClr val="000000">
-                <a:alpha val="35000"/>
-              </a:srgbClr>
-            </a:outerShdw>
-          </a:effectLst>
-        </a:effectStyle>
-        <a:effectStyle>
-          <a:effectLst>
-            <a:outerShdw blurRad="40000" dist="23000" dir="5400000" rotWithShape="0">
-              <a:srgbClr val="000000">
-                <a:alpha val="35000"/>
-              </a:srgbClr>
-            </a:outerShdw>
-          </a:effectLst>
-          <a:scene3d>
-            <a:camera prst="orthographicFront">
-              <a:rot lat="0" lon="0" rev="0"/>
-            </a:camera>
-            <a:lightRig rig="threePt" dir="t">
-              <a:rot lat="0" lon="0" rev="1200000"/>
-            </a:lightRig>
-          </a:scene3d>
-          <a:sp3d>
-            <a:bevelT w="63500" h="25400"/>
-          </a:sp3d>
         </a:effectStyle>
       </a:effectStyleLst>
       <a:bgFillStyleLst>
         <a:solidFill>
           <a:schemeClr val="phClr"/>
         </a:solidFill>
+        <a:solidFill>
+          <a:schemeClr val="phClr">
+            <a:tint val="95000"/>
+            <a:satMod val="170000"/>
+          </a:schemeClr>
+        </a:solidFill>
         <a:gradFill rotWithShape="1">
           <a:gsLst>
             <a:gs pos="0">
               <a:schemeClr val="phClr">
-                <a:tint val="40000"/>
-                <a:satMod val="350000"/>
+                <a:tint val="93000"/>
+                <a:satMod val="150000"/>
+                <a:shade val="98000"/>
+                <a:lumMod val="102000"/>
               </a:schemeClr>
             </a:gs>
-            <a:gs pos="40000">
+            <a:gs pos="50000">
               <a:schemeClr val="phClr">
-                <a:tint val="45000"/>
-                <a:shade val="99000"/>
-                <a:satMod val="350000"/>
+                <a:tint val="98000"/>
+                <a:satMod val="130000"/>
+                <a:shade val="90000"/>
+                <a:lumMod val="103000"/>
               </a:schemeClr>
             </a:gs>
             <a:gs pos="100000">
               <a:schemeClr val="phClr">
-                <a:shade val="20000"/>
-                <a:satMod val="255000"/>
+                <a:shade val="63000"/>
+                <a:satMod val="120000"/>
               </a:schemeClr>
             </a:gs>
           </a:gsLst>
-          <a:path path="circle">
-            <a:fillToRect l="50000" t="-80000" r="50000" b="180000"/>
-          </a:path>
-        </a:gradFill>
-        <a:gradFill rotWithShape="1">
-          <a:gsLst>
-            <a:gs pos="0">
-              <a:schemeClr val="phClr">
-                <a:tint val="80000"/>
-                <a:satMod val="300000"/>
-              </a:schemeClr>
-            </a:gs>
-            <a:gs pos="100000">
-              <a:schemeClr val="phClr">
-                <a:shade val="30000"/>
-                <a:satMod val="200000"/>
-              </a:schemeClr>
-            </a:gs>
-          </a:gsLst>
-          <a:path path="circle">
-            <a:fillToRect l="50000" t="50000" r="50000" b="50000"/>
-          </a:path>
+          <a:lin ang="5400000" scaled="0"/>
         </a:gradFill>
       </a:bgFillStyleLst>
     </a:fmtScheme>
   </a:themeElements>
-  <a:objectDefaults>
-    <a:spDef>
-      <a:spPr/>
-      <a:bodyPr/>
-      <a:lstStyle/>
-      <a:style>
-        <a:lnRef idx="1">
-          <a:schemeClr val="accent1"/>
-        </a:lnRef>
-        <a:fillRef idx="3">
-          <a:schemeClr val="accent1"/>
-        </a:fillRef>
-        <a:effectRef idx="2">
-          <a:schemeClr val="accent1"/>
-        </a:effectRef>
-        <a:fontRef idx="minor">
-          <a:schemeClr val="lt1"/>
-        </a:fontRef>
-      </a:style>
-    </a:spDef>
-    <a:lnDef>
-      <a:spPr/>
-      <a:bodyPr/>
-      <a:lstStyle/>
-      <a:style>
-        <a:lnRef idx="2">
-          <a:schemeClr val="accent1"/>
-        </a:lnRef>
-        <a:fillRef idx="0">
-          <a:schemeClr val="accent1"/>
-        </a:fillRef>
-        <a:effectRef idx="1">
-          <a:schemeClr val="accent1"/>
-        </a:effectRef>
-        <a:fontRef idx="minor">
-          <a:schemeClr val="tx1"/>
-        </a:fontRef>
-      </a:style>
-    </a:lnDef>
-  </a:objectDefaults>
+  <a:objectDefaults/>
   <a:extraClrSchemeLst/>
+  <a:extLst>
+    <a:ext uri="{05A4C25C-085E-4340-85A3-A5531E510DB2}">
+      <thm15:themeFamily xmlns:thm15="http://schemas.microsoft.com/office/thememl/2012/main" name="Office Theme" id="{62F939B6-93AF-4DB8-9C6B-D6C7DFDC589F}" vid="{4A3C46E8-61CC-4603-A589-7422A47A8E4A}"/>
+    </a:ext>
+  </a:extLst>
 </a:theme>
 </file>
--- a/docs/milestone-1/Milestone1_Presentation.pptx
+++ b/docs/milestone-1/Milestone1_Presentation.pptx
@@ -4,22 +4,19 @@
   <p:sldMasterIdLst>
     <p:sldMasterId id="2147483648" r:id="rId1"/>
   </p:sldMasterIdLst>
-  <p:notesMasterIdLst>
-    <p:notesMasterId r:id="rId12"/>
-  </p:notesMasterIdLst>
   <p:sldIdLst>
-    <p:sldId id="256" r:id="rId2"/>
-    <p:sldId id="257" r:id="rId3"/>
-    <p:sldId id="258" r:id="rId4"/>
-    <p:sldId id="259" r:id="rId5"/>
-    <p:sldId id="260" r:id="rId6"/>
-    <p:sldId id="261" r:id="rId7"/>
-    <p:sldId id="262" r:id="rId8"/>
-    <p:sldId id="263" r:id="rId9"/>
-    <p:sldId id="264" r:id="rId10"/>
-    <p:sldId id="265" r:id="rId11"/>
+    <p:sldId id="256" r:id="rId7"/>
+    <p:sldId id="257" r:id="rId8"/>
+    <p:sldId id="258" r:id="rId9"/>
+    <p:sldId id="259" r:id="rId11"/>
+    <p:sldId id="260" r:id="rId12"/>
+    <p:sldId id="261" r:id="rId13"/>
+    <p:sldId id="262" r:id="rId14"/>
+    <p:sldId id="263" r:id="rId15"/>
+    <p:sldId id="264" r:id="rId16"/>
+    <p:sldId id="265" r:id="rId17"/>
   </p:sldIdLst>
-  <p:sldSz cx="12192000" cy="6858000"/>
+  <p:sldSz cx="12191695" cy="6858000" type="screen4x3"/>
   <p:notesSz cx="6858000" cy="9144000"/>
   <p:defaultTextStyle>
     <a:defPPr>
@@ -116,27 +113,11 @@
       </a:defRPr>
     </a:lvl9pPr>
   </p:defaultTextStyle>
-  <p:extLst>
-    <p:ext uri="{EFAFB233-063F-42B5-8137-9DF3F51BA10A}">
-      <p15:sldGuideLst xmlns:p15="http://schemas.microsoft.com/office/powerpoint/2012/main">
-        <p15:guide id="1" orient="horz" pos="2160">
-          <p15:clr>
-            <a:srgbClr val="A4A3A4"/>
-          </p15:clr>
-        </p15:guide>
-        <p15:guide id="2" pos="2880">
-          <p15:clr>
-            <a:srgbClr val="A4A3A4"/>
-          </p15:clr>
-        </p15:guide>
-      </p15:sldGuideLst>
-    </p:ext>
-  </p:extLst>
 </p:presentation>
 </file>
 
 <file path=ppt/notesMasters/notesMaster1.xml><?xml version="1.0" encoding="utf-8"?>
-<p:notesMaster xmlns:a="http://schemas.openxmlformats.org/drawingml/2006/main" xmlns:r="http://schemas.openxmlformats.org/officeDocument/2006/relationships" xmlns:p="http://schemas.openxmlformats.org/presentationml/2006/main">
+<p:notesMaster xmlns:a="http://schemas.openxmlformats.org/drawingml/2006/main" xmlns:p="http://schemas.openxmlformats.org/presentationml/2006/main" xmlns:r="http://schemas.openxmlformats.org/officeDocument/2006/relationships">
   <p:cSld>
     <p:bg>
       <p:bgRef idx="1001">
@@ -170,7 +151,7 @@
         <p:spPr>
           <a:xfrm>
             <a:off x="0" y="0"/>
-            <a:ext cx="2971800" cy="458788"/>
+            <a:ext cx="2971800" cy="457200"/>
           </a:xfrm>
           <a:prstGeom prst="rect">
             <a:avLst/>
@@ -201,7 +182,7 @@
         <p:spPr>
           <a:xfrm>
             <a:off x="3884613" y="0"/>
-            <a:ext cx="2971800" cy="458788"/>
+            <a:ext cx="2971800" cy="457200"/>
           </a:xfrm>
           <a:prstGeom prst="rect">
             <a:avLst/>
@@ -215,9 +196,9 @@
             </a:lvl1pPr>
           </a:lstStyle>
           <a:p>
-            <a:fld id="{F0D764D0-6DFC-449A-9576-65BEDBFD47E7}" type="datetimeFigureOut">
+            <a:fld id="{0F89C1C7-3DCD-1040-A9CF-14679D8B5DDD}" type="datetimeFigureOut">
               <a:rPr lang="en-US" smtClean="0"/>
-              <a:t>10/21/2026</a:t>
+              <a:t>10/17/16</a:t>
             </a:fld>
             <a:endParaRPr lang="en-US"/>
           </a:p>
@@ -235,8 +216,8 @@
         </p:nvSpPr>
         <p:spPr>
           <a:xfrm>
-            <a:off x="685800" y="1143000"/>
-            <a:ext cx="5486400" cy="3086100"/>
+            <a:off x="1143000" y="685800"/>
+            <a:ext cx="4572000" cy="3429000"/>
           </a:xfrm>
           <a:prstGeom prst="rect">
             <a:avLst/>
@@ -268,8 +249,8 @@
         </p:nvSpPr>
         <p:spPr>
           <a:xfrm>
-            <a:off x="685800" y="4400550"/>
-            <a:ext cx="5486400" cy="3600450"/>
+            <a:off x="685800" y="4343400"/>
+            <a:ext cx="5486400" cy="4114800"/>
           </a:xfrm>
           <a:prstGeom prst="rect">
             <a:avLst/>
@@ -281,37 +262,38 @@
           <a:p>
             <a:pPr lvl="0"/>
             <a:r>
-              <a:rPr lang="en-US"/>
+              <a:rPr lang="en-US" smtClean="0"/>
               <a:t>Click to edit Master text styles</a:t>
             </a:r>
           </a:p>
           <a:p>
             <a:pPr lvl="1"/>
             <a:r>
-              <a:rPr lang="en-US"/>
+              <a:rPr lang="en-US" smtClean="0"/>
               <a:t>Second level</a:t>
             </a:r>
           </a:p>
           <a:p>
             <a:pPr lvl="2"/>
             <a:r>
-              <a:rPr lang="en-US"/>
+              <a:rPr lang="en-US" smtClean="0"/>
               <a:t>Third level</a:t>
             </a:r>
           </a:p>
           <a:p>
             <a:pPr lvl="3"/>
             <a:r>
-              <a:rPr lang="en-US"/>
+              <a:rPr lang="en-US" smtClean="0"/>
               <a:t>Fourth level</a:t>
             </a:r>
           </a:p>
           <a:p>
             <a:pPr lvl="4"/>
             <a:r>
-              <a:rPr lang="en-US"/>
+              <a:rPr lang="en-US" smtClean="0"/>
               <a:t>Fifth level</a:t>
             </a:r>
+            <a:endParaRPr lang="en-US"/>
           </a:p>
         </p:txBody>
       </p:sp>
@@ -328,7 +310,7 @@
         <p:spPr>
           <a:xfrm>
             <a:off x="0" y="8685213"/>
-            <a:ext cx="2971800" cy="458787"/>
+            <a:ext cx="2971800" cy="457200"/>
           </a:xfrm>
           <a:prstGeom prst="rect">
             <a:avLst/>
@@ -359,7 +341,7 @@
         <p:spPr>
           <a:xfrm>
             <a:off x="3884613" y="8685213"/>
-            <a:ext cx="2971800" cy="458787"/>
+            <a:ext cx="2971800" cy="457200"/>
           </a:xfrm>
           <a:prstGeom prst="rect">
             <a:avLst/>
@@ -373,7 +355,7 @@
             </a:lvl1pPr>
           </a:lstStyle>
           <a:p>
-            <a:fld id="{B77CF2F3-96C9-4F4E-8F28-21061CAD028D}" type="slidenum">
+            <a:fld id="{BB5E49A5-4136-284D-997B-48E1D791AD67}" type="slidenum">
               <a:rPr lang="en-US" smtClean="0"/>
               <a:t>‹#›</a:t>
             </a:fld>
@@ -384,13 +366,13 @@
     </p:spTree>
     <p:extLst>
       <p:ext uri="{BB962C8B-B14F-4D97-AF65-F5344CB8AC3E}">
-        <p14:creationId xmlns:p14="http://schemas.microsoft.com/office/powerpoint/2010/main" val="3686842098"/>
+        <p14:creationId xmlns:p14="http://schemas.microsoft.com/office/powerpoint/2010/main" val="2623252185"/>
       </p:ext>
     </p:extLst>
   </p:cSld>
   <p:clrMap bg1="lt1" tx1="dk1" bg2="lt2" tx2="dk2" accent1="accent1" accent2="accent2" accent3="accent3" accent4="accent4" accent5="accent5" accent6="accent6" hlink="hlink" folHlink="folHlink"/>
   <p:notesStyle>
-    <a:lvl1pPr marL="0" algn="l" defTabSz="914400" rtl="0" eaLnBrk="1" latinLnBrk="0" hangingPunct="1">
+    <a:lvl1pPr marL="0" algn="l" defTabSz="457200" rtl="0" eaLnBrk="1" latinLnBrk="0" hangingPunct="1">
       <a:defRPr sz="1200" kern="1200">
         <a:solidFill>
           <a:schemeClr val="tx1"/>
@@ -400,7 +382,7 @@
         <a:cs typeface="+mn-cs"/>
       </a:defRPr>
     </a:lvl1pPr>
-    <a:lvl2pPr marL="457200" algn="l" defTabSz="914400" rtl="0" eaLnBrk="1" latinLnBrk="0" hangingPunct="1">
+    <a:lvl2pPr marL="457200" algn="l" defTabSz="457200" rtl="0" eaLnBrk="1" latinLnBrk="0" hangingPunct="1">
       <a:defRPr sz="1200" kern="1200">
         <a:solidFill>
           <a:schemeClr val="tx1"/>
@@ -410,7 +392,7 @@
         <a:cs typeface="+mn-cs"/>
       </a:defRPr>
     </a:lvl2pPr>
-    <a:lvl3pPr marL="914400" algn="l" defTabSz="914400" rtl="0" eaLnBrk="1" latinLnBrk="0" hangingPunct="1">
+    <a:lvl3pPr marL="914400" algn="l" defTabSz="457200" rtl="0" eaLnBrk="1" latinLnBrk="0" hangingPunct="1">
       <a:defRPr sz="1200" kern="1200">
         <a:solidFill>
           <a:schemeClr val="tx1"/>
@@ -420,7 +402,7 @@
         <a:cs typeface="+mn-cs"/>
       </a:defRPr>
     </a:lvl3pPr>
-    <a:lvl4pPr marL="1371600" algn="l" defTabSz="914400" rtl="0" eaLnBrk="1" latinLnBrk="0" hangingPunct="1">
+    <a:lvl4pPr marL="1371600" algn="l" defTabSz="457200" rtl="0" eaLnBrk="1" latinLnBrk="0" hangingPunct="1">
       <a:defRPr sz="1200" kern="1200">
         <a:solidFill>
           <a:schemeClr val="tx1"/>
@@ -430,7 +412,7 @@
         <a:cs typeface="+mn-cs"/>
       </a:defRPr>
     </a:lvl4pPr>
-    <a:lvl5pPr marL="1828800" algn="l" defTabSz="914400" rtl="0" eaLnBrk="1" latinLnBrk="0" hangingPunct="1">
+    <a:lvl5pPr marL="1828800" algn="l" defTabSz="457200" rtl="0" eaLnBrk="1" latinLnBrk="0" hangingPunct="1">
       <a:defRPr sz="1200" kern="1200">
         <a:solidFill>
           <a:schemeClr val="tx1"/>
@@ -440,7 +422,7 @@
         <a:cs typeface="+mn-cs"/>
       </a:defRPr>
     </a:lvl5pPr>
-    <a:lvl6pPr marL="2286000" algn="l" defTabSz="914400" rtl="0" eaLnBrk="1" latinLnBrk="0" hangingPunct="1">
+    <a:lvl6pPr marL="2286000" algn="l" defTabSz="457200" rtl="0" eaLnBrk="1" latinLnBrk="0" hangingPunct="1">
       <a:defRPr sz="1200" kern="1200">
         <a:solidFill>
           <a:schemeClr val="tx1"/>
@@ -450,7 +432,7 @@
         <a:cs typeface="+mn-cs"/>
       </a:defRPr>
     </a:lvl6pPr>
-    <a:lvl7pPr marL="2743200" algn="l" defTabSz="914400" rtl="0" eaLnBrk="1" latinLnBrk="0" hangingPunct="1">
+    <a:lvl7pPr marL="2743200" algn="l" defTabSz="457200" rtl="0" eaLnBrk="1" latinLnBrk="0" hangingPunct="1">
       <a:defRPr sz="1200" kern="1200">
         <a:solidFill>
           <a:schemeClr val="tx1"/>
@@ -460,7 +442,7 @@
         <a:cs typeface="+mn-cs"/>
       </a:defRPr>
     </a:lvl7pPr>
-    <a:lvl8pPr marL="3200400" algn="l" defTabSz="914400" rtl="0" eaLnBrk="1" latinLnBrk="0" hangingPunct="1">
+    <a:lvl8pPr marL="3200400" algn="l" defTabSz="457200" rtl="0" eaLnBrk="1" latinLnBrk="0" hangingPunct="1">
       <a:defRPr sz="1200" kern="1200">
         <a:solidFill>
           <a:schemeClr val="tx1"/>
@@ -470,7 +452,7 @@
         <a:cs typeface="+mn-cs"/>
       </a:defRPr>
     </a:lvl8pPr>
-    <a:lvl9pPr marL="3657600" algn="l" defTabSz="914400" rtl="0" eaLnBrk="1" latinLnBrk="0" hangingPunct="1">
+    <a:lvl9pPr marL="3657600" algn="l" defTabSz="457200" rtl="0" eaLnBrk="1" latinLnBrk="0" hangingPunct="1">
       <a:defRPr sz="1200" kern="1200">
         <a:solidFill>
           <a:schemeClr val="tx1"/>
@@ -485,7 +467,7 @@
 </file>
 
 <file path=ppt/notesSlides/notesSlide1.xml><?xml version="1.0" encoding="utf-8"?>
-<p:notes xmlns:a="http://schemas.openxmlformats.org/drawingml/2006/main" xmlns:r="http://schemas.openxmlformats.org/officeDocument/2006/relationships" xmlns:p="http://schemas.openxmlformats.org/presentationml/2006/main">
+<p:notes xmlns:a="http://schemas.openxmlformats.org/drawingml/2006/main" xmlns:p="http://schemas.openxmlformats.org/presentationml/2006/main" xmlns:r="http://schemas.openxmlformats.org/officeDocument/2006/relationships">
   <p:cSld>
     <p:spTree>
       <p:nvGrpSpPr>
@@ -505,7 +487,7 @@
         <p:nvSpPr>
           <p:cNvPr id="2" name="Slide Image Placeholder 1"/>
           <p:cNvSpPr>
-            <a:spLocks noGrp="1" noRot="1" noChangeAspect="1"/>
+            <a:spLocks noGrp="1"/>
           </p:cNvSpPr>
           <p:nvPr>
             <p:ph type="sldImg" idx="2"/>
@@ -520,7 +502,7 @@
             <a:spLocks noGrp="1"/>
           </p:cNvSpPr>
           <p:nvPr>
-            <p:ph type="body" sz="quarter" idx="3"/>
+            <p:ph type="body" idx="3" sz="quarter"/>
           </p:nvPr>
         </p:nvSpPr>
         <p:spPr/>
@@ -541,7 +523,7 @@
             <a:spLocks noGrp="1"/>
           </p:cNvSpPr>
           <p:nvPr>
-            <p:ph type="sldNum" sz="quarter" idx="5"/>
+            <p:ph type="sldNum" idx="5" sz="quarter"/>
           </p:nvPr>
         </p:nvSpPr>
         <p:spPr/>
@@ -555,7 +537,7 @@
 </file>
 
 <file path=ppt/notesSlides/notesSlide2.xml><?xml version="1.0" encoding="utf-8"?>
-<p:notes xmlns:a="http://schemas.openxmlformats.org/drawingml/2006/main" xmlns:r="http://schemas.openxmlformats.org/officeDocument/2006/relationships" xmlns:p="http://schemas.openxmlformats.org/presentationml/2006/main">
+<p:notes xmlns:a="http://schemas.openxmlformats.org/drawingml/2006/main" xmlns:p="http://schemas.openxmlformats.org/presentationml/2006/main" xmlns:r="http://schemas.openxmlformats.org/officeDocument/2006/relationships">
   <p:cSld>
     <p:spTree>
       <p:nvGrpSpPr>
@@ -575,7 +557,7 @@
         <p:nvSpPr>
           <p:cNvPr id="2" name="Slide Image Placeholder 1"/>
           <p:cNvSpPr>
-            <a:spLocks noGrp="1" noRot="1" noChangeAspect="1"/>
+            <a:spLocks noGrp="1"/>
           </p:cNvSpPr>
           <p:nvPr>
             <p:ph type="sldImg" idx="2"/>
@@ -590,7 +572,7 @@
             <a:spLocks noGrp="1"/>
           </p:cNvSpPr>
           <p:nvPr>
-            <p:ph type="body" sz="quarter" idx="3"/>
+            <p:ph type="body" idx="3" sz="quarter"/>
           </p:nvPr>
         </p:nvSpPr>
         <p:spPr/>
@@ -611,7 +593,77 @@
             <a:spLocks noGrp="1"/>
           </p:cNvSpPr>
           <p:nvPr>
-            <p:ph type="sldNum" sz="quarter" idx="5"/>
+            <p:ph type="sldNum" idx="5" sz="quarter"/>
+          </p:nvPr>
+        </p:nvSpPr>
+        <p:spPr/>
+      </p:sp>
+    </p:spTree>
+  </p:cSld>
+  <p:clrMapOvr>
+    <a:masterClrMapping/>
+  </p:clrMapOvr>
+</p:notes>
+</file>
+
+<file path=ppt/notesSlides/notesSlide3.xml><?xml version="1.0" encoding="utf-8"?>
+<p:notes xmlns:a="http://schemas.openxmlformats.org/drawingml/2006/main" xmlns:p="http://schemas.openxmlformats.org/presentationml/2006/main" xmlns:r="http://schemas.openxmlformats.org/officeDocument/2006/relationships">
+  <p:cSld>
+    <p:spTree>
+      <p:nvGrpSpPr>
+        <p:cNvPr id="1" name=""/>
+        <p:cNvGrpSpPr/>
+        <p:nvPr/>
+      </p:nvGrpSpPr>
+      <p:grpSpPr>
+        <a:xfrm>
+          <a:off x="0" y="0"/>
+          <a:ext cx="0" cy="0"/>
+          <a:chOff x="0" y="0"/>
+          <a:chExt cx="0" cy="0"/>
+        </a:xfrm>
+      </p:grpSpPr>
+      <p:sp>
+        <p:nvSpPr>
+          <p:cNvPr id="2" name="Slide Image Placeholder 1"/>
+          <p:cNvSpPr>
+            <a:spLocks noGrp="1"/>
+          </p:cNvSpPr>
+          <p:nvPr>
+            <p:ph type="sldImg" idx="2"/>
+          </p:nvPr>
+        </p:nvSpPr>
+        <p:spPr/>
+      </p:sp>
+      <p:sp>
+        <p:nvSpPr>
+          <p:cNvPr id="3" name="Notes Placeholder 2"/>
+          <p:cNvSpPr>
+            <a:spLocks noGrp="1"/>
+          </p:cNvSpPr>
+          <p:nvPr>
+            <p:ph type="body" idx="3" sz="quarter"/>
+          </p:nvPr>
+        </p:nvSpPr>
+        <p:spPr/>
+        <p:txBody>
+          <a:bodyPr/>
+          <a:lstStyle/>
+          <a:p>
+            <a:r>
+              <a:t>ASSISTments row format (data sample required by the brief): each row is one answer by one student. Row 1: student 64525 got an Equivalent Fractions question wrong on the first try (correct = 0) and needed 2 hints. Row 2: on the next question on the same skill, they got it right (correct = 1) with no hints. DKT reads thousands of such sequences and learns, e.g., that this student is improving at equivalent fractions. Values show the format; they are not real rows from the dataset.</a:t>
+            </a:r>
+          </a:p>
+        </p:txBody>
+      </p:sp>
+      <p:sp>
+        <p:nvSpPr>
+          <p:cNvPr id="4" name="Slide Number Placeholder 3"/>
+          <p:cNvSpPr>
+            <a:spLocks noGrp="1"/>
+          </p:cNvSpPr>
+          <p:nvPr>
+            <p:ph type="sldNum" idx="5" sz="quarter"/>
           </p:nvPr>
         </p:nvSpPr>
         <p:spPr/>
@@ -662,9 +714,10 @@
           <a:lstStyle/>
           <a:p>
             <a:r>
-              <a:rPr lang="en-US"/>
+              <a:rPr lang="en-US" smtClean="0"/>
               <a:t>Click to edit Master title style</a:t>
             </a:r>
+            <a:endParaRPr lang="en-US"/>
           </a:p>
         </p:txBody>
       </p:sp>
@@ -780,9 +833,10 @@
           </a:lstStyle>
           <a:p>
             <a:r>
-              <a:rPr lang="en-US"/>
+              <a:rPr lang="en-US" smtClean="0"/>
               <a:t>Click to edit Master subtitle style</a:t>
             </a:r>
+            <a:endParaRPr lang="en-US"/>
           </a:p>
         </p:txBody>
       </p:sp>
@@ -803,7 +857,7 @@
           <a:p>
             <a:fld id="{5BCAD085-E8A6-8845-BD4E-CB4CCA059FC4}" type="datetimeFigureOut">
               <a:rPr lang="en-US" smtClean="0"/>
-              <a:t>10/21/2026</a:t>
+              <a:t>1/27/13</a:t>
             </a:fld>
             <a:endParaRPr lang="en-US"/>
           </a:p>
@@ -897,9 +951,10 @@
           <a:lstStyle/>
           <a:p>
             <a:r>
-              <a:rPr lang="en-US"/>
+              <a:rPr lang="en-US" smtClean="0"/>
               <a:t>Click to edit Master title style</a:t>
             </a:r>
+            <a:endParaRPr lang="en-US"/>
           </a:p>
         </p:txBody>
       </p:sp>
@@ -920,37 +975,38 @@
           <a:p>
             <a:pPr lvl="0"/>
             <a:r>
-              <a:rPr lang="en-US"/>
+              <a:rPr lang="en-US" smtClean="0"/>
               <a:t>Click to edit Master text styles</a:t>
             </a:r>
           </a:p>
           <a:p>
             <a:pPr lvl="1"/>
             <a:r>
-              <a:rPr lang="en-US"/>
+              <a:rPr lang="en-US" smtClean="0"/>
               <a:t>Second level</a:t>
             </a:r>
           </a:p>
           <a:p>
             <a:pPr lvl="2"/>
             <a:r>
-              <a:rPr lang="en-US"/>
+              <a:rPr lang="en-US" smtClean="0"/>
               <a:t>Third level</a:t>
             </a:r>
           </a:p>
           <a:p>
             <a:pPr lvl="3"/>
             <a:r>
-              <a:rPr lang="en-US"/>
+              <a:rPr lang="en-US" smtClean="0"/>
               <a:t>Fourth level</a:t>
             </a:r>
           </a:p>
           <a:p>
             <a:pPr lvl="4"/>
             <a:r>
-              <a:rPr lang="en-US"/>
+              <a:rPr lang="en-US" smtClean="0"/>
               <a:t>Fifth level</a:t>
             </a:r>
+            <a:endParaRPr lang="en-US"/>
           </a:p>
         </p:txBody>
       </p:sp>
@@ -971,7 +1027,7 @@
           <a:p>
             <a:fld id="{5BCAD085-E8A6-8845-BD4E-CB4CCA059FC4}" type="datetimeFigureOut">
               <a:rPr lang="en-US" smtClean="0"/>
-              <a:t>10/21/2026</a:t>
+              <a:t>1/27/13</a:t>
             </a:fld>
             <a:endParaRPr lang="en-US"/>
           </a:p>
@@ -1070,9 +1126,10 @@
           <a:lstStyle/>
           <a:p>
             <a:r>
-              <a:rPr lang="en-US"/>
+              <a:rPr lang="en-US" smtClean="0"/>
               <a:t>Click to edit Master title style</a:t>
             </a:r>
+            <a:endParaRPr lang="en-US"/>
           </a:p>
         </p:txBody>
       </p:sp>
@@ -1098,37 +1155,38 @@
           <a:p>
             <a:pPr lvl="0"/>
             <a:r>
-              <a:rPr lang="en-US"/>
+              <a:rPr lang="en-US" smtClean="0"/>
               <a:t>Click to edit Master text styles</a:t>
             </a:r>
           </a:p>
           <a:p>
             <a:pPr lvl="1"/>
             <a:r>
-              <a:rPr lang="en-US"/>
+              <a:rPr lang="en-US" smtClean="0"/>
               <a:t>Second level</a:t>
             </a:r>
           </a:p>
           <a:p>
             <a:pPr lvl="2"/>
             <a:r>
-              <a:rPr lang="en-US"/>
+              <a:rPr lang="en-US" smtClean="0"/>
               <a:t>Third level</a:t>
             </a:r>
           </a:p>
           <a:p>
             <a:pPr lvl="3"/>
             <a:r>
-              <a:rPr lang="en-US"/>
+              <a:rPr lang="en-US" smtClean="0"/>
               <a:t>Fourth level</a:t>
             </a:r>
           </a:p>
           <a:p>
             <a:pPr lvl="4"/>
             <a:r>
-              <a:rPr lang="en-US"/>
+              <a:rPr lang="en-US" smtClean="0"/>
               <a:t>Fifth level</a:t>
             </a:r>
+            <a:endParaRPr lang="en-US"/>
           </a:p>
         </p:txBody>
       </p:sp>
@@ -1149,7 +1207,7 @@
           <a:p>
             <a:fld id="{5BCAD085-E8A6-8845-BD4E-CB4CCA059FC4}" type="datetimeFigureOut">
               <a:rPr lang="en-US" smtClean="0"/>
-              <a:t>10/21/2026</a:t>
+              <a:t>1/27/13</a:t>
             </a:fld>
             <a:endParaRPr lang="en-US"/>
           </a:p>
@@ -1243,9 +1301,10 @@
           <a:lstStyle/>
           <a:p>
             <a:r>
-              <a:rPr lang="en-US"/>
+              <a:rPr lang="en-US" smtClean="0"/>
               <a:t>Click to edit Master title style</a:t>
             </a:r>
+            <a:endParaRPr lang="en-US"/>
           </a:p>
         </p:txBody>
       </p:sp>
@@ -1266,37 +1325,38 @@
           <a:p>
             <a:pPr lvl="0"/>
             <a:r>
-              <a:rPr lang="en-US"/>
+              <a:rPr lang="en-US" smtClean="0"/>
               <a:t>Click to edit Master text styles</a:t>
             </a:r>
           </a:p>
           <a:p>
             <a:pPr lvl="1"/>
             <a:r>
-              <a:rPr lang="en-US"/>
+              <a:rPr lang="en-US" smtClean="0"/>
               <a:t>Second level</a:t>
             </a:r>
           </a:p>
           <a:p>
             <a:pPr lvl="2"/>
             <a:r>
-              <a:rPr lang="en-US"/>
+              <a:rPr lang="en-US" smtClean="0"/>
               <a:t>Third level</a:t>
             </a:r>
           </a:p>
           <a:p>
             <a:pPr lvl="3"/>
             <a:r>
-              <a:rPr lang="en-US"/>
+              <a:rPr lang="en-US" smtClean="0"/>
               <a:t>Fourth level</a:t>
             </a:r>
           </a:p>
           <a:p>
             <a:pPr lvl="4"/>
             <a:r>
-              <a:rPr lang="en-US"/>
+              <a:rPr lang="en-US" smtClean="0"/>
               <a:t>Fifth level</a:t>
             </a:r>
+            <a:endParaRPr lang="en-US"/>
           </a:p>
         </p:txBody>
       </p:sp>
@@ -1317,7 +1377,7 @@
           <a:p>
             <a:fld id="{5BCAD085-E8A6-8845-BD4E-CB4CCA059FC4}" type="datetimeFigureOut">
               <a:rPr lang="en-US" smtClean="0"/>
-              <a:t>10/21/2026</a:t>
+              <a:t>1/27/13</a:t>
             </a:fld>
             <a:endParaRPr lang="en-US"/>
           </a:p>
@@ -1420,9 +1480,10 @@
           </a:lstStyle>
           <a:p>
             <a:r>
-              <a:rPr lang="en-US"/>
+              <a:rPr lang="en-US" smtClean="0"/>
               <a:t>Click to edit Master title style</a:t>
             </a:r>
+            <a:endParaRPr lang="en-US"/>
           </a:p>
         </p:txBody>
       </p:sp>
@@ -1539,7 +1600,7 @@
           <a:p>
             <a:pPr lvl="0"/>
             <a:r>
-              <a:rPr lang="en-US"/>
+              <a:rPr lang="en-US" smtClean="0"/>
               <a:t>Click to edit Master text styles</a:t>
             </a:r>
           </a:p>
@@ -1562,7 +1623,7 @@
           <a:p>
             <a:fld id="{5BCAD085-E8A6-8845-BD4E-CB4CCA059FC4}" type="datetimeFigureOut">
               <a:rPr lang="en-US" smtClean="0"/>
-              <a:t>10/21/2026</a:t>
+              <a:t>1/27/13</a:t>
             </a:fld>
             <a:endParaRPr lang="en-US"/>
           </a:p>
@@ -1656,9 +1717,10 @@
           <a:lstStyle/>
           <a:p>
             <a:r>
-              <a:rPr lang="en-US"/>
+              <a:rPr lang="en-US" smtClean="0"/>
               <a:t>Click to edit Master title style</a:t>
             </a:r>
+            <a:endParaRPr lang="en-US"/>
           </a:p>
         </p:txBody>
       </p:sp>
@@ -1712,37 +1774,38 @@
           <a:p>
             <a:pPr lvl="0"/>
             <a:r>
-              <a:rPr lang="en-US"/>
+              <a:rPr lang="en-US" smtClean="0"/>
               <a:t>Click to edit Master text styles</a:t>
             </a:r>
           </a:p>
           <a:p>
             <a:pPr lvl="1"/>
             <a:r>
-              <a:rPr lang="en-US"/>
+              <a:rPr lang="en-US" smtClean="0"/>
               <a:t>Second level</a:t>
             </a:r>
           </a:p>
           <a:p>
             <a:pPr lvl="2"/>
             <a:r>
-              <a:rPr lang="en-US"/>
+              <a:rPr lang="en-US" smtClean="0"/>
               <a:t>Third level</a:t>
             </a:r>
           </a:p>
           <a:p>
             <a:pPr lvl="3"/>
             <a:r>
-              <a:rPr lang="en-US"/>
+              <a:rPr lang="en-US" smtClean="0"/>
               <a:t>Fourth level</a:t>
             </a:r>
           </a:p>
           <a:p>
             <a:pPr lvl="4"/>
             <a:r>
-              <a:rPr lang="en-US"/>
+              <a:rPr lang="en-US" smtClean="0"/>
               <a:t>Fifth level</a:t>
             </a:r>
+            <a:endParaRPr lang="en-US"/>
           </a:p>
         </p:txBody>
       </p:sp>
@@ -1796,37 +1859,38 @@
           <a:p>
             <a:pPr lvl="0"/>
             <a:r>
-              <a:rPr lang="en-US"/>
+              <a:rPr lang="en-US" smtClean="0"/>
               <a:t>Click to edit Master text styles</a:t>
             </a:r>
           </a:p>
           <a:p>
             <a:pPr lvl="1"/>
             <a:r>
-              <a:rPr lang="en-US"/>
+              <a:rPr lang="en-US" smtClean="0"/>
               <a:t>Second level</a:t>
             </a:r>
           </a:p>
           <a:p>
             <a:pPr lvl="2"/>
             <a:r>
-              <a:rPr lang="en-US"/>
+              <a:rPr lang="en-US" smtClean="0"/>
               <a:t>Third level</a:t>
             </a:r>
           </a:p>
           <a:p>
             <a:pPr lvl="3"/>
             <a:r>
-              <a:rPr lang="en-US"/>
+              <a:rPr lang="en-US" smtClean="0"/>
               <a:t>Fourth level</a:t>
             </a:r>
           </a:p>
           <a:p>
             <a:pPr lvl="4"/>
             <a:r>
-              <a:rPr lang="en-US"/>
+              <a:rPr lang="en-US" smtClean="0"/>
               <a:t>Fifth level</a:t>
             </a:r>
+            <a:endParaRPr lang="en-US"/>
           </a:p>
         </p:txBody>
       </p:sp>
@@ -1847,7 +1911,7 @@
           <a:p>
             <a:fld id="{5BCAD085-E8A6-8845-BD4E-CB4CCA059FC4}" type="datetimeFigureOut">
               <a:rPr lang="en-US" smtClean="0"/>
-              <a:t>10/21/2026</a:t>
+              <a:t>1/27/13</a:t>
             </a:fld>
             <a:endParaRPr lang="en-US"/>
           </a:p>
@@ -1945,9 +2009,10 @@
           </a:lstStyle>
           <a:p>
             <a:r>
-              <a:rPr lang="en-US"/>
+              <a:rPr lang="en-US" smtClean="0"/>
               <a:t>Click to edit Master title style</a:t>
             </a:r>
+            <a:endParaRPr lang="en-US"/>
           </a:p>
         </p:txBody>
       </p:sp>
@@ -2010,7 +2075,7 @@
           <a:p>
             <a:pPr lvl="0"/>
             <a:r>
-              <a:rPr lang="en-US"/>
+              <a:rPr lang="en-US" smtClean="0"/>
               <a:t>Click to edit Master text styles</a:t>
             </a:r>
           </a:p>
@@ -2066,37 +2131,38 @@
           <a:p>
             <a:pPr lvl="0"/>
             <a:r>
-              <a:rPr lang="en-US"/>
+              <a:rPr lang="en-US" smtClean="0"/>
               <a:t>Click to edit Master text styles</a:t>
             </a:r>
           </a:p>
           <a:p>
             <a:pPr lvl="1"/>
             <a:r>
-              <a:rPr lang="en-US"/>
+              <a:rPr lang="en-US" smtClean="0"/>
               <a:t>Second level</a:t>
             </a:r>
           </a:p>
           <a:p>
             <a:pPr lvl="2"/>
             <a:r>
-              <a:rPr lang="en-US"/>
+              <a:rPr lang="en-US" smtClean="0"/>
               <a:t>Third level</a:t>
             </a:r>
           </a:p>
           <a:p>
             <a:pPr lvl="3"/>
             <a:r>
-              <a:rPr lang="en-US"/>
+              <a:rPr lang="en-US" smtClean="0"/>
               <a:t>Fourth level</a:t>
             </a:r>
           </a:p>
           <a:p>
             <a:pPr lvl="4"/>
             <a:r>
-              <a:rPr lang="en-US"/>
+              <a:rPr lang="en-US" smtClean="0"/>
               <a:t>Fifth level</a:t>
             </a:r>
+            <a:endParaRPr lang="en-US"/>
           </a:p>
         </p:txBody>
       </p:sp>
@@ -2159,7 +2225,7 @@
           <a:p>
             <a:pPr lvl="0"/>
             <a:r>
-              <a:rPr lang="en-US"/>
+              <a:rPr lang="en-US" smtClean="0"/>
               <a:t>Click to edit Master text styles</a:t>
             </a:r>
           </a:p>
@@ -2215,37 +2281,38 @@
           <a:p>
             <a:pPr lvl="0"/>
             <a:r>
-              <a:rPr lang="en-US"/>
+              <a:rPr lang="en-US" smtClean="0"/>
               <a:t>Click to edit Master text styles</a:t>
             </a:r>
           </a:p>
           <a:p>
             <a:pPr lvl="1"/>
             <a:r>
-              <a:rPr lang="en-US"/>
+              <a:rPr lang="en-US" smtClean="0"/>
               <a:t>Second level</a:t>
             </a:r>
           </a:p>
           <a:p>
             <a:pPr lvl="2"/>
             <a:r>
-              <a:rPr lang="en-US"/>
+              <a:rPr lang="en-US" smtClean="0"/>
               <a:t>Third level</a:t>
             </a:r>
           </a:p>
           <a:p>
             <a:pPr lvl="3"/>
             <a:r>
-              <a:rPr lang="en-US"/>
+              <a:rPr lang="en-US" smtClean="0"/>
               <a:t>Fourth level</a:t>
             </a:r>
           </a:p>
           <a:p>
             <a:pPr lvl="4"/>
             <a:r>
-              <a:rPr lang="en-US"/>
+              <a:rPr lang="en-US" smtClean="0"/>
               <a:t>Fifth level</a:t>
             </a:r>
+            <a:endParaRPr lang="en-US"/>
           </a:p>
         </p:txBody>
       </p:sp>
@@ -2266,7 +2333,7 @@
           <a:p>
             <a:fld id="{5BCAD085-E8A6-8845-BD4E-CB4CCA059FC4}" type="datetimeFigureOut">
               <a:rPr lang="en-US" smtClean="0"/>
-              <a:t>10/21/2026</a:t>
+              <a:t>1/27/13</a:t>
             </a:fld>
             <a:endParaRPr lang="en-US"/>
           </a:p>
@@ -2360,9 +2427,10 @@
           <a:lstStyle/>
           <a:p>
             <a:r>
-              <a:rPr lang="en-US"/>
+              <a:rPr lang="en-US" smtClean="0"/>
               <a:t>Click to edit Master title style</a:t>
             </a:r>
+            <a:endParaRPr lang="en-US"/>
           </a:p>
         </p:txBody>
       </p:sp>
@@ -2383,7 +2451,7 @@
           <a:p>
             <a:fld id="{5BCAD085-E8A6-8845-BD4E-CB4CCA059FC4}" type="datetimeFigureOut">
               <a:rPr lang="en-US" smtClean="0"/>
-              <a:t>10/21/2026</a:t>
+              <a:t>1/27/13</a:t>
             </a:fld>
             <a:endParaRPr lang="en-US"/>
           </a:p>
@@ -2478,7 +2546,7 @@
           <a:p>
             <a:fld id="{5BCAD085-E8A6-8845-BD4E-CB4CCA059FC4}" type="datetimeFigureOut">
               <a:rPr lang="en-US" smtClean="0"/>
-              <a:t>10/21/2026</a:t>
+              <a:t>1/27/13</a:t>
             </a:fld>
             <a:endParaRPr lang="en-US"/>
           </a:p>
@@ -2581,9 +2649,10 @@
           </a:lstStyle>
           <a:p>
             <a:r>
-              <a:rPr lang="en-US"/>
+              <a:rPr lang="en-US" smtClean="0"/>
               <a:t>Click to edit Master title style</a:t>
             </a:r>
+            <a:endParaRPr lang="en-US"/>
           </a:p>
         </p:txBody>
       </p:sp>
@@ -2637,37 +2706,38 @@
           <a:p>
             <a:pPr lvl="0"/>
             <a:r>
-              <a:rPr lang="en-US"/>
+              <a:rPr lang="en-US" smtClean="0"/>
               <a:t>Click to edit Master text styles</a:t>
             </a:r>
           </a:p>
           <a:p>
             <a:pPr lvl="1"/>
             <a:r>
-              <a:rPr lang="en-US"/>
+              <a:rPr lang="en-US" smtClean="0"/>
               <a:t>Second level</a:t>
             </a:r>
           </a:p>
           <a:p>
             <a:pPr lvl="2"/>
             <a:r>
-              <a:rPr lang="en-US"/>
+              <a:rPr lang="en-US" smtClean="0"/>
               <a:t>Third level</a:t>
             </a:r>
           </a:p>
           <a:p>
             <a:pPr lvl="3"/>
             <a:r>
-              <a:rPr lang="en-US"/>
+              <a:rPr lang="en-US" smtClean="0"/>
               <a:t>Fourth level</a:t>
             </a:r>
           </a:p>
           <a:p>
             <a:pPr lvl="4"/>
             <a:r>
-              <a:rPr lang="en-US"/>
+              <a:rPr lang="en-US" smtClean="0"/>
               <a:t>Fifth level</a:t>
             </a:r>
+            <a:endParaRPr lang="en-US"/>
           </a:p>
         </p:txBody>
       </p:sp>
@@ -2730,7 +2800,7 @@
           <a:p>
             <a:pPr lvl="0"/>
             <a:r>
-              <a:rPr lang="en-US"/>
+              <a:rPr lang="en-US" smtClean="0"/>
               <a:t>Click to edit Master text styles</a:t>
             </a:r>
           </a:p>
@@ -2753,7 +2823,7 @@
           <a:p>
             <a:fld id="{5BCAD085-E8A6-8845-BD4E-CB4CCA059FC4}" type="datetimeFigureOut">
               <a:rPr lang="en-US" smtClean="0"/>
-              <a:t>10/21/2026</a:t>
+              <a:t>1/27/13</a:t>
             </a:fld>
             <a:endParaRPr lang="en-US"/>
           </a:p>
@@ -2856,9 +2926,10 @@
           </a:lstStyle>
           <a:p>
             <a:r>
-              <a:rPr lang="en-US"/>
+              <a:rPr lang="en-US" smtClean="0"/>
               <a:t>Click to edit Master title style</a:t>
             </a:r>
+            <a:endParaRPr lang="en-US"/>
           </a:p>
         </p:txBody>
       </p:sp>
@@ -2982,7 +3053,7 @@
           <a:p>
             <a:pPr lvl="0"/>
             <a:r>
-              <a:rPr lang="en-US"/>
+              <a:rPr lang="en-US" smtClean="0"/>
               <a:t>Click to edit Master text styles</a:t>
             </a:r>
           </a:p>
@@ -3005,7 +3076,7 @@
           <a:p>
             <a:fld id="{5BCAD085-E8A6-8845-BD4E-CB4CCA059FC4}" type="datetimeFigureOut">
               <a:rPr lang="en-US" smtClean="0"/>
-              <a:t>10/21/2026</a:t>
+              <a:t>1/27/13</a:t>
             </a:fld>
             <a:endParaRPr lang="en-US"/>
           </a:p>
@@ -3114,9 +3185,10 @@
           <a:lstStyle/>
           <a:p>
             <a:r>
-              <a:rPr lang="en-US"/>
+              <a:rPr lang="en-US" smtClean="0"/>
               <a:t>Click to edit Master title style</a:t>
             </a:r>
+            <a:endParaRPr lang="en-US"/>
           </a:p>
         </p:txBody>
       </p:sp>
@@ -3147,37 +3219,38 @@
           <a:p>
             <a:pPr lvl="0"/>
             <a:r>
-              <a:rPr lang="en-US"/>
+              <a:rPr lang="en-US" smtClean="0"/>
               <a:t>Click to edit Master text styles</a:t>
             </a:r>
           </a:p>
           <a:p>
             <a:pPr lvl="1"/>
             <a:r>
-              <a:rPr lang="en-US"/>
+              <a:rPr lang="en-US" smtClean="0"/>
               <a:t>Second level</a:t>
             </a:r>
           </a:p>
           <a:p>
             <a:pPr lvl="2"/>
             <a:r>
-              <a:rPr lang="en-US"/>
+              <a:rPr lang="en-US" smtClean="0"/>
               <a:t>Third level</a:t>
             </a:r>
           </a:p>
           <a:p>
             <a:pPr lvl="3"/>
             <a:r>
-              <a:rPr lang="en-US"/>
+              <a:rPr lang="en-US" smtClean="0"/>
               <a:t>Fourth level</a:t>
             </a:r>
           </a:p>
           <a:p>
             <a:pPr lvl="4"/>
             <a:r>
-              <a:rPr lang="en-US"/>
+              <a:rPr lang="en-US" smtClean="0"/>
               <a:t>Fifth level</a:t>
             </a:r>
+            <a:endParaRPr lang="en-US"/>
           </a:p>
         </p:txBody>
       </p:sp>
@@ -3216,7 +3289,7 @@
           <a:p>
             <a:fld id="{5BCAD085-E8A6-8845-BD4E-CB4CCA059FC4}" type="datetimeFigureOut">
               <a:rPr lang="en-US" smtClean="0"/>
-              <a:t>10/21/2026</a:t>
+              <a:t>1/27/13</a:t>
             </a:fld>
             <a:endParaRPr lang="en-US"/>
           </a:p>
@@ -3575,7 +3648,7 @@
 </file>
 
 <file path=ppt/slides/slide1.xml><?xml version="1.0" encoding="utf-8"?>
-<p:sld xmlns:a="http://schemas.openxmlformats.org/drawingml/2006/main" xmlns:r="http://schemas.openxmlformats.org/officeDocument/2006/relationships" xmlns:p="http://schemas.openxmlformats.org/presentationml/2006/main">
+<p:sld xmlns:a="http://schemas.openxmlformats.org/drawingml/2006/main" xmlns:p="http://schemas.openxmlformats.org/presentationml/2006/main" xmlns:r="http://schemas.openxmlformats.org/officeDocument/2006/relationships">
   <p:cSld>
     <p:spTree>
       <p:nvGrpSpPr>
@@ -3583,14 +3656,7 @@
         <p:cNvGrpSpPr/>
         <p:nvPr/>
       </p:nvGrpSpPr>
-      <p:grpSpPr>
-        <a:xfrm>
-          <a:off x="0" y="0"/>
-          <a:ext cx="0" cy="0"/>
-          <a:chOff x="0" y="0"/>
-          <a:chExt cx="0" cy="0"/>
-        </a:xfrm>
-      </p:grpSpPr>
+      <p:grpSpPr/>
       <p:sp>
         <p:nvSpPr>
           <p:cNvPr id="2" name="Rectangle 1"/>
@@ -3632,7 +3698,6 @@
           <a:lstStyle/>
           <a:p>
             <a:pPr algn="ctr"/>
-            <a:endParaRPr/>
           </a:p>
         </p:txBody>
       </p:sp>
@@ -3677,7 +3742,6 @@
           <a:lstStyle/>
           <a:p>
             <a:pPr algn="ctr"/>
-            <a:endParaRPr/>
           </a:p>
         </p:txBody>
       </p:sp>
@@ -3698,7 +3762,7 @@
           <a:noFill/>
         </p:spPr>
         <p:txBody>
-          <a:bodyPr wrap="square" lIns="45720" rIns="45720" anchor="t">
+          <a:bodyPr wrap="square" anchor="t" lIns="45720" rIns="45720">
             <a:spAutoFit/>
           </a:bodyPr>
           <a:lstStyle/>
@@ -3753,7 +3817,7 @@
           <a:noFill/>
         </p:spPr>
         <p:txBody>
-          <a:bodyPr wrap="square" lIns="45720" rIns="45720" anchor="t">
+          <a:bodyPr wrap="square" anchor="t" lIns="45720" rIns="45720">
             <a:spAutoFit/>
           </a:bodyPr>
           <a:lstStyle/>
@@ -3792,7 +3856,7 @@
           <a:noFill/>
         </p:spPr>
         <p:txBody>
-          <a:bodyPr wrap="square" lIns="45720" rIns="45720" anchor="t">
+          <a:bodyPr wrap="square" anchor="t" lIns="45720" rIns="45720">
             <a:spAutoFit/>
           </a:bodyPr>
           <a:lstStyle/>
@@ -3847,7 +3911,7 @@
           <a:noFill/>
         </p:spPr>
         <p:txBody>
-          <a:bodyPr wrap="square" lIns="45720" rIns="45720" anchor="t">
+          <a:bodyPr wrap="square" anchor="t" lIns="45720" rIns="45720">
             <a:spAutoFit/>
           </a:bodyPr>
           <a:lstStyle/>
@@ -3878,7 +3942,7 @@
 </file>
 
 <file path=ppt/slides/slide10.xml><?xml version="1.0" encoding="utf-8"?>
-<p:sld xmlns:a="http://schemas.openxmlformats.org/drawingml/2006/main" xmlns:r="http://schemas.openxmlformats.org/officeDocument/2006/relationships" xmlns:p="http://schemas.openxmlformats.org/presentationml/2006/main">
+<p:sld xmlns:a="http://schemas.openxmlformats.org/drawingml/2006/main" xmlns:p="http://schemas.openxmlformats.org/presentationml/2006/main" xmlns:r="http://schemas.openxmlformats.org/officeDocument/2006/relationships">
   <p:cSld>
     <p:spTree>
       <p:nvGrpSpPr>
@@ -3886,14 +3950,7 @@
         <p:cNvGrpSpPr/>
         <p:nvPr/>
       </p:nvGrpSpPr>
-      <p:grpSpPr>
-        <a:xfrm>
-          <a:off x="0" y="0"/>
-          <a:ext cx="0" cy="0"/>
-          <a:chOff x="0" y="0"/>
-          <a:chExt cx="0" cy="0"/>
-        </a:xfrm>
-      </p:grpSpPr>
+      <p:grpSpPr/>
       <p:sp>
         <p:nvSpPr>
           <p:cNvPr id="2" name="Rectangle 1"/>
@@ -3935,7 +3992,6 @@
           <a:lstStyle/>
           <a:p>
             <a:pPr algn="ctr"/>
-            <a:endParaRPr/>
           </a:p>
         </p:txBody>
       </p:sp>
@@ -3956,7 +4012,7 @@
           <a:noFill/>
         </p:spPr>
         <p:txBody>
-          <a:bodyPr wrap="square" lIns="45720" rIns="45720" anchor="t">
+          <a:bodyPr wrap="square" anchor="t" lIns="45720" rIns="45720">
             <a:spAutoFit/>
           </a:bodyPr>
           <a:lstStyle/>
@@ -3995,7 +4051,7 @@
           <a:noFill/>
         </p:spPr>
         <p:txBody>
-          <a:bodyPr wrap="square" lIns="45720" rIns="45720" anchor="t">
+          <a:bodyPr wrap="square" anchor="t" lIns="45720" rIns="45720">
             <a:spAutoFit/>
           </a:bodyPr>
           <a:lstStyle/>
@@ -4034,7 +4090,7 @@
           <a:noFill/>
         </p:spPr>
         <p:txBody>
-          <a:bodyPr wrap="square" lIns="45720" rIns="45720" anchor="t">
+          <a:bodyPr wrap="square" anchor="t" lIns="45720" rIns="45720">
             <a:spAutoFit/>
           </a:bodyPr>
           <a:lstStyle/>
@@ -4073,7 +4129,7 @@
           <a:noFill/>
         </p:spPr>
         <p:txBody>
-          <a:bodyPr wrap="square" lIns="45720" rIns="45720" anchor="t">
+          <a:bodyPr wrap="square" anchor="t" lIns="45720" rIns="45720">
             <a:spAutoFit/>
           </a:bodyPr>
           <a:lstStyle/>
@@ -4112,7 +4168,7 @@
           <a:noFill/>
         </p:spPr>
         <p:txBody>
-          <a:bodyPr wrap="square" lIns="45720" rIns="45720" anchor="t">
+          <a:bodyPr wrap="square" anchor="t" lIns="45720" rIns="45720">
             <a:spAutoFit/>
           </a:bodyPr>
           <a:lstStyle/>
@@ -4233,25 +4289,13 @@
                 <a:tableStyleId>{5C22544A-7EE6-4342-B048-85BDC9FD1C3A}</a:tableStyleId>
               </a:tblPr>
               <a:tblGrid>
-                <a:gridCol w="3291840">
-                  <a:extLst>
-                    <a:ext uri="{9D8B030D-6E8A-4147-A177-3AD203B41FA5}">
-                      <a16:colId xmlns:a16="http://schemas.microsoft.com/office/drawing/2014/main" val="20000"/>
-                    </a:ext>
-                  </a:extLst>
-                </a:gridCol>
-                <a:gridCol w="2011680">
-                  <a:extLst>
-                    <a:ext uri="{9D8B030D-6E8A-4147-A177-3AD203B41FA5}">
-                      <a16:colId xmlns:a16="http://schemas.microsoft.com/office/drawing/2014/main" val="20001"/>
-                    </a:ext>
-                  </a:extLst>
-                </a:gridCol>
+                <a:gridCol w="3291840"/>
+                <a:gridCol w="2011680"/>
               </a:tblGrid>
               <a:tr h="548640">
                 <a:tc>
                   <a:txBody>
-                    <a:bodyPr/>
+                    <a:bodyPr wrap="square"/>
                     <a:lstStyle/>
                     <a:p>
                       <a:r>
@@ -4273,7 +4317,7 @@
                 </a:tc>
                 <a:tc>
                   <a:txBody>
-                    <a:bodyPr/>
+                    <a:bodyPr wrap="square"/>
                     <a:lstStyle/>
                     <a:p>
                       <a:r>
@@ -4293,16 +4337,11 @@
                     </a:solidFill>
                   </a:tcPr>
                 </a:tc>
-                <a:extLst>
-                  <a:ext uri="{0D108BD9-81ED-4DB2-BD59-A6C34878D82A}">
-                    <a16:rowId xmlns:a16="http://schemas.microsoft.com/office/drawing/2014/main" val="10000"/>
-                  </a:ext>
-                </a:extLst>
               </a:tr>
               <a:tr h="548640">
                 <a:tc>
                   <a:txBody>
-                    <a:bodyPr/>
+                    <a:bodyPr wrap="square"/>
                     <a:lstStyle/>
                     <a:p>
                       <a:r>
@@ -4324,10 +4363,18 @@
                 </a:tc>
                 <a:tc>
                   <a:txBody>
-                    <a:bodyPr/>
-                    <a:lstStyle/>
-                    <a:p>
-                      <a:endParaRPr/>
+                    <a:bodyPr wrap="square"/>
+                    <a:lstStyle/>
+                    <a:p>
+                      <a:r>
+                        <a:rPr sz="1300" b="0">
+                          <a:solidFill>
+                            <a:srgbClr val="1F1F1F"/>
+                          </a:solidFill>
+                          <a:latin typeface="Calibri"/>
+                        </a:rPr>
+                        <a:t/>
+                      </a:r>
                     </a:p>
                   </a:txBody>
                   <a:tcPr marL="54864" marR="54864" marT="27432" marB="27432">
@@ -4336,16 +4383,11 @@
                     </a:solidFill>
                   </a:tcPr>
                 </a:tc>
-                <a:extLst>
-                  <a:ext uri="{0D108BD9-81ED-4DB2-BD59-A6C34878D82A}">
-                    <a16:rowId xmlns:a16="http://schemas.microsoft.com/office/drawing/2014/main" val="10001"/>
-                  </a:ext>
-                </a:extLst>
               </a:tr>
               <a:tr h="548640">
                 <a:tc>
                   <a:txBody>
-                    <a:bodyPr/>
+                    <a:bodyPr wrap="square"/>
                     <a:lstStyle/>
                     <a:p>
                       <a:r>
@@ -4367,10 +4409,18 @@
                 </a:tc>
                 <a:tc>
                   <a:txBody>
-                    <a:bodyPr/>
-                    <a:lstStyle/>
-                    <a:p>
-                      <a:endParaRPr/>
+                    <a:bodyPr wrap="square"/>
+                    <a:lstStyle/>
+                    <a:p>
+                      <a:r>
+                        <a:rPr sz="1300" b="0">
+                          <a:solidFill>
+                            <a:srgbClr val="1F1F1F"/>
+                          </a:solidFill>
+                          <a:latin typeface="Calibri"/>
+                        </a:rPr>
+                        <a:t/>
+                      </a:r>
                     </a:p>
                   </a:txBody>
                   <a:tcPr marL="54864" marR="54864" marT="27432" marB="27432">
@@ -4379,16 +4429,11 @@
                     </a:solidFill>
                   </a:tcPr>
                 </a:tc>
-                <a:extLst>
-                  <a:ext uri="{0D108BD9-81ED-4DB2-BD59-A6C34878D82A}">
-                    <a16:rowId xmlns:a16="http://schemas.microsoft.com/office/drawing/2014/main" val="10002"/>
-                  </a:ext>
-                </a:extLst>
               </a:tr>
               <a:tr h="548640">
                 <a:tc>
                   <a:txBody>
-                    <a:bodyPr/>
+                    <a:bodyPr wrap="square"/>
                     <a:lstStyle/>
                     <a:p>
                       <a:r>
@@ -4410,10 +4455,18 @@
                 </a:tc>
                 <a:tc>
                   <a:txBody>
-                    <a:bodyPr/>
-                    <a:lstStyle/>
-                    <a:p>
-                      <a:endParaRPr/>
+                    <a:bodyPr wrap="square"/>
+                    <a:lstStyle/>
+                    <a:p>
+                      <a:r>
+                        <a:rPr sz="1300" b="0">
+                          <a:solidFill>
+                            <a:srgbClr val="1F1F1F"/>
+                          </a:solidFill>
+                          <a:latin typeface="Calibri"/>
+                        </a:rPr>
+                        <a:t/>
+                      </a:r>
                     </a:p>
                   </a:txBody>
                   <a:tcPr marL="54864" marR="54864" marT="27432" marB="27432">
@@ -4422,16 +4475,11 @@
                     </a:solidFill>
                   </a:tcPr>
                 </a:tc>
-                <a:extLst>
-                  <a:ext uri="{0D108BD9-81ED-4DB2-BD59-A6C34878D82A}">
-                    <a16:rowId xmlns:a16="http://schemas.microsoft.com/office/drawing/2014/main" val="10003"/>
-                  </a:ext>
-                </a:extLst>
               </a:tr>
               <a:tr h="548640">
                 <a:tc>
                   <a:txBody>
-                    <a:bodyPr/>
+                    <a:bodyPr wrap="square"/>
                     <a:lstStyle/>
                     <a:p>
                       <a:r>
@@ -4453,10 +4501,18 @@
                 </a:tc>
                 <a:tc>
                   <a:txBody>
-                    <a:bodyPr/>
-                    <a:lstStyle/>
-                    <a:p>
-                      <a:endParaRPr/>
+                    <a:bodyPr wrap="square"/>
+                    <a:lstStyle/>
+                    <a:p>
+                      <a:r>
+                        <a:rPr sz="1300" b="0">
+                          <a:solidFill>
+                            <a:srgbClr val="1F1F1F"/>
+                          </a:solidFill>
+                          <a:latin typeface="Calibri"/>
+                        </a:rPr>
+                        <a:t/>
+                      </a:r>
                     </a:p>
                   </a:txBody>
                   <a:tcPr marL="54864" marR="54864" marT="27432" marB="27432">
@@ -4465,11 +4521,6 @@
                     </a:solidFill>
                   </a:tcPr>
                 </a:tc>
-                <a:extLst>
-                  <a:ext uri="{0D108BD9-81ED-4DB2-BD59-A6C34878D82A}">
-                    <a16:rowId xmlns:a16="http://schemas.microsoft.com/office/drawing/2014/main" val="10004"/>
-                  </a:ext>
-                </a:extLst>
               </a:tr>
             </a:tbl>
           </a:graphicData>
@@ -4484,7 +4535,7 @@
 </file>
 
 <file path=ppt/slides/slide2.xml><?xml version="1.0" encoding="utf-8"?>
-<p:sld xmlns:a="http://schemas.openxmlformats.org/drawingml/2006/main" xmlns:r="http://schemas.openxmlformats.org/officeDocument/2006/relationships" xmlns:p="http://schemas.openxmlformats.org/presentationml/2006/main">
+<p:sld xmlns:a="http://schemas.openxmlformats.org/drawingml/2006/main" xmlns:p="http://schemas.openxmlformats.org/presentationml/2006/main" xmlns:r="http://schemas.openxmlformats.org/officeDocument/2006/relationships">
   <p:cSld>
     <p:spTree>
       <p:nvGrpSpPr>
@@ -4492,14 +4543,7 @@
         <p:cNvGrpSpPr/>
         <p:nvPr/>
       </p:nvGrpSpPr>
-      <p:grpSpPr>
-        <a:xfrm>
-          <a:off x="0" y="0"/>
-          <a:ext cx="0" cy="0"/>
-          <a:chOff x="0" y="0"/>
-          <a:chExt cx="0" cy="0"/>
-        </a:xfrm>
-      </p:grpSpPr>
+      <p:grpSpPr/>
       <p:sp>
         <p:nvSpPr>
           <p:cNvPr id="2" name="Rectangle 1"/>
@@ -4541,7 +4585,6 @@
           <a:lstStyle/>
           <a:p>
             <a:pPr algn="ctr"/>
-            <a:endParaRPr/>
           </a:p>
         </p:txBody>
       </p:sp>
@@ -4562,7 +4605,7 @@
           <a:noFill/>
         </p:spPr>
         <p:txBody>
-          <a:bodyPr wrap="square" lIns="45720" rIns="45720" anchor="t">
+          <a:bodyPr wrap="square" anchor="t" lIns="45720" rIns="45720">
             <a:spAutoFit/>
           </a:bodyPr>
           <a:lstStyle/>
@@ -4601,7 +4644,7 @@
           <a:noFill/>
         </p:spPr>
         <p:txBody>
-          <a:bodyPr wrap="square" lIns="45720" rIns="45720" anchor="t">
+          <a:bodyPr wrap="square" anchor="t" lIns="45720" rIns="45720">
             <a:spAutoFit/>
           </a:bodyPr>
           <a:lstStyle/>
@@ -4640,7 +4683,7 @@
           <a:noFill/>
         </p:spPr>
         <p:txBody>
-          <a:bodyPr wrap="square" lIns="45720" rIns="45720" anchor="t">
+          <a:bodyPr wrap="square" anchor="t" lIns="45720" rIns="45720">
             <a:spAutoFit/>
           </a:bodyPr>
           <a:lstStyle/>
@@ -4679,7 +4722,7 @@
           <a:noFill/>
         </p:spPr>
         <p:txBody>
-          <a:bodyPr wrap="square" lIns="45720" rIns="45720" anchor="t">
+          <a:bodyPr wrap="square" anchor="t" lIns="45720" rIns="45720">
             <a:spAutoFit/>
           </a:bodyPr>
           <a:lstStyle/>
@@ -4744,7 +4787,6 @@
           <a:lstStyle/>
           <a:p>
             <a:pPr algn="ctr"/>
-            <a:endParaRPr/>
           </a:p>
         </p:txBody>
       </p:sp>
@@ -4765,7 +4807,7 @@
           <a:noFill/>
         </p:spPr>
         <p:txBody>
-          <a:bodyPr wrap="square" lIns="45720" rIns="45720" anchor="ctr">
+          <a:bodyPr wrap="square" anchor="ctr" lIns="45720" rIns="45720">
             <a:spAutoFit/>
           </a:bodyPr>
           <a:lstStyle/>
@@ -4883,7 +4925,6 @@
           <a:lstStyle/>
           <a:p>
             <a:pPr algn="ctr"/>
-            <a:endParaRPr/>
           </a:p>
         </p:txBody>
       </p:sp>
@@ -4904,7 +4945,7 @@
           <a:noFill/>
         </p:spPr>
         <p:txBody>
-          <a:bodyPr wrap="square" lIns="45720" rIns="45720" anchor="ctr">
+          <a:bodyPr wrap="square" anchor="ctr" lIns="45720" rIns="45720">
             <a:spAutoFit/>
           </a:bodyPr>
           <a:lstStyle/>
@@ -5022,7 +5063,6 @@
           <a:lstStyle/>
           <a:p>
             <a:pPr algn="ctr"/>
-            <a:endParaRPr/>
           </a:p>
         </p:txBody>
       </p:sp>
@@ -5043,7 +5083,7 @@
           <a:noFill/>
         </p:spPr>
         <p:txBody>
-          <a:bodyPr wrap="square" lIns="45720" rIns="45720" anchor="ctr">
+          <a:bodyPr wrap="square" anchor="ctr" lIns="45720" rIns="45720">
             <a:spAutoFit/>
           </a:bodyPr>
           <a:lstStyle/>
@@ -5161,7 +5201,6 @@
           <a:lstStyle/>
           <a:p>
             <a:pPr algn="ctr"/>
-            <a:endParaRPr/>
           </a:p>
         </p:txBody>
       </p:sp>
@@ -5182,7 +5221,7 @@
           <a:noFill/>
         </p:spPr>
         <p:txBody>
-          <a:bodyPr wrap="square" lIns="45720" rIns="45720" anchor="ctr">
+          <a:bodyPr wrap="square" anchor="ctr" lIns="45720" rIns="45720">
             <a:spAutoFit/>
           </a:bodyPr>
           <a:lstStyle/>
@@ -5300,7 +5339,6 @@
           <a:lstStyle/>
           <a:p>
             <a:pPr algn="ctr"/>
-            <a:endParaRPr/>
           </a:p>
         </p:txBody>
       </p:sp>
@@ -5321,7 +5359,7 @@
           <a:noFill/>
         </p:spPr>
         <p:txBody>
-          <a:bodyPr wrap="square" lIns="45720" rIns="45720" anchor="ctr">
+          <a:bodyPr wrap="square" anchor="ctr" lIns="45720" rIns="45720">
             <a:spAutoFit/>
           </a:bodyPr>
           <a:lstStyle/>
@@ -5377,7 +5415,7 @@
           <a:noFill/>
         </p:spPr>
         <p:txBody>
-          <a:bodyPr wrap="square" lIns="45720" rIns="45720" anchor="t">
+          <a:bodyPr wrap="square" anchor="t" lIns="45720" rIns="45720">
             <a:spAutoFit/>
           </a:bodyPr>
           <a:lstStyle/>
@@ -5418,39 +5456,15 @@
                 <a:tableStyleId>{5C22544A-7EE6-4342-B048-85BDC9FD1C3A}</a:tableStyleId>
               </a:tblPr>
               <a:tblGrid>
-                <a:gridCol w="2743200">
-                  <a:extLst>
-                    <a:ext uri="{9D8B030D-6E8A-4147-A177-3AD203B41FA5}">
-                      <a16:colId xmlns:a16="http://schemas.microsoft.com/office/drawing/2014/main" val="20000"/>
-                    </a:ext>
-                  </a:extLst>
-                </a:gridCol>
-                <a:gridCol w="2743200">
-                  <a:extLst>
-                    <a:ext uri="{9D8B030D-6E8A-4147-A177-3AD203B41FA5}">
-                      <a16:colId xmlns:a16="http://schemas.microsoft.com/office/drawing/2014/main" val="20001"/>
-                    </a:ext>
-                  </a:extLst>
-                </a:gridCol>
-                <a:gridCol w="2788920">
-                  <a:extLst>
-                    <a:ext uri="{9D8B030D-6E8A-4147-A177-3AD203B41FA5}">
-                      <a16:colId xmlns:a16="http://schemas.microsoft.com/office/drawing/2014/main" val="20002"/>
-                    </a:ext>
-                  </a:extLst>
-                </a:gridCol>
-                <a:gridCol w="2788920">
-                  <a:extLst>
-                    <a:ext uri="{9D8B030D-6E8A-4147-A177-3AD203B41FA5}">
-                      <a16:colId xmlns:a16="http://schemas.microsoft.com/office/drawing/2014/main" val="20003"/>
-                    </a:ext>
-                  </a:extLst>
-                </a:gridCol>
+                <a:gridCol w="2743200"/>
+                <a:gridCol w="2743200"/>
+                <a:gridCol w="2788920"/>
+                <a:gridCol w="2788920"/>
               </a:tblGrid>
               <a:tr h="457200">
                 <a:tc>
                   <a:txBody>
-                    <a:bodyPr/>
+                    <a:bodyPr wrap="square"/>
                     <a:lstStyle/>
                     <a:p>
                       <a:r>
@@ -5472,7 +5486,7 @@
                 </a:tc>
                 <a:tc>
                   <a:txBody>
-                    <a:bodyPr/>
+                    <a:bodyPr wrap="square"/>
                     <a:lstStyle/>
                     <a:p>
                       <a:r>
@@ -5494,7 +5508,7 @@
                 </a:tc>
                 <a:tc>
                   <a:txBody>
-                    <a:bodyPr/>
+                    <a:bodyPr wrap="square"/>
                     <a:lstStyle/>
                     <a:p>
                       <a:r>
@@ -5516,7 +5530,7 @@
                 </a:tc>
                 <a:tc>
                   <a:txBody>
-                    <a:bodyPr/>
+                    <a:bodyPr wrap="square"/>
                     <a:lstStyle/>
                     <a:p>
                       <a:r>
@@ -5536,16 +5550,11 @@
                     </a:solidFill>
                   </a:tcPr>
                 </a:tc>
-                <a:extLst>
-                  <a:ext uri="{0D108BD9-81ED-4DB2-BD59-A6C34878D82A}">
-                    <a16:rowId xmlns:a16="http://schemas.microsoft.com/office/drawing/2014/main" val="10000"/>
-                  </a:ext>
-                </a:extLst>
               </a:tr>
               <a:tr h="457200">
                 <a:tc>
                   <a:txBody>
-                    <a:bodyPr/>
+                    <a:bodyPr wrap="square"/>
                     <a:lstStyle/>
                     <a:p>
                       <a:r>
@@ -5567,7 +5576,7 @@
                 </a:tc>
                 <a:tc>
                   <a:txBody>
-                    <a:bodyPr/>
+                    <a:bodyPr wrap="square"/>
                     <a:lstStyle/>
                     <a:p>
                       <a:r>
@@ -5589,7 +5598,7 @@
                 </a:tc>
                 <a:tc>
                   <a:txBody>
-                    <a:bodyPr/>
+                    <a:bodyPr wrap="square"/>
                     <a:lstStyle/>
                     <a:p>
                       <a:r>
@@ -5611,7 +5620,7 @@
                 </a:tc>
                 <a:tc>
                   <a:txBody>
-                    <a:bodyPr/>
+                    <a:bodyPr wrap="square"/>
                     <a:lstStyle/>
                     <a:p>
                       <a:r>
@@ -5631,11 +5640,6 @@
                     </a:solidFill>
                   </a:tcPr>
                 </a:tc>
-                <a:extLst>
-                  <a:ext uri="{0D108BD9-81ED-4DB2-BD59-A6C34878D82A}">
-                    <a16:rowId xmlns:a16="http://schemas.microsoft.com/office/drawing/2014/main" val="10001"/>
-                  </a:ext>
-                </a:extLst>
               </a:tr>
             </a:tbl>
           </a:graphicData>
@@ -5684,7 +5688,6 @@
           <a:lstStyle/>
           <a:p>
             <a:pPr algn="ctr"/>
-            <a:endParaRPr/>
           </a:p>
         </p:txBody>
       </p:sp>
@@ -5705,7 +5708,7 @@
           <a:noFill/>
         </p:spPr>
         <p:txBody>
-          <a:bodyPr wrap="square" lIns="45720" rIns="45720" anchor="ctr">
+          <a:bodyPr wrap="square" anchor="ctr" lIns="45720" rIns="45720">
             <a:spAutoFit/>
           </a:bodyPr>
           <a:lstStyle/>
@@ -5786,7 +5789,6 @@
           <a:lstStyle/>
           <a:p>
             <a:pPr algn="ctr"/>
-            <a:endParaRPr/>
           </a:p>
         </p:txBody>
       </p:sp>
@@ -5807,7 +5809,7 @@
           <a:noFill/>
         </p:spPr>
         <p:txBody>
-          <a:bodyPr wrap="square" lIns="45720" rIns="45720" anchor="ctr">
+          <a:bodyPr wrap="square" anchor="ctr" lIns="45720" rIns="45720">
             <a:spAutoFit/>
           </a:bodyPr>
           <a:lstStyle/>
@@ -5854,7 +5856,7 @@
 </file>
 
 <file path=ppt/slides/slide3.xml><?xml version="1.0" encoding="utf-8"?>
-<p:sld xmlns:a="http://schemas.openxmlformats.org/drawingml/2006/main" xmlns:r="http://schemas.openxmlformats.org/officeDocument/2006/relationships" xmlns:p="http://schemas.openxmlformats.org/presentationml/2006/main">
+<p:sld xmlns:a="http://schemas.openxmlformats.org/drawingml/2006/main" xmlns:p="http://schemas.openxmlformats.org/presentationml/2006/main" xmlns:r="http://schemas.openxmlformats.org/officeDocument/2006/relationships">
   <p:cSld>
     <p:spTree>
       <p:nvGrpSpPr>
@@ -5862,14 +5864,7 @@
         <p:cNvGrpSpPr/>
         <p:nvPr/>
       </p:nvGrpSpPr>
-      <p:grpSpPr>
-        <a:xfrm>
-          <a:off x="0" y="0"/>
-          <a:ext cx="0" cy="0"/>
-          <a:chOff x="0" y="0"/>
-          <a:chExt cx="0" cy="0"/>
-        </a:xfrm>
-      </p:grpSpPr>
+      <p:grpSpPr/>
       <p:sp>
         <p:nvSpPr>
           <p:cNvPr id="2" name="Rectangle 1"/>
@@ -5911,7 +5906,6 @@
           <a:lstStyle/>
           <a:p>
             <a:pPr algn="ctr"/>
-            <a:endParaRPr/>
           </a:p>
         </p:txBody>
       </p:sp>
@@ -5932,7 +5926,7 @@
           <a:noFill/>
         </p:spPr>
         <p:txBody>
-          <a:bodyPr wrap="square" lIns="45720" rIns="45720" anchor="t">
+          <a:bodyPr wrap="square" anchor="t" lIns="45720" rIns="45720">
             <a:spAutoFit/>
           </a:bodyPr>
           <a:lstStyle/>
@@ -5971,7 +5965,7 @@
           <a:noFill/>
         </p:spPr>
         <p:txBody>
-          <a:bodyPr wrap="square" lIns="45720" rIns="45720" anchor="t">
+          <a:bodyPr wrap="square" anchor="t" lIns="45720" rIns="45720">
             <a:spAutoFit/>
           </a:bodyPr>
           <a:lstStyle/>
@@ -6010,7 +6004,7 @@
           <a:noFill/>
         </p:spPr>
         <p:txBody>
-          <a:bodyPr wrap="square" lIns="45720" rIns="45720" anchor="t">
+          <a:bodyPr wrap="square" anchor="t" lIns="45720" rIns="45720">
             <a:spAutoFit/>
           </a:bodyPr>
           <a:lstStyle/>
@@ -6049,7 +6043,7 @@
           <a:noFill/>
         </p:spPr>
         <p:txBody>
-          <a:bodyPr wrap="square" lIns="45720" rIns="45720" anchor="t">
+          <a:bodyPr wrap="square" anchor="t" lIns="45720" rIns="45720">
             <a:spAutoFit/>
           </a:bodyPr>
           <a:lstStyle/>
@@ -6114,7 +6108,6 @@
           <a:lstStyle/>
           <a:p>
             <a:pPr algn="ctr"/>
-            <a:endParaRPr/>
           </a:p>
         </p:txBody>
       </p:sp>
@@ -6135,7 +6128,7 @@
           <a:noFill/>
         </p:spPr>
         <p:txBody>
-          <a:bodyPr wrap="square" lIns="45720" rIns="45720" anchor="ctr">
+          <a:bodyPr wrap="square" anchor="ctr" lIns="45720" rIns="45720">
             <a:spAutoFit/>
           </a:bodyPr>
           <a:lstStyle/>
@@ -6253,7 +6246,6 @@
           <a:lstStyle/>
           <a:p>
             <a:pPr algn="ctr"/>
-            <a:endParaRPr/>
           </a:p>
         </p:txBody>
       </p:sp>
@@ -6274,7 +6266,7 @@
           <a:noFill/>
         </p:spPr>
         <p:txBody>
-          <a:bodyPr wrap="square" lIns="45720" rIns="45720" anchor="ctr">
+          <a:bodyPr wrap="square" anchor="ctr" lIns="45720" rIns="45720">
             <a:spAutoFit/>
           </a:bodyPr>
           <a:lstStyle/>
@@ -6392,7 +6384,6 @@
           <a:lstStyle/>
           <a:p>
             <a:pPr algn="ctr"/>
-            <a:endParaRPr/>
           </a:p>
         </p:txBody>
       </p:sp>
@@ -6413,7 +6404,7 @@
           <a:noFill/>
         </p:spPr>
         <p:txBody>
-          <a:bodyPr wrap="square" lIns="45720" rIns="45720" anchor="ctr">
+          <a:bodyPr wrap="square" anchor="ctr" lIns="45720" rIns="45720">
             <a:spAutoFit/>
           </a:bodyPr>
           <a:lstStyle/>
@@ -6531,7 +6522,6 @@
           <a:lstStyle/>
           <a:p>
             <a:pPr algn="ctr"/>
-            <a:endParaRPr/>
           </a:p>
         </p:txBody>
       </p:sp>
@@ -6552,7 +6542,7 @@
           <a:noFill/>
         </p:spPr>
         <p:txBody>
-          <a:bodyPr wrap="square" lIns="45720" rIns="45720" anchor="ctr">
+          <a:bodyPr wrap="square" anchor="ctr" lIns="45720" rIns="45720">
             <a:spAutoFit/>
           </a:bodyPr>
           <a:lstStyle/>
@@ -6608,7 +6598,7 @@
           <a:noFill/>
         </p:spPr>
         <p:txBody>
-          <a:bodyPr wrap="square" lIns="45720" rIns="45720" anchor="t">
+          <a:bodyPr wrap="square" anchor="t" lIns="45720" rIns="45720">
             <a:spAutoFit/>
           </a:bodyPr>
           <a:lstStyle/>
@@ -6649,25 +6639,13 @@
                 <a:tableStyleId>{5C22544A-7EE6-4342-B048-85BDC9FD1C3A}</a:tableStyleId>
               </a:tblPr>
               <a:tblGrid>
-                <a:gridCol w="2011680">
-                  <a:extLst>
-                    <a:ext uri="{9D8B030D-6E8A-4147-A177-3AD203B41FA5}">
-                      <a16:colId xmlns:a16="http://schemas.microsoft.com/office/drawing/2014/main" val="20000"/>
-                    </a:ext>
-                  </a:extLst>
-                </a:gridCol>
-                <a:gridCol w="9052560">
-                  <a:extLst>
-                    <a:ext uri="{9D8B030D-6E8A-4147-A177-3AD203B41FA5}">
-                      <a16:colId xmlns:a16="http://schemas.microsoft.com/office/drawing/2014/main" val="20001"/>
-                    </a:ext>
-                  </a:extLst>
-                </a:gridCol>
+                <a:gridCol w="2011680"/>
+                <a:gridCol w="9052560"/>
               </a:tblGrid>
               <a:tr h="475488">
                 <a:tc>
                   <a:txBody>
-                    <a:bodyPr/>
+                    <a:bodyPr wrap="square"/>
                     <a:lstStyle/>
                     <a:p>
                       <a:r>
@@ -6689,7 +6667,7 @@
                 </a:tc>
                 <a:tc>
                   <a:txBody>
-                    <a:bodyPr/>
+                    <a:bodyPr wrap="square"/>
                     <a:lstStyle/>
                     <a:p>
                       <a:r>
@@ -6709,16 +6687,11 @@
                     </a:solidFill>
                   </a:tcPr>
                 </a:tc>
-                <a:extLst>
-                  <a:ext uri="{0D108BD9-81ED-4DB2-BD59-A6C34878D82A}">
-                    <a16:rowId xmlns:a16="http://schemas.microsoft.com/office/drawing/2014/main" val="10000"/>
-                  </a:ext>
-                </a:extLst>
               </a:tr>
               <a:tr h="475488">
                 <a:tc>
                   <a:txBody>
-                    <a:bodyPr/>
+                    <a:bodyPr wrap="square"/>
                     <a:lstStyle/>
                     <a:p>
                       <a:r>
@@ -6740,7 +6713,7 @@
                 </a:tc>
                 <a:tc>
                   <a:txBody>
-                    <a:bodyPr/>
+                    <a:bodyPr wrap="square"/>
                     <a:lstStyle/>
                     <a:p>
                       <a:r>
@@ -6760,16 +6733,11 @@
                     </a:solidFill>
                   </a:tcPr>
                 </a:tc>
-                <a:extLst>
-                  <a:ext uri="{0D108BD9-81ED-4DB2-BD59-A6C34878D82A}">
-                    <a16:rowId xmlns:a16="http://schemas.microsoft.com/office/drawing/2014/main" val="10001"/>
-                  </a:ext>
-                </a:extLst>
               </a:tr>
               <a:tr h="475488">
                 <a:tc>
                   <a:txBody>
-                    <a:bodyPr/>
+                    <a:bodyPr wrap="square"/>
                     <a:lstStyle/>
                     <a:p>
                       <a:r>
@@ -6791,7 +6759,7 @@
                 </a:tc>
                 <a:tc>
                   <a:txBody>
-                    <a:bodyPr/>
+                    <a:bodyPr wrap="square"/>
                     <a:lstStyle/>
                     <a:p>
                       <a:r>
@@ -6811,16 +6779,11 @@
                     </a:solidFill>
                   </a:tcPr>
                 </a:tc>
-                <a:extLst>
-                  <a:ext uri="{0D108BD9-81ED-4DB2-BD59-A6C34878D82A}">
-                    <a16:rowId xmlns:a16="http://schemas.microsoft.com/office/drawing/2014/main" val="10002"/>
-                  </a:ext>
-                </a:extLst>
               </a:tr>
               <a:tr h="475488">
                 <a:tc>
                   <a:txBody>
-                    <a:bodyPr/>
+                    <a:bodyPr wrap="square"/>
                     <a:lstStyle/>
                     <a:p>
                       <a:r>
@@ -6842,7 +6805,7 @@
                 </a:tc>
                 <a:tc>
                   <a:txBody>
-                    <a:bodyPr/>
+                    <a:bodyPr wrap="square"/>
                     <a:lstStyle/>
                     <a:p>
                       <a:r>
@@ -6862,16 +6825,11 @@
                     </a:solidFill>
                   </a:tcPr>
                 </a:tc>
-                <a:extLst>
-                  <a:ext uri="{0D108BD9-81ED-4DB2-BD59-A6C34878D82A}">
-                    <a16:rowId xmlns:a16="http://schemas.microsoft.com/office/drawing/2014/main" val="10003"/>
-                  </a:ext>
-                </a:extLst>
               </a:tr>
               <a:tr h="475488">
                 <a:tc>
                   <a:txBody>
-                    <a:bodyPr/>
+                    <a:bodyPr wrap="square"/>
                     <a:lstStyle/>
                     <a:p>
                       <a:r>
@@ -6893,7 +6851,7 @@
                 </a:tc>
                 <a:tc>
                   <a:txBody>
-                    <a:bodyPr/>
+                    <a:bodyPr wrap="square"/>
                     <a:lstStyle/>
                     <a:p>
                       <a:r>
@@ -6913,11 +6871,6 @@
                     </a:solidFill>
                   </a:tcPr>
                 </a:tc>
-                <a:extLst>
-                  <a:ext uri="{0D108BD9-81ED-4DB2-BD59-A6C34878D82A}">
-                    <a16:rowId xmlns:a16="http://schemas.microsoft.com/office/drawing/2014/main" val="10004"/>
-                  </a:ext>
-                </a:extLst>
               </a:tr>
             </a:tbl>
           </a:graphicData>
@@ -6932,7 +6885,7 @@
 </file>
 
 <file path=ppt/slides/slide4.xml><?xml version="1.0" encoding="utf-8"?>
-<p:sld xmlns:a="http://schemas.openxmlformats.org/drawingml/2006/main" xmlns:r="http://schemas.openxmlformats.org/officeDocument/2006/relationships" xmlns:p="http://schemas.openxmlformats.org/presentationml/2006/main">
+<p:sld xmlns:a="http://schemas.openxmlformats.org/drawingml/2006/main" xmlns:p="http://schemas.openxmlformats.org/presentationml/2006/main" xmlns:r="http://schemas.openxmlformats.org/officeDocument/2006/relationships">
   <p:cSld>
     <p:spTree>
       <p:nvGrpSpPr>
@@ -6940,14 +6893,7 @@
         <p:cNvGrpSpPr/>
         <p:nvPr/>
       </p:nvGrpSpPr>
-      <p:grpSpPr>
-        <a:xfrm>
-          <a:off x="0" y="0"/>
-          <a:ext cx="0" cy="0"/>
-          <a:chOff x="0" y="0"/>
-          <a:chExt cx="0" cy="0"/>
-        </a:xfrm>
-      </p:grpSpPr>
+      <p:grpSpPr/>
       <p:sp>
         <p:nvSpPr>
           <p:cNvPr id="2" name="Rectangle 1"/>
@@ -6989,7 +6935,6 @@
           <a:lstStyle/>
           <a:p>
             <a:pPr algn="ctr"/>
-            <a:endParaRPr/>
           </a:p>
         </p:txBody>
       </p:sp>
@@ -7010,7 +6955,7 @@
           <a:noFill/>
         </p:spPr>
         <p:txBody>
-          <a:bodyPr wrap="square" lIns="45720" rIns="45720" anchor="t">
+          <a:bodyPr wrap="square" anchor="t" lIns="45720" rIns="45720">
             <a:spAutoFit/>
           </a:bodyPr>
           <a:lstStyle/>
@@ -7049,7 +6994,7 @@
           <a:noFill/>
         </p:spPr>
         <p:txBody>
-          <a:bodyPr wrap="square" lIns="45720" rIns="45720" anchor="t">
+          <a:bodyPr wrap="square" anchor="t" lIns="45720" rIns="45720">
             <a:spAutoFit/>
           </a:bodyPr>
           <a:lstStyle/>
@@ -7088,7 +7033,7 @@
           <a:noFill/>
         </p:spPr>
         <p:txBody>
-          <a:bodyPr wrap="square" lIns="45720" rIns="45720" anchor="t">
+          <a:bodyPr wrap="square" anchor="t" lIns="45720" rIns="45720">
             <a:spAutoFit/>
           </a:bodyPr>
           <a:lstStyle/>
@@ -7120,7 +7065,7 @@
         </p:nvGraphicFramePr>
         <p:xfrm>
           <a:off x="548640" y="1188720"/>
-          <a:ext cx="11064240" cy="2871216"/>
+          <a:ext cx="11064240" cy="2688336"/>
         </p:xfrm>
         <a:graphic>
           <a:graphicData uri="http://schemas.openxmlformats.org/drawingml/2006/table">
@@ -7129,32 +7074,14 @@
                 <a:tableStyleId>{5C22544A-7EE6-4342-B048-85BDC9FD1C3A}</a:tableStyleId>
               </a:tblPr>
               <a:tblGrid>
-                <a:gridCol w="2743200">
-                  <a:extLst>
-                    <a:ext uri="{9D8B030D-6E8A-4147-A177-3AD203B41FA5}">
-                      <a16:colId xmlns:a16="http://schemas.microsoft.com/office/drawing/2014/main" val="20000"/>
-                    </a:ext>
-                  </a:extLst>
-                </a:gridCol>
-                <a:gridCol w="3931920">
-                  <a:extLst>
-                    <a:ext uri="{9D8B030D-6E8A-4147-A177-3AD203B41FA5}">
-                      <a16:colId xmlns:a16="http://schemas.microsoft.com/office/drawing/2014/main" val="20001"/>
-                    </a:ext>
-                  </a:extLst>
-                </a:gridCol>
-                <a:gridCol w="4389120">
-                  <a:extLst>
-                    <a:ext uri="{9D8B030D-6E8A-4147-A177-3AD203B41FA5}">
-                      <a16:colId xmlns:a16="http://schemas.microsoft.com/office/drawing/2014/main" val="20002"/>
-                    </a:ext>
-                  </a:extLst>
-                </a:gridCol>
+                <a:gridCol w="2743200"/>
+                <a:gridCol w="3931920"/>
+                <a:gridCol w="4389120"/>
               </a:tblGrid>
               <a:tr h="384048">
                 <a:tc>
                   <a:txBody>
-                    <a:bodyPr/>
+                    <a:bodyPr wrap="square"/>
                     <a:lstStyle/>
                     <a:p>
                       <a:r>
@@ -7176,7 +7103,7 @@
                 </a:tc>
                 <a:tc>
                   <a:txBody>
-                    <a:bodyPr/>
+                    <a:bodyPr wrap="square"/>
                     <a:lstStyle/>
                     <a:p>
                       <a:r>
@@ -7198,7 +7125,7 @@
                 </a:tc>
                 <a:tc>
                   <a:txBody>
-                    <a:bodyPr/>
+                    <a:bodyPr wrap="square"/>
                     <a:lstStyle/>
                     <a:p>
                       <a:r>
@@ -7218,16 +7145,11 @@
                     </a:solidFill>
                   </a:tcPr>
                 </a:tc>
-                <a:extLst>
-                  <a:ext uri="{0D108BD9-81ED-4DB2-BD59-A6C34878D82A}">
-                    <a16:rowId xmlns:a16="http://schemas.microsoft.com/office/drawing/2014/main" val="10000"/>
-                  </a:ext>
-                </a:extLst>
               </a:tr>
               <a:tr h="384048">
                 <a:tc>
                   <a:txBody>
-                    <a:bodyPr/>
+                    <a:bodyPr wrap="square"/>
                     <a:lstStyle/>
                     <a:p>
                       <a:r>
@@ -7249,7 +7171,7 @@
                 </a:tc>
                 <a:tc>
                   <a:txBody>
-                    <a:bodyPr/>
+                    <a:bodyPr wrap="square"/>
                     <a:lstStyle/>
                     <a:p>
                       <a:r>
@@ -7271,7 +7193,7 @@
                 </a:tc>
                 <a:tc>
                   <a:txBody>
-                    <a:bodyPr/>
+                    <a:bodyPr wrap="square"/>
                     <a:lstStyle/>
                     <a:p>
                       <a:r>
@@ -7291,16 +7213,11 @@
                     </a:solidFill>
                   </a:tcPr>
                 </a:tc>
-                <a:extLst>
-                  <a:ext uri="{0D108BD9-81ED-4DB2-BD59-A6C34878D82A}">
-                    <a16:rowId xmlns:a16="http://schemas.microsoft.com/office/drawing/2014/main" val="10001"/>
-                  </a:ext>
-                </a:extLst>
               </a:tr>
               <a:tr h="384048">
                 <a:tc>
                   <a:txBody>
-                    <a:bodyPr/>
+                    <a:bodyPr wrap="square"/>
                     <a:lstStyle/>
                     <a:p>
                       <a:r>
@@ -7322,7 +7239,7 @@
                 </a:tc>
                 <a:tc>
                   <a:txBody>
-                    <a:bodyPr/>
+                    <a:bodyPr wrap="square"/>
                     <a:lstStyle/>
                     <a:p>
                       <a:r>
@@ -7344,7 +7261,7 @@
                 </a:tc>
                 <a:tc>
                   <a:txBody>
-                    <a:bodyPr/>
+                    <a:bodyPr wrap="square"/>
                     <a:lstStyle/>
                     <a:p>
                       <a:r>
@@ -7364,16 +7281,11 @@
                     </a:solidFill>
                   </a:tcPr>
                 </a:tc>
-                <a:extLst>
-                  <a:ext uri="{0D108BD9-81ED-4DB2-BD59-A6C34878D82A}">
-                    <a16:rowId xmlns:a16="http://schemas.microsoft.com/office/drawing/2014/main" val="10002"/>
-                  </a:ext>
-                </a:extLst>
               </a:tr>
               <a:tr h="384048">
                 <a:tc>
                   <a:txBody>
-                    <a:bodyPr/>
+                    <a:bodyPr wrap="square"/>
                     <a:lstStyle/>
                     <a:p>
                       <a:r>
@@ -7395,7 +7307,7 @@
                 </a:tc>
                 <a:tc>
                   <a:txBody>
-                    <a:bodyPr/>
+                    <a:bodyPr wrap="square"/>
                     <a:lstStyle/>
                     <a:p>
                       <a:r>
@@ -7417,7 +7329,7 @@
                 </a:tc>
                 <a:tc>
                   <a:txBody>
-                    <a:bodyPr/>
+                    <a:bodyPr wrap="square"/>
                     <a:lstStyle/>
                     <a:p>
                       <a:r>
@@ -7437,16 +7349,11 @@
                     </a:solidFill>
                   </a:tcPr>
                 </a:tc>
-                <a:extLst>
-                  <a:ext uri="{0D108BD9-81ED-4DB2-BD59-A6C34878D82A}">
-                    <a16:rowId xmlns:a16="http://schemas.microsoft.com/office/drawing/2014/main" val="10003"/>
-                  </a:ext>
-                </a:extLst>
               </a:tr>
               <a:tr h="384048">
                 <a:tc>
                   <a:txBody>
-                    <a:bodyPr/>
+                    <a:bodyPr wrap="square"/>
                     <a:lstStyle/>
                     <a:p>
                       <a:r>
@@ -7468,7 +7375,7 @@
                 </a:tc>
                 <a:tc>
                   <a:txBody>
-                    <a:bodyPr/>
+                    <a:bodyPr wrap="square"/>
                     <a:lstStyle/>
                     <a:p>
                       <a:r>
@@ -7490,7 +7397,7 @@
                 </a:tc>
                 <a:tc>
                   <a:txBody>
-                    <a:bodyPr/>
+                    <a:bodyPr wrap="square"/>
                     <a:lstStyle/>
                     <a:p>
                       <a:r>
@@ -7510,16 +7417,11 @@
                     </a:solidFill>
                   </a:tcPr>
                 </a:tc>
-                <a:extLst>
-                  <a:ext uri="{0D108BD9-81ED-4DB2-BD59-A6C34878D82A}">
-                    <a16:rowId xmlns:a16="http://schemas.microsoft.com/office/drawing/2014/main" val="10004"/>
-                  </a:ext>
-                </a:extLst>
               </a:tr>
               <a:tr h="384048">
                 <a:tc>
                   <a:txBody>
-                    <a:bodyPr/>
+                    <a:bodyPr wrap="square"/>
                     <a:lstStyle/>
                     <a:p>
                       <a:r>
@@ -7541,7 +7443,7 @@
                 </a:tc>
                 <a:tc>
                   <a:txBody>
-                    <a:bodyPr/>
+                    <a:bodyPr wrap="square"/>
                     <a:lstStyle/>
                     <a:p>
                       <a:r>
@@ -7563,7 +7465,7 @@
                 </a:tc>
                 <a:tc>
                   <a:txBody>
-                    <a:bodyPr/>
+                    <a:bodyPr wrap="square"/>
                     <a:lstStyle/>
                     <a:p>
                       <a:r>
@@ -7583,16 +7485,11 @@
                     </a:solidFill>
                   </a:tcPr>
                 </a:tc>
-                <a:extLst>
-                  <a:ext uri="{0D108BD9-81ED-4DB2-BD59-A6C34878D82A}">
-                    <a16:rowId xmlns:a16="http://schemas.microsoft.com/office/drawing/2014/main" val="10005"/>
-                  </a:ext>
-                </a:extLst>
               </a:tr>
               <a:tr h="384048">
                 <a:tc>
                   <a:txBody>
-                    <a:bodyPr/>
+                    <a:bodyPr wrap="square"/>
                     <a:lstStyle/>
                     <a:p>
                       <a:r>
@@ -7614,7 +7511,7 @@
                 </a:tc>
                 <a:tc>
                   <a:txBody>
-                    <a:bodyPr/>
+                    <a:bodyPr wrap="square"/>
                     <a:lstStyle/>
                     <a:p>
                       <a:r>
@@ -7636,7 +7533,7 @@
                 </a:tc>
                 <a:tc>
                   <a:txBody>
-                    <a:bodyPr/>
+                    <a:bodyPr wrap="square"/>
                     <a:lstStyle/>
                     <a:p>
                       <a:r>
@@ -7656,11 +7553,6 @@
                     </a:solidFill>
                   </a:tcPr>
                 </a:tc>
-                <a:extLst>
-                  <a:ext uri="{0D108BD9-81ED-4DB2-BD59-A6C34878D82A}">
-                    <a16:rowId xmlns:a16="http://schemas.microsoft.com/office/drawing/2014/main" val="10006"/>
-                  </a:ext>
-                </a:extLst>
               </a:tr>
             </a:tbl>
           </a:graphicData>
@@ -7683,7 +7575,7 @@
           <a:noFill/>
         </p:spPr>
         <p:txBody>
-          <a:bodyPr wrap="square" lIns="45720" rIns="45720" anchor="t">
+          <a:bodyPr wrap="square" anchor="t" lIns="45720" rIns="45720">
             <a:spAutoFit/>
           </a:bodyPr>
           <a:lstStyle/>
@@ -7722,7 +7614,7 @@
           <a:noFill/>
         </p:spPr>
         <p:txBody>
-          <a:bodyPr wrap="square" lIns="45720" rIns="45720" anchor="t">
+          <a:bodyPr wrap="square" anchor="t" lIns="45720" rIns="45720">
             <a:spAutoFit/>
           </a:bodyPr>
           <a:lstStyle/>
@@ -7801,7 +7693,7 @@
 </file>
 
 <file path=ppt/slides/slide5.xml><?xml version="1.0" encoding="utf-8"?>
-<p:sld xmlns:a="http://schemas.openxmlformats.org/drawingml/2006/main" xmlns:r="http://schemas.openxmlformats.org/officeDocument/2006/relationships" xmlns:p="http://schemas.openxmlformats.org/presentationml/2006/main">
+<p:sld xmlns:a="http://schemas.openxmlformats.org/drawingml/2006/main" xmlns:p="http://schemas.openxmlformats.org/presentationml/2006/main" xmlns:r="http://schemas.openxmlformats.org/officeDocument/2006/relationships">
   <p:cSld>
     <p:spTree>
       <p:nvGrpSpPr>
@@ -7809,14 +7701,7 @@
         <p:cNvGrpSpPr/>
         <p:nvPr/>
       </p:nvGrpSpPr>
-      <p:grpSpPr>
-        <a:xfrm>
-          <a:off x="0" y="0"/>
-          <a:ext cx="0" cy="0"/>
-          <a:chOff x="0" y="0"/>
-          <a:chExt cx="0" cy="0"/>
-        </a:xfrm>
-      </p:grpSpPr>
+      <p:grpSpPr/>
       <p:sp>
         <p:nvSpPr>
           <p:cNvPr id="2" name="Rectangle 1"/>
@@ -7858,7 +7743,6 @@
           <a:lstStyle/>
           <a:p>
             <a:pPr algn="ctr"/>
-            <a:endParaRPr/>
           </a:p>
         </p:txBody>
       </p:sp>
@@ -7879,7 +7763,7 @@
           <a:noFill/>
         </p:spPr>
         <p:txBody>
-          <a:bodyPr wrap="square" lIns="45720" rIns="45720" anchor="t">
+          <a:bodyPr wrap="square" anchor="t" lIns="45720" rIns="45720">
             <a:spAutoFit/>
           </a:bodyPr>
           <a:lstStyle/>
@@ -7918,7 +7802,7 @@
           <a:noFill/>
         </p:spPr>
         <p:txBody>
-          <a:bodyPr wrap="square" lIns="45720" rIns="45720" anchor="t">
+          <a:bodyPr wrap="square" anchor="t" lIns="45720" rIns="45720">
             <a:spAutoFit/>
           </a:bodyPr>
           <a:lstStyle/>
@@ -7957,7 +7841,7 @@
           <a:noFill/>
         </p:spPr>
         <p:txBody>
-          <a:bodyPr wrap="square" lIns="45720" rIns="45720" anchor="t">
+          <a:bodyPr wrap="square" anchor="t" lIns="45720" rIns="45720">
             <a:spAutoFit/>
           </a:bodyPr>
           <a:lstStyle/>
@@ -8012,7 +7896,7 @@
         <p:spPr>
           <a:xfrm>
             <a:off x="548640" y="4343400"/>
-            <a:ext cx="6583680" cy="820738"/>
+            <a:ext cx="6583680" cy="1645920"/>
           </a:xfrm>
           <a:prstGeom prst="rect">
             <a:avLst/>
@@ -8020,7 +7904,7 @@
           <a:noFill/>
         </p:spPr>
         <p:txBody>
-          <a:bodyPr wrap="square" lIns="45720" rIns="45720" anchor="t">
+          <a:bodyPr wrap="square" anchor="t" lIns="45720" rIns="45720">
             <a:spAutoFit/>
           </a:bodyPr>
           <a:lstStyle/>
@@ -8031,7 +7915,7 @@
               </a:spcAft>
             </a:pPr>
             <a:r>
-              <a:rPr sz="1600" b="1" dirty="0">
+              <a:rPr sz="1600" b="1">
                 <a:solidFill>
                   <a:srgbClr val="0F7C8C"/>
                 </a:solidFill>
@@ -8047,47 +7931,14 @@
               </a:spcAft>
             </a:pPr>
             <a:r>
-              <a:rPr sz="1400" b="0" dirty="0">
+              <a:rPr sz="1400" b="0">
                 <a:solidFill>
                   <a:srgbClr val="1F1F1F"/>
                 </a:solidFill>
                 <a:latin typeface="Calibri"/>
               </a:rPr>
-              <a:t>DKT (Deep Knowledge Tracing, an LSTM we will train) scores AUC 0.754 on cleaned </a:t>
-            </a:r>
-            <a:r>
-              <a:rPr sz="1400" b="0" dirty="0" err="1">
-                <a:solidFill>
-                  <a:srgbClr val="1F1F1F"/>
-                </a:solidFill>
-                <a:latin typeface="Calibri"/>
-              </a:rPr>
-              <a:t>ASSISTments</a:t>
-            </a:r>
-            <a:r>
-              <a:rPr sz="1400" b="0" dirty="0">
-                <a:solidFill>
-                  <a:srgbClr val="1F1F1F"/>
-                </a:solidFill>
-                <a:latin typeface="Calibri"/>
-              </a:rPr>
-              <a:t> </a:t>
-            </a:r>
-            <a:r>
-              <a:rPr sz="1400" b="0">
-                <a:solidFill>
-                  <a:srgbClr val="1F1F1F"/>
-                </a:solidFill>
-                <a:latin typeface="Calibri"/>
-              </a:rPr>
-              <a:t>data.</a:t>
-            </a:r>
-            <a:endParaRPr sz="1400" b="0" dirty="0">
-              <a:solidFill>
-                <a:srgbClr val="1F1F1F"/>
-              </a:solidFill>
-              <a:latin typeface="Calibri"/>
-            </a:endParaRPr>
+              <a:t>DKT (Deep Knowledge Tracing, an LSTM we will train) scores AUC 0.754 on cleaned ASSISTments data. 0.5 = random guess, 1.0 = perfect.</a:t>
+            </a:r>
           </a:p>
         </p:txBody>
       </p:sp>
@@ -8108,7 +7959,7 @@
           <a:noFill/>
         </p:spPr>
         <p:txBody>
-          <a:bodyPr wrap="square" lIns="45720" rIns="45720" anchor="t">
+          <a:bodyPr wrap="square" anchor="t" lIns="45720" rIns="45720">
             <a:spAutoFit/>
           </a:bodyPr>
           <a:lstStyle/>
@@ -8147,7 +7998,7 @@
           <a:noFill/>
         </p:spPr>
         <p:txBody>
-          <a:bodyPr wrap="square" lIns="45720" rIns="45720" anchor="t">
+          <a:bodyPr wrap="square" anchor="t" lIns="45720" rIns="45720">
             <a:spAutoFit/>
           </a:bodyPr>
           <a:lstStyle/>
@@ -8158,31 +8009,13 @@
               </a:spcAft>
             </a:pPr>
             <a:r>
-              <a:rPr sz="1500" b="0" dirty="0">
+              <a:rPr sz="1500" b="0">
                 <a:solidFill>
                   <a:srgbClr val="1F1F1F"/>
                 </a:solidFill>
                 <a:latin typeface="Calibri"/>
               </a:rPr>
-              <a:t>•  </a:t>
-            </a:r>
-            <a:r>
-              <a:rPr sz="1500" b="0" dirty="0" err="1">
-                <a:solidFill>
-                  <a:srgbClr val="1F1F1F"/>
-                </a:solidFill>
-                <a:latin typeface="Calibri"/>
-              </a:rPr>
-              <a:t>MathDial</a:t>
-            </a:r>
-            <a:r>
-              <a:rPr sz="1500" b="0" dirty="0">
-                <a:solidFill>
-                  <a:srgbClr val="1F1F1F"/>
-                </a:solidFill>
-                <a:latin typeface="Calibri"/>
-              </a:rPr>
-              <a:t> (2,861 dialogues): prompted AI teachers often reveal the answer; fine-tuned models guide better</a:t>
+              <a:t>•  Research on tutoring dialogues: prompted AI teachers often reveal the answer; fine-tuned models guide better</a:t>
             </a:r>
           </a:p>
           <a:p>
@@ -8192,7 +8025,7 @@
               </a:spcAft>
             </a:pPr>
             <a:r>
-              <a:rPr sz="1500" b="0" dirty="0">
+              <a:rPr sz="1500" b="0">
                 <a:solidFill>
                   <a:srgbClr val="1F1F1F"/>
                 </a:solidFill>
@@ -8208,7 +8041,7 @@
               </a:spcAft>
             </a:pPr>
             <a:r>
-              <a:rPr sz="1500" b="0" dirty="0">
+              <a:rPr sz="1500" b="0">
                 <a:solidFill>
                   <a:srgbClr val="1F1F1F"/>
                 </a:solidFill>
@@ -8228,7 +8061,7 @@
 </file>
 
 <file path=ppt/slides/slide6.xml><?xml version="1.0" encoding="utf-8"?>
-<p:sld xmlns:a="http://schemas.openxmlformats.org/drawingml/2006/main" xmlns:r="http://schemas.openxmlformats.org/officeDocument/2006/relationships" xmlns:p="http://schemas.openxmlformats.org/presentationml/2006/main">
+<p:sld xmlns:a="http://schemas.openxmlformats.org/drawingml/2006/main" xmlns:p="http://schemas.openxmlformats.org/presentationml/2006/main" xmlns:r="http://schemas.openxmlformats.org/officeDocument/2006/relationships">
   <p:cSld>
     <p:spTree>
       <p:nvGrpSpPr>
@@ -8236,14 +8069,7 @@
         <p:cNvGrpSpPr/>
         <p:nvPr/>
       </p:nvGrpSpPr>
-      <p:grpSpPr>
-        <a:xfrm>
-          <a:off x="0" y="0"/>
-          <a:ext cx="0" cy="0"/>
-          <a:chOff x="0" y="0"/>
-          <a:chExt cx="0" cy="0"/>
-        </a:xfrm>
-      </p:grpSpPr>
+      <p:grpSpPr/>
       <p:sp>
         <p:nvSpPr>
           <p:cNvPr id="2" name="Rectangle 1"/>
@@ -8285,7 +8111,6 @@
           <a:lstStyle/>
           <a:p>
             <a:pPr algn="ctr"/>
-            <a:endParaRPr/>
           </a:p>
         </p:txBody>
       </p:sp>
@@ -8306,7 +8131,7 @@
           <a:noFill/>
         </p:spPr>
         <p:txBody>
-          <a:bodyPr wrap="square" lIns="45720" rIns="45720" anchor="t">
+          <a:bodyPr wrap="square" anchor="t" lIns="45720" rIns="45720">
             <a:spAutoFit/>
           </a:bodyPr>
           <a:lstStyle/>
@@ -8345,7 +8170,7 @@
           <a:noFill/>
         </p:spPr>
         <p:txBody>
-          <a:bodyPr wrap="square" lIns="45720" rIns="45720" anchor="t">
+          <a:bodyPr wrap="square" anchor="t" lIns="45720" rIns="45720">
             <a:spAutoFit/>
           </a:bodyPr>
           <a:lstStyle/>
@@ -8384,7 +8209,7 @@
           <a:noFill/>
         </p:spPr>
         <p:txBody>
-          <a:bodyPr wrap="square" lIns="45720" rIns="45720" anchor="t">
+          <a:bodyPr wrap="square" anchor="t" lIns="45720" rIns="45720">
             <a:spAutoFit/>
           </a:bodyPr>
           <a:lstStyle/>
@@ -8425,32 +8250,14 @@
                 <a:tableStyleId>{5C22544A-7EE6-4342-B048-85BDC9FD1C3A}</a:tableStyleId>
               </a:tblPr>
               <a:tblGrid>
-                <a:gridCol w="2743200">
-                  <a:extLst>
-                    <a:ext uri="{9D8B030D-6E8A-4147-A177-3AD203B41FA5}">
-                      <a16:colId xmlns:a16="http://schemas.microsoft.com/office/drawing/2014/main" val="20000"/>
-                    </a:ext>
-                  </a:extLst>
-                </a:gridCol>
-                <a:gridCol w="2103120">
-                  <a:extLst>
-                    <a:ext uri="{9D8B030D-6E8A-4147-A177-3AD203B41FA5}">
-                      <a16:colId xmlns:a16="http://schemas.microsoft.com/office/drawing/2014/main" val="20001"/>
-                    </a:ext>
-                  </a:extLst>
-                </a:gridCol>
-                <a:gridCol w="6217920">
-                  <a:extLst>
-                    <a:ext uri="{9D8B030D-6E8A-4147-A177-3AD203B41FA5}">
-                      <a16:colId xmlns:a16="http://schemas.microsoft.com/office/drawing/2014/main" val="20002"/>
-                    </a:ext>
-                  </a:extLst>
-                </a:gridCol>
+                <a:gridCol w="2743200"/>
+                <a:gridCol w="2103120"/>
+                <a:gridCol w="6217920"/>
               </a:tblGrid>
               <a:tr h="475488">
                 <a:tc>
                   <a:txBody>
-                    <a:bodyPr/>
+                    <a:bodyPr wrap="square"/>
                     <a:lstStyle/>
                     <a:p>
                       <a:r>
@@ -8472,7 +8279,7 @@
                 </a:tc>
                 <a:tc>
                   <a:txBody>
-                    <a:bodyPr/>
+                    <a:bodyPr wrap="square"/>
                     <a:lstStyle/>
                     <a:p>
                       <a:r>
@@ -8494,7 +8301,7 @@
                 </a:tc>
                 <a:tc>
                   <a:txBody>
-                    <a:bodyPr/>
+                    <a:bodyPr wrap="square"/>
                     <a:lstStyle/>
                     <a:p>
                       <a:r>
@@ -8514,16 +8321,11 @@
                     </a:solidFill>
                   </a:tcPr>
                 </a:tc>
-                <a:extLst>
-                  <a:ext uri="{0D108BD9-81ED-4DB2-BD59-A6C34878D82A}">
-                    <a16:rowId xmlns:a16="http://schemas.microsoft.com/office/drawing/2014/main" val="10000"/>
-                  </a:ext>
-                </a:extLst>
               </a:tr>
               <a:tr h="475488">
                 <a:tc>
                   <a:txBody>
-                    <a:bodyPr/>
+                    <a:bodyPr wrap="square"/>
                     <a:lstStyle/>
                     <a:p>
                       <a:r>
@@ -8545,7 +8347,7 @@
                 </a:tc>
                 <a:tc>
                   <a:txBody>
-                    <a:bodyPr/>
+                    <a:bodyPr wrap="square"/>
                     <a:lstStyle/>
                     <a:p>
                       <a:r>
@@ -8567,7 +8369,7 @@
                 </a:tc>
                 <a:tc>
                   <a:txBody>
-                    <a:bodyPr/>
+                    <a:bodyPr wrap="square"/>
                     <a:lstStyle/>
                     <a:p>
                       <a:r>
@@ -8587,16 +8389,11 @@
                     </a:solidFill>
                   </a:tcPr>
                 </a:tc>
-                <a:extLst>
-                  <a:ext uri="{0D108BD9-81ED-4DB2-BD59-A6C34878D82A}">
-                    <a16:rowId xmlns:a16="http://schemas.microsoft.com/office/drawing/2014/main" val="10001"/>
-                  </a:ext>
-                </a:extLst>
               </a:tr>
               <a:tr h="475488">
                 <a:tc>
                   <a:txBody>
-                    <a:bodyPr/>
+                    <a:bodyPr wrap="square"/>
                     <a:lstStyle/>
                     <a:p>
                       <a:r>
@@ -8618,7 +8415,7 @@
                 </a:tc>
                 <a:tc>
                   <a:txBody>
-                    <a:bodyPr/>
+                    <a:bodyPr wrap="square"/>
                     <a:lstStyle/>
                     <a:p>
                       <a:r>
@@ -8640,7 +8437,7 @@
                 </a:tc>
                 <a:tc>
                   <a:txBody>
-                    <a:bodyPr/>
+                    <a:bodyPr wrap="square"/>
                     <a:lstStyle/>
                     <a:p>
                       <a:r>
@@ -8660,16 +8457,11 @@
                     </a:solidFill>
                   </a:tcPr>
                 </a:tc>
-                <a:extLst>
-                  <a:ext uri="{0D108BD9-81ED-4DB2-BD59-A6C34878D82A}">
-                    <a16:rowId xmlns:a16="http://schemas.microsoft.com/office/drawing/2014/main" val="10002"/>
-                  </a:ext>
-                </a:extLst>
               </a:tr>
               <a:tr h="475488">
                 <a:tc>
                   <a:txBody>
-                    <a:bodyPr/>
+                    <a:bodyPr wrap="square"/>
                     <a:lstStyle/>
                     <a:p>
                       <a:r>
@@ -8691,7 +8483,7 @@
                 </a:tc>
                 <a:tc>
                   <a:txBody>
-                    <a:bodyPr/>
+                    <a:bodyPr wrap="square"/>
                     <a:lstStyle/>
                     <a:p>
                       <a:r>
@@ -8713,7 +8505,7 @@
                 </a:tc>
                 <a:tc>
                   <a:txBody>
-                    <a:bodyPr/>
+                    <a:bodyPr wrap="square"/>
                     <a:lstStyle/>
                     <a:p>
                       <a:r>
@@ -8723,7 +8515,7 @@
                           </a:solidFill>
                           <a:latin typeface="Calibri"/>
                         </a:rPr>
-                        <a:t>Qwen3-4B + LoRA on MathDial + our examples: writes probing questions</a:t>
+                        <a:t>Qwen3-4B + LoRA on tutoring dialogues + our IITM BS examples: writes probing questions</a:t>
                       </a:r>
                     </a:p>
                   </a:txBody>
@@ -8733,16 +8525,11 @@
                     </a:solidFill>
                   </a:tcPr>
                 </a:tc>
-                <a:extLst>
-                  <a:ext uri="{0D108BD9-81ED-4DB2-BD59-A6C34878D82A}">
-                    <a16:rowId xmlns:a16="http://schemas.microsoft.com/office/drawing/2014/main" val="10003"/>
-                  </a:ext>
-                </a:extLst>
               </a:tr>
               <a:tr h="475488">
                 <a:tc>
                   <a:txBody>
-                    <a:bodyPr/>
+                    <a:bodyPr wrap="square"/>
                     <a:lstStyle/>
                     <a:p>
                       <a:r>
@@ -8764,7 +8551,7 @@
                 </a:tc>
                 <a:tc>
                   <a:txBody>
-                    <a:bodyPr/>
+                    <a:bodyPr wrap="square"/>
                     <a:lstStyle/>
                     <a:p>
                       <a:r>
@@ -8786,7 +8573,7 @@
                 </a:tc>
                 <a:tc>
                   <a:txBody>
-                    <a:bodyPr/>
+                    <a:bodyPr wrap="square"/>
                     <a:lstStyle/>
                     <a:p>
                       <a:r>
@@ -8806,16 +8593,11 @@
                     </a:solidFill>
                   </a:tcPr>
                 </a:tc>
-                <a:extLst>
-                  <a:ext uri="{0D108BD9-81ED-4DB2-BD59-A6C34878D82A}">
-                    <a16:rowId xmlns:a16="http://schemas.microsoft.com/office/drawing/2014/main" val="10004"/>
-                  </a:ext>
-                </a:extLst>
               </a:tr>
               <a:tr h="475488">
                 <a:tc>
                   <a:txBody>
-                    <a:bodyPr/>
+                    <a:bodyPr wrap="square"/>
                     <a:lstStyle/>
                     <a:p>
                       <a:r>
@@ -8837,7 +8619,7 @@
                 </a:tc>
                 <a:tc>
                   <a:txBody>
-                    <a:bodyPr/>
+                    <a:bodyPr wrap="square"/>
                     <a:lstStyle/>
                     <a:p>
                       <a:r>
@@ -8859,7 +8641,7 @@
                 </a:tc>
                 <a:tc>
                   <a:txBody>
-                    <a:bodyPr/>
+                    <a:bodyPr wrap="square"/>
                     <a:lstStyle/>
                     <a:p>
                       <a:r>
@@ -8879,16 +8661,11 @@
                     </a:solidFill>
                   </a:tcPr>
                 </a:tc>
-                <a:extLst>
-                  <a:ext uri="{0D108BD9-81ED-4DB2-BD59-A6C34878D82A}">
-                    <a16:rowId xmlns:a16="http://schemas.microsoft.com/office/drawing/2014/main" val="10005"/>
-                  </a:ext>
-                </a:extLst>
               </a:tr>
               <a:tr h="475488">
                 <a:tc>
                   <a:txBody>
-                    <a:bodyPr/>
+                    <a:bodyPr wrap="square"/>
                     <a:lstStyle/>
                     <a:p>
                       <a:r>
@@ -8910,7 +8687,7 @@
                 </a:tc>
                 <a:tc>
                   <a:txBody>
-                    <a:bodyPr/>
+                    <a:bodyPr wrap="square"/>
                     <a:lstStyle/>
                     <a:p>
                       <a:r>
@@ -8932,7 +8709,7 @@
                 </a:tc>
                 <a:tc>
                   <a:txBody>
-                    <a:bodyPr/>
+                    <a:bodyPr wrap="square"/>
                     <a:lstStyle/>
                     <a:p>
                       <a:r>
@@ -8952,11 +8729,6 @@
                     </a:solidFill>
                   </a:tcPr>
                 </a:tc>
-                <a:extLst>
-                  <a:ext uri="{0D108BD9-81ED-4DB2-BD59-A6C34878D82A}">
-                    <a16:rowId xmlns:a16="http://schemas.microsoft.com/office/drawing/2014/main" val="10006"/>
-                  </a:ext>
-                </a:extLst>
               </a:tr>
             </a:tbl>
           </a:graphicData>
@@ -8979,7 +8751,7 @@
           <a:noFill/>
         </p:spPr>
         <p:txBody>
-          <a:bodyPr wrap="square" lIns="45720" rIns="45720" anchor="t">
+          <a:bodyPr wrap="square" anchor="t" lIns="45720" rIns="45720">
             <a:spAutoFit/>
           </a:bodyPr>
           <a:lstStyle/>
@@ -9026,7 +8798,7 @@
 </file>
 
 <file path=ppt/slides/slide7.xml><?xml version="1.0" encoding="utf-8"?>
-<p:sld xmlns:a="http://schemas.openxmlformats.org/drawingml/2006/main" xmlns:r="http://schemas.openxmlformats.org/officeDocument/2006/relationships" xmlns:p="http://schemas.openxmlformats.org/presentationml/2006/main">
+<p:sld xmlns:a="http://schemas.openxmlformats.org/drawingml/2006/main" xmlns:p="http://schemas.openxmlformats.org/presentationml/2006/main" xmlns:r="http://schemas.openxmlformats.org/officeDocument/2006/relationships">
   <p:cSld>
     <p:spTree>
       <p:nvGrpSpPr>
@@ -9034,14 +8806,7 @@
         <p:cNvGrpSpPr/>
         <p:nvPr/>
       </p:nvGrpSpPr>
-      <p:grpSpPr>
-        <a:xfrm>
-          <a:off x="0" y="0"/>
-          <a:ext cx="0" cy="0"/>
-          <a:chOff x="0" y="0"/>
-          <a:chExt cx="0" cy="0"/>
-        </a:xfrm>
-      </p:grpSpPr>
+      <p:grpSpPr/>
       <p:sp>
         <p:nvSpPr>
           <p:cNvPr id="2" name="Rectangle 1"/>
@@ -9083,7 +8848,6 @@
           <a:lstStyle/>
           <a:p>
             <a:pPr algn="ctr"/>
-            <a:endParaRPr/>
           </a:p>
         </p:txBody>
       </p:sp>
@@ -9104,7 +8868,7 @@
           <a:noFill/>
         </p:spPr>
         <p:txBody>
-          <a:bodyPr wrap="square" lIns="45720" rIns="45720" anchor="t">
+          <a:bodyPr wrap="square" anchor="t" lIns="45720" rIns="45720">
             <a:spAutoFit/>
           </a:bodyPr>
           <a:lstStyle/>
@@ -9143,7 +8907,7 @@
           <a:noFill/>
         </p:spPr>
         <p:txBody>
-          <a:bodyPr wrap="square" lIns="45720" rIns="45720" anchor="t">
+          <a:bodyPr wrap="square" anchor="t" lIns="45720" rIns="45720">
             <a:spAutoFit/>
           </a:bodyPr>
           <a:lstStyle/>
@@ -9182,7 +8946,7 @@
           <a:noFill/>
         </p:spPr>
         <p:txBody>
-          <a:bodyPr wrap="square" lIns="45720" rIns="45720" anchor="t">
+          <a:bodyPr wrap="square" anchor="t" lIns="45720" rIns="45720">
             <a:spAutoFit/>
           </a:bodyPr>
           <a:lstStyle/>
@@ -9223,32 +8987,14 @@
                 <a:tableStyleId>{5C22544A-7EE6-4342-B048-85BDC9FD1C3A}</a:tableStyleId>
               </a:tblPr>
               <a:tblGrid>
-                <a:gridCol w="1920240">
-                  <a:extLst>
-                    <a:ext uri="{9D8B030D-6E8A-4147-A177-3AD203B41FA5}">
-                      <a16:colId xmlns:a16="http://schemas.microsoft.com/office/drawing/2014/main" val="20000"/>
-                    </a:ext>
-                  </a:extLst>
-                </a:gridCol>
-                <a:gridCol w="2011680">
-                  <a:extLst>
-                    <a:ext uri="{9D8B030D-6E8A-4147-A177-3AD203B41FA5}">
-                      <a16:colId xmlns:a16="http://schemas.microsoft.com/office/drawing/2014/main" val="20001"/>
-                    </a:ext>
-                  </a:extLst>
-                </a:gridCol>
-                <a:gridCol w="1920240">
-                  <a:extLst>
-                    <a:ext uri="{9D8B030D-6E8A-4147-A177-3AD203B41FA5}">
-                      <a16:colId xmlns:a16="http://schemas.microsoft.com/office/drawing/2014/main" val="20002"/>
-                    </a:ext>
-                  </a:extLst>
-                </a:gridCol>
+                <a:gridCol w="1920240"/>
+                <a:gridCol w="2011680"/>
+                <a:gridCol w="1920240"/>
               </a:tblGrid>
               <a:tr h="411480">
                 <a:tc>
                   <a:txBody>
-                    <a:bodyPr/>
+                    <a:bodyPr wrap="square"/>
                     <a:lstStyle/>
                     <a:p>
                       <a:r>
@@ -9270,7 +9016,7 @@
                 </a:tc>
                 <a:tc>
                   <a:txBody>
-                    <a:bodyPr/>
+                    <a:bodyPr wrap="square"/>
                     <a:lstStyle/>
                     <a:p>
                       <a:r>
@@ -9292,7 +9038,7 @@
                 </a:tc>
                 <a:tc>
                   <a:txBody>
-                    <a:bodyPr/>
+                    <a:bodyPr wrap="square"/>
                     <a:lstStyle/>
                     <a:p>
                       <a:r>
@@ -9312,16 +9058,11 @@
                     </a:solidFill>
                   </a:tcPr>
                 </a:tc>
-                <a:extLst>
-                  <a:ext uri="{0D108BD9-81ED-4DB2-BD59-A6C34878D82A}">
-                    <a16:rowId xmlns:a16="http://schemas.microsoft.com/office/drawing/2014/main" val="10000"/>
-                  </a:ext>
-                </a:extLst>
               </a:tr>
               <a:tr h="411480">
                 <a:tc>
                   <a:txBody>
-                    <a:bodyPr/>
+                    <a:bodyPr wrap="square"/>
                     <a:lstStyle/>
                     <a:p>
                       <a:r>
@@ -9343,7 +9084,7 @@
                 </a:tc>
                 <a:tc>
                   <a:txBody>
-                    <a:bodyPr/>
+                    <a:bodyPr wrap="square"/>
                     <a:lstStyle/>
                     <a:p>
                       <a:r>
@@ -9365,7 +9106,7 @@
                 </a:tc>
                 <a:tc>
                   <a:txBody>
-                    <a:bodyPr/>
+                    <a:bodyPr wrap="square"/>
                     <a:lstStyle/>
                     <a:p>
                       <a:r>
@@ -9385,16 +9126,11 @@
                     </a:solidFill>
                   </a:tcPr>
                 </a:tc>
-                <a:extLst>
-                  <a:ext uri="{0D108BD9-81ED-4DB2-BD59-A6C34878D82A}">
-                    <a16:rowId xmlns:a16="http://schemas.microsoft.com/office/drawing/2014/main" val="10001"/>
-                  </a:ext>
-                </a:extLst>
               </a:tr>
               <a:tr h="411480">
                 <a:tc>
                   <a:txBody>
-                    <a:bodyPr/>
+                    <a:bodyPr wrap="square"/>
                     <a:lstStyle/>
                     <a:p>
                       <a:r>
@@ -9416,7 +9152,7 @@
                 </a:tc>
                 <a:tc>
                   <a:txBody>
-                    <a:bodyPr/>
+                    <a:bodyPr wrap="square"/>
                     <a:lstStyle/>
                     <a:p>
                       <a:r>
@@ -9426,7 +9162,7 @@
                           </a:solidFill>
                           <a:latin typeface="Calibri"/>
                         </a:rPr>
-                        <a:t>Train DKT</a:t>
+                        <a:t>Real student answer histories to train DKT</a:t>
                       </a:r>
                     </a:p>
                   </a:txBody>
@@ -9438,7 +9174,7 @@
                 </a:tc>
                 <a:tc>
                   <a:txBody>
-                    <a:bodyPr/>
+                    <a:bodyPr wrap="square"/>
                     <a:lstStyle/>
                     <a:p>
                       <a:r>
@@ -9458,16 +9194,11 @@
                     </a:solidFill>
                   </a:tcPr>
                 </a:tc>
-                <a:extLst>
-                  <a:ext uri="{0D108BD9-81ED-4DB2-BD59-A6C34878D82A}">
-                    <a16:rowId xmlns:a16="http://schemas.microsoft.com/office/drawing/2014/main" val="10002"/>
-                  </a:ext>
-                </a:extLst>
               </a:tr>
               <a:tr h="411480">
                 <a:tc>
                   <a:txBody>
-                    <a:bodyPr/>
+                    <a:bodyPr wrap="square"/>
                     <a:lstStyle/>
                     <a:p>
                       <a:r>
@@ -9489,7 +9220,7 @@
                 </a:tc>
                 <a:tc>
                   <a:txBody>
-                    <a:bodyPr/>
+                    <a:bodyPr wrap="square"/>
                     <a:lstStyle/>
                     <a:p>
                       <a:r>
@@ -9511,7 +9242,7 @@
                 </a:tc>
                 <a:tc>
                   <a:txBody>
-                    <a:bodyPr/>
+                    <a:bodyPr wrap="square"/>
                     <a:lstStyle/>
                     <a:p>
                       <a:r>
@@ -9531,16 +9262,11 @@
                     </a:solidFill>
                   </a:tcPr>
                 </a:tc>
-                <a:extLst>
-                  <a:ext uri="{0D108BD9-81ED-4DB2-BD59-A6C34878D82A}">
-                    <a16:rowId xmlns:a16="http://schemas.microsoft.com/office/drawing/2014/main" val="10003"/>
-                  </a:ext>
-                </a:extLst>
               </a:tr>
               <a:tr h="411480">
                 <a:tc>
                   <a:txBody>
-                    <a:bodyPr/>
+                    <a:bodyPr wrap="square"/>
                     <a:lstStyle/>
                     <a:p>
                       <a:r>
@@ -9550,7 +9276,7 @@
                           </a:solidFill>
                           <a:latin typeface="Calibri"/>
                         </a:rPr>
-                        <a:t>MathDial</a:t>
+                        <a:t>Tutoring dialogues + our IITM examples</a:t>
                       </a:r>
                     </a:p>
                   </a:txBody>
@@ -9562,7 +9288,7 @@
                 </a:tc>
                 <a:tc>
                   <a:txBody>
-                    <a:bodyPr/>
+                    <a:bodyPr wrap="square"/>
                     <a:lstStyle/>
                     <a:p>
                       <a:r>
@@ -9584,7 +9310,7 @@
                 </a:tc>
                 <a:tc>
                   <a:txBody>
-                    <a:bodyPr/>
+                    <a:bodyPr wrap="square"/>
                     <a:lstStyle/>
                     <a:p>
                       <a:r>
@@ -9594,7 +9320,7 @@
                           </a:solidFill>
                           <a:latin typeface="Calibri"/>
                         </a:rPr>
-                        <a:t>2,861 dialogues</a:t>
+                        <a:t>public set + written by us</a:t>
                       </a:r>
                     </a:p>
                   </a:txBody>
@@ -9604,16 +9330,11 @@
                     </a:solidFill>
                   </a:tcPr>
                 </a:tc>
-                <a:extLst>
-                  <a:ext uri="{0D108BD9-81ED-4DB2-BD59-A6C34878D82A}">
-                    <a16:rowId xmlns:a16="http://schemas.microsoft.com/office/drawing/2014/main" val="10004"/>
-                  </a:ext>
-                </a:extLst>
               </a:tr>
               <a:tr h="411480">
                 <a:tc>
                   <a:txBody>
-                    <a:bodyPr/>
+                    <a:bodyPr wrap="square"/>
                     <a:lstStyle/>
                     <a:p>
                       <a:r>
@@ -9635,7 +9356,7 @@
                 </a:tc>
                 <a:tc>
                   <a:txBody>
-                    <a:bodyPr/>
+                    <a:bodyPr wrap="square"/>
                     <a:lstStyle/>
                     <a:p>
                       <a:r>
@@ -9657,7 +9378,7 @@
                 </a:tc>
                 <a:tc>
                   <a:txBody>
-                    <a:bodyPr/>
+                    <a:bodyPr wrap="square"/>
                     <a:lstStyle/>
                     <a:p>
                       <a:r>
@@ -9677,11 +9398,6 @@
                     </a:solidFill>
                   </a:tcPr>
                 </a:tc>
-                <a:extLst>
-                  <a:ext uri="{0D108BD9-81ED-4DB2-BD59-A6C34878D82A}">
-                    <a16:rowId xmlns:a16="http://schemas.microsoft.com/office/drawing/2014/main" val="10005"/>
-                  </a:ext>
-                </a:extLst>
               </a:tr>
             </a:tbl>
           </a:graphicData>
@@ -9695,8 +9411,8 @@
         </p:nvSpPr>
         <p:spPr>
           <a:xfrm>
-            <a:off x="548640" y="3840480"/>
-            <a:ext cx="5852160" cy="731520"/>
+            <a:off x="548640" y="3977639"/>
+            <a:ext cx="5852160" cy="914400"/>
           </a:xfrm>
           <a:prstGeom prst="rect">
             <a:avLst/>
@@ -9704,7 +9420,7 @@
           <a:noFill/>
         </p:spPr>
         <p:txBody>
-          <a:bodyPr wrap="square" lIns="45720" rIns="45720" anchor="t">
+          <a:bodyPr wrap="square" anchor="t" lIns="45720" rIns="45720">
             <a:spAutoFit/>
           </a:bodyPr>
           <a:lstStyle/>
@@ -9717,11 +9433,27 @@
             <a:r>
               <a:rPr sz="1200" b="0">
                 <a:solidFill>
-                  <a:srgbClr val="555555"/>
+                  <a:srgbClr val="1F1F1F"/>
                 </a:solidFill>
                 <a:latin typeface="Calibri"/>
               </a:rPr>
-              <a:t>Licenses checked before use (e.g. MathDial CC BY-SA 4.0, EdNet CC BY-NC 4.0).</a:t>
+              <a:t>Why ASSISTments for DKT: real, time-ordered student answers (IITM has none public); the standard DKT benchmark, so our results can be checked; maths skills; free for research.</a:t>
+            </a:r>
+          </a:p>
+          <a:p>
+            <a:pPr algn="l">
+              <a:spcAft>
+                <a:spcPts val="400"/>
+              </a:spcAft>
+            </a:pPr>
+            <a:r>
+              <a:rPr sz="1100" b="0">
+                <a:solidFill>
+                  <a:srgbClr val="555555"/>
+                </a:solidFill>
+                <a:latin typeface="Calibri"/>
+              </a:rPr>
+              <a:t>Licenses of all public datasets are checked before use.</a:t>
             </a:r>
           </a:p>
         </p:txBody>
@@ -9734,7 +9466,7 @@
         </p:nvSpPr>
         <p:spPr>
           <a:xfrm>
-            <a:off x="548640" y="4389120"/>
+            <a:off x="548640" y="4892040"/>
             <a:ext cx="5852160" cy="411480"/>
           </a:xfrm>
           <a:prstGeom prst="rect">
@@ -9743,7 +9475,7 @@
           <a:noFill/>
         </p:spPr>
         <p:txBody>
-          <a:bodyPr wrap="square" lIns="45720" rIns="45720" anchor="t">
+          <a:bodyPr wrap="square" anchor="t" lIns="45720" rIns="45720">
             <a:spAutoFit/>
           </a:bodyPr>
           <a:lstStyle/>
@@ -9774,7 +9506,7 @@
           <p:nvPr/>
         </p:nvGraphicFramePr>
         <p:xfrm>
-          <a:off x="548640" y="4846320"/>
+          <a:off x="548640" y="5303520"/>
           <a:ext cx="5852160" cy="1097280"/>
         </p:xfrm>
         <a:graphic>
@@ -9784,39 +9516,15 @@
                 <a:tableStyleId>{5C22544A-7EE6-4342-B048-85BDC9FD1C3A}</a:tableStyleId>
               </a:tblPr>
               <a:tblGrid>
-                <a:gridCol w="1097280">
-                  <a:extLst>
-                    <a:ext uri="{9D8B030D-6E8A-4147-A177-3AD203B41FA5}">
-                      <a16:colId xmlns:a16="http://schemas.microsoft.com/office/drawing/2014/main" val="20000"/>
-                    </a:ext>
-                  </a:extLst>
-                </a:gridCol>
-                <a:gridCol w="2743200">
-                  <a:extLst>
-                    <a:ext uri="{9D8B030D-6E8A-4147-A177-3AD203B41FA5}">
-                      <a16:colId xmlns:a16="http://schemas.microsoft.com/office/drawing/2014/main" val="20001"/>
-                    </a:ext>
-                  </a:extLst>
-                </a:gridCol>
-                <a:gridCol w="1005840">
-                  <a:extLst>
-                    <a:ext uri="{9D8B030D-6E8A-4147-A177-3AD203B41FA5}">
-                      <a16:colId xmlns:a16="http://schemas.microsoft.com/office/drawing/2014/main" val="20002"/>
-                    </a:ext>
-                  </a:extLst>
-                </a:gridCol>
-                <a:gridCol w="1005840">
-                  <a:extLst>
-                    <a:ext uri="{9D8B030D-6E8A-4147-A177-3AD203B41FA5}">
-                      <a16:colId xmlns:a16="http://schemas.microsoft.com/office/drawing/2014/main" val="20003"/>
-                    </a:ext>
-                  </a:extLst>
-                </a:gridCol>
+                <a:gridCol w="1097280"/>
+                <a:gridCol w="2743200"/>
+                <a:gridCol w="1005840"/>
+                <a:gridCol w="1005840"/>
               </a:tblGrid>
               <a:tr h="365760">
                 <a:tc>
                   <a:txBody>
-                    <a:bodyPr/>
+                    <a:bodyPr wrap="square"/>
                     <a:lstStyle/>
                     <a:p>
                       <a:r>
@@ -9838,7 +9546,7 @@
                 </a:tc>
                 <a:tc>
                   <a:txBody>
-                    <a:bodyPr/>
+                    <a:bodyPr wrap="square"/>
                     <a:lstStyle/>
                     <a:p>
                       <a:r>
@@ -9860,7 +9568,7 @@
                 </a:tc>
                 <a:tc>
                   <a:txBody>
-                    <a:bodyPr/>
+                    <a:bodyPr wrap="square"/>
                     <a:lstStyle/>
                     <a:p>
                       <a:r>
@@ -9882,7 +9590,7 @@
                 </a:tc>
                 <a:tc>
                   <a:txBody>
-                    <a:bodyPr/>
+                    <a:bodyPr wrap="square"/>
                     <a:lstStyle/>
                     <a:p>
                       <a:r>
@@ -9902,16 +9610,11 @@
                     </a:solidFill>
                   </a:tcPr>
                 </a:tc>
-                <a:extLst>
-                  <a:ext uri="{0D108BD9-81ED-4DB2-BD59-A6C34878D82A}">
-                    <a16:rowId xmlns:a16="http://schemas.microsoft.com/office/drawing/2014/main" val="10000"/>
-                  </a:ext>
-                </a:extLst>
               </a:tr>
               <a:tr h="365760">
                 <a:tc>
                   <a:txBody>
-                    <a:bodyPr/>
+                    <a:bodyPr wrap="square"/>
                     <a:lstStyle/>
                     <a:p>
                       <a:r>
@@ -9933,7 +9636,7 @@
                 </a:tc>
                 <a:tc>
                   <a:txBody>
-                    <a:bodyPr/>
+                    <a:bodyPr wrap="square"/>
                     <a:lstStyle/>
                     <a:p>
                       <a:r>
@@ -9955,7 +9658,7 @@
                 </a:tc>
                 <a:tc>
                   <a:txBody>
-                    <a:bodyPr/>
+                    <a:bodyPr wrap="square"/>
                     <a:lstStyle/>
                     <a:p>
                       <a:r>
@@ -9977,7 +9680,7 @@
                 </a:tc>
                 <a:tc>
                   <a:txBody>
-                    <a:bodyPr/>
+                    <a:bodyPr wrap="square"/>
                     <a:lstStyle/>
                     <a:p>
                       <a:r>
@@ -9997,16 +9700,11 @@
                     </a:solidFill>
                   </a:tcPr>
                 </a:tc>
-                <a:extLst>
-                  <a:ext uri="{0D108BD9-81ED-4DB2-BD59-A6C34878D82A}">
-                    <a16:rowId xmlns:a16="http://schemas.microsoft.com/office/drawing/2014/main" val="10001"/>
-                  </a:ext>
-                </a:extLst>
               </a:tr>
               <a:tr h="365760">
                 <a:tc>
                   <a:txBody>
-                    <a:bodyPr/>
+                    <a:bodyPr wrap="square"/>
                     <a:lstStyle/>
                     <a:p>
                       <a:r>
@@ -10028,7 +9726,7 @@
                 </a:tc>
                 <a:tc>
                   <a:txBody>
-                    <a:bodyPr/>
+                    <a:bodyPr wrap="square"/>
                     <a:lstStyle/>
                     <a:p>
                       <a:r>
@@ -10050,7 +9748,7 @@
                 </a:tc>
                 <a:tc>
                   <a:txBody>
-                    <a:bodyPr/>
+                    <a:bodyPr wrap="square"/>
                     <a:lstStyle/>
                     <a:p>
                       <a:r>
@@ -10072,7 +9770,7 @@
                 </a:tc>
                 <a:tc>
                   <a:txBody>
-                    <a:bodyPr/>
+                    <a:bodyPr wrap="square"/>
                     <a:lstStyle/>
                     <a:p>
                       <a:r>
@@ -10092,11 +9790,6 @@
                     </a:solidFill>
                   </a:tcPr>
                 </a:tc>
-                <a:extLst>
-                  <a:ext uri="{0D108BD9-81ED-4DB2-BD59-A6C34878D82A}">
-                    <a16:rowId xmlns:a16="http://schemas.microsoft.com/office/drawing/2014/main" val="10002"/>
-                  </a:ext>
-                </a:extLst>
               </a:tr>
             </a:tbl>
           </a:graphicData>
@@ -10119,7 +9812,7 @@
           <a:noFill/>
         </p:spPr>
         <p:txBody>
-          <a:bodyPr wrap="square" lIns="45720" rIns="45720" anchor="t">
+          <a:bodyPr wrap="square" anchor="t" lIns="45720" rIns="45720">
             <a:spAutoFit/>
           </a:bodyPr>
           <a:lstStyle/>
@@ -10136,7 +9829,7 @@
                 </a:solidFill>
                 <a:latin typeface="Calibri"/>
               </a:rPr>
-              <a:t>MathDial (real record) → trains probing style</a:t>
+              <a:t>IITM BS training example → Socratic model</a:t>
             </a:r>
           </a:p>
         </p:txBody>
@@ -10150,7 +9843,7 @@
         <p:spPr>
           <a:xfrm>
             <a:off x="6766560" y="1645920"/>
-            <a:ext cx="4937760" cy="3931920"/>
+            <a:ext cx="4937760" cy="3017520"/>
           </a:xfrm>
           <a:prstGeom prst="roundRect">
             <a:avLst>
@@ -10184,7 +9877,6 @@
           <a:lstStyle/>
           <a:p>
             <a:pPr algn="ctr"/>
-            <a:endParaRPr/>
           </a:p>
         </p:txBody>
       </p:sp>
@@ -10197,7 +9889,7 @@
         <p:spPr>
           <a:xfrm>
             <a:off x="6903720" y="1737360"/>
-            <a:ext cx="4663440" cy="3840480"/>
+            <a:ext cx="4663440" cy="2926080"/>
           </a:xfrm>
           <a:prstGeom prst="rect">
             <a:avLst/>
@@ -10205,7 +9897,7 @@
           <a:noFill/>
         </p:spPr>
         <p:txBody>
-          <a:bodyPr wrap="square" lIns="45720" rIns="45720" anchor="t">
+          <a:bodyPr wrap="square" anchor="t" lIns="45720" rIns="45720">
             <a:spAutoFit/>
           </a:bodyPr>
           <a:lstStyle/>
@@ -10216,13 +9908,13 @@
               </a:spcAft>
             </a:pPr>
             <a:r>
-              <a:rPr sz="1300" b="0">
-                <a:solidFill>
-                  <a:srgbClr val="1F1F1F"/>
+              <a:rPr sz="1300" b="1">
+                <a:solidFill>
+                  <a:srgbClr val="1B364B"/>
                 </a:solidFill>
                 <a:latin typeface="Calibri"/>
               </a:rPr>
-              <a:t>Problem: aquarium filled halfway, half spilled, then tripled. Answer: 54. Student said 72.</a:t>
+              <a:t>Input</a:t>
             </a:r>
           </a:p>
           <a:p>
@@ -10232,13 +9924,13 @@
               </a:spcAft>
             </a:pPr>
             <a:r>
-              <a:rPr sz="1300" b="1">
+              <a:rPr sz="1200" b="0">
                 <a:solidFill>
                   <a:srgbClr val="1F1F1F"/>
                 </a:solidFill>
                 <a:latin typeface="Calibri"/>
               </a:rPr>
-              <a:t>Teacher (probing): If you had 4 of something and tripled it, how much would you have?</a:t>
+              <a:t>Concept: derivatives (Maths 2)</a:t>
             </a:r>
           </a:p>
           <a:p>
@@ -10248,13 +9940,13 @@
               </a:spcAft>
             </a:pPr>
             <a:r>
-              <a:rPr sz="1300" b="0">
+              <a:rPr sz="1200" b="0">
                 <a:solidFill>
                   <a:srgbClr val="1F1F1F"/>
                 </a:solidFill>
                 <a:latin typeface="Calibri"/>
               </a:rPr>
-              <a:t>Student: 12.</a:t>
+              <a:t>Question: For L(w) = (6 − 2w)², what is dL/dw?</a:t>
             </a:r>
           </a:p>
           <a:p>
@@ -10264,13 +9956,13 @@
               </a:spcAft>
             </a:pPr>
             <a:r>
-              <a:rPr sz="1300" b="1">
+              <a:rPr sz="1200" b="0">
                 <a:solidFill>
                   <a:srgbClr val="1F1F1F"/>
                 </a:solidFill>
                 <a:latin typeface="Calibri"/>
               </a:rPr>
-              <a:t>Teacher (probing): So if Nancy triples the 18 cubic feet, how much would she have?</a:t>
+              <a:t>Learner: “I don’t know”</a:t>
             </a:r>
           </a:p>
           <a:p>
@@ -10280,13 +9972,13 @@
               </a:spcAft>
             </a:pPr>
             <a:r>
-              <a:rPr sz="1300" b="0">
+              <a:rPr sz="1200" b="0">
                 <a:solidFill>
                   <a:srgbClr val="1F1F1F"/>
                 </a:solidFill>
                 <a:latin typeface="Calibri"/>
               </a:rPr>
-              <a:t>Student: 54 cubic feet.</a:t>
+              <a:t>Controller action: PROBE (a prerequisite); don’t reveal the answer</a:t>
             </a:r>
           </a:p>
           <a:p>
@@ -10296,13 +9988,13 @@
               </a:spcAft>
             </a:pPr>
             <a:r>
-              <a:rPr sz="1300" b="1">
+              <a:rPr sz="1200" b="0">
                 <a:solidFill>
                   <a:srgbClr val="1F1F1F"/>
                 </a:solidFill>
                 <a:latin typeface="Calibri"/>
               </a:rPr>
-              <a:t>Teacher (generic): Exactly correct!</a:t>
+              <a:t>Resource: Maths 2, Week 5, Lecture 2 (08:15)</a:t>
             </a:r>
           </a:p>
           <a:p>
@@ -10312,13 +10004,45 @@
               </a:spcAft>
             </a:pPr>
             <a:r>
-              <a:rPr sz="1300" b="0">
-                <a:solidFill>
-                  <a:srgbClr val="0F7C8C"/>
+              <a:rPr sz="1300" b="1">
+                <a:solidFill>
+                  <a:srgbClr val="1B364B"/>
                 </a:solidFill>
                 <a:latin typeface="Calibri"/>
               </a:rPr>
-              <a:t>Every teacher turn is labelled (probing / focus / telling / generic), so we can train our model to probe instead of tell.</a:t>
+              <a:t>Target reply (probing)</a:t>
+            </a:r>
+          </a:p>
+          <a:p>
+            <a:pPr algn="l">
+              <a:spcAft>
+                <a:spcPts val="400"/>
+              </a:spcAft>
+            </a:pPr>
+            <a:r>
+              <a:rPr sz="1200" b="1">
+                <a:solidFill>
+                  <a:srgbClr val="1F1F1F"/>
+                </a:solidFill>
+                <a:latin typeface="Calibri"/>
+              </a:rPr>
+              <a:t>“Let’s step back. For y = 3x + 1, how much does y change when x increases by 1?”</a:t>
+            </a:r>
+          </a:p>
+          <a:p>
+            <a:pPr algn="l">
+              <a:spcAft>
+                <a:spcPts val="400"/>
+              </a:spcAft>
+            </a:pPr>
+            <a:r>
+              <a:rPr sz="1200" b="0">
+                <a:solidFill>
+                  <a:srgbClr val="0F7C8C"/>
+                </a:solidFill>
+                <a:latin typeface="Calibri"/>
+              </a:rPr>
+              <a:t>Each example is labelled probing / focus / telling, so the model learns to probe instead of tell. Illustrative example written by the team.</a:t>
             </a:r>
           </a:p>
         </p:txBody>
@@ -10332,7 +10056,7 @@
 </file>
 
 <file path=ppt/slides/slide8.xml><?xml version="1.0" encoding="utf-8"?>
-<p:sld xmlns:a="http://schemas.openxmlformats.org/drawingml/2006/main" xmlns:r="http://schemas.openxmlformats.org/officeDocument/2006/relationships" xmlns:p="http://schemas.openxmlformats.org/presentationml/2006/main">
+<p:sld xmlns:a="http://schemas.openxmlformats.org/drawingml/2006/main" xmlns:p="http://schemas.openxmlformats.org/presentationml/2006/main" xmlns:r="http://schemas.openxmlformats.org/officeDocument/2006/relationships">
   <p:cSld>
     <p:spTree>
       <p:nvGrpSpPr>
@@ -10340,14 +10064,7 @@
         <p:cNvGrpSpPr/>
         <p:nvPr/>
       </p:nvGrpSpPr>
-      <p:grpSpPr>
-        <a:xfrm>
-          <a:off x="0" y="0"/>
-          <a:ext cx="0" cy="0"/>
-          <a:chOff x="0" y="0"/>
-          <a:chExt cx="0" cy="0"/>
-        </a:xfrm>
-      </p:grpSpPr>
+      <p:grpSpPr/>
       <p:sp>
         <p:nvSpPr>
           <p:cNvPr id="2" name="Rectangle 1"/>
@@ -10389,7 +10106,6 @@
           <a:lstStyle/>
           <a:p>
             <a:pPr algn="ctr"/>
-            <a:endParaRPr/>
           </a:p>
         </p:txBody>
       </p:sp>
@@ -10410,7 +10126,7 @@
           <a:noFill/>
         </p:spPr>
         <p:txBody>
-          <a:bodyPr wrap="square" lIns="45720" rIns="45720" anchor="t">
+          <a:bodyPr wrap="square" anchor="t" lIns="45720" rIns="45720">
             <a:spAutoFit/>
           </a:bodyPr>
           <a:lstStyle/>
@@ -10449,7 +10165,7 @@
           <a:noFill/>
         </p:spPr>
         <p:txBody>
-          <a:bodyPr wrap="square" lIns="45720" rIns="45720" anchor="t">
+          <a:bodyPr wrap="square" anchor="t" lIns="45720" rIns="45720">
             <a:spAutoFit/>
           </a:bodyPr>
           <a:lstStyle/>
@@ -10488,7 +10204,7 @@
           <a:noFill/>
         </p:spPr>
         <p:txBody>
-          <a:bodyPr wrap="square" lIns="45720" rIns="45720" anchor="t">
+          <a:bodyPr wrap="square" anchor="t" lIns="45720" rIns="45720">
             <a:spAutoFit/>
           </a:bodyPr>
           <a:lstStyle/>
@@ -10529,39 +10245,15 @@
                 <a:tableStyleId>{5C22544A-7EE6-4342-B048-85BDC9FD1C3A}</a:tableStyleId>
               </a:tblPr>
               <a:tblGrid>
-                <a:gridCol w="2011680">
-                  <a:extLst>
-                    <a:ext uri="{9D8B030D-6E8A-4147-A177-3AD203B41FA5}">
-                      <a16:colId xmlns:a16="http://schemas.microsoft.com/office/drawing/2014/main" val="20000"/>
-                    </a:ext>
-                  </a:extLst>
-                </a:gridCol>
-                <a:gridCol w="3108960">
-                  <a:extLst>
-                    <a:ext uri="{9D8B030D-6E8A-4147-A177-3AD203B41FA5}">
-                      <a16:colId xmlns:a16="http://schemas.microsoft.com/office/drawing/2014/main" val="20001"/>
-                    </a:ext>
-                  </a:extLst>
-                </a:gridCol>
-                <a:gridCol w="3474720">
-                  <a:extLst>
-                    <a:ext uri="{9D8B030D-6E8A-4147-A177-3AD203B41FA5}">
-                      <a16:colId xmlns:a16="http://schemas.microsoft.com/office/drawing/2014/main" val="20002"/>
-                    </a:ext>
-                  </a:extLst>
-                </a:gridCol>
-                <a:gridCol w="2468880">
-                  <a:extLst>
-                    <a:ext uri="{9D8B030D-6E8A-4147-A177-3AD203B41FA5}">
-                      <a16:colId xmlns:a16="http://schemas.microsoft.com/office/drawing/2014/main" val="20003"/>
-                    </a:ext>
-                  </a:extLst>
-                </a:gridCol>
+                <a:gridCol w="2011680"/>
+                <a:gridCol w="3108960"/>
+                <a:gridCol w="3474720"/>
+                <a:gridCol w="2468880"/>
               </a:tblGrid>
               <a:tr h="457200">
                 <a:tc>
                   <a:txBody>
-                    <a:bodyPr/>
+                    <a:bodyPr wrap="square"/>
                     <a:lstStyle/>
                     <a:p>
                       <a:r>
@@ -10583,7 +10275,7 @@
                 </a:tc>
                 <a:tc>
                   <a:txBody>
-                    <a:bodyPr/>
+                    <a:bodyPr wrap="square"/>
                     <a:lstStyle/>
                     <a:p>
                       <a:r>
@@ -10605,7 +10297,7 @@
                 </a:tc>
                 <a:tc>
                   <a:txBody>
-                    <a:bodyPr/>
+                    <a:bodyPr wrap="square"/>
                     <a:lstStyle/>
                     <a:p>
                       <a:r>
@@ -10627,7 +10319,7 @@
                 </a:tc>
                 <a:tc>
                   <a:txBody>
-                    <a:bodyPr/>
+                    <a:bodyPr wrap="square"/>
                     <a:lstStyle/>
                     <a:p>
                       <a:r>
@@ -10647,16 +10339,11 @@
                     </a:solidFill>
                   </a:tcPr>
                 </a:tc>
-                <a:extLst>
-                  <a:ext uri="{0D108BD9-81ED-4DB2-BD59-A6C34878D82A}">
-                    <a16:rowId xmlns:a16="http://schemas.microsoft.com/office/drawing/2014/main" val="10000"/>
-                  </a:ext>
-                </a:extLst>
               </a:tr>
               <a:tr h="457200">
                 <a:tc>
                   <a:txBody>
-                    <a:bodyPr/>
+                    <a:bodyPr wrap="square"/>
                     <a:lstStyle/>
                     <a:p>
                       <a:r>
@@ -10678,7 +10365,7 @@
                 </a:tc>
                 <a:tc>
                   <a:txBody>
-                    <a:bodyPr/>
+                    <a:bodyPr wrap="square"/>
                     <a:lstStyle/>
                     <a:p>
                       <a:r>
@@ -10700,7 +10387,7 @@
                 </a:tc>
                 <a:tc>
                   <a:txBody>
-                    <a:bodyPr/>
+                    <a:bodyPr wrap="square"/>
                     <a:lstStyle/>
                     <a:p>
                       <a:r>
@@ -10722,7 +10409,7 @@
                 </a:tc>
                 <a:tc>
                   <a:txBody>
-                    <a:bodyPr/>
+                    <a:bodyPr wrap="square"/>
                     <a:lstStyle/>
                     <a:p>
                       <a:r>
@@ -10742,16 +10429,11 @@
                     </a:solidFill>
                   </a:tcPr>
                 </a:tc>
-                <a:extLst>
-                  <a:ext uri="{0D108BD9-81ED-4DB2-BD59-A6C34878D82A}">
-                    <a16:rowId xmlns:a16="http://schemas.microsoft.com/office/drawing/2014/main" val="10001"/>
-                  </a:ext>
-                </a:extLst>
               </a:tr>
               <a:tr h="457200">
                 <a:tc>
                   <a:txBody>
-                    <a:bodyPr/>
+                    <a:bodyPr wrap="square"/>
                     <a:lstStyle/>
                     <a:p>
                       <a:r>
@@ -10773,7 +10455,7 @@
                 </a:tc>
                 <a:tc>
                   <a:txBody>
-                    <a:bodyPr/>
+                    <a:bodyPr wrap="square"/>
                     <a:lstStyle/>
                     <a:p>
                       <a:r>
@@ -10795,7 +10477,7 @@
                 </a:tc>
                 <a:tc>
                   <a:txBody>
-                    <a:bodyPr/>
+                    <a:bodyPr wrap="square"/>
                     <a:lstStyle/>
                     <a:p>
                       <a:r>
@@ -10817,7 +10499,7 @@
                 </a:tc>
                 <a:tc>
                   <a:txBody>
-                    <a:bodyPr/>
+                    <a:bodyPr wrap="square"/>
                     <a:lstStyle/>
                     <a:p>
                       <a:r>
@@ -10837,16 +10519,11 @@
                     </a:solidFill>
                   </a:tcPr>
                 </a:tc>
-                <a:extLst>
-                  <a:ext uri="{0D108BD9-81ED-4DB2-BD59-A6C34878D82A}">
-                    <a16:rowId xmlns:a16="http://schemas.microsoft.com/office/drawing/2014/main" val="10002"/>
-                  </a:ext>
-                </a:extLst>
               </a:tr>
               <a:tr h="457200">
                 <a:tc>
                   <a:txBody>
-                    <a:bodyPr/>
+                    <a:bodyPr wrap="square"/>
                     <a:lstStyle/>
                     <a:p>
                       <a:r>
@@ -10868,7 +10545,7 @@
                 </a:tc>
                 <a:tc>
                   <a:txBody>
-                    <a:bodyPr/>
+                    <a:bodyPr wrap="square"/>
                     <a:lstStyle/>
                     <a:p>
                       <a:r>
@@ -10890,7 +10567,7 @@
                 </a:tc>
                 <a:tc>
                   <a:txBody>
-                    <a:bodyPr/>
+                    <a:bodyPr wrap="square"/>
                     <a:lstStyle/>
                     <a:p>
                       <a:r>
@@ -10912,7 +10589,7 @@
                 </a:tc>
                 <a:tc>
                   <a:txBody>
-                    <a:bodyPr/>
+                    <a:bodyPr wrap="square"/>
                     <a:lstStyle/>
                     <a:p>
                       <a:r>
@@ -10932,16 +10609,11 @@
                     </a:solidFill>
                   </a:tcPr>
                 </a:tc>
-                <a:extLst>
-                  <a:ext uri="{0D108BD9-81ED-4DB2-BD59-A6C34878D82A}">
-                    <a16:rowId xmlns:a16="http://schemas.microsoft.com/office/drawing/2014/main" val="10003"/>
-                  </a:ext>
-                </a:extLst>
               </a:tr>
               <a:tr h="457200">
                 <a:tc>
                   <a:txBody>
-                    <a:bodyPr/>
+                    <a:bodyPr wrap="square"/>
                     <a:lstStyle/>
                     <a:p>
                       <a:r>
@@ -10963,7 +10635,7 @@
                 </a:tc>
                 <a:tc>
                   <a:txBody>
-                    <a:bodyPr/>
+                    <a:bodyPr wrap="square"/>
                     <a:lstStyle/>
                     <a:p>
                       <a:r>
@@ -10985,7 +10657,7 @@
                 </a:tc>
                 <a:tc>
                   <a:txBody>
-                    <a:bodyPr/>
+                    <a:bodyPr wrap="square"/>
                     <a:lstStyle/>
                     <a:p>
                       <a:r>
@@ -11007,7 +10679,7 @@
                 </a:tc>
                 <a:tc>
                   <a:txBody>
-                    <a:bodyPr/>
+                    <a:bodyPr wrap="square"/>
                     <a:lstStyle/>
                     <a:p>
                       <a:r>
@@ -11027,16 +10699,11 @@
                     </a:solidFill>
                   </a:tcPr>
                 </a:tc>
-                <a:extLst>
-                  <a:ext uri="{0D108BD9-81ED-4DB2-BD59-A6C34878D82A}">
-                    <a16:rowId xmlns:a16="http://schemas.microsoft.com/office/drawing/2014/main" val="10004"/>
-                  </a:ext>
-                </a:extLst>
               </a:tr>
               <a:tr h="457200">
                 <a:tc>
                   <a:txBody>
-                    <a:bodyPr/>
+                    <a:bodyPr wrap="square"/>
                     <a:lstStyle/>
                     <a:p>
                       <a:r>
@@ -11058,7 +10725,7 @@
                 </a:tc>
                 <a:tc>
                   <a:txBody>
-                    <a:bodyPr/>
+                    <a:bodyPr wrap="square"/>
                     <a:lstStyle/>
                     <a:p>
                       <a:r>
@@ -11080,7 +10747,7 @@
                 </a:tc>
                 <a:tc>
                   <a:txBody>
-                    <a:bodyPr/>
+                    <a:bodyPr wrap="square"/>
                     <a:lstStyle/>
                     <a:p>
                       <a:r>
@@ -11102,7 +10769,7 @@
                 </a:tc>
                 <a:tc>
                   <a:txBody>
-                    <a:bodyPr/>
+                    <a:bodyPr wrap="square"/>
                     <a:lstStyle/>
                     <a:p>
                       <a:r>
@@ -11122,11 +10789,6 @@
                     </a:solidFill>
                   </a:tcPr>
                 </a:tc>
-                <a:extLst>
-                  <a:ext uri="{0D108BD9-81ED-4DB2-BD59-A6C34878D82A}">
-                    <a16:rowId xmlns:a16="http://schemas.microsoft.com/office/drawing/2014/main" val="10005"/>
-                  </a:ext>
-                </a:extLst>
               </a:tr>
             </a:tbl>
           </a:graphicData>
@@ -11149,7 +10811,7 @@
           <a:noFill/>
         </p:spPr>
         <p:txBody>
-          <a:bodyPr wrap="square" lIns="45720" rIns="45720" anchor="t">
+          <a:bodyPr wrap="square" anchor="t" lIns="45720" rIns="45720">
             <a:spAutoFit/>
           </a:bodyPr>
           <a:lstStyle/>
@@ -11188,7 +10850,7 @@
           <a:noFill/>
         </p:spPr>
         <p:txBody>
-          <a:bodyPr wrap="square" lIns="45720" rIns="45720" anchor="t">
+          <a:bodyPr wrap="square" anchor="t" lIns="45720" rIns="45720">
             <a:spAutoFit/>
           </a:bodyPr>
           <a:lstStyle/>
@@ -11251,7 +10913,7 @@
 </file>
 
 <file path=ppt/slides/slide9.xml><?xml version="1.0" encoding="utf-8"?>
-<p:sld xmlns:a="http://schemas.openxmlformats.org/drawingml/2006/main" xmlns:r="http://schemas.openxmlformats.org/officeDocument/2006/relationships" xmlns:p="http://schemas.openxmlformats.org/presentationml/2006/main">
+<p:sld xmlns:a="http://schemas.openxmlformats.org/drawingml/2006/main" xmlns:p="http://schemas.openxmlformats.org/presentationml/2006/main" xmlns:r="http://schemas.openxmlformats.org/officeDocument/2006/relationships">
   <p:cSld>
     <p:spTree>
       <p:nvGrpSpPr>
@@ -11259,14 +10921,7 @@
         <p:cNvGrpSpPr/>
         <p:nvPr/>
       </p:nvGrpSpPr>
-      <p:grpSpPr>
-        <a:xfrm>
-          <a:off x="0" y="0"/>
-          <a:ext cx="0" cy="0"/>
-          <a:chOff x="0" y="0"/>
-          <a:chExt cx="0" cy="0"/>
-        </a:xfrm>
-      </p:grpSpPr>
+      <p:grpSpPr/>
       <p:sp>
         <p:nvSpPr>
           <p:cNvPr id="2" name="Rectangle 1"/>
@@ -11308,7 +10963,6 @@
           <a:lstStyle/>
           <a:p>
             <a:pPr algn="ctr"/>
-            <a:endParaRPr/>
           </a:p>
         </p:txBody>
       </p:sp>
@@ -11329,7 +10983,7 @@
           <a:noFill/>
         </p:spPr>
         <p:txBody>
-          <a:bodyPr wrap="square" lIns="45720" rIns="45720" anchor="t">
+          <a:bodyPr wrap="square" anchor="t" lIns="45720" rIns="45720">
             <a:spAutoFit/>
           </a:bodyPr>
           <a:lstStyle/>
@@ -11368,7 +11022,7 @@
           <a:noFill/>
         </p:spPr>
         <p:txBody>
-          <a:bodyPr wrap="square" lIns="45720" rIns="45720" anchor="t">
+          <a:bodyPr wrap="square" anchor="t" lIns="45720" rIns="45720">
             <a:spAutoFit/>
           </a:bodyPr>
           <a:lstStyle/>
@@ -11407,7 +11061,7 @@
           <a:noFill/>
         </p:spPr>
         <p:txBody>
-          <a:bodyPr wrap="square" lIns="45720" rIns="45720" anchor="t">
+          <a:bodyPr wrap="square" anchor="t" lIns="45720" rIns="45720">
             <a:spAutoFit/>
           </a:bodyPr>
           <a:lstStyle/>
@@ -11474,7 +11128,6 @@
           <a:lstStyle/>
           <a:p>
             <a:pPr algn="ctr"/>
-            <a:endParaRPr/>
           </a:p>
         </p:txBody>
       </p:sp>
@@ -11495,7 +11148,7 @@
           <a:noFill/>
         </p:spPr>
         <p:txBody>
-          <a:bodyPr wrap="square" lIns="45720" rIns="45720" anchor="t">
+          <a:bodyPr wrap="square" anchor="t" lIns="45720" rIns="45720">
             <a:spAutoFit/>
           </a:bodyPr>
           <a:lstStyle/>
@@ -11726,7 +11379,7 @@
           <a:noFill/>
         </p:spPr>
         <p:txBody>
-          <a:bodyPr wrap="square" lIns="45720" rIns="45720" anchor="t">
+          <a:bodyPr wrap="square" anchor="t" lIns="45720" rIns="45720">
             <a:spAutoFit/>
           </a:bodyPr>
           <a:lstStyle/>
@@ -11767,32 +11420,14 @@
                 <a:tableStyleId>{5C22544A-7EE6-4342-B048-85BDC9FD1C3A}</a:tableStyleId>
               </a:tblPr>
               <a:tblGrid>
-                <a:gridCol w="1737360">
-                  <a:extLst>
-                    <a:ext uri="{9D8B030D-6E8A-4147-A177-3AD203B41FA5}">
-                      <a16:colId xmlns:a16="http://schemas.microsoft.com/office/drawing/2014/main" val="20000"/>
-                    </a:ext>
-                  </a:extLst>
-                </a:gridCol>
-                <a:gridCol w="731520">
-                  <a:extLst>
-                    <a:ext uri="{9D8B030D-6E8A-4147-A177-3AD203B41FA5}">
-                      <a16:colId xmlns:a16="http://schemas.microsoft.com/office/drawing/2014/main" val="20001"/>
-                    </a:ext>
-                  </a:extLst>
-                </a:gridCol>
-                <a:gridCol w="1554480">
-                  <a:extLst>
-                    <a:ext uri="{9D8B030D-6E8A-4147-A177-3AD203B41FA5}">
-                      <a16:colId xmlns:a16="http://schemas.microsoft.com/office/drawing/2014/main" val="20002"/>
-                    </a:ext>
-                  </a:extLst>
-                </a:gridCol>
+                <a:gridCol w="1737360"/>
+                <a:gridCol w="731520"/>
+                <a:gridCol w="1554480"/>
               </a:tblGrid>
               <a:tr h="384048">
                 <a:tc>
                   <a:txBody>
-                    <a:bodyPr/>
+                    <a:bodyPr wrap="square"/>
                     <a:lstStyle/>
                     <a:p>
                       <a:r>
@@ -11814,7 +11449,7 @@
                 </a:tc>
                 <a:tc>
                   <a:txBody>
-                    <a:bodyPr/>
+                    <a:bodyPr wrap="square"/>
                     <a:lstStyle/>
                     <a:p>
                       <a:r>
@@ -11836,7 +11471,7 @@
                 </a:tc>
                 <a:tc>
                   <a:txBody>
-                    <a:bodyPr/>
+                    <a:bodyPr wrap="square"/>
                     <a:lstStyle/>
                     <a:p>
                       <a:r>
@@ -11856,16 +11491,11 @@
                     </a:solidFill>
                   </a:tcPr>
                 </a:tc>
-                <a:extLst>
-                  <a:ext uri="{0D108BD9-81ED-4DB2-BD59-A6C34878D82A}">
-                    <a16:rowId xmlns:a16="http://schemas.microsoft.com/office/drawing/2014/main" val="10000"/>
-                  </a:ext>
-                </a:extLst>
               </a:tr>
               <a:tr h="384048">
                 <a:tc>
                   <a:txBody>
-                    <a:bodyPr/>
+                    <a:bodyPr wrap="square"/>
                     <a:lstStyle/>
                     <a:p>
                       <a:r>
@@ -11887,7 +11517,7 @@
                 </a:tc>
                 <a:tc>
                   <a:txBody>
-                    <a:bodyPr/>
+                    <a:bodyPr wrap="square"/>
                     <a:lstStyle/>
                     <a:p>
                       <a:r>
@@ -11909,7 +11539,7 @@
                 </a:tc>
                 <a:tc>
                   <a:txBody>
-                    <a:bodyPr/>
+                    <a:bodyPr wrap="square"/>
                     <a:lstStyle/>
                     <a:p>
                       <a:r>
@@ -11929,16 +11559,11 @@
                     </a:solidFill>
                   </a:tcPr>
                 </a:tc>
-                <a:extLst>
-                  <a:ext uri="{0D108BD9-81ED-4DB2-BD59-A6C34878D82A}">
-                    <a16:rowId xmlns:a16="http://schemas.microsoft.com/office/drawing/2014/main" val="10001"/>
-                  </a:ext>
-                </a:extLst>
               </a:tr>
               <a:tr h="384048">
                 <a:tc>
                   <a:txBody>
-                    <a:bodyPr/>
+                    <a:bodyPr wrap="square"/>
                     <a:lstStyle/>
                     <a:p>
                       <a:r>
@@ -11960,7 +11585,7 @@
                 </a:tc>
                 <a:tc>
                   <a:txBody>
-                    <a:bodyPr/>
+                    <a:bodyPr wrap="square"/>
                     <a:lstStyle/>
                     <a:p>
                       <a:r>
@@ -11982,7 +11607,7 @@
                 </a:tc>
                 <a:tc>
                   <a:txBody>
-                    <a:bodyPr/>
+                    <a:bodyPr wrap="square"/>
                     <a:lstStyle/>
                     <a:p>
                       <a:r>
@@ -12002,16 +11627,11 @@
                     </a:solidFill>
                   </a:tcPr>
                 </a:tc>
-                <a:extLst>
-                  <a:ext uri="{0D108BD9-81ED-4DB2-BD59-A6C34878D82A}">
-                    <a16:rowId xmlns:a16="http://schemas.microsoft.com/office/drawing/2014/main" val="10002"/>
-                  </a:ext>
-                </a:extLst>
               </a:tr>
               <a:tr h="384048">
                 <a:tc>
                   <a:txBody>
-                    <a:bodyPr/>
+                    <a:bodyPr wrap="square"/>
                     <a:lstStyle/>
                     <a:p>
                       <a:r>
@@ -12033,7 +11653,7 @@
                 </a:tc>
                 <a:tc>
                   <a:txBody>
-                    <a:bodyPr/>
+                    <a:bodyPr wrap="square"/>
                     <a:lstStyle/>
                     <a:p>
                       <a:r>
@@ -12055,7 +11675,7 @@
                 </a:tc>
                 <a:tc>
                   <a:txBody>
-                    <a:bodyPr/>
+                    <a:bodyPr wrap="square"/>
                     <a:lstStyle/>
                     <a:p>
                       <a:r>
@@ -12075,16 +11695,11 @@
                     </a:solidFill>
                   </a:tcPr>
                 </a:tc>
-                <a:extLst>
-                  <a:ext uri="{0D108BD9-81ED-4DB2-BD59-A6C34878D82A}">
-                    <a16:rowId xmlns:a16="http://schemas.microsoft.com/office/drawing/2014/main" val="10003"/>
-                  </a:ext>
-                </a:extLst>
               </a:tr>
               <a:tr h="384048">
                 <a:tc>
                   <a:txBody>
-                    <a:bodyPr/>
+                    <a:bodyPr wrap="square"/>
                     <a:lstStyle/>
                     <a:p>
                       <a:r>
@@ -12106,7 +11721,7 @@
                 </a:tc>
                 <a:tc>
                   <a:txBody>
-                    <a:bodyPr/>
+                    <a:bodyPr wrap="square"/>
                     <a:lstStyle/>
                     <a:p>
                       <a:r>
@@ -12128,7 +11743,7 @@
                 </a:tc>
                 <a:tc>
                   <a:txBody>
-                    <a:bodyPr/>
+                    <a:bodyPr wrap="square"/>
                     <a:lstStyle/>
                     <a:p>
                       <a:r>
@@ -12148,11 +11763,6 @@
                     </a:solidFill>
                   </a:tcPr>
                 </a:tc>
-                <a:extLst>
-                  <a:ext uri="{0D108BD9-81ED-4DB2-BD59-A6C34878D82A}">
-                    <a16:rowId xmlns:a16="http://schemas.microsoft.com/office/drawing/2014/main" val="10004"/>
-                  </a:ext>
-                </a:extLst>
               </a:tr>
             </a:tbl>
           </a:graphicData>
@@ -12175,7 +11785,7 @@
           <a:noFill/>
         </p:spPr>
         <p:txBody>
-          <a:bodyPr wrap="square" lIns="45720" rIns="45720" anchor="t">
+          <a:bodyPr wrap="square" anchor="t" lIns="45720" rIns="45720">
             <a:spAutoFit/>
           </a:bodyPr>
           <a:lstStyle/>
@@ -12214,7 +11824,7 @@
           <a:noFill/>
         </p:spPr>
         <p:txBody>
-          <a:bodyPr wrap="square" lIns="45720" rIns="45720" anchor="t">
+          <a:bodyPr wrap="square" anchor="t" lIns="45720" rIns="45720">
             <a:spAutoFit/>
           </a:bodyPr>
           <a:lstStyle/>
@@ -12591,44 +12201,44 @@
         <a:sysClr val="window" lastClr="FFFFFF"/>
       </a:lt1>
       <a:dk2>
-        <a:srgbClr val="44546A"/>
+        <a:srgbClr val="1F497D"/>
       </a:dk2>
       <a:lt2>
-        <a:srgbClr val="E7E6E6"/>
+        <a:srgbClr val="EEECE1"/>
       </a:lt2>
       <a:accent1>
-        <a:srgbClr val="4472C4"/>
+        <a:srgbClr val="4F81BD"/>
       </a:accent1>
       <a:accent2>
-        <a:srgbClr val="ED7D31"/>
+        <a:srgbClr val="C0504D"/>
       </a:accent2>
       <a:accent3>
-        <a:srgbClr val="A5A5A5"/>
+        <a:srgbClr val="9BBB59"/>
       </a:accent3>
       <a:accent4>
-        <a:srgbClr val="FFC000"/>
+        <a:srgbClr val="8064A2"/>
       </a:accent4>
       <a:accent5>
-        <a:srgbClr val="5B9BD5"/>
+        <a:srgbClr val="4BACC6"/>
       </a:accent5>
       <a:accent6>
-        <a:srgbClr val="70AD47"/>
+        <a:srgbClr val="F79646"/>
       </a:accent6>
       <a:hlink>
-        <a:srgbClr val="0563C1"/>
+        <a:srgbClr val="0000FF"/>
       </a:hlink>
       <a:folHlink>
-        <a:srgbClr val="954F72"/>
+        <a:srgbClr val="800080"/>
       </a:folHlink>
     </a:clrScheme>
     <a:fontScheme name="Office">
       <a:majorFont>
-        <a:latin typeface="Calibri Light" panose="020F0302020204030204"/>
+        <a:latin typeface="Calibri"/>
         <a:ea typeface=""/>
         <a:cs typeface=""/>
-        <a:font script="Jpan" typeface="游ゴシック Light"/>
+        <a:font script="Jpan" typeface="ＭＳ Ｐゴシック"/>
         <a:font script="Hang" typeface="맑은 고딕"/>
-        <a:font script="Hans" typeface="等线 Light"/>
+        <a:font script="Hans" typeface="宋体"/>
         <a:font script="Hant" typeface="新細明體"/>
         <a:font script="Arab" typeface="Times New Roman"/>
         <a:font script="Hebr" typeface="Times New Roman"/>
@@ -12656,31 +12266,14 @@
         <a:font script="Viet" typeface="Times New Roman"/>
         <a:font script="Uigh" typeface="Microsoft Uighur"/>
         <a:font script="Geor" typeface="Sylfaen"/>
-        <a:font script="Armn" typeface="Arial"/>
-        <a:font script="Bugi" typeface="Leelawadee UI"/>
-        <a:font script="Bopo" typeface="Microsoft JhengHei"/>
-        <a:font script="Java" typeface="Javanese Text"/>
-        <a:font script="Lisu" typeface="Segoe UI"/>
-        <a:font script="Mymr" typeface="Myanmar Text"/>
-        <a:font script="Nkoo" typeface="Ebrima"/>
-        <a:font script="Olck" typeface="Nirmala UI"/>
-        <a:font script="Osma" typeface="Ebrima"/>
-        <a:font script="Phag" typeface="Phagspa"/>
-        <a:font script="Syrn" typeface="Estrangelo Edessa"/>
-        <a:font script="Syrj" typeface="Estrangelo Edessa"/>
-        <a:font script="Syre" typeface="Estrangelo Edessa"/>
-        <a:font script="Sora" typeface="Nirmala UI"/>
-        <a:font script="Tale" typeface="Microsoft Tai Le"/>
-        <a:font script="Talu" typeface="Microsoft New Tai Lue"/>
-        <a:font script="Tfng" typeface="Ebrima"/>
       </a:majorFont>
       <a:minorFont>
-        <a:latin typeface="Calibri" panose="020F0502020204030204"/>
+        <a:latin typeface="Calibri"/>
         <a:ea typeface=""/>
         <a:cs typeface=""/>
-        <a:font script="Jpan" typeface="游ゴシック"/>
+        <a:font script="Jpan" typeface="ＭＳ Ｐゴシック"/>
         <a:font script="Hang" typeface="맑은 고딕"/>
-        <a:font script="Hans" typeface="等线"/>
+        <a:font script="Hans" typeface="宋体"/>
         <a:font script="Hant" typeface="新細明體"/>
         <a:font script="Arab" typeface="Arial"/>
         <a:font script="Hebr" typeface="Arial"/>
@@ -12708,23 +12301,6 @@
         <a:font script="Viet" typeface="Arial"/>
         <a:font script="Uigh" typeface="Microsoft Uighur"/>
         <a:font script="Geor" typeface="Sylfaen"/>
-        <a:font script="Armn" typeface="Arial"/>
-        <a:font script="Bugi" typeface="Leelawadee UI"/>
-        <a:font script="Bopo" typeface="Microsoft JhengHei"/>
-        <a:font script="Java" typeface="Javanese Text"/>
-        <a:font script="Lisu" typeface="Segoe UI"/>
-        <a:font script="Mymr" typeface="Myanmar Text"/>
-        <a:font script="Nkoo" typeface="Ebrima"/>
-        <a:font script="Olck" typeface="Nirmala UI"/>
-        <a:font script="Osma" typeface="Ebrima"/>
-        <a:font script="Phag" typeface="Phagspa"/>
-        <a:font script="Syrn" typeface="Estrangelo Edessa"/>
-        <a:font script="Syrj" typeface="Estrangelo Edessa"/>
-        <a:font script="Syre" typeface="Estrangelo Edessa"/>
-        <a:font script="Sora" typeface="Nirmala UI"/>
-        <a:font script="Tale" typeface="Microsoft Tai Le"/>
-        <a:font script="Talu" typeface="Microsoft New Tai Lue"/>
-        <a:font script="Tfng" typeface="Ebrima"/>
       </a:minorFont>
     </a:fontScheme>
     <a:fmtScheme name="Office">
@@ -12736,141 +12312,200 @@
           <a:gsLst>
             <a:gs pos="0">
               <a:schemeClr val="phClr">
-                <a:lumMod val="110000"/>
-                <a:satMod val="105000"/>
-                <a:tint val="67000"/>
+                <a:tint val="50000"/>
+                <a:satMod val="300000"/>
               </a:schemeClr>
             </a:gs>
-            <a:gs pos="50000">
+            <a:gs pos="35000">
               <a:schemeClr val="phClr">
-                <a:lumMod val="105000"/>
-                <a:satMod val="103000"/>
-                <a:tint val="73000"/>
+                <a:tint val="37000"/>
+                <a:satMod val="300000"/>
               </a:schemeClr>
             </a:gs>
             <a:gs pos="100000">
               <a:schemeClr val="phClr">
-                <a:lumMod val="105000"/>
-                <a:satMod val="109000"/>
-                <a:tint val="81000"/>
+                <a:tint val="15000"/>
+                <a:satMod val="350000"/>
               </a:schemeClr>
             </a:gs>
           </a:gsLst>
-          <a:lin ang="5400000" scaled="0"/>
+          <a:lin ang="16200000" scaled="1"/>
         </a:gradFill>
         <a:gradFill rotWithShape="1">
           <a:gsLst>
             <a:gs pos="0">
               <a:schemeClr val="phClr">
-                <a:satMod val="103000"/>
-                <a:lumMod val="102000"/>
-                <a:tint val="94000"/>
-              </a:schemeClr>
-            </a:gs>
-            <a:gs pos="50000">
-              <a:schemeClr val="phClr">
-                <a:satMod val="110000"/>
-                <a:lumMod val="100000"/>
+                <a:tint val="100000"/>
                 <a:shade val="100000"/>
+                <a:satMod val="130000"/>
               </a:schemeClr>
             </a:gs>
             <a:gs pos="100000">
               <a:schemeClr val="phClr">
-                <a:lumMod val="99000"/>
-                <a:satMod val="120000"/>
-                <a:shade val="78000"/>
+                <a:tint val="50000"/>
+                <a:shade val="100000"/>
+                <a:satMod val="350000"/>
               </a:schemeClr>
             </a:gs>
           </a:gsLst>
-          <a:lin ang="5400000" scaled="0"/>
+          <a:lin ang="16200000" scaled="0"/>
         </a:gradFill>
       </a:fillStyleLst>
       <a:lnStyleLst>
-        <a:ln w="6350" cap="flat" cmpd="sng" algn="ctr">
+        <a:ln w="9525" cap="flat" cmpd="sng" algn="ctr">
+          <a:solidFill>
+            <a:schemeClr val="phClr">
+              <a:shade val="95000"/>
+              <a:satMod val="105000"/>
+            </a:schemeClr>
+          </a:solidFill>
+          <a:prstDash val="solid"/>
+        </a:ln>
+        <a:ln w="25400" cap="flat" cmpd="sng" algn="ctr">
           <a:solidFill>
             <a:schemeClr val="phClr"/>
           </a:solidFill>
           <a:prstDash val="solid"/>
-          <a:miter lim="800000"/>
         </a:ln>
-        <a:ln w="12700" cap="flat" cmpd="sng" algn="ctr">
+        <a:ln w="38100" cap="flat" cmpd="sng" algn="ctr">
           <a:solidFill>
             <a:schemeClr val="phClr"/>
           </a:solidFill>
           <a:prstDash val="solid"/>
-          <a:miter lim="800000"/>
-        </a:ln>
-        <a:ln w="19050" cap="flat" cmpd="sng" algn="ctr">
-          <a:solidFill>
-            <a:schemeClr val="phClr"/>
-          </a:solidFill>
-          <a:prstDash val="solid"/>
-          <a:miter lim="800000"/>
         </a:ln>
       </a:lnStyleLst>
       <a:effectStyleLst>
         <a:effectStyle>
-          <a:effectLst/>
-        </a:effectStyle>
-        <a:effectStyle>
-          <a:effectLst/>
+          <a:effectLst>
+            <a:outerShdw blurRad="40000" dist="20000" dir="5400000" rotWithShape="0">
+              <a:srgbClr val="000000">
+                <a:alpha val="38000"/>
+              </a:srgbClr>
+            </a:outerShdw>
+          </a:effectLst>
         </a:effectStyle>
         <a:effectStyle>
           <a:effectLst>
-            <a:outerShdw blurRad="57150" dist="19050" dir="5400000" algn="ctr" rotWithShape="0">
+            <a:outerShdw blurRad="40000" dist="23000" dir="5400000" rotWithShape="0">
               <a:srgbClr val="000000">
-                <a:alpha val="63000"/>
+                <a:alpha val="35000"/>
               </a:srgbClr>
             </a:outerShdw>
           </a:effectLst>
+        </a:effectStyle>
+        <a:effectStyle>
+          <a:effectLst>
+            <a:outerShdw blurRad="40000" dist="23000" dir="5400000" rotWithShape="0">
+              <a:srgbClr val="000000">
+                <a:alpha val="35000"/>
+              </a:srgbClr>
+            </a:outerShdw>
+          </a:effectLst>
+          <a:scene3d>
+            <a:camera prst="orthographicFront">
+              <a:rot lat="0" lon="0" rev="0"/>
+            </a:camera>
+            <a:lightRig rig="threePt" dir="t">
+              <a:rot lat="0" lon="0" rev="1200000"/>
+            </a:lightRig>
+          </a:scene3d>
+          <a:sp3d>
+            <a:bevelT w="63500" h="25400"/>
+          </a:sp3d>
         </a:effectStyle>
       </a:effectStyleLst>
       <a:bgFillStyleLst>
         <a:solidFill>
           <a:schemeClr val="phClr"/>
         </a:solidFill>
-        <a:solidFill>
-          <a:schemeClr val="phClr">
-            <a:tint val="95000"/>
-            <a:satMod val="170000"/>
-          </a:schemeClr>
-        </a:solidFill>
         <a:gradFill rotWithShape="1">
           <a:gsLst>
             <a:gs pos="0">
               <a:schemeClr val="phClr">
-                <a:tint val="93000"/>
-                <a:satMod val="150000"/>
-                <a:shade val="98000"/>
-                <a:lumMod val="102000"/>
+                <a:tint val="40000"/>
+                <a:satMod val="350000"/>
               </a:schemeClr>
             </a:gs>
-            <a:gs pos="50000">
+            <a:gs pos="40000">
               <a:schemeClr val="phClr">
-                <a:tint val="98000"/>
-                <a:satMod val="130000"/>
-                <a:shade val="90000"/>
-                <a:lumMod val="103000"/>
+                <a:tint val="45000"/>
+                <a:shade val="99000"/>
+                <a:satMod val="350000"/>
               </a:schemeClr>
             </a:gs>
             <a:gs pos="100000">
               <a:schemeClr val="phClr">
-                <a:shade val="63000"/>
-                <a:satMod val="120000"/>
+                <a:shade val="20000"/>
+                <a:satMod val="255000"/>
               </a:schemeClr>
             </a:gs>
           </a:gsLst>
-          <a:lin ang="5400000" scaled="0"/>
+          <a:path path="circle">
+            <a:fillToRect l="50000" t="-80000" r="50000" b="180000"/>
+          </a:path>
+        </a:gradFill>
+        <a:gradFill rotWithShape="1">
+          <a:gsLst>
+            <a:gs pos="0">
+              <a:schemeClr val="phClr">
+                <a:tint val="80000"/>
+                <a:satMod val="300000"/>
+              </a:schemeClr>
+            </a:gs>
+            <a:gs pos="100000">
+              <a:schemeClr val="phClr">
+                <a:shade val="30000"/>
+                <a:satMod val="200000"/>
+              </a:schemeClr>
+            </a:gs>
+          </a:gsLst>
+          <a:path path="circle">
+            <a:fillToRect l="50000" t="50000" r="50000" b="50000"/>
+          </a:path>
         </a:gradFill>
       </a:bgFillStyleLst>
     </a:fmtScheme>
   </a:themeElements>
-  <a:objectDefaults/>
+  <a:objectDefaults>
+    <a:spDef>
+      <a:spPr/>
+      <a:bodyPr/>
+      <a:lstStyle/>
+      <a:style>
+        <a:lnRef idx="1">
+          <a:schemeClr val="accent1"/>
+        </a:lnRef>
+        <a:fillRef idx="3">
+          <a:schemeClr val="accent1"/>
+        </a:fillRef>
+        <a:effectRef idx="2">
+          <a:schemeClr val="accent1"/>
+        </a:effectRef>
+        <a:fontRef idx="minor">
+          <a:schemeClr val="lt1"/>
+        </a:fontRef>
+      </a:style>
+    </a:spDef>
+    <a:lnDef>
+      <a:spPr/>
+      <a:bodyPr/>
+      <a:lstStyle/>
+      <a:style>
+        <a:lnRef idx="2">
+          <a:schemeClr val="accent1"/>
+        </a:lnRef>
+        <a:fillRef idx="0">
+          <a:schemeClr val="accent1"/>
+        </a:fillRef>
+        <a:effectRef idx="1">
+          <a:schemeClr val="accent1"/>
+        </a:effectRef>
+        <a:fontRef idx="minor">
+          <a:schemeClr val="tx1"/>
+        </a:fontRef>
+      </a:style>
+    </a:lnDef>
+  </a:objectDefaults>
   <a:extraClrSchemeLst/>
-  <a:extLst>
-    <a:ext uri="{05A4C25C-085E-4340-85A3-A5531E510DB2}">
-      <thm15:themeFamily xmlns:thm15="http://schemas.microsoft.com/office/thememl/2012/main" name="Office Theme" id="{62F939B6-93AF-4DB8-9C6B-D6C7DFDC589F}" vid="{4A3C46E8-61CC-4603-A589-7422A47A8E4A}"/>
-    </a:ext>
-  </a:extLst>
 </a:theme>
 </file>
--- a/docs/milestone-1/Milestone1_Presentation.pptx
+++ b/docs/milestone-1/Milestone1_Presentation.pptx
@@ -511,7 +511,7 @@
           <a:lstStyle/>
           <a:p>
             <a:r>
-              <a:t>Learning is cross-referenced and propagated across courses. Mapping to be confirmed from IITM course content.</a:t>
+              <a:t>Learning is cross-referenced and propagated across levels. Levels map to NCERT classes (to be confirmed from the textbooks).</a:t>
             </a:r>
           </a:p>
         </p:txBody>
@@ -3834,7 +3834,7 @@
                 </a:solidFill>
                 <a:latin typeface="Calibri"/>
               </a:rPr>
-              <a:t>A study companion for IITM BS learners that guides them to the answer through probing questions, backtracking to earlier courses when needed. One pipeline, any course.</a:t>
+              <a:t>An intelligent small-scale tutor that guides a learner to the answer through probing questions, backtracking across levels when needed. One pipeline, any course.</a:t>
             </a:r>
           </a:p>
         </p:txBody>
@@ -4185,7 +4185,7 @@
                 </a:solidFill>
                 <a:latin typeface="Calibri"/>
               </a:rPr>
-              <a:t>•  A study companion for IITM BS learners that guides them to the answer with probing questions</a:t>
+              <a:t>•  A tutor that guides learners to the answer with probing questions</a:t>
             </a:r>
           </a:p>
           <a:p>
@@ -4217,7 +4217,7 @@
                 </a:solidFill>
                 <a:latin typeface="Calibri"/>
               </a:rPr>
-              <a:t>•  Backtracks across courses (Maths → MLF → MLT) to fix gaps, then climbs back up</a:t>
+              <a:t>•  Backtracks across levels to fix gaps, then climbs back up</a:t>
             </a:r>
           </a:p>
           <a:p>
@@ -4233,7 +4233,7 @@
                 </a:solidFill>
                 <a:latin typeface="Calibri"/>
               </a:rPr>
-              <a:t>•  Links mistakes to the exact lecture, slide or assignment</a:t>
+              <a:t>•  Links mistakes to the exact page, video or notes</a:t>
             </a:r>
           </a:p>
           <a:p>
@@ -4249,7 +4249,7 @@
                 </a:solidFill>
                 <a:latin typeface="Calibri"/>
               </a:rPr>
-              <a:t>•  Domain-agnostic: IITM BS (primary) and NCERT Maths via course packs</a:t>
+              <a:t>•  Works for any subject with study material: NCERT (primary) and IITM BS (secondary) via course packs</a:t>
             </a:r>
           </a:p>
           <a:p>
@@ -4526,6 +4526,117 @@
           </a:graphicData>
         </a:graphic>
       </p:graphicFrame>
+      <p:pic>
+        <p:nvPicPr>
+          <p:cNvPr id="9" name="Picture 8" descr="sandeep_nalla.jpg"/>
+          <p:cNvPicPr>
+            <a:picLocks noChangeAspect="1"/>
+          </p:cNvPicPr>
+          <p:nvPr/>
+        </p:nvPicPr>
+        <p:blipFill>
+          <a:blip r:embed="rId2"/>
+          <a:stretch>
+            <a:fillRect/>
+          </a:stretch>
+        </p:blipFill>
+        <p:spPr>
+          <a:xfrm>
+            <a:off x="9784080" y="1810512"/>
+            <a:ext cx="851611" cy="402336"/>
+          </a:xfrm>
+          <a:prstGeom prst="rect">
+            <a:avLst/>
+          </a:prstGeom>
+        </p:spPr>
+      </p:pic>
+      <p:pic>
+        <p:nvPicPr>
+          <p:cNvPr id="10" name="Picture 9" descr="hariom_kumar.jpg"/>
+          <p:cNvPicPr>
+            <a:picLocks noChangeAspect="1"/>
+          </p:cNvPicPr>
+          <p:nvPr/>
+        </p:nvPicPr>
+        <p:blipFill>
+          <a:blip r:embed="rId3"/>
+          <a:stretch>
+            <a:fillRect/>
+          </a:stretch>
+        </p:blipFill>
+        <p:spPr>
+          <a:xfrm>
+            <a:off x="9784080" y="2359152"/>
+            <a:ext cx="1312382" cy="402336"/>
+          </a:xfrm>
+          <a:prstGeom prst="rect">
+            <a:avLst/>
+          </a:prstGeom>
+        </p:spPr>
+      </p:pic>
+      <p:pic>
+        <p:nvPicPr>
+          <p:cNvPr id="11" name="Picture 10" descr="mrityunjay_chakraborty.jpg"/>
+          <p:cNvPicPr>
+            <a:picLocks noChangeAspect="1"/>
+          </p:cNvPicPr>
+          <p:nvPr/>
+        </p:nvPicPr>
+        <p:blipFill>
+          <a:blip r:embed="rId4"/>
+          <a:stretch>
+            <a:fillRect/>
+          </a:stretch>
+        </p:blipFill>
+        <p:spPr>
+          <a:xfrm>
+            <a:off x="9784080" y="3456432"/>
+            <a:ext cx="1471400" cy="402336"/>
+          </a:xfrm>
+          <a:prstGeom prst="rect">
+            <a:avLst/>
+          </a:prstGeom>
+        </p:spPr>
+      </p:pic>
+      <p:sp>
+        <p:nvSpPr>
+          <p:cNvPr id="12" name="TextBox 11"/>
+          <p:cNvSpPr txBox="1"/>
+          <p:nvPr/>
+        </p:nvSpPr>
+        <p:spPr>
+          <a:xfrm>
+            <a:off x="6400800" y="4023360"/>
+            <a:ext cx="5303520" cy="365760"/>
+          </a:xfrm>
+          <a:prstGeom prst="rect">
+            <a:avLst/>
+          </a:prstGeom>
+          <a:noFill/>
+        </p:spPr>
+        <p:txBody>
+          <a:bodyPr wrap="square" anchor="t" lIns="45720" rIns="45720">
+            <a:spAutoFit/>
+          </a:bodyPr>
+          <a:lstStyle/>
+          <a:p>
+            <a:pPr algn="l">
+              <a:spcAft>
+                <a:spcPts val="400"/>
+              </a:spcAft>
+            </a:pPr>
+            <a:r>
+              <a:rPr sz="1100" b="0">
+                <a:solidFill>
+                  <a:srgbClr val="555555"/>
+                </a:solidFill>
+                <a:latin typeface="Calibri"/>
+              </a:rPr>
+              <a:t>Signed 22 October 2026</a:t>
+            </a:r>
+          </a:p>
+        </p:txBody>
+      </p:sp>
     </p:spTree>
   </p:cSld>
   <p:clrMapOvr>
@@ -5117,7 +5228,7 @@
                 <a:latin typeface="Calibri"/>
               </a:rPr>
               <a:t>spot misconceptions,
-link a lecture</a:t>
+link a resource</a:t>
             </a:r>
           </a:p>
         </p:txBody>
@@ -5254,7 +5365,7 @@
                 </a:solidFill>
                 <a:latin typeface="Calibri"/>
               </a:rPr>
-              <a:t>to an earlier course
+              <a:t>to an earlier level
 if there is a gap</a:t>
             </a:r>
           </a:p>
@@ -5564,7 +5675,7 @@
                           </a:solidFill>
                           <a:latin typeface="Calibri"/>
                         </a:rPr>
-                        <a:t>topics with IDs and courses</a:t>
+                        <a:t>topics with IDs and levels</a:t>
                       </a:r>
                     </a:p>
                   </a:txBody>
@@ -5586,7 +5697,7 @@
                           </a:solidFill>
                           <a:latin typeface="Calibri"/>
                         </a:rPr>
-                        <a:t>“A is needed before B”, across courses</a:t>
+                        <a:t>“A is needed before B”, across levels</a:t>
                       </a:r>
                     </a:p>
                   </a:txBody>
@@ -5608,7 +5719,7 @@
                           </a:solidFill>
                           <a:latin typeface="Calibri"/>
                         </a:rPr>
-                        <a:t>transcripts, slides, PDFs</a:t>
+                        <a:t>PDFs, slides, transcripts</a:t>
                       </a:r>
                     </a:p>
                   </a:txBody>
@@ -5725,7 +5836,7 @@
                 </a:solidFill>
                 <a:latin typeface="Calibri"/>
               </a:rPr>
-              <a:t>Primary: IITM BS courses</a:t>
+              <a:t>Primary: NCERT content (any subject)</a:t>
             </a:r>
           </a:p>
           <a:p>
@@ -5741,7 +5852,7 @@
                 </a:solidFill>
                 <a:latin typeface="Calibri"/>
               </a:rPr>
-              <a:t>Maths &amp; Stats → MLF → MLT, e.g. “How does training happen in Linear Regression?”</a:t>
+              <a:t>public, complete data across classes and subjects</a:t>
             </a:r>
           </a:p>
         </p:txBody>
@@ -5826,7 +5937,7 @@
                 </a:solidFill>
                 <a:latin typeface="Calibri"/>
               </a:rPr>
-              <a:t>Second domain: NCERT Mathematics</a:t>
+              <a:t>Secondary: IITM BS course material</a:t>
             </a:r>
           </a:p>
           <a:p>
@@ -5842,7 +5953,7 @@
                 </a:solidFill>
                 <a:latin typeface="Calibri"/>
               </a:rPr>
-              <a:t>several classes that build on each other, to show the pipeline is reusable</a:t>
+              <a:t>Maths → MLF → MLT, e.g. “How does training happen in Linear Regression?”</a:t>
             </a:r>
           </a:p>
         </p:txBody>
@@ -5943,7 +6054,7 @@
                 </a:solidFill>
                 <a:latin typeface="Calibri"/>
               </a:rPr>
-              <a:t>Learning builds across courses</a:t>
+              <a:t>Learning builds across levels</a:t>
             </a:r>
           </a:p>
         </p:txBody>
@@ -5982,7 +6093,7 @@
                 </a:solidFill>
                 <a:latin typeface="Calibri"/>
               </a:rPr>
-              <a:t>If a learner is stuck, the tutor finds the gap in an earlier course</a:t>
+              <a:t>If a learner is stuck, the tutor finds the gap in an earlier level</a:t>
             </a:r>
           </a:p>
         </p:txBody>
@@ -6074,7 +6185,7 @@
         <p:spPr>
           <a:xfrm>
             <a:off x="548640" y="1600200"/>
-            <a:ext cx="2468880" cy="1280160"/>
+            <a:ext cx="3291840" cy="1280160"/>
           </a:xfrm>
           <a:prstGeom prst="roundRect">
             <a:avLst>
@@ -6120,7 +6231,7 @@
         <p:spPr>
           <a:xfrm>
             <a:off x="621792" y="1600200"/>
-            <a:ext cx="2322576" cy="1280160"/>
+            <a:ext cx="3145536" cy="1280160"/>
           </a:xfrm>
           <a:prstGeom prst="rect">
             <a:avLst/>
@@ -6139,13 +6250,13 @@
               </a:spcAft>
             </a:pPr>
             <a:r>
-              <a:rPr sz="1500" b="1">
+              <a:rPr sz="1600" b="1">
                 <a:solidFill>
                   <a:srgbClr val="1F1F1F"/>
                 </a:solidFill>
                 <a:latin typeface="Calibri"/>
               </a:rPr>
-              <a:t>Maths 1 · Stats 1</a:t>
+              <a:t>Level 1</a:t>
             </a:r>
           </a:p>
           <a:p>
@@ -6155,14 +6266,14 @@
               </a:spcAft>
             </a:pPr>
             <a:r>
-              <a:rPr sz="1400" b="0">
+              <a:rPr sz="1500" b="0">
                 <a:solidFill>
                   <a:srgbClr val="1F1F1F"/>
                 </a:solidFill>
                 <a:latin typeface="Calibri"/>
               </a:rPr>
-              <a:t>Functions, slope
-Mean, variance</a:t>
+              <a:t>Addition · Subtraction
+Multiplication</a:t>
             </a:r>
           </a:p>
         </p:txBody>
@@ -6175,8 +6286,8 @@
         </p:nvCxnSpPr>
         <p:spPr>
           <a:xfrm>
-            <a:off x="3017520" y="2240280"/>
-            <a:ext cx="365760" cy="0"/>
+            <a:off x="3840480" y="2240280"/>
+            <a:ext cx="548640" cy="0"/>
           </a:xfrm>
           <a:prstGeom prst="line">
             <a:avLst/>
@@ -6211,8 +6322,8 @@
         </p:nvSpPr>
         <p:spPr>
           <a:xfrm>
-            <a:off x="3383280" y="1600200"/>
-            <a:ext cx="2468880" cy="1280160"/>
+            <a:off x="4389120" y="1600200"/>
+            <a:ext cx="3291840" cy="1280160"/>
           </a:xfrm>
           <a:prstGeom prst="roundRect">
             <a:avLst>
@@ -6257,8 +6368,8 @@
         </p:nvSpPr>
         <p:spPr>
           <a:xfrm>
-            <a:off x="3456432" y="1600200"/>
-            <a:ext cx="2322576" cy="1280160"/>
+            <a:off x="4462272" y="1600200"/>
+            <a:ext cx="3145536" cy="1280160"/>
           </a:xfrm>
           <a:prstGeom prst="rect">
             <a:avLst/>
@@ -6277,13 +6388,13 @@
               </a:spcAft>
             </a:pPr>
             <a:r>
-              <a:rPr sz="1500" b="1">
+              <a:rPr sz="1600" b="1">
                 <a:solidFill>
                   <a:srgbClr val="1F1F1F"/>
                 </a:solidFill>
                 <a:latin typeface="Calibri"/>
               </a:rPr>
-              <a:t>Maths 2</a:t>
+              <a:t>Level 2</a:t>
             </a:r>
           </a:p>
           <a:p>
@@ -6293,14 +6404,14 @@
               </a:spcAft>
             </a:pPr>
             <a:r>
-              <a:rPr sz="1400" b="0">
+              <a:rPr sz="1500" b="0">
                 <a:solidFill>
                   <a:srgbClr val="1F1F1F"/>
                 </a:solidFill>
                 <a:latin typeface="Calibri"/>
               </a:rPr>
-              <a:t>Vectors, dot product
-Derivatives, chain rule</a:t>
+              <a:t>Division
+Fractions</a:t>
             </a:r>
           </a:p>
         </p:txBody>
@@ -6313,8 +6424,8 @@
         </p:nvCxnSpPr>
         <p:spPr>
           <a:xfrm>
-            <a:off x="5852160" y="2240280"/>
-            <a:ext cx="365760" cy="0"/>
+            <a:off x="7680960" y="2240280"/>
+            <a:ext cx="548640" cy="0"/>
           </a:xfrm>
           <a:prstGeom prst="line">
             <a:avLst/>
@@ -6349,8 +6460,8 @@
         </p:nvSpPr>
         <p:spPr>
           <a:xfrm>
-            <a:off x="6217920" y="1600200"/>
-            <a:ext cx="2468880" cy="1280160"/>
+            <a:off x="8229600" y="1600200"/>
+            <a:ext cx="3291840" cy="1280160"/>
           </a:xfrm>
           <a:prstGeom prst="roundRect">
             <a:avLst>
@@ -6358,7 +6469,7 @@
             </a:avLst>
           </a:prstGeom>
           <a:solidFill>
-            <a:srgbClr val="E6F2F3"/>
+            <a:srgbClr val="0F7C8C"/>
           </a:solidFill>
           <a:ln>
             <a:noFill/>
@@ -6395,8 +6506,8 @@
         </p:nvSpPr>
         <p:spPr>
           <a:xfrm>
-            <a:off x="6291072" y="1600200"/>
-            <a:ext cx="2322576" cy="1280160"/>
+            <a:off x="8302752" y="1600200"/>
+            <a:ext cx="3145536" cy="1280160"/>
           </a:xfrm>
           <a:prstGeom prst="rect">
             <a:avLst/>
@@ -6415,13 +6526,13 @@
               </a:spcAft>
             </a:pPr>
             <a:r>
-              <a:rPr sz="1500" b="1">
-                <a:solidFill>
-                  <a:srgbClr val="1F1F1F"/>
+              <a:rPr sz="1600" b="1">
+                <a:solidFill>
+                  <a:srgbClr val="FFFFFF"/>
                 </a:solidFill>
                 <a:latin typeface="Calibri"/>
               </a:rPr>
-              <a:t>MLF</a:t>
+              <a:t>Level 3</a:t>
             </a:r>
           </a:p>
           <a:p>
@@ -6431,159 +6542,21 @@
               </a:spcAft>
             </a:pPr>
             <a:r>
-              <a:rPr sz="1400" b="0">
-                <a:solidFill>
-                  <a:srgbClr val="1F1F1F"/>
+              <a:rPr sz="1500" b="0">
+                <a:solidFill>
+                  <a:srgbClr val="FFFFFF"/>
                 </a:solidFill>
                 <a:latin typeface="Calibri"/>
               </a:rPr>
-              <a:t>Loss functions
-Gradient descent</a:t>
-            </a:r>
-          </a:p>
-        </p:txBody>
-      </p:sp>
-      <p:cxnSp>
-        <p:nvCxnSpPr>
-          <p:cNvPr id="15" name="Connector 14"/>
-          <p:cNvCxnSpPr/>
-          <p:nvPr/>
-        </p:nvCxnSpPr>
-        <p:spPr>
-          <a:xfrm>
-            <a:off x="8686800" y="2240280"/>
-            <a:ext cx="365760" cy="0"/>
-          </a:xfrm>
-          <a:prstGeom prst="line">
-            <a:avLst/>
-          </a:prstGeom>
-          <a:ln w="19050">
-            <a:solidFill>
-              <a:srgbClr val="555555"/>
-            </a:solidFill>
-            <a:tailEnd type="triangle"/>
-          </a:ln>
-        </p:spPr>
-        <p:style>
-          <a:lnRef idx="2">
-            <a:schemeClr val="accent1"/>
-          </a:lnRef>
-          <a:fillRef idx="0">
-            <a:schemeClr val="accent1"/>
-          </a:fillRef>
-          <a:effectRef idx="1">
-            <a:schemeClr val="accent1"/>
-          </a:effectRef>
-          <a:fontRef idx="minor">
-            <a:schemeClr val="tx1"/>
-          </a:fontRef>
-        </p:style>
-      </p:cxnSp>
-      <p:sp>
-        <p:nvSpPr>
-          <p:cNvPr id="16" name="Rounded Rectangle 15"/>
-          <p:cNvSpPr/>
-          <p:nvPr/>
-        </p:nvSpPr>
-        <p:spPr>
-          <a:xfrm>
-            <a:off x="9052560" y="1600200"/>
-            <a:ext cx="2468880" cy="1280160"/>
-          </a:xfrm>
-          <a:prstGeom prst="roundRect">
-            <a:avLst>
-              <a:gd name="adj" fmla="val 8000"/>
-            </a:avLst>
-          </a:prstGeom>
-          <a:solidFill>
-            <a:srgbClr val="0F7C8C"/>
-          </a:solidFill>
-          <a:ln>
-            <a:noFill/>
-          </a:ln>
-          <a:effectLst/>
-        </p:spPr>
-        <p:style>
-          <a:lnRef idx="1">
-            <a:schemeClr val="accent1"/>
-          </a:lnRef>
-          <a:fillRef idx="3">
-            <a:schemeClr val="accent1"/>
-          </a:fillRef>
-          <a:effectRef idx="2">
-            <a:schemeClr val="accent1"/>
-          </a:effectRef>
-          <a:fontRef idx="minor">
-            <a:schemeClr val="lt1"/>
-          </a:fontRef>
-        </p:style>
-        <p:txBody>
-          <a:bodyPr rtlCol="0" anchor="ctr"/>
-          <a:lstStyle/>
-          <a:p>
-            <a:pPr algn="ctr"/>
-          </a:p>
-        </p:txBody>
-      </p:sp>
-      <p:sp>
-        <p:nvSpPr>
-          <p:cNvPr id="17" name="TextBox 16"/>
-          <p:cNvSpPr txBox="1"/>
-          <p:nvPr/>
-        </p:nvSpPr>
-        <p:spPr>
-          <a:xfrm>
-            <a:off x="9125712" y="1600200"/>
-            <a:ext cx="2322576" cy="1280160"/>
-          </a:xfrm>
-          <a:prstGeom prst="rect">
-            <a:avLst/>
-          </a:prstGeom>
-          <a:noFill/>
-        </p:spPr>
-        <p:txBody>
-          <a:bodyPr wrap="square" anchor="ctr" lIns="45720" rIns="45720">
-            <a:spAutoFit/>
-          </a:bodyPr>
-          <a:lstStyle/>
-          <a:p>
-            <a:pPr algn="ctr">
-              <a:spcAft>
-                <a:spcPts val="400"/>
-              </a:spcAft>
-            </a:pPr>
-            <a:r>
-              <a:rPr sz="1500" b="1">
-                <a:solidFill>
-                  <a:srgbClr val="FFFFFF"/>
-                </a:solidFill>
-                <a:latin typeface="Calibri"/>
-              </a:rPr>
-              <a:t>MLT</a:t>
-            </a:r>
-          </a:p>
-          <a:p>
-            <a:pPr algn="ctr">
-              <a:spcAft>
-                <a:spcPts val="400"/>
-              </a:spcAft>
-            </a:pPr>
-            <a:r>
-              <a:rPr sz="1400" b="0">
-                <a:solidFill>
-                  <a:srgbClr val="FFFFFF"/>
-                </a:solidFill>
-                <a:latin typeface="Calibri"/>
-              </a:rPr>
-              <a:t>Training linear
-regression</a:t>
-            </a:r>
-          </a:p>
-        </p:txBody>
-      </p:sp>
-      <p:sp>
-        <p:nvSpPr>
-          <p:cNvPr id="18" name="TextBox 17"/>
+              <a:t>Decimals
+Percentages</a:t>
+            </a:r>
+          </a:p>
+        </p:txBody>
+      </p:sp>
+      <p:sp>
+        <p:nvSpPr>
+          <p:cNvPr id="15" name="TextBox 14"/>
           <p:cNvSpPr txBox="1"/>
           <p:nvPr/>
         </p:nvSpPr>
@@ -6615,14 +6588,14 @@
                 </a:solidFill>
                 <a:latin typeface="Calibri"/>
               </a:rPr>
-              <a:t>Example: “How does training happen in Linear Regression?”</a:t>
+              <a:t>Example: stuck on “What is 20% of 50?”</a:t>
             </a:r>
           </a:p>
         </p:txBody>
       </p:sp>
       <p:graphicFrame>
         <p:nvGraphicFramePr>
-          <p:cNvPr id="19" name="Table 18"/>
+          <p:cNvPr id="16" name="Table 15"/>
           <p:cNvGraphicFramePr>
             <a:graphicFrameLocks noGrp="1"/>
           </p:cNvGraphicFramePr>
@@ -6723,7 +6696,7 @@
                           </a:solidFill>
                           <a:latin typeface="Calibri"/>
                         </a:rPr>
-                        <a:t>Supervised learning → prediction y = w·x → squared error → “what is dL/dw?”</a:t>
+                        <a:t>“What does 20% mean: 20 out of how many?”</a:t>
                       </a:r>
                     </a:p>
                   </a:txBody>
@@ -6769,7 +6742,7 @@
                           </a:solidFill>
                           <a:latin typeface="Calibri"/>
                         </a:rPr>
-                        <a:t>Gap found in derivatives (Maths 2) → checks slope of a line (Maths 1) if needed</a:t>
+                        <a:t>Gap found in fractions (Level 2) → checks division → multiplication (Level 1) if needed</a:t>
                       </a:r>
                     </a:p>
                   </a:txBody>
@@ -6815,7 +6788,7 @@
                           </a:solidFill>
                           <a:latin typeface="Calibri"/>
                         </a:rPr>
-                        <a:t>A few slope and derivative questions with hints and a link to the Maths 2 lecture</a:t>
+                        <a:t>A few division and fraction questions with hints and a link to the NCERT page</a:t>
                       </a:r>
                     </a:p>
                   </a:txBody>
@@ -6861,7 +6834,7 @@
                           </a:solidFill>
                           <a:latin typeface="Calibri"/>
                         </a:rPr>
-                        <a:t>derivative of w² → chain rule → gradient → gradient descent update (MLF, MLT)</a:t>
+                        <a:t>1/5 of 50 → 1/4 of 20 → back to 20% of 50 → harder: 15% of 60</a:t>
                       </a:r>
                     </a:p>
                   </a:txBody>
@@ -7663,7 +7636,7 @@
                 </a:solidFill>
                 <a:latin typeface="Calibri"/>
               </a:rPr>
-              <a:t>•  Backtracking across courses, then climbing back up to the learner’s question</a:t>
+              <a:t>•  Backtracking across levels, then climbing back up to the learner’s question</a:t>
             </a:r>
           </a:p>
           <a:p>
@@ -7679,7 +7652,7 @@
                 </a:solidFill>
                 <a:latin typeface="Calibri"/>
               </a:rPr>
-              <a:t>•  Feedback with the exact IITM lecture, slide or assignment to revisit; works for any course</a:t>
+              <a:t>•  Feedback with the exact page, video or notes to revisit; works for any course</a:t>
             </a:r>
           </a:p>
         </p:txBody>
@@ -8447,7 +8420,7 @@
                           </a:solidFill>
                           <a:latin typeface="Calibri"/>
                         </a:rPr>
-                        <a:t>Decides: probe, hint, backtrack a course, retest, move up</a:t>
+                        <a:t>Decides: probe, hint, backtrack a level, retest, move up</a:t>
                       </a:r>
                     </a:p>
                   </a:txBody>
@@ -8515,7 +8488,7 @@
                           </a:solidFill>
                           <a:latin typeface="Calibri"/>
                         </a:rPr>
-                        <a:t>Qwen3-4B + LoRA on tutoring dialogues + our IITM BS examples: writes probing questions</a:t>
+                        <a:t>Qwen3-4B + LoRA on tutoring dialogues + our NCERT and IITM examples: writes probing questions</a:t>
                       </a:r>
                     </a:p>
                   </a:txBody>
@@ -8583,7 +8556,7 @@
                           </a:solidFill>
                           <a:latin typeface="Calibri"/>
                         </a:rPr>
-                        <a:t>Spots common error patterns (e.g. a sign error in the gradient)</a:t>
+                        <a:t>Spots common error patterns (e.g. 50 ÷ 20 instead of 20/100 × 50)</a:t>
                       </a:r>
                     </a:p>
                   </a:txBody>
@@ -8651,7 +8624,7 @@
                           </a:solidFill>
                           <a:latin typeface="Calibri"/>
                         </a:rPr>
-                        <a:t>Finds the lecture, slide or assignment for a concept</a:t>
+                        <a:t>Finds the page, video or notes for a concept</a:t>
                       </a:r>
                     </a:p>
                   </a:txBody>
@@ -9072,7 +9045,7 @@
                           </a:solidFill>
                           <a:latin typeface="Calibri"/>
                         </a:rPr>
-                        <a:t>IITM BS transcripts</a:t>
+                        <a:t>NCERT textbooks</a:t>
                       </a:r>
                     </a:p>
                   </a:txBody>
@@ -9116,7 +9089,7 @@
                           </a:solidFill>
                           <a:latin typeface="Calibri"/>
                         </a:rPr>
-                        <a:t>gathered by us</a:t>
+                        <a:t>several classes and subjects</a:t>
                       </a:r>
                     </a:p>
                   </a:txBody>
@@ -9276,7 +9249,7 @@
                           </a:solidFill>
                           <a:latin typeface="Calibri"/>
                         </a:rPr>
-                        <a:t>Tutoring dialogues + our IITM examples</a:t>
+                        <a:t>Tutoring dialogues + our examples</a:t>
                       </a:r>
                     </a:p>
                   </a:txBody>
@@ -9344,7 +9317,7 @@
                           </a:solidFill>
                           <a:latin typeface="Calibri"/>
                         </a:rPr>
-                        <a:t>NCERT Maths</a:t>
+                        <a:t>IITM BS transcripts</a:t>
                       </a:r>
                     </a:p>
                   </a:txBody>
@@ -9366,7 +9339,7 @@
                           </a:solidFill>
                           <a:latin typeface="Calibri"/>
                         </a:rPr>
-                        <a:t>Course pack (second)</a:t>
+                        <a:t>Course pack (secondary)</a:t>
                       </a:r>
                     </a:p>
                   </a:txBody>
@@ -9388,7 +9361,7 @@
                           </a:solidFill>
                           <a:latin typeface="Calibri"/>
                         </a:rPr>
-                        <a:t>several classes</a:t>
+                        <a:t>gathered by us</a:t>
                       </a:r>
                     </a:p>
                   </a:txBody>
@@ -9437,7 +9410,7 @@
                 </a:solidFill>
                 <a:latin typeface="Calibri"/>
               </a:rPr>
-              <a:t>Why ASSISTments for DKT: real, time-ordered student answers (IITM has none public); the standard DKT benchmark, so our results can be checked; maths skills; free for research.</a:t>
+              <a:t>Why ASSISTments for DKT: real, time-ordered student answers (none public for NCERT/IITM); the standard DKT benchmark, so our results can be checked; maths skills; free for research.</a:t>
             </a:r>
           </a:p>
           <a:p>
@@ -9829,7 +9802,7 @@
                 </a:solidFill>
                 <a:latin typeface="Calibri"/>
               </a:rPr>
-              <a:t>IITM BS training example → Socratic model</a:t>
+              <a:t>NCERT training example → Socratic model</a:t>
             </a:r>
           </a:p>
         </p:txBody>
@@ -9930,7 +9903,7 @@
                 </a:solidFill>
                 <a:latin typeface="Calibri"/>
               </a:rPr>
-              <a:t>Concept: derivatives (Maths 2)</a:t>
+              <a:t>Concept: percentages (Level 3); prerequisite: fractions (Level 2)</a:t>
             </a:r>
           </a:p>
           <a:p>
@@ -9946,7 +9919,7 @@
                 </a:solidFill>
                 <a:latin typeface="Calibri"/>
               </a:rPr>
-              <a:t>Question: For L(w) = (6 − 2w)², what is dL/dw?</a:t>
+              <a:t>Question: What is 20% of 50?</a:t>
             </a:r>
           </a:p>
           <a:p>
@@ -9962,7 +9935,7 @@
                 </a:solidFill>
                 <a:latin typeface="Calibri"/>
               </a:rPr>
-              <a:t>Learner: “I don’t know”</a:t>
+              <a:t>Learner: “2.5”</a:t>
             </a:r>
           </a:p>
           <a:p>
@@ -9978,7 +9951,7 @@
                 </a:solidFill>
                 <a:latin typeface="Calibri"/>
               </a:rPr>
-              <a:t>Controller action: PROBE (a prerequisite); don’t reveal the answer</a:t>
+              <a:t>Controller action: PROBE the meaning of percent; don’t reveal the answer</a:t>
             </a:r>
           </a:p>
           <a:p>
@@ -9994,7 +9967,7 @@
                 </a:solidFill>
                 <a:latin typeface="Calibri"/>
               </a:rPr>
-              <a:t>Resource: Maths 2, Week 5, Lecture 2 (08:15)</a:t>
+              <a:t>Resource: NCERT Mathematics, chapter on percentages</a:t>
             </a:r>
           </a:p>
           <a:p>
@@ -10026,7 +9999,7 @@
                 </a:solidFill>
                 <a:latin typeface="Calibri"/>
               </a:rPr>
-              <a:t>“Let’s step back. For y = 3x + 1, how much does y change when x increases by 1?”</a:t>
+              <a:t>“Let’s check together. What does 20% mean: 20 out of how many?”</a:t>
             </a:r>
           </a:p>
           <a:p>
@@ -10555,7 +10528,7 @@
                           </a:solidFill>
                           <a:latin typeface="Calibri"/>
                         </a:rPr>
-                        <a:t>% gaps found in the right course</a:t>
+                        <a:t>% gaps found at the right level</a:t>
                       </a:r>
                     </a:p>
                   </a:txBody>
@@ -10867,7 +10840,7 @@
                 </a:solidFill>
                 <a:latin typeface="Calibri"/>
               </a:rPr>
-              <a:t>•  60–100 annotated IITM scenarios (careless slip, gap 1 course back, gap 2 courses back…) + any provided test samples</a:t>
+              <a:t>•  60–100 annotated NCERT scenarios (careless slip, gap 1 level down, gap 2 levels down…) + any provided test samples</a:t>
             </a:r>
           </a:p>
           <a:p>
@@ -10899,7 +10872,7 @@
                 </a:solidFill>
                 <a:latin typeface="Calibri"/>
               </a:rPr>
-              <a:t>•  Same tests on the IITM BS and NCERT course packs, with no code changes</a:t>
+              <a:t>•  Same tests on the NCERT and IITM BS course packs, with no code changes</a:t>
             </a:r>
           </a:p>
         </p:txBody>
@@ -11092,7 +11065,7 @@
         <p:spPr>
           <a:xfrm>
             <a:off x="548640" y="1143000"/>
-            <a:ext cx="6766560" cy="3931920"/>
+            <a:ext cx="6766560" cy="3566160"/>
           </a:xfrm>
           <a:prstGeom prst="roundRect">
             <a:avLst>
@@ -11140,7 +11113,7 @@
         <p:spPr>
           <a:xfrm>
             <a:off x="685800" y="1188720"/>
-            <a:ext cx="6583680" cy="4937760"/>
+            <a:ext cx="6583680" cy="3474720"/>
           </a:xfrm>
           <a:prstGeom prst="rect">
             <a:avLst/>
@@ -11165,7 +11138,7 @@
                 </a:solidFill>
                 <a:latin typeface="Calibri"/>
               </a:rPr>
-              <a:t>Learner: How does training happen in Linear Regression?</a:t>
+              <a:t>Learner: What is 20% of 50?  My answer: 2.5</a:t>
             </a:r>
           </a:p>
           <a:p>
@@ -11175,13 +11148,13 @@
               </a:spcAft>
             </a:pPr>
             <a:r>
-              <a:rPr sz="1100" b="0">
+              <a:rPr sz="1200" b="0">
                 <a:solidFill>
                   <a:srgbClr val="1F1F1F"/>
                 </a:solidFill>
                 <a:latin typeface="Calibri"/>
               </a:rPr>
-              <a:t>Tutor: In supervised learning, what do we give the model?   Learner: Inputs and outputs ✓</a:t>
+              <a:t>Tutor: What does 20% mean: 20 out of how many?   Learner: 100 ✓</a:t>
             </a:r>
           </a:p>
           <a:p>
@@ -11191,13 +11164,13 @@
               </a:spcAft>
             </a:pPr>
             <a:r>
-              <a:rPr sz="1100" b="0">
+              <a:rPr sz="1200" b="0">
                 <a:solidFill>
                   <a:srgbClr val="1F1F1F"/>
                 </a:solidFill>
                 <a:latin typeface="Calibri"/>
               </a:rPr>
-              <a:t>Tutor: y = w·x, w = [2,1], x = [3,4]. Prediction?   Learner: 10 ✓</a:t>
+              <a:t>Tutor: So 20% = 20/100. Simplest form?   Learner: I don’t know</a:t>
             </a:r>
           </a:p>
           <a:p>
@@ -11207,13 +11180,13 @@
               </a:spcAft>
             </a:pPr>
             <a:r>
-              <a:rPr sz="1100" b="0">
-                <a:solidFill>
-                  <a:srgbClr val="1F1F1F"/>
+              <a:rPr sz="1200" b="0">
+                <a:solidFill>
+                  <a:srgbClr val="0F7C8C"/>
                 </a:solidFill>
                 <a:latin typeface="Calibri"/>
               </a:rPr>
-              <a:t>Tutor: True y is 12. Squared error?   Learner: 4 ✓</a:t>
+              <a:t>[gap at Level 2 → checking division]</a:t>
             </a:r>
           </a:p>
           <a:p>
@@ -11223,13 +11196,13 @@
               </a:spcAft>
             </a:pPr>
             <a:r>
-              <a:rPr sz="1100" b="0">
+              <a:rPr sz="1200" b="0">
                 <a:solidFill>
                   <a:srgbClr val="1F1F1F"/>
                 </a:solidFill>
                 <a:latin typeface="Calibri"/>
               </a:rPr>
-              <a:t>Tutor: For L(w) = (6 − 2w)², what is dL/dw?   Learner: I don’t know</a:t>
+              <a:t>Tutor: What is 100 ÷ 20?   Learner: 5 ✓</a:t>
             </a:r>
           </a:p>
           <a:p>
@@ -11239,13 +11212,13 @@
               </a:spcAft>
             </a:pPr>
             <a:r>
-              <a:rPr sz="1100" b="0">
-                <a:solidFill>
-                  <a:srgbClr val="0F7C8C"/>
+              <a:rPr sz="1200" b="0">
+                <a:solidFill>
+                  <a:srgbClr val="1F1F1F"/>
                 </a:solidFill>
                 <a:latin typeface="Calibri"/>
               </a:rPr>
-              <a:t>[gap in Maths 2: derivatives → checking Maths 1: slope]</a:t>
+              <a:t>Tutor: So 20/100 = 1/5. What is 1/5 of 50?  Hint: 5 equal groups 📖</a:t>
             </a:r>
           </a:p>
           <a:p>
@@ -11255,13 +11228,13 @@
               </a:spcAft>
             </a:pPr>
             <a:r>
-              <a:rPr sz="1100" b="0">
+              <a:rPr sz="1200" b="0">
                 <a:solidFill>
                   <a:srgbClr val="1F1F1F"/>
                 </a:solidFill>
                 <a:latin typeface="Calibri"/>
               </a:rPr>
-              <a:t>Tutor: For y = 3x + 1, how much does y change when x goes up by 1?   Learner: 3 ✓</a:t>
+              <a:t>Learner: 10 ✓      Tutor: And 1/4 of 20?   Learner: 5 ✓</a:t>
             </a:r>
           </a:p>
           <a:p>
@@ -11271,13 +11244,13 @@
               </a:spcAft>
             </a:pPr>
             <a:r>
-              <a:rPr sz="1100" b="0">
-                <a:solidFill>
-                  <a:srgbClr val="1F1F1F"/>
+              <a:rPr sz="1200" b="0">
+                <a:solidFill>
+                  <a:srgbClr val="0F7C8C"/>
                 </a:solidFill>
                 <a:latin typeface="Calibri"/>
               </a:rPr>
-              <a:t>Tutor: Derivative of w²?  📺 Maths 2, Week 5, Lecture 2 (08:15)   Learner: 2w ✓</a:t>
+              <a:t>[back to Level 3]</a:t>
             </a:r>
           </a:p>
           <a:p>
@@ -11287,13 +11260,13 @@
               </a:spcAft>
             </a:pPr>
             <a:r>
-              <a:rPr sz="1100" b="0">
-                <a:solidFill>
-                  <a:srgbClr val="0F7C8C"/>
+              <a:rPr sz="1200" b="1">
+                <a:solidFill>
+                  <a:srgbClr val="1F1F1F"/>
                 </a:solidFill>
                 <a:latin typeface="Calibri"/>
               </a:rPr>
-              <a:t>[back to Maths 2]</a:t>
+              <a:t>Tutor: Try again: 20% of 50?   Learner: 10 ✓</a:t>
             </a:r>
           </a:p>
           <a:p>
@@ -11303,13 +11276,13 @@
               </a:spcAft>
             </a:pPr>
             <a:r>
-              <a:rPr sz="1100" b="0">
+              <a:rPr sz="1200" b="0">
                 <a:solidFill>
                   <a:srgbClr val="1F1F1F"/>
                 </a:solidFill>
                 <a:latin typeface="Calibri"/>
               </a:rPr>
-              <a:t>Tutor: Chain rule on (6 − 2w)²?   Learner: −4(6 − 2w) ✓</a:t>
+              <a:t>Tutor: Earlier you divided 50 by 20; a percentage means “out of 100”.</a:t>
             </a:r>
           </a:p>
           <a:p>
@@ -11319,45 +11292,13 @@
               </a:spcAft>
             </a:pPr>
             <a:r>
-              <a:rPr sz="1100" b="0">
-                <a:solidFill>
-                  <a:srgbClr val="0F7C8C"/>
+              <a:rPr sz="1200" b="0">
+                <a:solidFill>
+                  <a:srgbClr val="1F1F1F"/>
                 </a:solidFill>
                 <a:latin typeface="Calibri"/>
               </a:rPr>
-              <a:t>[back to MLF / MLT]</a:t>
-            </a:r>
-          </a:p>
-          <a:p>
-            <a:pPr algn="l">
-              <a:spcAft>
-                <a:spcPts val="400"/>
-              </a:spcAft>
-            </a:pPr>
-            <a:r>
-              <a:rPr sz="1100" b="0">
-                <a:solidFill>
-                  <a:srgbClr val="1F1F1F"/>
-                </a:solidFill>
-                <a:latin typeface="Calibri"/>
-              </a:rPr>
-              <a:t>Tutor: At w = 1 the gradient is −16. Should w go up or down?   Learner: Up ✓</a:t>
-            </a:r>
-          </a:p>
-          <a:p>
-            <a:pPr algn="l">
-              <a:spcAft>
-                <a:spcPts val="400"/>
-              </a:spcAft>
-            </a:pPr>
-            <a:r>
-              <a:rPr sz="1100" b="1">
-                <a:solidFill>
-                  <a:srgbClr val="1F1F1F"/>
-                </a:solidFill>
-                <a:latin typeface="Calibri"/>
-              </a:rPr>
-              <a:t>Tutor: Exactly: w ← w − η × gradient. That’s how linear regression is trained!</a:t>
+              <a:t>         Next: 15% of 60?</a:t>
             </a:r>
           </a:p>
         </p:txBody>
@@ -11420,8 +11361,8 @@
                 <a:tableStyleId>{5C22544A-7EE6-4342-B048-85BDC9FD1C3A}</a:tableStyleId>
               </a:tblPr>
               <a:tblGrid>
-                <a:gridCol w="1737360"/>
-                <a:gridCol w="731520"/>
+                <a:gridCol w="1645920"/>
+                <a:gridCol w="822960"/>
                 <a:gridCol w="1554480"/>
               </a:tblGrid>
               <a:tr h="384048">
@@ -11437,7 +11378,7 @@
                           </a:solidFill>
                           <a:latin typeface="Calibri"/>
                         </a:rPr>
-                        <a:t>Course: concept</a:t>
+                        <a:t>Concept (level)</a:t>
                       </a:r>
                     </a:p>
                   </a:txBody>
@@ -11505,7 +11446,7 @@
                           </a:solidFill>
                           <a:latin typeface="Calibri"/>
                         </a:rPr>
-                        <a:t>Maths 1: slope</a:t>
+                        <a:t>Multiplication (1)</a:t>
                       </a:r>
                     </a:p>
                   </a:txBody>
@@ -11527,7 +11468,7 @@
                           </a:solidFill>
                           <a:latin typeface="Calibri"/>
                         </a:rPr>
-                        <a:t>2/2</a:t>
+                        <a:t>3/3</a:t>
                       </a:r>
                     </a:p>
                   </a:txBody>
@@ -11573,7 +11514,7 @@
                           </a:solidFill>
                           <a:latin typeface="Calibri"/>
                         </a:rPr>
-                        <a:t>Maths 2: derivatives</a:t>
+                        <a:t>Division (2)</a:t>
                       </a:r>
                     </a:p>
                   </a:txBody>
@@ -11595,7 +11536,7 @@
                           </a:solidFill>
                           <a:latin typeface="Calibri"/>
                         </a:rPr>
-                        <a:t>1/2</a:t>
+                        <a:t>2/2</a:t>
                       </a:r>
                     </a:p>
                   </a:txBody>
@@ -11617,7 +11558,7 @@
                           </a:solidFill>
                           <a:latin typeface="Calibri"/>
                         </a:rPr>
-                        <a:t>0.64</a:t>
+                        <a:t>0.84</a:t>
                       </a:r>
                     </a:p>
                   </a:txBody>
@@ -11641,7 +11582,7 @@
                           </a:solidFill>
                           <a:latin typeface="Calibri"/>
                         </a:rPr>
-                        <a:t>MLF: gradient descent</a:t>
+                        <a:t>Fractions (2)</a:t>
                       </a:r>
                     </a:p>
                   </a:txBody>
@@ -11663,7 +11604,7 @@
                           </a:solidFill>
                           <a:latin typeface="Calibri"/>
                         </a:rPr>
-                        <a:t>1/1</a:t>
+                        <a:t>1/2</a:t>
                       </a:r>
                     </a:p>
                   </a:txBody>
@@ -11685,7 +11626,7 @@
                           </a:solidFill>
                           <a:latin typeface="Calibri"/>
                         </a:rPr>
-                        <a:t>0.70</a:t>
+                        <a:t>0.66</a:t>
                       </a:r>
                     </a:p>
                   </a:txBody>
@@ -11709,7 +11650,7 @@
                           </a:solidFill>
                           <a:latin typeface="Calibri"/>
                         </a:rPr>
-                        <a:t>MLT: linear regression</a:t>
+                        <a:t>Percentages (3)</a:t>
                       </a:r>
                     </a:p>
                   </a:txBody>
@@ -11753,7 +11694,7 @@
                           </a:solidFill>
                           <a:latin typeface="Calibri"/>
                         </a:rPr>
-                        <a:t>0.60 · practise</a:t>
+                        <a:t>0.58 · practise</a:t>
                       </a:r>
                     </a:p>
                   </a:txBody>
@@ -11816,7 +11757,7 @@
         <p:spPr>
           <a:xfrm>
             <a:off x="7680960" y="4160520"/>
-            <a:ext cx="4023360" cy="2011680"/>
+            <a:ext cx="4023360" cy="1828800"/>
           </a:xfrm>
           <a:prstGeom prst="rect">
             <a:avLst/>
@@ -11841,7 +11782,7 @@
                 </a:solidFill>
                 <a:latin typeface="Calibri"/>
               </a:rPr>
-              <a:t>API + prompt: explains MSE and gradient descent all at once. Learner never checked; the derivative gap stays hidden.</a:t>
+              <a:t>API + prompt: “20/100 × 50 = 10.” Answer revealed; gap not found.</a:t>
             </a:r>
           </a:p>
           <a:p>
@@ -11857,7 +11798,7 @@
                 </a:solidFill>
                 <a:latin typeface="Calibri"/>
               </a:rPr>
-              <a:t>Ours: finds the derivative gap, revisits Maths 1 and 2, returns to MLT; learner works out the update rule.</a:t>
+              <a:t>Ours: finds the fraction gap, practises Level 2, returns to Level 3; learner finds 10.</a:t>
             </a:r>
           </a:p>
         </p:txBody>

--- a/docs/milestone-1/Milestone1_Presentation.pptx
+++ b/docs/milestone-1/Milestone1_Presentation.pptx
@@ -7038,7 +7038,7 @@
         </p:nvGraphicFramePr>
         <p:xfrm>
           <a:off x="548640" y="1188720"/>
-          <a:ext cx="11064240" cy="2688336"/>
+          <a:ext cx="11064240" cy="2779776"/>
         </p:xfrm>
         <a:graphic>
           <a:graphicData uri="http://schemas.openxmlformats.org/drawingml/2006/table">
@@ -7048,17 +7048,17 @@
               </a:tblPr>
               <a:tblGrid>
                 <a:gridCol w="2743200"/>
-                <a:gridCol w="3931920"/>
-                <a:gridCol w="4389120"/>
+                <a:gridCol w="4114800"/>
+                <a:gridCol w="4206240"/>
               </a:tblGrid>
-              <a:tr h="384048">
-                <a:tc>
-                  <a:txBody>
-                    <a:bodyPr wrap="square"/>
-                    <a:lstStyle/>
-                    <a:p>
-                      <a:r>
-                        <a:rPr sz="1200" b="1">
+              <a:tr h="347472">
+                <a:tc>
+                  <a:txBody>
+                    <a:bodyPr wrap="square"/>
+                    <a:lstStyle/>
+                    <a:p>
+                      <a:r>
+                        <a:rPr sz="1100" b="1">
                           <a:solidFill>
                             <a:srgbClr val="FFFFFF"/>
                           </a:solidFill>
@@ -7080,7 +7080,7 @@
                     <a:lstStyle/>
                     <a:p>
                       <a:r>
-                        <a:rPr sz="1200" b="1">
+                        <a:rPr sz="1100" b="1">
                           <a:solidFill>
                             <a:srgbClr val="FFFFFF"/>
                           </a:solidFill>
@@ -7102,7 +7102,7 @@
                     <a:lstStyle/>
                     <a:p>
                       <a:r>
-                        <a:rPr sz="1200" b="1">
+                        <a:rPr sz="1100" b="1">
                           <a:solidFill>
                             <a:srgbClr val="FFFFFF"/>
                           </a:solidFill>
@@ -7119,14 +7119,14 @@
                   </a:tcPr>
                 </a:tc>
               </a:tr>
-              <a:tr h="384048">
-                <a:tc>
-                  <a:txBody>
-                    <a:bodyPr wrap="square"/>
-                    <a:lstStyle/>
-                    <a:p>
-                      <a:r>
-                        <a:rPr sz="1200" b="1">
+              <a:tr h="347472">
+                <a:tc>
+                  <a:txBody>
+                    <a:bodyPr wrap="square"/>
+                    <a:lstStyle/>
+                    <a:p>
+                      <a:r>
+                        <a:rPr sz="1100" b="1">
                           <a:solidFill>
                             <a:srgbClr val="1F1F1F"/>
                           </a:solidFill>
@@ -7148,7 +7148,7 @@
                     <a:lstStyle/>
                     <a:p>
                       <a:r>
-                        <a:rPr sz="1200" b="0">
+                        <a:rPr sz="1100" b="0">
                           <a:solidFill>
                             <a:srgbClr val="1F1F1F"/>
                           </a:solidFill>
@@ -7170,7 +7170,7 @@
                     <a:lstStyle/>
                     <a:p>
                       <a:r>
-                        <a:rPr sz="1200" b="0">
+                        <a:rPr sz="1100" b="0">
                           <a:solidFill>
                             <a:srgbClr val="1F1F1F"/>
                           </a:solidFill>
@@ -7187,20 +7187,20 @@
                   </a:tcPr>
                 </a:tc>
               </a:tr>
-              <a:tr h="384048">
-                <a:tc>
-                  <a:txBody>
-                    <a:bodyPr wrap="square"/>
-                    <a:lstStyle/>
-                    <a:p>
-                      <a:r>
-                        <a:rPr sz="1200" b="1">
+              <a:tr h="347472">
+                <a:tc>
+                  <a:txBody>
+                    <a:bodyPr wrap="square"/>
+                    <a:lstStyle/>
+                    <a:p>
+                      <a:r>
+                        <a:rPr sz="1100" b="1">
                           <a:solidFill>
                             <a:srgbClr val="1F1F1F"/>
                           </a:solidFill>
                           <a:latin typeface="Calibri"/>
                         </a:rPr>
-                        <a:t>ChatGPT / Gemini study modes</a:t>
+                        <a:t>MathGPT.ai</a:t>
                       </a:r>
                     </a:p>
                   </a:txBody>
@@ -7216,13 +7216,13 @@
                     <a:lstStyle/>
                     <a:p>
                       <a:r>
-                        <a:rPr sz="1200" b="0">
+                        <a:rPr sz="1100" b="0">
                           <a:solidFill>
                             <a:srgbClr val="1F1F1F"/>
                           </a:solidFill>
                           <a:latin typeface="Calibri"/>
                         </a:rPr>
-                        <a:t>Natural conversation</a:t>
+                        <a:t>Socratic tutor: withholds answers, guides with hints; 50+ US colleges</a:t>
                       </a:r>
                     </a:p>
                   </a:txBody>
@@ -7238,37 +7238,173 @@
                     <a:lstStyle/>
                     <a:p>
                       <a:r>
-                        <a:rPr sz="1200" b="0">
+                        <a:rPr sz="1100" b="0">
                           <a:solidFill>
                             <a:srgbClr val="1F1F1F"/>
                           </a:solidFill>
                           <a:latin typeface="Calibri"/>
                         </a:rPr>
+                        <a:t>College maths only; no learner model or backtracking; closed</a:t>
+                      </a:r>
+                    </a:p>
+                  </a:txBody>
+                  <a:tcPr marL="54864" marR="54864" marT="27432" marB="27432">
+                    <a:solidFill>
+                      <a:srgbClr val="F4F6F7"/>
+                    </a:solidFill>
+                  </a:tcPr>
+                </a:tc>
+              </a:tr>
+              <a:tr h="347472">
+                <a:tc>
+                  <a:txBody>
+                    <a:bodyPr wrap="square"/>
+                    <a:lstStyle/>
+                    <a:p>
+                      <a:r>
+                        <a:rPr sz="1100" b="1">
+                          <a:solidFill>
+                            <a:srgbClr val="1F1F1F"/>
+                          </a:solidFill>
+                          <a:latin typeface="Calibri"/>
+                        </a:rPr>
+                        <a:t>ChatGPT / Gemini / Claude learning modes</a:t>
+                      </a:r>
+                    </a:p>
+                  </a:txBody>
+                  <a:tcPr marL="54864" marR="54864" marT="27432" marB="27432">
+                    <a:solidFill>
+                      <a:srgbClr val="FFFFFF"/>
+                    </a:solidFill>
+                  </a:tcPr>
+                </a:tc>
+                <a:tc>
+                  <a:txBody>
+                    <a:bodyPr wrap="square"/>
+                    <a:lstStyle/>
+                    <a:p>
+                      <a:r>
+                        <a:rPr sz="1100" b="0">
+                          <a:solidFill>
+                            <a:srgbClr val="1F1F1F"/>
+                          </a:solidFill>
+                          <a:latin typeface="Calibri"/>
+                        </a:rPr>
+                        <a:t>Natural conversation in a guiding, question-asking style</a:t>
+                      </a:r>
+                    </a:p>
+                  </a:txBody>
+                  <a:tcPr marL="54864" marR="54864" marT="27432" marB="27432">
+                    <a:solidFill>
+                      <a:srgbClr val="FFFFFF"/>
+                    </a:solidFill>
+                  </a:tcPr>
+                </a:tc>
+                <a:tc>
+                  <a:txBody>
+                    <a:bodyPr wrap="square"/>
+                    <a:lstStyle/>
+                    <a:p>
+                      <a:r>
+                        <a:rPr sz="1100" b="0">
+                          <a:solidFill>
+                            <a:srgbClr val="1F1F1F"/>
+                          </a:solidFill>
+                          <a:latin typeface="Calibri"/>
+                        </a:rPr>
                         <a:t>Driven by a system prompt; no memory of skills; can give away answers</a:t>
                       </a:r>
                     </a:p>
                   </a:txBody>
                   <a:tcPr marL="54864" marR="54864" marT="27432" marB="27432">
                     <a:solidFill>
+                      <a:srgbClr val="FFFFFF"/>
+                    </a:solidFill>
+                  </a:tcPr>
+                </a:tc>
+              </a:tr>
+              <a:tr h="347472">
+                <a:tc>
+                  <a:txBody>
+                    <a:bodyPr wrap="square"/>
+                    <a:lstStyle/>
+                    <a:p>
+                      <a:r>
+                        <a:rPr sz="1100" b="1">
+                          <a:solidFill>
+                            <a:srgbClr val="1F1F1F"/>
+                          </a:solidFill>
+                          <a:latin typeface="Calibri"/>
+                        </a:rPr>
+                        <a:t>MATHia</a:t>
+                      </a:r>
+                    </a:p>
+                  </a:txBody>
+                  <a:tcPr marL="54864" marR="54864" marT="27432" marB="27432">
+                    <a:solidFill>
                       <a:srgbClr val="F4F6F7"/>
                     </a:solidFill>
                   </a:tcPr>
                 </a:tc>
+                <a:tc>
+                  <a:txBody>
+                    <a:bodyPr wrap="square"/>
+                    <a:lstStyle/>
+                    <a:p>
+                      <a:r>
+                        <a:rPr sz="1100" b="0">
+                          <a:solidFill>
+                            <a:srgbClr val="1F1F1F"/>
+                          </a:solidFill>
+                          <a:latin typeface="Calibri"/>
+                        </a:rPr>
+                        <a:t>Adapts per student; step-by-step guidance, real-time feedback, targeted practice</a:t>
+                      </a:r>
+                    </a:p>
+                  </a:txBody>
+                  <a:tcPr marL="54864" marR="54864" marT="27432" marB="27432">
+                    <a:solidFill>
+                      <a:srgbClr val="F4F6F7"/>
+                    </a:solidFill>
+                  </a:tcPr>
+                </a:tc>
+                <a:tc>
+                  <a:txBody>
+                    <a:bodyPr wrap="square"/>
+                    <a:lstStyle/>
+                    <a:p>
+                      <a:r>
+                        <a:rPr sz="1100" b="0">
+                          <a:solidFill>
+                            <a:srgbClr val="1F1F1F"/>
+                          </a:solidFill>
+                          <a:latin typeface="Calibri"/>
+                        </a:rPr>
+                        <a:t>Paid, closed; fixed maths curriculum; fixed step paths, no free conversation</a:t>
+                      </a:r>
+                    </a:p>
+                  </a:txBody>
+                  <a:tcPr marL="54864" marR="54864" marT="27432" marB="27432">
+                    <a:solidFill>
+                      <a:srgbClr val="F4F6F7"/>
+                    </a:solidFill>
+                  </a:tcPr>
+                </a:tc>
               </a:tr>
-              <a:tr h="384048">
-                <a:tc>
-                  <a:txBody>
-                    <a:bodyPr wrap="square"/>
-                    <a:lstStyle/>
-                    <a:p>
-                      <a:r>
-                        <a:rPr sz="1200" b="1">
+              <a:tr h="347472">
+                <a:tc>
+                  <a:txBody>
+                    <a:bodyPr wrap="square"/>
+                    <a:lstStyle/>
+                    <a:p>
+                      <a:r>
+                        <a:rPr sz="1100" b="1">
                           <a:solidFill>
                             <a:srgbClr val="1F1F1F"/>
                           </a:solidFill>
                           <a:latin typeface="Calibri"/>
                         </a:rPr>
-                        <a:t>MATHia</a:t>
+                        <a:t>Squirrel AI, ALEKS (adaptive)</a:t>
                       </a:r>
                     </a:p>
                   </a:txBody>
@@ -7284,13 +7420,13 @@
                     <a:lstStyle/>
                     <a:p>
                       <a:r>
-                        <a:rPr sz="1200" b="0">
+                        <a:rPr sz="1100" b="0">
                           <a:solidFill>
                             <a:srgbClr val="1F1F1F"/>
                           </a:solidFill>
                           <a:latin typeface="Calibri"/>
                         </a:rPr>
-                        <a:t>Adapts per student; step-by-step guidance, real-time feedback, targeted practice</a:t>
+                        <a:t>Diagnose gaps on a knowledge graph; pick what to learn next</a:t>
                       </a:r>
                     </a:p>
                   </a:txBody>
@@ -7306,13 +7442,13 @@
                     <a:lstStyle/>
                     <a:p>
                       <a:r>
-                        <a:rPr sz="1200" b="0">
+                        <a:rPr sz="1100" b="0">
                           <a:solidFill>
                             <a:srgbClr val="1F1F1F"/>
                           </a:solidFill>
                           <a:latin typeface="Calibri"/>
                         </a:rPr>
-                        <a:t>Paid, closed; fixed maths curriculum; fixed step paths, no free conversation</a:t>
+                        <a:t>Recommend practice, no probing conversation; paid, closed</a:t>
                       </a:r>
                     </a:p>
                   </a:txBody>
@@ -7323,20 +7459,20 @@
                   </a:tcPr>
                 </a:tc>
               </a:tr>
-              <a:tr h="384048">
-                <a:tc>
-                  <a:txBody>
-                    <a:bodyPr wrap="square"/>
-                    <a:lstStyle/>
-                    <a:p>
-                      <a:r>
-                        <a:rPr sz="1200" b="1">
+              <a:tr h="347472">
+                <a:tc>
+                  <a:txBody>
+                    <a:bodyPr wrap="square"/>
+                    <a:lstStyle/>
+                    <a:p>
+                      <a:r>
+                        <a:rPr sz="1100" b="1">
                           <a:solidFill>
                             <a:srgbClr val="1F1F1F"/>
                           </a:solidFill>
                           <a:latin typeface="Calibri"/>
                         </a:rPr>
-                        <a:t>ALEKS (adaptive system, not a chat assistant)</a:t>
+                        <a:t>Alakh AI (Physics Wallah, NCERT)</a:t>
                       </a:r>
                     </a:p>
                   </a:txBody>
@@ -7352,13 +7488,13 @@
                     <a:lstStyle/>
                     <a:p>
                       <a:r>
-                        <a:rPr sz="1200" b="0">
+                        <a:rPr sz="1100" b="0">
                           <a:solidFill>
                             <a:srgbClr val="1F1F1F"/>
                           </a:solidFill>
                           <a:latin typeface="Calibri"/>
                         </a:rPr>
-                        <a:t>Finds what a student is ready to learn next, using prerequisites</a:t>
+                        <a:t>24/7 doubt answering (text, photo, voice); questions from NCERT books</a:t>
                       </a:r>
                     </a:p>
                   </a:txBody>
@@ -7374,13 +7510,13 @@
                     <a:lstStyle/>
                     <a:p>
                       <a:r>
-                        <a:rPr sz="1200" b="0">
+                        <a:rPr sz="1100" b="0">
                           <a:solidFill>
                             <a:srgbClr val="1F1F1F"/>
                           </a:solidFill>
                           <a:latin typeface="Calibri"/>
                         </a:rPr>
-                        <a:t>No conversation or probing questions; paid, closed, fixed curriculum</a:t>
+                        <a:t>Mainly answers doubts; no probing or backtracking; closed</a:t>
                       </a:r>
                     </a:p>
                   </a:txBody>
@@ -7391,20 +7527,20 @@
                   </a:tcPr>
                 </a:tc>
               </a:tr>
-              <a:tr h="384048">
-                <a:tc>
-                  <a:txBody>
-                    <a:bodyPr wrap="square"/>
-                    <a:lstStyle/>
-                    <a:p>
-                      <a:r>
-                        <a:rPr sz="1200" b="1">
+              <a:tr h="347472">
+                <a:tc>
+                  <a:txBody>
+                    <a:bodyPr wrap="square"/>
+                    <a:lstStyle/>
+                    <a:p>
+                      <a:r>
+                        <a:rPr sz="1100" b="1">
                           <a:solidFill>
                             <a:srgbClr val="1F1F1F"/>
                           </a:solidFill>
                           <a:latin typeface="Calibri"/>
                         </a:rPr>
-                        <a:t>ASSISTments</a:t>
+                        <a:t>BYJU'S WIZ, Embibe (NCERT)</a:t>
                       </a:r>
                     </a:p>
                   </a:txBody>
@@ -7420,13 +7556,13 @@
                     <a:lstStyle/>
                     <a:p>
                       <a:r>
-                        <a:rPr sz="1200" b="0">
+                        <a:rPr sz="1100" b="0">
                           <a:solidFill>
                             <a:srgbClr val="1F1F1F"/>
                           </a:solidFill>
                           <a:latin typeface="Calibri"/>
                         </a:rPr>
-                        <a:t>Free platform for teachers to give students personalized feedback</a:t>
+                        <a:t>Knowledge tracing; Embibe tracks gaps from earlier grades; TeacherGPT guides</a:t>
                       </a:r>
                     </a:p>
                   </a:txBody>
@@ -7442,87 +7578,19 @@
                     <a:lstStyle/>
                     <a:p>
                       <a:r>
-                        <a:rPr sz="1200" b="0">
+                        <a:rPr sz="1100" b="0">
                           <a:solidFill>
                             <a:srgbClr val="1F1F1F"/>
                           </a:solidFill>
                           <a:latin typeface="Calibri"/>
                         </a:rPr>
-                        <a:t>Hints written by teachers in advance; no conversation or backtracking</a:t>
+                        <a:t>Closed, self-reported results; practice-based, not a probing conversation</a:t>
                       </a:r>
                     </a:p>
                   </a:txBody>
                   <a:tcPr marL="54864" marR="54864" marT="27432" marB="27432">
                     <a:solidFill>
                       <a:srgbClr val="FFFFFF"/>
-                    </a:solidFill>
-                  </a:tcPr>
-                </a:tc>
-              </a:tr>
-              <a:tr h="384048">
-                <a:tc>
-                  <a:txBody>
-                    <a:bodyPr wrap="square"/>
-                    <a:lstStyle/>
-                    <a:p>
-                      <a:r>
-                        <a:rPr sz="1200" b="1">
-                          <a:solidFill>
-                            <a:srgbClr val="1F1F1F"/>
-                          </a:solidFill>
-                          <a:latin typeface="Calibri"/>
-                        </a:rPr>
-                        <a:t>Course portals (IITM BS, DIKSHA)</a:t>
-                      </a:r>
-                    </a:p>
-                  </a:txBody>
-                  <a:tcPr marL="54864" marR="54864" marT="27432" marB="27432">
-                    <a:solidFill>
-                      <a:srgbClr val="F4F6F7"/>
-                    </a:solidFill>
-                  </a:tcPr>
-                </a:tc>
-                <a:tc>
-                  <a:txBody>
-                    <a:bodyPr wrap="square"/>
-                    <a:lstStyle/>
-                    <a:p>
-                      <a:r>
-                        <a:rPr sz="1200" b="0">
-                          <a:solidFill>
-                            <a:srgbClr val="1F1F1F"/>
-                          </a:solidFill>
-                          <a:latin typeface="Calibri"/>
-                        </a:rPr>
-                        <a:t>Host content</a:t>
-                      </a:r>
-                    </a:p>
-                  </a:txBody>
-                  <a:tcPr marL="54864" marR="54864" marT="27432" marB="27432">
-                    <a:solidFill>
-                      <a:srgbClr val="F4F6F7"/>
-                    </a:solidFill>
-                  </a:tcPr>
-                </a:tc>
-                <a:tc>
-                  <a:txBody>
-                    <a:bodyPr wrap="square"/>
-                    <a:lstStyle/>
-                    <a:p>
-                      <a:r>
-                        <a:rPr sz="1200" b="0">
-                          <a:solidFill>
-                            <a:srgbClr val="1F1F1F"/>
-                          </a:solidFill>
-                          <a:latin typeface="Calibri"/>
-                        </a:rPr>
-                        <a:t>Don't diagnose why a student is stuck</a:t>
-                      </a:r>
-                    </a:p>
-                  </a:txBody>
-                  <a:tcPr marL="54864" marR="54864" marT="27432" marB="27432">
-                    <a:solidFill>
-                      <a:srgbClr val="F4F6F7"/>
                     </a:solidFill>
                   </a:tcPr>
                 </a:tc>
@@ -7539,7 +7607,7 @@
         </p:nvSpPr>
         <p:spPr>
           <a:xfrm>
-            <a:off x="548640" y="4526280"/>
+            <a:off x="548640" y="4709160"/>
             <a:ext cx="11064240" cy="411480"/>
           </a:xfrm>
           <a:prstGeom prst="rect">
@@ -7565,7 +7633,7 @@
                 </a:solidFill>
                 <a:latin typeface="Calibri"/>
               </a:rPr>
-              <a:t>What we add (MATHia and Khanmigo are closest; we combine their ideas with our own models)</a:t>
+              <a:t>What we add: one open loop that converses, tracks the learner and backtracks across levels</a:t>
             </a:r>
           </a:p>
         </p:txBody>
@@ -7578,8 +7646,8 @@
         </p:nvSpPr>
         <p:spPr>
           <a:xfrm>
-            <a:off x="548640" y="4937760"/>
-            <a:ext cx="11064240" cy="1463040"/>
+            <a:off x="548640" y="5120640"/>
+            <a:ext cx="11064240" cy="1280160"/>
           </a:xfrm>
           <a:prstGeom prst="rect">
             <a:avLst/>
@@ -7598,13 +7666,13 @@
               </a:spcAft>
             </a:pPr>
             <a:r>
-              <a:rPr sz="1400" b="0">
+              <a:rPr sz="1300" b="0">
                 <a:solidFill>
                   <a:srgbClr val="1F1F1F"/>
                 </a:solidFill>
                 <a:latin typeface="Calibri"/>
               </a:rPr>
-              <a:t>•  Our own trained models as the main brain, not an LLM API with a system prompt</a:t>
+              <a:t>•  Our own trained models as the main brain (not an LLM API with a system prompt), evaluated openly</a:t>
             </a:r>
           </a:p>
           <a:p>
@@ -7614,13 +7682,13 @@
               </a:spcAft>
             </a:pPr>
             <a:r>
-              <a:rPr sz="1400" b="0">
+              <a:rPr sz="1300" b="0">
                 <a:solidFill>
                   <a:srgbClr val="1F1F1F"/>
                 </a:solidFill>
                 <a:latin typeface="Calibri"/>
               </a:rPr>
-              <a:t>•  A learner model that remembers which concepts the student knows</a:t>
+              <a:t>•  Probing questions + backtracking across levels, then climbing back up to the learner’s question</a:t>
             </a:r>
           </a:p>
           <a:p>
@@ -7630,29 +7698,13 @@
               </a:spcAft>
             </a:pPr>
             <a:r>
-              <a:rPr sz="1400" b="0">
+              <a:rPr sz="1300" b="0">
                 <a:solidFill>
                   <a:srgbClr val="1F1F1F"/>
                 </a:solidFill>
                 <a:latin typeface="Calibri"/>
               </a:rPr>
-              <a:t>•  Backtracking across levels, then climbing back up to the learner’s question</a:t>
-            </a:r>
-          </a:p>
-          <a:p>
-            <a:pPr algn="l">
-              <a:spcAft>
-                <a:spcPts val="800"/>
-              </a:spcAft>
-            </a:pPr>
-            <a:r>
-              <a:rPr sz="1400" b="0">
-                <a:solidFill>
-                  <a:srgbClr val="1F1F1F"/>
-                </a:solidFill>
-                <a:latin typeface="Calibri"/>
-              </a:rPr>
-              <a:t>•  Feedback with the exact page, video or notes to revisit; works for any course</a:t>
+              <a:t>•  Links to the exact page, video or notes; works for any subject via course packs</a:t>
             </a:r>
           </a:p>
         </p:txBody>

--- a/docs/milestone-1/Milestone1_Presentation.pptx
+++ b/docs/milestone-1/Milestone1_Presentation.pptx
@@ -4576,7 +4576,7 @@
       </p:pic>
       <p:pic>
         <p:nvPicPr>
-          <p:cNvPr id="11" name="Picture 10" descr="mrityunjay_chakraborty.jpg"/>
+          <p:cNvPr id="11" name="Picture 10" descr="hariom_pandey.jpeg"/>
           <p:cNvPicPr>
             <a:picLocks noChangeAspect="1"/>
           </p:cNvPicPr>
@@ -4590,17 +4590,41 @@
         </p:blipFill>
         <p:spPr>
           <a:xfrm>
-            <a:off x="9784080" y="3456432"/>
-            <a:ext cx="1471400" cy="402336"/>
+            <a:off x="9784080" y="2907791"/>
+            <a:ext cx="956140" cy="402336"/>
           </a:xfrm>
           <a:prstGeom prst="rect">
             <a:avLst/>
           </a:prstGeom>
         </p:spPr>
       </p:pic>
-      <p:sp>
-        <p:nvSpPr>
-          <p:cNvPr id="12" name="TextBox 11"/>
+      <p:pic>
+        <p:nvPicPr>
+          <p:cNvPr id="12" name="Picture 11" descr="mrityunjay_chakraborty.jpg"/>
+          <p:cNvPicPr>
+            <a:picLocks noChangeAspect="1"/>
+          </p:cNvPicPr>
+          <p:nvPr/>
+        </p:nvPicPr>
+        <p:blipFill>
+          <a:blip r:embed="rId5"/>
+          <a:stretch>
+            <a:fillRect/>
+          </a:stretch>
+        </p:blipFill>
+        <p:spPr>
+          <a:xfrm>
+            <a:off x="9784080" y="3456432"/>
+            <a:ext cx="1471400" cy="402336"/>
+          </a:xfrm>
+          <a:prstGeom prst="rect">
+            <a:avLst/>
+          </a:prstGeom>
+        </p:spPr>
+      </p:pic>
+      <p:sp>
+        <p:nvSpPr>
+          <p:cNvPr id="13" name="TextBox 12"/>
           <p:cNvSpPr txBox="1"/>
           <p:nvPr/>
         </p:nvSpPr>

--- a/docs/milestone-1/Milestone1_Presentation.pptx
+++ b/docs/milestone-1/Milestone1_Presentation.pptx
@@ -4,19 +4,22 @@
   <p:sldMasterIdLst>
     <p:sldMasterId id="2147483648" r:id="rId1"/>
   </p:sldMasterIdLst>
+  <p:notesMasterIdLst>
+    <p:notesMasterId r:id="rId12"/>
+  </p:notesMasterIdLst>
   <p:sldIdLst>
-    <p:sldId id="256" r:id="rId7"/>
-    <p:sldId id="257" r:id="rId8"/>
-    <p:sldId id="258" r:id="rId9"/>
-    <p:sldId id="259" r:id="rId11"/>
-    <p:sldId id="260" r:id="rId12"/>
-    <p:sldId id="261" r:id="rId13"/>
-    <p:sldId id="262" r:id="rId14"/>
-    <p:sldId id="263" r:id="rId15"/>
-    <p:sldId id="264" r:id="rId16"/>
-    <p:sldId id="265" r:id="rId17"/>
+    <p:sldId id="256" r:id="rId2"/>
+    <p:sldId id="257" r:id="rId3"/>
+    <p:sldId id="258" r:id="rId4"/>
+    <p:sldId id="259" r:id="rId5"/>
+    <p:sldId id="260" r:id="rId6"/>
+    <p:sldId id="261" r:id="rId7"/>
+    <p:sldId id="262" r:id="rId8"/>
+    <p:sldId id="263" r:id="rId9"/>
+    <p:sldId id="264" r:id="rId10"/>
+    <p:sldId id="265" r:id="rId11"/>
   </p:sldIdLst>
-  <p:sldSz cx="12191695" cy="6858000" type="screen4x3"/>
+  <p:sldSz cx="12192000" cy="6858000"/>
   <p:notesSz cx="6858000" cy="9144000"/>
   <p:defaultTextStyle>
     <a:defPPr>
@@ -113,11 +116,27 @@
       </a:defRPr>
     </a:lvl9pPr>
   </p:defaultTextStyle>
+  <p:extLst>
+    <p:ext uri="{EFAFB233-063F-42B5-8137-9DF3F51BA10A}">
+      <p15:sldGuideLst xmlns:p15="http://schemas.microsoft.com/office/powerpoint/2012/main">
+        <p15:guide id="1" orient="horz" pos="2160">
+          <p15:clr>
+            <a:srgbClr val="A4A3A4"/>
+          </p15:clr>
+        </p15:guide>
+        <p15:guide id="2" pos="2880">
+          <p15:clr>
+            <a:srgbClr val="A4A3A4"/>
+          </p15:clr>
+        </p15:guide>
+      </p15:sldGuideLst>
+    </p:ext>
+  </p:extLst>
 </p:presentation>
 </file>
 
 <file path=ppt/notesMasters/notesMaster1.xml><?xml version="1.0" encoding="utf-8"?>
-<p:notesMaster xmlns:a="http://schemas.openxmlformats.org/drawingml/2006/main" xmlns:p="http://schemas.openxmlformats.org/presentationml/2006/main" xmlns:r="http://schemas.openxmlformats.org/officeDocument/2006/relationships">
+<p:notesMaster xmlns:a="http://schemas.openxmlformats.org/drawingml/2006/main" xmlns:r="http://schemas.openxmlformats.org/officeDocument/2006/relationships" xmlns:p="http://schemas.openxmlformats.org/presentationml/2006/main">
   <p:cSld>
     <p:bg>
       <p:bgRef idx="1001">
@@ -151,7 +170,7 @@
         <p:spPr>
           <a:xfrm>
             <a:off x="0" y="0"/>
-            <a:ext cx="2971800" cy="457200"/>
+            <a:ext cx="2971800" cy="458788"/>
           </a:xfrm>
           <a:prstGeom prst="rect">
             <a:avLst/>
@@ -182,7 +201,7 @@
         <p:spPr>
           <a:xfrm>
             <a:off x="3884613" y="0"/>
-            <a:ext cx="2971800" cy="457200"/>
+            <a:ext cx="2971800" cy="458788"/>
           </a:xfrm>
           <a:prstGeom prst="rect">
             <a:avLst/>
@@ -196,9 +215,9 @@
             </a:lvl1pPr>
           </a:lstStyle>
           <a:p>
-            <a:fld id="{0F89C1C7-3DCD-1040-A9CF-14679D8B5DDD}" type="datetimeFigureOut">
+            <a:fld id="{3B8552F3-EB7E-4C2B-B4BC-CA5B5F30B662}" type="datetimeFigureOut">
               <a:rPr lang="en-US" smtClean="0"/>
-              <a:t>10/17/16</a:t>
+              <a:t>10/22/2026</a:t>
             </a:fld>
             <a:endParaRPr lang="en-US"/>
           </a:p>
@@ -216,8 +235,8 @@
         </p:nvSpPr>
         <p:spPr>
           <a:xfrm>
-            <a:off x="1143000" y="685800"/>
-            <a:ext cx="4572000" cy="3429000"/>
+            <a:off x="685800" y="1143000"/>
+            <a:ext cx="5486400" cy="3086100"/>
           </a:xfrm>
           <a:prstGeom prst="rect">
             <a:avLst/>
@@ -249,8 +268,8 @@
         </p:nvSpPr>
         <p:spPr>
           <a:xfrm>
-            <a:off x="685800" y="4343400"/>
-            <a:ext cx="5486400" cy="4114800"/>
+            <a:off x="685800" y="4400550"/>
+            <a:ext cx="5486400" cy="3600450"/>
           </a:xfrm>
           <a:prstGeom prst="rect">
             <a:avLst/>
@@ -262,38 +281,37 @@
           <a:p>
             <a:pPr lvl="0"/>
             <a:r>
-              <a:rPr lang="en-US" smtClean="0"/>
+              <a:rPr lang="en-US"/>
               <a:t>Click to edit Master text styles</a:t>
             </a:r>
           </a:p>
           <a:p>
             <a:pPr lvl="1"/>
             <a:r>
-              <a:rPr lang="en-US" smtClean="0"/>
+              <a:rPr lang="en-US"/>
               <a:t>Second level</a:t>
             </a:r>
           </a:p>
           <a:p>
             <a:pPr lvl="2"/>
             <a:r>
-              <a:rPr lang="en-US" smtClean="0"/>
+              <a:rPr lang="en-US"/>
               <a:t>Third level</a:t>
             </a:r>
           </a:p>
           <a:p>
             <a:pPr lvl="3"/>
             <a:r>
-              <a:rPr lang="en-US" smtClean="0"/>
+              <a:rPr lang="en-US"/>
               <a:t>Fourth level</a:t>
             </a:r>
           </a:p>
           <a:p>
             <a:pPr lvl="4"/>
             <a:r>
-              <a:rPr lang="en-US" smtClean="0"/>
+              <a:rPr lang="en-US"/>
               <a:t>Fifth level</a:t>
             </a:r>
-            <a:endParaRPr lang="en-US"/>
           </a:p>
         </p:txBody>
       </p:sp>
@@ -310,7 +328,7 @@
         <p:spPr>
           <a:xfrm>
             <a:off x="0" y="8685213"/>
-            <a:ext cx="2971800" cy="457200"/>
+            <a:ext cx="2971800" cy="458787"/>
           </a:xfrm>
           <a:prstGeom prst="rect">
             <a:avLst/>
@@ -341,7 +359,7 @@
         <p:spPr>
           <a:xfrm>
             <a:off x="3884613" y="8685213"/>
-            <a:ext cx="2971800" cy="457200"/>
+            <a:ext cx="2971800" cy="458787"/>
           </a:xfrm>
           <a:prstGeom prst="rect">
             <a:avLst/>
@@ -355,7 +373,7 @@
             </a:lvl1pPr>
           </a:lstStyle>
           <a:p>
-            <a:fld id="{BB5E49A5-4136-284D-997B-48E1D791AD67}" type="slidenum">
+            <a:fld id="{8A49467A-F126-4FE8-A62C-6E46DF8ADC23}" type="slidenum">
               <a:rPr lang="en-US" smtClean="0"/>
               <a:t>‹#›</a:t>
             </a:fld>
@@ -366,13 +384,13 @@
     </p:spTree>
     <p:extLst>
       <p:ext uri="{BB962C8B-B14F-4D97-AF65-F5344CB8AC3E}">
-        <p14:creationId xmlns:p14="http://schemas.microsoft.com/office/powerpoint/2010/main" val="2623252185"/>
+        <p14:creationId xmlns:p14="http://schemas.microsoft.com/office/powerpoint/2010/main" val="3206744220"/>
       </p:ext>
     </p:extLst>
   </p:cSld>
   <p:clrMap bg1="lt1" tx1="dk1" bg2="lt2" tx2="dk2" accent1="accent1" accent2="accent2" accent3="accent3" accent4="accent4" accent5="accent5" accent6="accent6" hlink="hlink" folHlink="folHlink"/>
   <p:notesStyle>
-    <a:lvl1pPr marL="0" algn="l" defTabSz="457200" rtl="0" eaLnBrk="1" latinLnBrk="0" hangingPunct="1">
+    <a:lvl1pPr marL="0" algn="l" defTabSz="914400" rtl="0" eaLnBrk="1" latinLnBrk="0" hangingPunct="1">
       <a:defRPr sz="1200" kern="1200">
         <a:solidFill>
           <a:schemeClr val="tx1"/>
@@ -382,7 +400,7 @@
         <a:cs typeface="+mn-cs"/>
       </a:defRPr>
     </a:lvl1pPr>
-    <a:lvl2pPr marL="457200" algn="l" defTabSz="457200" rtl="0" eaLnBrk="1" latinLnBrk="0" hangingPunct="1">
+    <a:lvl2pPr marL="457200" algn="l" defTabSz="914400" rtl="0" eaLnBrk="1" latinLnBrk="0" hangingPunct="1">
       <a:defRPr sz="1200" kern="1200">
         <a:solidFill>
           <a:schemeClr val="tx1"/>
@@ -392,7 +410,7 @@
         <a:cs typeface="+mn-cs"/>
       </a:defRPr>
     </a:lvl2pPr>
-    <a:lvl3pPr marL="914400" algn="l" defTabSz="457200" rtl="0" eaLnBrk="1" latinLnBrk="0" hangingPunct="1">
+    <a:lvl3pPr marL="914400" algn="l" defTabSz="914400" rtl="0" eaLnBrk="1" latinLnBrk="0" hangingPunct="1">
       <a:defRPr sz="1200" kern="1200">
         <a:solidFill>
           <a:schemeClr val="tx1"/>
@@ -402,7 +420,7 @@
         <a:cs typeface="+mn-cs"/>
       </a:defRPr>
     </a:lvl3pPr>
-    <a:lvl4pPr marL="1371600" algn="l" defTabSz="457200" rtl="0" eaLnBrk="1" latinLnBrk="0" hangingPunct="1">
+    <a:lvl4pPr marL="1371600" algn="l" defTabSz="914400" rtl="0" eaLnBrk="1" latinLnBrk="0" hangingPunct="1">
       <a:defRPr sz="1200" kern="1200">
         <a:solidFill>
           <a:schemeClr val="tx1"/>
@@ -412,7 +430,7 @@
         <a:cs typeface="+mn-cs"/>
       </a:defRPr>
     </a:lvl4pPr>
-    <a:lvl5pPr marL="1828800" algn="l" defTabSz="457200" rtl="0" eaLnBrk="1" latinLnBrk="0" hangingPunct="1">
+    <a:lvl5pPr marL="1828800" algn="l" defTabSz="914400" rtl="0" eaLnBrk="1" latinLnBrk="0" hangingPunct="1">
       <a:defRPr sz="1200" kern="1200">
         <a:solidFill>
           <a:schemeClr val="tx1"/>
@@ -422,7 +440,7 @@
         <a:cs typeface="+mn-cs"/>
       </a:defRPr>
     </a:lvl5pPr>
-    <a:lvl6pPr marL="2286000" algn="l" defTabSz="457200" rtl="0" eaLnBrk="1" latinLnBrk="0" hangingPunct="1">
+    <a:lvl6pPr marL="2286000" algn="l" defTabSz="914400" rtl="0" eaLnBrk="1" latinLnBrk="0" hangingPunct="1">
       <a:defRPr sz="1200" kern="1200">
         <a:solidFill>
           <a:schemeClr val="tx1"/>
@@ -432,7 +450,7 @@
         <a:cs typeface="+mn-cs"/>
       </a:defRPr>
     </a:lvl6pPr>
-    <a:lvl7pPr marL="2743200" algn="l" defTabSz="457200" rtl="0" eaLnBrk="1" latinLnBrk="0" hangingPunct="1">
+    <a:lvl7pPr marL="2743200" algn="l" defTabSz="914400" rtl="0" eaLnBrk="1" latinLnBrk="0" hangingPunct="1">
       <a:defRPr sz="1200" kern="1200">
         <a:solidFill>
           <a:schemeClr val="tx1"/>
@@ -442,7 +460,7 @@
         <a:cs typeface="+mn-cs"/>
       </a:defRPr>
     </a:lvl7pPr>
-    <a:lvl8pPr marL="3200400" algn="l" defTabSz="457200" rtl="0" eaLnBrk="1" latinLnBrk="0" hangingPunct="1">
+    <a:lvl8pPr marL="3200400" algn="l" defTabSz="914400" rtl="0" eaLnBrk="1" latinLnBrk="0" hangingPunct="1">
       <a:defRPr sz="1200" kern="1200">
         <a:solidFill>
           <a:schemeClr val="tx1"/>
@@ -452,7 +470,7 @@
         <a:cs typeface="+mn-cs"/>
       </a:defRPr>
     </a:lvl8pPr>
-    <a:lvl9pPr marL="3657600" algn="l" defTabSz="457200" rtl="0" eaLnBrk="1" latinLnBrk="0" hangingPunct="1">
+    <a:lvl9pPr marL="3657600" algn="l" defTabSz="914400" rtl="0" eaLnBrk="1" latinLnBrk="0" hangingPunct="1">
       <a:defRPr sz="1200" kern="1200">
         <a:solidFill>
           <a:schemeClr val="tx1"/>
@@ -467,7 +485,7 @@
 </file>
 
 <file path=ppt/notesSlides/notesSlide1.xml><?xml version="1.0" encoding="utf-8"?>
-<p:notes xmlns:a="http://schemas.openxmlformats.org/drawingml/2006/main" xmlns:p="http://schemas.openxmlformats.org/presentationml/2006/main" xmlns:r="http://schemas.openxmlformats.org/officeDocument/2006/relationships">
+<p:notes xmlns:a="http://schemas.openxmlformats.org/drawingml/2006/main" xmlns:r="http://schemas.openxmlformats.org/officeDocument/2006/relationships" xmlns:p="http://schemas.openxmlformats.org/presentationml/2006/main">
   <p:cSld>
     <p:spTree>
       <p:nvGrpSpPr>
@@ -487,7 +505,7 @@
         <p:nvSpPr>
           <p:cNvPr id="2" name="Slide Image Placeholder 1"/>
           <p:cNvSpPr>
-            <a:spLocks noGrp="1"/>
+            <a:spLocks noGrp="1" noRot="1" noChangeAspect="1"/>
           </p:cNvSpPr>
           <p:nvPr>
             <p:ph type="sldImg" idx="2"/>
@@ -502,7 +520,7 @@
             <a:spLocks noGrp="1"/>
           </p:cNvSpPr>
           <p:nvPr>
-            <p:ph type="body" idx="3" sz="quarter"/>
+            <p:ph type="body" sz="quarter" idx="3"/>
           </p:nvPr>
         </p:nvSpPr>
         <p:spPr/>
@@ -523,7 +541,7 @@
             <a:spLocks noGrp="1"/>
           </p:cNvSpPr>
           <p:nvPr>
-            <p:ph type="sldNum" idx="5" sz="quarter"/>
+            <p:ph type="sldNum" sz="quarter" idx="5"/>
           </p:nvPr>
         </p:nvSpPr>
         <p:spPr/>
@@ -537,7 +555,7 @@
 </file>
 
 <file path=ppt/notesSlides/notesSlide2.xml><?xml version="1.0" encoding="utf-8"?>
-<p:notes xmlns:a="http://schemas.openxmlformats.org/drawingml/2006/main" xmlns:p="http://schemas.openxmlformats.org/presentationml/2006/main" xmlns:r="http://schemas.openxmlformats.org/officeDocument/2006/relationships">
+<p:notes xmlns:a="http://schemas.openxmlformats.org/drawingml/2006/main" xmlns:r="http://schemas.openxmlformats.org/officeDocument/2006/relationships" xmlns:p="http://schemas.openxmlformats.org/presentationml/2006/main">
   <p:cSld>
     <p:spTree>
       <p:nvGrpSpPr>
@@ -557,7 +575,7 @@
         <p:nvSpPr>
           <p:cNvPr id="2" name="Slide Image Placeholder 1"/>
           <p:cNvSpPr>
-            <a:spLocks noGrp="1"/>
+            <a:spLocks noGrp="1" noRot="1" noChangeAspect="1"/>
           </p:cNvSpPr>
           <p:nvPr>
             <p:ph type="sldImg" idx="2"/>
@@ -572,7 +590,7 @@
             <a:spLocks noGrp="1"/>
           </p:cNvSpPr>
           <p:nvPr>
-            <p:ph type="body" idx="3" sz="quarter"/>
+            <p:ph type="body" sz="quarter" idx="3"/>
           </p:nvPr>
         </p:nvSpPr>
         <p:spPr/>
@@ -593,7 +611,7 @@
             <a:spLocks noGrp="1"/>
           </p:cNvSpPr>
           <p:nvPr>
-            <p:ph type="sldNum" idx="5" sz="quarter"/>
+            <p:ph type="sldNum" sz="quarter" idx="5"/>
           </p:nvPr>
         </p:nvSpPr>
         <p:spPr/>
@@ -607,7 +625,7 @@
 </file>
 
 <file path=ppt/notesSlides/notesSlide3.xml><?xml version="1.0" encoding="utf-8"?>
-<p:notes xmlns:a="http://schemas.openxmlformats.org/drawingml/2006/main" xmlns:p="http://schemas.openxmlformats.org/presentationml/2006/main" xmlns:r="http://schemas.openxmlformats.org/officeDocument/2006/relationships">
+<p:notes xmlns:a="http://schemas.openxmlformats.org/drawingml/2006/main" xmlns:r="http://schemas.openxmlformats.org/officeDocument/2006/relationships" xmlns:p="http://schemas.openxmlformats.org/presentationml/2006/main">
   <p:cSld>
     <p:spTree>
       <p:nvGrpSpPr>
@@ -627,7 +645,7 @@
         <p:nvSpPr>
           <p:cNvPr id="2" name="Slide Image Placeholder 1"/>
           <p:cNvSpPr>
-            <a:spLocks noGrp="1"/>
+            <a:spLocks noGrp="1" noRot="1" noChangeAspect="1"/>
           </p:cNvSpPr>
           <p:nvPr>
             <p:ph type="sldImg" idx="2"/>
@@ -642,7 +660,7 @@
             <a:spLocks noGrp="1"/>
           </p:cNvSpPr>
           <p:nvPr>
-            <p:ph type="body" idx="3" sz="quarter"/>
+            <p:ph type="body" sz="quarter" idx="3"/>
           </p:nvPr>
         </p:nvSpPr>
         <p:spPr/>
@@ -663,7 +681,7 @@
             <a:spLocks noGrp="1"/>
           </p:cNvSpPr>
           <p:nvPr>
-            <p:ph type="sldNum" idx="5" sz="quarter"/>
+            <p:ph type="sldNum" sz="quarter" idx="5"/>
           </p:nvPr>
         </p:nvSpPr>
         <p:spPr/>
@@ -714,10 +732,9 @@
           <a:lstStyle/>
           <a:p>
             <a:r>
-              <a:rPr lang="en-US" smtClean="0"/>
+              <a:rPr lang="en-US"/>
               <a:t>Click to edit Master title style</a:t>
             </a:r>
-            <a:endParaRPr lang="en-US"/>
           </a:p>
         </p:txBody>
       </p:sp>
@@ -833,10 +850,9 @@
           </a:lstStyle>
           <a:p>
             <a:r>
-              <a:rPr lang="en-US" smtClean="0"/>
+              <a:rPr lang="en-US"/>
               <a:t>Click to edit Master subtitle style</a:t>
             </a:r>
-            <a:endParaRPr lang="en-US"/>
           </a:p>
         </p:txBody>
       </p:sp>
@@ -857,7 +873,7 @@
           <a:p>
             <a:fld id="{5BCAD085-E8A6-8845-BD4E-CB4CCA059FC4}" type="datetimeFigureOut">
               <a:rPr lang="en-US" smtClean="0"/>
-              <a:t>1/27/13</a:t>
+              <a:t>10/22/2026</a:t>
             </a:fld>
             <a:endParaRPr lang="en-US"/>
           </a:p>
@@ -951,10 +967,9 @@
           <a:lstStyle/>
           <a:p>
             <a:r>
-              <a:rPr lang="en-US" smtClean="0"/>
+              <a:rPr lang="en-US"/>
               <a:t>Click to edit Master title style</a:t>
             </a:r>
-            <a:endParaRPr lang="en-US"/>
           </a:p>
         </p:txBody>
       </p:sp>
@@ -975,38 +990,37 @@
           <a:p>
             <a:pPr lvl="0"/>
             <a:r>
-              <a:rPr lang="en-US" smtClean="0"/>
+              <a:rPr lang="en-US"/>
               <a:t>Click to edit Master text styles</a:t>
             </a:r>
           </a:p>
           <a:p>
             <a:pPr lvl="1"/>
             <a:r>
-              <a:rPr lang="en-US" smtClean="0"/>
+              <a:rPr lang="en-US"/>
               <a:t>Second level</a:t>
             </a:r>
           </a:p>
           <a:p>
             <a:pPr lvl="2"/>
             <a:r>
-              <a:rPr lang="en-US" smtClean="0"/>
+              <a:rPr lang="en-US"/>
               <a:t>Third level</a:t>
             </a:r>
           </a:p>
           <a:p>
             <a:pPr lvl="3"/>
             <a:r>
-              <a:rPr lang="en-US" smtClean="0"/>
+              <a:rPr lang="en-US"/>
               <a:t>Fourth level</a:t>
             </a:r>
           </a:p>
           <a:p>
             <a:pPr lvl="4"/>
             <a:r>
-              <a:rPr lang="en-US" smtClean="0"/>
+              <a:rPr lang="en-US"/>
               <a:t>Fifth level</a:t>
             </a:r>
-            <a:endParaRPr lang="en-US"/>
           </a:p>
         </p:txBody>
       </p:sp>
@@ -1027,7 +1041,7 @@
           <a:p>
             <a:fld id="{5BCAD085-E8A6-8845-BD4E-CB4CCA059FC4}" type="datetimeFigureOut">
               <a:rPr lang="en-US" smtClean="0"/>
-              <a:t>1/27/13</a:t>
+              <a:t>10/22/2026</a:t>
             </a:fld>
             <a:endParaRPr lang="en-US"/>
           </a:p>
@@ -1126,10 +1140,9 @@
           <a:lstStyle/>
           <a:p>
             <a:r>
-              <a:rPr lang="en-US" smtClean="0"/>
+              <a:rPr lang="en-US"/>
               <a:t>Click to edit Master title style</a:t>
             </a:r>
-            <a:endParaRPr lang="en-US"/>
           </a:p>
         </p:txBody>
       </p:sp>
@@ -1155,38 +1168,37 @@
           <a:p>
             <a:pPr lvl="0"/>
             <a:r>
-              <a:rPr lang="en-US" smtClean="0"/>
+              <a:rPr lang="en-US"/>
               <a:t>Click to edit Master text styles</a:t>
             </a:r>
           </a:p>
           <a:p>
             <a:pPr lvl="1"/>
             <a:r>
-              <a:rPr lang="en-US" smtClean="0"/>
+              <a:rPr lang="en-US"/>
               <a:t>Second level</a:t>
             </a:r>
           </a:p>
           <a:p>
             <a:pPr lvl="2"/>
             <a:r>
-              <a:rPr lang="en-US" smtClean="0"/>
+              <a:rPr lang="en-US"/>
               <a:t>Third level</a:t>
             </a:r>
           </a:p>
           <a:p>
             <a:pPr lvl="3"/>
             <a:r>
-              <a:rPr lang="en-US" smtClean="0"/>
+              <a:rPr lang="en-US"/>
               <a:t>Fourth level</a:t>
             </a:r>
           </a:p>
           <a:p>
             <a:pPr lvl="4"/>
             <a:r>
-              <a:rPr lang="en-US" smtClean="0"/>
+              <a:rPr lang="en-US"/>
               <a:t>Fifth level</a:t>
             </a:r>
-            <a:endParaRPr lang="en-US"/>
           </a:p>
         </p:txBody>
       </p:sp>
@@ -1207,7 +1219,7 @@
           <a:p>
             <a:fld id="{5BCAD085-E8A6-8845-BD4E-CB4CCA059FC4}" type="datetimeFigureOut">
               <a:rPr lang="en-US" smtClean="0"/>
-              <a:t>1/27/13</a:t>
+              <a:t>10/22/2026</a:t>
             </a:fld>
             <a:endParaRPr lang="en-US"/>
           </a:p>
@@ -1301,10 +1313,9 @@
           <a:lstStyle/>
           <a:p>
             <a:r>
-              <a:rPr lang="en-US" smtClean="0"/>
+              <a:rPr lang="en-US"/>
               <a:t>Click to edit Master title style</a:t>
             </a:r>
-            <a:endParaRPr lang="en-US"/>
           </a:p>
         </p:txBody>
       </p:sp>
@@ -1325,38 +1336,37 @@
           <a:p>
             <a:pPr lvl="0"/>
             <a:r>
-              <a:rPr lang="en-US" smtClean="0"/>
+              <a:rPr lang="en-US"/>
               <a:t>Click to edit Master text styles</a:t>
             </a:r>
           </a:p>
           <a:p>
             <a:pPr lvl="1"/>
             <a:r>
-              <a:rPr lang="en-US" smtClean="0"/>
+              <a:rPr lang="en-US"/>
               <a:t>Second level</a:t>
             </a:r>
           </a:p>
           <a:p>
             <a:pPr lvl="2"/>
             <a:r>
-              <a:rPr lang="en-US" smtClean="0"/>
+              <a:rPr lang="en-US"/>
               <a:t>Third level</a:t>
             </a:r>
           </a:p>
           <a:p>
             <a:pPr lvl="3"/>
             <a:r>
-              <a:rPr lang="en-US" smtClean="0"/>
+              <a:rPr lang="en-US"/>
               <a:t>Fourth level</a:t>
             </a:r>
           </a:p>
           <a:p>
             <a:pPr lvl="4"/>
             <a:r>
-              <a:rPr lang="en-US" smtClean="0"/>
+              <a:rPr lang="en-US"/>
               <a:t>Fifth level</a:t>
             </a:r>
-            <a:endParaRPr lang="en-US"/>
           </a:p>
         </p:txBody>
       </p:sp>
@@ -1377,7 +1387,7 @@
           <a:p>
             <a:fld id="{5BCAD085-E8A6-8845-BD4E-CB4CCA059FC4}" type="datetimeFigureOut">
               <a:rPr lang="en-US" smtClean="0"/>
-              <a:t>1/27/13</a:t>
+              <a:t>10/22/2026</a:t>
             </a:fld>
             <a:endParaRPr lang="en-US"/>
           </a:p>
@@ -1480,10 +1490,9 @@
           </a:lstStyle>
           <a:p>
             <a:r>
-              <a:rPr lang="en-US" smtClean="0"/>
+              <a:rPr lang="en-US"/>
               <a:t>Click to edit Master title style</a:t>
             </a:r>
-            <a:endParaRPr lang="en-US"/>
           </a:p>
         </p:txBody>
       </p:sp>
@@ -1600,7 +1609,7 @@
           <a:p>
             <a:pPr lvl="0"/>
             <a:r>
-              <a:rPr lang="en-US" smtClean="0"/>
+              <a:rPr lang="en-US"/>
               <a:t>Click to edit Master text styles</a:t>
             </a:r>
           </a:p>
@@ -1623,7 +1632,7 @@
           <a:p>
             <a:fld id="{5BCAD085-E8A6-8845-BD4E-CB4CCA059FC4}" type="datetimeFigureOut">
               <a:rPr lang="en-US" smtClean="0"/>
-              <a:t>1/27/13</a:t>
+              <a:t>10/22/2026</a:t>
             </a:fld>
             <a:endParaRPr lang="en-US"/>
           </a:p>
@@ -1717,10 +1726,9 @@
           <a:lstStyle/>
           <a:p>
             <a:r>
-              <a:rPr lang="en-US" smtClean="0"/>
+              <a:rPr lang="en-US"/>
               <a:t>Click to edit Master title style</a:t>
             </a:r>
-            <a:endParaRPr lang="en-US"/>
           </a:p>
         </p:txBody>
       </p:sp>
@@ -1774,38 +1782,37 @@
           <a:p>
             <a:pPr lvl="0"/>
             <a:r>
-              <a:rPr lang="en-US" smtClean="0"/>
+              <a:rPr lang="en-US"/>
               <a:t>Click to edit Master text styles</a:t>
             </a:r>
           </a:p>
           <a:p>
             <a:pPr lvl="1"/>
             <a:r>
-              <a:rPr lang="en-US" smtClean="0"/>
+              <a:rPr lang="en-US"/>
               <a:t>Second level</a:t>
             </a:r>
           </a:p>
           <a:p>
             <a:pPr lvl="2"/>
             <a:r>
-              <a:rPr lang="en-US" smtClean="0"/>
+              <a:rPr lang="en-US"/>
               <a:t>Third level</a:t>
             </a:r>
           </a:p>
           <a:p>
             <a:pPr lvl="3"/>
             <a:r>
-              <a:rPr lang="en-US" smtClean="0"/>
+              <a:rPr lang="en-US"/>
               <a:t>Fourth level</a:t>
             </a:r>
           </a:p>
           <a:p>
             <a:pPr lvl="4"/>
             <a:r>
-              <a:rPr lang="en-US" smtClean="0"/>
+              <a:rPr lang="en-US"/>
               <a:t>Fifth level</a:t>
             </a:r>
-            <a:endParaRPr lang="en-US"/>
           </a:p>
         </p:txBody>
       </p:sp>
@@ -1859,38 +1866,37 @@
           <a:p>
             <a:pPr lvl="0"/>
             <a:r>
-              <a:rPr lang="en-US" smtClean="0"/>
+              <a:rPr lang="en-US"/>
               <a:t>Click to edit Master text styles</a:t>
             </a:r>
           </a:p>
           <a:p>
             <a:pPr lvl="1"/>
             <a:r>
-              <a:rPr lang="en-US" smtClean="0"/>
+              <a:rPr lang="en-US"/>
               <a:t>Second level</a:t>
             </a:r>
           </a:p>
           <a:p>
             <a:pPr lvl="2"/>
             <a:r>
-              <a:rPr lang="en-US" smtClean="0"/>
+              <a:rPr lang="en-US"/>
               <a:t>Third level</a:t>
             </a:r>
           </a:p>
           <a:p>
             <a:pPr lvl="3"/>
             <a:r>
-              <a:rPr lang="en-US" smtClean="0"/>
+              <a:rPr lang="en-US"/>
               <a:t>Fourth level</a:t>
             </a:r>
           </a:p>
           <a:p>
             <a:pPr lvl="4"/>
             <a:r>
-              <a:rPr lang="en-US" smtClean="0"/>
+              <a:rPr lang="en-US"/>
               <a:t>Fifth level</a:t>
             </a:r>
-            <a:endParaRPr lang="en-US"/>
           </a:p>
         </p:txBody>
       </p:sp>
@@ -1911,7 +1917,7 @@
           <a:p>
             <a:fld id="{5BCAD085-E8A6-8845-BD4E-CB4CCA059FC4}" type="datetimeFigureOut">
               <a:rPr lang="en-US" smtClean="0"/>
-              <a:t>1/27/13</a:t>
+              <a:t>10/22/2026</a:t>
             </a:fld>
             <a:endParaRPr lang="en-US"/>
           </a:p>
@@ -2009,10 +2015,9 @@
           </a:lstStyle>
           <a:p>
             <a:r>
-              <a:rPr lang="en-US" smtClean="0"/>
+              <a:rPr lang="en-US"/>
               <a:t>Click to edit Master title style</a:t>
             </a:r>
-            <a:endParaRPr lang="en-US"/>
           </a:p>
         </p:txBody>
       </p:sp>
@@ -2075,7 +2080,7 @@
           <a:p>
             <a:pPr lvl="0"/>
             <a:r>
-              <a:rPr lang="en-US" smtClean="0"/>
+              <a:rPr lang="en-US"/>
               <a:t>Click to edit Master text styles</a:t>
             </a:r>
           </a:p>
@@ -2131,38 +2136,37 @@
           <a:p>
             <a:pPr lvl="0"/>
             <a:r>
-              <a:rPr lang="en-US" smtClean="0"/>
+              <a:rPr lang="en-US"/>
               <a:t>Click to edit Master text styles</a:t>
             </a:r>
           </a:p>
           <a:p>
             <a:pPr lvl="1"/>
             <a:r>
-              <a:rPr lang="en-US" smtClean="0"/>
+              <a:rPr lang="en-US"/>
               <a:t>Second level</a:t>
             </a:r>
           </a:p>
           <a:p>
             <a:pPr lvl="2"/>
             <a:r>
-              <a:rPr lang="en-US" smtClean="0"/>
+              <a:rPr lang="en-US"/>
               <a:t>Third level</a:t>
             </a:r>
           </a:p>
           <a:p>
             <a:pPr lvl="3"/>
             <a:r>
-              <a:rPr lang="en-US" smtClean="0"/>
+              <a:rPr lang="en-US"/>
               <a:t>Fourth level</a:t>
             </a:r>
           </a:p>
           <a:p>
             <a:pPr lvl="4"/>
             <a:r>
-              <a:rPr lang="en-US" smtClean="0"/>
+              <a:rPr lang="en-US"/>
               <a:t>Fifth level</a:t>
             </a:r>
-            <a:endParaRPr lang="en-US"/>
           </a:p>
         </p:txBody>
       </p:sp>
@@ -2225,7 +2229,7 @@
           <a:p>
             <a:pPr lvl="0"/>
             <a:r>
-              <a:rPr lang="en-US" smtClean="0"/>
+              <a:rPr lang="en-US"/>
               <a:t>Click to edit Master text styles</a:t>
             </a:r>
           </a:p>
@@ -2281,38 +2285,37 @@
           <a:p>
             <a:pPr lvl="0"/>
             <a:r>
-              <a:rPr lang="en-US" smtClean="0"/>
+              <a:rPr lang="en-US"/>
               <a:t>Click to edit Master text styles</a:t>
             </a:r>
           </a:p>
           <a:p>
             <a:pPr lvl="1"/>
             <a:r>
-              <a:rPr lang="en-US" smtClean="0"/>
+              <a:rPr lang="en-US"/>
               <a:t>Second level</a:t>
             </a:r>
           </a:p>
           <a:p>
             <a:pPr lvl="2"/>
             <a:r>
-              <a:rPr lang="en-US" smtClean="0"/>
+              <a:rPr lang="en-US"/>
               <a:t>Third level</a:t>
             </a:r>
           </a:p>
           <a:p>
             <a:pPr lvl="3"/>
             <a:r>
-              <a:rPr lang="en-US" smtClean="0"/>
+              <a:rPr lang="en-US"/>
               <a:t>Fourth level</a:t>
             </a:r>
           </a:p>
           <a:p>
             <a:pPr lvl="4"/>
             <a:r>
-              <a:rPr lang="en-US" smtClean="0"/>
+              <a:rPr lang="en-US"/>
               <a:t>Fifth level</a:t>
             </a:r>
-            <a:endParaRPr lang="en-US"/>
           </a:p>
         </p:txBody>
       </p:sp>
@@ -2333,7 +2336,7 @@
           <a:p>
             <a:fld id="{5BCAD085-E8A6-8845-BD4E-CB4CCA059FC4}" type="datetimeFigureOut">
               <a:rPr lang="en-US" smtClean="0"/>
-              <a:t>1/27/13</a:t>
+              <a:t>10/22/2026</a:t>
             </a:fld>
             <a:endParaRPr lang="en-US"/>
           </a:p>
@@ -2427,10 +2430,9 @@
           <a:lstStyle/>
           <a:p>
             <a:r>
-              <a:rPr lang="en-US" smtClean="0"/>
+              <a:rPr lang="en-US"/>
               <a:t>Click to edit Master title style</a:t>
             </a:r>
-            <a:endParaRPr lang="en-US"/>
           </a:p>
         </p:txBody>
       </p:sp>
@@ -2451,7 +2453,7 @@
           <a:p>
             <a:fld id="{5BCAD085-E8A6-8845-BD4E-CB4CCA059FC4}" type="datetimeFigureOut">
               <a:rPr lang="en-US" smtClean="0"/>
-              <a:t>1/27/13</a:t>
+              <a:t>10/22/2026</a:t>
             </a:fld>
             <a:endParaRPr lang="en-US"/>
           </a:p>
@@ -2546,7 +2548,7 @@
           <a:p>
             <a:fld id="{5BCAD085-E8A6-8845-BD4E-CB4CCA059FC4}" type="datetimeFigureOut">
               <a:rPr lang="en-US" smtClean="0"/>
-              <a:t>1/27/13</a:t>
+              <a:t>10/22/2026</a:t>
             </a:fld>
             <a:endParaRPr lang="en-US"/>
           </a:p>
@@ -2649,10 +2651,9 @@
           </a:lstStyle>
           <a:p>
             <a:r>
-              <a:rPr lang="en-US" smtClean="0"/>
+              <a:rPr lang="en-US"/>
               <a:t>Click to edit Master title style</a:t>
             </a:r>
-            <a:endParaRPr lang="en-US"/>
           </a:p>
         </p:txBody>
       </p:sp>
@@ -2706,38 +2707,37 @@
           <a:p>
             <a:pPr lvl="0"/>
             <a:r>
-              <a:rPr lang="en-US" smtClean="0"/>
+              <a:rPr lang="en-US"/>
               <a:t>Click to edit Master text styles</a:t>
             </a:r>
           </a:p>
           <a:p>
             <a:pPr lvl="1"/>
             <a:r>
-              <a:rPr lang="en-US" smtClean="0"/>
+              <a:rPr lang="en-US"/>
               <a:t>Second level</a:t>
             </a:r>
           </a:p>
           <a:p>
             <a:pPr lvl="2"/>
             <a:r>
-              <a:rPr lang="en-US" smtClean="0"/>
+              <a:rPr lang="en-US"/>
               <a:t>Third level</a:t>
             </a:r>
           </a:p>
           <a:p>
             <a:pPr lvl="3"/>
             <a:r>
-              <a:rPr lang="en-US" smtClean="0"/>
+              <a:rPr lang="en-US"/>
               <a:t>Fourth level</a:t>
             </a:r>
           </a:p>
           <a:p>
             <a:pPr lvl="4"/>
             <a:r>
-              <a:rPr lang="en-US" smtClean="0"/>
+              <a:rPr lang="en-US"/>
               <a:t>Fifth level</a:t>
             </a:r>
-            <a:endParaRPr lang="en-US"/>
           </a:p>
         </p:txBody>
       </p:sp>
@@ -2800,7 +2800,7 @@
           <a:p>
             <a:pPr lvl="0"/>
             <a:r>
-              <a:rPr lang="en-US" smtClean="0"/>
+              <a:rPr lang="en-US"/>
               <a:t>Click to edit Master text styles</a:t>
             </a:r>
           </a:p>
@@ -2823,7 +2823,7 @@
           <a:p>
             <a:fld id="{5BCAD085-E8A6-8845-BD4E-CB4CCA059FC4}" type="datetimeFigureOut">
               <a:rPr lang="en-US" smtClean="0"/>
-              <a:t>1/27/13</a:t>
+              <a:t>10/22/2026</a:t>
             </a:fld>
             <a:endParaRPr lang="en-US"/>
           </a:p>
@@ -2926,10 +2926,9 @@
           </a:lstStyle>
           <a:p>
             <a:r>
-              <a:rPr lang="en-US" smtClean="0"/>
+              <a:rPr lang="en-US"/>
               <a:t>Click to edit Master title style</a:t>
             </a:r>
-            <a:endParaRPr lang="en-US"/>
           </a:p>
         </p:txBody>
       </p:sp>
@@ -3053,7 +3052,7 @@
           <a:p>
             <a:pPr lvl="0"/>
             <a:r>
-              <a:rPr lang="en-US" smtClean="0"/>
+              <a:rPr lang="en-US"/>
               <a:t>Click to edit Master text styles</a:t>
             </a:r>
           </a:p>
@@ -3076,7 +3075,7 @@
           <a:p>
             <a:fld id="{5BCAD085-E8A6-8845-BD4E-CB4CCA059FC4}" type="datetimeFigureOut">
               <a:rPr lang="en-US" smtClean="0"/>
-              <a:t>1/27/13</a:t>
+              <a:t>10/22/2026</a:t>
             </a:fld>
             <a:endParaRPr lang="en-US"/>
           </a:p>
@@ -3185,10 +3184,9 @@
           <a:lstStyle/>
           <a:p>
             <a:r>
-              <a:rPr lang="en-US" smtClean="0"/>
+              <a:rPr lang="en-US"/>
               <a:t>Click to edit Master title style</a:t>
             </a:r>
-            <a:endParaRPr lang="en-US"/>
           </a:p>
         </p:txBody>
       </p:sp>
@@ -3219,38 +3217,37 @@
           <a:p>
             <a:pPr lvl="0"/>
             <a:r>
-              <a:rPr lang="en-US" smtClean="0"/>
+              <a:rPr lang="en-US"/>
               <a:t>Click to edit Master text styles</a:t>
             </a:r>
           </a:p>
           <a:p>
             <a:pPr lvl="1"/>
             <a:r>
-              <a:rPr lang="en-US" smtClean="0"/>
+              <a:rPr lang="en-US"/>
               <a:t>Second level</a:t>
             </a:r>
           </a:p>
           <a:p>
             <a:pPr lvl="2"/>
             <a:r>
-              <a:rPr lang="en-US" smtClean="0"/>
+              <a:rPr lang="en-US"/>
               <a:t>Third level</a:t>
             </a:r>
           </a:p>
           <a:p>
             <a:pPr lvl="3"/>
             <a:r>
-              <a:rPr lang="en-US" smtClean="0"/>
+              <a:rPr lang="en-US"/>
               <a:t>Fourth level</a:t>
             </a:r>
           </a:p>
           <a:p>
             <a:pPr lvl="4"/>
             <a:r>
-              <a:rPr lang="en-US" smtClean="0"/>
+              <a:rPr lang="en-US"/>
               <a:t>Fifth level</a:t>
             </a:r>
-            <a:endParaRPr lang="en-US"/>
           </a:p>
         </p:txBody>
       </p:sp>
@@ -3289,7 +3286,7 @@
           <a:p>
             <a:fld id="{5BCAD085-E8A6-8845-BD4E-CB4CCA059FC4}" type="datetimeFigureOut">
               <a:rPr lang="en-US" smtClean="0"/>
-              <a:t>1/27/13</a:t>
+              <a:t>10/22/2026</a:t>
             </a:fld>
             <a:endParaRPr lang="en-US"/>
           </a:p>
@@ -3648,7 +3645,7 @@
 </file>
 
 <file path=ppt/slides/slide1.xml><?xml version="1.0" encoding="utf-8"?>
-<p:sld xmlns:a="http://schemas.openxmlformats.org/drawingml/2006/main" xmlns:p="http://schemas.openxmlformats.org/presentationml/2006/main" xmlns:r="http://schemas.openxmlformats.org/officeDocument/2006/relationships">
+<p:sld xmlns:a="http://schemas.openxmlformats.org/drawingml/2006/main" xmlns:r="http://schemas.openxmlformats.org/officeDocument/2006/relationships" xmlns:p="http://schemas.openxmlformats.org/presentationml/2006/main">
   <p:cSld>
     <p:spTree>
       <p:nvGrpSpPr>
@@ -3656,7 +3653,14 @@
         <p:cNvGrpSpPr/>
         <p:nvPr/>
       </p:nvGrpSpPr>
-      <p:grpSpPr/>
+      <p:grpSpPr>
+        <a:xfrm>
+          <a:off x="0" y="0"/>
+          <a:ext cx="0" cy="0"/>
+          <a:chOff x="0" y="0"/>
+          <a:chExt cx="0" cy="0"/>
+        </a:xfrm>
+      </p:grpSpPr>
       <p:sp>
         <p:nvSpPr>
           <p:cNvPr id="2" name="Rectangle 1"/>
@@ -3698,6 +3702,7 @@
           <a:lstStyle/>
           <a:p>
             <a:pPr algn="ctr"/>
+            <a:endParaRPr/>
           </a:p>
         </p:txBody>
       </p:sp>
@@ -3742,6 +3747,7 @@
           <a:lstStyle/>
           <a:p>
             <a:pPr algn="ctr"/>
+            <a:endParaRPr/>
           </a:p>
         </p:txBody>
       </p:sp>
@@ -3762,7 +3768,7 @@
           <a:noFill/>
         </p:spPr>
         <p:txBody>
-          <a:bodyPr wrap="square" anchor="t" lIns="45720" rIns="45720">
+          <a:bodyPr wrap="square" lIns="45720" rIns="45720" anchor="t">
             <a:spAutoFit/>
           </a:bodyPr>
           <a:lstStyle/>
@@ -3817,7 +3823,7 @@
           <a:noFill/>
         </p:spPr>
         <p:txBody>
-          <a:bodyPr wrap="square" anchor="t" lIns="45720" rIns="45720">
+          <a:bodyPr wrap="square" lIns="45720" rIns="45720" anchor="t">
             <a:spAutoFit/>
           </a:bodyPr>
           <a:lstStyle/>
@@ -3856,7 +3862,7 @@
           <a:noFill/>
         </p:spPr>
         <p:txBody>
-          <a:bodyPr wrap="square" anchor="t" lIns="45720" rIns="45720">
+          <a:bodyPr wrap="square" lIns="45720" rIns="45720" anchor="t">
             <a:spAutoFit/>
           </a:bodyPr>
           <a:lstStyle/>
@@ -3911,7 +3917,7 @@
           <a:noFill/>
         </p:spPr>
         <p:txBody>
-          <a:bodyPr wrap="square" anchor="t" lIns="45720" rIns="45720">
+          <a:bodyPr wrap="square" lIns="45720" rIns="45720" anchor="t">
             <a:spAutoFit/>
           </a:bodyPr>
           <a:lstStyle/>
@@ -3942,7 +3948,7 @@
 </file>
 
 <file path=ppt/slides/slide10.xml><?xml version="1.0" encoding="utf-8"?>
-<p:sld xmlns:a="http://schemas.openxmlformats.org/drawingml/2006/main" xmlns:p="http://schemas.openxmlformats.org/presentationml/2006/main" xmlns:r="http://schemas.openxmlformats.org/officeDocument/2006/relationships">
+<p:sld xmlns:a="http://schemas.openxmlformats.org/drawingml/2006/main" xmlns:r="http://schemas.openxmlformats.org/officeDocument/2006/relationships" xmlns:p="http://schemas.openxmlformats.org/presentationml/2006/main">
   <p:cSld>
     <p:spTree>
       <p:nvGrpSpPr>
@@ -3950,7 +3956,14 @@
         <p:cNvGrpSpPr/>
         <p:nvPr/>
       </p:nvGrpSpPr>
-      <p:grpSpPr/>
+      <p:grpSpPr>
+        <a:xfrm>
+          <a:off x="0" y="0"/>
+          <a:ext cx="0" cy="0"/>
+          <a:chOff x="0" y="0"/>
+          <a:chExt cx="0" cy="0"/>
+        </a:xfrm>
+      </p:grpSpPr>
       <p:sp>
         <p:nvSpPr>
           <p:cNvPr id="2" name="Rectangle 1"/>
@@ -3992,6 +4005,7 @@
           <a:lstStyle/>
           <a:p>
             <a:pPr algn="ctr"/>
+            <a:endParaRPr/>
           </a:p>
         </p:txBody>
       </p:sp>
@@ -4012,7 +4026,7 @@
           <a:noFill/>
         </p:spPr>
         <p:txBody>
-          <a:bodyPr wrap="square" anchor="t" lIns="45720" rIns="45720">
+          <a:bodyPr wrap="square" lIns="45720" rIns="45720" anchor="t">
             <a:spAutoFit/>
           </a:bodyPr>
           <a:lstStyle/>
@@ -4051,7 +4065,7 @@
           <a:noFill/>
         </p:spPr>
         <p:txBody>
-          <a:bodyPr wrap="square" anchor="t" lIns="45720" rIns="45720">
+          <a:bodyPr wrap="square" lIns="45720" rIns="45720" anchor="t">
             <a:spAutoFit/>
           </a:bodyPr>
           <a:lstStyle/>
@@ -4090,7 +4104,7 @@
           <a:noFill/>
         </p:spPr>
         <p:txBody>
-          <a:bodyPr wrap="square" anchor="t" lIns="45720" rIns="45720">
+          <a:bodyPr wrap="square" lIns="45720" rIns="45720" anchor="t">
             <a:spAutoFit/>
           </a:bodyPr>
           <a:lstStyle/>
@@ -4129,7 +4143,7 @@
           <a:noFill/>
         </p:spPr>
         <p:txBody>
-          <a:bodyPr wrap="square" anchor="t" lIns="45720" rIns="45720">
+          <a:bodyPr wrap="square" lIns="45720" rIns="45720" anchor="t">
             <a:spAutoFit/>
           </a:bodyPr>
           <a:lstStyle/>
@@ -4168,7 +4182,7 @@
           <a:noFill/>
         </p:spPr>
         <p:txBody>
-          <a:bodyPr wrap="square" anchor="t" lIns="45720" rIns="45720">
+          <a:bodyPr wrap="square" lIns="45720" rIns="45720" anchor="t">
             <a:spAutoFit/>
           </a:bodyPr>
           <a:lstStyle/>
@@ -4289,13 +4303,25 @@
                 <a:tableStyleId>{5C22544A-7EE6-4342-B048-85BDC9FD1C3A}</a:tableStyleId>
               </a:tblPr>
               <a:tblGrid>
-                <a:gridCol w="3291840"/>
-                <a:gridCol w="2011680"/>
+                <a:gridCol w="3291840">
+                  <a:extLst>
+                    <a:ext uri="{9D8B030D-6E8A-4147-A177-3AD203B41FA5}">
+                      <a16:colId xmlns:a16="http://schemas.microsoft.com/office/drawing/2014/main" val="20000"/>
+                    </a:ext>
+                  </a:extLst>
+                </a:gridCol>
+                <a:gridCol w="2011680">
+                  <a:extLst>
+                    <a:ext uri="{9D8B030D-6E8A-4147-A177-3AD203B41FA5}">
+                      <a16:colId xmlns:a16="http://schemas.microsoft.com/office/drawing/2014/main" val="20001"/>
+                    </a:ext>
+                  </a:extLst>
+                </a:gridCol>
               </a:tblGrid>
               <a:tr h="548640">
                 <a:tc>
                   <a:txBody>
-                    <a:bodyPr wrap="square"/>
+                    <a:bodyPr/>
                     <a:lstStyle/>
                     <a:p>
                       <a:r>
@@ -4317,7 +4343,7 @@
                 </a:tc>
                 <a:tc>
                   <a:txBody>
-                    <a:bodyPr wrap="square"/>
+                    <a:bodyPr/>
                     <a:lstStyle/>
                     <a:p>
                       <a:r>
@@ -4337,11 +4363,16 @@
                     </a:solidFill>
                   </a:tcPr>
                 </a:tc>
+                <a:extLst>
+                  <a:ext uri="{0D108BD9-81ED-4DB2-BD59-A6C34878D82A}">
+                    <a16:rowId xmlns:a16="http://schemas.microsoft.com/office/drawing/2014/main" val="10000"/>
+                  </a:ext>
+                </a:extLst>
               </a:tr>
               <a:tr h="548640">
                 <a:tc>
                   <a:txBody>
-                    <a:bodyPr wrap="square"/>
+                    <a:bodyPr/>
                     <a:lstStyle/>
                     <a:p>
                       <a:r>
@@ -4363,18 +4394,10 @@
                 </a:tc>
                 <a:tc>
                   <a:txBody>
-                    <a:bodyPr wrap="square"/>
+                    <a:bodyPr/>
                     <a:lstStyle/>
                     <a:p>
-                      <a:r>
-                        <a:rPr sz="1300" b="0">
-                          <a:solidFill>
-                            <a:srgbClr val="1F1F1F"/>
-                          </a:solidFill>
-                          <a:latin typeface="Calibri"/>
-                        </a:rPr>
-                        <a:t/>
-                      </a:r>
+                      <a:endParaRPr/>
                     </a:p>
                   </a:txBody>
                   <a:tcPr marL="54864" marR="54864" marT="27432" marB="27432">
@@ -4383,11 +4406,16 @@
                     </a:solidFill>
                   </a:tcPr>
                 </a:tc>
+                <a:extLst>
+                  <a:ext uri="{0D108BD9-81ED-4DB2-BD59-A6C34878D82A}">
+                    <a16:rowId xmlns:a16="http://schemas.microsoft.com/office/drawing/2014/main" val="10001"/>
+                  </a:ext>
+                </a:extLst>
               </a:tr>
               <a:tr h="548640">
                 <a:tc>
                   <a:txBody>
-                    <a:bodyPr wrap="square"/>
+                    <a:bodyPr/>
                     <a:lstStyle/>
                     <a:p>
                       <a:r>
@@ -4409,18 +4437,10 @@
                 </a:tc>
                 <a:tc>
                   <a:txBody>
-                    <a:bodyPr wrap="square"/>
+                    <a:bodyPr/>
                     <a:lstStyle/>
                     <a:p>
-                      <a:r>
-                        <a:rPr sz="1300" b="0">
-                          <a:solidFill>
-                            <a:srgbClr val="1F1F1F"/>
-                          </a:solidFill>
-                          <a:latin typeface="Calibri"/>
-                        </a:rPr>
-                        <a:t/>
-                      </a:r>
+                      <a:endParaRPr/>
                     </a:p>
                   </a:txBody>
                   <a:tcPr marL="54864" marR="54864" marT="27432" marB="27432">
@@ -4429,11 +4449,16 @@
                     </a:solidFill>
                   </a:tcPr>
                 </a:tc>
+                <a:extLst>
+                  <a:ext uri="{0D108BD9-81ED-4DB2-BD59-A6C34878D82A}">
+                    <a16:rowId xmlns:a16="http://schemas.microsoft.com/office/drawing/2014/main" val="10002"/>
+                  </a:ext>
+                </a:extLst>
               </a:tr>
               <a:tr h="548640">
                 <a:tc>
                   <a:txBody>
-                    <a:bodyPr wrap="square"/>
+                    <a:bodyPr/>
                     <a:lstStyle/>
                     <a:p>
                       <a:r>
@@ -4455,18 +4480,10 @@
                 </a:tc>
                 <a:tc>
                   <a:txBody>
-                    <a:bodyPr wrap="square"/>
+                    <a:bodyPr/>
                     <a:lstStyle/>
                     <a:p>
-                      <a:r>
-                        <a:rPr sz="1300" b="0">
-                          <a:solidFill>
-                            <a:srgbClr val="1F1F1F"/>
-                          </a:solidFill>
-                          <a:latin typeface="Calibri"/>
-                        </a:rPr>
-                        <a:t/>
-                      </a:r>
+                      <a:endParaRPr/>
                     </a:p>
                   </a:txBody>
                   <a:tcPr marL="54864" marR="54864" marT="27432" marB="27432">
@@ -4475,11 +4492,16 @@
                     </a:solidFill>
                   </a:tcPr>
                 </a:tc>
+                <a:extLst>
+                  <a:ext uri="{0D108BD9-81ED-4DB2-BD59-A6C34878D82A}">
+                    <a16:rowId xmlns:a16="http://schemas.microsoft.com/office/drawing/2014/main" val="10003"/>
+                  </a:ext>
+                </a:extLst>
               </a:tr>
               <a:tr h="548640">
                 <a:tc>
                   <a:txBody>
-                    <a:bodyPr wrap="square"/>
+                    <a:bodyPr/>
                     <a:lstStyle/>
                     <a:p>
                       <a:r>
@@ -4501,18 +4523,10 @@
                 </a:tc>
                 <a:tc>
                   <a:txBody>
-                    <a:bodyPr wrap="square"/>
+                    <a:bodyPr/>
                     <a:lstStyle/>
                     <a:p>
-                      <a:r>
-                        <a:rPr sz="1300" b="0">
-                          <a:solidFill>
-                            <a:srgbClr val="1F1F1F"/>
-                          </a:solidFill>
-                          <a:latin typeface="Calibri"/>
-                        </a:rPr>
-                        <a:t/>
-                      </a:r>
+                      <a:endParaRPr/>
                     </a:p>
                   </a:txBody>
                   <a:tcPr marL="54864" marR="54864" marT="27432" marB="27432">
@@ -4521,6 +4535,11 @@
                     </a:solidFill>
                   </a:tcPr>
                 </a:tc>
+                <a:extLst>
+                  <a:ext uri="{0D108BD9-81ED-4DB2-BD59-A6C34878D82A}">
+                    <a16:rowId xmlns:a16="http://schemas.microsoft.com/office/drawing/2014/main" val="10004"/>
+                  </a:ext>
+                </a:extLst>
               </a:tr>
             </a:tbl>
           </a:graphicData>
@@ -4639,7 +4658,7 @@
           <a:noFill/>
         </p:spPr>
         <p:txBody>
-          <a:bodyPr wrap="square" anchor="t" lIns="45720" rIns="45720">
+          <a:bodyPr wrap="square" lIns="45720" rIns="45720" anchor="t">
             <a:spAutoFit/>
           </a:bodyPr>
           <a:lstStyle/>
@@ -4670,7 +4689,7 @@
 </file>
 
 <file path=ppt/slides/slide2.xml><?xml version="1.0" encoding="utf-8"?>
-<p:sld xmlns:a="http://schemas.openxmlformats.org/drawingml/2006/main" xmlns:p="http://schemas.openxmlformats.org/presentationml/2006/main" xmlns:r="http://schemas.openxmlformats.org/officeDocument/2006/relationships">
+<p:sld xmlns:a="http://schemas.openxmlformats.org/drawingml/2006/main" xmlns:r="http://schemas.openxmlformats.org/officeDocument/2006/relationships" xmlns:p="http://schemas.openxmlformats.org/presentationml/2006/main">
   <p:cSld>
     <p:spTree>
       <p:nvGrpSpPr>
@@ -4678,7 +4697,14 @@
         <p:cNvGrpSpPr/>
         <p:nvPr/>
       </p:nvGrpSpPr>
-      <p:grpSpPr/>
+      <p:grpSpPr>
+        <a:xfrm>
+          <a:off x="0" y="0"/>
+          <a:ext cx="0" cy="0"/>
+          <a:chOff x="0" y="0"/>
+          <a:chExt cx="0" cy="0"/>
+        </a:xfrm>
+      </p:grpSpPr>
       <p:sp>
         <p:nvSpPr>
           <p:cNvPr id="2" name="Rectangle 1"/>
@@ -4720,6 +4746,7 @@
           <a:lstStyle/>
           <a:p>
             <a:pPr algn="ctr"/>
+            <a:endParaRPr/>
           </a:p>
         </p:txBody>
       </p:sp>
@@ -4740,7 +4767,7 @@
           <a:noFill/>
         </p:spPr>
         <p:txBody>
-          <a:bodyPr wrap="square" anchor="t" lIns="45720" rIns="45720">
+          <a:bodyPr wrap="square" lIns="45720" rIns="45720" anchor="t">
             <a:spAutoFit/>
           </a:bodyPr>
           <a:lstStyle/>
@@ -4779,7 +4806,7 @@
           <a:noFill/>
         </p:spPr>
         <p:txBody>
-          <a:bodyPr wrap="square" anchor="t" lIns="45720" rIns="45720">
+          <a:bodyPr wrap="square" lIns="45720" rIns="45720" anchor="t">
             <a:spAutoFit/>
           </a:bodyPr>
           <a:lstStyle/>
@@ -4818,7 +4845,7 @@
           <a:noFill/>
         </p:spPr>
         <p:txBody>
-          <a:bodyPr wrap="square" anchor="t" lIns="45720" rIns="45720">
+          <a:bodyPr wrap="square" lIns="45720" rIns="45720" anchor="t">
             <a:spAutoFit/>
           </a:bodyPr>
           <a:lstStyle/>
@@ -4857,7 +4884,7 @@
           <a:noFill/>
         </p:spPr>
         <p:txBody>
-          <a:bodyPr wrap="square" anchor="t" lIns="45720" rIns="45720">
+          <a:bodyPr wrap="square" lIns="45720" rIns="45720" anchor="t">
             <a:spAutoFit/>
           </a:bodyPr>
           <a:lstStyle/>
@@ -4922,6 +4949,7 @@
           <a:lstStyle/>
           <a:p>
             <a:pPr algn="ctr"/>
+            <a:endParaRPr/>
           </a:p>
         </p:txBody>
       </p:sp>
@@ -4942,7 +4970,7 @@
           <a:noFill/>
         </p:spPr>
         <p:txBody>
-          <a:bodyPr wrap="square" anchor="ctr" lIns="45720" rIns="45720">
+          <a:bodyPr wrap="square" lIns="45720" rIns="45720" anchor="ctr">
             <a:spAutoFit/>
           </a:bodyPr>
           <a:lstStyle/>
@@ -5060,6 +5088,7 @@
           <a:lstStyle/>
           <a:p>
             <a:pPr algn="ctr"/>
+            <a:endParaRPr/>
           </a:p>
         </p:txBody>
       </p:sp>
@@ -5080,7 +5109,7 @@
           <a:noFill/>
         </p:spPr>
         <p:txBody>
-          <a:bodyPr wrap="square" anchor="ctr" lIns="45720" rIns="45720">
+          <a:bodyPr wrap="square" lIns="45720" rIns="45720" anchor="ctr">
             <a:spAutoFit/>
           </a:bodyPr>
           <a:lstStyle/>
@@ -5198,6 +5227,7 @@
           <a:lstStyle/>
           <a:p>
             <a:pPr algn="ctr"/>
+            <a:endParaRPr/>
           </a:p>
         </p:txBody>
       </p:sp>
@@ -5218,7 +5248,7 @@
           <a:noFill/>
         </p:spPr>
         <p:txBody>
-          <a:bodyPr wrap="square" anchor="ctr" lIns="45720" rIns="45720">
+          <a:bodyPr wrap="square" lIns="45720" rIns="45720" anchor="ctr">
             <a:spAutoFit/>
           </a:bodyPr>
           <a:lstStyle/>
@@ -5336,6 +5366,7 @@
           <a:lstStyle/>
           <a:p>
             <a:pPr algn="ctr"/>
+            <a:endParaRPr/>
           </a:p>
         </p:txBody>
       </p:sp>
@@ -5356,7 +5387,7 @@
           <a:noFill/>
         </p:spPr>
         <p:txBody>
-          <a:bodyPr wrap="square" anchor="ctr" lIns="45720" rIns="45720">
+          <a:bodyPr wrap="square" lIns="45720" rIns="45720" anchor="ctr">
             <a:spAutoFit/>
           </a:bodyPr>
           <a:lstStyle/>
@@ -5474,6 +5505,7 @@
           <a:lstStyle/>
           <a:p>
             <a:pPr algn="ctr"/>
+            <a:endParaRPr/>
           </a:p>
         </p:txBody>
       </p:sp>
@@ -5494,7 +5526,7 @@
           <a:noFill/>
         </p:spPr>
         <p:txBody>
-          <a:bodyPr wrap="square" anchor="ctr" lIns="45720" rIns="45720">
+          <a:bodyPr wrap="square" lIns="45720" rIns="45720" anchor="ctr">
             <a:spAutoFit/>
           </a:bodyPr>
           <a:lstStyle/>
@@ -5550,7 +5582,7 @@
           <a:noFill/>
         </p:spPr>
         <p:txBody>
-          <a:bodyPr wrap="square" anchor="t" lIns="45720" rIns="45720">
+          <a:bodyPr wrap="square" lIns="45720" rIns="45720" anchor="t">
             <a:spAutoFit/>
           </a:bodyPr>
           <a:lstStyle/>
@@ -5591,15 +5623,39 @@
                 <a:tableStyleId>{5C22544A-7EE6-4342-B048-85BDC9FD1C3A}</a:tableStyleId>
               </a:tblPr>
               <a:tblGrid>
-                <a:gridCol w="2743200"/>
-                <a:gridCol w="2743200"/>
-                <a:gridCol w="2788920"/>
-                <a:gridCol w="2788920"/>
+                <a:gridCol w="2743200">
+                  <a:extLst>
+                    <a:ext uri="{9D8B030D-6E8A-4147-A177-3AD203B41FA5}">
+                      <a16:colId xmlns:a16="http://schemas.microsoft.com/office/drawing/2014/main" val="20000"/>
+                    </a:ext>
+                  </a:extLst>
+                </a:gridCol>
+                <a:gridCol w="2743200">
+                  <a:extLst>
+                    <a:ext uri="{9D8B030D-6E8A-4147-A177-3AD203B41FA5}">
+                      <a16:colId xmlns:a16="http://schemas.microsoft.com/office/drawing/2014/main" val="20001"/>
+                    </a:ext>
+                  </a:extLst>
+                </a:gridCol>
+                <a:gridCol w="2788920">
+                  <a:extLst>
+                    <a:ext uri="{9D8B030D-6E8A-4147-A177-3AD203B41FA5}">
+                      <a16:colId xmlns:a16="http://schemas.microsoft.com/office/drawing/2014/main" val="20002"/>
+                    </a:ext>
+                  </a:extLst>
+                </a:gridCol>
+                <a:gridCol w="2788920">
+                  <a:extLst>
+                    <a:ext uri="{9D8B030D-6E8A-4147-A177-3AD203B41FA5}">
+                      <a16:colId xmlns:a16="http://schemas.microsoft.com/office/drawing/2014/main" val="20003"/>
+                    </a:ext>
+                  </a:extLst>
+                </a:gridCol>
               </a:tblGrid>
               <a:tr h="457200">
                 <a:tc>
                   <a:txBody>
-                    <a:bodyPr wrap="square"/>
+                    <a:bodyPr/>
                     <a:lstStyle/>
                     <a:p>
                       <a:r>
@@ -5621,7 +5677,7 @@
                 </a:tc>
                 <a:tc>
                   <a:txBody>
-                    <a:bodyPr wrap="square"/>
+                    <a:bodyPr/>
                     <a:lstStyle/>
                     <a:p>
                       <a:r>
@@ -5643,7 +5699,7 @@
                 </a:tc>
                 <a:tc>
                   <a:txBody>
-                    <a:bodyPr wrap="square"/>
+                    <a:bodyPr/>
                     <a:lstStyle/>
                     <a:p>
                       <a:r>
@@ -5665,7 +5721,7 @@
                 </a:tc>
                 <a:tc>
                   <a:txBody>
-                    <a:bodyPr wrap="square"/>
+                    <a:bodyPr/>
                     <a:lstStyle/>
                     <a:p>
                       <a:r>
@@ -5685,11 +5741,16 @@
                     </a:solidFill>
                   </a:tcPr>
                 </a:tc>
+                <a:extLst>
+                  <a:ext uri="{0D108BD9-81ED-4DB2-BD59-A6C34878D82A}">
+                    <a16:rowId xmlns:a16="http://schemas.microsoft.com/office/drawing/2014/main" val="10000"/>
+                  </a:ext>
+                </a:extLst>
               </a:tr>
               <a:tr h="457200">
                 <a:tc>
                   <a:txBody>
-                    <a:bodyPr wrap="square"/>
+                    <a:bodyPr/>
                     <a:lstStyle/>
                     <a:p>
                       <a:r>
@@ -5711,7 +5772,7 @@
                 </a:tc>
                 <a:tc>
                   <a:txBody>
-                    <a:bodyPr wrap="square"/>
+                    <a:bodyPr/>
                     <a:lstStyle/>
                     <a:p>
                       <a:r>
@@ -5733,7 +5794,7 @@
                 </a:tc>
                 <a:tc>
                   <a:txBody>
-                    <a:bodyPr wrap="square"/>
+                    <a:bodyPr/>
                     <a:lstStyle/>
                     <a:p>
                       <a:r>
@@ -5755,7 +5816,7 @@
                 </a:tc>
                 <a:tc>
                   <a:txBody>
-                    <a:bodyPr wrap="square"/>
+                    <a:bodyPr/>
                     <a:lstStyle/>
                     <a:p>
                       <a:r>
@@ -5775,6 +5836,11 @@
                     </a:solidFill>
                   </a:tcPr>
                 </a:tc>
+                <a:extLst>
+                  <a:ext uri="{0D108BD9-81ED-4DB2-BD59-A6C34878D82A}">
+                    <a16:rowId xmlns:a16="http://schemas.microsoft.com/office/drawing/2014/main" val="10001"/>
+                  </a:ext>
+                </a:extLst>
               </a:tr>
             </a:tbl>
           </a:graphicData>
@@ -5823,6 +5889,7 @@
           <a:lstStyle/>
           <a:p>
             <a:pPr algn="ctr"/>
+            <a:endParaRPr/>
           </a:p>
         </p:txBody>
       </p:sp>
@@ -5843,7 +5910,7 @@
           <a:noFill/>
         </p:spPr>
         <p:txBody>
-          <a:bodyPr wrap="square" anchor="ctr" lIns="45720" rIns="45720">
+          <a:bodyPr wrap="square" lIns="45720" rIns="45720" anchor="ctr">
             <a:spAutoFit/>
           </a:bodyPr>
           <a:lstStyle/>
@@ -5924,6 +5991,7 @@
           <a:lstStyle/>
           <a:p>
             <a:pPr algn="ctr"/>
+            <a:endParaRPr/>
           </a:p>
         </p:txBody>
       </p:sp>
@@ -5944,7 +6012,7 @@
           <a:noFill/>
         </p:spPr>
         <p:txBody>
-          <a:bodyPr wrap="square" anchor="ctr" lIns="45720" rIns="45720">
+          <a:bodyPr wrap="square" lIns="45720" rIns="45720" anchor="ctr">
             <a:spAutoFit/>
           </a:bodyPr>
           <a:lstStyle/>
@@ -5991,7 +6059,7 @@
 </file>
 
 <file path=ppt/slides/slide3.xml><?xml version="1.0" encoding="utf-8"?>
-<p:sld xmlns:a="http://schemas.openxmlformats.org/drawingml/2006/main" xmlns:p="http://schemas.openxmlformats.org/presentationml/2006/main" xmlns:r="http://schemas.openxmlformats.org/officeDocument/2006/relationships">
+<p:sld xmlns:a="http://schemas.openxmlformats.org/drawingml/2006/main" xmlns:r="http://schemas.openxmlformats.org/officeDocument/2006/relationships" xmlns:p="http://schemas.openxmlformats.org/presentationml/2006/main">
   <p:cSld>
     <p:spTree>
       <p:nvGrpSpPr>
@@ -5999,7 +6067,14 @@
         <p:cNvGrpSpPr/>
         <p:nvPr/>
       </p:nvGrpSpPr>
-      <p:grpSpPr/>
+      <p:grpSpPr>
+        <a:xfrm>
+          <a:off x="0" y="0"/>
+          <a:ext cx="0" cy="0"/>
+          <a:chOff x="0" y="0"/>
+          <a:chExt cx="0" cy="0"/>
+        </a:xfrm>
+      </p:grpSpPr>
       <p:sp>
         <p:nvSpPr>
           <p:cNvPr id="2" name="Rectangle 1"/>
@@ -6041,6 +6116,7 @@
           <a:lstStyle/>
           <a:p>
             <a:pPr algn="ctr"/>
+            <a:endParaRPr/>
           </a:p>
         </p:txBody>
       </p:sp>
@@ -6061,7 +6137,7 @@
           <a:noFill/>
         </p:spPr>
         <p:txBody>
-          <a:bodyPr wrap="square" anchor="t" lIns="45720" rIns="45720">
+          <a:bodyPr wrap="square" lIns="45720" rIns="45720" anchor="t">
             <a:spAutoFit/>
           </a:bodyPr>
           <a:lstStyle/>
@@ -6100,7 +6176,7 @@
           <a:noFill/>
         </p:spPr>
         <p:txBody>
-          <a:bodyPr wrap="square" anchor="t" lIns="45720" rIns="45720">
+          <a:bodyPr wrap="square" lIns="45720" rIns="45720" anchor="t">
             <a:spAutoFit/>
           </a:bodyPr>
           <a:lstStyle/>
@@ -6139,7 +6215,7 @@
           <a:noFill/>
         </p:spPr>
         <p:txBody>
-          <a:bodyPr wrap="square" anchor="t" lIns="45720" rIns="45720">
+          <a:bodyPr wrap="square" lIns="45720" rIns="45720" anchor="t">
             <a:spAutoFit/>
           </a:bodyPr>
           <a:lstStyle/>
@@ -6178,7 +6254,7 @@
           <a:noFill/>
         </p:spPr>
         <p:txBody>
-          <a:bodyPr wrap="square" anchor="t" lIns="45720" rIns="45720">
+          <a:bodyPr wrap="square" lIns="45720" rIns="45720" anchor="t">
             <a:spAutoFit/>
           </a:bodyPr>
           <a:lstStyle/>
@@ -6243,6 +6319,7 @@
           <a:lstStyle/>
           <a:p>
             <a:pPr algn="ctr"/>
+            <a:endParaRPr/>
           </a:p>
         </p:txBody>
       </p:sp>
@@ -6263,7 +6340,7 @@
           <a:noFill/>
         </p:spPr>
         <p:txBody>
-          <a:bodyPr wrap="square" anchor="ctr" lIns="45720" rIns="45720">
+          <a:bodyPr wrap="square" lIns="45720" rIns="45720" anchor="ctr">
             <a:spAutoFit/>
           </a:bodyPr>
           <a:lstStyle/>
@@ -6381,6 +6458,7 @@
           <a:lstStyle/>
           <a:p>
             <a:pPr algn="ctr"/>
+            <a:endParaRPr/>
           </a:p>
         </p:txBody>
       </p:sp>
@@ -6401,7 +6479,7 @@
           <a:noFill/>
         </p:spPr>
         <p:txBody>
-          <a:bodyPr wrap="square" anchor="ctr" lIns="45720" rIns="45720">
+          <a:bodyPr wrap="square" lIns="45720" rIns="45720" anchor="ctr">
             <a:spAutoFit/>
           </a:bodyPr>
           <a:lstStyle/>
@@ -6519,6 +6597,7 @@
           <a:lstStyle/>
           <a:p>
             <a:pPr algn="ctr"/>
+            <a:endParaRPr/>
           </a:p>
         </p:txBody>
       </p:sp>
@@ -6539,7 +6618,7 @@
           <a:noFill/>
         </p:spPr>
         <p:txBody>
-          <a:bodyPr wrap="square" anchor="ctr" lIns="45720" rIns="45720">
+          <a:bodyPr wrap="square" lIns="45720" rIns="45720" anchor="ctr">
             <a:spAutoFit/>
           </a:bodyPr>
           <a:lstStyle/>
@@ -6595,7 +6674,7 @@
           <a:noFill/>
         </p:spPr>
         <p:txBody>
-          <a:bodyPr wrap="square" anchor="t" lIns="45720" rIns="45720">
+          <a:bodyPr wrap="square" lIns="45720" rIns="45720" anchor="t">
             <a:spAutoFit/>
           </a:bodyPr>
           <a:lstStyle/>
@@ -6636,13 +6715,25 @@
                 <a:tableStyleId>{5C22544A-7EE6-4342-B048-85BDC9FD1C3A}</a:tableStyleId>
               </a:tblPr>
               <a:tblGrid>
-                <a:gridCol w="2011680"/>
-                <a:gridCol w="9052560"/>
+                <a:gridCol w="2011680">
+                  <a:extLst>
+                    <a:ext uri="{9D8B030D-6E8A-4147-A177-3AD203B41FA5}">
+                      <a16:colId xmlns:a16="http://schemas.microsoft.com/office/drawing/2014/main" val="20000"/>
+                    </a:ext>
+                  </a:extLst>
+                </a:gridCol>
+                <a:gridCol w="9052560">
+                  <a:extLst>
+                    <a:ext uri="{9D8B030D-6E8A-4147-A177-3AD203B41FA5}">
+                      <a16:colId xmlns:a16="http://schemas.microsoft.com/office/drawing/2014/main" val="20001"/>
+                    </a:ext>
+                  </a:extLst>
+                </a:gridCol>
               </a:tblGrid>
               <a:tr h="475488">
                 <a:tc>
                   <a:txBody>
-                    <a:bodyPr wrap="square"/>
+                    <a:bodyPr/>
                     <a:lstStyle/>
                     <a:p>
                       <a:r>
@@ -6664,7 +6755,7 @@
                 </a:tc>
                 <a:tc>
                   <a:txBody>
-                    <a:bodyPr wrap="square"/>
+                    <a:bodyPr/>
                     <a:lstStyle/>
                     <a:p>
                       <a:r>
@@ -6684,11 +6775,16 @@
                     </a:solidFill>
                   </a:tcPr>
                 </a:tc>
+                <a:extLst>
+                  <a:ext uri="{0D108BD9-81ED-4DB2-BD59-A6C34878D82A}">
+                    <a16:rowId xmlns:a16="http://schemas.microsoft.com/office/drawing/2014/main" val="10000"/>
+                  </a:ext>
+                </a:extLst>
               </a:tr>
               <a:tr h="475488">
                 <a:tc>
                   <a:txBody>
-                    <a:bodyPr wrap="square"/>
+                    <a:bodyPr/>
                     <a:lstStyle/>
                     <a:p>
                       <a:r>
@@ -6710,7 +6806,7 @@
                 </a:tc>
                 <a:tc>
                   <a:txBody>
-                    <a:bodyPr wrap="square"/>
+                    <a:bodyPr/>
                     <a:lstStyle/>
                     <a:p>
                       <a:r>
@@ -6730,11 +6826,16 @@
                     </a:solidFill>
                   </a:tcPr>
                 </a:tc>
+                <a:extLst>
+                  <a:ext uri="{0D108BD9-81ED-4DB2-BD59-A6C34878D82A}">
+                    <a16:rowId xmlns:a16="http://schemas.microsoft.com/office/drawing/2014/main" val="10001"/>
+                  </a:ext>
+                </a:extLst>
               </a:tr>
               <a:tr h="475488">
                 <a:tc>
                   <a:txBody>
-                    <a:bodyPr wrap="square"/>
+                    <a:bodyPr/>
                     <a:lstStyle/>
                     <a:p>
                       <a:r>
@@ -6756,7 +6857,7 @@
                 </a:tc>
                 <a:tc>
                   <a:txBody>
-                    <a:bodyPr wrap="square"/>
+                    <a:bodyPr/>
                     <a:lstStyle/>
                     <a:p>
                       <a:r>
@@ -6776,11 +6877,16 @@
                     </a:solidFill>
                   </a:tcPr>
                 </a:tc>
+                <a:extLst>
+                  <a:ext uri="{0D108BD9-81ED-4DB2-BD59-A6C34878D82A}">
+                    <a16:rowId xmlns:a16="http://schemas.microsoft.com/office/drawing/2014/main" val="10002"/>
+                  </a:ext>
+                </a:extLst>
               </a:tr>
               <a:tr h="475488">
                 <a:tc>
                   <a:txBody>
-                    <a:bodyPr wrap="square"/>
+                    <a:bodyPr/>
                     <a:lstStyle/>
                     <a:p>
                       <a:r>
@@ -6802,7 +6908,7 @@
                 </a:tc>
                 <a:tc>
                   <a:txBody>
-                    <a:bodyPr wrap="square"/>
+                    <a:bodyPr/>
                     <a:lstStyle/>
                     <a:p>
                       <a:r>
@@ -6822,11 +6928,16 @@
                     </a:solidFill>
                   </a:tcPr>
                 </a:tc>
+                <a:extLst>
+                  <a:ext uri="{0D108BD9-81ED-4DB2-BD59-A6C34878D82A}">
+                    <a16:rowId xmlns:a16="http://schemas.microsoft.com/office/drawing/2014/main" val="10003"/>
+                  </a:ext>
+                </a:extLst>
               </a:tr>
               <a:tr h="475488">
                 <a:tc>
                   <a:txBody>
-                    <a:bodyPr wrap="square"/>
+                    <a:bodyPr/>
                     <a:lstStyle/>
                     <a:p>
                       <a:r>
@@ -6848,7 +6959,7 @@
                 </a:tc>
                 <a:tc>
                   <a:txBody>
-                    <a:bodyPr wrap="square"/>
+                    <a:bodyPr/>
                     <a:lstStyle/>
                     <a:p>
                       <a:r>
@@ -6868,6 +6979,11 @@
                     </a:solidFill>
                   </a:tcPr>
                 </a:tc>
+                <a:extLst>
+                  <a:ext uri="{0D108BD9-81ED-4DB2-BD59-A6C34878D82A}">
+                    <a16:rowId xmlns:a16="http://schemas.microsoft.com/office/drawing/2014/main" val="10004"/>
+                  </a:ext>
+                </a:extLst>
               </a:tr>
             </a:tbl>
           </a:graphicData>
@@ -6882,7 +6998,7 @@
 </file>
 
 <file path=ppt/slides/slide4.xml><?xml version="1.0" encoding="utf-8"?>
-<p:sld xmlns:a="http://schemas.openxmlformats.org/drawingml/2006/main" xmlns:p="http://schemas.openxmlformats.org/presentationml/2006/main" xmlns:r="http://schemas.openxmlformats.org/officeDocument/2006/relationships">
+<p:sld xmlns:a="http://schemas.openxmlformats.org/drawingml/2006/main" xmlns:r="http://schemas.openxmlformats.org/officeDocument/2006/relationships" xmlns:p="http://schemas.openxmlformats.org/presentationml/2006/main">
   <p:cSld>
     <p:spTree>
       <p:nvGrpSpPr>
@@ -6890,7 +7006,14 @@
         <p:cNvGrpSpPr/>
         <p:nvPr/>
       </p:nvGrpSpPr>
-      <p:grpSpPr/>
+      <p:grpSpPr>
+        <a:xfrm>
+          <a:off x="0" y="0"/>
+          <a:ext cx="0" cy="0"/>
+          <a:chOff x="0" y="0"/>
+          <a:chExt cx="0" cy="0"/>
+        </a:xfrm>
+      </p:grpSpPr>
       <p:sp>
         <p:nvSpPr>
           <p:cNvPr id="2" name="Rectangle 1"/>
@@ -6932,6 +7055,7 @@
           <a:lstStyle/>
           <a:p>
             <a:pPr algn="ctr"/>
+            <a:endParaRPr/>
           </a:p>
         </p:txBody>
       </p:sp>
@@ -6952,7 +7076,7 @@
           <a:noFill/>
         </p:spPr>
         <p:txBody>
-          <a:bodyPr wrap="square" anchor="t" lIns="45720" rIns="45720">
+          <a:bodyPr wrap="square" lIns="45720" rIns="45720" anchor="t">
             <a:spAutoFit/>
           </a:bodyPr>
           <a:lstStyle/>
@@ -6991,7 +7115,7 @@
           <a:noFill/>
         </p:spPr>
         <p:txBody>
-          <a:bodyPr wrap="square" anchor="t" lIns="45720" rIns="45720">
+          <a:bodyPr wrap="square" lIns="45720" rIns="45720" anchor="t">
             <a:spAutoFit/>
           </a:bodyPr>
           <a:lstStyle/>
@@ -7030,7 +7154,7 @@
           <a:noFill/>
         </p:spPr>
         <p:txBody>
-          <a:bodyPr wrap="square" anchor="t" lIns="45720" rIns="45720">
+          <a:bodyPr wrap="square" lIns="45720" rIns="45720" anchor="t">
             <a:spAutoFit/>
           </a:bodyPr>
           <a:lstStyle/>
@@ -7062,7 +7186,7 @@
         </p:nvGraphicFramePr>
         <p:xfrm>
           <a:off x="548640" y="1188720"/>
-          <a:ext cx="11064240" cy="2779776"/>
+          <a:ext cx="11064240" cy="2560320"/>
         </p:xfrm>
         <a:graphic>
           <a:graphicData uri="http://schemas.openxmlformats.org/drawingml/2006/table">
@@ -7071,14 +7195,32 @@
                 <a:tableStyleId>{5C22544A-7EE6-4342-B048-85BDC9FD1C3A}</a:tableStyleId>
               </a:tblPr>
               <a:tblGrid>
-                <a:gridCol w="2743200"/>
-                <a:gridCol w="4114800"/>
-                <a:gridCol w="4206240"/>
+                <a:gridCol w="2743200">
+                  <a:extLst>
+                    <a:ext uri="{9D8B030D-6E8A-4147-A177-3AD203B41FA5}">
+                      <a16:colId xmlns:a16="http://schemas.microsoft.com/office/drawing/2014/main" val="20000"/>
+                    </a:ext>
+                  </a:extLst>
+                </a:gridCol>
+                <a:gridCol w="4114800">
+                  <a:extLst>
+                    <a:ext uri="{9D8B030D-6E8A-4147-A177-3AD203B41FA5}">
+                      <a16:colId xmlns:a16="http://schemas.microsoft.com/office/drawing/2014/main" val="20001"/>
+                    </a:ext>
+                  </a:extLst>
+                </a:gridCol>
+                <a:gridCol w="4206240">
+                  <a:extLst>
+                    <a:ext uri="{9D8B030D-6E8A-4147-A177-3AD203B41FA5}">
+                      <a16:colId xmlns:a16="http://schemas.microsoft.com/office/drawing/2014/main" val="20002"/>
+                    </a:ext>
+                  </a:extLst>
+                </a:gridCol>
               </a:tblGrid>
               <a:tr h="347472">
                 <a:tc>
                   <a:txBody>
-                    <a:bodyPr wrap="square"/>
+                    <a:bodyPr/>
                     <a:lstStyle/>
                     <a:p>
                       <a:r>
@@ -7100,7 +7242,7 @@
                 </a:tc>
                 <a:tc>
                   <a:txBody>
-                    <a:bodyPr wrap="square"/>
+                    <a:bodyPr/>
                     <a:lstStyle/>
                     <a:p>
                       <a:r>
@@ -7122,7 +7264,7 @@
                 </a:tc>
                 <a:tc>
                   <a:txBody>
-                    <a:bodyPr wrap="square"/>
+                    <a:bodyPr/>
                     <a:lstStyle/>
                     <a:p>
                       <a:r>
@@ -7142,11 +7284,16 @@
                     </a:solidFill>
                   </a:tcPr>
                 </a:tc>
+                <a:extLst>
+                  <a:ext uri="{0D108BD9-81ED-4DB2-BD59-A6C34878D82A}">
+                    <a16:rowId xmlns:a16="http://schemas.microsoft.com/office/drawing/2014/main" val="10000"/>
+                  </a:ext>
+                </a:extLst>
               </a:tr>
               <a:tr h="347472">
                 <a:tc>
                   <a:txBody>
-                    <a:bodyPr wrap="square"/>
+                    <a:bodyPr/>
                     <a:lstStyle/>
                     <a:p>
                       <a:r>
@@ -7168,7 +7315,7 @@
                 </a:tc>
                 <a:tc>
                   <a:txBody>
-                    <a:bodyPr wrap="square"/>
+                    <a:bodyPr/>
                     <a:lstStyle/>
                     <a:p>
                       <a:r>
@@ -7190,7 +7337,7 @@
                 </a:tc>
                 <a:tc>
                   <a:txBody>
-                    <a:bodyPr wrap="square"/>
+                    <a:bodyPr/>
                     <a:lstStyle/>
                     <a:p>
                       <a:r>
@@ -7210,11 +7357,16 @@
                     </a:solidFill>
                   </a:tcPr>
                 </a:tc>
+                <a:extLst>
+                  <a:ext uri="{0D108BD9-81ED-4DB2-BD59-A6C34878D82A}">
+                    <a16:rowId xmlns:a16="http://schemas.microsoft.com/office/drawing/2014/main" val="10001"/>
+                  </a:ext>
+                </a:extLst>
               </a:tr>
               <a:tr h="347472">
                 <a:tc>
                   <a:txBody>
-                    <a:bodyPr wrap="square"/>
+                    <a:bodyPr/>
                     <a:lstStyle/>
                     <a:p>
                       <a:r>
@@ -7236,7 +7388,7 @@
                 </a:tc>
                 <a:tc>
                   <a:txBody>
-                    <a:bodyPr wrap="square"/>
+                    <a:bodyPr/>
                     <a:lstStyle/>
                     <a:p>
                       <a:r>
@@ -7258,7 +7410,7 @@
                 </a:tc>
                 <a:tc>
                   <a:txBody>
-                    <a:bodyPr wrap="square"/>
+                    <a:bodyPr/>
                     <a:lstStyle/>
                     <a:p>
                       <a:r>
@@ -7278,11 +7430,16 @@
                     </a:solidFill>
                   </a:tcPr>
                 </a:tc>
+                <a:extLst>
+                  <a:ext uri="{0D108BD9-81ED-4DB2-BD59-A6C34878D82A}">
+                    <a16:rowId xmlns:a16="http://schemas.microsoft.com/office/drawing/2014/main" val="10002"/>
+                  </a:ext>
+                </a:extLst>
               </a:tr>
               <a:tr h="347472">
                 <a:tc>
                   <a:txBody>
-                    <a:bodyPr wrap="square"/>
+                    <a:bodyPr/>
                     <a:lstStyle/>
                     <a:p>
                       <a:r>
@@ -7304,7 +7461,7 @@
                 </a:tc>
                 <a:tc>
                   <a:txBody>
-                    <a:bodyPr wrap="square"/>
+                    <a:bodyPr/>
                     <a:lstStyle/>
                     <a:p>
                       <a:r>
@@ -7326,7 +7483,7 @@
                 </a:tc>
                 <a:tc>
                   <a:txBody>
-                    <a:bodyPr wrap="square"/>
+                    <a:bodyPr/>
                     <a:lstStyle/>
                     <a:p>
                       <a:r>
@@ -7346,79 +7503,16 @@
                     </a:solidFill>
                   </a:tcPr>
                 </a:tc>
+                <a:extLst>
+                  <a:ext uri="{0D108BD9-81ED-4DB2-BD59-A6C34878D82A}">
+                    <a16:rowId xmlns:a16="http://schemas.microsoft.com/office/drawing/2014/main" val="10003"/>
+                  </a:ext>
+                </a:extLst>
               </a:tr>
               <a:tr h="347472">
                 <a:tc>
                   <a:txBody>
-                    <a:bodyPr wrap="square"/>
-                    <a:lstStyle/>
-                    <a:p>
-                      <a:r>
-                        <a:rPr sz="1100" b="1">
-                          <a:solidFill>
-                            <a:srgbClr val="1F1F1F"/>
-                          </a:solidFill>
-                          <a:latin typeface="Calibri"/>
-                        </a:rPr>
-                        <a:t>MATHia</a:t>
-                      </a:r>
-                    </a:p>
-                  </a:txBody>
-                  <a:tcPr marL="54864" marR="54864" marT="27432" marB="27432">
-                    <a:solidFill>
-                      <a:srgbClr val="F4F6F7"/>
-                    </a:solidFill>
-                  </a:tcPr>
-                </a:tc>
-                <a:tc>
-                  <a:txBody>
-                    <a:bodyPr wrap="square"/>
-                    <a:lstStyle/>
-                    <a:p>
-                      <a:r>
-                        <a:rPr sz="1100" b="0">
-                          <a:solidFill>
-                            <a:srgbClr val="1F1F1F"/>
-                          </a:solidFill>
-                          <a:latin typeface="Calibri"/>
-                        </a:rPr>
-                        <a:t>Adapts per student; step-by-step guidance, real-time feedback, targeted practice</a:t>
-                      </a:r>
-                    </a:p>
-                  </a:txBody>
-                  <a:tcPr marL="54864" marR="54864" marT="27432" marB="27432">
-                    <a:solidFill>
-                      <a:srgbClr val="F4F6F7"/>
-                    </a:solidFill>
-                  </a:tcPr>
-                </a:tc>
-                <a:tc>
-                  <a:txBody>
-                    <a:bodyPr wrap="square"/>
-                    <a:lstStyle/>
-                    <a:p>
-                      <a:r>
-                        <a:rPr sz="1100" b="0">
-                          <a:solidFill>
-                            <a:srgbClr val="1F1F1F"/>
-                          </a:solidFill>
-                          <a:latin typeface="Calibri"/>
-                        </a:rPr>
-                        <a:t>Paid, closed; fixed maths curriculum; fixed step paths, no free conversation</a:t>
-                      </a:r>
-                    </a:p>
-                  </a:txBody>
-                  <a:tcPr marL="54864" marR="54864" marT="27432" marB="27432">
-                    <a:solidFill>
-                      <a:srgbClr val="F4F6F7"/>
-                    </a:solidFill>
-                  </a:tcPr>
-                </a:tc>
-              </a:tr>
-              <a:tr h="347472">
-                <a:tc>
-                  <a:txBody>
-                    <a:bodyPr wrap="square"/>
+                    <a:bodyPr/>
                     <a:lstStyle/>
                     <a:p>
                       <a:r>
@@ -7434,13 +7528,13 @@
                   </a:txBody>
                   <a:tcPr marL="54864" marR="54864" marT="27432" marB="27432">
                     <a:solidFill>
-                      <a:srgbClr val="FFFFFF"/>
+                      <a:srgbClr val="F4F6F7"/>
                     </a:solidFill>
                   </a:tcPr>
                 </a:tc>
                 <a:tc>
                   <a:txBody>
-                    <a:bodyPr wrap="square"/>
+                    <a:bodyPr/>
                     <a:lstStyle/>
                     <a:p>
                       <a:r>
@@ -7456,13 +7550,13 @@
                   </a:txBody>
                   <a:tcPr marL="54864" marR="54864" marT="27432" marB="27432">
                     <a:solidFill>
-                      <a:srgbClr val="FFFFFF"/>
+                      <a:srgbClr val="F4F6F7"/>
                     </a:solidFill>
                   </a:tcPr>
                 </a:tc>
                 <a:tc>
                   <a:txBody>
-                    <a:bodyPr wrap="square"/>
+                    <a:bodyPr/>
                     <a:lstStyle/>
                     <a:p>
                       <a:r>
@@ -7478,15 +7572,20 @@
                   </a:txBody>
                   <a:tcPr marL="54864" marR="54864" marT="27432" marB="27432">
                     <a:solidFill>
-                      <a:srgbClr val="FFFFFF"/>
+                      <a:srgbClr val="F4F6F7"/>
                     </a:solidFill>
                   </a:tcPr>
                 </a:tc>
+                <a:extLst>
+                  <a:ext uri="{0D108BD9-81ED-4DB2-BD59-A6C34878D82A}">
+                    <a16:rowId xmlns:a16="http://schemas.microsoft.com/office/drawing/2014/main" val="10004"/>
+                  </a:ext>
+                </a:extLst>
               </a:tr>
               <a:tr h="347472">
                 <a:tc>
                   <a:txBody>
-                    <a:bodyPr wrap="square"/>
+                    <a:bodyPr/>
                     <a:lstStyle/>
                     <a:p>
                       <a:r>
@@ -7502,13 +7601,13 @@
                   </a:txBody>
                   <a:tcPr marL="54864" marR="54864" marT="27432" marB="27432">
                     <a:solidFill>
-                      <a:srgbClr val="F4F6F7"/>
+                      <a:srgbClr val="FFFFFF"/>
                     </a:solidFill>
                   </a:tcPr>
                 </a:tc>
                 <a:tc>
                   <a:txBody>
-                    <a:bodyPr wrap="square"/>
+                    <a:bodyPr/>
                     <a:lstStyle/>
                     <a:p>
                       <a:r>
@@ -7524,13 +7623,13 @@
                   </a:txBody>
                   <a:tcPr marL="54864" marR="54864" marT="27432" marB="27432">
                     <a:solidFill>
-                      <a:srgbClr val="F4F6F7"/>
+                      <a:srgbClr val="FFFFFF"/>
                     </a:solidFill>
                   </a:tcPr>
                 </a:tc>
                 <a:tc>
                   <a:txBody>
-                    <a:bodyPr wrap="square"/>
+                    <a:bodyPr/>
                     <a:lstStyle/>
                     <a:p>
                       <a:r>
@@ -7546,15 +7645,20 @@
                   </a:txBody>
                   <a:tcPr marL="54864" marR="54864" marT="27432" marB="27432">
                     <a:solidFill>
-                      <a:srgbClr val="F4F6F7"/>
+                      <a:srgbClr val="FFFFFF"/>
                     </a:solidFill>
                   </a:tcPr>
                 </a:tc>
+                <a:extLst>
+                  <a:ext uri="{0D108BD9-81ED-4DB2-BD59-A6C34878D82A}">
+                    <a16:rowId xmlns:a16="http://schemas.microsoft.com/office/drawing/2014/main" val="10005"/>
+                  </a:ext>
+                </a:extLst>
               </a:tr>
               <a:tr h="347472">
                 <a:tc>
                   <a:txBody>
-                    <a:bodyPr wrap="square"/>
+                    <a:bodyPr/>
                     <a:lstStyle/>
                     <a:p>
                       <a:r>
@@ -7570,13 +7674,13 @@
                   </a:txBody>
                   <a:tcPr marL="54864" marR="54864" marT="27432" marB="27432">
                     <a:solidFill>
-                      <a:srgbClr val="FFFFFF"/>
+                      <a:srgbClr val="F4F6F7"/>
                     </a:solidFill>
                   </a:tcPr>
                 </a:tc>
                 <a:tc>
                   <a:txBody>
-                    <a:bodyPr wrap="square"/>
+                    <a:bodyPr/>
                     <a:lstStyle/>
                     <a:p>
                       <a:r>
@@ -7592,13 +7696,13 @@
                   </a:txBody>
                   <a:tcPr marL="54864" marR="54864" marT="27432" marB="27432">
                     <a:solidFill>
-                      <a:srgbClr val="FFFFFF"/>
+                      <a:srgbClr val="F4F6F7"/>
                     </a:solidFill>
                   </a:tcPr>
                 </a:tc>
                 <a:tc>
                   <a:txBody>
-                    <a:bodyPr wrap="square"/>
+                    <a:bodyPr/>
                     <a:lstStyle/>
                     <a:p>
                       <a:r>
@@ -7614,10 +7718,15 @@
                   </a:txBody>
                   <a:tcPr marL="54864" marR="54864" marT="27432" marB="27432">
                     <a:solidFill>
-                      <a:srgbClr val="FFFFFF"/>
+                      <a:srgbClr val="F4F6F7"/>
                     </a:solidFill>
                   </a:tcPr>
                 </a:tc>
+                <a:extLst>
+                  <a:ext uri="{0D108BD9-81ED-4DB2-BD59-A6C34878D82A}">
+                    <a16:rowId xmlns:a16="http://schemas.microsoft.com/office/drawing/2014/main" val="10006"/>
+                  </a:ext>
+                </a:extLst>
               </a:tr>
             </a:tbl>
           </a:graphicData>
@@ -7631,7 +7740,7 @@
         </p:nvSpPr>
         <p:spPr>
           <a:xfrm>
-            <a:off x="548640" y="4709160"/>
+            <a:off x="548640" y="4160520"/>
             <a:ext cx="11064240" cy="411480"/>
           </a:xfrm>
           <a:prstGeom prst="rect">
@@ -7640,7 +7749,7 @@
           <a:noFill/>
         </p:spPr>
         <p:txBody>
-          <a:bodyPr wrap="square" anchor="t" lIns="45720" rIns="45720">
+          <a:bodyPr wrap="square" lIns="45720" rIns="45720" anchor="t">
             <a:spAutoFit/>
           </a:bodyPr>
           <a:lstStyle/>
@@ -7670,7 +7779,7 @@
         </p:nvSpPr>
         <p:spPr>
           <a:xfrm>
-            <a:off x="548640" y="5120640"/>
+            <a:off x="548640" y="4572000"/>
             <a:ext cx="11064240" cy="1280160"/>
           </a:xfrm>
           <a:prstGeom prst="rect">
@@ -7679,7 +7788,7 @@
           <a:noFill/>
         </p:spPr>
         <p:txBody>
-          <a:bodyPr wrap="square" anchor="t" lIns="45720" rIns="45720">
+          <a:bodyPr wrap="square" lIns="45720" rIns="45720" anchor="t">
             <a:spAutoFit/>
           </a:bodyPr>
           <a:lstStyle/>
@@ -7742,7 +7851,7 @@
 </file>
 
 <file path=ppt/slides/slide5.xml><?xml version="1.0" encoding="utf-8"?>
-<p:sld xmlns:a="http://schemas.openxmlformats.org/drawingml/2006/main" xmlns:p="http://schemas.openxmlformats.org/presentationml/2006/main" xmlns:r="http://schemas.openxmlformats.org/officeDocument/2006/relationships">
+<p:sld xmlns:a="http://schemas.openxmlformats.org/drawingml/2006/main" xmlns:r="http://schemas.openxmlformats.org/officeDocument/2006/relationships" xmlns:p="http://schemas.openxmlformats.org/presentationml/2006/main">
   <p:cSld>
     <p:spTree>
       <p:nvGrpSpPr>
@@ -7750,7 +7859,14 @@
         <p:cNvGrpSpPr/>
         <p:nvPr/>
       </p:nvGrpSpPr>
-      <p:grpSpPr/>
+      <p:grpSpPr>
+        <a:xfrm>
+          <a:off x="0" y="0"/>
+          <a:ext cx="0" cy="0"/>
+          <a:chOff x="0" y="0"/>
+          <a:chExt cx="0" cy="0"/>
+        </a:xfrm>
+      </p:grpSpPr>
       <p:sp>
         <p:nvSpPr>
           <p:cNvPr id="2" name="Rectangle 1"/>
@@ -7792,6 +7908,7 @@
           <a:lstStyle/>
           <a:p>
             <a:pPr algn="ctr"/>
+            <a:endParaRPr/>
           </a:p>
         </p:txBody>
       </p:sp>
@@ -7812,7 +7929,7 @@
           <a:noFill/>
         </p:spPr>
         <p:txBody>
-          <a:bodyPr wrap="square" anchor="t" lIns="45720" rIns="45720">
+          <a:bodyPr wrap="square" lIns="45720" rIns="45720" anchor="t">
             <a:spAutoFit/>
           </a:bodyPr>
           <a:lstStyle/>
@@ -7851,7 +7968,7 @@
           <a:noFill/>
         </p:spPr>
         <p:txBody>
-          <a:bodyPr wrap="square" anchor="t" lIns="45720" rIns="45720">
+          <a:bodyPr wrap="square" lIns="45720" rIns="45720" anchor="t">
             <a:spAutoFit/>
           </a:bodyPr>
           <a:lstStyle/>
@@ -7890,7 +8007,7 @@
           <a:noFill/>
         </p:spPr>
         <p:txBody>
-          <a:bodyPr wrap="square" anchor="t" lIns="45720" rIns="45720">
+          <a:bodyPr wrap="square" lIns="45720" rIns="45720" anchor="t">
             <a:spAutoFit/>
           </a:bodyPr>
           <a:lstStyle/>
@@ -7945,7 +8062,7 @@
         <p:spPr>
           <a:xfrm>
             <a:off x="548640" y="4343400"/>
-            <a:ext cx="6583680" cy="1645920"/>
+            <a:ext cx="6583680" cy="1620957"/>
           </a:xfrm>
           <a:prstGeom prst="rect">
             <a:avLst/>
@@ -7953,7 +8070,7 @@
           <a:noFill/>
         </p:spPr>
         <p:txBody>
-          <a:bodyPr wrap="square" anchor="t" lIns="45720" rIns="45720">
+          <a:bodyPr wrap="square" lIns="45720" rIns="45720" anchor="t">
             <a:spAutoFit/>
           </a:bodyPr>
           <a:lstStyle/>
@@ -7964,7 +8081,7 @@
               </a:spcAft>
             </a:pPr>
             <a:r>
-              <a:rPr sz="1600" b="1">
+              <a:rPr sz="1600" b="1" dirty="0">
                 <a:solidFill>
                   <a:srgbClr val="0F7C8C"/>
                 </a:solidFill>
@@ -7980,13 +8097,82 @@
               </a:spcAft>
             </a:pPr>
             <a:r>
-              <a:rPr sz="1400" b="0">
+              <a:rPr sz="1400" b="0" dirty="0">
                 <a:solidFill>
                   <a:srgbClr val="1F1F1F"/>
                 </a:solidFill>
                 <a:latin typeface="Calibri"/>
               </a:rPr>
-              <a:t>DKT (Deep Knowledge Tracing, an LSTM we will train) scores AUC 0.754 on cleaned ASSISTments data. 0.5 = random guess, 1.0 = perfect.</a:t>
+              <a:t>DKT (Deep Knowledge Tracing, an LSTM we will train) scores AUC 0.754 on cleaned </a:t>
+            </a:r>
+            <a:r>
+              <a:rPr sz="1400" b="0" dirty="0" err="1">
+                <a:solidFill>
+                  <a:srgbClr val="1F1F1F"/>
+                </a:solidFill>
+                <a:latin typeface="Calibri"/>
+              </a:rPr>
+              <a:t>ASSISTments</a:t>
+            </a:r>
+            <a:r>
+              <a:rPr sz="1400" b="0" dirty="0">
+                <a:solidFill>
+                  <a:srgbClr val="1F1F1F"/>
+                </a:solidFill>
+                <a:latin typeface="Calibri"/>
+              </a:rPr>
+              <a:t> data. </a:t>
+            </a:r>
+            <a:endParaRPr lang="en-US" sz="1400" b="0" dirty="0">
+              <a:solidFill>
+                <a:srgbClr val="1F1F1F"/>
+              </a:solidFill>
+              <a:latin typeface="Calibri"/>
+            </a:endParaRPr>
+          </a:p>
+          <a:p>
+            <a:pPr algn="l">
+              <a:spcAft>
+                <a:spcPts val="400"/>
+              </a:spcAft>
+            </a:pPr>
+            <a:endParaRPr lang="en-IN" sz="1400" dirty="0">
+              <a:solidFill>
+                <a:srgbClr val="1F1F1F"/>
+              </a:solidFill>
+              <a:latin typeface="Calibri"/>
+            </a:endParaRPr>
+          </a:p>
+          <a:p>
+            <a:pPr algn="l">
+              <a:spcAft>
+                <a:spcPts val="400"/>
+              </a:spcAft>
+            </a:pPr>
+            <a:r>
+              <a:rPr lang="en-IN" sz="1400" dirty="0">
+                <a:solidFill>
+                  <a:srgbClr val="1F1F1F"/>
+                </a:solidFill>
+                <a:latin typeface="Calibri"/>
+              </a:rPr>
+              <a:t>AUC:</a:t>
+            </a:r>
+          </a:p>
+          <a:p>
+            <a:pPr algn="l">
+              <a:spcAft>
+                <a:spcPts val="400"/>
+              </a:spcAft>
+            </a:pPr>
+            <a:r>
+              <a:rPr sz="1400" b="0" dirty="0">
+                <a:solidFill>
+                  <a:srgbClr val="1F1F1F"/>
+                </a:solidFill>
+                <a:latin typeface="Calibri"/>
+              </a:rPr>
+              <a:t>0.5 = random guess, 1.0 = perfect.</a:t>
             </a:r>
           </a:p>
         </p:txBody>
@@ -8008,7 +8194,7 @@
           <a:noFill/>
         </p:spPr>
         <p:txBody>
-          <a:bodyPr wrap="square" anchor="t" lIns="45720" rIns="45720">
+          <a:bodyPr wrap="square" lIns="45720" rIns="45720" anchor="t">
             <a:spAutoFit/>
           </a:bodyPr>
           <a:lstStyle/>
@@ -8047,7 +8233,7 @@
           <a:noFill/>
         </p:spPr>
         <p:txBody>
-          <a:bodyPr wrap="square" anchor="t" lIns="45720" rIns="45720">
+          <a:bodyPr wrap="square" lIns="45720" rIns="45720" anchor="t">
             <a:spAutoFit/>
           </a:bodyPr>
           <a:lstStyle/>
@@ -8110,7 +8296,7 @@
 </file>
 
 <file path=ppt/slides/slide6.xml><?xml version="1.0" encoding="utf-8"?>
-<p:sld xmlns:a="http://schemas.openxmlformats.org/drawingml/2006/main" xmlns:p="http://schemas.openxmlformats.org/presentationml/2006/main" xmlns:r="http://schemas.openxmlformats.org/officeDocument/2006/relationships">
+<p:sld xmlns:a="http://schemas.openxmlformats.org/drawingml/2006/main" xmlns:r="http://schemas.openxmlformats.org/officeDocument/2006/relationships" xmlns:p="http://schemas.openxmlformats.org/presentationml/2006/main">
   <p:cSld>
     <p:spTree>
       <p:nvGrpSpPr>
@@ -8118,7 +8304,14 @@
         <p:cNvGrpSpPr/>
         <p:nvPr/>
       </p:nvGrpSpPr>
-      <p:grpSpPr/>
+      <p:grpSpPr>
+        <a:xfrm>
+          <a:off x="0" y="0"/>
+          <a:ext cx="0" cy="0"/>
+          <a:chOff x="0" y="0"/>
+          <a:chExt cx="0" cy="0"/>
+        </a:xfrm>
+      </p:grpSpPr>
       <p:sp>
         <p:nvSpPr>
           <p:cNvPr id="2" name="Rectangle 1"/>
@@ -8160,6 +8353,7 @@
           <a:lstStyle/>
           <a:p>
             <a:pPr algn="ctr"/>
+            <a:endParaRPr/>
           </a:p>
         </p:txBody>
       </p:sp>
@@ -8180,7 +8374,7 @@
           <a:noFill/>
         </p:spPr>
         <p:txBody>
-          <a:bodyPr wrap="square" anchor="t" lIns="45720" rIns="45720">
+          <a:bodyPr wrap="square" lIns="45720" rIns="45720" anchor="t">
             <a:spAutoFit/>
           </a:bodyPr>
           <a:lstStyle/>
@@ -8219,7 +8413,7 @@
           <a:noFill/>
         </p:spPr>
         <p:txBody>
-          <a:bodyPr wrap="square" anchor="t" lIns="45720" rIns="45720">
+          <a:bodyPr wrap="square" lIns="45720" rIns="45720" anchor="t">
             <a:spAutoFit/>
           </a:bodyPr>
           <a:lstStyle/>
@@ -8258,7 +8452,7 @@
           <a:noFill/>
         </p:spPr>
         <p:txBody>
-          <a:bodyPr wrap="square" anchor="t" lIns="45720" rIns="45720">
+          <a:bodyPr wrap="square" lIns="45720" rIns="45720" anchor="t">
             <a:spAutoFit/>
           </a:bodyPr>
           <a:lstStyle/>
@@ -8290,7 +8484,7 @@
         </p:nvGraphicFramePr>
         <p:xfrm>
           <a:off x="548640" y="1188720"/>
-          <a:ext cx="11064240" cy="3328416"/>
+          <a:ext cx="11064240" cy="3334512"/>
         </p:xfrm>
         <a:graphic>
           <a:graphicData uri="http://schemas.openxmlformats.org/drawingml/2006/table">
@@ -8299,14 +8493,32 @@
                 <a:tableStyleId>{5C22544A-7EE6-4342-B048-85BDC9FD1C3A}</a:tableStyleId>
               </a:tblPr>
               <a:tblGrid>
-                <a:gridCol w="2743200"/>
-                <a:gridCol w="2103120"/>
-                <a:gridCol w="6217920"/>
+                <a:gridCol w="2743200">
+                  <a:extLst>
+                    <a:ext uri="{9D8B030D-6E8A-4147-A177-3AD203B41FA5}">
+                      <a16:colId xmlns:a16="http://schemas.microsoft.com/office/drawing/2014/main" val="20000"/>
+                    </a:ext>
+                  </a:extLst>
+                </a:gridCol>
+                <a:gridCol w="2103120">
+                  <a:extLst>
+                    <a:ext uri="{9D8B030D-6E8A-4147-A177-3AD203B41FA5}">
+                      <a16:colId xmlns:a16="http://schemas.microsoft.com/office/drawing/2014/main" val="20001"/>
+                    </a:ext>
+                  </a:extLst>
+                </a:gridCol>
+                <a:gridCol w="6217920">
+                  <a:extLst>
+                    <a:ext uri="{9D8B030D-6E8A-4147-A177-3AD203B41FA5}">
+                      <a16:colId xmlns:a16="http://schemas.microsoft.com/office/drawing/2014/main" val="20002"/>
+                    </a:ext>
+                  </a:extLst>
+                </a:gridCol>
               </a:tblGrid>
               <a:tr h="475488">
                 <a:tc>
                   <a:txBody>
-                    <a:bodyPr wrap="square"/>
+                    <a:bodyPr/>
                     <a:lstStyle/>
                     <a:p>
                       <a:r>
@@ -8328,7 +8540,7 @@
                 </a:tc>
                 <a:tc>
                   <a:txBody>
-                    <a:bodyPr wrap="square"/>
+                    <a:bodyPr/>
                     <a:lstStyle/>
                     <a:p>
                       <a:r>
@@ -8350,7 +8562,7 @@
                 </a:tc>
                 <a:tc>
                   <a:txBody>
-                    <a:bodyPr wrap="square"/>
+                    <a:bodyPr/>
                     <a:lstStyle/>
                     <a:p>
                       <a:r>
@@ -8370,11 +8582,16 @@
                     </a:solidFill>
                   </a:tcPr>
                 </a:tc>
+                <a:extLst>
+                  <a:ext uri="{0D108BD9-81ED-4DB2-BD59-A6C34878D82A}">
+                    <a16:rowId xmlns:a16="http://schemas.microsoft.com/office/drawing/2014/main" val="10000"/>
+                  </a:ext>
+                </a:extLst>
               </a:tr>
               <a:tr h="475488">
                 <a:tc>
                   <a:txBody>
-                    <a:bodyPr wrap="square"/>
+                    <a:bodyPr/>
                     <a:lstStyle/>
                     <a:p>
                       <a:r>
@@ -8396,7 +8613,7 @@
                 </a:tc>
                 <a:tc>
                   <a:txBody>
-                    <a:bodyPr wrap="square"/>
+                    <a:bodyPr/>
                     <a:lstStyle/>
                     <a:p>
                       <a:r>
@@ -8418,7 +8635,7 @@
                 </a:tc>
                 <a:tc>
                   <a:txBody>
-                    <a:bodyPr wrap="square"/>
+                    <a:bodyPr/>
                     <a:lstStyle/>
                     <a:p>
                       <a:r>
@@ -8438,11 +8655,16 @@
                     </a:solidFill>
                   </a:tcPr>
                 </a:tc>
+                <a:extLst>
+                  <a:ext uri="{0D108BD9-81ED-4DB2-BD59-A6C34878D82A}">
+                    <a16:rowId xmlns:a16="http://schemas.microsoft.com/office/drawing/2014/main" val="10001"/>
+                  </a:ext>
+                </a:extLst>
               </a:tr>
               <a:tr h="475488">
                 <a:tc>
                   <a:txBody>
-                    <a:bodyPr wrap="square"/>
+                    <a:bodyPr/>
                     <a:lstStyle/>
                     <a:p>
                       <a:r>
@@ -8464,7 +8686,7 @@
                 </a:tc>
                 <a:tc>
                   <a:txBody>
-                    <a:bodyPr wrap="square"/>
+                    <a:bodyPr/>
                     <a:lstStyle/>
                     <a:p>
                       <a:r>
@@ -8486,7 +8708,7 @@
                 </a:tc>
                 <a:tc>
                   <a:txBody>
-                    <a:bodyPr wrap="square"/>
+                    <a:bodyPr/>
                     <a:lstStyle/>
                     <a:p>
                       <a:r>
@@ -8506,11 +8728,16 @@
                     </a:solidFill>
                   </a:tcPr>
                 </a:tc>
+                <a:extLst>
+                  <a:ext uri="{0D108BD9-81ED-4DB2-BD59-A6C34878D82A}">
+                    <a16:rowId xmlns:a16="http://schemas.microsoft.com/office/drawing/2014/main" val="10002"/>
+                  </a:ext>
+                </a:extLst>
               </a:tr>
               <a:tr h="475488">
                 <a:tc>
                   <a:txBody>
-                    <a:bodyPr wrap="square"/>
+                    <a:bodyPr/>
                     <a:lstStyle/>
                     <a:p>
                       <a:r>
@@ -8532,7 +8759,7 @@
                 </a:tc>
                 <a:tc>
                   <a:txBody>
-                    <a:bodyPr wrap="square"/>
+                    <a:bodyPr/>
                     <a:lstStyle/>
                     <a:p>
                       <a:r>
@@ -8554,7 +8781,7 @@
                 </a:tc>
                 <a:tc>
                   <a:txBody>
-                    <a:bodyPr wrap="square"/>
+                    <a:bodyPr/>
                     <a:lstStyle/>
                     <a:p>
                       <a:r>
@@ -8574,11 +8801,16 @@
                     </a:solidFill>
                   </a:tcPr>
                 </a:tc>
+                <a:extLst>
+                  <a:ext uri="{0D108BD9-81ED-4DB2-BD59-A6C34878D82A}">
+                    <a16:rowId xmlns:a16="http://schemas.microsoft.com/office/drawing/2014/main" val="10003"/>
+                  </a:ext>
+                </a:extLst>
               </a:tr>
               <a:tr h="475488">
                 <a:tc>
                   <a:txBody>
-                    <a:bodyPr wrap="square"/>
+                    <a:bodyPr/>
                     <a:lstStyle/>
                     <a:p>
                       <a:r>
@@ -8600,7 +8832,7 @@
                 </a:tc>
                 <a:tc>
                   <a:txBody>
-                    <a:bodyPr wrap="square"/>
+                    <a:bodyPr/>
                     <a:lstStyle/>
                     <a:p>
                       <a:r>
@@ -8622,7 +8854,7 @@
                 </a:tc>
                 <a:tc>
                   <a:txBody>
-                    <a:bodyPr wrap="square"/>
+                    <a:bodyPr/>
                     <a:lstStyle/>
                     <a:p>
                       <a:r>
@@ -8642,11 +8874,16 @@
                     </a:solidFill>
                   </a:tcPr>
                 </a:tc>
+                <a:extLst>
+                  <a:ext uri="{0D108BD9-81ED-4DB2-BD59-A6C34878D82A}">
+                    <a16:rowId xmlns:a16="http://schemas.microsoft.com/office/drawing/2014/main" val="10004"/>
+                  </a:ext>
+                </a:extLst>
               </a:tr>
               <a:tr h="475488">
                 <a:tc>
                   <a:txBody>
-                    <a:bodyPr wrap="square"/>
+                    <a:bodyPr/>
                     <a:lstStyle/>
                     <a:p>
                       <a:r>
@@ -8668,7 +8905,7 @@
                 </a:tc>
                 <a:tc>
                   <a:txBody>
-                    <a:bodyPr wrap="square"/>
+                    <a:bodyPr/>
                     <a:lstStyle/>
                     <a:p>
                       <a:r>
@@ -8690,7 +8927,7 @@
                 </a:tc>
                 <a:tc>
                   <a:txBody>
-                    <a:bodyPr wrap="square"/>
+                    <a:bodyPr/>
                     <a:lstStyle/>
                     <a:p>
                       <a:r>
@@ -8710,11 +8947,16 @@
                     </a:solidFill>
                   </a:tcPr>
                 </a:tc>
+                <a:extLst>
+                  <a:ext uri="{0D108BD9-81ED-4DB2-BD59-A6C34878D82A}">
+                    <a16:rowId xmlns:a16="http://schemas.microsoft.com/office/drawing/2014/main" val="10005"/>
+                  </a:ext>
+                </a:extLst>
               </a:tr>
               <a:tr h="475488">
                 <a:tc>
                   <a:txBody>
-                    <a:bodyPr wrap="square"/>
+                    <a:bodyPr/>
                     <a:lstStyle/>
                     <a:p>
                       <a:r>
@@ -8736,7 +8978,7 @@
                 </a:tc>
                 <a:tc>
                   <a:txBody>
-                    <a:bodyPr wrap="square"/>
+                    <a:bodyPr/>
                     <a:lstStyle/>
                     <a:p>
                       <a:r>
@@ -8758,7 +9000,7 @@
                 </a:tc>
                 <a:tc>
                   <a:txBody>
-                    <a:bodyPr wrap="square"/>
+                    <a:bodyPr/>
                     <a:lstStyle/>
                     <a:p>
                       <a:r>
@@ -8778,6 +9020,11 @@
                     </a:solidFill>
                   </a:tcPr>
                 </a:tc>
+                <a:extLst>
+                  <a:ext uri="{0D108BD9-81ED-4DB2-BD59-A6C34878D82A}">
+                    <a16:rowId xmlns:a16="http://schemas.microsoft.com/office/drawing/2014/main" val="10006"/>
+                  </a:ext>
+                </a:extLst>
               </a:tr>
             </a:tbl>
           </a:graphicData>
@@ -8800,7 +9047,7 @@
           <a:noFill/>
         </p:spPr>
         <p:txBody>
-          <a:bodyPr wrap="square" anchor="t" lIns="45720" rIns="45720">
+          <a:bodyPr wrap="square" lIns="45720" rIns="45720" anchor="t">
             <a:spAutoFit/>
           </a:bodyPr>
           <a:lstStyle/>
@@ -8847,7 +9094,7 @@
 </file>
 
 <file path=ppt/slides/slide7.xml><?xml version="1.0" encoding="utf-8"?>
-<p:sld xmlns:a="http://schemas.openxmlformats.org/drawingml/2006/main" xmlns:p="http://schemas.openxmlformats.org/presentationml/2006/main" xmlns:r="http://schemas.openxmlformats.org/officeDocument/2006/relationships">
+<p:sld xmlns:a="http://schemas.openxmlformats.org/drawingml/2006/main" xmlns:r="http://schemas.openxmlformats.org/officeDocument/2006/relationships" xmlns:p="http://schemas.openxmlformats.org/presentationml/2006/main">
   <p:cSld>
     <p:spTree>
       <p:nvGrpSpPr>
@@ -8855,7 +9102,14 @@
         <p:cNvGrpSpPr/>
         <p:nvPr/>
       </p:nvGrpSpPr>
-      <p:grpSpPr/>
+      <p:grpSpPr>
+        <a:xfrm>
+          <a:off x="0" y="0"/>
+          <a:ext cx="0" cy="0"/>
+          <a:chOff x="0" y="0"/>
+          <a:chExt cx="0" cy="0"/>
+        </a:xfrm>
+      </p:grpSpPr>
       <p:sp>
         <p:nvSpPr>
           <p:cNvPr id="2" name="Rectangle 1"/>
@@ -8897,6 +9151,7 @@
           <a:lstStyle/>
           <a:p>
             <a:pPr algn="ctr"/>
+            <a:endParaRPr/>
           </a:p>
         </p:txBody>
       </p:sp>
@@ -8917,7 +9172,7 @@
           <a:noFill/>
         </p:spPr>
         <p:txBody>
-          <a:bodyPr wrap="square" anchor="t" lIns="45720" rIns="45720">
+          <a:bodyPr wrap="square" lIns="45720" rIns="45720" anchor="t">
             <a:spAutoFit/>
           </a:bodyPr>
           <a:lstStyle/>
@@ -8956,7 +9211,7 @@
           <a:noFill/>
         </p:spPr>
         <p:txBody>
-          <a:bodyPr wrap="square" anchor="t" lIns="45720" rIns="45720">
+          <a:bodyPr wrap="square" lIns="45720" rIns="45720" anchor="t">
             <a:spAutoFit/>
           </a:bodyPr>
           <a:lstStyle/>
@@ -8995,7 +9250,7 @@
           <a:noFill/>
         </p:spPr>
         <p:txBody>
-          <a:bodyPr wrap="square" anchor="t" lIns="45720" rIns="45720">
+          <a:bodyPr wrap="square" lIns="45720" rIns="45720" anchor="t">
             <a:spAutoFit/>
           </a:bodyPr>
           <a:lstStyle/>
@@ -9027,7 +9282,7 @@
         </p:nvGraphicFramePr>
         <p:xfrm>
           <a:off x="548640" y="1188720"/>
-          <a:ext cx="5852160" cy="2468880"/>
+          <a:ext cx="5852160" cy="2487168"/>
         </p:xfrm>
         <a:graphic>
           <a:graphicData uri="http://schemas.openxmlformats.org/drawingml/2006/table">
@@ -9036,14 +9291,32 @@
                 <a:tableStyleId>{5C22544A-7EE6-4342-B048-85BDC9FD1C3A}</a:tableStyleId>
               </a:tblPr>
               <a:tblGrid>
-                <a:gridCol w="1920240"/>
-                <a:gridCol w="2011680"/>
-                <a:gridCol w="1920240"/>
+                <a:gridCol w="1920240">
+                  <a:extLst>
+                    <a:ext uri="{9D8B030D-6E8A-4147-A177-3AD203B41FA5}">
+                      <a16:colId xmlns:a16="http://schemas.microsoft.com/office/drawing/2014/main" val="20000"/>
+                    </a:ext>
+                  </a:extLst>
+                </a:gridCol>
+                <a:gridCol w="2011680">
+                  <a:extLst>
+                    <a:ext uri="{9D8B030D-6E8A-4147-A177-3AD203B41FA5}">
+                      <a16:colId xmlns:a16="http://schemas.microsoft.com/office/drawing/2014/main" val="20001"/>
+                    </a:ext>
+                  </a:extLst>
+                </a:gridCol>
+                <a:gridCol w="1920240">
+                  <a:extLst>
+                    <a:ext uri="{9D8B030D-6E8A-4147-A177-3AD203B41FA5}">
+                      <a16:colId xmlns:a16="http://schemas.microsoft.com/office/drawing/2014/main" val="20002"/>
+                    </a:ext>
+                  </a:extLst>
+                </a:gridCol>
               </a:tblGrid>
               <a:tr h="411480">
                 <a:tc>
                   <a:txBody>
-                    <a:bodyPr wrap="square"/>
+                    <a:bodyPr/>
                     <a:lstStyle/>
                     <a:p>
                       <a:r>
@@ -9065,7 +9338,7 @@
                 </a:tc>
                 <a:tc>
                   <a:txBody>
-                    <a:bodyPr wrap="square"/>
+                    <a:bodyPr/>
                     <a:lstStyle/>
                     <a:p>
                       <a:r>
@@ -9087,7 +9360,7 @@
                 </a:tc>
                 <a:tc>
                   <a:txBody>
-                    <a:bodyPr wrap="square"/>
+                    <a:bodyPr/>
                     <a:lstStyle/>
                     <a:p>
                       <a:r>
@@ -9107,11 +9380,16 @@
                     </a:solidFill>
                   </a:tcPr>
                 </a:tc>
+                <a:extLst>
+                  <a:ext uri="{0D108BD9-81ED-4DB2-BD59-A6C34878D82A}">
+                    <a16:rowId xmlns:a16="http://schemas.microsoft.com/office/drawing/2014/main" val="10000"/>
+                  </a:ext>
+                </a:extLst>
               </a:tr>
               <a:tr h="411480">
                 <a:tc>
                   <a:txBody>
-                    <a:bodyPr wrap="square"/>
+                    <a:bodyPr/>
                     <a:lstStyle/>
                     <a:p>
                       <a:r>
@@ -9133,7 +9411,7 @@
                 </a:tc>
                 <a:tc>
                   <a:txBody>
-                    <a:bodyPr wrap="square"/>
+                    <a:bodyPr/>
                     <a:lstStyle/>
                     <a:p>
                       <a:r>
@@ -9155,7 +9433,7 @@
                 </a:tc>
                 <a:tc>
                   <a:txBody>
-                    <a:bodyPr wrap="square"/>
+                    <a:bodyPr/>
                     <a:lstStyle/>
                     <a:p>
                       <a:r>
@@ -9175,11 +9453,16 @@
                     </a:solidFill>
                   </a:tcPr>
                 </a:tc>
+                <a:extLst>
+                  <a:ext uri="{0D108BD9-81ED-4DB2-BD59-A6C34878D82A}">
+                    <a16:rowId xmlns:a16="http://schemas.microsoft.com/office/drawing/2014/main" val="10001"/>
+                  </a:ext>
+                </a:extLst>
               </a:tr>
               <a:tr h="411480">
                 <a:tc>
                   <a:txBody>
-                    <a:bodyPr wrap="square"/>
+                    <a:bodyPr/>
                     <a:lstStyle/>
                     <a:p>
                       <a:r>
@@ -9201,7 +9484,7 @@
                 </a:tc>
                 <a:tc>
                   <a:txBody>
-                    <a:bodyPr wrap="square"/>
+                    <a:bodyPr/>
                     <a:lstStyle/>
                     <a:p>
                       <a:r>
@@ -9223,7 +9506,7 @@
                 </a:tc>
                 <a:tc>
                   <a:txBody>
-                    <a:bodyPr wrap="square"/>
+                    <a:bodyPr/>
                     <a:lstStyle/>
                     <a:p>
                       <a:r>
@@ -9243,11 +9526,16 @@
                     </a:solidFill>
                   </a:tcPr>
                 </a:tc>
+                <a:extLst>
+                  <a:ext uri="{0D108BD9-81ED-4DB2-BD59-A6C34878D82A}">
+                    <a16:rowId xmlns:a16="http://schemas.microsoft.com/office/drawing/2014/main" val="10002"/>
+                  </a:ext>
+                </a:extLst>
               </a:tr>
               <a:tr h="411480">
                 <a:tc>
                   <a:txBody>
-                    <a:bodyPr wrap="square"/>
+                    <a:bodyPr/>
                     <a:lstStyle/>
                     <a:p>
                       <a:r>
@@ -9269,7 +9557,7 @@
                 </a:tc>
                 <a:tc>
                   <a:txBody>
-                    <a:bodyPr wrap="square"/>
+                    <a:bodyPr/>
                     <a:lstStyle/>
                     <a:p>
                       <a:r>
@@ -9291,7 +9579,7 @@
                 </a:tc>
                 <a:tc>
                   <a:txBody>
-                    <a:bodyPr wrap="square"/>
+                    <a:bodyPr/>
                     <a:lstStyle/>
                     <a:p>
                       <a:r>
@@ -9311,11 +9599,16 @@
                     </a:solidFill>
                   </a:tcPr>
                 </a:tc>
+                <a:extLst>
+                  <a:ext uri="{0D108BD9-81ED-4DB2-BD59-A6C34878D82A}">
+                    <a16:rowId xmlns:a16="http://schemas.microsoft.com/office/drawing/2014/main" val="10003"/>
+                  </a:ext>
+                </a:extLst>
               </a:tr>
               <a:tr h="411480">
                 <a:tc>
                   <a:txBody>
-                    <a:bodyPr wrap="square"/>
+                    <a:bodyPr/>
                     <a:lstStyle/>
                     <a:p>
                       <a:r>
@@ -9337,7 +9630,7 @@
                 </a:tc>
                 <a:tc>
                   <a:txBody>
-                    <a:bodyPr wrap="square"/>
+                    <a:bodyPr/>
                     <a:lstStyle/>
                     <a:p>
                       <a:r>
@@ -9359,7 +9652,7 @@
                 </a:tc>
                 <a:tc>
                   <a:txBody>
-                    <a:bodyPr wrap="square"/>
+                    <a:bodyPr/>
                     <a:lstStyle/>
                     <a:p>
                       <a:r>
@@ -9379,11 +9672,16 @@
                     </a:solidFill>
                   </a:tcPr>
                 </a:tc>
+                <a:extLst>
+                  <a:ext uri="{0D108BD9-81ED-4DB2-BD59-A6C34878D82A}">
+                    <a16:rowId xmlns:a16="http://schemas.microsoft.com/office/drawing/2014/main" val="10004"/>
+                  </a:ext>
+                </a:extLst>
               </a:tr>
               <a:tr h="411480">
                 <a:tc>
                   <a:txBody>
-                    <a:bodyPr wrap="square"/>
+                    <a:bodyPr/>
                     <a:lstStyle/>
                     <a:p>
                       <a:r>
@@ -9405,7 +9703,7 @@
                 </a:tc>
                 <a:tc>
                   <a:txBody>
-                    <a:bodyPr wrap="square"/>
+                    <a:bodyPr/>
                     <a:lstStyle/>
                     <a:p>
                       <a:r>
@@ -9427,7 +9725,7 @@
                 </a:tc>
                 <a:tc>
                   <a:txBody>
-                    <a:bodyPr wrap="square"/>
+                    <a:bodyPr/>
                     <a:lstStyle/>
                     <a:p>
                       <a:r>
@@ -9447,6 +9745,11 @@
                     </a:solidFill>
                   </a:tcPr>
                 </a:tc>
+                <a:extLst>
+                  <a:ext uri="{0D108BD9-81ED-4DB2-BD59-A6C34878D82A}">
+                    <a16:rowId xmlns:a16="http://schemas.microsoft.com/office/drawing/2014/main" val="10005"/>
+                  </a:ext>
+                </a:extLst>
               </a:tr>
             </a:tbl>
           </a:graphicData>
@@ -9469,7 +9772,7 @@
           <a:noFill/>
         </p:spPr>
         <p:txBody>
-          <a:bodyPr wrap="square" anchor="t" lIns="45720" rIns="45720">
+          <a:bodyPr wrap="square" lIns="45720" rIns="45720" anchor="t">
             <a:spAutoFit/>
           </a:bodyPr>
           <a:lstStyle/>
@@ -9524,7 +9827,7 @@
           <a:noFill/>
         </p:spPr>
         <p:txBody>
-          <a:bodyPr wrap="square" anchor="t" lIns="45720" rIns="45720">
+          <a:bodyPr wrap="square" lIns="45720" rIns="45720" anchor="t">
             <a:spAutoFit/>
           </a:bodyPr>
           <a:lstStyle/>
@@ -9565,15 +9868,39 @@
                 <a:tableStyleId>{5C22544A-7EE6-4342-B048-85BDC9FD1C3A}</a:tableStyleId>
               </a:tblPr>
               <a:tblGrid>
-                <a:gridCol w="1097280"/>
-                <a:gridCol w="2743200"/>
-                <a:gridCol w="1005840"/>
-                <a:gridCol w="1005840"/>
+                <a:gridCol w="1097280">
+                  <a:extLst>
+                    <a:ext uri="{9D8B030D-6E8A-4147-A177-3AD203B41FA5}">
+                      <a16:colId xmlns:a16="http://schemas.microsoft.com/office/drawing/2014/main" val="20000"/>
+                    </a:ext>
+                  </a:extLst>
+                </a:gridCol>
+                <a:gridCol w="2743200">
+                  <a:extLst>
+                    <a:ext uri="{9D8B030D-6E8A-4147-A177-3AD203B41FA5}">
+                      <a16:colId xmlns:a16="http://schemas.microsoft.com/office/drawing/2014/main" val="20001"/>
+                    </a:ext>
+                  </a:extLst>
+                </a:gridCol>
+                <a:gridCol w="1005840">
+                  <a:extLst>
+                    <a:ext uri="{9D8B030D-6E8A-4147-A177-3AD203B41FA5}">
+                      <a16:colId xmlns:a16="http://schemas.microsoft.com/office/drawing/2014/main" val="20002"/>
+                    </a:ext>
+                  </a:extLst>
+                </a:gridCol>
+                <a:gridCol w="1005840">
+                  <a:extLst>
+                    <a:ext uri="{9D8B030D-6E8A-4147-A177-3AD203B41FA5}">
+                      <a16:colId xmlns:a16="http://schemas.microsoft.com/office/drawing/2014/main" val="20003"/>
+                    </a:ext>
+                  </a:extLst>
+                </a:gridCol>
               </a:tblGrid>
               <a:tr h="365760">
                 <a:tc>
                   <a:txBody>
-                    <a:bodyPr wrap="square"/>
+                    <a:bodyPr/>
                     <a:lstStyle/>
                     <a:p>
                       <a:r>
@@ -9595,7 +9922,7 @@
                 </a:tc>
                 <a:tc>
                   <a:txBody>
-                    <a:bodyPr wrap="square"/>
+                    <a:bodyPr/>
                     <a:lstStyle/>
                     <a:p>
                       <a:r>
@@ -9617,7 +9944,7 @@
                 </a:tc>
                 <a:tc>
                   <a:txBody>
-                    <a:bodyPr wrap="square"/>
+                    <a:bodyPr/>
                     <a:lstStyle/>
                     <a:p>
                       <a:r>
@@ -9639,7 +9966,7 @@
                 </a:tc>
                 <a:tc>
                   <a:txBody>
-                    <a:bodyPr wrap="square"/>
+                    <a:bodyPr/>
                     <a:lstStyle/>
                     <a:p>
                       <a:r>
@@ -9659,11 +9986,16 @@
                     </a:solidFill>
                   </a:tcPr>
                 </a:tc>
+                <a:extLst>
+                  <a:ext uri="{0D108BD9-81ED-4DB2-BD59-A6C34878D82A}">
+                    <a16:rowId xmlns:a16="http://schemas.microsoft.com/office/drawing/2014/main" val="10000"/>
+                  </a:ext>
+                </a:extLst>
               </a:tr>
               <a:tr h="365760">
                 <a:tc>
                   <a:txBody>
-                    <a:bodyPr wrap="square"/>
+                    <a:bodyPr/>
                     <a:lstStyle/>
                     <a:p>
                       <a:r>
@@ -9685,7 +10017,7 @@
                 </a:tc>
                 <a:tc>
                   <a:txBody>
-                    <a:bodyPr wrap="square"/>
+                    <a:bodyPr/>
                     <a:lstStyle/>
                     <a:p>
                       <a:r>
@@ -9707,7 +10039,7 @@
                 </a:tc>
                 <a:tc>
                   <a:txBody>
-                    <a:bodyPr wrap="square"/>
+                    <a:bodyPr/>
                     <a:lstStyle/>
                     <a:p>
                       <a:r>
@@ -9729,7 +10061,7 @@
                 </a:tc>
                 <a:tc>
                   <a:txBody>
-                    <a:bodyPr wrap="square"/>
+                    <a:bodyPr/>
                     <a:lstStyle/>
                     <a:p>
                       <a:r>
@@ -9749,11 +10081,16 @@
                     </a:solidFill>
                   </a:tcPr>
                 </a:tc>
+                <a:extLst>
+                  <a:ext uri="{0D108BD9-81ED-4DB2-BD59-A6C34878D82A}">
+                    <a16:rowId xmlns:a16="http://schemas.microsoft.com/office/drawing/2014/main" val="10001"/>
+                  </a:ext>
+                </a:extLst>
               </a:tr>
               <a:tr h="365760">
                 <a:tc>
                   <a:txBody>
-                    <a:bodyPr wrap="square"/>
+                    <a:bodyPr/>
                     <a:lstStyle/>
                     <a:p>
                       <a:r>
@@ -9775,7 +10112,7 @@
                 </a:tc>
                 <a:tc>
                   <a:txBody>
-                    <a:bodyPr wrap="square"/>
+                    <a:bodyPr/>
                     <a:lstStyle/>
                     <a:p>
                       <a:r>
@@ -9797,7 +10134,7 @@
                 </a:tc>
                 <a:tc>
                   <a:txBody>
-                    <a:bodyPr wrap="square"/>
+                    <a:bodyPr/>
                     <a:lstStyle/>
                     <a:p>
                       <a:r>
@@ -9819,7 +10156,7 @@
                 </a:tc>
                 <a:tc>
                   <a:txBody>
-                    <a:bodyPr wrap="square"/>
+                    <a:bodyPr/>
                     <a:lstStyle/>
                     <a:p>
                       <a:r>
@@ -9839,6 +10176,11 @@
                     </a:solidFill>
                   </a:tcPr>
                 </a:tc>
+                <a:extLst>
+                  <a:ext uri="{0D108BD9-81ED-4DB2-BD59-A6C34878D82A}">
+                    <a16:rowId xmlns:a16="http://schemas.microsoft.com/office/drawing/2014/main" val="10002"/>
+                  </a:ext>
+                </a:extLst>
               </a:tr>
             </a:tbl>
           </a:graphicData>
@@ -9861,7 +10203,7 @@
           <a:noFill/>
         </p:spPr>
         <p:txBody>
-          <a:bodyPr wrap="square" anchor="t" lIns="45720" rIns="45720">
+          <a:bodyPr wrap="square" lIns="45720" rIns="45720" anchor="t">
             <a:spAutoFit/>
           </a:bodyPr>
           <a:lstStyle/>
@@ -9926,6 +10268,7 @@
           <a:lstStyle/>
           <a:p>
             <a:pPr algn="ctr"/>
+            <a:endParaRPr/>
           </a:p>
         </p:txBody>
       </p:sp>
@@ -9946,7 +10289,7 @@
           <a:noFill/>
         </p:spPr>
         <p:txBody>
-          <a:bodyPr wrap="square" anchor="t" lIns="45720" rIns="45720">
+          <a:bodyPr wrap="square" lIns="45720" rIns="45720" anchor="t">
             <a:spAutoFit/>
           </a:bodyPr>
           <a:lstStyle/>
@@ -10105,7 +10448,7 @@
 </file>
 
 <file path=ppt/slides/slide8.xml><?xml version="1.0" encoding="utf-8"?>
-<p:sld xmlns:a="http://schemas.openxmlformats.org/drawingml/2006/main" xmlns:p="http://schemas.openxmlformats.org/presentationml/2006/main" xmlns:r="http://schemas.openxmlformats.org/officeDocument/2006/relationships">
+<p:sld xmlns:a="http://schemas.openxmlformats.org/drawingml/2006/main" xmlns:r="http://schemas.openxmlformats.org/officeDocument/2006/relationships" xmlns:p="http://schemas.openxmlformats.org/presentationml/2006/main">
   <p:cSld>
     <p:spTree>
       <p:nvGrpSpPr>
@@ -10113,7 +10456,14 @@
         <p:cNvGrpSpPr/>
         <p:nvPr/>
       </p:nvGrpSpPr>
-      <p:grpSpPr/>
+      <p:grpSpPr>
+        <a:xfrm>
+          <a:off x="0" y="0"/>
+          <a:ext cx="0" cy="0"/>
+          <a:chOff x="0" y="0"/>
+          <a:chExt cx="0" cy="0"/>
+        </a:xfrm>
+      </p:grpSpPr>
       <p:sp>
         <p:nvSpPr>
           <p:cNvPr id="2" name="Rectangle 1"/>
@@ -10155,6 +10505,7 @@
           <a:lstStyle/>
           <a:p>
             <a:pPr algn="ctr"/>
+            <a:endParaRPr/>
           </a:p>
         </p:txBody>
       </p:sp>
@@ -10175,7 +10526,7 @@
           <a:noFill/>
         </p:spPr>
         <p:txBody>
-          <a:bodyPr wrap="square" anchor="t" lIns="45720" rIns="45720">
+          <a:bodyPr wrap="square" lIns="45720" rIns="45720" anchor="t">
             <a:spAutoFit/>
           </a:bodyPr>
           <a:lstStyle/>
@@ -10214,7 +10565,7 @@
           <a:noFill/>
         </p:spPr>
         <p:txBody>
-          <a:bodyPr wrap="square" anchor="t" lIns="45720" rIns="45720">
+          <a:bodyPr wrap="square" lIns="45720" rIns="45720" anchor="t">
             <a:spAutoFit/>
           </a:bodyPr>
           <a:lstStyle/>
@@ -10253,7 +10604,7 @@
           <a:noFill/>
         </p:spPr>
         <p:txBody>
-          <a:bodyPr wrap="square" anchor="t" lIns="45720" rIns="45720">
+          <a:bodyPr wrap="square" lIns="45720" rIns="45720" anchor="t">
             <a:spAutoFit/>
           </a:bodyPr>
           <a:lstStyle/>
@@ -10294,15 +10645,39 @@
                 <a:tableStyleId>{5C22544A-7EE6-4342-B048-85BDC9FD1C3A}</a:tableStyleId>
               </a:tblPr>
               <a:tblGrid>
-                <a:gridCol w="2011680"/>
-                <a:gridCol w="3108960"/>
-                <a:gridCol w="3474720"/>
-                <a:gridCol w="2468880"/>
+                <a:gridCol w="2011680">
+                  <a:extLst>
+                    <a:ext uri="{9D8B030D-6E8A-4147-A177-3AD203B41FA5}">
+                      <a16:colId xmlns:a16="http://schemas.microsoft.com/office/drawing/2014/main" val="20000"/>
+                    </a:ext>
+                  </a:extLst>
+                </a:gridCol>
+                <a:gridCol w="3108960">
+                  <a:extLst>
+                    <a:ext uri="{9D8B030D-6E8A-4147-A177-3AD203B41FA5}">
+                      <a16:colId xmlns:a16="http://schemas.microsoft.com/office/drawing/2014/main" val="20001"/>
+                    </a:ext>
+                  </a:extLst>
+                </a:gridCol>
+                <a:gridCol w="3474720">
+                  <a:extLst>
+                    <a:ext uri="{9D8B030D-6E8A-4147-A177-3AD203B41FA5}">
+                      <a16:colId xmlns:a16="http://schemas.microsoft.com/office/drawing/2014/main" val="20002"/>
+                    </a:ext>
+                  </a:extLst>
+                </a:gridCol>
+                <a:gridCol w="2468880">
+                  <a:extLst>
+                    <a:ext uri="{9D8B030D-6E8A-4147-A177-3AD203B41FA5}">
+                      <a16:colId xmlns:a16="http://schemas.microsoft.com/office/drawing/2014/main" val="20003"/>
+                    </a:ext>
+                  </a:extLst>
+                </a:gridCol>
               </a:tblGrid>
               <a:tr h="457200">
                 <a:tc>
                   <a:txBody>
-                    <a:bodyPr wrap="square"/>
+                    <a:bodyPr/>
                     <a:lstStyle/>
                     <a:p>
                       <a:r>
@@ -10324,7 +10699,7 @@
                 </a:tc>
                 <a:tc>
                   <a:txBody>
-                    <a:bodyPr wrap="square"/>
+                    <a:bodyPr/>
                     <a:lstStyle/>
                     <a:p>
                       <a:r>
@@ -10346,7 +10721,7 @@
                 </a:tc>
                 <a:tc>
                   <a:txBody>
-                    <a:bodyPr wrap="square"/>
+                    <a:bodyPr/>
                     <a:lstStyle/>
                     <a:p>
                       <a:r>
@@ -10368,7 +10743,7 @@
                 </a:tc>
                 <a:tc>
                   <a:txBody>
-                    <a:bodyPr wrap="square"/>
+                    <a:bodyPr/>
                     <a:lstStyle/>
                     <a:p>
                       <a:r>
@@ -10388,11 +10763,16 @@
                     </a:solidFill>
                   </a:tcPr>
                 </a:tc>
+                <a:extLst>
+                  <a:ext uri="{0D108BD9-81ED-4DB2-BD59-A6C34878D82A}">
+                    <a16:rowId xmlns:a16="http://schemas.microsoft.com/office/drawing/2014/main" val="10000"/>
+                  </a:ext>
+                </a:extLst>
               </a:tr>
               <a:tr h="457200">
                 <a:tc>
                   <a:txBody>
-                    <a:bodyPr wrap="square"/>
+                    <a:bodyPr/>
                     <a:lstStyle/>
                     <a:p>
                       <a:r>
@@ -10414,7 +10794,7 @@
                 </a:tc>
                 <a:tc>
                   <a:txBody>
-                    <a:bodyPr wrap="square"/>
+                    <a:bodyPr/>
                     <a:lstStyle/>
                     <a:p>
                       <a:r>
@@ -10436,7 +10816,7 @@
                 </a:tc>
                 <a:tc>
                   <a:txBody>
-                    <a:bodyPr wrap="square"/>
+                    <a:bodyPr/>
                     <a:lstStyle/>
                     <a:p>
                       <a:r>
@@ -10458,7 +10838,7 @@
                 </a:tc>
                 <a:tc>
                   <a:txBody>
-                    <a:bodyPr wrap="square"/>
+                    <a:bodyPr/>
                     <a:lstStyle/>
                     <a:p>
                       <a:r>
@@ -10478,11 +10858,16 @@
                     </a:solidFill>
                   </a:tcPr>
                 </a:tc>
+                <a:extLst>
+                  <a:ext uri="{0D108BD9-81ED-4DB2-BD59-A6C34878D82A}">
+                    <a16:rowId xmlns:a16="http://schemas.microsoft.com/office/drawing/2014/main" val="10001"/>
+                  </a:ext>
+                </a:extLst>
               </a:tr>
               <a:tr h="457200">
                 <a:tc>
                   <a:txBody>
-                    <a:bodyPr wrap="square"/>
+                    <a:bodyPr/>
                     <a:lstStyle/>
                     <a:p>
                       <a:r>
@@ -10504,7 +10889,7 @@
                 </a:tc>
                 <a:tc>
                   <a:txBody>
-                    <a:bodyPr wrap="square"/>
+                    <a:bodyPr/>
                     <a:lstStyle/>
                     <a:p>
                       <a:r>
@@ -10526,7 +10911,7 @@
                 </a:tc>
                 <a:tc>
                   <a:txBody>
-                    <a:bodyPr wrap="square"/>
+                    <a:bodyPr/>
                     <a:lstStyle/>
                     <a:p>
                       <a:r>
@@ -10548,7 +10933,7 @@
                 </a:tc>
                 <a:tc>
                   <a:txBody>
-                    <a:bodyPr wrap="square"/>
+                    <a:bodyPr/>
                     <a:lstStyle/>
                     <a:p>
                       <a:r>
@@ -10568,11 +10953,16 @@
                     </a:solidFill>
                   </a:tcPr>
                 </a:tc>
+                <a:extLst>
+                  <a:ext uri="{0D108BD9-81ED-4DB2-BD59-A6C34878D82A}">
+                    <a16:rowId xmlns:a16="http://schemas.microsoft.com/office/drawing/2014/main" val="10002"/>
+                  </a:ext>
+                </a:extLst>
               </a:tr>
               <a:tr h="457200">
                 <a:tc>
                   <a:txBody>
-                    <a:bodyPr wrap="square"/>
+                    <a:bodyPr/>
                     <a:lstStyle/>
                     <a:p>
                       <a:r>
@@ -10594,7 +10984,7 @@
                 </a:tc>
                 <a:tc>
                   <a:txBody>
-                    <a:bodyPr wrap="square"/>
+                    <a:bodyPr/>
                     <a:lstStyle/>
                     <a:p>
                       <a:r>
@@ -10616,7 +11006,7 @@
                 </a:tc>
                 <a:tc>
                   <a:txBody>
-                    <a:bodyPr wrap="square"/>
+                    <a:bodyPr/>
                     <a:lstStyle/>
                     <a:p>
                       <a:r>
@@ -10638,7 +11028,7 @@
                 </a:tc>
                 <a:tc>
                   <a:txBody>
-                    <a:bodyPr wrap="square"/>
+                    <a:bodyPr/>
                     <a:lstStyle/>
                     <a:p>
                       <a:r>
@@ -10658,11 +11048,16 @@
                     </a:solidFill>
                   </a:tcPr>
                 </a:tc>
+                <a:extLst>
+                  <a:ext uri="{0D108BD9-81ED-4DB2-BD59-A6C34878D82A}">
+                    <a16:rowId xmlns:a16="http://schemas.microsoft.com/office/drawing/2014/main" val="10003"/>
+                  </a:ext>
+                </a:extLst>
               </a:tr>
               <a:tr h="457200">
                 <a:tc>
                   <a:txBody>
-                    <a:bodyPr wrap="square"/>
+                    <a:bodyPr/>
                     <a:lstStyle/>
                     <a:p>
                       <a:r>
@@ -10684,7 +11079,7 @@
                 </a:tc>
                 <a:tc>
                   <a:txBody>
-                    <a:bodyPr wrap="square"/>
+                    <a:bodyPr/>
                     <a:lstStyle/>
                     <a:p>
                       <a:r>
@@ -10706,7 +11101,7 @@
                 </a:tc>
                 <a:tc>
                   <a:txBody>
-                    <a:bodyPr wrap="square"/>
+                    <a:bodyPr/>
                     <a:lstStyle/>
                     <a:p>
                       <a:r>
@@ -10728,7 +11123,7 @@
                 </a:tc>
                 <a:tc>
                   <a:txBody>
-                    <a:bodyPr wrap="square"/>
+                    <a:bodyPr/>
                     <a:lstStyle/>
                     <a:p>
                       <a:r>
@@ -10748,11 +11143,16 @@
                     </a:solidFill>
                   </a:tcPr>
                 </a:tc>
+                <a:extLst>
+                  <a:ext uri="{0D108BD9-81ED-4DB2-BD59-A6C34878D82A}">
+                    <a16:rowId xmlns:a16="http://schemas.microsoft.com/office/drawing/2014/main" val="10004"/>
+                  </a:ext>
+                </a:extLst>
               </a:tr>
               <a:tr h="457200">
                 <a:tc>
                   <a:txBody>
-                    <a:bodyPr wrap="square"/>
+                    <a:bodyPr/>
                     <a:lstStyle/>
                     <a:p>
                       <a:r>
@@ -10774,7 +11174,7 @@
                 </a:tc>
                 <a:tc>
                   <a:txBody>
-                    <a:bodyPr wrap="square"/>
+                    <a:bodyPr/>
                     <a:lstStyle/>
                     <a:p>
                       <a:r>
@@ -10796,7 +11196,7 @@
                 </a:tc>
                 <a:tc>
                   <a:txBody>
-                    <a:bodyPr wrap="square"/>
+                    <a:bodyPr/>
                     <a:lstStyle/>
                     <a:p>
                       <a:r>
@@ -10818,7 +11218,7 @@
                 </a:tc>
                 <a:tc>
                   <a:txBody>
-                    <a:bodyPr wrap="square"/>
+                    <a:bodyPr/>
                     <a:lstStyle/>
                     <a:p>
                       <a:r>
@@ -10838,6 +11238,11 @@
                     </a:solidFill>
                   </a:tcPr>
                 </a:tc>
+                <a:extLst>
+                  <a:ext uri="{0D108BD9-81ED-4DB2-BD59-A6C34878D82A}">
+                    <a16:rowId xmlns:a16="http://schemas.microsoft.com/office/drawing/2014/main" val="10005"/>
+                  </a:ext>
+                </a:extLst>
               </a:tr>
             </a:tbl>
           </a:graphicData>
@@ -10860,7 +11265,7 @@
           <a:noFill/>
         </p:spPr>
         <p:txBody>
-          <a:bodyPr wrap="square" anchor="t" lIns="45720" rIns="45720">
+          <a:bodyPr wrap="square" lIns="45720" rIns="45720" anchor="t">
             <a:spAutoFit/>
           </a:bodyPr>
           <a:lstStyle/>
@@ -10899,7 +11304,7 @@
           <a:noFill/>
         </p:spPr>
         <p:txBody>
-          <a:bodyPr wrap="square" anchor="t" lIns="45720" rIns="45720">
+          <a:bodyPr wrap="square" lIns="45720" rIns="45720" anchor="t">
             <a:spAutoFit/>
           </a:bodyPr>
           <a:lstStyle/>
@@ -10962,7 +11367,7 @@
 </file>
 
 <file path=ppt/slides/slide9.xml><?xml version="1.0" encoding="utf-8"?>
-<p:sld xmlns:a="http://schemas.openxmlformats.org/drawingml/2006/main" xmlns:p="http://schemas.openxmlformats.org/presentationml/2006/main" xmlns:r="http://schemas.openxmlformats.org/officeDocument/2006/relationships">
+<p:sld xmlns:a="http://schemas.openxmlformats.org/drawingml/2006/main" xmlns:r="http://schemas.openxmlformats.org/officeDocument/2006/relationships" xmlns:p="http://schemas.openxmlformats.org/presentationml/2006/main">
   <p:cSld>
     <p:spTree>
       <p:nvGrpSpPr>
@@ -10970,7 +11375,14 @@
         <p:cNvGrpSpPr/>
         <p:nvPr/>
       </p:nvGrpSpPr>
-      <p:grpSpPr/>
+      <p:grpSpPr>
+        <a:xfrm>
+          <a:off x="0" y="0"/>
+          <a:ext cx="0" cy="0"/>
+          <a:chOff x="0" y="0"/>
+          <a:chExt cx="0" cy="0"/>
+        </a:xfrm>
+      </p:grpSpPr>
       <p:sp>
         <p:nvSpPr>
           <p:cNvPr id="2" name="Rectangle 1"/>
@@ -11012,6 +11424,7 @@
           <a:lstStyle/>
           <a:p>
             <a:pPr algn="ctr"/>
+            <a:endParaRPr/>
           </a:p>
         </p:txBody>
       </p:sp>
@@ -11032,7 +11445,7 @@
           <a:noFill/>
         </p:spPr>
         <p:txBody>
-          <a:bodyPr wrap="square" anchor="t" lIns="45720" rIns="45720">
+          <a:bodyPr wrap="square" lIns="45720" rIns="45720" anchor="t">
             <a:spAutoFit/>
           </a:bodyPr>
           <a:lstStyle/>
@@ -11071,7 +11484,7 @@
           <a:noFill/>
         </p:spPr>
         <p:txBody>
-          <a:bodyPr wrap="square" anchor="t" lIns="45720" rIns="45720">
+          <a:bodyPr wrap="square" lIns="45720" rIns="45720" anchor="t">
             <a:spAutoFit/>
           </a:bodyPr>
           <a:lstStyle/>
@@ -11110,7 +11523,7 @@
           <a:noFill/>
         </p:spPr>
         <p:txBody>
-          <a:bodyPr wrap="square" anchor="t" lIns="45720" rIns="45720">
+          <a:bodyPr wrap="square" lIns="45720" rIns="45720" anchor="t">
             <a:spAutoFit/>
           </a:bodyPr>
           <a:lstStyle/>
@@ -11177,6 +11590,7 @@
           <a:lstStyle/>
           <a:p>
             <a:pPr algn="ctr"/>
+            <a:endParaRPr/>
           </a:p>
         </p:txBody>
       </p:sp>
@@ -11189,7 +11603,7 @@
         <p:spPr>
           <a:xfrm>
             <a:off x="685800" y="1188720"/>
-            <a:ext cx="6583680" cy="3474720"/>
+            <a:ext cx="6583680" cy="3595856"/>
           </a:xfrm>
           <a:prstGeom prst="rect">
             <a:avLst/>
@@ -11197,7 +11611,7 @@
           <a:noFill/>
         </p:spPr>
         <p:txBody>
-          <a:bodyPr wrap="square" anchor="t" lIns="45720" rIns="45720">
+          <a:bodyPr wrap="square" lIns="45720" rIns="45720" anchor="t">
             <a:spAutoFit/>
           </a:bodyPr>
           <a:lstStyle/>
@@ -11208,7 +11622,7 @@
               </a:spcAft>
             </a:pPr>
             <a:r>
-              <a:rPr sz="1300" b="1">
+              <a:rPr sz="1300" b="1" dirty="0">
                 <a:solidFill>
                   <a:srgbClr val="1B364B"/>
                 </a:solidFill>
@@ -11224,7 +11638,7 @@
               </a:spcAft>
             </a:pPr>
             <a:r>
-              <a:rPr sz="1200" b="0">
+              <a:rPr sz="1200" b="0" dirty="0">
                 <a:solidFill>
                   <a:srgbClr val="1F1F1F"/>
                 </a:solidFill>
@@ -11240,7 +11654,7 @@
               </a:spcAft>
             </a:pPr>
             <a:r>
-              <a:rPr sz="1200" b="0">
+              <a:rPr sz="1200" b="0" dirty="0">
                 <a:solidFill>
                   <a:srgbClr val="1F1F1F"/>
                 </a:solidFill>
@@ -11256,7 +11670,7 @@
               </a:spcAft>
             </a:pPr>
             <a:r>
-              <a:rPr sz="1200" b="0">
+              <a:rPr sz="1200" b="0" dirty="0">
                 <a:solidFill>
                   <a:srgbClr val="0F7C8C"/>
                 </a:solidFill>
@@ -11272,14 +11686,20 @@
               </a:spcAft>
             </a:pPr>
             <a:r>
-              <a:rPr sz="1200" b="0">
+              <a:rPr sz="1200" b="0" dirty="0">
                 <a:solidFill>
                   <a:srgbClr val="1F1F1F"/>
                 </a:solidFill>
                 <a:latin typeface="Calibri"/>
               </a:rPr>
-              <a:t>Tutor: What is 100 ÷ 20?   Learner: 5 ✓</a:t>
-            </a:r>
+              <a:t>Tutor: What is 100 ÷ 20?   </a:t>
+            </a:r>
+            <a:endParaRPr lang="en-US" sz="1200" b="0" dirty="0">
+              <a:solidFill>
+                <a:srgbClr val="1F1F1F"/>
+              </a:solidFill>
+              <a:latin typeface="Calibri"/>
+            </a:endParaRPr>
           </a:p>
           <a:p>
             <a:pPr algn="l">
@@ -11288,13 +11708,13 @@
               </a:spcAft>
             </a:pPr>
             <a:r>
-              <a:rPr sz="1200" b="0">
+              <a:rPr sz="1200" b="0" dirty="0">
                 <a:solidFill>
                   <a:srgbClr val="1F1F1F"/>
                 </a:solidFill>
                 <a:latin typeface="Calibri"/>
               </a:rPr>
-              <a:t>Tutor: So 20/100 = 1/5. What is 1/5 of 50?  Hint: 5 equal groups 📖</a:t>
+              <a:t>Learner: 5 ✓</a:t>
             </a:r>
           </a:p>
           <a:p>
@@ -11304,13 +11724,13 @@
               </a:spcAft>
             </a:pPr>
             <a:r>
-              <a:rPr sz="1200" b="0">
+              <a:rPr sz="1200" b="0" dirty="0">
                 <a:solidFill>
                   <a:srgbClr val="1F1F1F"/>
                 </a:solidFill>
                 <a:latin typeface="Calibri"/>
               </a:rPr>
-              <a:t>Learner: 10 ✓      Tutor: And 1/4 of 20?   Learner: 5 ✓</a:t>
+              <a:t>Tutor: So 20/100 = 1/5. What is 1/5 of 50?  Hint: 5 equal groups 📖</a:t>
             </a:r>
           </a:p>
           <a:p>
@@ -11320,14 +11740,20 @@
               </a:spcAft>
             </a:pPr>
             <a:r>
-              <a:rPr sz="1200" b="0">
-                <a:solidFill>
-                  <a:srgbClr val="0F7C8C"/>
+              <a:rPr sz="1200" b="0" dirty="0">
+                <a:solidFill>
+                  <a:srgbClr val="1F1F1F"/>
                 </a:solidFill>
                 <a:latin typeface="Calibri"/>
               </a:rPr>
-              <a:t>[back to Level 3]</a:t>
-            </a:r>
+              <a:t>Learner: 10 ✓      </a:t>
+            </a:r>
+            <a:endParaRPr lang="en-US" sz="1200" b="0" dirty="0">
+              <a:solidFill>
+                <a:srgbClr val="1F1F1F"/>
+              </a:solidFill>
+              <a:latin typeface="Calibri"/>
+            </a:endParaRPr>
           </a:p>
           <a:p>
             <a:pPr algn="l">
@@ -11336,14 +11762,20 @@
               </a:spcAft>
             </a:pPr>
             <a:r>
-              <a:rPr sz="1200" b="1">
+              <a:rPr sz="1200" b="0" dirty="0">
                 <a:solidFill>
                   <a:srgbClr val="1F1F1F"/>
                 </a:solidFill>
                 <a:latin typeface="Calibri"/>
               </a:rPr>
-              <a:t>Tutor: Try again: 20% of 50?   Learner: 10 ✓</a:t>
-            </a:r>
+              <a:t>Tutor: And 1/4 of 20?  </a:t>
+            </a:r>
+            <a:endParaRPr lang="en-US" sz="1200" b="0" dirty="0">
+              <a:solidFill>
+                <a:srgbClr val="1F1F1F"/>
+              </a:solidFill>
+              <a:latin typeface="Calibri"/>
+            </a:endParaRPr>
           </a:p>
           <a:p>
             <a:pPr algn="l">
@@ -11352,13 +11784,13 @@
               </a:spcAft>
             </a:pPr>
             <a:r>
-              <a:rPr sz="1200" b="0">
+              <a:rPr sz="1200" b="0" dirty="0">
                 <a:solidFill>
                   <a:srgbClr val="1F1F1F"/>
                 </a:solidFill>
                 <a:latin typeface="Calibri"/>
               </a:rPr>
-              <a:t>Tutor: Earlier you divided 50 by 20; a percentage means “out of 100”.</a:t>
+              <a:t>Learner: 5 ✓</a:t>
             </a:r>
           </a:p>
           <a:p>
@@ -11368,26 +11800,96 @@
               </a:spcAft>
             </a:pPr>
             <a:r>
-              <a:rPr sz="1200" b="0">
-                <a:solidFill>
-                  <a:srgbClr val="1F1F1F"/>
+              <a:rPr sz="1200" b="0" dirty="0">
+                <a:solidFill>
+                  <a:srgbClr val="0F7C8C"/>
                 </a:solidFill>
                 <a:latin typeface="Calibri"/>
               </a:rPr>
-              <a:t>         Next: 15% of 60?</a:t>
-            </a:r>
-          </a:p>
-        </p:txBody>
-      </p:sp>
-      <p:sp>
-        <p:nvSpPr>
-          <p:cNvPr id="8" name="TextBox 7"/>
+              <a:t>[back to Level 3]</a:t>
+            </a:r>
+          </a:p>
+          <a:p>
+            <a:pPr algn="l">
+              <a:spcAft>
+                <a:spcPts val="400"/>
+              </a:spcAft>
+            </a:pPr>
+            <a:r>
+              <a:rPr sz="1200" b="1" dirty="0">
+                <a:solidFill>
+                  <a:srgbClr val="1F1F1F"/>
+                </a:solidFill>
+                <a:latin typeface="Calibri"/>
+              </a:rPr>
+              <a:t>Tutor: Try again: 20% of 50?   </a:t>
+            </a:r>
+            <a:endParaRPr lang="en-US" sz="1200" b="1" dirty="0">
+              <a:solidFill>
+                <a:srgbClr val="1F1F1F"/>
+              </a:solidFill>
+              <a:latin typeface="Calibri"/>
+            </a:endParaRPr>
+          </a:p>
+          <a:p>
+            <a:pPr algn="l">
+              <a:spcAft>
+                <a:spcPts val="400"/>
+              </a:spcAft>
+            </a:pPr>
+            <a:r>
+              <a:rPr sz="1200" b="1" dirty="0">
+                <a:solidFill>
+                  <a:srgbClr val="1F1F1F"/>
+                </a:solidFill>
+                <a:latin typeface="Calibri"/>
+              </a:rPr>
+              <a:t>Learner: 10 ✓</a:t>
+            </a:r>
+          </a:p>
+          <a:p>
+            <a:pPr algn="l">
+              <a:spcAft>
+                <a:spcPts val="400"/>
+              </a:spcAft>
+            </a:pPr>
+            <a:r>
+              <a:rPr sz="1200" b="0" dirty="0">
+                <a:solidFill>
+                  <a:srgbClr val="1F1F1F"/>
+                </a:solidFill>
+                <a:latin typeface="Calibri"/>
+              </a:rPr>
+              <a:t>Tutor: Earlier you divided 50 by 20; a percentage means “out of 100”.</a:t>
+            </a:r>
+          </a:p>
+          <a:p>
+            <a:pPr algn="l">
+              <a:spcAft>
+                <a:spcPts val="400"/>
+              </a:spcAft>
+            </a:pPr>
+            <a:r>
+              <a:rPr sz="1200" b="0" dirty="0">
+                <a:solidFill>
+                  <a:srgbClr val="1F1F1F"/>
+                </a:solidFill>
+                <a:latin typeface="Calibri"/>
+              </a:rPr>
+              <a:t>Next: 15% of 60?</a:t>
+            </a:r>
+          </a:p>
+        </p:txBody>
+      </p:sp>
+      <p:sp>
+        <p:nvSpPr>
+          <p:cNvPr id="10" name="TextBox 9"/>
           <p:cNvSpPr txBox="1"/>
           <p:nvPr/>
         </p:nvSpPr>
         <p:spPr>
           <a:xfrm>
-            <a:off x="7680960" y="1143000"/>
+            <a:off x="7620000" y="1371600"/>
             <a:ext cx="4023360" cy="411480"/>
           </a:xfrm>
           <a:prstGeom prst="rect">
@@ -11396,7 +11898,7 @@
           <a:noFill/>
         </p:spPr>
         <p:txBody>
-          <a:bodyPr wrap="square" anchor="t" lIns="45720" rIns="45720">
+          <a:bodyPr wrap="square" lIns="45720" rIns="45720" anchor="t">
             <a:spAutoFit/>
           </a:bodyPr>
           <a:lstStyle/>
@@ -11407,413 +11909,7 @@
               </a:spcAft>
             </a:pPr>
             <a:r>
-              <a:rPr sz="1600" b="1">
-                <a:solidFill>
-                  <a:srgbClr val="0F7C8C"/>
-                </a:solidFill>
-                <a:latin typeface="Calibri"/>
-              </a:rPr>
-              <a:t>Progress report</a:t>
-            </a:r>
-          </a:p>
-        </p:txBody>
-      </p:sp>
-      <p:graphicFrame>
-        <p:nvGraphicFramePr>
-          <p:cNvPr id="9" name="Table 8"/>
-          <p:cNvGraphicFramePr>
-            <a:graphicFrameLocks noGrp="1"/>
-          </p:cNvGraphicFramePr>
-          <p:nvPr/>
-        </p:nvGraphicFramePr>
-        <p:xfrm>
-          <a:off x="7680960" y="1600200"/>
-          <a:ext cx="4023360" cy="1920240"/>
-        </p:xfrm>
-        <a:graphic>
-          <a:graphicData uri="http://schemas.openxmlformats.org/drawingml/2006/table">
-            <a:tbl>
-              <a:tblPr firstRow="1" bandRow="1">
-                <a:tableStyleId>{5C22544A-7EE6-4342-B048-85BDC9FD1C3A}</a:tableStyleId>
-              </a:tblPr>
-              <a:tblGrid>
-                <a:gridCol w="1645920"/>
-                <a:gridCol w="822960"/>
-                <a:gridCol w="1554480"/>
-              </a:tblGrid>
-              <a:tr h="384048">
-                <a:tc>
-                  <a:txBody>
-                    <a:bodyPr wrap="square"/>
-                    <a:lstStyle/>
-                    <a:p>
-                      <a:r>
-                        <a:rPr sz="1200" b="1">
-                          <a:solidFill>
-                            <a:srgbClr val="FFFFFF"/>
-                          </a:solidFill>
-                          <a:latin typeface="Calibri"/>
-                        </a:rPr>
-                        <a:t>Concept (level)</a:t>
-                      </a:r>
-                    </a:p>
-                  </a:txBody>
-                  <a:tcPr marL="54864" marR="54864" marT="27432" marB="27432">
-                    <a:solidFill>
-                      <a:srgbClr val="1B364B"/>
-                    </a:solidFill>
-                  </a:tcPr>
-                </a:tc>
-                <a:tc>
-                  <a:txBody>
-                    <a:bodyPr wrap="square"/>
-                    <a:lstStyle/>
-                    <a:p>
-                      <a:r>
-                        <a:rPr sz="1200" b="1">
-                          <a:solidFill>
-                            <a:srgbClr val="FFFFFF"/>
-                          </a:solidFill>
-                          <a:latin typeface="Calibri"/>
-                        </a:rPr>
-                        <a:t>Correct</a:t>
-                      </a:r>
-                    </a:p>
-                  </a:txBody>
-                  <a:tcPr marL="54864" marR="54864" marT="27432" marB="27432">
-                    <a:solidFill>
-                      <a:srgbClr val="1B364B"/>
-                    </a:solidFill>
-                  </a:tcPr>
-                </a:tc>
-                <a:tc>
-                  <a:txBody>
-                    <a:bodyPr wrap="square"/>
-                    <a:lstStyle/>
-                    <a:p>
-                      <a:r>
-                        <a:rPr sz="1200" b="1">
-                          <a:solidFill>
-                            <a:srgbClr val="FFFFFF"/>
-                          </a:solidFill>
-                          <a:latin typeface="Calibri"/>
-                        </a:rPr>
-                        <a:t>Readiness</a:t>
-                      </a:r>
-                    </a:p>
-                  </a:txBody>
-                  <a:tcPr marL="54864" marR="54864" marT="27432" marB="27432">
-                    <a:solidFill>
-                      <a:srgbClr val="1B364B"/>
-                    </a:solidFill>
-                  </a:tcPr>
-                </a:tc>
-              </a:tr>
-              <a:tr h="384048">
-                <a:tc>
-                  <a:txBody>
-                    <a:bodyPr wrap="square"/>
-                    <a:lstStyle/>
-                    <a:p>
-                      <a:r>
-                        <a:rPr sz="1200" b="1">
-                          <a:solidFill>
-                            <a:srgbClr val="1F1F1F"/>
-                          </a:solidFill>
-                          <a:latin typeface="Calibri"/>
-                        </a:rPr>
-                        <a:t>Multiplication (1)</a:t>
-                      </a:r>
-                    </a:p>
-                  </a:txBody>
-                  <a:tcPr marL="54864" marR="54864" marT="27432" marB="27432">
-                    <a:solidFill>
-                      <a:srgbClr val="FFFFFF"/>
-                    </a:solidFill>
-                  </a:tcPr>
-                </a:tc>
-                <a:tc>
-                  <a:txBody>
-                    <a:bodyPr wrap="square"/>
-                    <a:lstStyle/>
-                    <a:p>
-                      <a:r>
-                        <a:rPr sz="1200" b="0">
-                          <a:solidFill>
-                            <a:srgbClr val="1F1F1F"/>
-                          </a:solidFill>
-                          <a:latin typeface="Calibri"/>
-                        </a:rPr>
-                        <a:t>3/3</a:t>
-                      </a:r>
-                    </a:p>
-                  </a:txBody>
-                  <a:tcPr marL="54864" marR="54864" marT="27432" marB="27432">
-                    <a:solidFill>
-                      <a:srgbClr val="FFFFFF"/>
-                    </a:solidFill>
-                  </a:tcPr>
-                </a:tc>
-                <a:tc>
-                  <a:txBody>
-                    <a:bodyPr wrap="square"/>
-                    <a:lstStyle/>
-                    <a:p>
-                      <a:r>
-                        <a:rPr sz="1200" b="0">
-                          <a:solidFill>
-                            <a:srgbClr val="1F1F1F"/>
-                          </a:solidFill>
-                          <a:latin typeface="Calibri"/>
-                        </a:rPr>
-                        <a:t>0.90</a:t>
-                      </a:r>
-                    </a:p>
-                  </a:txBody>
-                  <a:tcPr marL="54864" marR="54864" marT="27432" marB="27432">
-                    <a:solidFill>
-                      <a:srgbClr val="FFFFFF"/>
-                    </a:solidFill>
-                  </a:tcPr>
-                </a:tc>
-              </a:tr>
-              <a:tr h="384048">
-                <a:tc>
-                  <a:txBody>
-                    <a:bodyPr wrap="square"/>
-                    <a:lstStyle/>
-                    <a:p>
-                      <a:r>
-                        <a:rPr sz="1200" b="1">
-                          <a:solidFill>
-                            <a:srgbClr val="1F1F1F"/>
-                          </a:solidFill>
-                          <a:latin typeface="Calibri"/>
-                        </a:rPr>
-                        <a:t>Division (2)</a:t>
-                      </a:r>
-                    </a:p>
-                  </a:txBody>
-                  <a:tcPr marL="54864" marR="54864" marT="27432" marB="27432">
-                    <a:solidFill>
-                      <a:srgbClr val="F4F6F7"/>
-                    </a:solidFill>
-                  </a:tcPr>
-                </a:tc>
-                <a:tc>
-                  <a:txBody>
-                    <a:bodyPr wrap="square"/>
-                    <a:lstStyle/>
-                    <a:p>
-                      <a:r>
-                        <a:rPr sz="1200" b="0">
-                          <a:solidFill>
-                            <a:srgbClr val="1F1F1F"/>
-                          </a:solidFill>
-                          <a:latin typeface="Calibri"/>
-                        </a:rPr>
-                        <a:t>2/2</a:t>
-                      </a:r>
-                    </a:p>
-                  </a:txBody>
-                  <a:tcPr marL="54864" marR="54864" marT="27432" marB="27432">
-                    <a:solidFill>
-                      <a:srgbClr val="F4F6F7"/>
-                    </a:solidFill>
-                  </a:tcPr>
-                </a:tc>
-                <a:tc>
-                  <a:txBody>
-                    <a:bodyPr wrap="square"/>
-                    <a:lstStyle/>
-                    <a:p>
-                      <a:r>
-                        <a:rPr sz="1200" b="0">
-                          <a:solidFill>
-                            <a:srgbClr val="1F1F1F"/>
-                          </a:solidFill>
-                          <a:latin typeface="Calibri"/>
-                        </a:rPr>
-                        <a:t>0.84</a:t>
-                      </a:r>
-                    </a:p>
-                  </a:txBody>
-                  <a:tcPr marL="54864" marR="54864" marT="27432" marB="27432">
-                    <a:solidFill>
-                      <a:srgbClr val="F4F6F7"/>
-                    </a:solidFill>
-                  </a:tcPr>
-                </a:tc>
-              </a:tr>
-              <a:tr h="384048">
-                <a:tc>
-                  <a:txBody>
-                    <a:bodyPr wrap="square"/>
-                    <a:lstStyle/>
-                    <a:p>
-                      <a:r>
-                        <a:rPr sz="1200" b="1">
-                          <a:solidFill>
-                            <a:srgbClr val="1F1F1F"/>
-                          </a:solidFill>
-                          <a:latin typeface="Calibri"/>
-                        </a:rPr>
-                        <a:t>Fractions (2)</a:t>
-                      </a:r>
-                    </a:p>
-                  </a:txBody>
-                  <a:tcPr marL="54864" marR="54864" marT="27432" marB="27432">
-                    <a:solidFill>
-                      <a:srgbClr val="FFFFFF"/>
-                    </a:solidFill>
-                  </a:tcPr>
-                </a:tc>
-                <a:tc>
-                  <a:txBody>
-                    <a:bodyPr wrap="square"/>
-                    <a:lstStyle/>
-                    <a:p>
-                      <a:r>
-                        <a:rPr sz="1200" b="0">
-                          <a:solidFill>
-                            <a:srgbClr val="1F1F1F"/>
-                          </a:solidFill>
-                          <a:latin typeface="Calibri"/>
-                        </a:rPr>
-                        <a:t>1/2</a:t>
-                      </a:r>
-                    </a:p>
-                  </a:txBody>
-                  <a:tcPr marL="54864" marR="54864" marT="27432" marB="27432">
-                    <a:solidFill>
-                      <a:srgbClr val="FFFFFF"/>
-                    </a:solidFill>
-                  </a:tcPr>
-                </a:tc>
-                <a:tc>
-                  <a:txBody>
-                    <a:bodyPr wrap="square"/>
-                    <a:lstStyle/>
-                    <a:p>
-                      <a:r>
-                        <a:rPr sz="1200" b="0">
-                          <a:solidFill>
-                            <a:srgbClr val="1F1F1F"/>
-                          </a:solidFill>
-                          <a:latin typeface="Calibri"/>
-                        </a:rPr>
-                        <a:t>0.66</a:t>
-                      </a:r>
-                    </a:p>
-                  </a:txBody>
-                  <a:tcPr marL="54864" marR="54864" marT="27432" marB="27432">
-                    <a:solidFill>
-                      <a:srgbClr val="FFFFFF"/>
-                    </a:solidFill>
-                  </a:tcPr>
-                </a:tc>
-              </a:tr>
-              <a:tr h="384048">
-                <a:tc>
-                  <a:txBody>
-                    <a:bodyPr wrap="square"/>
-                    <a:lstStyle/>
-                    <a:p>
-                      <a:r>
-                        <a:rPr sz="1200" b="1">
-                          <a:solidFill>
-                            <a:srgbClr val="1F1F1F"/>
-                          </a:solidFill>
-                          <a:latin typeface="Calibri"/>
-                        </a:rPr>
-                        <a:t>Percentages (3)</a:t>
-                      </a:r>
-                    </a:p>
-                  </a:txBody>
-                  <a:tcPr marL="54864" marR="54864" marT="27432" marB="27432">
-                    <a:solidFill>
-                      <a:srgbClr val="F4F6F7"/>
-                    </a:solidFill>
-                  </a:tcPr>
-                </a:tc>
-                <a:tc>
-                  <a:txBody>
-                    <a:bodyPr wrap="square"/>
-                    <a:lstStyle/>
-                    <a:p>
-                      <a:r>
-                        <a:rPr sz="1200" b="0">
-                          <a:solidFill>
-                            <a:srgbClr val="1F1F1F"/>
-                          </a:solidFill>
-                          <a:latin typeface="Calibri"/>
-                        </a:rPr>
-                        <a:t>1/2</a:t>
-                      </a:r>
-                    </a:p>
-                  </a:txBody>
-                  <a:tcPr marL="54864" marR="54864" marT="27432" marB="27432">
-                    <a:solidFill>
-                      <a:srgbClr val="F4F6F7"/>
-                    </a:solidFill>
-                  </a:tcPr>
-                </a:tc>
-                <a:tc>
-                  <a:txBody>
-                    <a:bodyPr wrap="square"/>
-                    <a:lstStyle/>
-                    <a:p>
-                      <a:r>
-                        <a:rPr sz="1200" b="0">
-                          <a:solidFill>
-                            <a:srgbClr val="1F1F1F"/>
-                          </a:solidFill>
-                          <a:latin typeface="Calibri"/>
-                        </a:rPr>
-                        <a:t>0.58 · practise</a:t>
-                      </a:r>
-                    </a:p>
-                  </a:txBody>
-                  <a:tcPr marL="54864" marR="54864" marT="27432" marB="27432">
-                    <a:solidFill>
-                      <a:srgbClr val="F4F6F7"/>
-                    </a:solidFill>
-                  </a:tcPr>
-                </a:tc>
-              </a:tr>
-            </a:tbl>
-          </a:graphicData>
-        </a:graphic>
-      </p:graphicFrame>
-      <p:sp>
-        <p:nvSpPr>
-          <p:cNvPr id="10" name="TextBox 9"/>
-          <p:cNvSpPr txBox="1"/>
-          <p:nvPr/>
-        </p:nvSpPr>
-        <p:spPr>
-          <a:xfrm>
-            <a:off x="7680960" y="3749039"/>
-            <a:ext cx="4023360" cy="411480"/>
-          </a:xfrm>
-          <a:prstGeom prst="rect">
-            <a:avLst/>
-          </a:prstGeom>
-          <a:noFill/>
-        </p:spPr>
-        <p:txBody>
-          <a:bodyPr wrap="square" anchor="t" lIns="45720" rIns="45720">
-            <a:spAutoFit/>
-          </a:bodyPr>
-          <a:lstStyle/>
-          <a:p>
-            <a:pPr algn="l">
-              <a:spcAft>
-                <a:spcPts val="400"/>
-              </a:spcAft>
-            </a:pPr>
-            <a:r>
-              <a:rPr sz="1600" b="1">
+              <a:rPr sz="1600" b="1" dirty="0">
                 <a:solidFill>
                   <a:srgbClr val="0F7C8C"/>
                 </a:solidFill>
@@ -11832,7 +11928,7 @@
         </p:nvSpPr>
         <p:spPr>
           <a:xfrm>
-            <a:off x="7680960" y="4160520"/>
+            <a:off x="7620000" y="1851660"/>
             <a:ext cx="4023360" cy="1828800"/>
           </a:xfrm>
           <a:prstGeom prst="rect">
@@ -11841,7 +11937,7 @@
           <a:noFill/>
         </p:spPr>
         <p:txBody>
-          <a:bodyPr wrap="square" anchor="t" lIns="45720" rIns="45720">
+          <a:bodyPr wrap="square" lIns="45720" rIns="45720" anchor="t">
             <a:spAutoFit/>
           </a:bodyPr>
           <a:lstStyle/>
@@ -11852,7 +11948,7 @@
               </a:spcAft>
             </a:pPr>
             <a:r>
-              <a:rPr sz="1300" b="0">
+              <a:rPr sz="1300" b="0" dirty="0">
                 <a:solidFill>
                   <a:srgbClr val="1F1F1F"/>
                 </a:solidFill>
@@ -11868,13 +11964,31 @@
               </a:spcAft>
             </a:pPr>
             <a:r>
-              <a:rPr sz="1300" b="1">
+              <a:rPr sz="1300" b="1" dirty="0">
                 <a:solidFill>
                   <a:srgbClr val="1F1F1F"/>
                 </a:solidFill>
                 <a:latin typeface="Calibri"/>
               </a:rPr>
-              <a:t>Ours: finds the fraction gap, practises Level 2, returns to Level 3; learner finds 10.</a:t>
+              <a:t>Ours: finds the fraction gap, </a:t>
+            </a:r>
+            <a:r>
+              <a:rPr sz="1300" b="1" dirty="0" err="1">
+                <a:solidFill>
+                  <a:srgbClr val="1F1F1F"/>
+                </a:solidFill>
+                <a:latin typeface="Calibri"/>
+              </a:rPr>
+              <a:t>practises</a:t>
+            </a:r>
+            <a:r>
+              <a:rPr sz="1300" b="1" dirty="0">
+                <a:solidFill>
+                  <a:srgbClr val="1F1F1F"/>
+                </a:solidFill>
+                <a:latin typeface="Calibri"/>
+              </a:rPr>
+              <a:t> Level 2, returns to Level 3; learner finds 10.</a:t>
             </a:r>
           </a:p>
         </p:txBody>
@@ -12218,44 +12332,44 @@
         <a:sysClr val="window" lastClr="FFFFFF"/>
       </a:lt1>
       <a:dk2>
-        <a:srgbClr val="1F497D"/>
+        <a:srgbClr val="44546A"/>
       </a:dk2>
       <a:lt2>
-        <a:srgbClr val="EEECE1"/>
+        <a:srgbClr val="E7E6E6"/>
       </a:lt2>
       <a:accent1>
-        <a:srgbClr val="4F81BD"/>
+        <a:srgbClr val="4472C4"/>
       </a:accent1>
       <a:accent2>
-        <a:srgbClr val="C0504D"/>
+        <a:srgbClr val="ED7D31"/>
       </a:accent2>
       <a:accent3>
-        <a:srgbClr val="9BBB59"/>
+        <a:srgbClr val="A5A5A5"/>
       </a:accent3>
       <a:accent4>
-        <a:srgbClr val="8064A2"/>
+        <a:srgbClr val="FFC000"/>
       </a:accent4>
       <a:accent5>
-        <a:srgbClr val="4BACC6"/>
+        <a:srgbClr val="5B9BD5"/>
       </a:accent5>
       <a:accent6>
-        <a:srgbClr val="F79646"/>
+        <a:srgbClr val="70AD47"/>
       </a:accent6>
       <a:hlink>
-        <a:srgbClr val="0000FF"/>
+        <a:srgbClr val="0563C1"/>
       </a:hlink>
       <a:folHlink>
-        <a:srgbClr val="800080"/>
+        <a:srgbClr val="954F72"/>
       </a:folHlink>
     </a:clrScheme>
     <a:fontScheme name="Office">
       <a:majorFont>
-        <a:latin typeface="Calibri"/>
+        <a:latin typeface="Calibri Light" panose="020F0302020204030204"/>
         <a:ea typeface=""/>
         <a:cs typeface=""/>
-        <a:font script="Jpan" typeface="ＭＳ Ｐゴシック"/>
+        <a:font script="Jpan" typeface="游ゴシック Light"/>
         <a:font script="Hang" typeface="맑은 고딕"/>
-        <a:font script="Hans" typeface="宋体"/>
+        <a:font script="Hans" typeface="等线 Light"/>
         <a:font script="Hant" typeface="新細明體"/>
         <a:font script="Arab" typeface="Times New Roman"/>
         <a:font script="Hebr" typeface="Times New Roman"/>
@@ -12283,14 +12397,31 @@
         <a:font script="Viet" typeface="Times New Roman"/>
         <a:font script="Uigh" typeface="Microsoft Uighur"/>
         <a:font script="Geor" typeface="Sylfaen"/>
+        <a:font script="Armn" typeface="Arial"/>
+        <a:font script="Bugi" typeface="Leelawadee UI"/>
+        <a:font script="Bopo" typeface="Microsoft JhengHei"/>
+        <a:font script="Java" typeface="Javanese Text"/>
+        <a:font script="Lisu" typeface="Segoe UI"/>
+        <a:font script="Mymr" typeface="Myanmar Text"/>
+        <a:font script="Nkoo" typeface="Ebrima"/>
+        <a:font script="Olck" typeface="Nirmala UI"/>
+        <a:font script="Osma" typeface="Ebrima"/>
+        <a:font script="Phag" typeface="Phagspa"/>
+        <a:font script="Syrn" typeface="Estrangelo Edessa"/>
+        <a:font script="Syrj" typeface="Estrangelo Edessa"/>
+        <a:font script="Syre" typeface="Estrangelo Edessa"/>
+        <a:font script="Sora" typeface="Nirmala UI"/>
+        <a:font script="Tale" typeface="Microsoft Tai Le"/>
+        <a:font script="Talu" typeface="Microsoft New Tai Lue"/>
+        <a:font script="Tfng" typeface="Ebrima"/>
       </a:majorFont>
       <a:minorFont>
-        <a:latin typeface="Calibri"/>
+        <a:latin typeface="Calibri" panose="020F0502020204030204"/>
         <a:ea typeface=""/>
         <a:cs typeface=""/>
-        <a:font script="Jpan" typeface="ＭＳ Ｐゴシック"/>
+        <a:font script="Jpan" typeface="游ゴシック"/>
         <a:font script="Hang" typeface="맑은 고딕"/>
-        <a:font script="Hans" typeface="宋体"/>
+        <a:font script="Hans" typeface="等线"/>
         <a:font script="Hant" typeface="新細明體"/>
         <a:font script="Arab" typeface="Arial"/>
         <a:font script="Hebr" typeface="Arial"/>
@@ -12318,6 +12449,23 @@
         <a:font script="Viet" typeface="Arial"/>
         <a:font script="Uigh" typeface="Microsoft Uighur"/>
         <a:font script="Geor" typeface="Sylfaen"/>
+        <a:font script="Armn" typeface="Arial"/>
+        <a:font script="Bugi" typeface="Leelawadee UI"/>
+        <a:font script="Bopo" typeface="Microsoft JhengHei"/>
+        <a:font script="Java" typeface="Javanese Text"/>
+        <a:font script="Lisu" typeface="Segoe UI"/>
+        <a:font script="Mymr" typeface="Myanmar Text"/>
+        <a:font script="Nkoo" typeface="Ebrima"/>
+        <a:font script="Olck" typeface="Nirmala UI"/>
+        <a:font script="Osma" typeface="Ebrima"/>
+        <a:font script="Phag" typeface="Phagspa"/>
+        <a:font script="Syrn" typeface="Estrangelo Edessa"/>
+        <a:font script="Syrj" typeface="Estrangelo Edessa"/>
+        <a:font script="Syre" typeface="Estrangelo Edessa"/>
+        <a:font script="Sora" typeface="Nirmala UI"/>
+        <a:font script="Tale" typeface="Microsoft Tai Le"/>
+        <a:font script="Talu" typeface="Microsoft New Tai Lue"/>
+        <a:font script="Tfng" typeface="Ebrima"/>
       </a:minorFont>
     </a:fontScheme>
     <a:fmtScheme name="Office">
@@ -12329,200 +12477,141 @@
           <a:gsLst>
             <a:gs pos="0">
               <a:schemeClr val="phClr">
-                <a:tint val="50000"/>
-                <a:satMod val="300000"/>
+                <a:lumMod val="110000"/>
+                <a:satMod val="105000"/>
+                <a:tint val="67000"/>
               </a:schemeClr>
             </a:gs>
-            <a:gs pos="35000">
+            <a:gs pos="50000">
               <a:schemeClr val="phClr">
-                <a:tint val="37000"/>
-                <a:satMod val="300000"/>
+                <a:lumMod val="105000"/>
+                <a:satMod val="103000"/>
+                <a:tint val="73000"/>
               </a:schemeClr>
             </a:gs>
             <a:gs pos="100000">
               <a:schemeClr val="phClr">
-                <a:tint val="15000"/>
-                <a:satMod val="350000"/>
+                <a:lumMod val="105000"/>
+                <a:satMod val="109000"/>
+                <a:tint val="81000"/>
               </a:schemeClr>
             </a:gs>
           </a:gsLst>
-          <a:lin ang="16200000" scaled="1"/>
+          <a:lin ang="5400000" scaled="0"/>
         </a:gradFill>
         <a:gradFill rotWithShape="1">
           <a:gsLst>
             <a:gs pos="0">
               <a:schemeClr val="phClr">
-                <a:tint val="100000"/>
+                <a:satMod val="103000"/>
+                <a:lumMod val="102000"/>
+                <a:tint val="94000"/>
+              </a:schemeClr>
+            </a:gs>
+            <a:gs pos="50000">
+              <a:schemeClr val="phClr">
+                <a:satMod val="110000"/>
+                <a:lumMod val="100000"/>
                 <a:shade val="100000"/>
-                <a:satMod val="130000"/>
               </a:schemeClr>
             </a:gs>
             <a:gs pos="100000">
               <a:schemeClr val="phClr">
-                <a:tint val="50000"/>
-                <a:shade val="100000"/>
-                <a:satMod val="350000"/>
+                <a:lumMod val="99000"/>
+                <a:satMod val="120000"/>
+                <a:shade val="78000"/>
               </a:schemeClr>
             </a:gs>
           </a:gsLst>
-          <a:lin ang="16200000" scaled="0"/>
+          <a:lin ang="5400000" scaled="0"/>
         </a:gradFill>
       </a:fillStyleLst>
       <a:lnStyleLst>
-        <a:ln w="9525" cap="flat" cmpd="sng" algn="ctr">
-          <a:solidFill>
-            <a:schemeClr val="phClr">
-              <a:shade val="95000"/>
-              <a:satMod val="105000"/>
-            </a:schemeClr>
-          </a:solidFill>
-          <a:prstDash val="solid"/>
-        </a:ln>
-        <a:ln w="25400" cap="flat" cmpd="sng" algn="ctr">
+        <a:ln w="6350" cap="flat" cmpd="sng" algn="ctr">
           <a:solidFill>
             <a:schemeClr val="phClr"/>
           </a:solidFill>
           <a:prstDash val="solid"/>
+          <a:miter lim="800000"/>
         </a:ln>
-        <a:ln w="38100" cap="flat" cmpd="sng" algn="ctr">
+        <a:ln w="12700" cap="flat" cmpd="sng" algn="ctr">
           <a:solidFill>
             <a:schemeClr val="phClr"/>
           </a:solidFill>
           <a:prstDash val="solid"/>
+          <a:miter lim="800000"/>
+        </a:ln>
+        <a:ln w="19050" cap="flat" cmpd="sng" algn="ctr">
+          <a:solidFill>
+            <a:schemeClr val="phClr"/>
+          </a:solidFill>
+          <a:prstDash val="solid"/>
+          <a:miter lim="800000"/>
         </a:ln>
       </a:lnStyleLst>
       <a:effectStyleLst>
         <a:effectStyle>
+          <a:effectLst/>
+        </a:effectStyle>
+        <a:effectStyle>
+          <a:effectLst/>
+        </a:effectStyle>
+        <a:effectStyle>
           <a:effectLst>
-            <a:outerShdw blurRad="40000" dist="20000" dir="5400000" rotWithShape="0">
+            <a:outerShdw blurRad="57150" dist="19050" dir="5400000" algn="ctr" rotWithShape="0">
               <a:srgbClr val="000000">
-                <a:alpha val="38000"/>
+                <a:alpha val="63000"/>
               </a:srgbClr>
             </a:outerShdw>
           </a:effectLst>
-        </a:effectStyle>
-        <a:effectStyle>
-          <a:effectLst>
-            <a:outerShdw blurRad="40000" dist="23000" dir="5400000" rotWithShape="0">
-              <a:srgbClr val="000000">
-                <a:alpha val="35000"/>
-              </a:srgbClr>
-            </a:outerShdw>
-          </a:effectLst>
-        </a:effectStyle>
-        <a:effectStyle>
-          <a:effectLst>
-            <a:outerShdw blurRad="40000" dist="23000" dir="5400000" rotWithShape="0">
-              <a:srgbClr val="000000">
-                <a:alpha val="35000"/>
-              </a:srgbClr>
-            </a:outerShdw>
-          </a:effectLst>
-          <a:scene3d>
-            <a:camera prst="orthographicFront">
-              <a:rot lat="0" lon="0" rev="0"/>
-            </a:camera>
-            <a:lightRig rig="threePt" dir="t">
-              <a:rot lat="0" lon="0" rev="1200000"/>
-            </a:lightRig>
-          </a:scene3d>
-          <a:sp3d>
-            <a:bevelT w="63500" h="25400"/>
-          </a:sp3d>
         </a:effectStyle>
       </a:effectStyleLst>
       <a:bgFillStyleLst>
         <a:solidFill>
           <a:schemeClr val="phClr"/>
         </a:solidFill>
+        <a:solidFill>
+          <a:schemeClr val="phClr">
+            <a:tint val="95000"/>
+            <a:satMod val="170000"/>
+          </a:schemeClr>
+        </a:solidFill>
         <a:gradFill rotWithShape="1">
           <a:gsLst>
             <a:gs pos="0">
               <a:schemeClr val="phClr">
-                <a:tint val="40000"/>
-                <a:satMod val="350000"/>
+                <a:tint val="93000"/>
+                <a:satMod val="150000"/>
+                <a:shade val="98000"/>
+                <a:lumMod val="102000"/>
               </a:schemeClr>
             </a:gs>
-            <a:gs pos="40000">
+            <a:gs pos="50000">
               <a:schemeClr val="phClr">
-                <a:tint val="45000"/>
-                <a:shade val="99000"/>
-                <a:satMod val="350000"/>
+                <a:tint val="98000"/>
+                <a:satMod val="130000"/>
+                <a:shade val="90000"/>
+                <a:lumMod val="103000"/>
               </a:schemeClr>
             </a:gs>
             <a:gs pos="100000">
               <a:schemeClr val="phClr">
-                <a:shade val="20000"/>
-                <a:satMod val="255000"/>
+                <a:shade val="63000"/>
+                <a:satMod val="120000"/>
               </a:schemeClr>
             </a:gs>
           </a:gsLst>
-          <a:path path="circle">
-            <a:fillToRect l="50000" t="-80000" r="50000" b="180000"/>
-          </a:path>
-        </a:gradFill>
-        <a:gradFill rotWithShape="1">
-          <a:gsLst>
-            <a:gs pos="0">
-              <a:schemeClr val="phClr">
-                <a:tint val="80000"/>
-                <a:satMod val="300000"/>
-              </a:schemeClr>
-            </a:gs>
-            <a:gs pos="100000">
-              <a:schemeClr val="phClr">
-                <a:shade val="30000"/>
-                <a:satMod val="200000"/>
-              </a:schemeClr>
-            </a:gs>
-          </a:gsLst>
-          <a:path path="circle">
-            <a:fillToRect l="50000" t="50000" r="50000" b="50000"/>
-          </a:path>
+          <a:lin ang="5400000" scaled="0"/>
         </a:gradFill>
       </a:bgFillStyleLst>
     </a:fmtScheme>
   </a:themeElements>
-  <a:objectDefaults>
-    <a:spDef>
-      <a:spPr/>
-      <a:bodyPr/>
-      <a:lstStyle/>
-      <a:style>
-        <a:lnRef idx="1">
-          <a:schemeClr val="accent1"/>
-        </a:lnRef>
-        <a:fillRef idx="3">
-          <a:schemeClr val="accent1"/>
-        </a:fillRef>
-        <a:effectRef idx="2">
-          <a:schemeClr val="accent1"/>
-        </a:effectRef>
-        <a:fontRef idx="minor">
-          <a:schemeClr val="lt1"/>
-        </a:fontRef>
-      </a:style>
-    </a:spDef>
-    <a:lnDef>
-      <a:spPr/>
-      <a:bodyPr/>
-      <a:lstStyle/>
-      <a:style>
-        <a:lnRef idx="2">
-          <a:schemeClr val="accent1"/>
-        </a:lnRef>
-        <a:fillRef idx="0">
-          <a:schemeClr val="accent1"/>
-        </a:fillRef>
-        <a:effectRef idx="1">
-          <a:schemeClr val="accent1"/>
-        </a:effectRef>
-        <a:fontRef idx="minor">
-          <a:schemeClr val="tx1"/>
-        </a:fontRef>
-      </a:style>
-    </a:lnDef>
-  </a:objectDefaults>
+  <a:objectDefaults/>
   <a:extraClrSchemeLst/>
+  <a:extLst>
+    <a:ext uri="{05A4C25C-085E-4340-85A3-A5531E510DB2}">
+      <thm15:themeFamily xmlns:thm15="http://schemas.microsoft.com/office/thememl/2012/main" name="Office Theme" id="{62F939B6-93AF-4DB8-9C6B-D6C7DFDC589F}" vid="{4A3C46E8-61CC-4603-A589-7422A47A8E4A}"/>
+    </a:ext>
+  </a:extLst>
 </a:theme>
 </file>
--- a/docs/milestone-1/Milestone1_Presentation.pptx
+++ b/docs/milestone-1/Milestone1_Presentation.pptx
@@ -5,7 +5,7 @@
     <p:sldMasterId id="2147483648" r:id="rId1"/>
   </p:sldMasterIdLst>
   <p:notesMasterIdLst>
-    <p:notesMasterId r:id="rId12"/>
+    <p:notesMasterId r:id="rId15"/>
   </p:notesMasterIdLst>
   <p:sldIdLst>
     <p:sldId id="256" r:id="rId2"/>
@@ -18,6 +18,9 @@
     <p:sldId id="263" r:id="rId9"/>
     <p:sldId id="264" r:id="rId10"/>
     <p:sldId id="265" r:id="rId11"/>
+    <p:sldId id="266" r:id="rId12"/>
+    <p:sldId id="267" r:id="rId13"/>
+    <p:sldId id="268" r:id="rId14"/>
   </p:sldIdLst>
   <p:sldSz cx="12192000" cy="6858000"/>
   <p:notesSz cx="6858000" cy="9144000"/>
@@ -215,9 +218,9 @@
             </a:lvl1pPr>
           </a:lstStyle>
           <a:p>
-            <a:fld id="{3B8552F3-EB7E-4C2B-B4BC-CA5B5F30B662}" type="datetimeFigureOut">
+            <a:fld id="{B9076CC2-991C-4AE8-9A6D-A0A9C8768589}" type="datetimeFigureOut">
               <a:rPr lang="en-US" smtClean="0"/>
-              <a:t>10/22/2026</a:t>
+              <a:t>10/24/2026</a:t>
             </a:fld>
             <a:endParaRPr lang="en-US"/>
           </a:p>
@@ -373,7 +376,7 @@
             </a:lvl1pPr>
           </a:lstStyle>
           <a:p>
-            <a:fld id="{8A49467A-F126-4FE8-A62C-6E46DF8ADC23}" type="slidenum">
+            <a:fld id="{B738B57C-E164-4174-BA4B-8699C4443312}" type="slidenum">
               <a:rPr lang="en-US" smtClean="0"/>
               <a:t>‹#›</a:t>
             </a:fld>
@@ -384,7 +387,7 @@
     </p:spTree>
     <p:extLst>
       <p:ext uri="{BB962C8B-B14F-4D97-AF65-F5344CB8AC3E}">
-        <p14:creationId xmlns:p14="http://schemas.microsoft.com/office/powerpoint/2010/main" val="3206744220"/>
+        <p14:creationId xmlns:p14="http://schemas.microsoft.com/office/powerpoint/2010/main" val="853052477"/>
       </p:ext>
     </p:extLst>
   </p:cSld>
@@ -873,7 +876,7 @@
           <a:p>
             <a:fld id="{5BCAD085-E8A6-8845-BD4E-CB4CCA059FC4}" type="datetimeFigureOut">
               <a:rPr lang="en-US" smtClean="0"/>
-              <a:t>10/22/2026</a:t>
+              <a:t>10/24/2026</a:t>
             </a:fld>
             <a:endParaRPr lang="en-US"/>
           </a:p>
@@ -1041,7 +1044,7 @@
           <a:p>
             <a:fld id="{5BCAD085-E8A6-8845-BD4E-CB4CCA059FC4}" type="datetimeFigureOut">
               <a:rPr lang="en-US" smtClean="0"/>
-              <a:t>10/22/2026</a:t>
+              <a:t>10/24/2026</a:t>
             </a:fld>
             <a:endParaRPr lang="en-US"/>
           </a:p>
@@ -1219,7 +1222,7 @@
           <a:p>
             <a:fld id="{5BCAD085-E8A6-8845-BD4E-CB4CCA059FC4}" type="datetimeFigureOut">
               <a:rPr lang="en-US" smtClean="0"/>
-              <a:t>10/22/2026</a:t>
+              <a:t>10/24/2026</a:t>
             </a:fld>
             <a:endParaRPr lang="en-US"/>
           </a:p>
@@ -1387,7 +1390,7 @@
           <a:p>
             <a:fld id="{5BCAD085-E8A6-8845-BD4E-CB4CCA059FC4}" type="datetimeFigureOut">
               <a:rPr lang="en-US" smtClean="0"/>
-              <a:t>10/22/2026</a:t>
+              <a:t>10/24/2026</a:t>
             </a:fld>
             <a:endParaRPr lang="en-US"/>
           </a:p>
@@ -1632,7 +1635,7 @@
           <a:p>
             <a:fld id="{5BCAD085-E8A6-8845-BD4E-CB4CCA059FC4}" type="datetimeFigureOut">
               <a:rPr lang="en-US" smtClean="0"/>
-              <a:t>10/22/2026</a:t>
+              <a:t>10/24/2026</a:t>
             </a:fld>
             <a:endParaRPr lang="en-US"/>
           </a:p>
@@ -1917,7 +1920,7 @@
           <a:p>
             <a:fld id="{5BCAD085-E8A6-8845-BD4E-CB4CCA059FC4}" type="datetimeFigureOut">
               <a:rPr lang="en-US" smtClean="0"/>
-              <a:t>10/22/2026</a:t>
+              <a:t>10/24/2026</a:t>
             </a:fld>
             <a:endParaRPr lang="en-US"/>
           </a:p>
@@ -2336,7 +2339,7 @@
           <a:p>
             <a:fld id="{5BCAD085-E8A6-8845-BD4E-CB4CCA059FC4}" type="datetimeFigureOut">
               <a:rPr lang="en-US" smtClean="0"/>
-              <a:t>10/22/2026</a:t>
+              <a:t>10/24/2026</a:t>
             </a:fld>
             <a:endParaRPr lang="en-US"/>
           </a:p>
@@ -2453,7 +2456,7 @@
           <a:p>
             <a:fld id="{5BCAD085-E8A6-8845-BD4E-CB4CCA059FC4}" type="datetimeFigureOut">
               <a:rPr lang="en-US" smtClean="0"/>
-              <a:t>10/22/2026</a:t>
+              <a:t>10/24/2026</a:t>
             </a:fld>
             <a:endParaRPr lang="en-US"/>
           </a:p>
@@ -2548,7 +2551,7 @@
           <a:p>
             <a:fld id="{5BCAD085-E8A6-8845-BD4E-CB4CCA059FC4}" type="datetimeFigureOut">
               <a:rPr lang="en-US" smtClean="0"/>
-              <a:t>10/22/2026</a:t>
+              <a:t>10/24/2026</a:t>
             </a:fld>
             <a:endParaRPr lang="en-US"/>
           </a:p>
@@ -2823,7 +2826,7 @@
           <a:p>
             <a:fld id="{5BCAD085-E8A6-8845-BD4E-CB4CCA059FC4}" type="datetimeFigureOut">
               <a:rPr lang="en-US" smtClean="0"/>
-              <a:t>10/22/2026</a:t>
+              <a:t>10/24/2026</a:t>
             </a:fld>
             <a:endParaRPr lang="en-US"/>
           </a:p>
@@ -3075,7 +3078,7 @@
           <a:p>
             <a:fld id="{5BCAD085-E8A6-8845-BD4E-CB4CCA059FC4}" type="datetimeFigureOut">
               <a:rPr lang="en-US" smtClean="0"/>
-              <a:t>10/22/2026</a:t>
+              <a:t>10/24/2026</a:t>
             </a:fld>
             <a:endParaRPr lang="en-US"/>
           </a:p>
@@ -3286,7 +3289,7 @@
           <a:p>
             <a:fld id="{5BCAD085-E8A6-8845-BD4E-CB4CCA059FC4}" type="datetimeFigureOut">
               <a:rPr lang="en-US" smtClean="0"/>
-              <a:t>10/22/2026</a:t>
+              <a:t>10/24/2026</a:t>
             </a:fld>
             <a:endParaRPr lang="en-US"/>
           </a:p>
@@ -4043,7 +4046,7 @@
                 </a:solidFill>
                 <a:latin typeface="Calibri"/>
               </a:rPr>
-              <a:t>Summary and sign-off</a:t>
+              <a:t>Baselines, targets and evaluation</a:t>
             </a:r>
           </a:p>
         </p:txBody>
@@ -4121,7 +4124,2672 @@
                 </a:solidFill>
                 <a:latin typeface="Calibri"/>
               </a:rPr>
-              <a:t>10 / 10</a:t>
+              <a:t>10 / 13</a:t>
+            </a:r>
+          </a:p>
+        </p:txBody>
+      </p:sp>
+      <p:graphicFrame>
+        <p:nvGraphicFramePr>
+          <p:cNvPr id="6" name="Table 5"/>
+          <p:cNvGraphicFramePr>
+            <a:graphicFrameLocks noGrp="1"/>
+          </p:cNvGraphicFramePr>
+          <p:nvPr/>
+        </p:nvGraphicFramePr>
+        <p:xfrm>
+          <a:off x="548640" y="1188720"/>
+          <a:ext cx="11064240" cy="3072384"/>
+        </p:xfrm>
+        <a:graphic>
+          <a:graphicData uri="http://schemas.openxmlformats.org/drawingml/2006/table">
+            <a:tbl>
+              <a:tblPr firstRow="1" bandRow="1">
+                <a:tableStyleId>{5C22544A-7EE6-4342-B048-85BDC9FD1C3A}</a:tableStyleId>
+              </a:tblPr>
+              <a:tblGrid>
+                <a:gridCol w="1828800">
+                  <a:extLst>
+                    <a:ext uri="{9D8B030D-6E8A-4147-A177-3AD203B41FA5}">
+                      <a16:colId xmlns:a16="http://schemas.microsoft.com/office/drawing/2014/main" val="20000"/>
+                    </a:ext>
+                  </a:extLst>
+                </a:gridCol>
+                <a:gridCol w="3017520">
+                  <a:extLst>
+                    <a:ext uri="{9D8B030D-6E8A-4147-A177-3AD203B41FA5}">
+                      <a16:colId xmlns:a16="http://schemas.microsoft.com/office/drawing/2014/main" val="20001"/>
+                    </a:ext>
+                  </a:extLst>
+                </a:gridCol>
+                <a:gridCol w="3200400">
+                  <a:extLst>
+                    <a:ext uri="{9D8B030D-6E8A-4147-A177-3AD203B41FA5}">
+                      <a16:colId xmlns:a16="http://schemas.microsoft.com/office/drawing/2014/main" val="20002"/>
+                    </a:ext>
+                  </a:extLst>
+                </a:gridCol>
+                <a:gridCol w="3017520">
+                  <a:extLst>
+                    <a:ext uri="{9D8B030D-6E8A-4147-A177-3AD203B41FA5}">
+                      <a16:colId xmlns:a16="http://schemas.microsoft.com/office/drawing/2014/main" val="20003"/>
+                    </a:ext>
+                  </a:extLst>
+                </a:gridCol>
+              </a:tblGrid>
+              <a:tr h="384048">
+                <a:tc>
+                  <a:txBody>
+                    <a:bodyPr/>
+                    <a:lstStyle/>
+                    <a:p>
+                      <a:r>
+                        <a:rPr sz="1200" b="1">
+                          <a:solidFill>
+                            <a:srgbClr val="FFFFFF"/>
+                          </a:solidFill>
+                          <a:latin typeface="Calibri"/>
+                        </a:rPr>
+                        <a:t>Part</a:t>
+                      </a:r>
+                    </a:p>
+                  </a:txBody>
+                  <a:tcPr marL="54864" marR="54864" marT="27432" marB="27432">
+                    <a:solidFill>
+                      <a:srgbClr val="1B364B"/>
+                    </a:solidFill>
+                  </a:tcPr>
+                </a:tc>
+                <a:tc>
+                  <a:txBody>
+                    <a:bodyPr/>
+                    <a:lstStyle/>
+                    <a:p>
+                      <a:r>
+                        <a:rPr sz="1200" b="1">
+                          <a:solidFill>
+                            <a:srgbClr val="FFFFFF"/>
+                          </a:solidFill>
+                          <a:latin typeface="Calibri"/>
+                        </a:rPr>
+                        <a:t>Metric</a:t>
+                      </a:r>
+                    </a:p>
+                  </a:txBody>
+                  <a:tcPr marL="54864" marR="54864" marT="27432" marB="27432">
+                    <a:solidFill>
+                      <a:srgbClr val="1B364B"/>
+                    </a:solidFill>
+                  </a:tcPr>
+                </a:tc>
+                <a:tc>
+                  <a:txBody>
+                    <a:bodyPr/>
+                    <a:lstStyle/>
+                    <a:p>
+                      <a:r>
+                        <a:rPr sz="1200" b="1">
+                          <a:solidFill>
+                            <a:srgbClr val="FFFFFF"/>
+                          </a:solidFill>
+                          <a:latin typeface="Calibri"/>
+                        </a:rPr>
+                        <a:t>Compared with</a:t>
+                      </a:r>
+                    </a:p>
+                  </a:txBody>
+                  <a:tcPr marL="54864" marR="54864" marT="27432" marB="27432">
+                    <a:solidFill>
+                      <a:srgbClr val="1B364B"/>
+                    </a:solidFill>
+                  </a:tcPr>
+                </a:tc>
+                <a:tc>
+                  <a:txBody>
+                    <a:bodyPr/>
+                    <a:lstStyle/>
+                    <a:p>
+                      <a:r>
+                        <a:rPr sz="1200" b="1">
+                          <a:solidFill>
+                            <a:srgbClr val="FFFFFF"/>
+                          </a:solidFill>
+                          <a:latin typeface="Calibri"/>
+                        </a:rPr>
+                        <a:t>Target</a:t>
+                      </a:r>
+                    </a:p>
+                  </a:txBody>
+                  <a:tcPr marL="54864" marR="54864" marT="27432" marB="27432">
+                    <a:solidFill>
+                      <a:srgbClr val="1B364B"/>
+                    </a:solidFill>
+                  </a:tcPr>
+                </a:tc>
+                <a:extLst>
+                  <a:ext uri="{0D108BD9-81ED-4DB2-BD59-A6C34878D82A}">
+                    <a16:rowId xmlns:a16="http://schemas.microsoft.com/office/drawing/2014/main" val="10000"/>
+                  </a:ext>
+                </a:extLst>
+              </a:tr>
+              <a:tr h="384048">
+                <a:tc>
+                  <a:txBody>
+                    <a:bodyPr/>
+                    <a:lstStyle/>
+                    <a:p>
+                      <a:r>
+                        <a:rPr sz="1200" b="1">
+                          <a:solidFill>
+                            <a:srgbClr val="1F1F1F"/>
+                          </a:solidFill>
+                          <a:latin typeface="Calibri"/>
+                        </a:rPr>
+                        <a:t>Learner model</a:t>
+                      </a:r>
+                    </a:p>
+                  </a:txBody>
+                  <a:tcPr marL="54864" marR="54864" marT="27432" marB="27432">
+                    <a:solidFill>
+                      <a:srgbClr val="FFFFFF"/>
+                    </a:solidFill>
+                  </a:tcPr>
+                </a:tc>
+                <a:tc>
+                  <a:txBody>
+                    <a:bodyPr/>
+                    <a:lstStyle/>
+                    <a:p>
+                      <a:r>
+                        <a:rPr sz="1200" b="0">
+                          <a:solidFill>
+                            <a:srgbClr val="1F1F1F"/>
+                          </a:solidFill>
+                          <a:latin typeface="Calibri"/>
+                        </a:rPr>
+                        <a:t>AUC</a:t>
+                      </a:r>
+                    </a:p>
+                  </a:txBody>
+                  <a:tcPr marL="54864" marR="54864" marT="27432" marB="27432">
+                    <a:solidFill>
+                      <a:srgbClr val="FFFFFF"/>
+                    </a:solidFill>
+                  </a:tcPr>
+                </a:tc>
+                <a:tc>
+                  <a:txBody>
+                    <a:bodyPr/>
+                    <a:lstStyle/>
+                    <a:p>
+                      <a:r>
+                        <a:rPr sz="1200" b="0">
+                          <a:solidFill>
+                            <a:srgbClr val="1F1F1F"/>
+                          </a:solidFill>
+                          <a:latin typeface="Calibri"/>
+                        </a:rPr>
+                        <a:t>Simple accuracy; published DKT 0.754</a:t>
+                      </a:r>
+                    </a:p>
+                  </a:txBody>
+                  <a:tcPr marL="54864" marR="54864" marT="27432" marB="27432">
+                    <a:solidFill>
+                      <a:srgbClr val="FFFFFF"/>
+                    </a:solidFill>
+                  </a:tcPr>
+                </a:tc>
+                <a:tc>
+                  <a:txBody>
+                    <a:bodyPr/>
+                    <a:lstStyle/>
+                    <a:p>
+                      <a:r>
+                        <a:rPr sz="1200" b="0">
+                          <a:solidFill>
+                            <a:srgbClr val="1F1F1F"/>
+                          </a:solidFill>
+                          <a:latin typeface="Calibri"/>
+                        </a:rPr>
+                        <a:t>≥ 0.74, better than simple</a:t>
+                      </a:r>
+                    </a:p>
+                  </a:txBody>
+                  <a:tcPr marL="54864" marR="54864" marT="27432" marB="27432">
+                    <a:solidFill>
+                      <a:srgbClr val="FFFFFF"/>
+                    </a:solidFill>
+                  </a:tcPr>
+                </a:tc>
+                <a:extLst>
+                  <a:ext uri="{0D108BD9-81ED-4DB2-BD59-A6C34878D82A}">
+                    <a16:rowId xmlns:a16="http://schemas.microsoft.com/office/drawing/2014/main" val="10001"/>
+                  </a:ext>
+                </a:extLst>
+              </a:tr>
+              <a:tr h="384048">
+                <a:tc>
+                  <a:txBody>
+                    <a:bodyPr/>
+                    <a:lstStyle/>
+                    <a:p>
+                      <a:r>
+                        <a:rPr sz="1200" b="1">
+                          <a:solidFill>
+                            <a:srgbClr val="1F1F1F"/>
+                          </a:solidFill>
+                          <a:latin typeface="Calibri"/>
+                        </a:rPr>
+                        <a:t>Socratic model</a:t>
+                      </a:r>
+                    </a:p>
+                  </a:txBody>
+                  <a:tcPr marL="54864" marR="54864" marT="27432" marB="27432">
+                    <a:solidFill>
+                      <a:srgbClr val="F4F6F7"/>
+                    </a:solidFill>
+                  </a:tcPr>
+                </a:tc>
+                <a:tc>
+                  <a:txBody>
+                    <a:bodyPr/>
+                    <a:lstStyle/>
+                    <a:p>
+                      <a:r>
+                        <a:rPr sz="1200" b="0">
+                          <a:solidFill>
+                            <a:srgbClr val="1F1F1F"/>
+                          </a:solidFill>
+                          <a:latin typeface="Calibri"/>
+                        </a:rPr>
+                        <a:t>% replies revealing the answer</a:t>
+                      </a:r>
+                    </a:p>
+                  </a:txBody>
+                  <a:tcPr marL="54864" marR="54864" marT="27432" marB="27432">
+                    <a:solidFill>
+                      <a:srgbClr val="F4F6F7"/>
+                    </a:solidFill>
+                  </a:tcPr>
+                </a:tc>
+                <a:tc>
+                  <a:txBody>
+                    <a:bodyPr/>
+                    <a:lstStyle/>
+                    <a:p>
+                      <a:r>
+                        <a:rPr sz="1200" b="0">
+                          <a:solidFill>
+                            <a:srgbClr val="1F1F1F"/>
+                          </a:solidFill>
+                          <a:latin typeface="Calibri"/>
+                        </a:rPr>
+                        <a:t>Base model; LLM API + system prompt</a:t>
+                      </a:r>
+                    </a:p>
+                  </a:txBody>
+                  <a:tcPr marL="54864" marR="54864" marT="27432" marB="27432">
+                    <a:solidFill>
+                      <a:srgbClr val="F4F6F7"/>
+                    </a:solidFill>
+                  </a:tcPr>
+                </a:tc>
+                <a:tc>
+                  <a:txBody>
+                    <a:bodyPr/>
+                    <a:lstStyle/>
+                    <a:p>
+                      <a:r>
+                        <a:rPr sz="1200" b="0">
+                          <a:solidFill>
+                            <a:srgbClr val="1F1F1F"/>
+                          </a:solidFill>
+                          <a:latin typeface="Calibri"/>
+                        </a:rPr>
+                        <a:t>Lower than both; aim ≤ 5% (stretch)</a:t>
+                      </a:r>
+                    </a:p>
+                  </a:txBody>
+                  <a:tcPr marL="54864" marR="54864" marT="27432" marB="27432">
+                    <a:solidFill>
+                      <a:srgbClr val="F4F6F7"/>
+                    </a:solidFill>
+                  </a:tcPr>
+                </a:tc>
+                <a:extLst>
+                  <a:ext uri="{0D108BD9-81ED-4DB2-BD59-A6C34878D82A}">
+                    <a16:rowId xmlns:a16="http://schemas.microsoft.com/office/drawing/2014/main" val="10002"/>
+                  </a:ext>
+                </a:extLst>
+              </a:tr>
+              <a:tr h="384048">
+                <a:tc>
+                  <a:txBody>
+                    <a:bodyPr/>
+                    <a:lstStyle/>
+                    <a:p>
+                      <a:r>
+                        <a:rPr sz="1200" b="1">
+                          <a:solidFill>
+                            <a:srgbClr val="1F1F1F"/>
+                          </a:solidFill>
+                          <a:latin typeface="Calibri"/>
+                        </a:rPr>
+                        <a:t>Backtracking</a:t>
+                      </a:r>
+                    </a:p>
+                  </a:txBody>
+                  <a:tcPr marL="54864" marR="54864" marT="27432" marB="27432">
+                    <a:solidFill>
+                      <a:srgbClr val="FFFFFF"/>
+                    </a:solidFill>
+                  </a:tcPr>
+                </a:tc>
+                <a:tc>
+                  <a:txBody>
+                    <a:bodyPr/>
+                    <a:lstStyle/>
+                    <a:p>
+                      <a:r>
+                        <a:rPr sz="1200" b="0">
+                          <a:solidFill>
+                            <a:srgbClr val="1F1F1F"/>
+                          </a:solidFill>
+                          <a:latin typeface="Calibri"/>
+                        </a:rPr>
+                        <a:t>% gaps found at the right level</a:t>
+                      </a:r>
+                    </a:p>
+                  </a:txBody>
+                  <a:tcPr marL="54864" marR="54864" marT="27432" marB="27432">
+                    <a:solidFill>
+                      <a:srgbClr val="FFFFFF"/>
+                    </a:solidFill>
+                  </a:tcPr>
+                </a:tc>
+                <a:tc>
+                  <a:txBody>
+                    <a:bodyPr/>
+                    <a:lstStyle/>
+                    <a:p>
+                      <a:r>
+                        <a:rPr sz="1200" b="0">
+                          <a:solidFill>
+                            <a:srgbClr val="1F1F1F"/>
+                          </a:solidFill>
+                          <a:latin typeface="Calibri"/>
+                        </a:rPr>
+                        <a:t>LLM API + system prompt</a:t>
+                      </a:r>
+                    </a:p>
+                  </a:txBody>
+                  <a:tcPr marL="54864" marR="54864" marT="27432" marB="27432">
+                    <a:solidFill>
+                      <a:srgbClr val="FFFFFF"/>
+                    </a:solidFill>
+                  </a:tcPr>
+                </a:tc>
+                <a:tc>
+                  <a:txBody>
+                    <a:bodyPr/>
+                    <a:lstStyle/>
+                    <a:p>
+                      <a:r>
+                        <a:rPr sz="1200" b="0">
+                          <a:solidFill>
+                            <a:srgbClr val="1F1F1F"/>
+                          </a:solidFill>
+                          <a:latin typeface="Calibri"/>
+                        </a:rPr>
+                        <a:t>Beat baseline; aim ≥ 85% (to calibrate)</a:t>
+                      </a:r>
+                    </a:p>
+                  </a:txBody>
+                  <a:tcPr marL="54864" marR="54864" marT="27432" marB="27432">
+                    <a:solidFill>
+                      <a:srgbClr val="FFFFFF"/>
+                    </a:solidFill>
+                  </a:tcPr>
+                </a:tc>
+                <a:extLst>
+                  <a:ext uri="{0D108BD9-81ED-4DB2-BD59-A6C34878D82A}">
+                    <a16:rowId xmlns:a16="http://schemas.microsoft.com/office/drawing/2014/main" val="10003"/>
+                  </a:ext>
+                </a:extLst>
+              </a:tr>
+              <a:tr h="384048">
+                <a:tc>
+                  <a:txBody>
+                    <a:bodyPr/>
+                    <a:lstStyle/>
+                    <a:p>
+                      <a:r>
+                        <a:rPr sz="1200" b="1">
+                          <a:solidFill>
+                            <a:srgbClr val="1F1F1F"/>
+                          </a:solidFill>
+                          <a:latin typeface="Calibri"/>
+                        </a:rPr>
+                        <a:t>Controller</a:t>
+                      </a:r>
+                    </a:p>
+                  </a:txBody>
+                  <a:tcPr marL="54864" marR="54864" marT="27432" marB="27432">
+                    <a:solidFill>
+                      <a:srgbClr val="F4F6F7"/>
+                    </a:solidFill>
+                  </a:tcPr>
+                </a:tc>
+                <a:tc>
+                  <a:txBody>
+                    <a:bodyPr/>
+                    <a:lstStyle/>
+                    <a:p>
+                      <a:r>
+                        <a:rPr sz="1200" b="0">
+                          <a:solidFill>
+                            <a:srgbClr val="1F1F1F"/>
+                          </a:solidFill>
+                          <a:latin typeface="Calibri"/>
+                        </a:rPr>
+                        <a:t>% correct next action</a:t>
+                      </a:r>
+                    </a:p>
+                  </a:txBody>
+                  <a:tcPr marL="54864" marR="54864" marT="27432" marB="27432">
+                    <a:solidFill>
+                      <a:srgbClr val="F4F6F7"/>
+                    </a:solidFill>
+                  </a:tcPr>
+                </a:tc>
+                <a:tc>
+                  <a:txBody>
+                    <a:bodyPr/>
+                    <a:lstStyle/>
+                    <a:p>
+                      <a:r>
+                        <a:rPr sz="1200" b="0">
+                          <a:solidFill>
+                            <a:srgbClr val="1F1F1F"/>
+                          </a:solidFill>
+                          <a:latin typeface="Calibri"/>
+                        </a:rPr>
+                        <a:t>Fixed rules</a:t>
+                      </a:r>
+                    </a:p>
+                  </a:txBody>
+                  <a:tcPr marL="54864" marR="54864" marT="27432" marB="27432">
+                    <a:solidFill>
+                      <a:srgbClr val="F4F6F7"/>
+                    </a:solidFill>
+                  </a:tcPr>
+                </a:tc>
+                <a:tc>
+                  <a:txBody>
+                    <a:bodyPr/>
+                    <a:lstStyle/>
+                    <a:p>
+                      <a:r>
+                        <a:rPr sz="1200" b="0">
+                          <a:solidFill>
+                            <a:srgbClr val="1F1F1F"/>
+                          </a:solidFill>
+                          <a:latin typeface="Calibri"/>
+                        </a:rPr>
+                        <a:t>Higher than fixed rules</a:t>
+                      </a:r>
+                    </a:p>
+                  </a:txBody>
+                  <a:tcPr marL="54864" marR="54864" marT="27432" marB="27432">
+                    <a:solidFill>
+                      <a:srgbClr val="F4F6F7"/>
+                    </a:solidFill>
+                  </a:tcPr>
+                </a:tc>
+                <a:extLst>
+                  <a:ext uri="{0D108BD9-81ED-4DB2-BD59-A6C34878D82A}">
+                    <a16:rowId xmlns:a16="http://schemas.microsoft.com/office/drawing/2014/main" val="10004"/>
+                  </a:ext>
+                </a:extLst>
+              </a:tr>
+              <a:tr h="384048">
+                <a:tc>
+                  <a:txBody>
+                    <a:bodyPr/>
+                    <a:lstStyle/>
+                    <a:p>
+                      <a:r>
+                        <a:rPr sz="1200" b="1">
+                          <a:solidFill>
+                            <a:srgbClr val="1F1F1F"/>
+                          </a:solidFill>
+                          <a:latin typeface="Calibri"/>
+                        </a:rPr>
+                        <a:t>Guardrails</a:t>
+                      </a:r>
+                    </a:p>
+                  </a:txBody>
+                  <a:tcPr marL="54864" marR="54864" marT="27432" marB="27432">
+                    <a:solidFill>
+                      <a:srgbClr val="FFFFFF"/>
+                    </a:solidFill>
+                  </a:tcPr>
+                </a:tc>
+                <a:tc>
+                  <a:txBody>
+                    <a:bodyPr/>
+                    <a:lstStyle/>
+                    <a:p>
+                      <a:r>
+                        <a:rPr sz="1200" b="0">
+                          <a:solidFill>
+                            <a:srgbClr val="1F1F1F"/>
+                          </a:solidFill>
+                          <a:latin typeface="Calibri"/>
+                        </a:rPr>
+                        <a:t>% off-topic / answer requests handled</a:t>
+                      </a:r>
+                    </a:p>
+                  </a:txBody>
+                  <a:tcPr marL="54864" marR="54864" marT="27432" marB="27432">
+                    <a:solidFill>
+                      <a:srgbClr val="FFFFFF"/>
+                    </a:solidFill>
+                  </a:tcPr>
+                </a:tc>
+                <a:tc>
+                  <a:txBody>
+                    <a:bodyPr/>
+                    <a:lstStyle/>
+                    <a:p>
+                      <a:r>
+                        <a:rPr sz="1200" b="0">
+                          <a:solidFill>
+                            <a:srgbClr val="1F1F1F"/>
+                          </a:solidFill>
+                          <a:latin typeface="Calibri"/>
+                        </a:rPr>
+                        <a:t>System prompt only</a:t>
+                      </a:r>
+                    </a:p>
+                  </a:txBody>
+                  <a:tcPr marL="54864" marR="54864" marT="27432" marB="27432">
+                    <a:solidFill>
+                      <a:srgbClr val="FFFFFF"/>
+                    </a:solidFill>
+                  </a:tcPr>
+                </a:tc>
+                <a:tc>
+                  <a:txBody>
+                    <a:bodyPr/>
+                    <a:lstStyle/>
+                    <a:p>
+                      <a:r>
+                        <a:rPr sz="1200" b="0">
+                          <a:solidFill>
+                            <a:srgbClr val="1F1F1F"/>
+                          </a:solidFill>
+                          <a:latin typeface="Calibri"/>
+                        </a:rPr>
+                        <a:t>≥ 95%</a:t>
+                      </a:r>
+                    </a:p>
+                  </a:txBody>
+                  <a:tcPr marL="54864" marR="54864" marT="27432" marB="27432">
+                    <a:solidFill>
+                      <a:srgbClr val="FFFFFF"/>
+                    </a:solidFill>
+                  </a:tcPr>
+                </a:tc>
+                <a:extLst>
+                  <a:ext uri="{0D108BD9-81ED-4DB2-BD59-A6C34878D82A}">
+                    <a16:rowId xmlns:a16="http://schemas.microsoft.com/office/drawing/2014/main" val="10005"/>
+                  </a:ext>
+                </a:extLst>
+              </a:tr>
+              <a:tr h="384048">
+                <a:tc>
+                  <a:txBody>
+                    <a:bodyPr/>
+                    <a:lstStyle/>
+                    <a:p>
+                      <a:r>
+                        <a:rPr sz="1200" b="1">
+                          <a:solidFill>
+                            <a:srgbClr val="1F1F1F"/>
+                          </a:solidFill>
+                          <a:latin typeface="Calibri"/>
+                        </a:rPr>
+                        <a:t>Search</a:t>
+                      </a:r>
+                    </a:p>
+                  </a:txBody>
+                  <a:tcPr marL="54864" marR="54864" marT="27432" marB="27432">
+                    <a:solidFill>
+                      <a:srgbClr val="F4F6F7"/>
+                    </a:solidFill>
+                  </a:tcPr>
+                </a:tc>
+                <a:tc>
+                  <a:txBody>
+                    <a:bodyPr/>
+                    <a:lstStyle/>
+                    <a:p>
+                      <a:r>
+                        <a:rPr sz="1200" b="0">
+                          <a:solidFill>
+                            <a:srgbClr val="1F1F1F"/>
+                          </a:solidFill>
+                          <a:latin typeface="Calibri"/>
+                        </a:rPr>
+                        <a:t>Correct resource in top 5</a:t>
+                      </a:r>
+                    </a:p>
+                  </a:txBody>
+                  <a:tcPr marL="54864" marR="54864" marT="27432" marB="27432">
+                    <a:solidFill>
+                      <a:srgbClr val="F4F6F7"/>
+                    </a:solidFill>
+                  </a:tcPr>
+                </a:tc>
+                <a:tc>
+                  <a:txBody>
+                    <a:bodyPr/>
+                    <a:lstStyle/>
+                    <a:p>
+                      <a:r>
+                        <a:rPr sz="1200" b="0">
+                          <a:solidFill>
+                            <a:srgbClr val="1F1F1F"/>
+                          </a:solidFill>
+                          <a:latin typeface="Calibri"/>
+                        </a:rPr>
+                        <a:t>Keyword search</a:t>
+                      </a:r>
+                    </a:p>
+                  </a:txBody>
+                  <a:tcPr marL="54864" marR="54864" marT="27432" marB="27432">
+                    <a:solidFill>
+                      <a:srgbClr val="F4F6F7"/>
+                    </a:solidFill>
+                  </a:tcPr>
+                </a:tc>
+                <a:tc>
+                  <a:txBody>
+                    <a:bodyPr/>
+                    <a:lstStyle/>
+                    <a:p>
+                      <a:r>
+                        <a:rPr sz="1200" b="0">
+                          <a:solidFill>
+                            <a:srgbClr val="1F1F1F"/>
+                          </a:solidFill>
+                          <a:latin typeface="Calibri"/>
+                        </a:rPr>
+                        <a:t>≥ 0.80</a:t>
+                      </a:r>
+                    </a:p>
+                  </a:txBody>
+                  <a:tcPr marL="54864" marR="54864" marT="27432" marB="27432">
+                    <a:solidFill>
+                      <a:srgbClr val="F4F6F7"/>
+                    </a:solidFill>
+                  </a:tcPr>
+                </a:tc>
+                <a:extLst>
+                  <a:ext uri="{0D108BD9-81ED-4DB2-BD59-A6C34878D82A}">
+                    <a16:rowId xmlns:a16="http://schemas.microsoft.com/office/drawing/2014/main" val="10006"/>
+                  </a:ext>
+                </a:extLst>
+              </a:tr>
+              <a:tr h="384048">
+                <a:tc>
+                  <a:txBody>
+                    <a:bodyPr/>
+                    <a:lstStyle/>
+                    <a:p>
+                      <a:r>
+                        <a:rPr sz="1200" b="1">
+                          <a:solidFill>
+                            <a:srgbClr val="1F1F1F"/>
+                          </a:solidFill>
+                          <a:latin typeface="Calibri"/>
+                        </a:rPr>
+                        <a:t>Full tutor</a:t>
+                      </a:r>
+                    </a:p>
+                  </a:txBody>
+                  <a:tcPr marL="54864" marR="54864" marT="27432" marB="27432">
+                    <a:solidFill>
+                      <a:srgbClr val="FFFFFF"/>
+                    </a:solidFill>
+                  </a:tcPr>
+                </a:tc>
+                <a:tc>
+                  <a:txBody>
+                    <a:bodyPr/>
+                    <a:lstStyle/>
+                    <a:p>
+                      <a:r>
+                        <a:rPr sz="1200" b="0">
+                          <a:solidFill>
+                            <a:srgbClr val="1F1F1F"/>
+                          </a:solidFill>
+                          <a:latin typeface="Calibri"/>
+                        </a:rPr>
+                        <a:t>% test scenarios handled</a:t>
+                      </a:r>
+                    </a:p>
+                  </a:txBody>
+                  <a:tcPr marL="54864" marR="54864" marT="27432" marB="27432">
+                    <a:solidFill>
+                      <a:srgbClr val="FFFFFF"/>
+                    </a:solidFill>
+                  </a:tcPr>
+                </a:tc>
+                <a:tc>
+                  <a:txBody>
+                    <a:bodyPr/>
+                    <a:lstStyle/>
+                    <a:p>
+                      <a:r>
+                        <a:rPr sz="1200" b="0">
+                          <a:solidFill>
+                            <a:srgbClr val="1F1F1F"/>
+                          </a:solidFill>
+                          <a:latin typeface="Calibri"/>
+                        </a:rPr>
+                        <a:t>Fixed rules; LLM API + system prompt</a:t>
+                      </a:r>
+                    </a:p>
+                  </a:txBody>
+                  <a:tcPr marL="54864" marR="54864" marT="27432" marB="27432">
+                    <a:solidFill>
+                      <a:srgbClr val="FFFFFF"/>
+                    </a:solidFill>
+                  </a:tcPr>
+                </a:tc>
+                <a:tc>
+                  <a:txBody>
+                    <a:bodyPr/>
+                    <a:lstStyle/>
+                    <a:p>
+                      <a:r>
+                        <a:rPr sz="1200" b="0">
+                          <a:solidFill>
+                            <a:srgbClr val="1F1F1F"/>
+                          </a:solidFill>
+                          <a:latin typeface="Calibri"/>
+                        </a:rPr>
+                        <a:t>≥ 90%</a:t>
+                      </a:r>
+                    </a:p>
+                  </a:txBody>
+                  <a:tcPr marL="54864" marR="54864" marT="27432" marB="27432">
+                    <a:solidFill>
+                      <a:srgbClr val="FFFFFF"/>
+                    </a:solidFill>
+                  </a:tcPr>
+                </a:tc>
+                <a:extLst>
+                  <a:ext uri="{0D108BD9-81ED-4DB2-BD59-A6C34878D82A}">
+                    <a16:rowId xmlns:a16="http://schemas.microsoft.com/office/drawing/2014/main" val="10007"/>
+                  </a:ext>
+                </a:extLst>
+              </a:tr>
+            </a:tbl>
+          </a:graphicData>
+        </a:graphic>
+      </p:graphicFrame>
+      <p:sp>
+        <p:nvSpPr>
+          <p:cNvPr id="7" name="TextBox 6"/>
+          <p:cNvSpPr txBox="1"/>
+          <p:nvPr/>
+        </p:nvSpPr>
+        <p:spPr>
+          <a:xfrm>
+            <a:off x="548640" y="4434840"/>
+            <a:ext cx="11064240" cy="411480"/>
+          </a:xfrm>
+          <a:prstGeom prst="rect">
+            <a:avLst/>
+          </a:prstGeom>
+          <a:noFill/>
+        </p:spPr>
+        <p:txBody>
+          <a:bodyPr wrap="square" lIns="45720" rIns="45720" anchor="t">
+            <a:spAutoFit/>
+          </a:bodyPr>
+          <a:lstStyle/>
+          <a:p>
+            <a:pPr algn="l">
+              <a:spcAft>
+                <a:spcPts val="400"/>
+              </a:spcAft>
+            </a:pPr>
+            <a:r>
+              <a:rPr sz="1800" b="1">
+                <a:solidFill>
+                  <a:srgbClr val="0F7C8C"/>
+                </a:solidFill>
+                <a:latin typeface="Calibri"/>
+              </a:rPr>
+              <a:t>How we will evaluate</a:t>
+            </a:r>
+          </a:p>
+        </p:txBody>
+      </p:sp>
+      <p:sp>
+        <p:nvSpPr>
+          <p:cNvPr id="8" name="TextBox 7"/>
+          <p:cNvSpPr txBox="1"/>
+          <p:nvPr/>
+        </p:nvSpPr>
+        <p:spPr>
+          <a:xfrm>
+            <a:off x="548640" y="4846320"/>
+            <a:ext cx="11064240" cy="1463040"/>
+          </a:xfrm>
+          <a:prstGeom prst="rect">
+            <a:avLst/>
+          </a:prstGeom>
+          <a:noFill/>
+        </p:spPr>
+        <p:txBody>
+          <a:bodyPr wrap="square" lIns="45720" rIns="45720" anchor="t">
+            <a:spAutoFit/>
+          </a:bodyPr>
+          <a:lstStyle/>
+          <a:p>
+            <a:pPr algn="l">
+              <a:spcAft>
+                <a:spcPts val="800"/>
+              </a:spcAft>
+            </a:pPr>
+            <a:r>
+              <a:rPr sz="1300" b="0">
+                <a:solidFill>
+                  <a:srgbClr val="1F1F1F"/>
+                </a:solidFill>
+                <a:latin typeface="Calibri"/>
+              </a:rPr>
+              <a:t>•  60–100 annotated NCERT scenarios (careless slip, gap 1 level down, gap 2 levels down…) + any provided test samples</a:t>
+            </a:r>
+          </a:p>
+          <a:p>
+            <a:pPr algn="l">
+              <a:spcAft>
+                <a:spcPts val="800"/>
+              </a:spcAft>
+            </a:pPr>
+            <a:r>
+              <a:rPr sz="1300" b="0">
+                <a:solidFill>
+                  <a:srgbClr val="1F1F1F"/>
+                </a:solidFill>
+                <a:latin typeface="Calibri"/>
+              </a:rPr>
+              <a:t>•  Compare: direct-answer chatbot vs LLM API with Socratic prompt vs our tutor; also vs published research numbers</a:t>
+            </a:r>
+          </a:p>
+          <a:p>
+            <a:pPr algn="l">
+              <a:spcAft>
+                <a:spcPts val="800"/>
+              </a:spcAft>
+            </a:pPr>
+            <a:r>
+              <a:rPr sz="1300" b="0">
+                <a:solidFill>
+                  <a:srgbClr val="1F1F1F"/>
+                </a:solidFill>
+                <a:latin typeface="Calibri"/>
+              </a:rPr>
+              <a:t>•  Same tests on the NCERT and IITM BS course packs, with no code changes</a:t>
+            </a:r>
+          </a:p>
+        </p:txBody>
+      </p:sp>
+    </p:spTree>
+  </p:cSld>
+  <p:clrMapOvr>
+    <a:masterClrMapping/>
+  </p:clrMapOvr>
+</p:sld>
+</file>
+
+<file path=ppt/slides/slide11.xml><?xml version="1.0" encoding="utf-8"?>
+<p:sld xmlns:a="http://schemas.openxmlformats.org/drawingml/2006/main" xmlns:r="http://schemas.openxmlformats.org/officeDocument/2006/relationships" xmlns:p="http://schemas.openxmlformats.org/presentationml/2006/main">
+  <p:cSld>
+    <p:spTree>
+      <p:nvGrpSpPr>
+        <p:cNvPr id="1" name=""/>
+        <p:cNvGrpSpPr/>
+        <p:nvPr/>
+      </p:nvGrpSpPr>
+      <p:grpSpPr>
+        <a:xfrm>
+          <a:off x="0" y="0"/>
+          <a:ext cx="0" cy="0"/>
+          <a:chOff x="0" y="0"/>
+          <a:chExt cx="0" cy="0"/>
+        </a:xfrm>
+      </p:grpSpPr>
+      <p:sp>
+        <p:nvSpPr>
+          <p:cNvPr id="2" name="Rectangle 1"/>
+          <p:cNvSpPr/>
+          <p:nvPr/>
+        </p:nvSpPr>
+        <p:spPr>
+          <a:xfrm>
+            <a:off x="0" y="0"/>
+            <a:ext cx="12191695" cy="109728"/>
+          </a:xfrm>
+          <a:prstGeom prst="rect">
+            <a:avLst/>
+          </a:prstGeom>
+          <a:solidFill>
+            <a:srgbClr val="0F7C8C"/>
+          </a:solidFill>
+          <a:ln>
+            <a:noFill/>
+          </a:ln>
+          <a:effectLst/>
+        </p:spPr>
+        <p:style>
+          <a:lnRef idx="1">
+            <a:schemeClr val="accent1"/>
+          </a:lnRef>
+          <a:fillRef idx="3">
+            <a:schemeClr val="accent1"/>
+          </a:fillRef>
+          <a:effectRef idx="2">
+            <a:schemeClr val="accent1"/>
+          </a:effectRef>
+          <a:fontRef idx="minor">
+            <a:schemeClr val="lt1"/>
+          </a:fontRef>
+        </p:style>
+        <p:txBody>
+          <a:bodyPr rtlCol="0" anchor="ctr"/>
+          <a:lstStyle/>
+          <a:p>
+            <a:pPr algn="ctr"/>
+            <a:endParaRPr/>
+          </a:p>
+        </p:txBody>
+      </p:sp>
+      <p:sp>
+        <p:nvSpPr>
+          <p:cNvPr id="3" name="TextBox 2"/>
+          <p:cNvSpPr txBox="1"/>
+          <p:nvPr/>
+        </p:nvSpPr>
+        <p:spPr>
+          <a:xfrm>
+            <a:off x="548640" y="320040"/>
+            <a:ext cx="11064240" cy="640080"/>
+          </a:xfrm>
+          <a:prstGeom prst="rect">
+            <a:avLst/>
+          </a:prstGeom>
+          <a:noFill/>
+        </p:spPr>
+        <p:txBody>
+          <a:bodyPr wrap="square" lIns="45720" rIns="45720" anchor="t">
+            <a:spAutoFit/>
+          </a:bodyPr>
+          <a:lstStyle/>
+          <a:p>
+            <a:pPr algn="l">
+              <a:spcAft>
+                <a:spcPts val="400"/>
+              </a:spcAft>
+            </a:pPr>
+            <a:r>
+              <a:rPr sz="3000" b="1">
+                <a:solidFill>
+                  <a:srgbClr val="1B364B"/>
+                </a:solidFill>
+                <a:latin typeface="Calibri"/>
+              </a:rPr>
+              <a:t>Published baselines from research</a:t>
+            </a:r>
+          </a:p>
+        </p:txBody>
+      </p:sp>
+      <p:sp>
+        <p:nvSpPr>
+          <p:cNvPr id="4" name="TextBox 3"/>
+          <p:cNvSpPr txBox="1"/>
+          <p:nvPr/>
+        </p:nvSpPr>
+        <p:spPr>
+          <a:xfrm>
+            <a:off x="548640" y="6400800"/>
+            <a:ext cx="8229600" cy="320040"/>
+          </a:xfrm>
+          <a:prstGeom prst="rect">
+            <a:avLst/>
+          </a:prstGeom>
+          <a:noFill/>
+        </p:spPr>
+        <p:txBody>
+          <a:bodyPr wrap="square" lIns="45720" rIns="45720" anchor="t">
+            <a:spAutoFit/>
+          </a:bodyPr>
+          <a:lstStyle/>
+          <a:p>
+            <a:pPr algn="l">
+              <a:spcAft>
+                <a:spcPts val="400"/>
+              </a:spcAft>
+            </a:pPr>
+            <a:r>
+              <a:rPr sz="1000" b="0">
+                <a:solidFill>
+                  <a:srgbClr val="555555"/>
+                </a:solidFill>
+                <a:latin typeface="Calibri"/>
+              </a:rPr>
+              <a:t>Group 2 · Socratic AI Tutor · Milestone 1</a:t>
+            </a:r>
+          </a:p>
+        </p:txBody>
+      </p:sp>
+      <p:sp>
+        <p:nvSpPr>
+          <p:cNvPr id="5" name="TextBox 4"/>
+          <p:cNvSpPr txBox="1"/>
+          <p:nvPr/>
+        </p:nvSpPr>
+        <p:spPr>
+          <a:xfrm>
+            <a:off x="10698480" y="6400800"/>
+            <a:ext cx="914400" cy="320040"/>
+          </a:xfrm>
+          <a:prstGeom prst="rect">
+            <a:avLst/>
+          </a:prstGeom>
+          <a:noFill/>
+        </p:spPr>
+        <p:txBody>
+          <a:bodyPr wrap="square" lIns="45720" rIns="45720" anchor="t">
+            <a:spAutoFit/>
+          </a:bodyPr>
+          <a:lstStyle/>
+          <a:p>
+            <a:pPr algn="r">
+              <a:spcAft>
+                <a:spcPts val="400"/>
+              </a:spcAft>
+            </a:pPr>
+            <a:r>
+              <a:rPr sz="1000" b="0">
+                <a:solidFill>
+                  <a:srgbClr val="555555"/>
+                </a:solidFill>
+                <a:latin typeface="Calibri"/>
+              </a:rPr>
+              <a:t>11 / 13</a:t>
+            </a:r>
+          </a:p>
+        </p:txBody>
+      </p:sp>
+      <p:graphicFrame>
+        <p:nvGraphicFramePr>
+          <p:cNvPr id="6" name="Table 5"/>
+          <p:cNvGraphicFramePr>
+            <a:graphicFrameLocks noGrp="1"/>
+          </p:cNvGraphicFramePr>
+          <p:nvPr/>
+        </p:nvGraphicFramePr>
+        <p:xfrm>
+          <a:off x="548640" y="1188720"/>
+          <a:ext cx="11064240" cy="4023360"/>
+        </p:xfrm>
+        <a:graphic>
+          <a:graphicData uri="http://schemas.openxmlformats.org/drawingml/2006/table">
+            <a:tbl>
+              <a:tblPr firstRow="1" bandRow="1">
+                <a:tableStyleId>{5C22544A-7EE6-4342-B048-85BDC9FD1C3A}</a:tableStyleId>
+              </a:tblPr>
+              <a:tblGrid>
+                <a:gridCol w="1828800">
+                  <a:extLst>
+                    <a:ext uri="{9D8B030D-6E8A-4147-A177-3AD203B41FA5}">
+                      <a16:colId xmlns:a16="http://schemas.microsoft.com/office/drawing/2014/main" val="20000"/>
+                    </a:ext>
+                  </a:extLst>
+                </a:gridCol>
+                <a:gridCol w="3017520">
+                  <a:extLst>
+                    <a:ext uri="{9D8B030D-6E8A-4147-A177-3AD203B41FA5}">
+                      <a16:colId xmlns:a16="http://schemas.microsoft.com/office/drawing/2014/main" val="20001"/>
+                    </a:ext>
+                  </a:extLst>
+                </a:gridCol>
+                <a:gridCol w="6217920">
+                  <a:extLst>
+                    <a:ext uri="{9D8B030D-6E8A-4147-A177-3AD203B41FA5}">
+                      <a16:colId xmlns:a16="http://schemas.microsoft.com/office/drawing/2014/main" val="20002"/>
+                    </a:ext>
+                  </a:extLst>
+                </a:gridCol>
+              </a:tblGrid>
+              <a:tr h="502920">
+                <a:tc>
+                  <a:txBody>
+                    <a:bodyPr/>
+                    <a:lstStyle/>
+                    <a:p>
+                      <a:r>
+                        <a:rPr sz="1200" b="1">
+                          <a:solidFill>
+                            <a:srgbClr val="FFFFFF"/>
+                          </a:solidFill>
+                          <a:latin typeface="Calibri"/>
+                        </a:rPr>
+                        <a:t>Part</a:t>
+                      </a:r>
+                    </a:p>
+                  </a:txBody>
+                  <a:tcPr marL="54864" marR="54864" marT="27432" marB="27432">
+                    <a:solidFill>
+                      <a:srgbClr val="1B364B"/>
+                    </a:solidFill>
+                  </a:tcPr>
+                </a:tc>
+                <a:tc>
+                  <a:txBody>
+                    <a:bodyPr/>
+                    <a:lstStyle/>
+                    <a:p>
+                      <a:r>
+                        <a:rPr sz="1200" b="1">
+                          <a:solidFill>
+                            <a:srgbClr val="FFFFFF"/>
+                          </a:solidFill>
+                          <a:latin typeface="Calibri"/>
+                        </a:rPr>
+                        <a:t>Paper</a:t>
+                      </a:r>
+                    </a:p>
+                  </a:txBody>
+                  <a:tcPr marL="54864" marR="54864" marT="27432" marB="27432">
+                    <a:solidFill>
+                      <a:srgbClr val="1B364B"/>
+                    </a:solidFill>
+                  </a:tcPr>
+                </a:tc>
+                <a:tc>
+                  <a:txBody>
+                    <a:bodyPr/>
+                    <a:lstStyle/>
+                    <a:p>
+                      <a:r>
+                        <a:rPr sz="1200" b="1">
+                          <a:solidFill>
+                            <a:srgbClr val="FFFFFF"/>
+                          </a:solidFill>
+                          <a:latin typeface="Calibri"/>
+                        </a:rPr>
+                        <a:t>Published result</a:t>
+                      </a:r>
+                    </a:p>
+                  </a:txBody>
+                  <a:tcPr marL="54864" marR="54864" marT="27432" marB="27432">
+                    <a:solidFill>
+                      <a:srgbClr val="1B364B"/>
+                    </a:solidFill>
+                  </a:tcPr>
+                </a:tc>
+                <a:extLst>
+                  <a:ext uri="{0D108BD9-81ED-4DB2-BD59-A6C34878D82A}">
+                    <a16:rowId xmlns:a16="http://schemas.microsoft.com/office/drawing/2014/main" val="10000"/>
+                  </a:ext>
+                </a:extLst>
+              </a:tr>
+              <a:tr h="502920">
+                <a:tc>
+                  <a:txBody>
+                    <a:bodyPr/>
+                    <a:lstStyle/>
+                    <a:p>
+                      <a:r>
+                        <a:rPr sz="1200" b="1">
+                          <a:solidFill>
+                            <a:srgbClr val="1F1F1F"/>
+                          </a:solidFill>
+                          <a:latin typeface="Calibri"/>
+                        </a:rPr>
+                        <a:t>Learner model</a:t>
+                      </a:r>
+                    </a:p>
+                  </a:txBody>
+                  <a:tcPr marL="54864" marR="54864" marT="27432" marB="27432">
+                    <a:solidFill>
+                      <a:srgbClr val="FFFFFF"/>
+                    </a:solidFill>
+                  </a:tcPr>
+                </a:tc>
+                <a:tc>
+                  <a:txBody>
+                    <a:bodyPr/>
+                    <a:lstStyle/>
+                    <a:p>
+                      <a:r>
+                        <a:rPr sz="1200" b="0">
+                          <a:solidFill>
+                            <a:srgbClr val="1F1F1F"/>
+                          </a:solidFill>
+                          <a:latin typeface="Calibri"/>
+                        </a:rPr>
+                        <a:t>pyKT benchmark (ASSISTments 2009)</a:t>
+                      </a:r>
+                    </a:p>
+                  </a:txBody>
+                  <a:tcPr marL="54864" marR="54864" marT="27432" marB="27432">
+                    <a:solidFill>
+                      <a:srgbClr val="FFFFFF"/>
+                    </a:solidFill>
+                  </a:tcPr>
+                </a:tc>
+                <a:tc>
+                  <a:txBody>
+                    <a:bodyPr/>
+                    <a:lstStyle/>
+                    <a:p>
+                      <a:r>
+                        <a:rPr sz="1200" b="0">
+                          <a:solidFill>
+                            <a:srgbClr val="1F1F1F"/>
+                          </a:solidFill>
+                          <a:latin typeface="Calibri"/>
+                        </a:rPr>
+                        <a:t>AUC: BKT 0.69, DKT 0.754, DKVMN 0.747, SAKT 0.725, AKT 0.785</a:t>
+                      </a:r>
+                    </a:p>
+                  </a:txBody>
+                  <a:tcPr marL="54864" marR="54864" marT="27432" marB="27432">
+                    <a:solidFill>
+                      <a:srgbClr val="FFFFFF"/>
+                    </a:solidFill>
+                  </a:tcPr>
+                </a:tc>
+                <a:extLst>
+                  <a:ext uri="{0D108BD9-81ED-4DB2-BD59-A6C34878D82A}">
+                    <a16:rowId xmlns:a16="http://schemas.microsoft.com/office/drawing/2014/main" val="10001"/>
+                  </a:ext>
+                </a:extLst>
+              </a:tr>
+              <a:tr h="502920">
+                <a:tc>
+                  <a:txBody>
+                    <a:bodyPr/>
+                    <a:lstStyle/>
+                    <a:p>
+                      <a:r>
+                        <a:rPr sz="1200" b="1">
+                          <a:solidFill>
+                            <a:srgbClr val="1F1F1F"/>
+                          </a:solidFill>
+                          <a:latin typeface="Calibri"/>
+                        </a:rPr>
+                        <a:t>Socratic model</a:t>
+                      </a:r>
+                    </a:p>
+                  </a:txBody>
+                  <a:tcPr marL="54864" marR="54864" marT="27432" marB="27432">
+                    <a:solidFill>
+                      <a:srgbClr val="F4F6F7"/>
+                    </a:solidFill>
+                  </a:tcPr>
+                </a:tc>
+                <a:tc>
+                  <a:txBody>
+                    <a:bodyPr/>
+                    <a:lstStyle/>
+                    <a:p>
+                      <a:r>
+                        <a:rPr sz="1200" b="0">
+                          <a:solidFill>
+                            <a:srgbClr val="1F1F1F"/>
+                          </a:solidFill>
+                          <a:latin typeface="Calibri"/>
+                        </a:rPr>
+                        <a:t>MathDial (EMNLP 2023)</a:t>
+                      </a:r>
+                    </a:p>
+                  </a:txBody>
+                  <a:tcPr marL="54864" marR="54864" marT="27432" marB="27432">
+                    <a:solidFill>
+                      <a:srgbClr val="F4F6F7"/>
+                    </a:solidFill>
+                  </a:tcPr>
+                </a:tc>
+                <a:tc>
+                  <a:txBody>
+                    <a:bodyPr/>
+                    <a:lstStyle/>
+                    <a:p>
+                      <a:r>
+                        <a:rPr sz="1200" b="0">
+                          <a:solidFill>
+                            <a:srgbClr val="1F1F1F"/>
+                          </a:solidFill>
+                          <a:latin typeface="Calibri"/>
+                        </a:rPr>
+                        <a:t>ChatGPT as tutor revealed the solution in 66% of turns, gave wrong feedback in 59%</a:t>
+                      </a:r>
+                    </a:p>
+                  </a:txBody>
+                  <a:tcPr marL="54864" marR="54864" marT="27432" marB="27432">
+                    <a:solidFill>
+                      <a:srgbClr val="F4F6F7"/>
+                    </a:solidFill>
+                  </a:tcPr>
+                </a:tc>
+                <a:extLst>
+                  <a:ext uri="{0D108BD9-81ED-4DB2-BD59-A6C34878D82A}">
+                    <a16:rowId xmlns:a16="http://schemas.microsoft.com/office/drawing/2014/main" val="10002"/>
+                  </a:ext>
+                </a:extLst>
+              </a:tr>
+              <a:tr h="502920">
+                <a:tc>
+                  <a:txBody>
+                    <a:bodyPr/>
+                    <a:lstStyle/>
+                    <a:p>
+                      <a:r>
+                        <a:rPr sz="1200" b="1">
+                          <a:solidFill>
+                            <a:srgbClr val="1F1F1F"/>
+                          </a:solidFill>
+                          <a:latin typeface="Calibri"/>
+                        </a:rPr>
+                        <a:t>Socratic model</a:t>
+                      </a:r>
+                    </a:p>
+                  </a:txBody>
+                  <a:tcPr marL="54864" marR="54864" marT="27432" marB="27432">
+                    <a:solidFill>
+                      <a:srgbClr val="FFFFFF"/>
+                    </a:solidFill>
+                  </a:tcPr>
+                </a:tc>
+                <a:tc>
+                  <a:txBody>
+                    <a:bodyPr/>
+                    <a:lstStyle/>
+                    <a:p>
+                      <a:r>
+                        <a:rPr sz="1200" b="0">
+                          <a:solidFill>
+                            <a:srgbClr val="1F1F1F"/>
+                          </a:solidFill>
+                          <a:latin typeface="Calibri"/>
+                        </a:rPr>
+                        <a:t>Answer-leakage study (ACL 2026)</a:t>
+                      </a:r>
+                    </a:p>
+                  </a:txBody>
+                  <a:tcPr marL="54864" marR="54864" marT="27432" marB="27432">
+                    <a:solidFill>
+                      <a:srgbClr val="FFFFFF"/>
+                    </a:solidFill>
+                  </a:tcPr>
+                </a:tc>
+                <a:tc>
+                  <a:txBody>
+                    <a:bodyPr/>
+                    <a:lstStyle/>
+                    <a:p>
+                      <a:r>
+                        <a:rPr sz="1200" b="0">
+                          <a:solidFill>
+                            <a:srgbClr val="1F1F1F"/>
+                          </a:solidFill>
+                          <a:latin typeface="Calibri"/>
+                        </a:rPr>
+                        <a:t>Leakage vs a base adversarial student: Qwen-32B 4%, Qwen-7B 14%, SocraticLM 34%, MathDial-SFT 40%; vs a fine-tuned attacker up to 82%</a:t>
+                      </a:r>
+                    </a:p>
+                  </a:txBody>
+                  <a:tcPr marL="54864" marR="54864" marT="27432" marB="27432">
+                    <a:solidFill>
+                      <a:srgbClr val="FFFFFF"/>
+                    </a:solidFill>
+                  </a:tcPr>
+                </a:tc>
+                <a:extLst>
+                  <a:ext uri="{0D108BD9-81ED-4DB2-BD59-A6C34878D82A}">
+                    <a16:rowId xmlns:a16="http://schemas.microsoft.com/office/drawing/2014/main" val="10003"/>
+                  </a:ext>
+                </a:extLst>
+              </a:tr>
+              <a:tr h="502920">
+                <a:tc>
+                  <a:txBody>
+                    <a:bodyPr/>
+                    <a:lstStyle/>
+                    <a:p>
+                      <a:r>
+                        <a:rPr sz="1200" b="1">
+                          <a:solidFill>
+                            <a:srgbClr val="1F1F1F"/>
+                          </a:solidFill>
+                          <a:latin typeface="Calibri"/>
+                        </a:rPr>
+                        <a:t>Socratic model</a:t>
+                      </a:r>
+                    </a:p>
+                  </a:txBody>
+                  <a:tcPr marL="54864" marR="54864" marT="27432" marB="27432">
+                    <a:solidFill>
+                      <a:srgbClr val="F4F6F7"/>
+                    </a:solidFill>
+                  </a:tcPr>
+                </a:tc>
+                <a:tc>
+                  <a:txBody>
+                    <a:bodyPr/>
+                    <a:lstStyle/>
+                    <a:p>
+                      <a:r>
+                        <a:rPr sz="1200" b="0">
+                          <a:solidFill>
+                            <a:srgbClr val="1F1F1F"/>
+                          </a:solidFill>
+                          <a:latin typeface="Calibri"/>
+                        </a:rPr>
+                        <a:t>Bastani et al. (PNAS 2025)</a:t>
+                      </a:r>
+                    </a:p>
+                  </a:txBody>
+                  <a:tcPr marL="54864" marR="54864" marT="27432" marB="27432">
+                    <a:solidFill>
+                      <a:srgbClr val="F4F6F7"/>
+                    </a:solidFill>
+                  </a:tcPr>
+                </a:tc>
+                <a:tc>
+                  <a:txBody>
+                    <a:bodyPr/>
+                    <a:lstStyle/>
+                    <a:p>
+                      <a:r>
+                        <a:rPr sz="1200" b="0">
+                          <a:solidFill>
+                            <a:srgbClr val="1F1F1F"/>
+                          </a:solidFill>
+                          <a:latin typeface="Calibri"/>
+                        </a:rPr>
+                        <a:t>Plain GPT-4: 17% worse exam scores; guardrailed version avoided the drop</a:t>
+                      </a:r>
+                    </a:p>
+                  </a:txBody>
+                  <a:tcPr marL="54864" marR="54864" marT="27432" marB="27432">
+                    <a:solidFill>
+                      <a:srgbClr val="F4F6F7"/>
+                    </a:solidFill>
+                  </a:tcPr>
+                </a:tc>
+                <a:extLst>
+                  <a:ext uri="{0D108BD9-81ED-4DB2-BD59-A6C34878D82A}">
+                    <a16:rowId xmlns:a16="http://schemas.microsoft.com/office/drawing/2014/main" val="10004"/>
+                  </a:ext>
+                </a:extLst>
+              </a:tr>
+              <a:tr h="502920">
+                <a:tc>
+                  <a:txBody>
+                    <a:bodyPr/>
+                    <a:lstStyle/>
+                    <a:p>
+                      <a:r>
+                        <a:rPr sz="1200" b="1">
+                          <a:solidFill>
+                            <a:srgbClr val="1F1F1F"/>
+                          </a:solidFill>
+                          <a:latin typeface="Calibri"/>
+                        </a:rPr>
+                        <a:t>Backtracking</a:t>
+                      </a:r>
+                    </a:p>
+                  </a:txBody>
+                  <a:tcPr marL="54864" marR="54864" marT="27432" marB="27432">
+                    <a:solidFill>
+                      <a:srgbClr val="FFFFFF"/>
+                    </a:solidFill>
+                  </a:tcPr>
+                </a:tc>
+                <a:tc>
+                  <a:txBody>
+                    <a:bodyPr/>
+                    <a:lstStyle/>
+                    <a:p>
+                      <a:r>
+                        <a:rPr sz="1200" b="0">
+                          <a:solidFill>
+                            <a:srgbClr val="1F1F1F"/>
+                          </a:solidFill>
+                          <a:latin typeface="Calibri"/>
+                        </a:rPr>
+                        <a:t>Pedagogical Suitability Index</a:t>
+                      </a:r>
+                    </a:p>
+                  </a:txBody>
+                  <a:tcPr marL="54864" marR="54864" marT="27432" marB="27432">
+                    <a:solidFill>
+                      <a:srgbClr val="FFFFFF"/>
+                    </a:solidFill>
+                  </a:tcPr>
+                </a:tc>
+                <a:tc>
+                  <a:txBody>
+                    <a:bodyPr/>
+                    <a:lstStyle/>
+                    <a:p>
+                      <a:r>
+                        <a:rPr sz="1200" b="0">
+                          <a:solidFill>
+                            <a:srgbClr val="1F1F1F"/>
+                          </a:solidFill>
+                          <a:latin typeface="Calibri"/>
+                        </a:rPr>
+                        <a:t>Prerequisite-order score 0.56 to 0.64 for current tutors; no paper tests gap-finding accuracy</a:t>
+                      </a:r>
+                    </a:p>
+                  </a:txBody>
+                  <a:tcPr marL="54864" marR="54864" marT="27432" marB="27432">
+                    <a:solidFill>
+                      <a:srgbClr val="FFFFFF"/>
+                    </a:solidFill>
+                  </a:tcPr>
+                </a:tc>
+                <a:extLst>
+                  <a:ext uri="{0D108BD9-81ED-4DB2-BD59-A6C34878D82A}">
+                    <a16:rowId xmlns:a16="http://schemas.microsoft.com/office/drawing/2014/main" val="10005"/>
+                  </a:ext>
+                </a:extLst>
+              </a:tr>
+              <a:tr h="502920">
+                <a:tc>
+                  <a:txBody>
+                    <a:bodyPr/>
+                    <a:lstStyle/>
+                    <a:p>
+                      <a:r>
+                        <a:rPr sz="1200" b="1">
+                          <a:solidFill>
+                            <a:srgbClr val="1F1F1F"/>
+                          </a:solidFill>
+                          <a:latin typeface="Calibri"/>
+                        </a:rPr>
+                        <a:t>Search</a:t>
+                      </a:r>
+                    </a:p>
+                  </a:txBody>
+                  <a:tcPr marL="54864" marR="54864" marT="27432" marB="27432">
+                    <a:solidFill>
+                      <a:srgbClr val="F4F6F7"/>
+                    </a:solidFill>
+                  </a:tcPr>
+                </a:tc>
+                <a:tc>
+                  <a:txBody>
+                    <a:bodyPr/>
+                    <a:lstStyle/>
+                    <a:p>
+                      <a:r>
+                        <a:rPr sz="1200" b="0">
+                          <a:solidFill>
+                            <a:srgbClr val="1F1F1F"/>
+                          </a:solidFill>
+                          <a:latin typeface="Calibri"/>
+                        </a:rPr>
+                        <a:t>BEIR (NeurIPS 2021)</a:t>
+                      </a:r>
+                    </a:p>
+                  </a:txBody>
+                  <a:tcPr marL="54864" marR="54864" marT="27432" marB="27432">
+                    <a:solidFill>
+                      <a:srgbClr val="F4F6F7"/>
+                    </a:solidFill>
+                  </a:tcPr>
+                </a:tc>
+                <a:tc>
+                  <a:txBody>
+                    <a:bodyPr/>
+                    <a:lstStyle/>
+                    <a:p>
+                      <a:r>
+                        <a:rPr sz="1200" b="0">
+                          <a:solidFill>
+                            <a:srgbClr val="1F1F1F"/>
+                          </a:solidFill>
+                          <a:latin typeface="Calibri"/>
+                        </a:rPr>
+                        <a:t>BM25 is a strong zero-shot baseline; dense retrievers often fall below it out of domain</a:t>
+                      </a:r>
+                    </a:p>
+                  </a:txBody>
+                  <a:tcPr marL="54864" marR="54864" marT="27432" marB="27432">
+                    <a:solidFill>
+                      <a:srgbClr val="F4F6F7"/>
+                    </a:solidFill>
+                  </a:tcPr>
+                </a:tc>
+                <a:extLst>
+                  <a:ext uri="{0D108BD9-81ED-4DB2-BD59-A6C34878D82A}">
+                    <a16:rowId xmlns:a16="http://schemas.microsoft.com/office/drawing/2014/main" val="10006"/>
+                  </a:ext>
+                </a:extLst>
+              </a:tr>
+              <a:tr h="502920">
+                <a:tc>
+                  <a:txBody>
+                    <a:bodyPr/>
+                    <a:lstStyle/>
+                    <a:p>
+                      <a:r>
+                        <a:rPr sz="1200" b="1">
+                          <a:solidFill>
+                            <a:srgbClr val="1F1F1F"/>
+                          </a:solidFill>
+                          <a:latin typeface="Calibri"/>
+                        </a:rPr>
+                        <a:t>Controller, guardrails</a:t>
+                      </a:r>
+                    </a:p>
+                  </a:txBody>
+                  <a:tcPr marL="54864" marR="54864" marT="27432" marB="27432">
+                    <a:solidFill>
+                      <a:srgbClr val="FFFFFF"/>
+                    </a:solidFill>
+                  </a:tcPr>
+                </a:tc>
+                <a:tc>
+                  <a:txBody>
+                    <a:bodyPr/>
+                    <a:lstStyle/>
+                    <a:p>
+                      <a:r>
+                        <a:rPr sz="1200" b="0">
+                          <a:solidFill>
+                            <a:srgbClr val="1F1F1F"/>
+                          </a:solidFill>
+                          <a:latin typeface="Calibri"/>
+                        </a:rPr>
+                        <a:t>None found yet</a:t>
+                      </a:r>
+                    </a:p>
+                  </a:txBody>
+                  <a:tcPr marL="54864" marR="54864" marT="27432" marB="27432">
+                    <a:solidFill>
+                      <a:srgbClr val="FFFFFF"/>
+                    </a:solidFill>
+                  </a:tcPr>
+                </a:tc>
+                <a:tc>
+                  <a:txBody>
+                    <a:bodyPr/>
+                    <a:lstStyle/>
+                    <a:p>
+                      <a:r>
+                        <a:rPr sz="1200" b="0">
+                          <a:solidFill>
+                            <a:srgbClr val="1F1F1F"/>
+                          </a:solidFill>
+                          <a:latin typeface="Calibri"/>
+                        </a:rPr>
+                        <a:t>We will report our own baselines (fixed rules, system prompt only)</a:t>
+                      </a:r>
+                    </a:p>
+                  </a:txBody>
+                  <a:tcPr marL="54864" marR="54864" marT="27432" marB="27432">
+                    <a:solidFill>
+                      <a:srgbClr val="FFFFFF"/>
+                    </a:solidFill>
+                  </a:tcPr>
+                </a:tc>
+                <a:extLst>
+                  <a:ext uri="{0D108BD9-81ED-4DB2-BD59-A6C34878D82A}">
+                    <a16:rowId xmlns:a16="http://schemas.microsoft.com/office/drawing/2014/main" val="10007"/>
+                  </a:ext>
+                </a:extLst>
+              </a:tr>
+            </a:tbl>
+          </a:graphicData>
+        </a:graphic>
+      </p:graphicFrame>
+      <p:sp>
+        <p:nvSpPr>
+          <p:cNvPr id="7" name="TextBox 6"/>
+          <p:cNvSpPr txBox="1"/>
+          <p:nvPr/>
+        </p:nvSpPr>
+        <p:spPr>
+          <a:xfrm>
+            <a:off x="548640" y="5486400"/>
+            <a:ext cx="11064240" cy="731520"/>
+          </a:xfrm>
+          <a:prstGeom prst="rect">
+            <a:avLst/>
+          </a:prstGeom>
+          <a:noFill/>
+        </p:spPr>
+        <p:txBody>
+          <a:bodyPr wrap="square" lIns="45720" rIns="45720" anchor="t">
+            <a:spAutoFit/>
+          </a:bodyPr>
+          <a:lstStyle/>
+          <a:p>
+            <a:pPr algn="l">
+              <a:spcAft>
+                <a:spcPts val="400"/>
+              </a:spcAft>
+            </a:pPr>
+            <a:r>
+              <a:rPr sz="1200" b="0">
+                <a:solidFill>
+                  <a:srgbClr val="555555"/>
+                </a:solidFill>
+                <a:latin typeface="Calibri"/>
+              </a:rPr>
+              <a:t>Our ≤ 5% leakage and ≥ 85% backtracking aims have no published precedent: we will calibrate them on a pilot. Numbers will be re-checked against the original papers before final submission.</a:t>
+            </a:r>
+          </a:p>
+        </p:txBody>
+      </p:sp>
+    </p:spTree>
+  </p:cSld>
+  <p:clrMapOvr>
+    <a:masterClrMapping/>
+  </p:clrMapOvr>
+</p:sld>
+</file>
+
+<file path=ppt/slides/slide12.xml><?xml version="1.0" encoding="utf-8"?>
+<p:sld xmlns:a="http://schemas.openxmlformats.org/drawingml/2006/main" xmlns:r="http://schemas.openxmlformats.org/officeDocument/2006/relationships" xmlns:p="http://schemas.openxmlformats.org/presentationml/2006/main">
+  <p:cSld>
+    <p:spTree>
+      <p:nvGrpSpPr>
+        <p:cNvPr id="1" name=""/>
+        <p:cNvGrpSpPr/>
+        <p:nvPr/>
+      </p:nvGrpSpPr>
+      <p:grpSpPr>
+        <a:xfrm>
+          <a:off x="0" y="0"/>
+          <a:ext cx="0" cy="0"/>
+          <a:chOff x="0" y="0"/>
+          <a:chExt cx="0" cy="0"/>
+        </a:xfrm>
+      </p:grpSpPr>
+      <p:sp>
+        <p:nvSpPr>
+          <p:cNvPr id="2" name="Rectangle 1"/>
+          <p:cNvSpPr/>
+          <p:nvPr/>
+        </p:nvSpPr>
+        <p:spPr>
+          <a:xfrm>
+            <a:off x="0" y="0"/>
+            <a:ext cx="12191695" cy="109728"/>
+          </a:xfrm>
+          <a:prstGeom prst="rect">
+            <a:avLst/>
+          </a:prstGeom>
+          <a:solidFill>
+            <a:srgbClr val="0F7C8C"/>
+          </a:solidFill>
+          <a:ln>
+            <a:noFill/>
+          </a:ln>
+          <a:effectLst/>
+        </p:spPr>
+        <p:style>
+          <a:lnRef idx="1">
+            <a:schemeClr val="accent1"/>
+          </a:lnRef>
+          <a:fillRef idx="3">
+            <a:schemeClr val="accent1"/>
+          </a:fillRef>
+          <a:effectRef idx="2">
+            <a:schemeClr val="accent1"/>
+          </a:effectRef>
+          <a:fontRef idx="minor">
+            <a:schemeClr val="lt1"/>
+          </a:fontRef>
+        </p:style>
+        <p:txBody>
+          <a:bodyPr rtlCol="0" anchor="ctr"/>
+          <a:lstStyle/>
+          <a:p>
+            <a:pPr algn="ctr"/>
+            <a:endParaRPr/>
+          </a:p>
+        </p:txBody>
+      </p:sp>
+      <p:sp>
+        <p:nvSpPr>
+          <p:cNvPr id="3" name="TextBox 2"/>
+          <p:cNvSpPr txBox="1"/>
+          <p:nvPr/>
+        </p:nvSpPr>
+        <p:spPr>
+          <a:xfrm>
+            <a:off x="548640" y="320040"/>
+            <a:ext cx="11064240" cy="640080"/>
+          </a:xfrm>
+          <a:prstGeom prst="rect">
+            <a:avLst/>
+          </a:prstGeom>
+          <a:noFill/>
+        </p:spPr>
+        <p:txBody>
+          <a:bodyPr wrap="square" lIns="45720" rIns="45720" anchor="t">
+            <a:spAutoFit/>
+          </a:bodyPr>
+          <a:lstStyle/>
+          <a:p>
+            <a:pPr algn="l">
+              <a:spcAft>
+                <a:spcPts val="400"/>
+              </a:spcAft>
+            </a:pPr>
+            <a:r>
+              <a:rPr sz="3000" b="1">
+                <a:solidFill>
+                  <a:srgbClr val="1B364B"/>
+                </a:solidFill>
+                <a:latin typeface="Calibri"/>
+              </a:rPr>
+              <a:t>Expected output (mock-up)</a:t>
+            </a:r>
+          </a:p>
+        </p:txBody>
+      </p:sp>
+      <p:sp>
+        <p:nvSpPr>
+          <p:cNvPr id="4" name="TextBox 3"/>
+          <p:cNvSpPr txBox="1"/>
+          <p:nvPr/>
+        </p:nvSpPr>
+        <p:spPr>
+          <a:xfrm>
+            <a:off x="548640" y="6400800"/>
+            <a:ext cx="8229600" cy="320040"/>
+          </a:xfrm>
+          <a:prstGeom prst="rect">
+            <a:avLst/>
+          </a:prstGeom>
+          <a:noFill/>
+        </p:spPr>
+        <p:txBody>
+          <a:bodyPr wrap="square" lIns="45720" rIns="45720" anchor="t">
+            <a:spAutoFit/>
+          </a:bodyPr>
+          <a:lstStyle/>
+          <a:p>
+            <a:pPr algn="l">
+              <a:spcAft>
+                <a:spcPts val="400"/>
+              </a:spcAft>
+            </a:pPr>
+            <a:r>
+              <a:rPr sz="1000" b="0">
+                <a:solidFill>
+                  <a:srgbClr val="555555"/>
+                </a:solidFill>
+                <a:latin typeface="Calibri"/>
+              </a:rPr>
+              <a:t>Group 2 · Socratic AI Tutor · Milestone 1</a:t>
+            </a:r>
+          </a:p>
+        </p:txBody>
+      </p:sp>
+      <p:sp>
+        <p:nvSpPr>
+          <p:cNvPr id="5" name="TextBox 4"/>
+          <p:cNvSpPr txBox="1"/>
+          <p:nvPr/>
+        </p:nvSpPr>
+        <p:spPr>
+          <a:xfrm>
+            <a:off x="10698480" y="6400800"/>
+            <a:ext cx="914400" cy="320040"/>
+          </a:xfrm>
+          <a:prstGeom prst="rect">
+            <a:avLst/>
+          </a:prstGeom>
+          <a:noFill/>
+        </p:spPr>
+        <p:txBody>
+          <a:bodyPr wrap="square" lIns="45720" rIns="45720" anchor="t">
+            <a:spAutoFit/>
+          </a:bodyPr>
+          <a:lstStyle/>
+          <a:p>
+            <a:pPr algn="r">
+              <a:spcAft>
+                <a:spcPts val="400"/>
+              </a:spcAft>
+            </a:pPr>
+            <a:r>
+              <a:rPr sz="1000" b="0">
+                <a:solidFill>
+                  <a:srgbClr val="555555"/>
+                </a:solidFill>
+                <a:latin typeface="Calibri"/>
+              </a:rPr>
+              <a:t>12 / 13</a:t>
+            </a:r>
+          </a:p>
+        </p:txBody>
+      </p:sp>
+      <p:sp>
+        <p:nvSpPr>
+          <p:cNvPr id="6" name="Rounded Rectangle 5"/>
+          <p:cNvSpPr/>
+          <p:nvPr/>
+        </p:nvSpPr>
+        <p:spPr>
+          <a:xfrm>
+            <a:off x="548640" y="1143000"/>
+            <a:ext cx="6766560" cy="4663440"/>
+          </a:xfrm>
+          <a:prstGeom prst="roundRect">
+            <a:avLst>
+              <a:gd name="adj" fmla="val 8000"/>
+            </a:avLst>
+          </a:prstGeom>
+          <a:solidFill>
+            <a:srgbClr val="FFFFFF"/>
+          </a:solidFill>
+          <a:ln>
+            <a:solidFill>
+              <a:srgbClr val="0F7C8C"/>
+            </a:solidFill>
+          </a:ln>
+          <a:effectLst/>
+        </p:spPr>
+        <p:style>
+          <a:lnRef idx="1">
+            <a:schemeClr val="accent1"/>
+          </a:lnRef>
+          <a:fillRef idx="3">
+            <a:schemeClr val="accent1"/>
+          </a:fillRef>
+          <a:effectRef idx="2">
+            <a:schemeClr val="accent1"/>
+          </a:effectRef>
+          <a:fontRef idx="minor">
+            <a:schemeClr val="lt1"/>
+          </a:fontRef>
+        </p:style>
+        <p:txBody>
+          <a:bodyPr rtlCol="0" anchor="ctr"/>
+          <a:lstStyle/>
+          <a:p>
+            <a:pPr algn="ctr"/>
+            <a:endParaRPr/>
+          </a:p>
+        </p:txBody>
+      </p:sp>
+      <p:sp>
+        <p:nvSpPr>
+          <p:cNvPr id="7" name="TextBox 6"/>
+          <p:cNvSpPr txBox="1"/>
+          <p:nvPr/>
+        </p:nvSpPr>
+        <p:spPr>
+          <a:xfrm>
+            <a:off x="685800" y="1188720"/>
+            <a:ext cx="6583680" cy="4319131"/>
+          </a:xfrm>
+          <a:prstGeom prst="rect">
+            <a:avLst/>
+          </a:prstGeom>
+          <a:noFill/>
+        </p:spPr>
+        <p:txBody>
+          <a:bodyPr wrap="square" lIns="45720" rIns="45720" anchor="t">
+            <a:spAutoFit/>
+          </a:bodyPr>
+          <a:lstStyle/>
+          <a:p>
+            <a:pPr algn="l">
+              <a:spcAft>
+                <a:spcPts val="400"/>
+              </a:spcAft>
+            </a:pPr>
+            <a:r>
+              <a:rPr sz="1300" b="1" dirty="0">
+                <a:solidFill>
+                  <a:srgbClr val="1B364B"/>
+                </a:solidFill>
+                <a:latin typeface="Calibri"/>
+              </a:rPr>
+              <a:t>Learner: What is 20% of 50?  </a:t>
+            </a:r>
+            <a:endParaRPr lang="en-US" sz="1300" b="1" dirty="0">
+              <a:solidFill>
+                <a:srgbClr val="1B364B"/>
+              </a:solidFill>
+              <a:latin typeface="Calibri"/>
+            </a:endParaRPr>
+          </a:p>
+          <a:p>
+            <a:pPr algn="l">
+              <a:spcAft>
+                <a:spcPts val="400"/>
+              </a:spcAft>
+            </a:pPr>
+            <a:r>
+              <a:rPr sz="1300" b="1" dirty="0">
+                <a:solidFill>
+                  <a:srgbClr val="1B364B"/>
+                </a:solidFill>
+                <a:latin typeface="Calibri"/>
+              </a:rPr>
+              <a:t>My answer: 2.5</a:t>
+            </a:r>
+          </a:p>
+          <a:p>
+            <a:pPr algn="l">
+              <a:spcAft>
+                <a:spcPts val="400"/>
+              </a:spcAft>
+            </a:pPr>
+            <a:r>
+              <a:rPr sz="1200" b="0" dirty="0">
+                <a:solidFill>
+                  <a:srgbClr val="1F1F1F"/>
+                </a:solidFill>
+                <a:latin typeface="Calibri"/>
+              </a:rPr>
+              <a:t>Tutor: What does 20% mean: 20 out of how many?   </a:t>
+            </a:r>
+            <a:endParaRPr lang="en-US" sz="1200" b="0" dirty="0">
+              <a:solidFill>
+                <a:srgbClr val="1F1F1F"/>
+              </a:solidFill>
+              <a:latin typeface="Calibri"/>
+            </a:endParaRPr>
+          </a:p>
+          <a:p>
+            <a:pPr algn="l">
+              <a:spcAft>
+                <a:spcPts val="400"/>
+              </a:spcAft>
+            </a:pPr>
+            <a:r>
+              <a:rPr sz="1200" b="0" dirty="0">
+                <a:solidFill>
+                  <a:srgbClr val="1F1F1F"/>
+                </a:solidFill>
+                <a:latin typeface="Calibri"/>
+              </a:rPr>
+              <a:t>Learner: 100 ✓</a:t>
+            </a:r>
+          </a:p>
+          <a:p>
+            <a:pPr algn="l">
+              <a:spcAft>
+                <a:spcPts val="400"/>
+              </a:spcAft>
+            </a:pPr>
+            <a:r>
+              <a:rPr sz="1200" b="0" dirty="0">
+                <a:solidFill>
+                  <a:srgbClr val="1F1F1F"/>
+                </a:solidFill>
+                <a:latin typeface="Calibri"/>
+              </a:rPr>
+              <a:t>Tutor: So 20% = 20/100. Simplest form?   </a:t>
+            </a:r>
+            <a:endParaRPr lang="en-US" sz="1200" b="0" dirty="0">
+              <a:solidFill>
+                <a:srgbClr val="1F1F1F"/>
+              </a:solidFill>
+              <a:latin typeface="Calibri"/>
+            </a:endParaRPr>
+          </a:p>
+          <a:p>
+            <a:pPr algn="l">
+              <a:spcAft>
+                <a:spcPts val="400"/>
+              </a:spcAft>
+            </a:pPr>
+            <a:r>
+              <a:rPr sz="1200" b="0" dirty="0">
+                <a:solidFill>
+                  <a:srgbClr val="1F1F1F"/>
+                </a:solidFill>
+                <a:latin typeface="Calibri"/>
+              </a:rPr>
+              <a:t>Learner: I don’t know</a:t>
+            </a:r>
+          </a:p>
+          <a:p>
+            <a:pPr algn="l">
+              <a:spcAft>
+                <a:spcPts val="400"/>
+              </a:spcAft>
+            </a:pPr>
+            <a:r>
+              <a:rPr sz="1200" b="0" dirty="0">
+                <a:solidFill>
+                  <a:srgbClr val="0F7C8C"/>
+                </a:solidFill>
+                <a:latin typeface="Calibri"/>
+              </a:rPr>
+              <a:t>[gap at Level 2 → checking division]</a:t>
+            </a:r>
+          </a:p>
+          <a:p>
+            <a:pPr algn="l">
+              <a:spcAft>
+                <a:spcPts val="400"/>
+              </a:spcAft>
+            </a:pPr>
+            <a:r>
+              <a:rPr sz="1200" b="0" dirty="0">
+                <a:solidFill>
+                  <a:srgbClr val="1F1F1F"/>
+                </a:solidFill>
+                <a:latin typeface="Calibri"/>
+              </a:rPr>
+              <a:t>Tutor: What is 100 ÷ 20?   </a:t>
+            </a:r>
+            <a:endParaRPr lang="en-US" sz="1200" b="0" dirty="0">
+              <a:solidFill>
+                <a:srgbClr val="1F1F1F"/>
+              </a:solidFill>
+              <a:latin typeface="Calibri"/>
+            </a:endParaRPr>
+          </a:p>
+          <a:p>
+            <a:pPr algn="l">
+              <a:spcAft>
+                <a:spcPts val="400"/>
+              </a:spcAft>
+            </a:pPr>
+            <a:r>
+              <a:rPr sz="1200" b="0" dirty="0">
+                <a:solidFill>
+                  <a:srgbClr val="1F1F1F"/>
+                </a:solidFill>
+                <a:latin typeface="Calibri"/>
+              </a:rPr>
+              <a:t>Learner: 5 ✓</a:t>
+            </a:r>
+          </a:p>
+          <a:p>
+            <a:pPr algn="l">
+              <a:spcAft>
+                <a:spcPts val="400"/>
+              </a:spcAft>
+            </a:pPr>
+            <a:r>
+              <a:rPr sz="1200" b="0" dirty="0">
+                <a:solidFill>
+                  <a:srgbClr val="1F1F1F"/>
+                </a:solidFill>
+                <a:latin typeface="Calibri"/>
+              </a:rPr>
+              <a:t>Tutor: So 20/100 = 1/5. What is 1/5 of 50?  Hint: 5 equal groups 📖</a:t>
+            </a:r>
+          </a:p>
+          <a:p>
+            <a:pPr algn="l">
+              <a:spcAft>
+                <a:spcPts val="400"/>
+              </a:spcAft>
+            </a:pPr>
+            <a:r>
+              <a:rPr sz="1200" b="0" dirty="0">
+                <a:solidFill>
+                  <a:srgbClr val="1F1F1F"/>
+                </a:solidFill>
+                <a:latin typeface="Calibri"/>
+              </a:rPr>
+              <a:t>Learner: 10 ✓      </a:t>
+            </a:r>
+            <a:endParaRPr lang="en-US" sz="1200" b="0" dirty="0">
+              <a:solidFill>
+                <a:srgbClr val="1F1F1F"/>
+              </a:solidFill>
+              <a:latin typeface="Calibri"/>
+            </a:endParaRPr>
+          </a:p>
+          <a:p>
+            <a:pPr algn="l">
+              <a:spcAft>
+                <a:spcPts val="400"/>
+              </a:spcAft>
+            </a:pPr>
+            <a:r>
+              <a:rPr sz="1200" b="0" dirty="0">
+                <a:solidFill>
+                  <a:srgbClr val="1F1F1F"/>
+                </a:solidFill>
+                <a:latin typeface="Calibri"/>
+              </a:rPr>
+              <a:t>Tutor: And 1/4 of 20?   </a:t>
+            </a:r>
+            <a:endParaRPr lang="en-US" sz="1200" b="0" dirty="0">
+              <a:solidFill>
+                <a:srgbClr val="1F1F1F"/>
+              </a:solidFill>
+              <a:latin typeface="Calibri"/>
+            </a:endParaRPr>
+          </a:p>
+          <a:p>
+            <a:pPr algn="l">
+              <a:spcAft>
+                <a:spcPts val="400"/>
+              </a:spcAft>
+            </a:pPr>
+            <a:r>
+              <a:rPr sz="1200" b="0" dirty="0">
+                <a:solidFill>
+                  <a:srgbClr val="1F1F1F"/>
+                </a:solidFill>
+                <a:latin typeface="Calibri"/>
+              </a:rPr>
+              <a:t>Learner: 5 ✓</a:t>
+            </a:r>
+          </a:p>
+          <a:p>
+            <a:pPr algn="l">
+              <a:spcAft>
+                <a:spcPts val="400"/>
+              </a:spcAft>
+            </a:pPr>
+            <a:r>
+              <a:rPr sz="1200" b="0" dirty="0">
+                <a:solidFill>
+                  <a:srgbClr val="0F7C8C"/>
+                </a:solidFill>
+                <a:latin typeface="Calibri"/>
+              </a:rPr>
+              <a:t>[back to Level 3]</a:t>
+            </a:r>
+          </a:p>
+          <a:p>
+            <a:pPr algn="l">
+              <a:spcAft>
+                <a:spcPts val="400"/>
+              </a:spcAft>
+            </a:pPr>
+            <a:r>
+              <a:rPr sz="1200" b="1" dirty="0">
+                <a:solidFill>
+                  <a:srgbClr val="1F1F1F"/>
+                </a:solidFill>
+                <a:latin typeface="Calibri"/>
+              </a:rPr>
+              <a:t>Tutor: Try again: 20% of 50?   </a:t>
+            </a:r>
+            <a:endParaRPr lang="en-US" sz="1200" b="1" dirty="0">
+              <a:solidFill>
+                <a:srgbClr val="1F1F1F"/>
+              </a:solidFill>
+              <a:latin typeface="Calibri"/>
+            </a:endParaRPr>
+          </a:p>
+          <a:p>
+            <a:pPr algn="l">
+              <a:spcAft>
+                <a:spcPts val="400"/>
+              </a:spcAft>
+            </a:pPr>
+            <a:r>
+              <a:rPr sz="1200" b="1" dirty="0">
+                <a:solidFill>
+                  <a:srgbClr val="1F1F1F"/>
+                </a:solidFill>
+                <a:latin typeface="Calibri"/>
+              </a:rPr>
+              <a:t>Learner: 10 ✓</a:t>
+            </a:r>
+          </a:p>
+          <a:p>
+            <a:pPr algn="l">
+              <a:spcAft>
+                <a:spcPts val="400"/>
+              </a:spcAft>
+            </a:pPr>
+            <a:r>
+              <a:rPr sz="1200" b="0" dirty="0">
+                <a:solidFill>
+                  <a:srgbClr val="1F1F1F"/>
+                </a:solidFill>
+                <a:latin typeface="Calibri"/>
+              </a:rPr>
+              <a:t>Tutor: Earlier you divided 50 by 20; a percentage means “out of 100”.</a:t>
+            </a:r>
+          </a:p>
+          <a:p>
+            <a:pPr algn="l">
+              <a:spcAft>
+                <a:spcPts val="400"/>
+              </a:spcAft>
+            </a:pPr>
+            <a:r>
+              <a:rPr sz="1200" b="0" dirty="0">
+                <a:solidFill>
+                  <a:srgbClr val="1F1F1F"/>
+                </a:solidFill>
+                <a:latin typeface="Calibri"/>
+              </a:rPr>
+              <a:t>         Next: 15% of 60?</a:t>
+            </a:r>
+          </a:p>
+        </p:txBody>
+      </p:sp>
+      <p:sp>
+        <p:nvSpPr>
+          <p:cNvPr id="10" name="TextBox 9"/>
+          <p:cNvSpPr txBox="1"/>
+          <p:nvPr/>
+        </p:nvSpPr>
+        <p:spPr>
+          <a:xfrm>
+            <a:off x="7620000" y="2418588"/>
+            <a:ext cx="4023360" cy="411480"/>
+          </a:xfrm>
+          <a:prstGeom prst="rect">
+            <a:avLst/>
+          </a:prstGeom>
+          <a:noFill/>
+        </p:spPr>
+        <p:txBody>
+          <a:bodyPr wrap="square" lIns="45720" rIns="45720" anchor="t">
+            <a:spAutoFit/>
+          </a:bodyPr>
+          <a:lstStyle/>
+          <a:p>
+            <a:pPr algn="l">
+              <a:spcAft>
+                <a:spcPts val="400"/>
+              </a:spcAft>
+            </a:pPr>
+            <a:r>
+              <a:rPr sz="1600" b="1" dirty="0">
+                <a:solidFill>
+                  <a:srgbClr val="0F7C8C"/>
+                </a:solidFill>
+                <a:latin typeface="Calibri"/>
+              </a:rPr>
+              <a:t>LLM API vs our tutor</a:t>
+            </a:r>
+          </a:p>
+        </p:txBody>
+      </p:sp>
+      <p:sp>
+        <p:nvSpPr>
+          <p:cNvPr id="11" name="TextBox 10"/>
+          <p:cNvSpPr txBox="1"/>
+          <p:nvPr/>
+        </p:nvSpPr>
+        <p:spPr>
+          <a:xfrm>
+            <a:off x="7620000" y="2766060"/>
+            <a:ext cx="4023360" cy="1828800"/>
+          </a:xfrm>
+          <a:prstGeom prst="rect">
+            <a:avLst/>
+          </a:prstGeom>
+          <a:noFill/>
+        </p:spPr>
+        <p:txBody>
+          <a:bodyPr wrap="square" lIns="45720" rIns="45720" anchor="t">
+            <a:spAutoFit/>
+          </a:bodyPr>
+          <a:lstStyle/>
+          <a:p>
+            <a:pPr algn="l">
+              <a:spcAft>
+                <a:spcPts val="400"/>
+              </a:spcAft>
+            </a:pPr>
+            <a:r>
+              <a:rPr sz="1300" b="0" dirty="0">
+                <a:solidFill>
+                  <a:srgbClr val="1F1F1F"/>
+                </a:solidFill>
+                <a:latin typeface="Calibri"/>
+              </a:rPr>
+              <a:t>API + prompt: “20/100 × 50 = 10.” Answer revealed; gap not found.</a:t>
+            </a:r>
+          </a:p>
+          <a:p>
+            <a:pPr algn="l">
+              <a:spcAft>
+                <a:spcPts val="400"/>
+              </a:spcAft>
+            </a:pPr>
+            <a:r>
+              <a:rPr sz="1300" b="1" dirty="0">
+                <a:solidFill>
+                  <a:srgbClr val="1F1F1F"/>
+                </a:solidFill>
+                <a:latin typeface="Calibri"/>
+              </a:rPr>
+              <a:t>Ours: finds the fraction gap, </a:t>
+            </a:r>
+            <a:r>
+              <a:rPr sz="1300" b="1" dirty="0" err="1">
+                <a:solidFill>
+                  <a:srgbClr val="1F1F1F"/>
+                </a:solidFill>
+                <a:latin typeface="Calibri"/>
+              </a:rPr>
+              <a:t>practises</a:t>
+            </a:r>
+            <a:r>
+              <a:rPr sz="1300" b="1" dirty="0">
+                <a:solidFill>
+                  <a:srgbClr val="1F1F1F"/>
+                </a:solidFill>
+                <a:latin typeface="Calibri"/>
+              </a:rPr>
+              <a:t> Level 2, returns to Level 3; learner finds 10.</a:t>
+            </a:r>
+          </a:p>
+        </p:txBody>
+      </p:sp>
+    </p:spTree>
+  </p:cSld>
+  <p:clrMapOvr>
+    <a:masterClrMapping/>
+  </p:clrMapOvr>
+</p:sld>
+</file>
+
+<file path=ppt/slides/slide13.xml><?xml version="1.0" encoding="utf-8"?>
+<p:sld xmlns:a="http://schemas.openxmlformats.org/drawingml/2006/main" xmlns:r="http://schemas.openxmlformats.org/officeDocument/2006/relationships" xmlns:p="http://schemas.openxmlformats.org/presentationml/2006/main">
+  <p:cSld>
+    <p:spTree>
+      <p:nvGrpSpPr>
+        <p:cNvPr id="1" name=""/>
+        <p:cNvGrpSpPr/>
+        <p:nvPr/>
+      </p:nvGrpSpPr>
+      <p:grpSpPr>
+        <a:xfrm>
+          <a:off x="0" y="0"/>
+          <a:ext cx="0" cy="0"/>
+          <a:chOff x="0" y="0"/>
+          <a:chExt cx="0" cy="0"/>
+        </a:xfrm>
+      </p:grpSpPr>
+      <p:sp>
+        <p:nvSpPr>
+          <p:cNvPr id="2" name="Rectangle 1"/>
+          <p:cNvSpPr/>
+          <p:nvPr/>
+        </p:nvSpPr>
+        <p:spPr>
+          <a:xfrm>
+            <a:off x="0" y="0"/>
+            <a:ext cx="12191695" cy="109728"/>
+          </a:xfrm>
+          <a:prstGeom prst="rect">
+            <a:avLst/>
+          </a:prstGeom>
+          <a:solidFill>
+            <a:srgbClr val="0F7C8C"/>
+          </a:solidFill>
+          <a:ln>
+            <a:noFill/>
+          </a:ln>
+          <a:effectLst/>
+        </p:spPr>
+        <p:style>
+          <a:lnRef idx="1">
+            <a:schemeClr val="accent1"/>
+          </a:lnRef>
+          <a:fillRef idx="3">
+            <a:schemeClr val="accent1"/>
+          </a:fillRef>
+          <a:effectRef idx="2">
+            <a:schemeClr val="accent1"/>
+          </a:effectRef>
+          <a:fontRef idx="minor">
+            <a:schemeClr val="lt1"/>
+          </a:fontRef>
+        </p:style>
+        <p:txBody>
+          <a:bodyPr rtlCol="0" anchor="ctr"/>
+          <a:lstStyle/>
+          <a:p>
+            <a:pPr algn="ctr"/>
+            <a:endParaRPr/>
+          </a:p>
+        </p:txBody>
+      </p:sp>
+      <p:sp>
+        <p:nvSpPr>
+          <p:cNvPr id="3" name="TextBox 2"/>
+          <p:cNvSpPr txBox="1"/>
+          <p:nvPr/>
+        </p:nvSpPr>
+        <p:spPr>
+          <a:xfrm>
+            <a:off x="548640" y="320040"/>
+            <a:ext cx="11064240" cy="640080"/>
+          </a:xfrm>
+          <a:prstGeom prst="rect">
+            <a:avLst/>
+          </a:prstGeom>
+          <a:noFill/>
+        </p:spPr>
+        <p:txBody>
+          <a:bodyPr wrap="square" lIns="45720" rIns="45720" anchor="t">
+            <a:spAutoFit/>
+          </a:bodyPr>
+          <a:lstStyle/>
+          <a:p>
+            <a:pPr algn="l">
+              <a:spcAft>
+                <a:spcPts val="400"/>
+              </a:spcAft>
+            </a:pPr>
+            <a:r>
+              <a:rPr sz="3000" b="1">
+                <a:solidFill>
+                  <a:srgbClr val="1B364B"/>
+                </a:solidFill>
+                <a:latin typeface="Calibri"/>
+              </a:rPr>
+              <a:t>Summary and sign-off</a:t>
+            </a:r>
+          </a:p>
+        </p:txBody>
+      </p:sp>
+      <p:sp>
+        <p:nvSpPr>
+          <p:cNvPr id="4" name="TextBox 3"/>
+          <p:cNvSpPr txBox="1"/>
+          <p:nvPr/>
+        </p:nvSpPr>
+        <p:spPr>
+          <a:xfrm>
+            <a:off x="548640" y="6400800"/>
+            <a:ext cx="8229600" cy="320040"/>
+          </a:xfrm>
+          <a:prstGeom prst="rect">
+            <a:avLst/>
+          </a:prstGeom>
+          <a:noFill/>
+        </p:spPr>
+        <p:txBody>
+          <a:bodyPr wrap="square" lIns="45720" rIns="45720" anchor="t">
+            <a:spAutoFit/>
+          </a:bodyPr>
+          <a:lstStyle/>
+          <a:p>
+            <a:pPr algn="l">
+              <a:spcAft>
+                <a:spcPts val="400"/>
+              </a:spcAft>
+            </a:pPr>
+            <a:r>
+              <a:rPr sz="1000" b="0">
+                <a:solidFill>
+                  <a:srgbClr val="555555"/>
+                </a:solidFill>
+                <a:latin typeface="Calibri"/>
+              </a:rPr>
+              <a:t>Group 2 · Socratic AI Tutor · Milestone 1</a:t>
+            </a:r>
+          </a:p>
+        </p:txBody>
+      </p:sp>
+      <p:sp>
+        <p:nvSpPr>
+          <p:cNvPr id="5" name="TextBox 4"/>
+          <p:cNvSpPr txBox="1"/>
+          <p:nvPr/>
+        </p:nvSpPr>
+        <p:spPr>
+          <a:xfrm>
+            <a:off x="10698480" y="6400800"/>
+            <a:ext cx="914400" cy="320040"/>
+          </a:xfrm>
+          <a:prstGeom prst="rect">
+            <a:avLst/>
+          </a:prstGeom>
+          <a:noFill/>
+        </p:spPr>
+        <p:txBody>
+          <a:bodyPr wrap="square" lIns="45720" rIns="45720" anchor="t">
+            <a:spAutoFit/>
+          </a:bodyPr>
+          <a:lstStyle/>
+          <a:p>
+            <a:pPr algn="r">
+              <a:spcAft>
+                <a:spcPts val="400"/>
+              </a:spcAft>
+            </a:pPr>
+            <a:r>
+              <a:rPr sz="1000" b="0">
+                <a:solidFill>
+                  <a:srgbClr val="555555"/>
+                </a:solidFill>
+                <a:latin typeface="Calibri"/>
+              </a:rPr>
+              <a:t>13 / 13</a:t>
             </a:r>
           </a:p>
         </p:txBody>
@@ -4215,7 +6883,7 @@
                 </a:solidFill>
                 <a:latin typeface="Calibri"/>
               </a:rPr>
-              <a:t>•  Our own trained models are the main brain: DKT, controller, fine-tuned Socratic model</a:t>
+              <a:t>•  Our own trained models are the main brain: DKT, controller model, fine-tuned Socratic model, with guardrails</a:t>
             </a:r>
           </a:p>
           <a:p>
@@ -4901,7 +7569,7 @@
                 </a:solidFill>
                 <a:latin typeface="Calibri"/>
               </a:rPr>
-              <a:t>2 / 10</a:t>
+              <a:t>2 / 13</a:t>
             </a:r>
           </a:p>
         </p:txBody>
@@ -5927,7 +8595,7 @@
                 </a:solidFill>
                 <a:latin typeface="Calibri"/>
               </a:rPr>
-              <a:t>Primary: NCERT content (any subject)</a:t>
+              <a:t>Primary: NCERT Maths and Science</a:t>
             </a:r>
           </a:p>
           <a:p>
@@ -5943,7 +8611,7 @@
                 </a:solidFill>
                 <a:latin typeface="Calibri"/>
               </a:rPr>
-              <a:t>public, complete data across classes and subjects</a:t>
+              <a:t>public, complete data across classes; other subjects can be added</a:t>
             </a:r>
           </a:p>
         </p:txBody>
@@ -6271,7 +8939,7 @@
                 </a:solidFill>
                 <a:latin typeface="Calibri"/>
               </a:rPr>
-              <a:t>3 / 10</a:t>
+              <a:t>3 / 13</a:t>
             </a:r>
           </a:p>
         </p:txBody>
@@ -7171,7 +9839,7 @@
                 </a:solidFill>
                 <a:latin typeface="Calibri"/>
               </a:rPr>
-              <a:t>4 / 10</a:t>
+              <a:t>4 / 13</a:t>
             </a:r>
           </a:p>
         </p:txBody>
@@ -7946,7 +10614,7 @@
                 </a:solidFill>
                 <a:latin typeface="Calibri"/>
               </a:rPr>
-              <a:t>Research baselines</a:t>
+              <a:t>Gaps and opportunities</a:t>
             </a:r>
           </a:p>
         </p:txBody>
@@ -8024,269 +10692,253 @@
                 </a:solidFill>
                 <a:latin typeface="Calibri"/>
               </a:rPr>
-              <a:t>5 / 10</a:t>
-            </a:r>
-          </a:p>
-        </p:txBody>
-      </p:sp>
-      <p:pic>
-        <p:nvPicPr>
-          <p:cNvPr id="6" name="Picture 5" descr="kt_auc_assist2009.png"/>
-          <p:cNvPicPr>
-            <a:picLocks noChangeAspect="1"/>
-          </p:cNvPicPr>
+              <a:t>5 / 13</a:t>
+            </a:r>
+          </a:p>
+        </p:txBody>
+      </p:sp>
+      <p:graphicFrame>
+        <p:nvGraphicFramePr>
+          <p:cNvPr id="6" name="Table 5"/>
+          <p:cNvGraphicFramePr>
+            <a:graphicFrameLocks noGrp="1"/>
+          </p:cNvGraphicFramePr>
           <p:nvPr/>
-        </p:nvPicPr>
-        <p:blipFill>
-          <a:blip r:embed="rId2"/>
-          <a:stretch>
-            <a:fillRect/>
-          </a:stretch>
-        </p:blipFill>
-        <p:spPr>
-          <a:xfrm>
-            <a:off x="457200" y="1188720"/>
-            <a:ext cx="6675120" cy="3026054"/>
-          </a:xfrm>
-          <a:prstGeom prst="rect">
-            <a:avLst/>
-          </a:prstGeom>
-        </p:spPr>
-      </p:pic>
-      <p:sp>
-        <p:nvSpPr>
-          <p:cNvPr id="7" name="TextBox 6"/>
-          <p:cNvSpPr txBox="1"/>
-          <p:nvPr/>
-        </p:nvSpPr>
-        <p:spPr>
-          <a:xfrm>
-            <a:off x="548640" y="4343400"/>
-            <a:ext cx="6583680" cy="1620957"/>
-          </a:xfrm>
-          <a:prstGeom prst="rect">
-            <a:avLst/>
-          </a:prstGeom>
-          <a:noFill/>
-        </p:spPr>
-        <p:txBody>
-          <a:bodyPr wrap="square" lIns="45720" rIns="45720" anchor="t">
-            <a:spAutoFit/>
-          </a:bodyPr>
-          <a:lstStyle/>
-          <a:p>
-            <a:pPr algn="l">
-              <a:spcAft>
-                <a:spcPts val="400"/>
-              </a:spcAft>
-            </a:pPr>
-            <a:r>
-              <a:rPr sz="1600" b="1" dirty="0">
-                <a:solidFill>
-                  <a:srgbClr val="0F7C8C"/>
-                </a:solidFill>
-                <a:latin typeface="Calibri"/>
-              </a:rPr>
-              <a:t>Predicting student knowledge</a:t>
-            </a:r>
-          </a:p>
-          <a:p>
-            <a:pPr algn="l">
-              <a:spcAft>
-                <a:spcPts val="400"/>
-              </a:spcAft>
-            </a:pPr>
-            <a:r>
-              <a:rPr sz="1400" b="0" dirty="0">
-                <a:solidFill>
-                  <a:srgbClr val="1F1F1F"/>
-                </a:solidFill>
-                <a:latin typeface="Calibri"/>
-              </a:rPr>
-              <a:t>DKT (Deep Knowledge Tracing, an LSTM we will train) scores AUC 0.754 on cleaned </a:t>
-            </a:r>
-            <a:r>
-              <a:rPr sz="1400" b="0" dirty="0" err="1">
-                <a:solidFill>
-                  <a:srgbClr val="1F1F1F"/>
-                </a:solidFill>
-                <a:latin typeface="Calibri"/>
-              </a:rPr>
-              <a:t>ASSISTments</a:t>
-            </a:r>
-            <a:r>
-              <a:rPr sz="1400" b="0" dirty="0">
-                <a:solidFill>
-                  <a:srgbClr val="1F1F1F"/>
-                </a:solidFill>
-                <a:latin typeface="Calibri"/>
-              </a:rPr>
-              <a:t> data. </a:t>
-            </a:r>
-            <a:endParaRPr lang="en-US" sz="1400" b="0" dirty="0">
-              <a:solidFill>
-                <a:srgbClr val="1F1F1F"/>
-              </a:solidFill>
-              <a:latin typeface="Calibri"/>
-            </a:endParaRPr>
-          </a:p>
-          <a:p>
-            <a:pPr algn="l">
-              <a:spcAft>
-                <a:spcPts val="400"/>
-              </a:spcAft>
-            </a:pPr>
-            <a:endParaRPr lang="en-IN" sz="1400" dirty="0">
-              <a:solidFill>
-                <a:srgbClr val="1F1F1F"/>
-              </a:solidFill>
-              <a:latin typeface="Calibri"/>
-            </a:endParaRPr>
-          </a:p>
-          <a:p>
-            <a:pPr algn="l">
-              <a:spcAft>
-                <a:spcPts val="400"/>
-              </a:spcAft>
-            </a:pPr>
-            <a:r>
-              <a:rPr lang="en-IN" sz="1400" dirty="0">
-                <a:solidFill>
-                  <a:srgbClr val="1F1F1F"/>
-                </a:solidFill>
-                <a:latin typeface="Calibri"/>
-              </a:rPr>
-              <a:t>AUC:</a:t>
-            </a:r>
-          </a:p>
-          <a:p>
-            <a:pPr algn="l">
-              <a:spcAft>
-                <a:spcPts val="400"/>
-              </a:spcAft>
-            </a:pPr>
-            <a:r>
-              <a:rPr sz="1400" b="0" dirty="0">
-                <a:solidFill>
-                  <a:srgbClr val="1F1F1F"/>
-                </a:solidFill>
-                <a:latin typeface="Calibri"/>
-              </a:rPr>
-              <a:t>0.5 = random guess, 1.0 = perfect.</a:t>
-            </a:r>
-          </a:p>
-        </p:txBody>
-      </p:sp>
-      <p:sp>
-        <p:nvSpPr>
-          <p:cNvPr id="8" name="TextBox 7"/>
-          <p:cNvSpPr txBox="1"/>
-          <p:nvPr/>
-        </p:nvSpPr>
-        <p:spPr>
-          <a:xfrm>
-            <a:off x="7498079" y="1188720"/>
-            <a:ext cx="4206240" cy="411480"/>
-          </a:xfrm>
-          <a:prstGeom prst="rect">
-            <a:avLst/>
-          </a:prstGeom>
-          <a:noFill/>
-        </p:spPr>
-        <p:txBody>
-          <a:bodyPr wrap="square" lIns="45720" rIns="45720" anchor="t">
-            <a:spAutoFit/>
-          </a:bodyPr>
-          <a:lstStyle/>
-          <a:p>
-            <a:pPr algn="l">
-              <a:spcAft>
-                <a:spcPts val="400"/>
-              </a:spcAft>
-            </a:pPr>
-            <a:r>
-              <a:rPr sz="1600" b="1">
-                <a:solidFill>
-                  <a:srgbClr val="0F7C8C"/>
-                </a:solidFill>
-                <a:latin typeface="Calibri"/>
-              </a:rPr>
-              <a:t>AI chat tutors</a:t>
-            </a:r>
-          </a:p>
-        </p:txBody>
-      </p:sp>
-      <p:sp>
-        <p:nvSpPr>
-          <p:cNvPr id="9" name="TextBox 8"/>
-          <p:cNvSpPr txBox="1"/>
-          <p:nvPr/>
-        </p:nvSpPr>
-        <p:spPr>
-          <a:xfrm>
-            <a:off x="7498079" y="1645920"/>
-            <a:ext cx="4206240" cy="4480560"/>
-          </a:xfrm>
-          <a:prstGeom prst="rect">
-            <a:avLst/>
-          </a:prstGeom>
-          <a:noFill/>
-        </p:spPr>
-        <p:txBody>
-          <a:bodyPr wrap="square" lIns="45720" rIns="45720" anchor="t">
-            <a:spAutoFit/>
-          </a:bodyPr>
-          <a:lstStyle/>
-          <a:p>
-            <a:pPr algn="l">
-              <a:spcAft>
-                <a:spcPts val="800"/>
-              </a:spcAft>
-            </a:pPr>
-            <a:r>
-              <a:rPr sz="1500" b="0">
-                <a:solidFill>
-                  <a:srgbClr val="1F1F1F"/>
-                </a:solidFill>
-                <a:latin typeface="Calibri"/>
-              </a:rPr>
-              <a:t>•  Research on tutoring dialogues: prompted AI teachers often reveal the answer; fine-tuned models guide better</a:t>
-            </a:r>
-          </a:p>
-          <a:p>
-            <a:pPr algn="l">
-              <a:spcAft>
-                <a:spcPts val="800"/>
-              </a:spcAft>
-            </a:pPr>
-            <a:r>
-              <a:rPr sz="1500" b="0">
-                <a:solidFill>
-                  <a:srgbClr val="1F1F1F"/>
-                </a:solidFill>
-                <a:latin typeface="Calibri"/>
-              </a:rPr>
-              <a:t>•  Bastani et al. 2025: plain GPT-4 → +48% in practice but −17% on the exam</a:t>
-            </a:r>
-          </a:p>
-          <a:p>
-            <a:pPr algn="l">
-              <a:spcAft>
-                <a:spcPts val="800"/>
-              </a:spcAft>
-            </a:pPr>
-            <a:r>
-              <a:rPr sz="1500" b="0">
-                <a:solidFill>
-                  <a:srgbClr val="1F1F1F"/>
-                </a:solidFill>
-                <a:latin typeface="Calibri"/>
-              </a:rPr>
-              <a:t>•  Lesson: a system-prompted chatbot is not enough; the tutor needs its own trained models</a:t>
-            </a:r>
-          </a:p>
-        </p:txBody>
-      </p:sp>
+        </p:nvGraphicFramePr>
+        <p:xfrm>
+          <a:off x="548640" y="1188720"/>
+          <a:ext cx="11064240" cy="2377440"/>
+        </p:xfrm>
+        <a:graphic>
+          <a:graphicData uri="http://schemas.openxmlformats.org/drawingml/2006/table">
+            <a:tbl>
+              <a:tblPr firstRow="1" bandRow="1">
+                <a:tableStyleId>{5C22544A-7EE6-4342-B048-85BDC9FD1C3A}</a:tableStyleId>
+              </a:tblPr>
+              <a:tblGrid>
+                <a:gridCol w="5852160">
+                  <a:extLst>
+                    <a:ext uri="{9D8B030D-6E8A-4147-A177-3AD203B41FA5}">
+                      <a16:colId xmlns:a16="http://schemas.microsoft.com/office/drawing/2014/main" val="20000"/>
+                    </a:ext>
+                  </a:extLst>
+                </a:gridCol>
+                <a:gridCol w="5212080">
+                  <a:extLst>
+                    <a:ext uri="{9D8B030D-6E8A-4147-A177-3AD203B41FA5}">
+                      <a16:colId xmlns:a16="http://schemas.microsoft.com/office/drawing/2014/main" val="20001"/>
+                    </a:ext>
+                  </a:extLst>
+                </a:gridCol>
+              </a:tblGrid>
+              <a:tr h="594360">
+                <a:tc>
+                  <a:txBody>
+                    <a:bodyPr/>
+                    <a:lstStyle/>
+                    <a:p>
+                      <a:r>
+                        <a:rPr sz="1300" b="1">
+                          <a:solidFill>
+                            <a:srgbClr val="FFFFFF"/>
+                          </a:solidFill>
+                          <a:latin typeface="Calibri"/>
+                        </a:rPr>
+                        <a:t>Gap in existing solutions</a:t>
+                      </a:r>
+                    </a:p>
+                  </a:txBody>
+                  <a:tcPr marL="54864" marR="54864" marT="27432" marB="27432">
+                    <a:solidFill>
+                      <a:srgbClr val="1B364B"/>
+                    </a:solidFill>
+                  </a:tcPr>
+                </a:tc>
+                <a:tc>
+                  <a:txBody>
+                    <a:bodyPr/>
+                    <a:lstStyle/>
+                    <a:p>
+                      <a:r>
+                        <a:rPr sz="1300" b="1">
+                          <a:solidFill>
+                            <a:srgbClr val="FFFFFF"/>
+                          </a:solidFill>
+                          <a:latin typeface="Calibri"/>
+                        </a:rPr>
+                        <a:t>Opportunity for us</a:t>
+                      </a:r>
+                    </a:p>
+                  </a:txBody>
+                  <a:tcPr marL="54864" marR="54864" marT="27432" marB="27432">
+                    <a:solidFill>
+                      <a:srgbClr val="1B364B"/>
+                    </a:solidFill>
+                  </a:tcPr>
+                </a:tc>
+                <a:extLst>
+                  <a:ext uri="{0D108BD9-81ED-4DB2-BD59-A6C34878D82A}">
+                    <a16:rowId xmlns:a16="http://schemas.microsoft.com/office/drawing/2014/main" val="10000"/>
+                  </a:ext>
+                </a:extLst>
+              </a:tr>
+              <a:tr h="594360">
+                <a:tc>
+                  <a:txBody>
+                    <a:bodyPr/>
+                    <a:lstStyle/>
+                    <a:p>
+                      <a:r>
+                        <a:rPr sz="1300" b="1">
+                          <a:solidFill>
+                            <a:srgbClr val="1F1F1F"/>
+                          </a:solidFill>
+                          <a:latin typeface="Calibri"/>
+                        </a:rPr>
+                        <a:t>Chatbots give the answer; prompt-only rules are easy to bypass</a:t>
+                      </a:r>
+                    </a:p>
+                  </a:txBody>
+                  <a:tcPr marL="54864" marR="54864" marT="27432" marB="27432">
+                    <a:solidFill>
+                      <a:srgbClr val="FFFFFF"/>
+                    </a:solidFill>
+                  </a:tcPr>
+                </a:tc>
+                <a:tc>
+                  <a:txBody>
+                    <a:bodyPr/>
+                    <a:lstStyle/>
+                    <a:p>
+                      <a:r>
+                        <a:rPr sz="1300" b="0">
+                          <a:solidFill>
+                            <a:srgbClr val="1F1F1F"/>
+                          </a:solidFill>
+                          <a:latin typeface="Calibri"/>
+                        </a:rPr>
+                        <a:t>Trained Socratic model + layered guardrails</a:t>
+                      </a:r>
+                    </a:p>
+                  </a:txBody>
+                  <a:tcPr marL="54864" marR="54864" marT="27432" marB="27432">
+                    <a:solidFill>
+                      <a:srgbClr val="FFFFFF"/>
+                    </a:solidFill>
+                  </a:tcPr>
+                </a:tc>
+                <a:extLst>
+                  <a:ext uri="{0D108BD9-81ED-4DB2-BD59-A6C34878D82A}">
+                    <a16:rowId xmlns:a16="http://schemas.microsoft.com/office/drawing/2014/main" val="10001"/>
+                  </a:ext>
+                </a:extLst>
+              </a:tr>
+              <a:tr h="594360">
+                <a:tc>
+                  <a:txBody>
+                    <a:bodyPr/>
+                    <a:lstStyle/>
+                    <a:p>
+                      <a:r>
+                        <a:rPr sz="1300" b="1">
+                          <a:solidFill>
+                            <a:srgbClr val="1F1F1F"/>
+                          </a:solidFill>
+                          <a:latin typeface="Calibri"/>
+                        </a:rPr>
+                        <a:t>No backtracking across levels in a conversation</a:t>
+                      </a:r>
+                    </a:p>
+                  </a:txBody>
+                  <a:tcPr marL="54864" marR="54864" marT="27432" marB="27432">
+                    <a:solidFill>
+                      <a:srgbClr val="F4F6F7"/>
+                    </a:solidFill>
+                  </a:tcPr>
+                </a:tc>
+                <a:tc>
+                  <a:txBody>
+                    <a:bodyPr/>
+                    <a:lstStyle/>
+                    <a:p>
+                      <a:r>
+                        <a:rPr sz="1300" b="0">
+                          <a:solidFill>
+                            <a:srgbClr val="1F1F1F"/>
+                          </a:solidFill>
+                          <a:latin typeface="Calibri"/>
+                        </a:rPr>
+                        <a:t>Controller model + cross-level prerequisite graph</a:t>
+                      </a:r>
+                    </a:p>
+                  </a:txBody>
+                  <a:tcPr marL="54864" marR="54864" marT="27432" marB="27432">
+                    <a:solidFill>
+                      <a:srgbClr val="F4F6F7"/>
+                    </a:solidFill>
+                  </a:tcPr>
+                </a:tc>
+                <a:extLst>
+                  <a:ext uri="{0D108BD9-81ED-4DB2-BD59-A6C34878D82A}">
+                    <a16:rowId xmlns:a16="http://schemas.microsoft.com/office/drawing/2014/main" val="10002"/>
+                  </a:ext>
+                </a:extLst>
+              </a:tr>
+              <a:tr h="594360">
+                <a:tc>
+                  <a:txBody>
+                    <a:bodyPr/>
+                    <a:lstStyle/>
+                    <a:p>
+                      <a:r>
+                        <a:rPr sz="1300" b="1">
+                          <a:solidFill>
+                            <a:srgbClr val="1F1F1F"/>
+                          </a:solidFill>
+                          <a:latin typeface="Calibri"/>
+                        </a:rPr>
+                        <a:t>History mixes across courses and sessions; off-topic input is not handled</a:t>
+                      </a:r>
+                    </a:p>
+                  </a:txBody>
+                  <a:tcPr marL="54864" marR="54864" marT="27432" marB="27432">
+                    <a:solidFill>
+                      <a:srgbClr val="FFFFFF"/>
+                    </a:solidFill>
+                  </a:tcPr>
+                </a:tc>
+                <a:tc>
+                  <a:txBody>
+                    <a:bodyPr/>
+                    <a:lstStyle/>
+                    <a:p>
+                      <a:r>
+                        <a:rPr sz="1300" b="0">
+                          <a:solidFill>
+                            <a:srgbClr val="1F1F1F"/>
+                          </a:solidFill>
+                          <a:latin typeface="Calibri"/>
+                        </a:rPr>
+                        <a:t>DKT memory scoped to one course and session</a:t>
+                      </a:r>
+                    </a:p>
+                  </a:txBody>
+                  <a:tcPr marL="54864" marR="54864" marT="27432" marB="27432">
+                    <a:solidFill>
+                      <a:srgbClr val="FFFFFF"/>
+                    </a:solidFill>
+                  </a:tcPr>
+                </a:tc>
+                <a:extLst>
+                  <a:ext uri="{0D108BD9-81ED-4DB2-BD59-A6C34878D82A}">
+                    <a16:rowId xmlns:a16="http://schemas.microsoft.com/office/drawing/2014/main" val="10003"/>
+                  </a:ext>
+                </a:extLst>
+              </a:tr>
+            </a:tbl>
+          </a:graphicData>
+        </a:graphic>
+      </p:graphicFrame>
     </p:spTree>
   </p:cSld>
   <p:clrMapOvr>
@@ -8391,7 +11043,7 @@
                 </a:solidFill>
                 <a:latin typeface="Calibri"/>
               </a:rPr>
-              <a:t>Our approach: our own models are the main brain</a:t>
+              <a:t>Research baselines</a:t>
             </a:r>
           </a:p>
         </p:txBody>
@@ -8469,7 +11121,383 @@
                 </a:solidFill>
                 <a:latin typeface="Calibri"/>
               </a:rPr>
-              <a:t>6 / 10</a:t>
+              <a:t>6 / 13</a:t>
+            </a:r>
+          </a:p>
+        </p:txBody>
+      </p:sp>
+      <p:pic>
+        <p:nvPicPr>
+          <p:cNvPr id="6" name="Picture 5" descr="kt_auc_assist2009.png"/>
+          <p:cNvPicPr>
+            <a:picLocks noChangeAspect="1"/>
+          </p:cNvPicPr>
+          <p:nvPr/>
+        </p:nvPicPr>
+        <p:blipFill>
+          <a:blip r:embed="rId2"/>
+          <a:stretch>
+            <a:fillRect/>
+          </a:stretch>
+        </p:blipFill>
+        <p:spPr>
+          <a:xfrm>
+            <a:off x="457200" y="1188720"/>
+            <a:ext cx="6675120" cy="3026054"/>
+          </a:xfrm>
+          <a:prstGeom prst="rect">
+            <a:avLst/>
+          </a:prstGeom>
+        </p:spPr>
+      </p:pic>
+      <p:sp>
+        <p:nvSpPr>
+          <p:cNvPr id="7" name="TextBox 6"/>
+          <p:cNvSpPr txBox="1"/>
+          <p:nvPr/>
+        </p:nvSpPr>
+        <p:spPr>
+          <a:xfrm>
+            <a:off x="548640" y="4343400"/>
+            <a:ext cx="6583680" cy="1645920"/>
+          </a:xfrm>
+          <a:prstGeom prst="rect">
+            <a:avLst/>
+          </a:prstGeom>
+          <a:noFill/>
+        </p:spPr>
+        <p:txBody>
+          <a:bodyPr wrap="square" lIns="45720" rIns="45720" anchor="t">
+            <a:spAutoFit/>
+          </a:bodyPr>
+          <a:lstStyle/>
+          <a:p>
+            <a:pPr algn="l">
+              <a:spcAft>
+                <a:spcPts val="400"/>
+              </a:spcAft>
+            </a:pPr>
+            <a:r>
+              <a:rPr sz="1600" b="1">
+                <a:solidFill>
+                  <a:srgbClr val="0F7C8C"/>
+                </a:solidFill>
+                <a:latin typeface="Calibri"/>
+              </a:rPr>
+              <a:t>Predicting student knowledge</a:t>
+            </a:r>
+          </a:p>
+          <a:p>
+            <a:pPr algn="l">
+              <a:spcAft>
+                <a:spcPts val="400"/>
+              </a:spcAft>
+            </a:pPr>
+            <a:r>
+              <a:rPr sz="1400" b="0">
+                <a:solidFill>
+                  <a:srgbClr val="1F1F1F"/>
+                </a:solidFill>
+                <a:latin typeface="Calibri"/>
+              </a:rPr>
+              <a:t>DKT (Deep Knowledge Tracing, an LSTM we will train) scores AUC 0.754 on cleaned ASSISTments data. 0.5 = random guess, 1.0 = perfect.</a:t>
+            </a:r>
+          </a:p>
+        </p:txBody>
+      </p:sp>
+      <p:sp>
+        <p:nvSpPr>
+          <p:cNvPr id="8" name="TextBox 7"/>
+          <p:cNvSpPr txBox="1"/>
+          <p:nvPr/>
+        </p:nvSpPr>
+        <p:spPr>
+          <a:xfrm>
+            <a:off x="7498079" y="1188720"/>
+            <a:ext cx="4206240" cy="411480"/>
+          </a:xfrm>
+          <a:prstGeom prst="rect">
+            <a:avLst/>
+          </a:prstGeom>
+          <a:noFill/>
+        </p:spPr>
+        <p:txBody>
+          <a:bodyPr wrap="square" lIns="45720" rIns="45720" anchor="t">
+            <a:spAutoFit/>
+          </a:bodyPr>
+          <a:lstStyle/>
+          <a:p>
+            <a:pPr algn="l">
+              <a:spcAft>
+                <a:spcPts val="400"/>
+              </a:spcAft>
+            </a:pPr>
+            <a:r>
+              <a:rPr sz="1600" b="1">
+                <a:solidFill>
+                  <a:srgbClr val="0F7C8C"/>
+                </a:solidFill>
+                <a:latin typeface="Calibri"/>
+              </a:rPr>
+              <a:t>AI chat tutors</a:t>
+            </a:r>
+          </a:p>
+        </p:txBody>
+      </p:sp>
+      <p:sp>
+        <p:nvSpPr>
+          <p:cNvPr id="9" name="TextBox 8"/>
+          <p:cNvSpPr txBox="1"/>
+          <p:nvPr/>
+        </p:nvSpPr>
+        <p:spPr>
+          <a:xfrm>
+            <a:off x="7498079" y="1645920"/>
+            <a:ext cx="4206240" cy="4480560"/>
+          </a:xfrm>
+          <a:prstGeom prst="rect">
+            <a:avLst/>
+          </a:prstGeom>
+          <a:noFill/>
+        </p:spPr>
+        <p:txBody>
+          <a:bodyPr wrap="square" lIns="45720" rIns="45720" anchor="t">
+            <a:spAutoFit/>
+          </a:bodyPr>
+          <a:lstStyle/>
+          <a:p>
+            <a:pPr algn="l">
+              <a:spcAft>
+                <a:spcPts val="800"/>
+              </a:spcAft>
+            </a:pPr>
+            <a:r>
+              <a:rPr sz="1500" b="0">
+                <a:solidFill>
+                  <a:srgbClr val="1F1F1F"/>
+                </a:solidFill>
+                <a:latin typeface="Calibri"/>
+              </a:rPr>
+              <a:t>•  MathDial: ChatGPT as a tutor revealed the solution in 66% of turns; fine-tuning on tutoring dialogues helps</a:t>
+            </a:r>
+          </a:p>
+          <a:p>
+            <a:pPr algn="l">
+              <a:spcAft>
+                <a:spcPts val="800"/>
+              </a:spcAft>
+            </a:pPr>
+            <a:r>
+              <a:rPr sz="1500" b="0">
+                <a:solidFill>
+                  <a:srgbClr val="1F1F1F"/>
+                </a:solidFill>
+                <a:latin typeface="Calibri"/>
+              </a:rPr>
+              <a:t>•  Bastani et al. 2025: plain GPT-4 → +48% in practice but −17% on the exam</a:t>
+            </a:r>
+          </a:p>
+          <a:p>
+            <a:pPr algn="l">
+              <a:spcAft>
+                <a:spcPts val="800"/>
+              </a:spcAft>
+            </a:pPr>
+            <a:r>
+              <a:rPr sz="1500" b="0">
+                <a:solidFill>
+                  <a:srgbClr val="1F1F1F"/>
+                </a:solidFill>
+                <a:latin typeface="Calibri"/>
+              </a:rPr>
+              <a:t>•  Lesson: a system-prompted chatbot is not enough; the tutor needs its own trained models</a:t>
+            </a:r>
+          </a:p>
+        </p:txBody>
+      </p:sp>
+    </p:spTree>
+  </p:cSld>
+  <p:clrMapOvr>
+    <a:masterClrMapping/>
+  </p:clrMapOvr>
+</p:sld>
+</file>
+
+<file path=ppt/slides/slide7.xml><?xml version="1.0" encoding="utf-8"?>
+<p:sld xmlns:a="http://schemas.openxmlformats.org/drawingml/2006/main" xmlns:r="http://schemas.openxmlformats.org/officeDocument/2006/relationships" xmlns:p="http://schemas.openxmlformats.org/presentationml/2006/main">
+  <p:cSld>
+    <p:spTree>
+      <p:nvGrpSpPr>
+        <p:cNvPr id="1" name=""/>
+        <p:cNvGrpSpPr/>
+        <p:nvPr/>
+      </p:nvGrpSpPr>
+      <p:grpSpPr>
+        <a:xfrm>
+          <a:off x="0" y="0"/>
+          <a:ext cx="0" cy="0"/>
+          <a:chOff x="0" y="0"/>
+          <a:chExt cx="0" cy="0"/>
+        </a:xfrm>
+      </p:grpSpPr>
+      <p:sp>
+        <p:nvSpPr>
+          <p:cNvPr id="2" name="Rectangle 1"/>
+          <p:cNvSpPr/>
+          <p:nvPr/>
+        </p:nvSpPr>
+        <p:spPr>
+          <a:xfrm>
+            <a:off x="0" y="0"/>
+            <a:ext cx="12191695" cy="109728"/>
+          </a:xfrm>
+          <a:prstGeom prst="rect">
+            <a:avLst/>
+          </a:prstGeom>
+          <a:solidFill>
+            <a:srgbClr val="0F7C8C"/>
+          </a:solidFill>
+          <a:ln>
+            <a:noFill/>
+          </a:ln>
+          <a:effectLst/>
+        </p:spPr>
+        <p:style>
+          <a:lnRef idx="1">
+            <a:schemeClr val="accent1"/>
+          </a:lnRef>
+          <a:fillRef idx="3">
+            <a:schemeClr val="accent1"/>
+          </a:fillRef>
+          <a:effectRef idx="2">
+            <a:schemeClr val="accent1"/>
+          </a:effectRef>
+          <a:fontRef idx="minor">
+            <a:schemeClr val="lt1"/>
+          </a:fontRef>
+        </p:style>
+        <p:txBody>
+          <a:bodyPr rtlCol="0" anchor="ctr"/>
+          <a:lstStyle/>
+          <a:p>
+            <a:pPr algn="ctr"/>
+            <a:endParaRPr/>
+          </a:p>
+        </p:txBody>
+      </p:sp>
+      <p:sp>
+        <p:nvSpPr>
+          <p:cNvPr id="3" name="TextBox 2"/>
+          <p:cNvSpPr txBox="1"/>
+          <p:nvPr/>
+        </p:nvSpPr>
+        <p:spPr>
+          <a:xfrm>
+            <a:off x="548640" y="320040"/>
+            <a:ext cx="11064240" cy="640080"/>
+          </a:xfrm>
+          <a:prstGeom prst="rect">
+            <a:avLst/>
+          </a:prstGeom>
+          <a:noFill/>
+        </p:spPr>
+        <p:txBody>
+          <a:bodyPr wrap="square" lIns="45720" rIns="45720" anchor="t">
+            <a:spAutoFit/>
+          </a:bodyPr>
+          <a:lstStyle/>
+          <a:p>
+            <a:pPr algn="l">
+              <a:spcAft>
+                <a:spcPts val="400"/>
+              </a:spcAft>
+            </a:pPr>
+            <a:r>
+              <a:rPr sz="3000" b="1">
+                <a:solidFill>
+                  <a:srgbClr val="1B364B"/>
+                </a:solidFill>
+                <a:latin typeface="Calibri"/>
+              </a:rPr>
+              <a:t>Our approach: our own models are the main brain</a:t>
+            </a:r>
+          </a:p>
+        </p:txBody>
+      </p:sp>
+      <p:sp>
+        <p:nvSpPr>
+          <p:cNvPr id="4" name="TextBox 3"/>
+          <p:cNvSpPr txBox="1"/>
+          <p:nvPr/>
+        </p:nvSpPr>
+        <p:spPr>
+          <a:xfrm>
+            <a:off x="548640" y="6400800"/>
+            <a:ext cx="8229600" cy="320040"/>
+          </a:xfrm>
+          <a:prstGeom prst="rect">
+            <a:avLst/>
+          </a:prstGeom>
+          <a:noFill/>
+        </p:spPr>
+        <p:txBody>
+          <a:bodyPr wrap="square" lIns="45720" rIns="45720" anchor="t">
+            <a:spAutoFit/>
+          </a:bodyPr>
+          <a:lstStyle/>
+          <a:p>
+            <a:pPr algn="l">
+              <a:spcAft>
+                <a:spcPts val="400"/>
+              </a:spcAft>
+            </a:pPr>
+            <a:r>
+              <a:rPr sz="1000" b="0">
+                <a:solidFill>
+                  <a:srgbClr val="555555"/>
+                </a:solidFill>
+                <a:latin typeface="Calibri"/>
+              </a:rPr>
+              <a:t>Group 2 · Socratic AI Tutor · Milestone 1</a:t>
+            </a:r>
+          </a:p>
+        </p:txBody>
+      </p:sp>
+      <p:sp>
+        <p:nvSpPr>
+          <p:cNvPr id="5" name="TextBox 4"/>
+          <p:cNvSpPr txBox="1"/>
+          <p:nvPr/>
+        </p:nvSpPr>
+        <p:spPr>
+          <a:xfrm>
+            <a:off x="10698480" y="6400800"/>
+            <a:ext cx="914400" cy="320040"/>
+          </a:xfrm>
+          <a:prstGeom prst="rect">
+            <a:avLst/>
+          </a:prstGeom>
+          <a:noFill/>
+        </p:spPr>
+        <p:txBody>
+          <a:bodyPr wrap="square" lIns="45720" rIns="45720" anchor="t">
+            <a:spAutoFit/>
+          </a:bodyPr>
+          <a:lstStyle/>
+          <a:p>
+            <a:pPr algn="r">
+              <a:spcAft>
+                <a:spcPts val="400"/>
+              </a:spcAft>
+            </a:pPr>
+            <a:r>
+              <a:rPr sz="1000" b="0">
+                <a:solidFill>
+                  <a:srgbClr val="555555"/>
+                </a:solidFill>
+                <a:latin typeface="Calibri"/>
+              </a:rPr>
+              <a:t>7 / 13</a:t>
             </a:r>
           </a:p>
         </p:txBody>
@@ -8484,7 +11512,7 @@
         </p:nvGraphicFramePr>
         <p:xfrm>
           <a:off x="548640" y="1188720"/>
-          <a:ext cx="11064240" cy="3334512"/>
+          <a:ext cx="11064240" cy="3657600"/>
         </p:xfrm>
         <a:graphic>
           <a:graphicData uri="http://schemas.openxmlformats.org/drawingml/2006/table">
@@ -8515,14 +11543,14 @@
                   </a:extLst>
                 </a:gridCol>
               </a:tblGrid>
-              <a:tr h="475488">
-                <a:tc>
-                  <a:txBody>
-                    <a:bodyPr/>
-                    <a:lstStyle/>
-                    <a:p>
-                      <a:r>
-                        <a:rPr sz="1400" b="1">
+              <a:tr h="457200">
+                <a:tc>
+                  <a:txBody>
+                    <a:bodyPr/>
+                    <a:lstStyle/>
+                    <a:p>
+                      <a:r>
+                        <a:rPr sz="1300" b="1">
                           <a:solidFill>
                             <a:srgbClr val="FFFFFF"/>
                           </a:solidFill>
@@ -8544,7 +11572,7 @@
                     <a:lstStyle/>
                     <a:p>
                       <a:r>
-                        <a:rPr sz="1400" b="1">
+                        <a:rPr sz="1300" b="1">
                           <a:solidFill>
                             <a:srgbClr val="FFFFFF"/>
                           </a:solidFill>
@@ -8566,7 +11594,7 @@
                     <a:lstStyle/>
                     <a:p>
                       <a:r>
-                        <a:rPr sz="1400" b="1">
+                        <a:rPr sz="1300" b="1">
                           <a:solidFill>
                             <a:srgbClr val="FFFFFF"/>
                           </a:solidFill>
@@ -8588,14 +11616,14 @@
                   </a:ext>
                 </a:extLst>
               </a:tr>
-              <a:tr h="475488">
-                <a:tc>
-                  <a:txBody>
-                    <a:bodyPr/>
-                    <a:lstStyle/>
-                    <a:p>
-                      <a:r>
-                        <a:rPr sz="1400" b="1">
+              <a:tr h="457200">
+                <a:tc>
+                  <a:txBody>
+                    <a:bodyPr/>
+                    <a:lstStyle/>
+                    <a:p>
+                      <a:r>
+                        <a:rPr sz="1300" b="1">
                           <a:solidFill>
                             <a:srgbClr val="1F1F1F"/>
                           </a:solidFill>
@@ -8617,7 +11645,7 @@
                     <a:lstStyle/>
                     <a:p>
                       <a:r>
-                        <a:rPr sz="1400" b="0">
+                        <a:rPr sz="1300" b="0">
                           <a:solidFill>
                             <a:srgbClr val="1F1F1F"/>
                           </a:solidFill>
@@ -8639,7 +11667,7 @@
                     <a:lstStyle/>
                     <a:p>
                       <a:r>
-                        <a:rPr sz="1400" b="0">
+                        <a:rPr sz="1300" b="0">
                           <a:solidFill>
                             <a:srgbClr val="1F1F1F"/>
                           </a:solidFill>
@@ -8661,20 +11689,20 @@
                   </a:ext>
                 </a:extLst>
               </a:tr>
-              <a:tr h="475488">
-                <a:tc>
-                  <a:txBody>
-                    <a:bodyPr/>
-                    <a:lstStyle/>
-                    <a:p>
-                      <a:r>
-                        <a:rPr sz="1400" b="1">
+              <a:tr h="457200">
+                <a:tc>
+                  <a:txBody>
+                    <a:bodyPr/>
+                    <a:lstStyle/>
+                    <a:p>
+                      <a:r>
+                        <a:rPr sz="1300" b="1">
                           <a:solidFill>
                             <a:srgbClr val="1F1F1F"/>
                           </a:solidFill>
                           <a:latin typeface="Calibri"/>
                         </a:rPr>
-                        <a:t>Tutor controller</a:t>
+                        <a:t>Tutor controller (a model)</a:t>
                       </a:r>
                     </a:p>
                   </a:txBody>
@@ -8690,13 +11718,13 @@
                     <a:lstStyle/>
                     <a:p>
                       <a:r>
-                        <a:rPr sz="1400" b="0">
+                        <a:rPr sz="1300" b="0">
                           <a:solidFill>
                             <a:srgbClr val="1F1F1F"/>
                           </a:solidFill>
                           <a:latin typeface="Calibri"/>
                         </a:rPr>
-                        <a:t>✓ written</a:t>
+                        <a:t>✓ trained</a:t>
                       </a:r>
                     </a:p>
                   </a:txBody>
@@ -8712,13 +11740,13 @@
                     <a:lstStyle/>
                     <a:p>
                       <a:r>
-                        <a:rPr sz="1400" b="0">
+                        <a:rPr sz="1300" b="0">
                           <a:solidFill>
                             <a:srgbClr val="1F1F1F"/>
                           </a:solidFill>
                           <a:latin typeface="Calibri"/>
                         </a:rPr>
-                        <a:t>Decides: probe, hint, backtrack a level, retest, move up</a:t>
+                        <a:t>Picks the next step: probe, hint, backtrack a level, retest, move up. Fixed rules only as a baseline</a:t>
                       </a:r>
                     </a:p>
                   </a:txBody>
@@ -8734,20 +11762,20 @@
                   </a:ext>
                 </a:extLst>
               </a:tr>
-              <a:tr h="475488">
-                <a:tc>
-                  <a:txBody>
-                    <a:bodyPr/>
-                    <a:lstStyle/>
-                    <a:p>
-                      <a:r>
-                        <a:rPr sz="1400" b="1">
+              <a:tr h="457200">
+                <a:tc>
+                  <a:txBody>
+                    <a:bodyPr/>
+                    <a:lstStyle/>
+                    <a:p>
+                      <a:r>
+                        <a:rPr sz="1300" b="1">
                           <a:solidFill>
                             <a:srgbClr val="1F1F1F"/>
                           </a:solidFill>
                           <a:latin typeface="Calibri"/>
                         </a:rPr>
-                        <a:t>Socratic question model</a:t>
+                        <a:t>Guardrails</a:t>
                       </a:r>
                     </a:p>
                   </a:txBody>
@@ -8763,13 +11791,13 @@
                     <a:lstStyle/>
                     <a:p>
                       <a:r>
-                        <a:rPr sz="1400" b="0">
+                        <a:rPr sz="1300" b="0">
                           <a:solidFill>
                             <a:srgbClr val="1F1F1F"/>
                           </a:solidFill>
                           <a:latin typeface="Calibri"/>
                         </a:rPr>
-                        <a:t>✓ fine-tuned</a:t>
+                        <a:t>✓ built</a:t>
                       </a:r>
                     </a:p>
                   </a:txBody>
@@ -8785,13 +11813,13 @@
                     <a:lstStyle/>
                     <a:p>
                       <a:r>
-                        <a:rPr sz="1400" b="0">
+                        <a:rPr sz="1300" b="0">
                           <a:solidFill>
                             <a:srgbClr val="1F1F1F"/>
                           </a:solidFill>
                           <a:latin typeface="Calibri"/>
                         </a:rPr>
-                        <a:t>Qwen3-4B + LoRA on tutoring dialogues + our NCERT and IITM examples: writes probing questions</a:t>
+                        <a:t>Keep the tutor on topic and stop answer leakage</a:t>
                       </a:r>
                     </a:p>
                   </a:txBody>
@@ -8807,20 +11835,20 @@
                   </a:ext>
                 </a:extLst>
               </a:tr>
-              <a:tr h="475488">
-                <a:tc>
-                  <a:txBody>
-                    <a:bodyPr/>
-                    <a:lstStyle/>
-                    <a:p>
-                      <a:r>
-                        <a:rPr sz="1400" b="1">
+              <a:tr h="457200">
+                <a:tc>
+                  <a:txBody>
+                    <a:bodyPr/>
+                    <a:lstStyle/>
+                    <a:p>
+                      <a:r>
+                        <a:rPr sz="1300" b="1">
                           <a:solidFill>
                             <a:srgbClr val="1F1F1F"/>
                           </a:solidFill>
                           <a:latin typeface="Calibri"/>
                         </a:rPr>
-                        <a:t>Misconception detector</a:t>
+                        <a:t>Socratic question model</a:t>
                       </a:r>
                     </a:p>
                   </a:txBody>
@@ -8836,13 +11864,13 @@
                     <a:lstStyle/>
                     <a:p>
                       <a:r>
-                        <a:rPr sz="1400" b="0">
+                        <a:rPr sz="1300" b="0">
                           <a:solidFill>
                             <a:srgbClr val="1F1F1F"/>
                           </a:solidFill>
                           <a:latin typeface="Calibri"/>
                         </a:rPr>
-                        <a:t>✓ built</a:t>
+                        <a:t>✓ fine-tuned</a:t>
                       </a:r>
                     </a:p>
                   </a:txBody>
@@ -8858,13 +11886,13 @@
                     <a:lstStyle/>
                     <a:p>
                       <a:r>
-                        <a:rPr sz="1400" b="0">
+                        <a:rPr sz="1300" b="0">
                           <a:solidFill>
                             <a:srgbClr val="1F1F1F"/>
                           </a:solidFill>
                           <a:latin typeface="Calibri"/>
                         </a:rPr>
-                        <a:t>Spots common error patterns (e.g. 50 ÷ 20 instead of 20/100 × 50)</a:t>
+                        <a:t>Qwen3-4B + LoRA on tutoring dialogues + our NCERT and IITM examples: writes probing questions</a:t>
                       </a:r>
                     </a:p>
                   </a:txBody>
@@ -8880,20 +11908,20 @@
                   </a:ext>
                 </a:extLst>
               </a:tr>
-              <a:tr h="475488">
-                <a:tc>
-                  <a:txBody>
-                    <a:bodyPr/>
-                    <a:lstStyle/>
-                    <a:p>
-                      <a:r>
-                        <a:rPr sz="1400" b="1">
+              <a:tr h="457200">
+                <a:tc>
+                  <a:txBody>
+                    <a:bodyPr/>
+                    <a:lstStyle/>
+                    <a:p>
+                      <a:r>
+                        <a:rPr sz="1300" b="1">
                           <a:solidFill>
                             <a:srgbClr val="1F1F1F"/>
                           </a:solidFill>
                           <a:latin typeface="Calibri"/>
                         </a:rPr>
-                        <a:t>Search (RAG)</a:t>
+                        <a:t>Misconception detector</a:t>
                       </a:r>
                     </a:p>
                   </a:txBody>
@@ -8909,13 +11937,13 @@
                     <a:lstStyle/>
                     <a:p>
                       <a:r>
-                        <a:rPr sz="1400" b="0">
+                        <a:rPr sz="1300" b="0">
                           <a:solidFill>
                             <a:srgbClr val="1F1F1F"/>
                           </a:solidFill>
                           <a:latin typeface="Calibri"/>
                         </a:rPr>
-                        <a:t>pretrained embeddings</a:t>
+                        <a:t>✓ built</a:t>
                       </a:r>
                     </a:p>
                   </a:txBody>
@@ -8931,13 +11959,13 @@
                     <a:lstStyle/>
                     <a:p>
                       <a:r>
-                        <a:rPr sz="1400" b="0">
+                        <a:rPr sz="1300" b="0">
                           <a:solidFill>
                             <a:srgbClr val="1F1F1F"/>
                           </a:solidFill>
                           <a:latin typeface="Calibri"/>
                         </a:rPr>
-                        <a:t>Finds the page, video or notes for a concept</a:t>
+                        <a:t>Spots common error patterns (e.g. 50 ÷ 20 instead of 20/100 × 50)</a:t>
                       </a:r>
                     </a:p>
                   </a:txBody>
@@ -8953,20 +11981,20 @@
                   </a:ext>
                 </a:extLst>
               </a:tr>
-              <a:tr h="475488">
-                <a:tc>
-                  <a:txBody>
-                    <a:bodyPr/>
-                    <a:lstStyle/>
-                    <a:p>
-                      <a:r>
-                        <a:rPr sz="1400" b="1">
+              <a:tr h="457200">
+                <a:tc>
+                  <a:txBody>
+                    <a:bodyPr/>
+                    <a:lstStyle/>
+                    <a:p>
+                      <a:r>
+                        <a:rPr sz="1300" b="1">
                           <a:solidFill>
                             <a:srgbClr val="1F1F1F"/>
                           </a:solidFill>
                           <a:latin typeface="Calibri"/>
                         </a:rPr>
-                        <a:t>External LLM API</a:t>
+                        <a:t>Search (RAG)</a:t>
                       </a:r>
                     </a:p>
                   </a:txBody>
@@ -8982,13 +12010,13 @@
                     <a:lstStyle/>
                     <a:p>
                       <a:r>
-                        <a:rPr sz="1400" b="0">
+                        <a:rPr sz="1300" b="0">
                           <a:solidFill>
                             <a:srgbClr val="1F1F1F"/>
                           </a:solidFill>
                           <a:latin typeface="Calibri"/>
                         </a:rPr>
-                        <a:t>✗ optional</a:t>
+                        <a:t>pretrained embeddings</a:t>
                       </a:r>
                     </a:p>
                   </a:txBody>
@@ -9004,13 +12032,13 @@
                     <a:lstStyle/>
                     <a:p>
                       <a:r>
-                        <a:rPr sz="1400" b="0">
+                        <a:rPr sz="1300" b="0">
                           <a:solidFill>
                             <a:srgbClr val="1F1F1F"/>
                           </a:solidFill>
                           <a:latin typeface="Calibri"/>
                         </a:rPr>
-                        <a:t>Only drafts practice questions offline (checked) and serves as a baseline</a:t>
+                        <a:t>Finds the page, video or notes for a concept</a:t>
                       </a:r>
                     </a:p>
                   </a:txBody>
@@ -9023,6 +12051,79 @@
                 <a:extLst>
                   <a:ext uri="{0D108BD9-81ED-4DB2-BD59-A6C34878D82A}">
                     <a16:rowId xmlns:a16="http://schemas.microsoft.com/office/drawing/2014/main" val="10006"/>
+                  </a:ext>
+                </a:extLst>
+              </a:tr>
+              <a:tr h="457200">
+                <a:tc>
+                  <a:txBody>
+                    <a:bodyPr/>
+                    <a:lstStyle/>
+                    <a:p>
+                      <a:r>
+                        <a:rPr sz="1300" b="1">
+                          <a:solidFill>
+                            <a:srgbClr val="1F1F1F"/>
+                          </a:solidFill>
+                          <a:latin typeface="Calibri"/>
+                        </a:rPr>
+                        <a:t>External LLM API</a:t>
+                      </a:r>
+                    </a:p>
+                  </a:txBody>
+                  <a:tcPr marL="54864" marR="54864" marT="27432" marB="27432">
+                    <a:solidFill>
+                      <a:srgbClr val="FFFFFF"/>
+                    </a:solidFill>
+                  </a:tcPr>
+                </a:tc>
+                <a:tc>
+                  <a:txBody>
+                    <a:bodyPr/>
+                    <a:lstStyle/>
+                    <a:p>
+                      <a:r>
+                        <a:rPr sz="1300" b="0">
+                          <a:solidFill>
+                            <a:srgbClr val="1F1F1F"/>
+                          </a:solidFill>
+                          <a:latin typeface="Calibri"/>
+                        </a:rPr>
+                        <a:t>✗ optional</a:t>
+                      </a:r>
+                    </a:p>
+                  </a:txBody>
+                  <a:tcPr marL="54864" marR="54864" marT="27432" marB="27432">
+                    <a:solidFill>
+                      <a:srgbClr val="FFFFFF"/>
+                    </a:solidFill>
+                  </a:tcPr>
+                </a:tc>
+                <a:tc>
+                  <a:txBody>
+                    <a:bodyPr/>
+                    <a:lstStyle/>
+                    <a:p>
+                      <a:r>
+                        <a:rPr sz="1300" b="0">
+                          <a:solidFill>
+                            <a:srgbClr val="1F1F1F"/>
+                          </a:solidFill>
+                          <a:latin typeface="Calibri"/>
+                        </a:rPr>
+                        <a:t>Only drafts practice questions offline (checked) and serves as a baseline</a:t>
+                      </a:r>
+                    </a:p>
+                  </a:txBody>
+                  <a:tcPr marL="54864" marR="54864" marT="27432" marB="27432">
+                    <a:solidFill>
+                      <a:srgbClr val="FFFFFF"/>
+                    </a:solidFill>
+                  </a:tcPr>
+                </a:tc>
+                <a:extLst>
+                  <a:ext uri="{0D108BD9-81ED-4DB2-BD59-A6C34878D82A}">
+                    <a16:rowId xmlns:a16="http://schemas.microsoft.com/office/drawing/2014/main" val="10007"/>
                   </a:ext>
                 </a:extLst>
               </a:tr>
@@ -9038,8 +12139,8 @@
         </p:nvSpPr>
         <p:spPr>
           <a:xfrm>
-            <a:off x="548640" y="4754880"/>
-            <a:ext cx="11064240" cy="1371600"/>
+            <a:off x="548640" y="5120640"/>
+            <a:ext cx="11064240" cy="1188720"/>
           </a:xfrm>
           <a:prstGeom prst="rect">
             <a:avLst/>
@@ -9093,7 +12194,7 @@
 </p:sld>
 </file>
 
-<file path=ppt/slides/slide7.xml><?xml version="1.0" encoding="utf-8"?>
+<file path=ppt/slides/slide8.xml><?xml version="1.0" encoding="utf-8"?>
 <p:sld xmlns:a="http://schemas.openxmlformats.org/drawingml/2006/main" xmlns:r="http://schemas.openxmlformats.org/officeDocument/2006/relationships" xmlns:p="http://schemas.openxmlformats.org/presentationml/2006/main">
   <p:cSld>
     <p:spTree>
@@ -9189,7 +12290,7 @@
                 </a:solidFill>
                 <a:latin typeface="Calibri"/>
               </a:rPr>
-              <a:t>Datasets and samples</a:t>
+              <a:t>Guardrails and DKT memory</a:t>
             </a:r>
           </a:p>
         </p:txBody>
@@ -9267,7 +12368,454 @@
                 </a:solidFill>
                 <a:latin typeface="Calibri"/>
               </a:rPr>
-              <a:t>7 / 10</a:t>
+              <a:t>8 / 13</a:t>
+            </a:r>
+          </a:p>
+        </p:txBody>
+      </p:sp>
+      <p:pic>
+        <p:nvPicPr>
+          <p:cNvPr id="6" name="Picture 5" descr="architecture.png"/>
+          <p:cNvPicPr>
+            <a:picLocks noChangeAspect="1"/>
+          </p:cNvPicPr>
+          <p:nvPr/>
+        </p:nvPicPr>
+        <p:blipFill>
+          <a:blip r:embed="rId2"/>
+          <a:stretch>
+            <a:fillRect/>
+          </a:stretch>
+        </p:blipFill>
+        <p:spPr>
+          <a:xfrm>
+            <a:off x="365760" y="1188720"/>
+            <a:ext cx="6309360" cy="4719420"/>
+          </a:xfrm>
+          <a:prstGeom prst="rect">
+            <a:avLst/>
+          </a:prstGeom>
+        </p:spPr>
+      </p:pic>
+      <p:sp>
+        <p:nvSpPr>
+          <p:cNvPr id="7" name="TextBox 6"/>
+          <p:cNvSpPr txBox="1"/>
+          <p:nvPr/>
+        </p:nvSpPr>
+        <p:spPr>
+          <a:xfrm>
+            <a:off x="6949440" y="1188720"/>
+            <a:ext cx="4754880" cy="411480"/>
+          </a:xfrm>
+          <a:prstGeom prst="rect">
+            <a:avLst/>
+          </a:prstGeom>
+          <a:noFill/>
+        </p:spPr>
+        <p:txBody>
+          <a:bodyPr wrap="square" lIns="45720" rIns="45720" anchor="t">
+            <a:spAutoFit/>
+          </a:bodyPr>
+          <a:lstStyle/>
+          <a:p>
+            <a:pPr algn="l">
+              <a:spcAft>
+                <a:spcPts val="400"/>
+              </a:spcAft>
+            </a:pPr>
+            <a:r>
+              <a:rPr sz="1600" b="1">
+                <a:solidFill>
+                  <a:srgbClr val="0F7C8C"/>
+                </a:solidFill>
+                <a:latin typeface="Calibri"/>
+              </a:rPr>
+              <a:t>Keeping the tutor on track</a:t>
+            </a:r>
+          </a:p>
+        </p:txBody>
+      </p:sp>
+      <p:sp>
+        <p:nvSpPr>
+          <p:cNvPr id="8" name="TextBox 7"/>
+          <p:cNvSpPr txBox="1"/>
+          <p:nvPr/>
+        </p:nvSpPr>
+        <p:spPr>
+          <a:xfrm>
+            <a:off x="6949440" y="1645920"/>
+            <a:ext cx="4754880" cy="2194560"/>
+          </a:xfrm>
+          <a:prstGeom prst="rect">
+            <a:avLst/>
+          </a:prstGeom>
+          <a:noFill/>
+        </p:spPr>
+        <p:txBody>
+          <a:bodyPr wrap="square" lIns="45720" rIns="45720" anchor="t">
+            <a:spAutoFit/>
+          </a:bodyPr>
+          <a:lstStyle/>
+          <a:p>
+            <a:pPr algn="l">
+              <a:spcAft>
+                <a:spcPts val="800"/>
+              </a:spcAft>
+            </a:pPr>
+            <a:r>
+              <a:rPr sz="1300" b="0">
+                <a:solidFill>
+                  <a:srgbClr val="1F1F1F"/>
+                </a:solidFill>
+                <a:latin typeface="Calibri"/>
+              </a:rPr>
+              <a:t>•  System prompt: role, course, never reveal the final answer</a:t>
+            </a:r>
+          </a:p>
+          <a:p>
+            <a:pPr algn="l">
+              <a:spcAft>
+                <a:spcPts val="800"/>
+              </a:spcAft>
+            </a:pPr>
+            <a:r>
+              <a:rPr sz="1300" b="0">
+                <a:solidFill>
+                  <a:srgbClr val="1F1F1F"/>
+                </a:solidFill>
+                <a:latin typeface="Calibri"/>
+              </a:rPr>
+              <a:t>•  Input check: on-topic, off-topic or answer request; off-topic gets a polite redirect</a:t>
+            </a:r>
+          </a:p>
+          <a:p>
+            <a:pPr algn="l">
+              <a:spcAft>
+                <a:spcPts val="800"/>
+              </a:spcAft>
+            </a:pPr>
+            <a:r>
+              <a:rPr sz="1300" b="0">
+                <a:solidFill>
+                  <a:srgbClr val="1F1F1F"/>
+                </a:solidFill>
+                <a:latin typeface="Calibri"/>
+              </a:rPr>
+              <a:t>•  Output check: scan replies for the answer; regenerate if it leaks</a:t>
+            </a:r>
+          </a:p>
+        </p:txBody>
+      </p:sp>
+      <p:sp>
+        <p:nvSpPr>
+          <p:cNvPr id="9" name="TextBox 8"/>
+          <p:cNvSpPr txBox="1"/>
+          <p:nvPr/>
+        </p:nvSpPr>
+        <p:spPr>
+          <a:xfrm>
+            <a:off x="6949440" y="3749039"/>
+            <a:ext cx="4754880" cy="411480"/>
+          </a:xfrm>
+          <a:prstGeom prst="rect">
+            <a:avLst/>
+          </a:prstGeom>
+          <a:noFill/>
+        </p:spPr>
+        <p:txBody>
+          <a:bodyPr wrap="square" lIns="45720" rIns="45720" anchor="t">
+            <a:spAutoFit/>
+          </a:bodyPr>
+          <a:lstStyle/>
+          <a:p>
+            <a:pPr algn="l">
+              <a:spcAft>
+                <a:spcPts val="400"/>
+              </a:spcAft>
+            </a:pPr>
+            <a:r>
+              <a:rPr sz="1600" b="1">
+                <a:solidFill>
+                  <a:srgbClr val="0F7C8C"/>
+                </a:solidFill>
+                <a:latin typeface="Calibri"/>
+              </a:rPr>
+              <a:t>Keeping DKT history clean</a:t>
+            </a:r>
+          </a:p>
+        </p:txBody>
+      </p:sp>
+      <p:sp>
+        <p:nvSpPr>
+          <p:cNvPr id="10" name="TextBox 9"/>
+          <p:cNvSpPr txBox="1"/>
+          <p:nvPr/>
+        </p:nvSpPr>
+        <p:spPr>
+          <a:xfrm>
+            <a:off x="6949440" y="4206240"/>
+            <a:ext cx="4754880" cy="2103120"/>
+          </a:xfrm>
+          <a:prstGeom prst="rect">
+            <a:avLst/>
+          </a:prstGeom>
+          <a:noFill/>
+        </p:spPr>
+        <p:txBody>
+          <a:bodyPr wrap="square" lIns="45720" rIns="45720" anchor="t">
+            <a:spAutoFit/>
+          </a:bodyPr>
+          <a:lstStyle/>
+          <a:p>
+            <a:pPr algn="l">
+              <a:spcAft>
+                <a:spcPts val="800"/>
+              </a:spcAft>
+            </a:pPr>
+            <a:r>
+              <a:rPr sz="1300" b="0">
+                <a:solidFill>
+                  <a:srgbClr val="1F1F1F"/>
+                </a:solidFill>
+                <a:latin typeface="Calibri"/>
+              </a:rPr>
+              <a:t>•  History kept per learner and per course</a:t>
+            </a:r>
+          </a:p>
+          <a:p>
+            <a:pPr algn="l">
+              <a:spcAft>
+                <a:spcPts val="800"/>
+              </a:spcAft>
+            </a:pPr>
+            <a:r>
+              <a:rPr sz="1300" b="0">
+                <a:solidFill>
+                  <a:srgbClr val="1F1F1F"/>
+                </a:solidFill>
+                <a:latin typeface="Calibri"/>
+              </a:rPr>
+              <a:t>•  DKT runs on one session at a time</a:t>
+            </a:r>
+          </a:p>
+          <a:p>
+            <a:pPr algn="l">
+              <a:spcAft>
+                <a:spcPts val="800"/>
+              </a:spcAft>
+            </a:pPr>
+            <a:r>
+              <a:rPr sz="1300" b="0">
+                <a:solidFill>
+                  <a:srgbClr val="1F1F1F"/>
+                </a:solidFill>
+                <a:latin typeface="Calibri"/>
+              </a:rPr>
+              <a:t>•  Different-subject or off-topic questions are not stored in DKT memory</a:t>
+            </a:r>
+          </a:p>
+          <a:p>
+            <a:pPr algn="l">
+              <a:spcAft>
+                <a:spcPts val="800"/>
+              </a:spcAft>
+            </a:pPr>
+            <a:r>
+              <a:rPr sz="1300" b="0">
+                <a:solidFill>
+                  <a:srgbClr val="1F1F1F"/>
+                </a:solidFill>
+                <a:latin typeface="Calibri"/>
+              </a:rPr>
+              <a:t>•  Risk: DKT can mis-estimate; we check it with pyKT and fall back to simple accuracy</a:t>
+            </a:r>
+          </a:p>
+        </p:txBody>
+      </p:sp>
+    </p:spTree>
+  </p:cSld>
+  <p:clrMapOvr>
+    <a:masterClrMapping/>
+  </p:clrMapOvr>
+</p:sld>
+</file>
+
+<file path=ppt/slides/slide9.xml><?xml version="1.0" encoding="utf-8"?>
+<p:sld xmlns:a="http://schemas.openxmlformats.org/drawingml/2006/main" xmlns:r="http://schemas.openxmlformats.org/officeDocument/2006/relationships" xmlns:p="http://schemas.openxmlformats.org/presentationml/2006/main">
+  <p:cSld>
+    <p:spTree>
+      <p:nvGrpSpPr>
+        <p:cNvPr id="1" name=""/>
+        <p:cNvGrpSpPr/>
+        <p:nvPr/>
+      </p:nvGrpSpPr>
+      <p:grpSpPr>
+        <a:xfrm>
+          <a:off x="0" y="0"/>
+          <a:ext cx="0" cy="0"/>
+          <a:chOff x="0" y="0"/>
+          <a:chExt cx="0" cy="0"/>
+        </a:xfrm>
+      </p:grpSpPr>
+      <p:sp>
+        <p:nvSpPr>
+          <p:cNvPr id="2" name="Rectangle 1"/>
+          <p:cNvSpPr/>
+          <p:nvPr/>
+        </p:nvSpPr>
+        <p:spPr>
+          <a:xfrm>
+            <a:off x="0" y="0"/>
+            <a:ext cx="12191695" cy="109728"/>
+          </a:xfrm>
+          <a:prstGeom prst="rect">
+            <a:avLst/>
+          </a:prstGeom>
+          <a:solidFill>
+            <a:srgbClr val="0F7C8C"/>
+          </a:solidFill>
+          <a:ln>
+            <a:noFill/>
+          </a:ln>
+          <a:effectLst/>
+        </p:spPr>
+        <p:style>
+          <a:lnRef idx="1">
+            <a:schemeClr val="accent1"/>
+          </a:lnRef>
+          <a:fillRef idx="3">
+            <a:schemeClr val="accent1"/>
+          </a:fillRef>
+          <a:effectRef idx="2">
+            <a:schemeClr val="accent1"/>
+          </a:effectRef>
+          <a:fontRef idx="minor">
+            <a:schemeClr val="lt1"/>
+          </a:fontRef>
+        </p:style>
+        <p:txBody>
+          <a:bodyPr rtlCol="0" anchor="ctr"/>
+          <a:lstStyle/>
+          <a:p>
+            <a:pPr algn="ctr"/>
+            <a:endParaRPr/>
+          </a:p>
+        </p:txBody>
+      </p:sp>
+      <p:sp>
+        <p:nvSpPr>
+          <p:cNvPr id="3" name="TextBox 2"/>
+          <p:cNvSpPr txBox="1"/>
+          <p:nvPr/>
+        </p:nvSpPr>
+        <p:spPr>
+          <a:xfrm>
+            <a:off x="548640" y="320040"/>
+            <a:ext cx="11064240" cy="640080"/>
+          </a:xfrm>
+          <a:prstGeom prst="rect">
+            <a:avLst/>
+          </a:prstGeom>
+          <a:noFill/>
+        </p:spPr>
+        <p:txBody>
+          <a:bodyPr wrap="square" lIns="45720" rIns="45720" anchor="t">
+            <a:spAutoFit/>
+          </a:bodyPr>
+          <a:lstStyle/>
+          <a:p>
+            <a:pPr algn="l">
+              <a:spcAft>
+                <a:spcPts val="400"/>
+              </a:spcAft>
+            </a:pPr>
+            <a:r>
+              <a:rPr sz="3000" b="1">
+                <a:solidFill>
+                  <a:srgbClr val="1B364B"/>
+                </a:solidFill>
+                <a:latin typeface="Calibri"/>
+              </a:rPr>
+              <a:t>Datasets and samples</a:t>
+            </a:r>
+          </a:p>
+        </p:txBody>
+      </p:sp>
+      <p:sp>
+        <p:nvSpPr>
+          <p:cNvPr id="4" name="TextBox 3"/>
+          <p:cNvSpPr txBox="1"/>
+          <p:nvPr/>
+        </p:nvSpPr>
+        <p:spPr>
+          <a:xfrm>
+            <a:off x="548640" y="6400800"/>
+            <a:ext cx="8229600" cy="320040"/>
+          </a:xfrm>
+          <a:prstGeom prst="rect">
+            <a:avLst/>
+          </a:prstGeom>
+          <a:noFill/>
+        </p:spPr>
+        <p:txBody>
+          <a:bodyPr wrap="square" lIns="45720" rIns="45720" anchor="t">
+            <a:spAutoFit/>
+          </a:bodyPr>
+          <a:lstStyle/>
+          <a:p>
+            <a:pPr algn="l">
+              <a:spcAft>
+                <a:spcPts val="400"/>
+              </a:spcAft>
+            </a:pPr>
+            <a:r>
+              <a:rPr sz="1000" b="0">
+                <a:solidFill>
+                  <a:srgbClr val="555555"/>
+                </a:solidFill>
+                <a:latin typeface="Calibri"/>
+              </a:rPr>
+              <a:t>Group 2 · Socratic AI Tutor · Milestone 1</a:t>
+            </a:r>
+          </a:p>
+        </p:txBody>
+      </p:sp>
+      <p:sp>
+        <p:nvSpPr>
+          <p:cNvPr id="5" name="TextBox 4"/>
+          <p:cNvSpPr txBox="1"/>
+          <p:nvPr/>
+        </p:nvSpPr>
+        <p:spPr>
+          <a:xfrm>
+            <a:off x="10698480" y="6400800"/>
+            <a:ext cx="914400" cy="320040"/>
+          </a:xfrm>
+          <a:prstGeom prst="rect">
+            <a:avLst/>
+          </a:prstGeom>
+          <a:noFill/>
+        </p:spPr>
+        <p:txBody>
+          <a:bodyPr wrap="square" lIns="45720" rIns="45720" anchor="t">
+            <a:spAutoFit/>
+          </a:bodyPr>
+          <a:lstStyle/>
+          <a:p>
+            <a:pPr algn="r">
+              <a:spcAft>
+                <a:spcPts val="400"/>
+              </a:spcAft>
+            </a:pPr>
+            <a:r>
+              <a:rPr sz="1000" b="0">
+                <a:solidFill>
+                  <a:srgbClr val="555555"/>
+                </a:solidFill>
+                <a:latin typeface="Calibri"/>
+              </a:rPr>
+              <a:t>9 / 13</a:t>
             </a:r>
           </a:p>
         </p:txBody>
@@ -10435,1560 +13983,6 @@
                 <a:latin typeface="Calibri"/>
               </a:rPr>
               <a:t>Each example is labelled probing / focus / telling, so the model learns to probe instead of tell. Illustrative example written by the team.</a:t>
-            </a:r>
-          </a:p>
-        </p:txBody>
-      </p:sp>
-    </p:spTree>
-  </p:cSld>
-  <p:clrMapOvr>
-    <a:masterClrMapping/>
-  </p:clrMapOvr>
-</p:sld>
-</file>
-
-<file path=ppt/slides/slide8.xml><?xml version="1.0" encoding="utf-8"?>
-<p:sld xmlns:a="http://schemas.openxmlformats.org/drawingml/2006/main" xmlns:r="http://schemas.openxmlformats.org/officeDocument/2006/relationships" xmlns:p="http://schemas.openxmlformats.org/presentationml/2006/main">
-  <p:cSld>
-    <p:spTree>
-      <p:nvGrpSpPr>
-        <p:cNvPr id="1" name=""/>
-        <p:cNvGrpSpPr/>
-        <p:nvPr/>
-      </p:nvGrpSpPr>
-      <p:grpSpPr>
-        <a:xfrm>
-          <a:off x="0" y="0"/>
-          <a:ext cx="0" cy="0"/>
-          <a:chOff x="0" y="0"/>
-          <a:chExt cx="0" cy="0"/>
-        </a:xfrm>
-      </p:grpSpPr>
-      <p:sp>
-        <p:nvSpPr>
-          <p:cNvPr id="2" name="Rectangle 1"/>
-          <p:cNvSpPr/>
-          <p:nvPr/>
-        </p:nvSpPr>
-        <p:spPr>
-          <a:xfrm>
-            <a:off x="0" y="0"/>
-            <a:ext cx="12191695" cy="109728"/>
-          </a:xfrm>
-          <a:prstGeom prst="rect">
-            <a:avLst/>
-          </a:prstGeom>
-          <a:solidFill>
-            <a:srgbClr val="0F7C8C"/>
-          </a:solidFill>
-          <a:ln>
-            <a:noFill/>
-          </a:ln>
-          <a:effectLst/>
-        </p:spPr>
-        <p:style>
-          <a:lnRef idx="1">
-            <a:schemeClr val="accent1"/>
-          </a:lnRef>
-          <a:fillRef idx="3">
-            <a:schemeClr val="accent1"/>
-          </a:fillRef>
-          <a:effectRef idx="2">
-            <a:schemeClr val="accent1"/>
-          </a:effectRef>
-          <a:fontRef idx="minor">
-            <a:schemeClr val="lt1"/>
-          </a:fontRef>
-        </p:style>
-        <p:txBody>
-          <a:bodyPr rtlCol="0" anchor="ctr"/>
-          <a:lstStyle/>
-          <a:p>
-            <a:pPr algn="ctr"/>
-            <a:endParaRPr/>
-          </a:p>
-        </p:txBody>
-      </p:sp>
-      <p:sp>
-        <p:nvSpPr>
-          <p:cNvPr id="3" name="TextBox 2"/>
-          <p:cNvSpPr txBox="1"/>
-          <p:nvPr/>
-        </p:nvSpPr>
-        <p:spPr>
-          <a:xfrm>
-            <a:off x="548640" y="320040"/>
-            <a:ext cx="11064240" cy="640080"/>
-          </a:xfrm>
-          <a:prstGeom prst="rect">
-            <a:avLst/>
-          </a:prstGeom>
-          <a:noFill/>
-        </p:spPr>
-        <p:txBody>
-          <a:bodyPr wrap="square" lIns="45720" rIns="45720" anchor="t">
-            <a:spAutoFit/>
-          </a:bodyPr>
-          <a:lstStyle/>
-          <a:p>
-            <a:pPr algn="l">
-              <a:spcAft>
-                <a:spcPts val="400"/>
-              </a:spcAft>
-            </a:pPr>
-            <a:r>
-              <a:rPr sz="3000" b="1">
-                <a:solidFill>
-                  <a:srgbClr val="1B364B"/>
-                </a:solidFill>
-                <a:latin typeface="Calibri"/>
-              </a:rPr>
-              <a:t>Baselines, targets and evaluation</a:t>
-            </a:r>
-          </a:p>
-        </p:txBody>
-      </p:sp>
-      <p:sp>
-        <p:nvSpPr>
-          <p:cNvPr id="4" name="TextBox 3"/>
-          <p:cNvSpPr txBox="1"/>
-          <p:nvPr/>
-        </p:nvSpPr>
-        <p:spPr>
-          <a:xfrm>
-            <a:off x="548640" y="6400800"/>
-            <a:ext cx="8229600" cy="320040"/>
-          </a:xfrm>
-          <a:prstGeom prst="rect">
-            <a:avLst/>
-          </a:prstGeom>
-          <a:noFill/>
-        </p:spPr>
-        <p:txBody>
-          <a:bodyPr wrap="square" lIns="45720" rIns="45720" anchor="t">
-            <a:spAutoFit/>
-          </a:bodyPr>
-          <a:lstStyle/>
-          <a:p>
-            <a:pPr algn="l">
-              <a:spcAft>
-                <a:spcPts val="400"/>
-              </a:spcAft>
-            </a:pPr>
-            <a:r>
-              <a:rPr sz="1000" b="0">
-                <a:solidFill>
-                  <a:srgbClr val="555555"/>
-                </a:solidFill>
-                <a:latin typeface="Calibri"/>
-              </a:rPr>
-              <a:t>Group 2 · Socratic AI Tutor · Milestone 1</a:t>
-            </a:r>
-          </a:p>
-        </p:txBody>
-      </p:sp>
-      <p:sp>
-        <p:nvSpPr>
-          <p:cNvPr id="5" name="TextBox 4"/>
-          <p:cNvSpPr txBox="1"/>
-          <p:nvPr/>
-        </p:nvSpPr>
-        <p:spPr>
-          <a:xfrm>
-            <a:off x="10698480" y="6400800"/>
-            <a:ext cx="914400" cy="320040"/>
-          </a:xfrm>
-          <a:prstGeom prst="rect">
-            <a:avLst/>
-          </a:prstGeom>
-          <a:noFill/>
-        </p:spPr>
-        <p:txBody>
-          <a:bodyPr wrap="square" lIns="45720" rIns="45720" anchor="t">
-            <a:spAutoFit/>
-          </a:bodyPr>
-          <a:lstStyle/>
-          <a:p>
-            <a:pPr algn="r">
-              <a:spcAft>
-                <a:spcPts val="400"/>
-              </a:spcAft>
-            </a:pPr>
-            <a:r>
-              <a:rPr sz="1000" b="0">
-                <a:solidFill>
-                  <a:srgbClr val="555555"/>
-                </a:solidFill>
-                <a:latin typeface="Calibri"/>
-              </a:rPr>
-              <a:t>8 / 10</a:t>
-            </a:r>
-          </a:p>
-        </p:txBody>
-      </p:sp>
-      <p:graphicFrame>
-        <p:nvGraphicFramePr>
-          <p:cNvPr id="6" name="Table 5"/>
-          <p:cNvGraphicFramePr>
-            <a:graphicFrameLocks noGrp="1"/>
-          </p:cNvGraphicFramePr>
-          <p:nvPr/>
-        </p:nvGraphicFramePr>
-        <p:xfrm>
-          <a:off x="548640" y="1188720"/>
-          <a:ext cx="11064240" cy="2743200"/>
-        </p:xfrm>
-        <a:graphic>
-          <a:graphicData uri="http://schemas.openxmlformats.org/drawingml/2006/table">
-            <a:tbl>
-              <a:tblPr firstRow="1" bandRow="1">
-                <a:tableStyleId>{5C22544A-7EE6-4342-B048-85BDC9FD1C3A}</a:tableStyleId>
-              </a:tblPr>
-              <a:tblGrid>
-                <a:gridCol w="2011680">
-                  <a:extLst>
-                    <a:ext uri="{9D8B030D-6E8A-4147-A177-3AD203B41FA5}">
-                      <a16:colId xmlns:a16="http://schemas.microsoft.com/office/drawing/2014/main" val="20000"/>
-                    </a:ext>
-                  </a:extLst>
-                </a:gridCol>
-                <a:gridCol w="3108960">
-                  <a:extLst>
-                    <a:ext uri="{9D8B030D-6E8A-4147-A177-3AD203B41FA5}">
-                      <a16:colId xmlns:a16="http://schemas.microsoft.com/office/drawing/2014/main" val="20001"/>
-                    </a:ext>
-                  </a:extLst>
-                </a:gridCol>
-                <a:gridCol w="3474720">
-                  <a:extLst>
-                    <a:ext uri="{9D8B030D-6E8A-4147-A177-3AD203B41FA5}">
-                      <a16:colId xmlns:a16="http://schemas.microsoft.com/office/drawing/2014/main" val="20002"/>
-                    </a:ext>
-                  </a:extLst>
-                </a:gridCol>
-                <a:gridCol w="2468880">
-                  <a:extLst>
-                    <a:ext uri="{9D8B030D-6E8A-4147-A177-3AD203B41FA5}">
-                      <a16:colId xmlns:a16="http://schemas.microsoft.com/office/drawing/2014/main" val="20003"/>
-                    </a:ext>
-                  </a:extLst>
-                </a:gridCol>
-              </a:tblGrid>
-              <a:tr h="457200">
-                <a:tc>
-                  <a:txBody>
-                    <a:bodyPr/>
-                    <a:lstStyle/>
-                    <a:p>
-                      <a:r>
-                        <a:rPr sz="1300" b="1">
-                          <a:solidFill>
-                            <a:srgbClr val="FFFFFF"/>
-                          </a:solidFill>
-                          <a:latin typeface="Calibri"/>
-                        </a:rPr>
-                        <a:t>Part</a:t>
-                      </a:r>
-                    </a:p>
-                  </a:txBody>
-                  <a:tcPr marL="54864" marR="54864" marT="27432" marB="27432">
-                    <a:solidFill>
-                      <a:srgbClr val="1B364B"/>
-                    </a:solidFill>
-                  </a:tcPr>
-                </a:tc>
-                <a:tc>
-                  <a:txBody>
-                    <a:bodyPr/>
-                    <a:lstStyle/>
-                    <a:p>
-                      <a:r>
-                        <a:rPr sz="1300" b="1">
-                          <a:solidFill>
-                            <a:srgbClr val="FFFFFF"/>
-                          </a:solidFill>
-                          <a:latin typeface="Calibri"/>
-                        </a:rPr>
-                        <a:t>Metric</a:t>
-                      </a:r>
-                    </a:p>
-                  </a:txBody>
-                  <a:tcPr marL="54864" marR="54864" marT="27432" marB="27432">
-                    <a:solidFill>
-                      <a:srgbClr val="1B364B"/>
-                    </a:solidFill>
-                  </a:tcPr>
-                </a:tc>
-                <a:tc>
-                  <a:txBody>
-                    <a:bodyPr/>
-                    <a:lstStyle/>
-                    <a:p>
-                      <a:r>
-                        <a:rPr sz="1300" b="1">
-                          <a:solidFill>
-                            <a:srgbClr val="FFFFFF"/>
-                          </a:solidFill>
-                          <a:latin typeface="Calibri"/>
-                        </a:rPr>
-                        <a:t>Compared with</a:t>
-                      </a:r>
-                    </a:p>
-                  </a:txBody>
-                  <a:tcPr marL="54864" marR="54864" marT="27432" marB="27432">
-                    <a:solidFill>
-                      <a:srgbClr val="1B364B"/>
-                    </a:solidFill>
-                  </a:tcPr>
-                </a:tc>
-                <a:tc>
-                  <a:txBody>
-                    <a:bodyPr/>
-                    <a:lstStyle/>
-                    <a:p>
-                      <a:r>
-                        <a:rPr sz="1300" b="1">
-                          <a:solidFill>
-                            <a:srgbClr val="FFFFFF"/>
-                          </a:solidFill>
-                          <a:latin typeface="Calibri"/>
-                        </a:rPr>
-                        <a:t>Target</a:t>
-                      </a:r>
-                    </a:p>
-                  </a:txBody>
-                  <a:tcPr marL="54864" marR="54864" marT="27432" marB="27432">
-                    <a:solidFill>
-                      <a:srgbClr val="1B364B"/>
-                    </a:solidFill>
-                  </a:tcPr>
-                </a:tc>
-                <a:extLst>
-                  <a:ext uri="{0D108BD9-81ED-4DB2-BD59-A6C34878D82A}">
-                    <a16:rowId xmlns:a16="http://schemas.microsoft.com/office/drawing/2014/main" val="10000"/>
-                  </a:ext>
-                </a:extLst>
-              </a:tr>
-              <a:tr h="457200">
-                <a:tc>
-                  <a:txBody>
-                    <a:bodyPr/>
-                    <a:lstStyle/>
-                    <a:p>
-                      <a:r>
-                        <a:rPr sz="1300" b="1">
-                          <a:solidFill>
-                            <a:srgbClr val="1F1F1F"/>
-                          </a:solidFill>
-                          <a:latin typeface="Calibri"/>
-                        </a:rPr>
-                        <a:t>Learner model</a:t>
-                      </a:r>
-                    </a:p>
-                  </a:txBody>
-                  <a:tcPr marL="54864" marR="54864" marT="27432" marB="27432">
-                    <a:solidFill>
-                      <a:srgbClr val="FFFFFF"/>
-                    </a:solidFill>
-                  </a:tcPr>
-                </a:tc>
-                <a:tc>
-                  <a:txBody>
-                    <a:bodyPr/>
-                    <a:lstStyle/>
-                    <a:p>
-                      <a:r>
-                        <a:rPr sz="1300" b="0">
-                          <a:solidFill>
-                            <a:srgbClr val="1F1F1F"/>
-                          </a:solidFill>
-                          <a:latin typeface="Calibri"/>
-                        </a:rPr>
-                        <a:t>AUC</a:t>
-                      </a:r>
-                    </a:p>
-                  </a:txBody>
-                  <a:tcPr marL="54864" marR="54864" marT="27432" marB="27432">
-                    <a:solidFill>
-                      <a:srgbClr val="FFFFFF"/>
-                    </a:solidFill>
-                  </a:tcPr>
-                </a:tc>
-                <a:tc>
-                  <a:txBody>
-                    <a:bodyPr/>
-                    <a:lstStyle/>
-                    <a:p>
-                      <a:r>
-                        <a:rPr sz="1300" b="0">
-                          <a:solidFill>
-                            <a:srgbClr val="1F1F1F"/>
-                          </a:solidFill>
-                          <a:latin typeface="Calibri"/>
-                        </a:rPr>
-                        <a:t>Simple accuracy; published DKT 0.754</a:t>
-                      </a:r>
-                    </a:p>
-                  </a:txBody>
-                  <a:tcPr marL="54864" marR="54864" marT="27432" marB="27432">
-                    <a:solidFill>
-                      <a:srgbClr val="FFFFFF"/>
-                    </a:solidFill>
-                  </a:tcPr>
-                </a:tc>
-                <a:tc>
-                  <a:txBody>
-                    <a:bodyPr/>
-                    <a:lstStyle/>
-                    <a:p>
-                      <a:r>
-                        <a:rPr sz="1300" b="0">
-                          <a:solidFill>
-                            <a:srgbClr val="1F1F1F"/>
-                          </a:solidFill>
-                          <a:latin typeface="Calibri"/>
-                        </a:rPr>
-                        <a:t>≥ 0.74, better than simple</a:t>
-                      </a:r>
-                    </a:p>
-                  </a:txBody>
-                  <a:tcPr marL="54864" marR="54864" marT="27432" marB="27432">
-                    <a:solidFill>
-                      <a:srgbClr val="FFFFFF"/>
-                    </a:solidFill>
-                  </a:tcPr>
-                </a:tc>
-                <a:extLst>
-                  <a:ext uri="{0D108BD9-81ED-4DB2-BD59-A6C34878D82A}">
-                    <a16:rowId xmlns:a16="http://schemas.microsoft.com/office/drawing/2014/main" val="10001"/>
-                  </a:ext>
-                </a:extLst>
-              </a:tr>
-              <a:tr h="457200">
-                <a:tc>
-                  <a:txBody>
-                    <a:bodyPr/>
-                    <a:lstStyle/>
-                    <a:p>
-                      <a:r>
-                        <a:rPr sz="1300" b="1">
-                          <a:solidFill>
-                            <a:srgbClr val="1F1F1F"/>
-                          </a:solidFill>
-                          <a:latin typeface="Calibri"/>
-                        </a:rPr>
-                        <a:t>Socratic model</a:t>
-                      </a:r>
-                    </a:p>
-                  </a:txBody>
-                  <a:tcPr marL="54864" marR="54864" marT="27432" marB="27432">
-                    <a:solidFill>
-                      <a:srgbClr val="F4F6F7"/>
-                    </a:solidFill>
-                  </a:tcPr>
-                </a:tc>
-                <a:tc>
-                  <a:txBody>
-                    <a:bodyPr/>
-                    <a:lstStyle/>
-                    <a:p>
-                      <a:r>
-                        <a:rPr sz="1300" b="0">
-                          <a:solidFill>
-                            <a:srgbClr val="1F1F1F"/>
-                          </a:solidFill>
-                          <a:latin typeface="Calibri"/>
-                        </a:rPr>
-                        <a:t>% replies revealing the answer</a:t>
-                      </a:r>
-                    </a:p>
-                  </a:txBody>
-                  <a:tcPr marL="54864" marR="54864" marT="27432" marB="27432">
-                    <a:solidFill>
-                      <a:srgbClr val="F4F6F7"/>
-                    </a:solidFill>
-                  </a:tcPr>
-                </a:tc>
-                <a:tc>
-                  <a:txBody>
-                    <a:bodyPr/>
-                    <a:lstStyle/>
-                    <a:p>
-                      <a:r>
-                        <a:rPr sz="1300" b="0">
-                          <a:solidFill>
-                            <a:srgbClr val="1F1F1F"/>
-                          </a:solidFill>
-                          <a:latin typeface="Calibri"/>
-                        </a:rPr>
-                        <a:t>Base model; LLM API + system prompt</a:t>
-                      </a:r>
-                    </a:p>
-                  </a:txBody>
-                  <a:tcPr marL="54864" marR="54864" marT="27432" marB="27432">
-                    <a:solidFill>
-                      <a:srgbClr val="F4F6F7"/>
-                    </a:solidFill>
-                  </a:tcPr>
-                </a:tc>
-                <a:tc>
-                  <a:txBody>
-                    <a:bodyPr/>
-                    <a:lstStyle/>
-                    <a:p>
-                      <a:r>
-                        <a:rPr sz="1300" b="0">
-                          <a:solidFill>
-                            <a:srgbClr val="1F1F1F"/>
-                          </a:solidFill>
-                          <a:latin typeface="Calibri"/>
-                        </a:rPr>
-                        <a:t>≤ 5%, lower than both</a:t>
-                      </a:r>
-                    </a:p>
-                  </a:txBody>
-                  <a:tcPr marL="54864" marR="54864" marT="27432" marB="27432">
-                    <a:solidFill>
-                      <a:srgbClr val="F4F6F7"/>
-                    </a:solidFill>
-                  </a:tcPr>
-                </a:tc>
-                <a:extLst>
-                  <a:ext uri="{0D108BD9-81ED-4DB2-BD59-A6C34878D82A}">
-                    <a16:rowId xmlns:a16="http://schemas.microsoft.com/office/drawing/2014/main" val="10002"/>
-                  </a:ext>
-                </a:extLst>
-              </a:tr>
-              <a:tr h="457200">
-                <a:tc>
-                  <a:txBody>
-                    <a:bodyPr/>
-                    <a:lstStyle/>
-                    <a:p>
-                      <a:r>
-                        <a:rPr sz="1300" b="1">
-                          <a:solidFill>
-                            <a:srgbClr val="1F1F1F"/>
-                          </a:solidFill>
-                          <a:latin typeface="Calibri"/>
-                        </a:rPr>
-                        <a:t>Backtracking</a:t>
-                      </a:r>
-                    </a:p>
-                  </a:txBody>
-                  <a:tcPr marL="54864" marR="54864" marT="27432" marB="27432">
-                    <a:solidFill>
-                      <a:srgbClr val="FFFFFF"/>
-                    </a:solidFill>
-                  </a:tcPr>
-                </a:tc>
-                <a:tc>
-                  <a:txBody>
-                    <a:bodyPr/>
-                    <a:lstStyle/>
-                    <a:p>
-                      <a:r>
-                        <a:rPr sz="1300" b="0">
-                          <a:solidFill>
-                            <a:srgbClr val="1F1F1F"/>
-                          </a:solidFill>
-                          <a:latin typeface="Calibri"/>
-                        </a:rPr>
-                        <a:t>% gaps found at the right level</a:t>
-                      </a:r>
-                    </a:p>
-                  </a:txBody>
-                  <a:tcPr marL="54864" marR="54864" marT="27432" marB="27432">
-                    <a:solidFill>
-                      <a:srgbClr val="FFFFFF"/>
-                    </a:solidFill>
-                  </a:tcPr>
-                </a:tc>
-                <a:tc>
-                  <a:txBody>
-                    <a:bodyPr/>
-                    <a:lstStyle/>
-                    <a:p>
-                      <a:r>
-                        <a:rPr sz="1300" b="0">
-                          <a:solidFill>
-                            <a:srgbClr val="1F1F1F"/>
-                          </a:solidFill>
-                          <a:latin typeface="Calibri"/>
-                        </a:rPr>
-                        <a:t>LLM API + system prompt</a:t>
-                      </a:r>
-                    </a:p>
-                  </a:txBody>
-                  <a:tcPr marL="54864" marR="54864" marT="27432" marB="27432">
-                    <a:solidFill>
-                      <a:srgbClr val="FFFFFF"/>
-                    </a:solidFill>
-                  </a:tcPr>
-                </a:tc>
-                <a:tc>
-                  <a:txBody>
-                    <a:bodyPr/>
-                    <a:lstStyle/>
-                    <a:p>
-                      <a:r>
-                        <a:rPr sz="1300" b="0">
-                          <a:solidFill>
-                            <a:srgbClr val="1F1F1F"/>
-                          </a:solidFill>
-                          <a:latin typeface="Calibri"/>
-                        </a:rPr>
-                        <a:t>≥ 85%</a:t>
-                      </a:r>
-                    </a:p>
-                  </a:txBody>
-                  <a:tcPr marL="54864" marR="54864" marT="27432" marB="27432">
-                    <a:solidFill>
-                      <a:srgbClr val="FFFFFF"/>
-                    </a:solidFill>
-                  </a:tcPr>
-                </a:tc>
-                <a:extLst>
-                  <a:ext uri="{0D108BD9-81ED-4DB2-BD59-A6C34878D82A}">
-                    <a16:rowId xmlns:a16="http://schemas.microsoft.com/office/drawing/2014/main" val="10003"/>
-                  </a:ext>
-                </a:extLst>
-              </a:tr>
-              <a:tr h="457200">
-                <a:tc>
-                  <a:txBody>
-                    <a:bodyPr/>
-                    <a:lstStyle/>
-                    <a:p>
-                      <a:r>
-                        <a:rPr sz="1300" b="1">
-                          <a:solidFill>
-                            <a:srgbClr val="1F1F1F"/>
-                          </a:solidFill>
-                          <a:latin typeface="Calibri"/>
-                        </a:rPr>
-                        <a:t>Search</a:t>
-                      </a:r>
-                    </a:p>
-                  </a:txBody>
-                  <a:tcPr marL="54864" marR="54864" marT="27432" marB="27432">
-                    <a:solidFill>
-                      <a:srgbClr val="F4F6F7"/>
-                    </a:solidFill>
-                  </a:tcPr>
-                </a:tc>
-                <a:tc>
-                  <a:txBody>
-                    <a:bodyPr/>
-                    <a:lstStyle/>
-                    <a:p>
-                      <a:r>
-                        <a:rPr sz="1300" b="0">
-                          <a:solidFill>
-                            <a:srgbClr val="1F1F1F"/>
-                          </a:solidFill>
-                          <a:latin typeface="Calibri"/>
-                        </a:rPr>
-                        <a:t>Correct resource in top 5</a:t>
-                      </a:r>
-                    </a:p>
-                  </a:txBody>
-                  <a:tcPr marL="54864" marR="54864" marT="27432" marB="27432">
-                    <a:solidFill>
-                      <a:srgbClr val="F4F6F7"/>
-                    </a:solidFill>
-                  </a:tcPr>
-                </a:tc>
-                <a:tc>
-                  <a:txBody>
-                    <a:bodyPr/>
-                    <a:lstStyle/>
-                    <a:p>
-                      <a:r>
-                        <a:rPr sz="1300" b="0">
-                          <a:solidFill>
-                            <a:srgbClr val="1F1F1F"/>
-                          </a:solidFill>
-                          <a:latin typeface="Calibri"/>
-                        </a:rPr>
-                        <a:t>Keyword search</a:t>
-                      </a:r>
-                    </a:p>
-                  </a:txBody>
-                  <a:tcPr marL="54864" marR="54864" marT="27432" marB="27432">
-                    <a:solidFill>
-                      <a:srgbClr val="F4F6F7"/>
-                    </a:solidFill>
-                  </a:tcPr>
-                </a:tc>
-                <a:tc>
-                  <a:txBody>
-                    <a:bodyPr/>
-                    <a:lstStyle/>
-                    <a:p>
-                      <a:r>
-                        <a:rPr sz="1300" b="0">
-                          <a:solidFill>
-                            <a:srgbClr val="1F1F1F"/>
-                          </a:solidFill>
-                          <a:latin typeface="Calibri"/>
-                        </a:rPr>
-                        <a:t>≥ 0.80</a:t>
-                      </a:r>
-                    </a:p>
-                  </a:txBody>
-                  <a:tcPr marL="54864" marR="54864" marT="27432" marB="27432">
-                    <a:solidFill>
-                      <a:srgbClr val="F4F6F7"/>
-                    </a:solidFill>
-                  </a:tcPr>
-                </a:tc>
-                <a:extLst>
-                  <a:ext uri="{0D108BD9-81ED-4DB2-BD59-A6C34878D82A}">
-                    <a16:rowId xmlns:a16="http://schemas.microsoft.com/office/drawing/2014/main" val="10004"/>
-                  </a:ext>
-                </a:extLst>
-              </a:tr>
-              <a:tr h="457200">
-                <a:tc>
-                  <a:txBody>
-                    <a:bodyPr/>
-                    <a:lstStyle/>
-                    <a:p>
-                      <a:r>
-                        <a:rPr sz="1300" b="1">
-                          <a:solidFill>
-                            <a:srgbClr val="1F1F1F"/>
-                          </a:solidFill>
-                          <a:latin typeface="Calibri"/>
-                        </a:rPr>
-                        <a:t>Full tutor</a:t>
-                      </a:r>
-                    </a:p>
-                  </a:txBody>
-                  <a:tcPr marL="54864" marR="54864" marT="27432" marB="27432">
-                    <a:solidFill>
-                      <a:srgbClr val="FFFFFF"/>
-                    </a:solidFill>
-                  </a:tcPr>
-                </a:tc>
-                <a:tc>
-                  <a:txBody>
-                    <a:bodyPr/>
-                    <a:lstStyle/>
-                    <a:p>
-                      <a:r>
-                        <a:rPr sz="1300" b="0">
-                          <a:solidFill>
-                            <a:srgbClr val="1F1F1F"/>
-                          </a:solidFill>
-                          <a:latin typeface="Calibri"/>
-                        </a:rPr>
-                        <a:t>% test scenarios handled</a:t>
-                      </a:r>
-                    </a:p>
-                  </a:txBody>
-                  <a:tcPr marL="54864" marR="54864" marT="27432" marB="27432">
-                    <a:solidFill>
-                      <a:srgbClr val="FFFFFF"/>
-                    </a:solidFill>
-                  </a:tcPr>
-                </a:tc>
-                <a:tc>
-                  <a:txBody>
-                    <a:bodyPr/>
-                    <a:lstStyle/>
-                    <a:p>
-                      <a:r>
-                        <a:rPr sz="1300" b="0">
-                          <a:solidFill>
-                            <a:srgbClr val="1F1F1F"/>
-                          </a:solidFill>
-                          <a:latin typeface="Calibri"/>
-                        </a:rPr>
-                        <a:t>Fixed rules; LLM API + system prompt</a:t>
-                      </a:r>
-                    </a:p>
-                  </a:txBody>
-                  <a:tcPr marL="54864" marR="54864" marT="27432" marB="27432">
-                    <a:solidFill>
-                      <a:srgbClr val="FFFFFF"/>
-                    </a:solidFill>
-                  </a:tcPr>
-                </a:tc>
-                <a:tc>
-                  <a:txBody>
-                    <a:bodyPr/>
-                    <a:lstStyle/>
-                    <a:p>
-                      <a:r>
-                        <a:rPr sz="1300" b="0">
-                          <a:solidFill>
-                            <a:srgbClr val="1F1F1F"/>
-                          </a:solidFill>
-                          <a:latin typeface="Calibri"/>
-                        </a:rPr>
-                        <a:t>≥ 90%</a:t>
-                      </a:r>
-                    </a:p>
-                  </a:txBody>
-                  <a:tcPr marL="54864" marR="54864" marT="27432" marB="27432">
-                    <a:solidFill>
-                      <a:srgbClr val="FFFFFF"/>
-                    </a:solidFill>
-                  </a:tcPr>
-                </a:tc>
-                <a:extLst>
-                  <a:ext uri="{0D108BD9-81ED-4DB2-BD59-A6C34878D82A}">
-                    <a16:rowId xmlns:a16="http://schemas.microsoft.com/office/drawing/2014/main" val="10005"/>
-                  </a:ext>
-                </a:extLst>
-              </a:tr>
-            </a:tbl>
-          </a:graphicData>
-        </a:graphic>
-      </p:graphicFrame>
-      <p:sp>
-        <p:nvSpPr>
-          <p:cNvPr id="7" name="TextBox 6"/>
-          <p:cNvSpPr txBox="1"/>
-          <p:nvPr/>
-        </p:nvSpPr>
-        <p:spPr>
-          <a:xfrm>
-            <a:off x="548640" y="4160520"/>
-            <a:ext cx="11064240" cy="411480"/>
-          </a:xfrm>
-          <a:prstGeom prst="rect">
-            <a:avLst/>
-          </a:prstGeom>
-          <a:noFill/>
-        </p:spPr>
-        <p:txBody>
-          <a:bodyPr wrap="square" lIns="45720" rIns="45720" anchor="t">
-            <a:spAutoFit/>
-          </a:bodyPr>
-          <a:lstStyle/>
-          <a:p>
-            <a:pPr algn="l">
-              <a:spcAft>
-                <a:spcPts val="400"/>
-              </a:spcAft>
-            </a:pPr>
-            <a:r>
-              <a:rPr sz="1800" b="1">
-                <a:solidFill>
-                  <a:srgbClr val="0F7C8C"/>
-                </a:solidFill>
-                <a:latin typeface="Calibri"/>
-              </a:rPr>
-              <a:t>How we will evaluate</a:t>
-            </a:r>
-          </a:p>
-        </p:txBody>
-      </p:sp>
-      <p:sp>
-        <p:nvSpPr>
-          <p:cNvPr id="8" name="TextBox 7"/>
-          <p:cNvSpPr txBox="1"/>
-          <p:nvPr/>
-        </p:nvSpPr>
-        <p:spPr>
-          <a:xfrm>
-            <a:off x="548640" y="4617720"/>
-            <a:ext cx="11064240" cy="1737360"/>
-          </a:xfrm>
-          <a:prstGeom prst="rect">
-            <a:avLst/>
-          </a:prstGeom>
-          <a:noFill/>
-        </p:spPr>
-        <p:txBody>
-          <a:bodyPr wrap="square" lIns="45720" rIns="45720" anchor="t">
-            <a:spAutoFit/>
-          </a:bodyPr>
-          <a:lstStyle/>
-          <a:p>
-            <a:pPr algn="l">
-              <a:spcAft>
-                <a:spcPts val="800"/>
-              </a:spcAft>
-            </a:pPr>
-            <a:r>
-              <a:rPr sz="1500" b="0">
-                <a:solidFill>
-                  <a:srgbClr val="1F1F1F"/>
-                </a:solidFill>
-                <a:latin typeface="Calibri"/>
-              </a:rPr>
-              <a:t>•  60–100 annotated NCERT scenarios (careless slip, gap 1 level down, gap 2 levels down…) + any provided test samples</a:t>
-            </a:r>
-          </a:p>
-          <a:p>
-            <a:pPr algn="l">
-              <a:spcAft>
-                <a:spcPts val="800"/>
-              </a:spcAft>
-            </a:pPr>
-            <a:r>
-              <a:rPr sz="1500" b="0">
-                <a:solidFill>
-                  <a:srgbClr val="1F1F1F"/>
-                </a:solidFill>
-                <a:latin typeface="Calibri"/>
-              </a:rPr>
-              <a:t>•  Compare: direct-answer chatbot vs LLM API with Socratic prompt vs our tutor; also vs published research numbers</a:t>
-            </a:r>
-          </a:p>
-          <a:p>
-            <a:pPr algn="l">
-              <a:spcAft>
-                <a:spcPts val="800"/>
-              </a:spcAft>
-            </a:pPr>
-            <a:r>
-              <a:rPr sz="1500" b="0">
-                <a:solidFill>
-                  <a:srgbClr val="1F1F1F"/>
-                </a:solidFill>
-                <a:latin typeface="Calibri"/>
-              </a:rPr>
-              <a:t>•  Same tests on the NCERT and IITM BS course packs, with no code changes</a:t>
-            </a:r>
-          </a:p>
-        </p:txBody>
-      </p:sp>
-    </p:spTree>
-  </p:cSld>
-  <p:clrMapOvr>
-    <a:masterClrMapping/>
-  </p:clrMapOvr>
-</p:sld>
-</file>
-
-<file path=ppt/slides/slide9.xml><?xml version="1.0" encoding="utf-8"?>
-<p:sld xmlns:a="http://schemas.openxmlformats.org/drawingml/2006/main" xmlns:r="http://schemas.openxmlformats.org/officeDocument/2006/relationships" xmlns:p="http://schemas.openxmlformats.org/presentationml/2006/main">
-  <p:cSld>
-    <p:spTree>
-      <p:nvGrpSpPr>
-        <p:cNvPr id="1" name=""/>
-        <p:cNvGrpSpPr/>
-        <p:nvPr/>
-      </p:nvGrpSpPr>
-      <p:grpSpPr>
-        <a:xfrm>
-          <a:off x="0" y="0"/>
-          <a:ext cx="0" cy="0"/>
-          <a:chOff x="0" y="0"/>
-          <a:chExt cx="0" cy="0"/>
-        </a:xfrm>
-      </p:grpSpPr>
-      <p:sp>
-        <p:nvSpPr>
-          <p:cNvPr id="2" name="Rectangle 1"/>
-          <p:cNvSpPr/>
-          <p:nvPr/>
-        </p:nvSpPr>
-        <p:spPr>
-          <a:xfrm>
-            <a:off x="0" y="0"/>
-            <a:ext cx="12191695" cy="109728"/>
-          </a:xfrm>
-          <a:prstGeom prst="rect">
-            <a:avLst/>
-          </a:prstGeom>
-          <a:solidFill>
-            <a:srgbClr val="0F7C8C"/>
-          </a:solidFill>
-          <a:ln>
-            <a:noFill/>
-          </a:ln>
-          <a:effectLst/>
-        </p:spPr>
-        <p:style>
-          <a:lnRef idx="1">
-            <a:schemeClr val="accent1"/>
-          </a:lnRef>
-          <a:fillRef idx="3">
-            <a:schemeClr val="accent1"/>
-          </a:fillRef>
-          <a:effectRef idx="2">
-            <a:schemeClr val="accent1"/>
-          </a:effectRef>
-          <a:fontRef idx="minor">
-            <a:schemeClr val="lt1"/>
-          </a:fontRef>
-        </p:style>
-        <p:txBody>
-          <a:bodyPr rtlCol="0" anchor="ctr"/>
-          <a:lstStyle/>
-          <a:p>
-            <a:pPr algn="ctr"/>
-            <a:endParaRPr/>
-          </a:p>
-        </p:txBody>
-      </p:sp>
-      <p:sp>
-        <p:nvSpPr>
-          <p:cNvPr id="3" name="TextBox 2"/>
-          <p:cNvSpPr txBox="1"/>
-          <p:nvPr/>
-        </p:nvSpPr>
-        <p:spPr>
-          <a:xfrm>
-            <a:off x="548640" y="320040"/>
-            <a:ext cx="11064240" cy="640080"/>
-          </a:xfrm>
-          <a:prstGeom prst="rect">
-            <a:avLst/>
-          </a:prstGeom>
-          <a:noFill/>
-        </p:spPr>
-        <p:txBody>
-          <a:bodyPr wrap="square" lIns="45720" rIns="45720" anchor="t">
-            <a:spAutoFit/>
-          </a:bodyPr>
-          <a:lstStyle/>
-          <a:p>
-            <a:pPr algn="l">
-              <a:spcAft>
-                <a:spcPts val="400"/>
-              </a:spcAft>
-            </a:pPr>
-            <a:r>
-              <a:rPr sz="3000" b="1">
-                <a:solidFill>
-                  <a:srgbClr val="1B364B"/>
-                </a:solidFill>
-                <a:latin typeface="Calibri"/>
-              </a:rPr>
-              <a:t>Expected output (mock-up)</a:t>
-            </a:r>
-          </a:p>
-        </p:txBody>
-      </p:sp>
-      <p:sp>
-        <p:nvSpPr>
-          <p:cNvPr id="4" name="TextBox 3"/>
-          <p:cNvSpPr txBox="1"/>
-          <p:nvPr/>
-        </p:nvSpPr>
-        <p:spPr>
-          <a:xfrm>
-            <a:off x="548640" y="6400800"/>
-            <a:ext cx="8229600" cy="320040"/>
-          </a:xfrm>
-          <a:prstGeom prst="rect">
-            <a:avLst/>
-          </a:prstGeom>
-          <a:noFill/>
-        </p:spPr>
-        <p:txBody>
-          <a:bodyPr wrap="square" lIns="45720" rIns="45720" anchor="t">
-            <a:spAutoFit/>
-          </a:bodyPr>
-          <a:lstStyle/>
-          <a:p>
-            <a:pPr algn="l">
-              <a:spcAft>
-                <a:spcPts val="400"/>
-              </a:spcAft>
-            </a:pPr>
-            <a:r>
-              <a:rPr sz="1000" b="0">
-                <a:solidFill>
-                  <a:srgbClr val="555555"/>
-                </a:solidFill>
-                <a:latin typeface="Calibri"/>
-              </a:rPr>
-              <a:t>Group 2 · Socratic AI Tutor · Milestone 1</a:t>
-            </a:r>
-          </a:p>
-        </p:txBody>
-      </p:sp>
-      <p:sp>
-        <p:nvSpPr>
-          <p:cNvPr id="5" name="TextBox 4"/>
-          <p:cNvSpPr txBox="1"/>
-          <p:nvPr/>
-        </p:nvSpPr>
-        <p:spPr>
-          <a:xfrm>
-            <a:off x="10698480" y="6400800"/>
-            <a:ext cx="914400" cy="320040"/>
-          </a:xfrm>
-          <a:prstGeom prst="rect">
-            <a:avLst/>
-          </a:prstGeom>
-          <a:noFill/>
-        </p:spPr>
-        <p:txBody>
-          <a:bodyPr wrap="square" lIns="45720" rIns="45720" anchor="t">
-            <a:spAutoFit/>
-          </a:bodyPr>
-          <a:lstStyle/>
-          <a:p>
-            <a:pPr algn="r">
-              <a:spcAft>
-                <a:spcPts val="400"/>
-              </a:spcAft>
-            </a:pPr>
-            <a:r>
-              <a:rPr sz="1000" b="0">
-                <a:solidFill>
-                  <a:srgbClr val="555555"/>
-                </a:solidFill>
-                <a:latin typeface="Calibri"/>
-              </a:rPr>
-              <a:t>9 / 10</a:t>
-            </a:r>
-          </a:p>
-        </p:txBody>
-      </p:sp>
-      <p:sp>
-        <p:nvSpPr>
-          <p:cNvPr id="6" name="Rounded Rectangle 5"/>
-          <p:cNvSpPr/>
-          <p:nvPr/>
-        </p:nvSpPr>
-        <p:spPr>
-          <a:xfrm>
-            <a:off x="548640" y="1143000"/>
-            <a:ext cx="6766560" cy="3566160"/>
-          </a:xfrm>
-          <a:prstGeom prst="roundRect">
-            <a:avLst>
-              <a:gd name="adj" fmla="val 8000"/>
-            </a:avLst>
-          </a:prstGeom>
-          <a:solidFill>
-            <a:srgbClr val="FFFFFF"/>
-          </a:solidFill>
-          <a:ln>
-            <a:solidFill>
-              <a:srgbClr val="0F7C8C"/>
-            </a:solidFill>
-          </a:ln>
-          <a:effectLst/>
-        </p:spPr>
-        <p:style>
-          <a:lnRef idx="1">
-            <a:schemeClr val="accent1"/>
-          </a:lnRef>
-          <a:fillRef idx="3">
-            <a:schemeClr val="accent1"/>
-          </a:fillRef>
-          <a:effectRef idx="2">
-            <a:schemeClr val="accent1"/>
-          </a:effectRef>
-          <a:fontRef idx="minor">
-            <a:schemeClr val="lt1"/>
-          </a:fontRef>
-        </p:style>
-        <p:txBody>
-          <a:bodyPr rtlCol="0" anchor="ctr"/>
-          <a:lstStyle/>
-          <a:p>
-            <a:pPr algn="ctr"/>
-            <a:endParaRPr/>
-          </a:p>
-        </p:txBody>
-      </p:sp>
-      <p:sp>
-        <p:nvSpPr>
-          <p:cNvPr id="7" name="TextBox 6"/>
-          <p:cNvSpPr txBox="1"/>
-          <p:nvPr/>
-        </p:nvSpPr>
-        <p:spPr>
-          <a:xfrm>
-            <a:off x="685800" y="1188720"/>
-            <a:ext cx="6583680" cy="3595856"/>
-          </a:xfrm>
-          <a:prstGeom prst="rect">
-            <a:avLst/>
-          </a:prstGeom>
-          <a:noFill/>
-        </p:spPr>
-        <p:txBody>
-          <a:bodyPr wrap="square" lIns="45720" rIns="45720" anchor="t">
-            <a:spAutoFit/>
-          </a:bodyPr>
-          <a:lstStyle/>
-          <a:p>
-            <a:pPr algn="l">
-              <a:spcAft>
-                <a:spcPts val="400"/>
-              </a:spcAft>
-            </a:pPr>
-            <a:r>
-              <a:rPr sz="1300" b="1" dirty="0">
-                <a:solidFill>
-                  <a:srgbClr val="1B364B"/>
-                </a:solidFill>
-                <a:latin typeface="Calibri"/>
-              </a:rPr>
-              <a:t>Learner: What is 20% of 50?  My answer: 2.5</a:t>
-            </a:r>
-          </a:p>
-          <a:p>
-            <a:pPr algn="l">
-              <a:spcAft>
-                <a:spcPts val="400"/>
-              </a:spcAft>
-            </a:pPr>
-            <a:r>
-              <a:rPr sz="1200" b="0" dirty="0">
-                <a:solidFill>
-                  <a:srgbClr val="1F1F1F"/>
-                </a:solidFill>
-                <a:latin typeface="Calibri"/>
-              </a:rPr>
-              <a:t>Tutor: What does 20% mean: 20 out of how many?   Learner: 100 ✓</a:t>
-            </a:r>
-          </a:p>
-          <a:p>
-            <a:pPr algn="l">
-              <a:spcAft>
-                <a:spcPts val="400"/>
-              </a:spcAft>
-            </a:pPr>
-            <a:r>
-              <a:rPr sz="1200" b="0" dirty="0">
-                <a:solidFill>
-                  <a:srgbClr val="1F1F1F"/>
-                </a:solidFill>
-                <a:latin typeface="Calibri"/>
-              </a:rPr>
-              <a:t>Tutor: So 20% = 20/100. Simplest form?   Learner: I don’t know</a:t>
-            </a:r>
-          </a:p>
-          <a:p>
-            <a:pPr algn="l">
-              <a:spcAft>
-                <a:spcPts val="400"/>
-              </a:spcAft>
-            </a:pPr>
-            <a:r>
-              <a:rPr sz="1200" b="0" dirty="0">
-                <a:solidFill>
-                  <a:srgbClr val="0F7C8C"/>
-                </a:solidFill>
-                <a:latin typeface="Calibri"/>
-              </a:rPr>
-              <a:t>[gap at Level 2 → checking division]</a:t>
-            </a:r>
-          </a:p>
-          <a:p>
-            <a:pPr algn="l">
-              <a:spcAft>
-                <a:spcPts val="400"/>
-              </a:spcAft>
-            </a:pPr>
-            <a:r>
-              <a:rPr sz="1200" b="0" dirty="0">
-                <a:solidFill>
-                  <a:srgbClr val="1F1F1F"/>
-                </a:solidFill>
-                <a:latin typeface="Calibri"/>
-              </a:rPr>
-              <a:t>Tutor: What is 100 ÷ 20?   </a:t>
-            </a:r>
-            <a:endParaRPr lang="en-US" sz="1200" b="0" dirty="0">
-              <a:solidFill>
-                <a:srgbClr val="1F1F1F"/>
-              </a:solidFill>
-              <a:latin typeface="Calibri"/>
-            </a:endParaRPr>
-          </a:p>
-          <a:p>
-            <a:pPr algn="l">
-              <a:spcAft>
-                <a:spcPts val="400"/>
-              </a:spcAft>
-            </a:pPr>
-            <a:r>
-              <a:rPr sz="1200" b="0" dirty="0">
-                <a:solidFill>
-                  <a:srgbClr val="1F1F1F"/>
-                </a:solidFill>
-                <a:latin typeface="Calibri"/>
-              </a:rPr>
-              <a:t>Learner: 5 ✓</a:t>
-            </a:r>
-          </a:p>
-          <a:p>
-            <a:pPr algn="l">
-              <a:spcAft>
-                <a:spcPts val="400"/>
-              </a:spcAft>
-            </a:pPr>
-            <a:r>
-              <a:rPr sz="1200" b="0" dirty="0">
-                <a:solidFill>
-                  <a:srgbClr val="1F1F1F"/>
-                </a:solidFill>
-                <a:latin typeface="Calibri"/>
-              </a:rPr>
-              <a:t>Tutor: So 20/100 = 1/5. What is 1/5 of 50?  Hint: 5 equal groups 📖</a:t>
-            </a:r>
-          </a:p>
-          <a:p>
-            <a:pPr algn="l">
-              <a:spcAft>
-                <a:spcPts val="400"/>
-              </a:spcAft>
-            </a:pPr>
-            <a:r>
-              <a:rPr sz="1200" b="0" dirty="0">
-                <a:solidFill>
-                  <a:srgbClr val="1F1F1F"/>
-                </a:solidFill>
-                <a:latin typeface="Calibri"/>
-              </a:rPr>
-              <a:t>Learner: 10 ✓      </a:t>
-            </a:r>
-            <a:endParaRPr lang="en-US" sz="1200" b="0" dirty="0">
-              <a:solidFill>
-                <a:srgbClr val="1F1F1F"/>
-              </a:solidFill>
-              <a:latin typeface="Calibri"/>
-            </a:endParaRPr>
-          </a:p>
-          <a:p>
-            <a:pPr algn="l">
-              <a:spcAft>
-                <a:spcPts val="400"/>
-              </a:spcAft>
-            </a:pPr>
-            <a:r>
-              <a:rPr sz="1200" b="0" dirty="0">
-                <a:solidFill>
-                  <a:srgbClr val="1F1F1F"/>
-                </a:solidFill>
-                <a:latin typeface="Calibri"/>
-              </a:rPr>
-              <a:t>Tutor: And 1/4 of 20?  </a:t>
-            </a:r>
-            <a:endParaRPr lang="en-US" sz="1200" b="0" dirty="0">
-              <a:solidFill>
-                <a:srgbClr val="1F1F1F"/>
-              </a:solidFill>
-              <a:latin typeface="Calibri"/>
-            </a:endParaRPr>
-          </a:p>
-          <a:p>
-            <a:pPr algn="l">
-              <a:spcAft>
-                <a:spcPts val="400"/>
-              </a:spcAft>
-            </a:pPr>
-            <a:r>
-              <a:rPr sz="1200" b="0" dirty="0">
-                <a:solidFill>
-                  <a:srgbClr val="1F1F1F"/>
-                </a:solidFill>
-                <a:latin typeface="Calibri"/>
-              </a:rPr>
-              <a:t>Learner: 5 ✓</a:t>
-            </a:r>
-          </a:p>
-          <a:p>
-            <a:pPr algn="l">
-              <a:spcAft>
-                <a:spcPts val="400"/>
-              </a:spcAft>
-            </a:pPr>
-            <a:r>
-              <a:rPr sz="1200" b="0" dirty="0">
-                <a:solidFill>
-                  <a:srgbClr val="0F7C8C"/>
-                </a:solidFill>
-                <a:latin typeface="Calibri"/>
-              </a:rPr>
-              <a:t>[back to Level 3]</a:t>
-            </a:r>
-          </a:p>
-          <a:p>
-            <a:pPr algn="l">
-              <a:spcAft>
-                <a:spcPts val="400"/>
-              </a:spcAft>
-            </a:pPr>
-            <a:r>
-              <a:rPr sz="1200" b="1" dirty="0">
-                <a:solidFill>
-                  <a:srgbClr val="1F1F1F"/>
-                </a:solidFill>
-                <a:latin typeface="Calibri"/>
-              </a:rPr>
-              <a:t>Tutor: Try again: 20% of 50?   </a:t>
-            </a:r>
-            <a:endParaRPr lang="en-US" sz="1200" b="1" dirty="0">
-              <a:solidFill>
-                <a:srgbClr val="1F1F1F"/>
-              </a:solidFill>
-              <a:latin typeface="Calibri"/>
-            </a:endParaRPr>
-          </a:p>
-          <a:p>
-            <a:pPr algn="l">
-              <a:spcAft>
-                <a:spcPts val="400"/>
-              </a:spcAft>
-            </a:pPr>
-            <a:r>
-              <a:rPr sz="1200" b="1" dirty="0">
-                <a:solidFill>
-                  <a:srgbClr val="1F1F1F"/>
-                </a:solidFill>
-                <a:latin typeface="Calibri"/>
-              </a:rPr>
-              <a:t>Learner: 10 ✓</a:t>
-            </a:r>
-          </a:p>
-          <a:p>
-            <a:pPr algn="l">
-              <a:spcAft>
-                <a:spcPts val="400"/>
-              </a:spcAft>
-            </a:pPr>
-            <a:r>
-              <a:rPr sz="1200" b="0" dirty="0">
-                <a:solidFill>
-                  <a:srgbClr val="1F1F1F"/>
-                </a:solidFill>
-                <a:latin typeface="Calibri"/>
-              </a:rPr>
-              <a:t>Tutor: Earlier you divided 50 by 20; a percentage means “out of 100”.</a:t>
-            </a:r>
-          </a:p>
-          <a:p>
-            <a:pPr algn="l">
-              <a:spcAft>
-                <a:spcPts val="400"/>
-              </a:spcAft>
-            </a:pPr>
-            <a:r>
-              <a:rPr sz="1200" b="0" dirty="0">
-                <a:solidFill>
-                  <a:srgbClr val="1F1F1F"/>
-                </a:solidFill>
-                <a:latin typeface="Calibri"/>
-              </a:rPr>
-              <a:t>Next: 15% of 60?</a:t>
-            </a:r>
-          </a:p>
-        </p:txBody>
-      </p:sp>
-      <p:sp>
-        <p:nvSpPr>
-          <p:cNvPr id="10" name="TextBox 9"/>
-          <p:cNvSpPr txBox="1"/>
-          <p:nvPr/>
-        </p:nvSpPr>
-        <p:spPr>
-          <a:xfrm>
-            <a:off x="7620000" y="1371600"/>
-            <a:ext cx="4023360" cy="411480"/>
-          </a:xfrm>
-          <a:prstGeom prst="rect">
-            <a:avLst/>
-          </a:prstGeom>
-          <a:noFill/>
-        </p:spPr>
-        <p:txBody>
-          <a:bodyPr wrap="square" lIns="45720" rIns="45720" anchor="t">
-            <a:spAutoFit/>
-          </a:bodyPr>
-          <a:lstStyle/>
-          <a:p>
-            <a:pPr algn="l">
-              <a:spcAft>
-                <a:spcPts val="400"/>
-              </a:spcAft>
-            </a:pPr>
-            <a:r>
-              <a:rPr sz="1600" b="1" dirty="0">
-                <a:solidFill>
-                  <a:srgbClr val="0F7C8C"/>
-                </a:solidFill>
-                <a:latin typeface="Calibri"/>
-              </a:rPr>
-              <a:t>LLM API vs our tutor</a:t>
-            </a:r>
-          </a:p>
-        </p:txBody>
-      </p:sp>
-      <p:sp>
-        <p:nvSpPr>
-          <p:cNvPr id="11" name="TextBox 10"/>
-          <p:cNvSpPr txBox="1"/>
-          <p:nvPr/>
-        </p:nvSpPr>
-        <p:spPr>
-          <a:xfrm>
-            <a:off x="7620000" y="1851660"/>
-            <a:ext cx="4023360" cy="1828800"/>
-          </a:xfrm>
-          <a:prstGeom prst="rect">
-            <a:avLst/>
-          </a:prstGeom>
-          <a:noFill/>
-        </p:spPr>
-        <p:txBody>
-          <a:bodyPr wrap="square" lIns="45720" rIns="45720" anchor="t">
-            <a:spAutoFit/>
-          </a:bodyPr>
-          <a:lstStyle/>
-          <a:p>
-            <a:pPr algn="l">
-              <a:spcAft>
-                <a:spcPts val="400"/>
-              </a:spcAft>
-            </a:pPr>
-            <a:r>
-              <a:rPr sz="1300" b="0" dirty="0">
-                <a:solidFill>
-                  <a:srgbClr val="1F1F1F"/>
-                </a:solidFill>
-                <a:latin typeface="Calibri"/>
-              </a:rPr>
-              <a:t>API + prompt: “20/100 × 50 = 10.” Answer revealed; gap not found.</a:t>
-            </a:r>
-          </a:p>
-          <a:p>
-            <a:pPr algn="l">
-              <a:spcAft>
-                <a:spcPts val="400"/>
-              </a:spcAft>
-            </a:pPr>
-            <a:r>
-              <a:rPr sz="1300" b="1" dirty="0">
-                <a:solidFill>
-                  <a:srgbClr val="1F1F1F"/>
-                </a:solidFill>
-                <a:latin typeface="Calibri"/>
-              </a:rPr>
-              <a:t>Ours: finds the fraction gap, </a:t>
-            </a:r>
-            <a:r>
-              <a:rPr sz="1300" b="1" dirty="0" err="1">
-                <a:solidFill>
-                  <a:srgbClr val="1F1F1F"/>
-                </a:solidFill>
-                <a:latin typeface="Calibri"/>
-              </a:rPr>
-              <a:t>practises</a:t>
-            </a:r>
-            <a:r>
-              <a:rPr sz="1300" b="1" dirty="0">
-                <a:solidFill>
-                  <a:srgbClr val="1F1F1F"/>
-                </a:solidFill>
-                <a:latin typeface="Calibri"/>
-              </a:rPr>
-              <a:t> Level 2, returns to Level 3; learner finds 10.</a:t>
             </a:r>
           </a:p>
         </p:txBody>
